--- a/sendacredit_propuesta.pptx
+++ b/sendacredit_propuesta.pptx
@@ -3158,7 +3158,7 @@
           </a:prstGeom>
           <a:solidFill>
             <a:srgbClr val="060E24">
-              <a:alpha val="74000"/>
+              <a:alpha val="42000"/>
             </a:srgbClr>
           </a:solidFill>
           <a:ln>
@@ -3383,7 +3383,7 @@
             <a:r>
               <a:rPr sz="2200">
                 <a:solidFill>
-                  <a:srgbClr val="ADD8E6"/>
+                  <a:srgbClr val="C8E8FF"/>
                 </a:solidFill>
               </a:rPr>
               <a:t>ID Finance</a:t>
@@ -3520,7 +3520,7 @@
           </a:prstGeom>
           <a:solidFill>
             <a:srgbClr val="060E24">
-              <a:alpha val="84000"/>
+              <a:alpha val="50000"/>
             </a:srgbClr>
           </a:solidFill>
           <a:ln>
@@ -3810,11 +3810,11 @@
             <a:avLst/>
           </a:prstGeom>
           <a:solidFill>
-            <a:srgbClr val="0E1E4A"/>
+            <a:srgbClr val="162A68"/>
           </a:solidFill>
           <a:ln w="9525">
             <a:solidFill>
-              <a:srgbClr val="2A4288"/>
+              <a:srgbClr val="4A68B8"/>
             </a:solidFill>
           </a:ln>
         </p:spPr>
@@ -4077,7 +4077,7 @@
             <a:r>
               <a:rPr sz="750">
                 <a:solidFill>
-                  <a:srgbClr val="CCD8EC"/>
+                  <a:srgbClr val="E4EEFF"/>
                 </a:solidFill>
               </a:rPr>
               <a:t>Integración vía SFTP seguro o API REST</a:t>
@@ -4100,7 +4100,7 @@
             <a:r>
               <a:rPr sz="750">
                 <a:solidFill>
-                  <a:srgbClr val="CCD8EC"/>
+                  <a:srgbClr val="E4EEFF"/>
                 </a:solidFill>
               </a:rPr>
               <a:t>Formatos: CSV, Excel, XML, JSON</a:t>
@@ -4123,7 +4123,7 @@
             <a:r>
               <a:rPr sz="750">
                 <a:solidFill>
-                  <a:srgbClr val="CCD8EC"/>
+                  <a:srgbClr val="E4EEFF"/>
                 </a:solidFill>
               </a:rPr>
               <a:t>Hasta 100.000 registros por lote</a:t>
@@ -4146,7 +4146,7 @@
             <a:r>
               <a:rPr sz="750">
                 <a:solidFill>
-                  <a:srgbClr val="CCD8EC"/>
+                  <a:srgbClr val="E4EEFF"/>
                 </a:solidFill>
               </a:rPr>
               <a:t>Acuse con hash de integridad automático</a:t>
@@ -4169,11 +4169,11 @@
             <a:avLst/>
           </a:prstGeom>
           <a:solidFill>
-            <a:srgbClr val="0E1E4A"/>
+            <a:srgbClr val="162A68"/>
           </a:solidFill>
           <a:ln w="9525">
             <a:solidFill>
-              <a:srgbClr val="2A4288"/>
+              <a:srgbClr val="4A68B8"/>
             </a:solidFill>
           </a:ln>
         </p:spPr>
@@ -4436,7 +4436,7 @@
             <a:r>
               <a:rPr sz="750">
                 <a:solidFill>
-                  <a:srgbClr val="CCD8EC"/>
+                  <a:srgbClr val="E4EEFF"/>
                 </a:solidFill>
               </a:rPr>
               <a:t>Deduplicación y normalización de datos</a:t>
@@ -4459,7 +4459,7 @@
             <a:r>
               <a:rPr sz="750">
                 <a:solidFill>
-                  <a:srgbClr val="CCD8EC"/>
+                  <a:srgbClr val="E4EEFF"/>
                 </a:solidFill>
               </a:rPr>
               <a:t>Verificación de DNI/NIE y datos civiles</a:t>
@@ -4482,7 +4482,7 @@
             <a:r>
               <a:rPr sz="750">
                 <a:solidFill>
-                  <a:srgbClr val="CCD8EC"/>
+                  <a:srgbClr val="E4EEFF"/>
                 </a:solidFill>
               </a:rPr>
               <a:t>Actualización de contactos (ASNEF, GGSS)</a:t>
@@ -4505,7 +4505,7 @@
             <a:r>
               <a:rPr sz="750">
                 <a:solidFill>
-                  <a:srgbClr val="CCD8EC"/>
+                  <a:srgbClr val="E4EEFF"/>
                 </a:solidFill>
               </a:rPr>
               <a:t>Informe de calidad de cartera en 24 h</a:t>
@@ -4528,11 +4528,11 @@
             <a:avLst/>
           </a:prstGeom>
           <a:solidFill>
-            <a:srgbClr val="0E1E4A"/>
+            <a:srgbClr val="162A68"/>
           </a:solidFill>
           <a:ln w="9525">
             <a:solidFill>
-              <a:srgbClr val="2A4288"/>
+              <a:srgbClr val="4A68B8"/>
             </a:solidFill>
           </a:ln>
         </p:spPr>
@@ -4795,7 +4795,7 @@
             <a:r>
               <a:rPr sz="750">
                 <a:solidFill>
-                  <a:srgbClr val="CCD8EC"/>
+                  <a:srgbClr val="E4EEFF"/>
                 </a:solidFill>
               </a:rPr>
               <a:t>Clasificación por antigüedad e importe</a:t>
@@ -4818,7 +4818,7 @@
             <a:r>
               <a:rPr sz="750">
                 <a:solidFill>
-                  <a:srgbClr val="CCD8EC"/>
+                  <a:srgbClr val="E4EEFF"/>
                 </a:solidFill>
               </a:rPr>
               <a:t>Scoring de cobrabilidad con modelo ML</a:t>
@@ -4841,7 +4841,7 @@
             <a:r>
               <a:rPr sz="750">
                 <a:solidFill>
-                  <a:srgbClr val="CCD8EC"/>
+                  <a:srgbClr val="E4EEFF"/>
                 </a:solidFill>
               </a:rPr>
               <a:t>Asignación de canal de recobro óptimo</a:t>
@@ -4864,7 +4864,7 @@
             <a:r>
               <a:rPr sz="750">
                 <a:solidFill>
-                  <a:srgbClr val="CCD8EC"/>
+                  <a:srgbClr val="E4EEFF"/>
                 </a:solidFill>
               </a:rPr>
               <a:t>Priorización por rentabilidad esperada</a:t>
@@ -4933,7 +4933,7 @@
           </a:prstGeom>
           <a:solidFill>
             <a:srgbClr val="060E24">
-              <a:alpha val="84000"/>
+              <a:alpha val="50000"/>
             </a:srgbClr>
           </a:solidFill>
           <a:ln>
@@ -5223,11 +5223,11 @@
             <a:avLst/>
           </a:prstGeom>
           <a:solidFill>
-            <a:srgbClr val="0E1E4A"/>
+            <a:srgbClr val="162A68"/>
           </a:solidFill>
           <a:ln w="9525">
             <a:solidFill>
-              <a:srgbClr val="2A4288"/>
+              <a:srgbClr val="4A68B8"/>
             </a:solidFill>
           </a:ln>
         </p:spPr>
@@ -5490,7 +5490,7 @@
             <a:r>
               <a:rPr sz="750">
                 <a:solidFill>
-                  <a:srgbClr val="CCD8EC"/>
+                  <a:srgbClr val="E4EEFF"/>
                 </a:solidFill>
               </a:rPr>
               <a:t>Llamadas outbound con IVR especializado</a:t>
@@ -5513,7 +5513,7 @@
             <a:r>
               <a:rPr sz="750">
                 <a:solidFill>
-                  <a:srgbClr val="CCD8EC"/>
+                  <a:srgbClr val="E4EEFF"/>
                 </a:solidFill>
               </a:rPr>
               <a:t>SMS, email y WhatsApp Business certificado</a:t>
@@ -5536,7 +5536,7 @@
             <a:r>
               <a:rPr sz="750">
                 <a:solidFill>
-                  <a:srgbClr val="CCD8EC"/>
+                  <a:srgbClr val="E4EEFF"/>
                 </a:solidFill>
               </a:rPr>
               <a:t>Cartas físicas certificadas cuando procede</a:t>
@@ -5559,7 +5559,7 @@
             <a:r>
               <a:rPr sz="750">
                 <a:solidFill>
-                  <a:srgbClr val="CCD8EC"/>
+                  <a:srgbClr val="E4EEFF"/>
                 </a:solidFill>
               </a:rPr>
               <a:t>Ventana de contacto 8:00-22:00, L-S</a:t>
@@ -5582,11 +5582,11 @@
             <a:avLst/>
           </a:prstGeom>
           <a:solidFill>
-            <a:srgbClr val="0E1E4A"/>
+            <a:srgbClr val="162A68"/>
           </a:solidFill>
           <a:ln w="9525">
             <a:solidFill>
-              <a:srgbClr val="2A4288"/>
+              <a:srgbClr val="4A68B8"/>
             </a:solidFill>
           </a:ln>
         </p:spPr>
@@ -5849,7 +5849,7 @@
             <a:r>
               <a:rPr sz="750">
                 <a:solidFill>
-                  <a:srgbClr val="CCD8EC"/>
+                  <a:srgbClr val="E4EEFF"/>
                 </a:solidFill>
               </a:rPr>
               <a:t>Quitas y daciones dentro de límites pactados</a:t>
@@ -5872,7 +5872,7 @@
             <a:r>
               <a:rPr sz="750">
                 <a:solidFill>
-                  <a:srgbClr val="CCD8EC"/>
+                  <a:srgbClr val="E4EEFF"/>
                 </a:solidFill>
               </a:rPr>
               <a:t>Planes de pago de 3 a 48 meses</a:t>
@@ -5895,7 +5895,7 @@
             <a:r>
               <a:rPr sz="750">
                 <a:solidFill>
-                  <a:srgbClr val="CCD8EC"/>
+                  <a:srgbClr val="E4EEFF"/>
                 </a:solidFill>
               </a:rPr>
               <a:t>Firma de acuerdos digitales con validez legal</a:t>
@@ -5918,7 +5918,7 @@
             <a:r>
               <a:rPr sz="750">
                 <a:solidFill>
-                  <a:srgbClr val="CCD8EC"/>
+                  <a:srgbClr val="E4EEFF"/>
                 </a:solidFill>
               </a:rPr>
               <a:t>Grabación de llamadas como respaldo</a:t>
@@ -5941,11 +5941,11 @@
             <a:avLst/>
           </a:prstGeom>
           <a:solidFill>
-            <a:srgbClr val="0E1E4A"/>
+            <a:srgbClr val="162A68"/>
           </a:solidFill>
           <a:ln w="9525">
             <a:solidFill>
-              <a:srgbClr val="2A4288"/>
+              <a:srgbClr val="4A68B8"/>
             </a:solidFill>
           </a:ln>
         </p:spPr>
@@ -6208,7 +6208,7 @@
             <a:r>
               <a:rPr sz="750">
                 <a:solidFill>
-                  <a:srgbClr val="CCD8EC"/>
+                  <a:srgbClr val="E4EEFF"/>
                 </a:solidFill>
               </a:rPr>
               <a:t>Domiciliación SEPA y pasarela de pago online</a:t>
@@ -6231,7 +6231,7 @@
             <a:r>
               <a:rPr sz="750">
                 <a:solidFill>
-                  <a:srgbClr val="CCD8EC"/>
+                  <a:srgbClr val="E4EEFF"/>
                 </a:solidFill>
               </a:rPr>
               <a:t>Recordatorios automáticos de vencimientos</a:t>
@@ -6254,7 +6254,7 @@
             <a:r>
               <a:rPr sz="750">
                 <a:solidFill>
-                  <a:srgbClr val="CCD8EC"/>
+                  <a:srgbClr val="E4EEFF"/>
                 </a:solidFill>
               </a:rPr>
               <a:t>Renegociación ante impagos parciales</a:t>
@@ -6277,7 +6277,7 @@
             <a:r>
               <a:rPr sz="750">
                 <a:solidFill>
-                  <a:srgbClr val="CCD8EC"/>
+                  <a:srgbClr val="E4EEFF"/>
                 </a:solidFill>
               </a:rPr>
               <a:t>Dashboard de seguimiento en tiempo real</a:t>
@@ -6346,7 +6346,7 @@
           </a:prstGeom>
           <a:solidFill>
             <a:srgbClr val="060E24">
-              <a:alpha val="84000"/>
+              <a:alpha val="50000"/>
             </a:srgbClr>
           </a:solidFill>
           <a:ln>
@@ -6636,11 +6636,11 @@
             <a:avLst/>
           </a:prstGeom>
           <a:solidFill>
-            <a:srgbClr val="0E1E4A"/>
+            <a:srgbClr val="162A68"/>
           </a:solidFill>
           <a:ln w="9525">
             <a:solidFill>
-              <a:srgbClr val="2A4288"/>
+              <a:srgbClr val="4A68B8"/>
             </a:solidFill>
           </a:ln>
         </p:spPr>
@@ -6903,7 +6903,7 @@
             <a:r>
               <a:rPr sz="750">
                 <a:solidFill>
-                  <a:srgbClr val="CCD8EC"/>
+                  <a:srgbClr val="E4EEFF"/>
                 </a:solidFill>
               </a:rPr>
               <a:t>Revisión de prescripción y documentación</a:t>
@@ -6926,7 +6926,7 @@
             <a:r>
               <a:rPr sz="750">
                 <a:solidFill>
-                  <a:srgbClr val="CCD8EC"/>
+                  <a:srgbClr val="E4EEFF"/>
                 </a:solidFill>
               </a:rPr>
               <a:t>Estudio de solvencia y localización de bienes</a:t>
@@ -6949,7 +6949,7 @@
             <a:r>
               <a:rPr sz="750">
                 <a:solidFill>
-                  <a:srgbClr val="CCD8EC"/>
+                  <a:srgbClr val="E4EEFF"/>
                 </a:solidFill>
               </a:rPr>
               <a:t>Valoración coste-beneficio por expediente</a:t>
@@ -6972,7 +6972,7 @@
             <a:r>
               <a:rPr sz="750">
                 <a:solidFill>
-                  <a:srgbClr val="CCD8EC"/>
+                  <a:srgbClr val="E4EEFF"/>
                 </a:solidFill>
               </a:rPr>
               <a:t>Decisión de elevación judicial en 48-72 h</a:t>
@@ -6995,11 +6995,11 @@
             <a:avLst/>
           </a:prstGeom>
           <a:solidFill>
-            <a:srgbClr val="0E1E4A"/>
+            <a:srgbClr val="162A68"/>
           </a:solidFill>
           <a:ln w="9525">
             <a:solidFill>
-              <a:srgbClr val="2A4288"/>
+              <a:srgbClr val="4A68B8"/>
             </a:solidFill>
           </a:ln>
         </p:spPr>
@@ -7262,7 +7262,7 @@
             <a:r>
               <a:rPr sz="750">
                 <a:solidFill>
-                  <a:srgbClr val="CCD8EC"/>
+                  <a:srgbClr val="E4EEFF"/>
                 </a:solidFill>
               </a:rPr>
               <a:t>Interposición de monitorio o juicio verbal</a:t>
@@ -7285,7 +7285,7 @@
             <a:r>
               <a:rPr sz="750">
                 <a:solidFill>
-                  <a:srgbClr val="CCD8EC"/>
+                  <a:srgbClr val="E4EEFF"/>
                 </a:solidFill>
               </a:rPr>
               <a:t>Red de letrados en todas las CC.AA.</a:t>
@@ -7308,7 +7308,7 @@
             <a:r>
               <a:rPr sz="750">
                 <a:solidFill>
-                  <a:srgbClr val="CCD8EC"/>
+                  <a:srgbClr val="E4EEFF"/>
                 </a:solidFill>
               </a:rPr>
               <a:t>Coordinación con procuradores y notificaciones</a:t>
@@ -7331,7 +7331,7 @@
             <a:r>
               <a:rPr sz="750">
                 <a:solidFill>
-                  <a:srgbClr val="CCD8EC"/>
+                  <a:srgbClr val="E4EEFF"/>
                 </a:solidFill>
               </a:rPr>
               <a:t>Reporting de estado mensual</a:t>
@@ -7354,11 +7354,11 @@
             <a:avLst/>
           </a:prstGeom>
           <a:solidFill>
-            <a:srgbClr val="0E1E4A"/>
+            <a:srgbClr val="162A68"/>
           </a:solidFill>
           <a:ln w="9525">
             <a:solidFill>
-              <a:srgbClr val="2A4288"/>
+              <a:srgbClr val="4A68B8"/>
             </a:solidFill>
           </a:ln>
         </p:spPr>
@@ -7621,7 +7621,7 @@
             <a:r>
               <a:rPr sz="750">
                 <a:solidFill>
-                  <a:srgbClr val="CCD8EC"/>
+                  <a:srgbClr val="E4EEFF"/>
                 </a:solidFill>
               </a:rPr>
               <a:t>Embargo de cuentas, nóminas e inmuebles</a:t>
@@ -7644,7 +7644,7 @@
             <a:r>
               <a:rPr sz="750">
                 <a:solidFill>
-                  <a:srgbClr val="CCD8EC"/>
+                  <a:srgbClr val="E4EEFF"/>
                 </a:solidFill>
               </a:rPr>
               <a:t>Seguimiento de subastas judiciales</a:t>
@@ -7667,7 +7667,7 @@
             <a:r>
               <a:rPr sz="750">
                 <a:solidFill>
-                  <a:srgbClr val="CCD8EC"/>
+                  <a:srgbClr val="E4EEFF"/>
                 </a:solidFill>
               </a:rPr>
               <a:t>Liquidación y transferencia en 5 días hábiles</a:t>
@@ -7690,7 +7690,7 @@
             <a:r>
               <a:rPr sz="750">
                 <a:solidFill>
-                  <a:srgbClr val="CCD8EC"/>
+                  <a:srgbClr val="E4EEFF"/>
                 </a:solidFill>
               </a:rPr>
               <a:t>Acta de cierre con detalle de costas</a:t>
@@ -7759,7 +7759,7 @@
           </a:prstGeom>
           <a:solidFill>
             <a:srgbClr val="060E24">
-              <a:alpha val="84000"/>
+              <a:alpha val="50000"/>
             </a:srgbClr>
           </a:solidFill>
           <a:ln>
@@ -8049,11 +8049,11 @@
             <a:avLst/>
           </a:prstGeom>
           <a:solidFill>
-            <a:srgbClr val="0E1E4A"/>
+            <a:srgbClr val="162A68"/>
           </a:solidFill>
           <a:ln w="9525">
             <a:solidFill>
-              <a:srgbClr val="2A4288"/>
+              <a:srgbClr val="4A68B8"/>
             </a:solidFill>
           </a:ln>
         </p:spPr>
@@ -8316,7 +8316,7 @@
             <a:r>
               <a:rPr sz="750">
                 <a:solidFill>
-                  <a:srgbClr val="CCD8EC"/>
+                  <a:srgbClr val="E4EEFF"/>
                 </a:solidFill>
               </a:rPr>
               <a:t>Informe semanal de actividad y contactaciones</a:t>
@@ -8339,7 +8339,7 @@
             <a:r>
               <a:rPr sz="750">
                 <a:solidFill>
-                  <a:srgbClr val="CCD8EC"/>
+                  <a:srgbClr val="E4EEFF"/>
                 </a:solidFill>
               </a:rPr>
               <a:t>Reporte mensual de recuperación y aging</a:t>
@@ -8362,7 +8362,7 @@
             <a:r>
               <a:rPr sz="750">
                 <a:solidFill>
-                  <a:srgbClr val="CCD8EC"/>
+                  <a:srgbClr val="E4EEFF"/>
                 </a:solidFill>
               </a:rPr>
               <a:t>Cuadro de mando ejecutivo trimestral</a:t>
@@ -8385,7 +8385,7 @@
             <a:r>
               <a:rPr sz="750">
                 <a:solidFill>
-                  <a:srgbClr val="CCD8EC"/>
+                  <a:srgbClr val="E4EEFF"/>
                 </a:solidFill>
               </a:rPr>
               <a:t>Exportación en PDF, Excel y API JSON</a:t>
@@ -8408,11 +8408,11 @@
             <a:avLst/>
           </a:prstGeom>
           <a:solidFill>
-            <a:srgbClr val="0E1E4A"/>
+            <a:srgbClr val="162A68"/>
           </a:solidFill>
           <a:ln w="9525">
             <a:solidFill>
-              <a:srgbClr val="2A4288"/>
+              <a:srgbClr val="4A68B8"/>
             </a:solidFill>
           </a:ln>
         </p:spPr>
@@ -8675,7 +8675,7 @@
             <a:r>
               <a:rPr sz="750">
                 <a:solidFill>
-                  <a:srgbClr val="CCD8EC"/>
+                  <a:srgbClr val="E4EEFF"/>
                 </a:solidFill>
               </a:rPr>
               <a:t>Liquidación quincenal por expediente</a:t>
@@ -8698,7 +8698,7 @@
             <a:r>
               <a:rPr sz="750">
                 <a:solidFill>
-                  <a:srgbClr val="CCD8EC"/>
+                  <a:srgbClr val="E4EEFF"/>
                 </a:solidFill>
               </a:rPr>
               <a:t>Transferencia SEPA en T+2 hábiles</a:t>
@@ -8721,7 +8721,7 @@
             <a:r>
               <a:rPr sz="750">
                 <a:solidFill>
-                  <a:srgbClr val="CCD8EC"/>
+                  <a:srgbClr val="E4EEFF"/>
                 </a:solidFill>
               </a:rPr>
               <a:t>Conciliación automática con ERP/CRM</a:t>
@@ -8744,7 +8744,7 @@
             <a:r>
               <a:rPr sz="750">
                 <a:solidFill>
-                  <a:srgbClr val="CCD8EC"/>
+                  <a:srgbClr val="E4EEFF"/>
                 </a:solidFill>
               </a:rPr>
               <a:t>Facturación electrónica certificada</a:t>
@@ -8767,11 +8767,11 @@
             <a:avLst/>
           </a:prstGeom>
           <a:solidFill>
-            <a:srgbClr val="0E1E4A"/>
+            <a:srgbClr val="162A68"/>
           </a:solidFill>
           <a:ln w="9525">
             <a:solidFill>
-              <a:srgbClr val="2A4288"/>
+              <a:srgbClr val="4A68B8"/>
             </a:solidFill>
           </a:ln>
         </p:spPr>
@@ -9034,7 +9034,7 @@
             <a:r>
               <a:rPr sz="750">
                 <a:solidFill>
-                  <a:srgbClr val="CCD8EC"/>
+                  <a:srgbClr val="E4EEFF"/>
                 </a:solidFill>
               </a:rPr>
               <a:t>Auditoría interna mensual de procesos</a:t>
@@ -9057,7 +9057,7 @@
             <a:r>
               <a:rPr sz="750">
                 <a:solidFill>
-                  <a:srgbClr val="CCD8EC"/>
+                  <a:srgbClr val="E4EEFF"/>
                 </a:solidFill>
               </a:rPr>
               <a:t>Mystery calling y escucha de grabaciones</a:t>
@@ -9080,7 +9080,7 @@
             <a:r>
               <a:rPr sz="750">
                 <a:solidFill>
-                  <a:srgbClr val="CCD8EC"/>
+                  <a:srgbClr val="E4EEFF"/>
                 </a:solidFill>
               </a:rPr>
               <a:t>Comité de mejora continua trimestral</a:t>
@@ -9103,7 +9103,7 @@
             <a:r>
               <a:rPr sz="750">
                 <a:solidFill>
-                  <a:srgbClr val="CCD8EC"/>
+                  <a:srgbClr val="E4EEFF"/>
                 </a:solidFill>
               </a:rPr>
               <a:t>Certificación ISO 9001 y cumplimiento RGPD</a:t>
@@ -9172,7 +9172,7 @@
           </a:prstGeom>
           <a:solidFill>
             <a:srgbClr val="060E24">
-              <a:alpha val="87000"/>
+              <a:alpha val="52000"/>
             </a:srgbClr>
           </a:solidFill>
           <a:ln>
@@ -9462,11 +9462,11 @@
             <a:avLst/>
           </a:prstGeom>
           <a:solidFill>
-            <a:srgbClr val="0E1E4A"/>
+            <a:srgbClr val="162A68"/>
           </a:solidFill>
           <a:ln w="9525">
             <a:solidFill>
-              <a:srgbClr val="2A4288"/>
+              <a:srgbClr val="4A68B8"/>
             </a:solidFill>
           </a:ln>
         </p:spPr>
@@ -9717,7 +9717,7 @@
             <a:r>
               <a:rPr sz="750">
                 <a:solidFill>
-                  <a:srgbClr val="CCD8EC"/>
+                  <a:srgbClr val="E4EEFF"/>
                 </a:solidFill>
               </a:rPr>
               <a:t>Negociación extrajudicial, planes de pago personalizados y seguimiento continuo hasta la resolución del expediente.</a:t>
@@ -9740,11 +9740,11 @@
             <a:avLst/>
           </a:prstGeom>
           <a:solidFill>
-            <a:srgbClr val="0E1E4A"/>
+            <a:srgbClr val="162A68"/>
           </a:solidFill>
           <a:ln w="9525">
             <a:solidFill>
-              <a:srgbClr val="2A4288"/>
+              <a:srgbClr val="4A68B8"/>
             </a:solidFill>
           </a:ln>
         </p:spPr>
@@ -9995,7 +9995,7 @@
             <a:r>
               <a:rPr sz="750">
                 <a:solidFill>
-                  <a:srgbClr val="CCD8EC"/>
+                  <a:srgbClr val="E4EEFF"/>
                 </a:solidFill>
               </a:rPr>
               <a:t>Interposición de demandas, coordinación con letrados y ejecución de sentencias a través de procuradores especializados.</a:t>
@@ -10018,11 +10018,11 @@
             <a:avLst/>
           </a:prstGeom>
           <a:solidFill>
-            <a:srgbClr val="0E1E4A"/>
+            <a:srgbClr val="162A68"/>
           </a:solidFill>
           <a:ln w="9525">
             <a:solidFill>
-              <a:srgbClr val="2A4288"/>
+              <a:srgbClr val="4A68B8"/>
             </a:solidFill>
           </a:ln>
         </p:spPr>
@@ -10273,7 +10273,7 @@
             <a:r>
               <a:rPr sz="750">
                 <a:solidFill>
-                  <a:srgbClr val="CCD8EC"/>
+                  <a:srgbClr val="E4EEFF"/>
                 </a:solidFill>
               </a:rPr>
               <a:t>Análisis predictivo de cartera para priorizar expedientes con mayor probabilidad de cobro y optimizar recursos.</a:t>
@@ -10296,11 +10296,11 @@
             <a:avLst/>
           </a:prstGeom>
           <a:solidFill>
-            <a:srgbClr val="0E1E4A"/>
+            <a:srgbClr val="162A68"/>
           </a:solidFill>
           <a:ln w="9525">
             <a:solidFill>
-              <a:srgbClr val="2A4288"/>
+              <a:srgbClr val="4A68B8"/>
             </a:solidFill>
           </a:ln>
         </p:spPr>
@@ -10551,7 +10551,7 @@
             <a:r>
               <a:rPr sz="750">
                 <a:solidFill>
-                  <a:srgbClr val="CCD8EC"/>
+                  <a:srgbClr val="E4EEFF"/>
                 </a:solidFill>
               </a:rPr>
               <a:t>Panel de control en tiempo real con KPIs, tasa de recuperación, aging de cartera y exportación de informes ejecutivos.</a:t>
@@ -10644,7 +10644,7 @@
           </a:prstGeom>
           <a:solidFill>
             <a:srgbClr val="060E24">
-              <a:alpha val="72000"/>
+              <a:alpha val="40000"/>
             </a:srgbClr>
           </a:solidFill>
           <a:ln>
@@ -10991,7 +10991,7 @@
             <a:r>
               <a:rPr sz="900" i="1">
                 <a:solidFill>
-                  <a:srgbClr val="ADD8E6"/>
+                  <a:srgbClr val="C8E8FF"/>
                 </a:solidFill>
               </a:rPr>
               <a:t>Nuestros equipos están disponibles para comenzar de inmediato.</a:t>
@@ -11014,11 +11014,11 @@
             <a:avLst/>
           </a:prstGeom>
           <a:solidFill>
-            <a:srgbClr val="0E1E4A"/>
+            <a:srgbClr val="162A68"/>
           </a:solidFill>
           <a:ln w="9525">
             <a:solidFill>
-              <a:srgbClr val="2A4288"/>
+              <a:srgbClr val="4A68B8"/>
             </a:solidFill>
           </a:ln>
         </p:spPr>
@@ -11194,7 +11194,7 @@
             <a:r>
               <a:rPr sz="750">
                 <a:solidFill>
-                  <a:srgbClr val="CCD8EC"/>
+                  <a:srgbClr val="E4EEFF"/>
                 </a:solidFill>
               </a:rPr>
               <a:t>Gran Vía 28, 4ª planta</a:t>
@@ -11224,7 +11224,7 @@
             <a:r>
               <a:rPr sz="750">
                 <a:solidFill>
-                  <a:srgbClr val="99BBDD"/>
+                  <a:srgbClr val="B0CCEE"/>
                 </a:solidFill>
               </a:rPr>
               <a:t>madrid@sendacredit.com</a:t>
@@ -11247,11 +11247,11 @@
             <a:avLst/>
           </a:prstGeom>
           <a:solidFill>
-            <a:srgbClr val="0E1E4A"/>
+            <a:srgbClr val="162A68"/>
           </a:solidFill>
           <a:ln w="9525">
             <a:solidFill>
-              <a:srgbClr val="2A4288"/>
+              <a:srgbClr val="4A68B8"/>
             </a:solidFill>
           </a:ln>
         </p:spPr>
@@ -11427,7 +11427,7 @@
             <a:r>
               <a:rPr sz="750">
                 <a:solidFill>
-                  <a:srgbClr val="CCD8EC"/>
+                  <a:srgbClr val="E4EEFF"/>
                 </a:solidFill>
               </a:rPr>
               <a:t>Diagonal 211, 3ª planta</a:t>
@@ -11457,7 +11457,7 @@
             <a:r>
               <a:rPr sz="750">
                 <a:solidFill>
-                  <a:srgbClr val="99BBDD"/>
+                  <a:srgbClr val="B0CCEE"/>
                 </a:solidFill>
               </a:rPr>
               <a:t>barcelona@sendacredit.com</a:t>
@@ -11480,11 +11480,11 @@
             <a:avLst/>
           </a:prstGeom>
           <a:solidFill>
-            <a:srgbClr val="0E1E4A"/>
+            <a:srgbClr val="162A68"/>
           </a:solidFill>
           <a:ln w="9525">
             <a:solidFill>
-              <a:srgbClr val="2A4288"/>
+              <a:srgbClr val="4A68B8"/>
             </a:solidFill>
           </a:ln>
         </p:spPr>
@@ -11660,7 +11660,7 @@
             <a:r>
               <a:rPr sz="750">
                 <a:solidFill>
-                  <a:srgbClr val="CCD8EC"/>
+                  <a:srgbClr val="E4EEFF"/>
                 </a:solidFill>
               </a:rPr>
               <a:t>Larios 12, 2ª planta</a:t>
@@ -11690,7 +11690,7 @@
             <a:r>
               <a:rPr sz="750">
                 <a:solidFill>
-                  <a:srgbClr val="99BBDD"/>
+                  <a:srgbClr val="B0CCEE"/>
                 </a:solidFill>
               </a:rPr>
               <a:t>malaga@sendacredit.com</a:t>

--- a/sendacredit_propuesta.pptx
+++ b/sendacredit_propuesta.pptx
@@ -3134,8 +3134,8 @@
         </p:blipFill>
         <p:spPr>
           <a:xfrm>
-            <a:off x="5425135" y="0"/>
-            <a:ext cx="6766560" cy="6858000"/>
+            <a:off x="5608015" y="0"/>
+            <a:ext cx="6583680" cy="6858000"/>
           </a:xfrm>
           <a:prstGeom prst="rect">
             <a:avLst/>
@@ -3150,15 +3150,15 @@
         </p:nvSpPr>
         <p:spPr>
           <a:xfrm>
-            <a:off x="5425135" y="0"/>
-            <a:ext cx="6766560" cy="6858000"/>
+            <a:off x="5608015" y="0"/>
+            <a:ext cx="6583680" cy="6858000"/>
           </a:xfrm>
           <a:prstGeom prst="rect">
             <a:avLst/>
           </a:prstGeom>
           <a:solidFill>
             <a:srgbClr val="060E24">
-              <a:alpha val="42000"/>
+              <a:alpha val="35000"/>
             </a:srgbClr>
           </a:solidFill>
           <a:ln>
@@ -3195,7 +3195,7 @@
         </p:nvSpPr>
         <p:spPr>
           <a:xfrm>
-            <a:off x="5387035" y="0"/>
+            <a:off x="5569915" y="0"/>
             <a:ext cx="38100" cy="6858000"/>
           </a:xfrm>
           <a:prstGeom prst="rect">
@@ -3263,7 +3263,7 @@
         <p:spPr>
           <a:xfrm>
             <a:off x="658368" y="1600200"/>
-            <a:ext cx="5669280" cy="384048"/>
+            <a:ext cx="5486400" cy="365760"/>
           </a:xfrm>
           <a:prstGeom prst="rect">
             <a:avLst/>
@@ -3296,8 +3296,8 @@
         </p:nvSpPr>
         <p:spPr>
           <a:xfrm>
-            <a:off x="658368" y="2084831"/>
-            <a:ext cx="2834640" cy="31750"/>
+            <a:off x="658368" y="2066543"/>
+            <a:ext cx="2743200" cy="31750"/>
           </a:xfrm>
           <a:prstGeom prst="rect">
             <a:avLst/>
@@ -3339,8 +3339,8 @@
         </p:nvSpPr>
         <p:spPr>
           <a:xfrm>
-            <a:off x="658368" y="2231136"/>
-            <a:ext cx="5943600" cy="2286000"/>
+            <a:off x="658368" y="2212848"/>
+            <a:ext cx="5852160" cy="2286000"/>
           </a:xfrm>
           <a:prstGeom prst="rect">
             <a:avLst/>
@@ -3355,7 +3355,7 @@
           <a:p>
             <a:pPr algn="l"/>
             <a:r>
-              <a:rPr sz="3600" b="1">
+              <a:rPr sz="3700" b="1">
                 <a:solidFill>
                   <a:srgbClr val="FFFFFF"/>
                 </a:solidFill>
@@ -3366,27 +3366,12 @@
           <a:p>
             <a:pPr algn="l"/>
             <a:r>
-              <a:rPr sz="3600" b="1">
+              <a:rPr sz="3700" b="1">
                 <a:solidFill>
                   <a:srgbClr val="2FDFE5"/>
                 </a:solidFill>
               </a:rPr>
               <a:t>de expedientes</a:t>
-            </a:r>
-          </a:p>
-          <a:p>
-            <a:pPr algn="l">
-              <a:spcBef>
-                <a:spcPts val="400"/>
-              </a:spcBef>
-            </a:pPr>
-            <a:r>
-              <a:rPr sz="2200">
-                <a:solidFill>
-                  <a:srgbClr val="C8E8FF"/>
-                </a:solidFill>
-              </a:rPr>
-              <a:t>ID Finance</a:t>
             </a:r>
           </a:p>
         </p:txBody>
@@ -3399,8 +3384,8 @@
         </p:nvSpPr>
         <p:spPr>
           <a:xfrm>
-            <a:off x="658368" y="4617720"/>
-            <a:ext cx="5303520" cy="475488"/>
+            <a:off x="658368" y="4645152"/>
+            <a:ext cx="5120640" cy="438912"/>
           </a:xfrm>
           <a:prstGeom prst="rect">
             <a:avLst/>
@@ -3417,7 +3402,7 @@
             <a:r>
               <a:rPr sz="1050" i="1">
                 <a:solidFill>
-                  <a:srgbClr val="AABBCC"/>
+                  <a:srgbClr val="C0E8FF"/>
                 </a:solidFill>
               </a:rPr>
               <a:t>Propuesta de colaboración · Recuperación de deuda</a:t>
@@ -3433,8 +3418,8 @@
         </p:nvSpPr>
         <p:spPr>
           <a:xfrm>
-            <a:off x="9722815" y="6382512"/>
-            <a:ext cx="2286000" cy="329184"/>
+            <a:off x="9722815" y="6419088"/>
+            <a:ext cx="2286000" cy="292608"/>
           </a:xfrm>
           <a:prstGeom prst="rect">
             <a:avLst/>
@@ -3451,7 +3436,7 @@
             <a:r>
               <a:rPr sz="800">
                 <a:solidFill>
-                  <a:srgbClr val="667788"/>
+                  <a:srgbClr val="80A8CC"/>
                 </a:solidFill>
               </a:rPr>
               <a:t>2025 – 2026</a:t>
@@ -3464,8 +3449,8 @@
   <p:clrMapOvr>
     <a:masterClrMapping/>
   </p:clrMapOvr>
-  <p:transition dur="700" spd="fast">
-    <p:fade/>
+  <p:transition dur="500" spd="fast">
+    <p:push dir="u"/>
   </p:transition>
 </p:sld>
 </file>
@@ -3520,7 +3505,7 @@
           </a:prstGeom>
           <a:solidFill>
             <a:srgbClr val="060E24">
-              <a:alpha val="50000"/>
+              <a:alpha val="38000"/>
             </a:srgbClr>
           </a:solidFill>
           <a:ln>
@@ -3552,6 +3537,49 @@
       <p:sp>
         <p:nvSpPr>
           <p:cNvPr id="4" name="Rectangle 3"/>
+          <p:cNvSpPr/>
+          <p:nvPr/>
+        </p:nvSpPr>
+        <p:spPr>
+          <a:xfrm>
+            <a:off x="0" y="0"/>
+            <a:ext cx="12191695" cy="1664208"/>
+          </a:xfrm>
+          <a:prstGeom prst="rect">
+            <a:avLst/>
+          </a:prstGeom>
+          <a:solidFill>
+            <a:srgbClr val="0A1638"/>
+          </a:solidFill>
+          <a:ln>
+            <a:noFill/>
+          </a:ln>
+        </p:spPr>
+        <p:style>
+          <a:lnRef idx="1">
+            <a:schemeClr val="accent1"/>
+          </a:lnRef>
+          <a:fillRef idx="3">
+            <a:schemeClr val="accent1"/>
+          </a:fillRef>
+          <a:effectRef idx="2">
+            <a:schemeClr val="accent1"/>
+          </a:effectRef>
+          <a:fontRef idx="minor">
+            <a:schemeClr val="lt1"/>
+          </a:fontRef>
+        </p:style>
+        <p:txBody>
+          <a:bodyPr rtlCol="0" anchor="ctr"/>
+          <a:lstStyle/>
+          <a:p>
+            <a:pPr algn="ctr"/>
+          </a:p>
+        </p:txBody>
+      </p:sp>
+      <p:sp>
+        <p:nvSpPr>
+          <p:cNvPr id="5" name="Rectangle 4"/>
           <p:cNvSpPr/>
           <p:nvPr/>
         </p:nvSpPr>
@@ -3594,7 +3622,7 @@
       </p:sp>
       <p:sp>
         <p:nvSpPr>
-          <p:cNvPr id="5" name="Rectangle 4"/>
+          <p:cNvPr id="6" name="Rectangle 5"/>
           <p:cNvSpPr/>
           <p:nvPr/>
         </p:nvSpPr>
@@ -3637,14 +3665,14 @@
       </p:sp>
       <p:sp>
         <p:nvSpPr>
-          <p:cNvPr id="6" name="Rectangle 5"/>
+          <p:cNvPr id="7" name="Rectangle 6"/>
           <p:cNvSpPr/>
           <p:nvPr/>
         </p:nvSpPr>
         <p:spPr>
           <a:xfrm>
             <a:off x="502920" y="365760"/>
-            <a:ext cx="1417320" cy="237744"/>
+            <a:ext cx="1371600" cy="237744"/>
           </a:xfrm>
           <a:prstGeom prst="rect">
             <a:avLst/>
@@ -3688,14 +3716,14 @@
       </p:sp>
       <p:sp>
         <p:nvSpPr>
-          <p:cNvPr id="7" name="TextBox 6"/>
+          <p:cNvPr id="8" name="TextBox 7"/>
           <p:cNvSpPr txBox="1"/>
           <p:nvPr/>
         </p:nvSpPr>
         <p:spPr>
           <a:xfrm>
             <a:off x="502920" y="694944"/>
-            <a:ext cx="8229600" cy="713232"/>
+            <a:ext cx="8412480" cy="694944"/>
           </a:xfrm>
           <a:prstGeom prst="rect">
             <a:avLst/>
@@ -3730,14 +3758,14 @@
       </p:sp>
       <p:sp>
         <p:nvSpPr>
-          <p:cNvPr id="8" name="Rectangle 7"/>
+          <p:cNvPr id="9" name="Rectangle 8"/>
           <p:cNvSpPr/>
           <p:nvPr/>
         </p:nvSpPr>
         <p:spPr>
           <a:xfrm>
-            <a:off x="502920" y="1481328"/>
-            <a:ext cx="4114800" cy="31750"/>
+            <a:off x="502920" y="1463040"/>
+            <a:ext cx="4023360" cy="31750"/>
           </a:xfrm>
           <a:prstGeom prst="rect">
             <a:avLst/>
@@ -3773,7 +3801,7 @@
       </p:sp>
       <p:pic>
         <p:nvPicPr>
-          <p:cNvPr id="9" name="Picture 8" descr="logo_horiz.png"/>
+          <p:cNvPr id="10" name="Picture 9" descr="logo_horiz.png"/>
           <p:cNvPicPr>
             <a:picLocks noChangeAspect="1"/>
           </p:cNvPicPr>
@@ -3787,8 +3815,8 @@
         </p:blipFill>
         <p:spPr>
           <a:xfrm>
-            <a:off x="10116008" y="6291072"/>
-            <a:ext cx="1874519" cy="420624"/>
+            <a:off x="10161727" y="6291072"/>
+            <a:ext cx="1828800" cy="420624"/>
           </a:xfrm>
           <a:prstGeom prst="rect">
             <a:avLst/>
@@ -3797,7 +3825,7 @@
       </p:pic>
       <p:sp>
         <p:nvSpPr>
-          <p:cNvPr id="10" name="Rectangle 9"/>
+          <p:cNvPr id="11" name="Rectangle 10"/>
           <p:cNvSpPr/>
           <p:nvPr/>
         </p:nvSpPr>
@@ -3810,11 +3838,11 @@
             <a:avLst/>
           </a:prstGeom>
           <a:solidFill>
-            <a:srgbClr val="162A68"/>
+            <a:srgbClr val="F2F7FF"/>
           </a:solidFill>
-          <a:ln w="9525">
+          <a:ln w="6350">
             <a:solidFill>
-              <a:srgbClr val="4A68B8"/>
+              <a:srgbClr val="2FDFE5"/>
             </a:solidFill>
           </a:ln>
         </p:spPr>
@@ -3842,14 +3870,14 @@
       </p:sp>
       <p:sp>
         <p:nvSpPr>
-          <p:cNvPr id="11" name="Rectangle 10"/>
+          <p:cNvPr id="12" name="Rectangle 11"/>
           <p:cNvSpPr/>
           <p:nvPr/>
         </p:nvSpPr>
         <p:spPr>
           <a:xfrm>
             <a:off x="502920" y="1719072"/>
-            <a:ext cx="3688994" cy="38100"/>
+            <a:ext cx="3688994" cy="50800"/>
           </a:xfrm>
           <a:prstGeom prst="rect">
             <a:avLst/>
@@ -3885,14 +3913,14 @@
       </p:sp>
       <p:sp>
         <p:nvSpPr>
-          <p:cNvPr id="12" name="Oval 11"/>
+          <p:cNvPr id="13" name="Oval 12"/>
           <p:cNvSpPr/>
           <p:nvPr/>
         </p:nvSpPr>
         <p:spPr>
           <a:xfrm>
             <a:off x="685800" y="1901952"/>
-            <a:ext cx="233172" cy="233172"/>
+            <a:ext cx="228600" cy="228600"/>
           </a:xfrm>
           <a:prstGeom prst="ellipse">
             <a:avLst/>
@@ -3930,14 +3958,14 @@
       </p:sp>
       <p:sp>
         <p:nvSpPr>
-          <p:cNvPr id="13" name="TextBox 12"/>
+          <p:cNvPr id="14" name="TextBox 13"/>
           <p:cNvSpPr txBox="1"/>
           <p:nvPr/>
         </p:nvSpPr>
         <p:spPr>
           <a:xfrm>
             <a:off x="685800" y="1901952"/>
-            <a:ext cx="233172" cy="233172"/>
+            <a:ext cx="228600" cy="228600"/>
           </a:xfrm>
           <a:prstGeom prst="rect">
             <a:avLst/>
@@ -3964,14 +3992,14 @@
       </p:sp>
       <p:sp>
         <p:nvSpPr>
-          <p:cNvPr id="14" name="TextBox 13"/>
+          <p:cNvPr id="15" name="TextBox 14"/>
           <p:cNvSpPr txBox="1"/>
           <p:nvPr/>
         </p:nvSpPr>
         <p:spPr>
           <a:xfrm>
-            <a:off x="630936" y="2226564"/>
-            <a:ext cx="3432962" cy="493776"/>
+            <a:off x="649224" y="2221992"/>
+            <a:ext cx="3396386" cy="512064"/>
           </a:xfrm>
           <a:prstGeom prst="rect">
             <a:avLst/>
@@ -3988,7 +4016,7 @@
             <a:r>
               <a:rPr sz="950" b="1">
                 <a:solidFill>
-                  <a:srgbClr val="FFFFFF"/>
+                  <a:srgbClr val="081432"/>
                 </a:solidFill>
               </a:rPr>
               <a:t>Recepción de fichero</a:t>
@@ -3998,14 +4026,14 @@
       </p:sp>
       <p:sp>
         <p:nvSpPr>
-          <p:cNvPr id="15" name="Rectangle 14"/>
+          <p:cNvPr id="16" name="Rectangle 15"/>
           <p:cNvSpPr/>
           <p:nvPr/>
         </p:nvSpPr>
         <p:spPr>
           <a:xfrm>
-            <a:off x="630936" y="2738628"/>
-            <a:ext cx="3432962" cy="12700"/>
+            <a:off x="630936" y="2752344"/>
+            <a:ext cx="3432962" cy="15240"/>
           </a:xfrm>
           <a:prstGeom prst="rect">
             <a:avLst/>
@@ -4041,21 +4069,21 @@
       </p:sp>
       <p:sp>
         <p:nvSpPr>
-          <p:cNvPr id="16" name="TextBox 15"/>
+          <p:cNvPr id="17" name="TextBox 16"/>
           <p:cNvSpPr txBox="1"/>
           <p:nvPr/>
         </p:nvSpPr>
         <p:spPr>
           <a:xfrm>
-            <a:off x="630936" y="2814828"/>
-            <a:ext cx="3432962" cy="3231388"/>
+            <a:off x="649224" y="2828544"/>
+            <a:ext cx="3414674" cy="3243072"/>
           </a:xfrm>
           <a:prstGeom prst="rect">
             <a:avLst/>
           </a:prstGeom>
           <a:noFill/>
         </p:spPr>
-        <p:txBody lIns="50800" tIns="25400" rIns="50800" bIns="25400">
+        <p:txBody lIns="50800" tIns="38100" rIns="50800" bIns="38100">
           <a:bodyPr wrap="square">
             <a:spAutoFit/>
           </a:bodyPr>
@@ -4077,7 +4105,7 @@
             <a:r>
               <a:rPr sz="750">
                 <a:solidFill>
-                  <a:srgbClr val="E4EEFF"/>
+                  <a:srgbClr val="223A6A"/>
                 </a:solidFill>
               </a:rPr>
               <a:t>Integración vía SFTP seguro o API REST</a:t>
@@ -4100,7 +4128,7 @@
             <a:r>
               <a:rPr sz="750">
                 <a:solidFill>
-                  <a:srgbClr val="E4EEFF"/>
+                  <a:srgbClr val="223A6A"/>
                 </a:solidFill>
               </a:rPr>
               <a:t>Formatos: CSV, Excel, XML, JSON</a:t>
@@ -4123,7 +4151,7 @@
             <a:r>
               <a:rPr sz="750">
                 <a:solidFill>
-                  <a:srgbClr val="E4EEFF"/>
+                  <a:srgbClr val="223A6A"/>
                 </a:solidFill>
               </a:rPr>
               <a:t>Hasta 100.000 registros por lote</a:t>
@@ -4146,7 +4174,7 @@
             <a:r>
               <a:rPr sz="750">
                 <a:solidFill>
-                  <a:srgbClr val="E4EEFF"/>
+                  <a:srgbClr val="223A6A"/>
                 </a:solidFill>
               </a:rPr>
               <a:t>Acuse con hash de integridad automático</a:t>
@@ -4156,7 +4184,7 @@
       </p:sp>
       <p:sp>
         <p:nvSpPr>
-          <p:cNvPr id="17" name="Rectangle 16"/>
+          <p:cNvPr id="18" name="Rectangle 17"/>
           <p:cNvSpPr/>
           <p:nvPr/>
         </p:nvSpPr>
@@ -4169,11 +4197,11 @@
             <a:avLst/>
           </a:prstGeom>
           <a:solidFill>
-            <a:srgbClr val="162A68"/>
+            <a:srgbClr val="F2F7FF"/>
           </a:solidFill>
-          <a:ln w="9525">
+          <a:ln w="6350">
             <a:solidFill>
-              <a:srgbClr val="4A68B8"/>
+              <a:srgbClr val="2FDFE5"/>
             </a:solidFill>
           </a:ln>
         </p:spPr>
@@ -4201,14 +4229,14 @@
       </p:sp>
       <p:sp>
         <p:nvSpPr>
-          <p:cNvPr id="18" name="Rectangle 17"/>
+          <p:cNvPr id="19" name="Rectangle 18"/>
           <p:cNvSpPr/>
           <p:nvPr/>
         </p:nvSpPr>
         <p:spPr>
           <a:xfrm>
             <a:off x="4338218" y="1719072"/>
-            <a:ext cx="3688994" cy="38100"/>
+            <a:ext cx="3688994" cy="50800"/>
           </a:xfrm>
           <a:prstGeom prst="rect">
             <a:avLst/>
@@ -4244,14 +4272,14 @@
       </p:sp>
       <p:sp>
         <p:nvSpPr>
-          <p:cNvPr id="19" name="Oval 18"/>
+          <p:cNvPr id="20" name="Oval 19"/>
           <p:cNvSpPr/>
           <p:nvPr/>
         </p:nvSpPr>
         <p:spPr>
           <a:xfrm>
             <a:off x="4521098" y="1901952"/>
-            <a:ext cx="233172" cy="233172"/>
+            <a:ext cx="228600" cy="228600"/>
           </a:xfrm>
           <a:prstGeom prst="ellipse">
             <a:avLst/>
@@ -4289,14 +4317,14 @@
       </p:sp>
       <p:sp>
         <p:nvSpPr>
-          <p:cNvPr id="20" name="TextBox 19"/>
+          <p:cNvPr id="21" name="TextBox 20"/>
           <p:cNvSpPr txBox="1"/>
           <p:nvPr/>
         </p:nvSpPr>
         <p:spPr>
           <a:xfrm>
             <a:off x="4521098" y="1901952"/>
-            <a:ext cx="233172" cy="233172"/>
+            <a:ext cx="228600" cy="228600"/>
           </a:xfrm>
           <a:prstGeom prst="rect">
             <a:avLst/>
@@ -4323,14 +4351,14 @@
       </p:sp>
       <p:sp>
         <p:nvSpPr>
-          <p:cNvPr id="21" name="TextBox 20"/>
+          <p:cNvPr id="22" name="TextBox 21"/>
           <p:cNvSpPr txBox="1"/>
           <p:nvPr/>
         </p:nvSpPr>
         <p:spPr>
           <a:xfrm>
-            <a:off x="4466234" y="2226564"/>
-            <a:ext cx="3432962" cy="493776"/>
+            <a:off x="4484522" y="2221992"/>
+            <a:ext cx="3396386" cy="512064"/>
           </a:xfrm>
           <a:prstGeom prst="rect">
             <a:avLst/>
@@ -4347,7 +4375,7 @@
             <a:r>
               <a:rPr sz="950" b="1">
                 <a:solidFill>
-                  <a:srgbClr val="FFFFFF"/>
+                  <a:srgbClr val="081432"/>
                 </a:solidFill>
               </a:rPr>
               <a:t>Validación y limpieza</a:t>
@@ -4357,14 +4385,14 @@
       </p:sp>
       <p:sp>
         <p:nvSpPr>
-          <p:cNvPr id="22" name="Rectangle 21"/>
+          <p:cNvPr id="23" name="Rectangle 22"/>
           <p:cNvSpPr/>
           <p:nvPr/>
         </p:nvSpPr>
         <p:spPr>
           <a:xfrm>
-            <a:off x="4466234" y="2738628"/>
-            <a:ext cx="3432962" cy="12700"/>
+            <a:off x="4466234" y="2752344"/>
+            <a:ext cx="3432962" cy="15240"/>
           </a:xfrm>
           <a:prstGeom prst="rect">
             <a:avLst/>
@@ -4400,21 +4428,21 @@
       </p:sp>
       <p:sp>
         <p:nvSpPr>
-          <p:cNvPr id="23" name="TextBox 22"/>
+          <p:cNvPr id="24" name="TextBox 23"/>
           <p:cNvSpPr txBox="1"/>
           <p:nvPr/>
         </p:nvSpPr>
         <p:spPr>
           <a:xfrm>
-            <a:off x="4466234" y="2814828"/>
-            <a:ext cx="3432962" cy="3231388"/>
+            <a:off x="4484522" y="2828544"/>
+            <a:ext cx="3414674" cy="3243072"/>
           </a:xfrm>
           <a:prstGeom prst="rect">
             <a:avLst/>
           </a:prstGeom>
           <a:noFill/>
         </p:spPr>
-        <p:txBody lIns="50800" tIns="25400" rIns="50800" bIns="25400">
+        <p:txBody lIns="50800" tIns="38100" rIns="50800" bIns="38100">
           <a:bodyPr wrap="square">
             <a:spAutoFit/>
           </a:bodyPr>
@@ -4436,7 +4464,7 @@
             <a:r>
               <a:rPr sz="750">
                 <a:solidFill>
-                  <a:srgbClr val="E4EEFF"/>
+                  <a:srgbClr val="223A6A"/>
                 </a:solidFill>
               </a:rPr>
               <a:t>Deduplicación y normalización de datos</a:t>
@@ -4459,7 +4487,7 @@
             <a:r>
               <a:rPr sz="750">
                 <a:solidFill>
-                  <a:srgbClr val="E4EEFF"/>
+                  <a:srgbClr val="223A6A"/>
                 </a:solidFill>
               </a:rPr>
               <a:t>Verificación de DNI/NIE y datos civiles</a:t>
@@ -4482,7 +4510,7 @@
             <a:r>
               <a:rPr sz="750">
                 <a:solidFill>
-                  <a:srgbClr val="E4EEFF"/>
+                  <a:srgbClr val="223A6A"/>
                 </a:solidFill>
               </a:rPr>
               <a:t>Actualización de contactos (ASNEF, GGSS)</a:t>
@@ -4505,7 +4533,7 @@
             <a:r>
               <a:rPr sz="750">
                 <a:solidFill>
-                  <a:srgbClr val="E4EEFF"/>
+                  <a:srgbClr val="223A6A"/>
                 </a:solidFill>
               </a:rPr>
               <a:t>Informe de calidad de cartera en 24 h</a:t>
@@ -4515,7 +4543,7 @@
       </p:sp>
       <p:sp>
         <p:nvSpPr>
-          <p:cNvPr id="24" name="Rectangle 23"/>
+          <p:cNvPr id="25" name="Rectangle 24"/>
           <p:cNvSpPr/>
           <p:nvPr/>
         </p:nvSpPr>
@@ -4528,11 +4556,11 @@
             <a:avLst/>
           </a:prstGeom>
           <a:solidFill>
-            <a:srgbClr val="162A68"/>
+            <a:srgbClr val="F2F7FF"/>
           </a:solidFill>
-          <a:ln w="9525">
+          <a:ln w="6350">
             <a:solidFill>
-              <a:srgbClr val="4A68B8"/>
+              <a:srgbClr val="2FDFE5"/>
             </a:solidFill>
           </a:ln>
         </p:spPr>
@@ -4560,14 +4588,14 @@
       </p:sp>
       <p:sp>
         <p:nvSpPr>
-          <p:cNvPr id="25" name="Rectangle 24"/>
+          <p:cNvPr id="26" name="Rectangle 25"/>
           <p:cNvSpPr/>
           <p:nvPr/>
         </p:nvSpPr>
         <p:spPr>
           <a:xfrm>
             <a:off x="8173516" y="1719072"/>
-            <a:ext cx="3688994" cy="38100"/>
+            <a:ext cx="3688994" cy="50800"/>
           </a:xfrm>
           <a:prstGeom prst="rect">
             <a:avLst/>
@@ -4603,14 +4631,14 @@
       </p:sp>
       <p:sp>
         <p:nvSpPr>
-          <p:cNvPr id="26" name="Oval 25"/>
+          <p:cNvPr id="27" name="Oval 26"/>
           <p:cNvSpPr/>
           <p:nvPr/>
         </p:nvSpPr>
         <p:spPr>
           <a:xfrm>
             <a:off x="8356396" y="1901952"/>
-            <a:ext cx="233172" cy="233172"/>
+            <a:ext cx="228600" cy="228600"/>
           </a:xfrm>
           <a:prstGeom prst="ellipse">
             <a:avLst/>
@@ -4648,14 +4676,14 @@
       </p:sp>
       <p:sp>
         <p:nvSpPr>
-          <p:cNvPr id="27" name="TextBox 26"/>
+          <p:cNvPr id="28" name="TextBox 27"/>
           <p:cNvSpPr txBox="1"/>
           <p:nvPr/>
         </p:nvSpPr>
         <p:spPr>
           <a:xfrm>
             <a:off x="8356396" y="1901952"/>
-            <a:ext cx="233172" cy="233172"/>
+            <a:ext cx="228600" cy="228600"/>
           </a:xfrm>
           <a:prstGeom prst="rect">
             <a:avLst/>
@@ -4682,14 +4710,14 @@
       </p:sp>
       <p:sp>
         <p:nvSpPr>
-          <p:cNvPr id="28" name="TextBox 27"/>
+          <p:cNvPr id="29" name="TextBox 28"/>
           <p:cNvSpPr txBox="1"/>
           <p:nvPr/>
         </p:nvSpPr>
         <p:spPr>
           <a:xfrm>
-            <a:off x="8301532" y="2226564"/>
-            <a:ext cx="3432962" cy="493776"/>
+            <a:off x="8319820" y="2221992"/>
+            <a:ext cx="3396386" cy="512064"/>
           </a:xfrm>
           <a:prstGeom prst="rect">
             <a:avLst/>
@@ -4706,7 +4734,7 @@
             <a:r>
               <a:rPr sz="950" b="1">
                 <a:solidFill>
-                  <a:srgbClr val="FFFFFF"/>
+                  <a:srgbClr val="081432"/>
                 </a:solidFill>
               </a:rPr>
               <a:t>Segmentación inicial</a:t>
@@ -4716,14 +4744,14 @@
       </p:sp>
       <p:sp>
         <p:nvSpPr>
-          <p:cNvPr id="29" name="Rectangle 28"/>
+          <p:cNvPr id="30" name="Rectangle 29"/>
           <p:cNvSpPr/>
           <p:nvPr/>
         </p:nvSpPr>
         <p:spPr>
           <a:xfrm>
-            <a:off x="8301532" y="2738628"/>
-            <a:ext cx="3432962" cy="12700"/>
+            <a:off x="8301532" y="2752344"/>
+            <a:ext cx="3432962" cy="15240"/>
           </a:xfrm>
           <a:prstGeom prst="rect">
             <a:avLst/>
@@ -4759,21 +4787,21 @@
       </p:sp>
       <p:sp>
         <p:nvSpPr>
-          <p:cNvPr id="30" name="TextBox 29"/>
+          <p:cNvPr id="31" name="TextBox 30"/>
           <p:cNvSpPr txBox="1"/>
           <p:nvPr/>
         </p:nvSpPr>
         <p:spPr>
           <a:xfrm>
-            <a:off x="8301532" y="2814828"/>
-            <a:ext cx="3432962" cy="3231388"/>
+            <a:off x="8319820" y="2828544"/>
+            <a:ext cx="3414674" cy="3243072"/>
           </a:xfrm>
           <a:prstGeom prst="rect">
             <a:avLst/>
           </a:prstGeom>
           <a:noFill/>
         </p:spPr>
-        <p:txBody lIns="50800" tIns="25400" rIns="50800" bIns="25400">
+        <p:txBody lIns="50800" tIns="38100" rIns="50800" bIns="38100">
           <a:bodyPr wrap="square">
             <a:spAutoFit/>
           </a:bodyPr>
@@ -4795,7 +4823,7 @@
             <a:r>
               <a:rPr sz="750">
                 <a:solidFill>
-                  <a:srgbClr val="E4EEFF"/>
+                  <a:srgbClr val="223A6A"/>
                 </a:solidFill>
               </a:rPr>
               <a:t>Clasificación por antigüedad e importe</a:t>
@@ -4818,7 +4846,7 @@
             <a:r>
               <a:rPr sz="750">
                 <a:solidFill>
-                  <a:srgbClr val="E4EEFF"/>
+                  <a:srgbClr val="223A6A"/>
                 </a:solidFill>
               </a:rPr>
               <a:t>Scoring de cobrabilidad con modelo ML</a:t>
@@ -4841,7 +4869,7 @@
             <a:r>
               <a:rPr sz="750">
                 <a:solidFill>
-                  <a:srgbClr val="E4EEFF"/>
+                  <a:srgbClr val="223A6A"/>
                 </a:solidFill>
               </a:rPr>
               <a:t>Asignación de canal de recobro óptimo</a:t>
@@ -4864,7 +4892,7 @@
             <a:r>
               <a:rPr sz="750">
                 <a:solidFill>
-                  <a:srgbClr val="E4EEFF"/>
+                  <a:srgbClr val="223A6A"/>
                 </a:solidFill>
               </a:rPr>
               <a:t>Priorización por rentabilidad esperada</a:t>
@@ -4877,8 +4905,90 @@
   <p:clrMapOvr>
     <a:masterClrMapping/>
   </p:clrMapOvr>
-  <p:transition dur="700" spd="fast">
-    <p:fade/>
+  <p:timing>
+    <p:tnLst>
+      <p:par>
+        <p:cTn id="1" dur="indefin" restart="whenNotActive" nodeType="tmRoot">
+          <p:childTnLst>
+            <p:seq concurrent="1" nextAc="seek">
+              <p:cTn id="2" dur="indefin" nodeType="mainSeq">
+                <p:childTnLst>
+                  <p:par>
+                    <p:cTn id="3" fill="hold">
+                      <p:stCondLst>
+                        <p:cond delay="0"/>
+                      </p:stCondLst>
+                      <p:childTnLst>
+                        <p:par>
+                          <p:cTn id="5" fill="hold">
+                            <p:stCondLst>
+                              <p:cond delay="0"/>
+                            </p:stCondLst>
+                            <p:childTnLst>
+                              <p:animEffect transition="in" filter="wipe(up)">
+                                <p:cBhvr>
+                                  <p:cTn id="6" dur="450" fill="hold"/>
+                                  <p:tgtEl>
+                                    <p:spTgt spid="11"/>
+                                  </p:tgtEl>
+                                </p:cBhvr>
+                              </p:animEffect>
+                            </p:childTnLst>
+                          </p:cTn>
+                        </p:par>
+                        <p:par>
+                          <p:cTn id="7" fill="hold">
+                            <p:stCondLst>
+                              <p:cond delay="160"/>
+                            </p:stCondLst>
+                            <p:childTnLst>
+                              <p:animEffect transition="in" filter="wipe(up)">
+                                <p:cBhvr>
+                                  <p:cTn id="8" dur="450" fill="hold"/>
+                                  <p:tgtEl>
+                                    <p:spTgt spid="18"/>
+                                  </p:tgtEl>
+                                </p:cBhvr>
+                              </p:animEffect>
+                            </p:childTnLst>
+                          </p:cTn>
+                        </p:par>
+                        <p:par>
+                          <p:cTn id="9" fill="hold">
+                            <p:stCondLst>
+                              <p:cond delay="320"/>
+                            </p:stCondLst>
+                            <p:childTnLst>
+                              <p:animEffect transition="in" filter="wipe(up)">
+                                <p:cBhvr>
+                                  <p:cTn id="10" dur="450" fill="hold"/>
+                                  <p:tgtEl>
+                                    <p:spTgt spid="25"/>
+                                  </p:tgtEl>
+                                </p:cBhvr>
+                              </p:animEffect>
+                            </p:childTnLst>
+                          </p:cTn>
+                        </p:par>
+                      </p:childTnLst>
+                    </p:cTn>
+                  </p:par>
+                </p:childTnLst>
+              </p:cTn>
+              <p:prevCondLst>
+                <p:cond evt="onPrevClick" delay="0"/>
+              </p:prevCondLst>
+              <p:nextCondLst>
+                <p:cond evt="onNextClick" delay="0"/>
+              </p:nextCondLst>
+            </p:seq>
+          </p:childTnLst>
+        </p:cTn>
+      </p:par>
+    </p:tnLst>
+  </p:timing>
+  <p:transition dur="500" spd="fast">
+    <p:push dir="u"/>
   </p:transition>
 </p:sld>
 </file>
@@ -4933,7 +5043,7 @@
           </a:prstGeom>
           <a:solidFill>
             <a:srgbClr val="060E24">
-              <a:alpha val="50000"/>
+              <a:alpha val="38000"/>
             </a:srgbClr>
           </a:solidFill>
           <a:ln>
@@ -4965,6 +5075,49 @@
       <p:sp>
         <p:nvSpPr>
           <p:cNvPr id="4" name="Rectangle 3"/>
+          <p:cNvSpPr/>
+          <p:nvPr/>
+        </p:nvSpPr>
+        <p:spPr>
+          <a:xfrm>
+            <a:off x="0" y="0"/>
+            <a:ext cx="12191695" cy="1664208"/>
+          </a:xfrm>
+          <a:prstGeom prst="rect">
+            <a:avLst/>
+          </a:prstGeom>
+          <a:solidFill>
+            <a:srgbClr val="0A1638"/>
+          </a:solidFill>
+          <a:ln>
+            <a:noFill/>
+          </a:ln>
+        </p:spPr>
+        <p:style>
+          <a:lnRef idx="1">
+            <a:schemeClr val="accent1"/>
+          </a:lnRef>
+          <a:fillRef idx="3">
+            <a:schemeClr val="accent1"/>
+          </a:fillRef>
+          <a:effectRef idx="2">
+            <a:schemeClr val="accent1"/>
+          </a:effectRef>
+          <a:fontRef idx="minor">
+            <a:schemeClr val="lt1"/>
+          </a:fontRef>
+        </p:style>
+        <p:txBody>
+          <a:bodyPr rtlCol="0" anchor="ctr"/>
+          <a:lstStyle/>
+          <a:p>
+            <a:pPr algn="ctr"/>
+          </a:p>
+        </p:txBody>
+      </p:sp>
+      <p:sp>
+        <p:nvSpPr>
+          <p:cNvPr id="5" name="Rectangle 4"/>
           <p:cNvSpPr/>
           <p:nvPr/>
         </p:nvSpPr>
@@ -5007,7 +5160,7 @@
       </p:sp>
       <p:sp>
         <p:nvSpPr>
-          <p:cNvPr id="5" name="Rectangle 4"/>
+          <p:cNvPr id="6" name="Rectangle 5"/>
           <p:cNvSpPr/>
           <p:nvPr/>
         </p:nvSpPr>
@@ -5050,14 +5203,14 @@
       </p:sp>
       <p:sp>
         <p:nvSpPr>
-          <p:cNvPr id="6" name="Rectangle 5"/>
+          <p:cNvPr id="7" name="Rectangle 6"/>
           <p:cNvSpPr/>
           <p:nvPr/>
         </p:nvSpPr>
         <p:spPr>
           <a:xfrm>
             <a:off x="502920" y="365760"/>
-            <a:ext cx="1417320" cy="237744"/>
+            <a:ext cx="1371600" cy="237744"/>
           </a:xfrm>
           <a:prstGeom prst="rect">
             <a:avLst/>
@@ -5101,14 +5254,14 @@
       </p:sp>
       <p:sp>
         <p:nvSpPr>
-          <p:cNvPr id="7" name="TextBox 6"/>
+          <p:cNvPr id="8" name="TextBox 7"/>
           <p:cNvSpPr txBox="1"/>
           <p:nvPr/>
         </p:nvSpPr>
         <p:spPr>
           <a:xfrm>
             <a:off x="502920" y="694944"/>
-            <a:ext cx="8229600" cy="713232"/>
+            <a:ext cx="8412480" cy="694944"/>
           </a:xfrm>
           <a:prstGeom prst="rect">
             <a:avLst/>
@@ -5143,14 +5296,14 @@
       </p:sp>
       <p:sp>
         <p:nvSpPr>
-          <p:cNvPr id="8" name="Rectangle 7"/>
+          <p:cNvPr id="9" name="Rectangle 8"/>
           <p:cNvSpPr/>
           <p:nvPr/>
         </p:nvSpPr>
         <p:spPr>
           <a:xfrm>
-            <a:off x="502920" y="1481328"/>
-            <a:ext cx="4114800" cy="31750"/>
+            <a:off x="502920" y="1463040"/>
+            <a:ext cx="4023360" cy="31750"/>
           </a:xfrm>
           <a:prstGeom prst="rect">
             <a:avLst/>
@@ -5186,7 +5339,7 @@
       </p:sp>
       <p:pic>
         <p:nvPicPr>
-          <p:cNvPr id="9" name="Picture 8" descr="logo_horiz.png"/>
+          <p:cNvPr id="10" name="Picture 9" descr="logo_horiz.png"/>
           <p:cNvPicPr>
             <a:picLocks noChangeAspect="1"/>
           </p:cNvPicPr>
@@ -5200,8 +5353,8 @@
         </p:blipFill>
         <p:spPr>
           <a:xfrm>
-            <a:off x="10116008" y="6291072"/>
-            <a:ext cx="1874519" cy="420624"/>
+            <a:off x="10161727" y="6291072"/>
+            <a:ext cx="1828800" cy="420624"/>
           </a:xfrm>
           <a:prstGeom prst="rect">
             <a:avLst/>
@@ -5210,7 +5363,7 @@
       </p:pic>
       <p:sp>
         <p:nvSpPr>
-          <p:cNvPr id="10" name="Rectangle 9"/>
+          <p:cNvPr id="11" name="Rectangle 10"/>
           <p:cNvSpPr/>
           <p:nvPr/>
         </p:nvSpPr>
@@ -5223,11 +5376,11 @@
             <a:avLst/>
           </a:prstGeom>
           <a:solidFill>
-            <a:srgbClr val="162A68"/>
+            <a:srgbClr val="F2F7FF"/>
           </a:solidFill>
-          <a:ln w="9525">
+          <a:ln w="6350">
             <a:solidFill>
-              <a:srgbClr val="4A68B8"/>
+              <a:srgbClr val="2FDFE5"/>
             </a:solidFill>
           </a:ln>
         </p:spPr>
@@ -5255,14 +5408,14 @@
       </p:sp>
       <p:sp>
         <p:nvSpPr>
-          <p:cNvPr id="11" name="Rectangle 10"/>
+          <p:cNvPr id="12" name="Rectangle 11"/>
           <p:cNvSpPr/>
           <p:nvPr/>
         </p:nvSpPr>
         <p:spPr>
           <a:xfrm>
             <a:off x="502920" y="1719072"/>
-            <a:ext cx="3688994" cy="38100"/>
+            <a:ext cx="3688994" cy="50800"/>
           </a:xfrm>
           <a:prstGeom prst="rect">
             <a:avLst/>
@@ -5298,14 +5451,14 @@
       </p:sp>
       <p:sp>
         <p:nvSpPr>
-          <p:cNvPr id="12" name="Oval 11"/>
+          <p:cNvPr id="13" name="Oval 12"/>
           <p:cNvSpPr/>
           <p:nvPr/>
         </p:nvSpPr>
         <p:spPr>
           <a:xfrm>
             <a:off x="685800" y="1901952"/>
-            <a:ext cx="233172" cy="233172"/>
+            <a:ext cx="228600" cy="228600"/>
           </a:xfrm>
           <a:prstGeom prst="ellipse">
             <a:avLst/>
@@ -5343,14 +5496,14 @@
       </p:sp>
       <p:sp>
         <p:nvSpPr>
-          <p:cNvPr id="13" name="TextBox 12"/>
+          <p:cNvPr id="14" name="TextBox 13"/>
           <p:cNvSpPr txBox="1"/>
           <p:nvPr/>
         </p:nvSpPr>
         <p:spPr>
           <a:xfrm>
             <a:off x="685800" y="1901952"/>
-            <a:ext cx="233172" cy="233172"/>
+            <a:ext cx="228600" cy="228600"/>
           </a:xfrm>
           <a:prstGeom prst="rect">
             <a:avLst/>
@@ -5377,14 +5530,14 @@
       </p:sp>
       <p:sp>
         <p:nvSpPr>
-          <p:cNvPr id="14" name="TextBox 13"/>
+          <p:cNvPr id="15" name="TextBox 14"/>
           <p:cNvSpPr txBox="1"/>
           <p:nvPr/>
         </p:nvSpPr>
         <p:spPr>
           <a:xfrm>
-            <a:off x="630936" y="2226564"/>
-            <a:ext cx="3432962" cy="493776"/>
+            <a:off x="649224" y="2221992"/>
+            <a:ext cx="3396386" cy="512064"/>
           </a:xfrm>
           <a:prstGeom prst="rect">
             <a:avLst/>
@@ -5401,7 +5554,7 @@
             <a:r>
               <a:rPr sz="950" b="1">
                 <a:solidFill>
-                  <a:srgbClr val="FFFFFF"/>
+                  <a:srgbClr val="081432"/>
                 </a:solidFill>
               </a:rPr>
               <a:t>Contactación multicanal</a:t>
@@ -5411,14 +5564,14 @@
       </p:sp>
       <p:sp>
         <p:nvSpPr>
-          <p:cNvPr id="15" name="Rectangle 14"/>
+          <p:cNvPr id="16" name="Rectangle 15"/>
           <p:cNvSpPr/>
           <p:nvPr/>
         </p:nvSpPr>
         <p:spPr>
           <a:xfrm>
-            <a:off x="630936" y="2738628"/>
-            <a:ext cx="3432962" cy="12700"/>
+            <a:off x="630936" y="2752344"/>
+            <a:ext cx="3432962" cy="15240"/>
           </a:xfrm>
           <a:prstGeom prst="rect">
             <a:avLst/>
@@ -5454,21 +5607,21 @@
       </p:sp>
       <p:sp>
         <p:nvSpPr>
-          <p:cNvPr id="16" name="TextBox 15"/>
+          <p:cNvPr id="17" name="TextBox 16"/>
           <p:cNvSpPr txBox="1"/>
           <p:nvPr/>
         </p:nvSpPr>
         <p:spPr>
           <a:xfrm>
-            <a:off x="630936" y="2814828"/>
-            <a:ext cx="3432962" cy="3231388"/>
+            <a:off x="649224" y="2828544"/>
+            <a:ext cx="3414674" cy="3243072"/>
           </a:xfrm>
           <a:prstGeom prst="rect">
             <a:avLst/>
           </a:prstGeom>
           <a:noFill/>
         </p:spPr>
-        <p:txBody lIns="50800" tIns="25400" rIns="50800" bIns="25400">
+        <p:txBody lIns="50800" tIns="38100" rIns="50800" bIns="38100">
           <a:bodyPr wrap="square">
             <a:spAutoFit/>
           </a:bodyPr>
@@ -5490,7 +5643,7 @@
             <a:r>
               <a:rPr sz="750">
                 <a:solidFill>
-                  <a:srgbClr val="E4EEFF"/>
+                  <a:srgbClr val="223A6A"/>
                 </a:solidFill>
               </a:rPr>
               <a:t>Llamadas outbound con IVR especializado</a:t>
@@ -5513,7 +5666,7 @@
             <a:r>
               <a:rPr sz="750">
                 <a:solidFill>
-                  <a:srgbClr val="E4EEFF"/>
+                  <a:srgbClr val="223A6A"/>
                 </a:solidFill>
               </a:rPr>
               <a:t>SMS, email y WhatsApp Business certificado</a:t>
@@ -5536,7 +5689,7 @@
             <a:r>
               <a:rPr sz="750">
                 <a:solidFill>
-                  <a:srgbClr val="E4EEFF"/>
+                  <a:srgbClr val="223A6A"/>
                 </a:solidFill>
               </a:rPr>
               <a:t>Cartas físicas certificadas cuando procede</a:t>
@@ -5559,7 +5712,7 @@
             <a:r>
               <a:rPr sz="750">
                 <a:solidFill>
-                  <a:srgbClr val="E4EEFF"/>
+                  <a:srgbClr val="223A6A"/>
                 </a:solidFill>
               </a:rPr>
               <a:t>Ventana de contacto 8:00-22:00, L-S</a:t>
@@ -5569,7 +5722,7 @@
       </p:sp>
       <p:sp>
         <p:nvSpPr>
-          <p:cNvPr id="17" name="Rectangle 16"/>
+          <p:cNvPr id="18" name="Rectangle 17"/>
           <p:cNvSpPr/>
           <p:nvPr/>
         </p:nvSpPr>
@@ -5582,11 +5735,11 @@
             <a:avLst/>
           </a:prstGeom>
           <a:solidFill>
-            <a:srgbClr val="162A68"/>
+            <a:srgbClr val="F2F7FF"/>
           </a:solidFill>
-          <a:ln w="9525">
+          <a:ln w="6350">
             <a:solidFill>
-              <a:srgbClr val="4A68B8"/>
+              <a:srgbClr val="2FDFE5"/>
             </a:solidFill>
           </a:ln>
         </p:spPr>
@@ -5614,14 +5767,14 @@
       </p:sp>
       <p:sp>
         <p:nvSpPr>
-          <p:cNvPr id="18" name="Rectangle 17"/>
+          <p:cNvPr id="19" name="Rectangle 18"/>
           <p:cNvSpPr/>
           <p:nvPr/>
         </p:nvSpPr>
         <p:spPr>
           <a:xfrm>
             <a:off x="4338218" y="1719072"/>
-            <a:ext cx="3688994" cy="38100"/>
+            <a:ext cx="3688994" cy="50800"/>
           </a:xfrm>
           <a:prstGeom prst="rect">
             <a:avLst/>
@@ -5657,14 +5810,14 @@
       </p:sp>
       <p:sp>
         <p:nvSpPr>
-          <p:cNvPr id="19" name="Oval 18"/>
+          <p:cNvPr id="20" name="Oval 19"/>
           <p:cNvSpPr/>
           <p:nvPr/>
         </p:nvSpPr>
         <p:spPr>
           <a:xfrm>
             <a:off x="4521098" y="1901952"/>
-            <a:ext cx="233172" cy="233172"/>
+            <a:ext cx="228600" cy="228600"/>
           </a:xfrm>
           <a:prstGeom prst="ellipse">
             <a:avLst/>
@@ -5702,14 +5855,14 @@
       </p:sp>
       <p:sp>
         <p:nvSpPr>
-          <p:cNvPr id="20" name="TextBox 19"/>
+          <p:cNvPr id="21" name="TextBox 20"/>
           <p:cNvSpPr txBox="1"/>
           <p:nvPr/>
         </p:nvSpPr>
         <p:spPr>
           <a:xfrm>
             <a:off x="4521098" y="1901952"/>
-            <a:ext cx="233172" cy="233172"/>
+            <a:ext cx="228600" cy="228600"/>
           </a:xfrm>
           <a:prstGeom prst="rect">
             <a:avLst/>
@@ -5736,14 +5889,14 @@
       </p:sp>
       <p:sp>
         <p:nvSpPr>
-          <p:cNvPr id="21" name="TextBox 20"/>
+          <p:cNvPr id="22" name="TextBox 21"/>
           <p:cNvSpPr txBox="1"/>
           <p:nvPr/>
         </p:nvSpPr>
         <p:spPr>
           <a:xfrm>
-            <a:off x="4466234" y="2226564"/>
-            <a:ext cx="3432962" cy="493776"/>
+            <a:off x="4484522" y="2221992"/>
+            <a:ext cx="3396386" cy="512064"/>
           </a:xfrm>
           <a:prstGeom prst="rect">
             <a:avLst/>
@@ -5760,7 +5913,7 @@
             <a:r>
               <a:rPr sz="950" b="1">
                 <a:solidFill>
-                  <a:srgbClr val="FFFFFF"/>
+                  <a:srgbClr val="081432"/>
                 </a:solidFill>
               </a:rPr>
               <a:t>Negociación de acuerdos</a:t>
@@ -5770,14 +5923,14 @@
       </p:sp>
       <p:sp>
         <p:nvSpPr>
-          <p:cNvPr id="22" name="Rectangle 21"/>
+          <p:cNvPr id="23" name="Rectangle 22"/>
           <p:cNvSpPr/>
           <p:nvPr/>
         </p:nvSpPr>
         <p:spPr>
           <a:xfrm>
-            <a:off x="4466234" y="2738628"/>
-            <a:ext cx="3432962" cy="12700"/>
+            <a:off x="4466234" y="2752344"/>
+            <a:ext cx="3432962" cy="15240"/>
           </a:xfrm>
           <a:prstGeom prst="rect">
             <a:avLst/>
@@ -5813,21 +5966,21 @@
       </p:sp>
       <p:sp>
         <p:nvSpPr>
-          <p:cNvPr id="23" name="TextBox 22"/>
+          <p:cNvPr id="24" name="TextBox 23"/>
           <p:cNvSpPr txBox="1"/>
           <p:nvPr/>
         </p:nvSpPr>
         <p:spPr>
           <a:xfrm>
-            <a:off x="4466234" y="2814828"/>
-            <a:ext cx="3432962" cy="3231388"/>
+            <a:off x="4484522" y="2828544"/>
+            <a:ext cx="3414674" cy="3243072"/>
           </a:xfrm>
           <a:prstGeom prst="rect">
             <a:avLst/>
           </a:prstGeom>
           <a:noFill/>
         </p:spPr>
-        <p:txBody lIns="50800" tIns="25400" rIns="50800" bIns="25400">
+        <p:txBody lIns="50800" tIns="38100" rIns="50800" bIns="38100">
           <a:bodyPr wrap="square">
             <a:spAutoFit/>
           </a:bodyPr>
@@ -5849,7 +6002,7 @@
             <a:r>
               <a:rPr sz="750">
                 <a:solidFill>
-                  <a:srgbClr val="E4EEFF"/>
+                  <a:srgbClr val="223A6A"/>
                 </a:solidFill>
               </a:rPr>
               <a:t>Quitas y daciones dentro de límites pactados</a:t>
@@ -5872,7 +6025,7 @@
             <a:r>
               <a:rPr sz="750">
                 <a:solidFill>
-                  <a:srgbClr val="E4EEFF"/>
+                  <a:srgbClr val="223A6A"/>
                 </a:solidFill>
               </a:rPr>
               <a:t>Planes de pago de 3 a 48 meses</a:t>
@@ -5895,7 +6048,7 @@
             <a:r>
               <a:rPr sz="750">
                 <a:solidFill>
-                  <a:srgbClr val="E4EEFF"/>
+                  <a:srgbClr val="223A6A"/>
                 </a:solidFill>
               </a:rPr>
               <a:t>Firma de acuerdos digitales con validez legal</a:t>
@@ -5918,7 +6071,7 @@
             <a:r>
               <a:rPr sz="750">
                 <a:solidFill>
-                  <a:srgbClr val="E4EEFF"/>
+                  <a:srgbClr val="223A6A"/>
                 </a:solidFill>
               </a:rPr>
               <a:t>Grabación de llamadas como respaldo</a:t>
@@ -5928,7 +6081,7 @@
       </p:sp>
       <p:sp>
         <p:nvSpPr>
-          <p:cNvPr id="24" name="Rectangle 23"/>
+          <p:cNvPr id="25" name="Rectangle 24"/>
           <p:cNvSpPr/>
           <p:nvPr/>
         </p:nvSpPr>
@@ -5941,11 +6094,11 @@
             <a:avLst/>
           </a:prstGeom>
           <a:solidFill>
-            <a:srgbClr val="162A68"/>
+            <a:srgbClr val="F2F7FF"/>
           </a:solidFill>
-          <a:ln w="9525">
+          <a:ln w="6350">
             <a:solidFill>
-              <a:srgbClr val="4A68B8"/>
+              <a:srgbClr val="2FDFE5"/>
             </a:solidFill>
           </a:ln>
         </p:spPr>
@@ -5973,14 +6126,14 @@
       </p:sp>
       <p:sp>
         <p:nvSpPr>
-          <p:cNvPr id="25" name="Rectangle 24"/>
+          <p:cNvPr id="26" name="Rectangle 25"/>
           <p:cNvSpPr/>
           <p:nvPr/>
         </p:nvSpPr>
         <p:spPr>
           <a:xfrm>
             <a:off x="8173516" y="1719072"/>
-            <a:ext cx="3688994" cy="38100"/>
+            <a:ext cx="3688994" cy="50800"/>
           </a:xfrm>
           <a:prstGeom prst="rect">
             <a:avLst/>
@@ -6016,14 +6169,14 @@
       </p:sp>
       <p:sp>
         <p:nvSpPr>
-          <p:cNvPr id="26" name="Oval 25"/>
+          <p:cNvPr id="27" name="Oval 26"/>
           <p:cNvSpPr/>
           <p:nvPr/>
         </p:nvSpPr>
         <p:spPr>
           <a:xfrm>
             <a:off x="8356396" y="1901952"/>
-            <a:ext cx="233172" cy="233172"/>
+            <a:ext cx="228600" cy="228600"/>
           </a:xfrm>
           <a:prstGeom prst="ellipse">
             <a:avLst/>
@@ -6061,14 +6214,14 @@
       </p:sp>
       <p:sp>
         <p:nvSpPr>
-          <p:cNvPr id="27" name="TextBox 26"/>
+          <p:cNvPr id="28" name="TextBox 27"/>
           <p:cNvSpPr txBox="1"/>
           <p:nvPr/>
         </p:nvSpPr>
         <p:spPr>
           <a:xfrm>
             <a:off x="8356396" y="1901952"/>
-            <a:ext cx="233172" cy="233172"/>
+            <a:ext cx="228600" cy="228600"/>
           </a:xfrm>
           <a:prstGeom prst="rect">
             <a:avLst/>
@@ -6095,14 +6248,14 @@
       </p:sp>
       <p:sp>
         <p:nvSpPr>
-          <p:cNvPr id="28" name="TextBox 27"/>
+          <p:cNvPr id="29" name="TextBox 28"/>
           <p:cNvSpPr txBox="1"/>
           <p:nvPr/>
         </p:nvSpPr>
         <p:spPr>
           <a:xfrm>
-            <a:off x="8301532" y="2226564"/>
-            <a:ext cx="3432962" cy="493776"/>
+            <a:off x="8319820" y="2221992"/>
+            <a:ext cx="3396386" cy="512064"/>
           </a:xfrm>
           <a:prstGeom prst="rect">
             <a:avLst/>
@@ -6119,7 +6272,7 @@
             <a:r>
               <a:rPr sz="950" b="1">
                 <a:solidFill>
-                  <a:srgbClr val="FFFFFF"/>
+                  <a:srgbClr val="081432"/>
                 </a:solidFill>
               </a:rPr>
               <a:t>Seguimiento y cobro</a:t>
@@ -6129,14 +6282,14 @@
       </p:sp>
       <p:sp>
         <p:nvSpPr>
-          <p:cNvPr id="29" name="Rectangle 28"/>
+          <p:cNvPr id="30" name="Rectangle 29"/>
           <p:cNvSpPr/>
           <p:nvPr/>
         </p:nvSpPr>
         <p:spPr>
           <a:xfrm>
-            <a:off x="8301532" y="2738628"/>
-            <a:ext cx="3432962" cy="12700"/>
+            <a:off x="8301532" y="2752344"/>
+            <a:ext cx="3432962" cy="15240"/>
           </a:xfrm>
           <a:prstGeom prst="rect">
             <a:avLst/>
@@ -6172,21 +6325,21 @@
       </p:sp>
       <p:sp>
         <p:nvSpPr>
-          <p:cNvPr id="30" name="TextBox 29"/>
+          <p:cNvPr id="31" name="TextBox 30"/>
           <p:cNvSpPr txBox="1"/>
           <p:nvPr/>
         </p:nvSpPr>
         <p:spPr>
           <a:xfrm>
-            <a:off x="8301532" y="2814828"/>
-            <a:ext cx="3432962" cy="3231388"/>
+            <a:off x="8319820" y="2828544"/>
+            <a:ext cx="3414674" cy="3243072"/>
           </a:xfrm>
           <a:prstGeom prst="rect">
             <a:avLst/>
           </a:prstGeom>
           <a:noFill/>
         </p:spPr>
-        <p:txBody lIns="50800" tIns="25400" rIns="50800" bIns="25400">
+        <p:txBody lIns="50800" tIns="38100" rIns="50800" bIns="38100">
           <a:bodyPr wrap="square">
             <a:spAutoFit/>
           </a:bodyPr>
@@ -6208,7 +6361,7 @@
             <a:r>
               <a:rPr sz="750">
                 <a:solidFill>
-                  <a:srgbClr val="E4EEFF"/>
+                  <a:srgbClr val="223A6A"/>
                 </a:solidFill>
               </a:rPr>
               <a:t>Domiciliación SEPA y pasarela de pago online</a:t>
@@ -6231,7 +6384,7 @@
             <a:r>
               <a:rPr sz="750">
                 <a:solidFill>
-                  <a:srgbClr val="E4EEFF"/>
+                  <a:srgbClr val="223A6A"/>
                 </a:solidFill>
               </a:rPr>
               <a:t>Recordatorios automáticos de vencimientos</a:t>
@@ -6254,7 +6407,7 @@
             <a:r>
               <a:rPr sz="750">
                 <a:solidFill>
-                  <a:srgbClr val="E4EEFF"/>
+                  <a:srgbClr val="223A6A"/>
                 </a:solidFill>
               </a:rPr>
               <a:t>Renegociación ante impagos parciales</a:t>
@@ -6277,7 +6430,7 @@
             <a:r>
               <a:rPr sz="750">
                 <a:solidFill>
-                  <a:srgbClr val="E4EEFF"/>
+                  <a:srgbClr val="223A6A"/>
                 </a:solidFill>
               </a:rPr>
               <a:t>Dashboard de seguimiento en tiempo real</a:t>
@@ -6290,8 +6443,90 @@
   <p:clrMapOvr>
     <a:masterClrMapping/>
   </p:clrMapOvr>
-  <p:transition dur="700" spd="fast">
-    <p:fade/>
+  <p:timing>
+    <p:tnLst>
+      <p:par>
+        <p:cTn id="1" dur="indefin" restart="whenNotActive" nodeType="tmRoot">
+          <p:childTnLst>
+            <p:seq concurrent="1" nextAc="seek">
+              <p:cTn id="2" dur="indefin" nodeType="mainSeq">
+                <p:childTnLst>
+                  <p:par>
+                    <p:cTn id="3" fill="hold">
+                      <p:stCondLst>
+                        <p:cond delay="0"/>
+                      </p:stCondLst>
+                      <p:childTnLst>
+                        <p:par>
+                          <p:cTn id="5" fill="hold">
+                            <p:stCondLst>
+                              <p:cond delay="0"/>
+                            </p:stCondLst>
+                            <p:childTnLst>
+                              <p:animEffect transition="in" filter="wipe(up)">
+                                <p:cBhvr>
+                                  <p:cTn id="6" dur="450" fill="hold"/>
+                                  <p:tgtEl>
+                                    <p:spTgt spid="11"/>
+                                  </p:tgtEl>
+                                </p:cBhvr>
+                              </p:animEffect>
+                            </p:childTnLst>
+                          </p:cTn>
+                        </p:par>
+                        <p:par>
+                          <p:cTn id="7" fill="hold">
+                            <p:stCondLst>
+                              <p:cond delay="160"/>
+                            </p:stCondLst>
+                            <p:childTnLst>
+                              <p:animEffect transition="in" filter="wipe(up)">
+                                <p:cBhvr>
+                                  <p:cTn id="8" dur="450" fill="hold"/>
+                                  <p:tgtEl>
+                                    <p:spTgt spid="18"/>
+                                  </p:tgtEl>
+                                </p:cBhvr>
+                              </p:animEffect>
+                            </p:childTnLst>
+                          </p:cTn>
+                        </p:par>
+                        <p:par>
+                          <p:cTn id="9" fill="hold">
+                            <p:stCondLst>
+                              <p:cond delay="320"/>
+                            </p:stCondLst>
+                            <p:childTnLst>
+                              <p:animEffect transition="in" filter="wipe(up)">
+                                <p:cBhvr>
+                                  <p:cTn id="10" dur="450" fill="hold"/>
+                                  <p:tgtEl>
+                                    <p:spTgt spid="25"/>
+                                  </p:tgtEl>
+                                </p:cBhvr>
+                              </p:animEffect>
+                            </p:childTnLst>
+                          </p:cTn>
+                        </p:par>
+                      </p:childTnLst>
+                    </p:cTn>
+                  </p:par>
+                </p:childTnLst>
+              </p:cTn>
+              <p:prevCondLst>
+                <p:cond evt="onPrevClick" delay="0"/>
+              </p:prevCondLst>
+              <p:nextCondLst>
+                <p:cond evt="onNextClick" delay="0"/>
+              </p:nextCondLst>
+            </p:seq>
+          </p:childTnLst>
+        </p:cTn>
+      </p:par>
+    </p:tnLst>
+  </p:timing>
+  <p:transition dur="500" spd="fast">
+    <p:push dir="u"/>
   </p:transition>
 </p:sld>
 </file>
@@ -6346,7 +6581,7 @@
           </a:prstGeom>
           <a:solidFill>
             <a:srgbClr val="060E24">
-              <a:alpha val="50000"/>
+              <a:alpha val="38000"/>
             </a:srgbClr>
           </a:solidFill>
           <a:ln>
@@ -6378,6 +6613,49 @@
       <p:sp>
         <p:nvSpPr>
           <p:cNvPr id="4" name="Rectangle 3"/>
+          <p:cNvSpPr/>
+          <p:nvPr/>
+        </p:nvSpPr>
+        <p:spPr>
+          <a:xfrm>
+            <a:off x="0" y="0"/>
+            <a:ext cx="12191695" cy="1664208"/>
+          </a:xfrm>
+          <a:prstGeom prst="rect">
+            <a:avLst/>
+          </a:prstGeom>
+          <a:solidFill>
+            <a:srgbClr val="0A1638"/>
+          </a:solidFill>
+          <a:ln>
+            <a:noFill/>
+          </a:ln>
+        </p:spPr>
+        <p:style>
+          <a:lnRef idx="1">
+            <a:schemeClr val="accent1"/>
+          </a:lnRef>
+          <a:fillRef idx="3">
+            <a:schemeClr val="accent1"/>
+          </a:fillRef>
+          <a:effectRef idx="2">
+            <a:schemeClr val="accent1"/>
+          </a:effectRef>
+          <a:fontRef idx="minor">
+            <a:schemeClr val="lt1"/>
+          </a:fontRef>
+        </p:style>
+        <p:txBody>
+          <a:bodyPr rtlCol="0" anchor="ctr"/>
+          <a:lstStyle/>
+          <a:p>
+            <a:pPr algn="ctr"/>
+          </a:p>
+        </p:txBody>
+      </p:sp>
+      <p:sp>
+        <p:nvSpPr>
+          <p:cNvPr id="5" name="Rectangle 4"/>
           <p:cNvSpPr/>
           <p:nvPr/>
         </p:nvSpPr>
@@ -6420,7 +6698,7 @@
       </p:sp>
       <p:sp>
         <p:nvSpPr>
-          <p:cNvPr id="5" name="Rectangle 4"/>
+          <p:cNvPr id="6" name="Rectangle 5"/>
           <p:cNvSpPr/>
           <p:nvPr/>
         </p:nvSpPr>
@@ -6463,14 +6741,14 @@
       </p:sp>
       <p:sp>
         <p:nvSpPr>
-          <p:cNvPr id="6" name="Rectangle 5"/>
+          <p:cNvPr id="7" name="Rectangle 6"/>
           <p:cNvSpPr/>
           <p:nvPr/>
         </p:nvSpPr>
         <p:spPr>
           <a:xfrm>
             <a:off x="502920" y="365760"/>
-            <a:ext cx="1417320" cy="237744"/>
+            <a:ext cx="1371600" cy="237744"/>
           </a:xfrm>
           <a:prstGeom prst="rect">
             <a:avLst/>
@@ -6514,14 +6792,14 @@
       </p:sp>
       <p:sp>
         <p:nvSpPr>
-          <p:cNvPr id="7" name="TextBox 6"/>
+          <p:cNvPr id="8" name="TextBox 7"/>
           <p:cNvSpPr txBox="1"/>
           <p:nvPr/>
         </p:nvSpPr>
         <p:spPr>
           <a:xfrm>
             <a:off x="502920" y="694944"/>
-            <a:ext cx="8229600" cy="713232"/>
+            <a:ext cx="8412480" cy="694944"/>
           </a:xfrm>
           <a:prstGeom prst="rect">
             <a:avLst/>
@@ -6556,14 +6834,14 @@
       </p:sp>
       <p:sp>
         <p:nvSpPr>
-          <p:cNvPr id="8" name="Rectangle 7"/>
+          <p:cNvPr id="9" name="Rectangle 8"/>
           <p:cNvSpPr/>
           <p:nvPr/>
         </p:nvSpPr>
         <p:spPr>
           <a:xfrm>
-            <a:off x="502920" y="1481328"/>
-            <a:ext cx="4114800" cy="31750"/>
+            <a:off x="502920" y="1463040"/>
+            <a:ext cx="4023360" cy="31750"/>
           </a:xfrm>
           <a:prstGeom prst="rect">
             <a:avLst/>
@@ -6599,7 +6877,7 @@
       </p:sp>
       <p:pic>
         <p:nvPicPr>
-          <p:cNvPr id="9" name="Picture 8" descr="logo_horiz.png"/>
+          <p:cNvPr id="10" name="Picture 9" descr="logo_horiz.png"/>
           <p:cNvPicPr>
             <a:picLocks noChangeAspect="1"/>
           </p:cNvPicPr>
@@ -6613,8 +6891,8 @@
         </p:blipFill>
         <p:spPr>
           <a:xfrm>
-            <a:off x="10116008" y="6291072"/>
-            <a:ext cx="1874519" cy="420624"/>
+            <a:off x="10161727" y="6291072"/>
+            <a:ext cx="1828800" cy="420624"/>
           </a:xfrm>
           <a:prstGeom prst="rect">
             <a:avLst/>
@@ -6623,7 +6901,7 @@
       </p:pic>
       <p:sp>
         <p:nvSpPr>
-          <p:cNvPr id="10" name="Rectangle 9"/>
+          <p:cNvPr id="11" name="Rectangle 10"/>
           <p:cNvSpPr/>
           <p:nvPr/>
         </p:nvSpPr>
@@ -6636,11 +6914,11 @@
             <a:avLst/>
           </a:prstGeom>
           <a:solidFill>
-            <a:srgbClr val="162A68"/>
+            <a:srgbClr val="F2F7FF"/>
           </a:solidFill>
-          <a:ln w="9525">
+          <a:ln w="6350">
             <a:solidFill>
-              <a:srgbClr val="4A68B8"/>
+              <a:srgbClr val="2FDFE5"/>
             </a:solidFill>
           </a:ln>
         </p:spPr>
@@ -6668,14 +6946,14 @@
       </p:sp>
       <p:sp>
         <p:nvSpPr>
-          <p:cNvPr id="11" name="Rectangle 10"/>
+          <p:cNvPr id="12" name="Rectangle 11"/>
           <p:cNvSpPr/>
           <p:nvPr/>
         </p:nvSpPr>
         <p:spPr>
           <a:xfrm>
             <a:off x="502920" y="1719072"/>
-            <a:ext cx="3688994" cy="38100"/>
+            <a:ext cx="3688994" cy="50800"/>
           </a:xfrm>
           <a:prstGeom prst="rect">
             <a:avLst/>
@@ -6711,14 +6989,14 @@
       </p:sp>
       <p:sp>
         <p:nvSpPr>
-          <p:cNvPr id="12" name="Oval 11"/>
+          <p:cNvPr id="13" name="Oval 12"/>
           <p:cNvSpPr/>
           <p:nvPr/>
         </p:nvSpPr>
         <p:spPr>
           <a:xfrm>
             <a:off x="685800" y="1901952"/>
-            <a:ext cx="233172" cy="233172"/>
+            <a:ext cx="228600" cy="228600"/>
           </a:xfrm>
           <a:prstGeom prst="ellipse">
             <a:avLst/>
@@ -6756,14 +7034,14 @@
       </p:sp>
       <p:sp>
         <p:nvSpPr>
-          <p:cNvPr id="13" name="TextBox 12"/>
+          <p:cNvPr id="14" name="TextBox 13"/>
           <p:cNvSpPr txBox="1"/>
           <p:nvPr/>
         </p:nvSpPr>
         <p:spPr>
           <a:xfrm>
             <a:off x="685800" y="1901952"/>
-            <a:ext cx="233172" cy="233172"/>
+            <a:ext cx="228600" cy="228600"/>
           </a:xfrm>
           <a:prstGeom prst="rect">
             <a:avLst/>
@@ -6790,14 +7068,14 @@
       </p:sp>
       <p:sp>
         <p:nvSpPr>
-          <p:cNvPr id="14" name="TextBox 13"/>
+          <p:cNvPr id="15" name="TextBox 14"/>
           <p:cNvSpPr txBox="1"/>
           <p:nvPr/>
         </p:nvSpPr>
         <p:spPr>
           <a:xfrm>
-            <a:off x="630936" y="2226564"/>
-            <a:ext cx="3432962" cy="493776"/>
+            <a:off x="649224" y="2221992"/>
+            <a:ext cx="3396386" cy="512064"/>
           </a:xfrm>
           <a:prstGeom prst="rect">
             <a:avLst/>
@@ -6814,7 +7092,7 @@
             <a:r>
               <a:rPr sz="950" b="1">
                 <a:solidFill>
-                  <a:srgbClr val="FFFFFF"/>
+                  <a:srgbClr val="081432"/>
                 </a:solidFill>
               </a:rPr>
               <a:t>Análisis de viabilidad</a:t>
@@ -6824,14 +7102,14 @@
       </p:sp>
       <p:sp>
         <p:nvSpPr>
-          <p:cNvPr id="15" name="Rectangle 14"/>
+          <p:cNvPr id="16" name="Rectangle 15"/>
           <p:cNvSpPr/>
           <p:nvPr/>
         </p:nvSpPr>
         <p:spPr>
           <a:xfrm>
-            <a:off x="630936" y="2738628"/>
-            <a:ext cx="3432962" cy="12700"/>
+            <a:off x="630936" y="2752344"/>
+            <a:ext cx="3432962" cy="15240"/>
           </a:xfrm>
           <a:prstGeom prst="rect">
             <a:avLst/>
@@ -6867,21 +7145,21 @@
       </p:sp>
       <p:sp>
         <p:nvSpPr>
-          <p:cNvPr id="16" name="TextBox 15"/>
+          <p:cNvPr id="17" name="TextBox 16"/>
           <p:cNvSpPr txBox="1"/>
           <p:nvPr/>
         </p:nvSpPr>
         <p:spPr>
           <a:xfrm>
-            <a:off x="630936" y="2814828"/>
-            <a:ext cx="3432962" cy="3231388"/>
+            <a:off x="649224" y="2828544"/>
+            <a:ext cx="3414674" cy="3243072"/>
           </a:xfrm>
           <a:prstGeom prst="rect">
             <a:avLst/>
           </a:prstGeom>
           <a:noFill/>
         </p:spPr>
-        <p:txBody lIns="50800" tIns="25400" rIns="50800" bIns="25400">
+        <p:txBody lIns="50800" tIns="38100" rIns="50800" bIns="38100">
           <a:bodyPr wrap="square">
             <a:spAutoFit/>
           </a:bodyPr>
@@ -6903,7 +7181,7 @@
             <a:r>
               <a:rPr sz="750">
                 <a:solidFill>
-                  <a:srgbClr val="E4EEFF"/>
+                  <a:srgbClr val="223A6A"/>
                 </a:solidFill>
               </a:rPr>
               <a:t>Revisión de prescripción y documentación</a:t>
@@ -6926,7 +7204,7 @@
             <a:r>
               <a:rPr sz="750">
                 <a:solidFill>
-                  <a:srgbClr val="E4EEFF"/>
+                  <a:srgbClr val="223A6A"/>
                 </a:solidFill>
               </a:rPr>
               <a:t>Estudio de solvencia y localización de bienes</a:t>
@@ -6949,7 +7227,7 @@
             <a:r>
               <a:rPr sz="750">
                 <a:solidFill>
-                  <a:srgbClr val="E4EEFF"/>
+                  <a:srgbClr val="223A6A"/>
                 </a:solidFill>
               </a:rPr>
               <a:t>Valoración coste-beneficio por expediente</a:t>
@@ -6972,7 +7250,7 @@
             <a:r>
               <a:rPr sz="750">
                 <a:solidFill>
-                  <a:srgbClr val="E4EEFF"/>
+                  <a:srgbClr val="223A6A"/>
                 </a:solidFill>
               </a:rPr>
               <a:t>Decisión de elevación judicial en 48-72 h</a:t>
@@ -6982,7 +7260,7 @@
       </p:sp>
       <p:sp>
         <p:nvSpPr>
-          <p:cNvPr id="17" name="Rectangle 16"/>
+          <p:cNvPr id="18" name="Rectangle 17"/>
           <p:cNvSpPr/>
           <p:nvPr/>
         </p:nvSpPr>
@@ -6995,11 +7273,11 @@
             <a:avLst/>
           </a:prstGeom>
           <a:solidFill>
-            <a:srgbClr val="162A68"/>
+            <a:srgbClr val="F2F7FF"/>
           </a:solidFill>
-          <a:ln w="9525">
+          <a:ln w="6350">
             <a:solidFill>
-              <a:srgbClr val="4A68B8"/>
+              <a:srgbClr val="2FDFE5"/>
             </a:solidFill>
           </a:ln>
         </p:spPr>
@@ -7027,14 +7305,14 @@
       </p:sp>
       <p:sp>
         <p:nvSpPr>
-          <p:cNvPr id="18" name="Rectangle 17"/>
+          <p:cNvPr id="19" name="Rectangle 18"/>
           <p:cNvSpPr/>
           <p:nvPr/>
         </p:nvSpPr>
         <p:spPr>
           <a:xfrm>
             <a:off x="4338218" y="1719072"/>
-            <a:ext cx="3688994" cy="38100"/>
+            <a:ext cx="3688994" cy="50800"/>
           </a:xfrm>
           <a:prstGeom prst="rect">
             <a:avLst/>
@@ -7070,14 +7348,14 @@
       </p:sp>
       <p:sp>
         <p:nvSpPr>
-          <p:cNvPr id="19" name="Oval 18"/>
+          <p:cNvPr id="20" name="Oval 19"/>
           <p:cNvSpPr/>
           <p:nvPr/>
         </p:nvSpPr>
         <p:spPr>
           <a:xfrm>
             <a:off x="4521098" y="1901952"/>
-            <a:ext cx="233172" cy="233172"/>
+            <a:ext cx="228600" cy="228600"/>
           </a:xfrm>
           <a:prstGeom prst="ellipse">
             <a:avLst/>
@@ -7115,14 +7393,14 @@
       </p:sp>
       <p:sp>
         <p:nvSpPr>
-          <p:cNvPr id="20" name="TextBox 19"/>
+          <p:cNvPr id="21" name="TextBox 20"/>
           <p:cNvSpPr txBox="1"/>
           <p:nvPr/>
         </p:nvSpPr>
         <p:spPr>
           <a:xfrm>
             <a:off x="4521098" y="1901952"/>
-            <a:ext cx="233172" cy="233172"/>
+            <a:ext cx="228600" cy="228600"/>
           </a:xfrm>
           <a:prstGeom prst="rect">
             <a:avLst/>
@@ -7149,14 +7427,14 @@
       </p:sp>
       <p:sp>
         <p:nvSpPr>
-          <p:cNvPr id="21" name="TextBox 20"/>
+          <p:cNvPr id="22" name="TextBox 21"/>
           <p:cNvSpPr txBox="1"/>
           <p:nvPr/>
         </p:nvSpPr>
         <p:spPr>
           <a:xfrm>
-            <a:off x="4466234" y="2226564"/>
-            <a:ext cx="3432962" cy="493776"/>
+            <a:off x="4484522" y="2221992"/>
+            <a:ext cx="3396386" cy="512064"/>
           </a:xfrm>
           <a:prstGeom prst="rect">
             <a:avLst/>
@@ -7173,7 +7451,7 @@
             <a:r>
               <a:rPr sz="950" b="1">
                 <a:solidFill>
-                  <a:srgbClr val="FFFFFF"/>
+                  <a:srgbClr val="081432"/>
                 </a:solidFill>
               </a:rPr>
               <a:t>Proceso judicial</a:t>
@@ -7183,14 +7461,14 @@
       </p:sp>
       <p:sp>
         <p:nvSpPr>
-          <p:cNvPr id="22" name="Rectangle 21"/>
+          <p:cNvPr id="23" name="Rectangle 22"/>
           <p:cNvSpPr/>
           <p:nvPr/>
         </p:nvSpPr>
         <p:spPr>
           <a:xfrm>
-            <a:off x="4466234" y="2738628"/>
-            <a:ext cx="3432962" cy="12700"/>
+            <a:off x="4466234" y="2752344"/>
+            <a:ext cx="3432962" cy="15240"/>
           </a:xfrm>
           <a:prstGeom prst="rect">
             <a:avLst/>
@@ -7226,21 +7504,21 @@
       </p:sp>
       <p:sp>
         <p:nvSpPr>
-          <p:cNvPr id="23" name="TextBox 22"/>
+          <p:cNvPr id="24" name="TextBox 23"/>
           <p:cNvSpPr txBox="1"/>
           <p:nvPr/>
         </p:nvSpPr>
         <p:spPr>
           <a:xfrm>
-            <a:off x="4466234" y="2814828"/>
-            <a:ext cx="3432962" cy="3231388"/>
+            <a:off x="4484522" y="2828544"/>
+            <a:ext cx="3414674" cy="3243072"/>
           </a:xfrm>
           <a:prstGeom prst="rect">
             <a:avLst/>
           </a:prstGeom>
           <a:noFill/>
         </p:spPr>
-        <p:txBody lIns="50800" tIns="25400" rIns="50800" bIns="25400">
+        <p:txBody lIns="50800" tIns="38100" rIns="50800" bIns="38100">
           <a:bodyPr wrap="square">
             <a:spAutoFit/>
           </a:bodyPr>
@@ -7262,7 +7540,7 @@
             <a:r>
               <a:rPr sz="750">
                 <a:solidFill>
-                  <a:srgbClr val="E4EEFF"/>
+                  <a:srgbClr val="223A6A"/>
                 </a:solidFill>
               </a:rPr>
               <a:t>Interposición de monitorio o juicio verbal</a:t>
@@ -7285,7 +7563,7 @@
             <a:r>
               <a:rPr sz="750">
                 <a:solidFill>
-                  <a:srgbClr val="E4EEFF"/>
+                  <a:srgbClr val="223A6A"/>
                 </a:solidFill>
               </a:rPr>
               <a:t>Red de letrados en todas las CC.AA.</a:t>
@@ -7308,7 +7586,7 @@
             <a:r>
               <a:rPr sz="750">
                 <a:solidFill>
-                  <a:srgbClr val="E4EEFF"/>
+                  <a:srgbClr val="223A6A"/>
                 </a:solidFill>
               </a:rPr>
               <a:t>Coordinación con procuradores y notificaciones</a:t>
@@ -7331,7 +7609,7 @@
             <a:r>
               <a:rPr sz="750">
                 <a:solidFill>
-                  <a:srgbClr val="E4EEFF"/>
+                  <a:srgbClr val="223A6A"/>
                 </a:solidFill>
               </a:rPr>
               <a:t>Reporting de estado mensual</a:t>
@@ -7341,7 +7619,7 @@
       </p:sp>
       <p:sp>
         <p:nvSpPr>
-          <p:cNvPr id="24" name="Rectangle 23"/>
+          <p:cNvPr id="25" name="Rectangle 24"/>
           <p:cNvSpPr/>
           <p:nvPr/>
         </p:nvSpPr>
@@ -7354,11 +7632,11 @@
             <a:avLst/>
           </a:prstGeom>
           <a:solidFill>
-            <a:srgbClr val="162A68"/>
+            <a:srgbClr val="F2F7FF"/>
           </a:solidFill>
-          <a:ln w="9525">
+          <a:ln w="6350">
             <a:solidFill>
-              <a:srgbClr val="4A68B8"/>
+              <a:srgbClr val="2FDFE5"/>
             </a:solidFill>
           </a:ln>
         </p:spPr>
@@ -7386,14 +7664,14 @@
       </p:sp>
       <p:sp>
         <p:nvSpPr>
-          <p:cNvPr id="25" name="Rectangle 24"/>
+          <p:cNvPr id="26" name="Rectangle 25"/>
           <p:cNvSpPr/>
           <p:nvPr/>
         </p:nvSpPr>
         <p:spPr>
           <a:xfrm>
             <a:off x="8173516" y="1719072"/>
-            <a:ext cx="3688994" cy="38100"/>
+            <a:ext cx="3688994" cy="50800"/>
           </a:xfrm>
           <a:prstGeom prst="rect">
             <a:avLst/>
@@ -7429,14 +7707,14 @@
       </p:sp>
       <p:sp>
         <p:nvSpPr>
-          <p:cNvPr id="26" name="Oval 25"/>
+          <p:cNvPr id="27" name="Oval 26"/>
           <p:cNvSpPr/>
           <p:nvPr/>
         </p:nvSpPr>
         <p:spPr>
           <a:xfrm>
             <a:off x="8356396" y="1901952"/>
-            <a:ext cx="233172" cy="233172"/>
+            <a:ext cx="228600" cy="228600"/>
           </a:xfrm>
           <a:prstGeom prst="ellipse">
             <a:avLst/>
@@ -7474,14 +7752,14 @@
       </p:sp>
       <p:sp>
         <p:nvSpPr>
-          <p:cNvPr id="27" name="TextBox 26"/>
+          <p:cNvPr id="28" name="TextBox 27"/>
           <p:cNvSpPr txBox="1"/>
           <p:nvPr/>
         </p:nvSpPr>
         <p:spPr>
           <a:xfrm>
             <a:off x="8356396" y="1901952"/>
-            <a:ext cx="233172" cy="233172"/>
+            <a:ext cx="228600" cy="228600"/>
           </a:xfrm>
           <a:prstGeom prst="rect">
             <a:avLst/>
@@ -7508,14 +7786,14 @@
       </p:sp>
       <p:sp>
         <p:nvSpPr>
-          <p:cNvPr id="28" name="TextBox 27"/>
+          <p:cNvPr id="29" name="TextBox 28"/>
           <p:cNvSpPr txBox="1"/>
           <p:nvPr/>
         </p:nvSpPr>
         <p:spPr>
           <a:xfrm>
-            <a:off x="8301532" y="2226564"/>
-            <a:ext cx="3432962" cy="493776"/>
+            <a:off x="8319820" y="2221992"/>
+            <a:ext cx="3396386" cy="512064"/>
           </a:xfrm>
           <a:prstGeom prst="rect">
             <a:avLst/>
@@ -7532,7 +7810,7 @@
             <a:r>
               <a:rPr sz="950" b="1">
                 <a:solidFill>
-                  <a:srgbClr val="FFFFFF"/>
+                  <a:srgbClr val="081432"/>
                 </a:solidFill>
               </a:rPr>
               <a:t>Ejecución y cobro</a:t>
@@ -7542,14 +7820,14 @@
       </p:sp>
       <p:sp>
         <p:nvSpPr>
-          <p:cNvPr id="29" name="Rectangle 28"/>
+          <p:cNvPr id="30" name="Rectangle 29"/>
           <p:cNvSpPr/>
           <p:nvPr/>
         </p:nvSpPr>
         <p:spPr>
           <a:xfrm>
-            <a:off x="8301532" y="2738628"/>
-            <a:ext cx="3432962" cy="12700"/>
+            <a:off x="8301532" y="2752344"/>
+            <a:ext cx="3432962" cy="15240"/>
           </a:xfrm>
           <a:prstGeom prst="rect">
             <a:avLst/>
@@ -7585,21 +7863,21 @@
       </p:sp>
       <p:sp>
         <p:nvSpPr>
-          <p:cNvPr id="30" name="TextBox 29"/>
+          <p:cNvPr id="31" name="TextBox 30"/>
           <p:cNvSpPr txBox="1"/>
           <p:nvPr/>
         </p:nvSpPr>
         <p:spPr>
           <a:xfrm>
-            <a:off x="8301532" y="2814828"/>
-            <a:ext cx="3432962" cy="3231388"/>
+            <a:off x="8319820" y="2828544"/>
+            <a:ext cx="3414674" cy="3243072"/>
           </a:xfrm>
           <a:prstGeom prst="rect">
             <a:avLst/>
           </a:prstGeom>
           <a:noFill/>
         </p:spPr>
-        <p:txBody lIns="50800" tIns="25400" rIns="50800" bIns="25400">
+        <p:txBody lIns="50800" tIns="38100" rIns="50800" bIns="38100">
           <a:bodyPr wrap="square">
             <a:spAutoFit/>
           </a:bodyPr>
@@ -7621,7 +7899,7 @@
             <a:r>
               <a:rPr sz="750">
                 <a:solidFill>
-                  <a:srgbClr val="E4EEFF"/>
+                  <a:srgbClr val="223A6A"/>
                 </a:solidFill>
               </a:rPr>
               <a:t>Embargo de cuentas, nóminas e inmuebles</a:t>
@@ -7644,7 +7922,7 @@
             <a:r>
               <a:rPr sz="750">
                 <a:solidFill>
-                  <a:srgbClr val="E4EEFF"/>
+                  <a:srgbClr val="223A6A"/>
                 </a:solidFill>
               </a:rPr>
               <a:t>Seguimiento de subastas judiciales</a:t>
@@ -7667,7 +7945,7 @@
             <a:r>
               <a:rPr sz="750">
                 <a:solidFill>
-                  <a:srgbClr val="E4EEFF"/>
+                  <a:srgbClr val="223A6A"/>
                 </a:solidFill>
               </a:rPr>
               <a:t>Liquidación y transferencia en 5 días hábiles</a:t>
@@ -7690,7 +7968,7 @@
             <a:r>
               <a:rPr sz="750">
                 <a:solidFill>
-                  <a:srgbClr val="E4EEFF"/>
+                  <a:srgbClr val="223A6A"/>
                 </a:solidFill>
               </a:rPr>
               <a:t>Acta de cierre con detalle de costas</a:t>
@@ -7703,8 +7981,90 @@
   <p:clrMapOvr>
     <a:masterClrMapping/>
   </p:clrMapOvr>
-  <p:transition dur="700" spd="fast">
-    <p:fade/>
+  <p:timing>
+    <p:tnLst>
+      <p:par>
+        <p:cTn id="1" dur="indefin" restart="whenNotActive" nodeType="tmRoot">
+          <p:childTnLst>
+            <p:seq concurrent="1" nextAc="seek">
+              <p:cTn id="2" dur="indefin" nodeType="mainSeq">
+                <p:childTnLst>
+                  <p:par>
+                    <p:cTn id="3" fill="hold">
+                      <p:stCondLst>
+                        <p:cond delay="0"/>
+                      </p:stCondLst>
+                      <p:childTnLst>
+                        <p:par>
+                          <p:cTn id="5" fill="hold">
+                            <p:stCondLst>
+                              <p:cond delay="0"/>
+                            </p:stCondLst>
+                            <p:childTnLst>
+                              <p:animEffect transition="in" filter="wipe(up)">
+                                <p:cBhvr>
+                                  <p:cTn id="6" dur="450" fill="hold"/>
+                                  <p:tgtEl>
+                                    <p:spTgt spid="11"/>
+                                  </p:tgtEl>
+                                </p:cBhvr>
+                              </p:animEffect>
+                            </p:childTnLst>
+                          </p:cTn>
+                        </p:par>
+                        <p:par>
+                          <p:cTn id="7" fill="hold">
+                            <p:stCondLst>
+                              <p:cond delay="160"/>
+                            </p:stCondLst>
+                            <p:childTnLst>
+                              <p:animEffect transition="in" filter="wipe(up)">
+                                <p:cBhvr>
+                                  <p:cTn id="8" dur="450" fill="hold"/>
+                                  <p:tgtEl>
+                                    <p:spTgt spid="18"/>
+                                  </p:tgtEl>
+                                </p:cBhvr>
+                              </p:animEffect>
+                            </p:childTnLst>
+                          </p:cTn>
+                        </p:par>
+                        <p:par>
+                          <p:cTn id="9" fill="hold">
+                            <p:stCondLst>
+                              <p:cond delay="320"/>
+                            </p:stCondLst>
+                            <p:childTnLst>
+                              <p:animEffect transition="in" filter="wipe(up)">
+                                <p:cBhvr>
+                                  <p:cTn id="10" dur="450" fill="hold"/>
+                                  <p:tgtEl>
+                                    <p:spTgt spid="25"/>
+                                  </p:tgtEl>
+                                </p:cBhvr>
+                              </p:animEffect>
+                            </p:childTnLst>
+                          </p:cTn>
+                        </p:par>
+                      </p:childTnLst>
+                    </p:cTn>
+                  </p:par>
+                </p:childTnLst>
+              </p:cTn>
+              <p:prevCondLst>
+                <p:cond evt="onPrevClick" delay="0"/>
+              </p:prevCondLst>
+              <p:nextCondLst>
+                <p:cond evt="onNextClick" delay="0"/>
+              </p:nextCondLst>
+            </p:seq>
+          </p:childTnLst>
+        </p:cTn>
+      </p:par>
+    </p:tnLst>
+  </p:timing>
+  <p:transition dur="500" spd="fast">
+    <p:push dir="u"/>
   </p:transition>
 </p:sld>
 </file>
@@ -7759,7 +8119,7 @@
           </a:prstGeom>
           <a:solidFill>
             <a:srgbClr val="060E24">
-              <a:alpha val="50000"/>
+              <a:alpha val="38000"/>
             </a:srgbClr>
           </a:solidFill>
           <a:ln>
@@ -7791,6 +8151,49 @@
       <p:sp>
         <p:nvSpPr>
           <p:cNvPr id="4" name="Rectangle 3"/>
+          <p:cNvSpPr/>
+          <p:nvPr/>
+        </p:nvSpPr>
+        <p:spPr>
+          <a:xfrm>
+            <a:off x="0" y="0"/>
+            <a:ext cx="12191695" cy="1664208"/>
+          </a:xfrm>
+          <a:prstGeom prst="rect">
+            <a:avLst/>
+          </a:prstGeom>
+          <a:solidFill>
+            <a:srgbClr val="0A1638"/>
+          </a:solidFill>
+          <a:ln>
+            <a:noFill/>
+          </a:ln>
+        </p:spPr>
+        <p:style>
+          <a:lnRef idx="1">
+            <a:schemeClr val="accent1"/>
+          </a:lnRef>
+          <a:fillRef idx="3">
+            <a:schemeClr val="accent1"/>
+          </a:fillRef>
+          <a:effectRef idx="2">
+            <a:schemeClr val="accent1"/>
+          </a:effectRef>
+          <a:fontRef idx="minor">
+            <a:schemeClr val="lt1"/>
+          </a:fontRef>
+        </p:style>
+        <p:txBody>
+          <a:bodyPr rtlCol="0" anchor="ctr"/>
+          <a:lstStyle/>
+          <a:p>
+            <a:pPr algn="ctr"/>
+          </a:p>
+        </p:txBody>
+      </p:sp>
+      <p:sp>
+        <p:nvSpPr>
+          <p:cNvPr id="5" name="Rectangle 4"/>
           <p:cNvSpPr/>
           <p:nvPr/>
         </p:nvSpPr>
@@ -7833,7 +8236,7 @@
       </p:sp>
       <p:sp>
         <p:nvSpPr>
-          <p:cNvPr id="5" name="Rectangle 4"/>
+          <p:cNvPr id="6" name="Rectangle 5"/>
           <p:cNvSpPr/>
           <p:nvPr/>
         </p:nvSpPr>
@@ -7876,14 +8279,14 @@
       </p:sp>
       <p:sp>
         <p:nvSpPr>
-          <p:cNvPr id="6" name="Rectangle 5"/>
+          <p:cNvPr id="7" name="Rectangle 6"/>
           <p:cNvSpPr/>
           <p:nvPr/>
         </p:nvSpPr>
         <p:spPr>
           <a:xfrm>
             <a:off x="502920" y="365760"/>
-            <a:ext cx="1417320" cy="237744"/>
+            <a:ext cx="1371600" cy="237744"/>
           </a:xfrm>
           <a:prstGeom prst="rect">
             <a:avLst/>
@@ -7927,14 +8330,14 @@
       </p:sp>
       <p:sp>
         <p:nvSpPr>
-          <p:cNvPr id="7" name="TextBox 6"/>
+          <p:cNvPr id="8" name="TextBox 7"/>
           <p:cNvSpPr txBox="1"/>
           <p:nvPr/>
         </p:nvSpPr>
         <p:spPr>
           <a:xfrm>
             <a:off x="502920" y="694944"/>
-            <a:ext cx="8229600" cy="713232"/>
+            <a:ext cx="8412480" cy="694944"/>
           </a:xfrm>
           <a:prstGeom prst="rect">
             <a:avLst/>
@@ -7969,14 +8372,14 @@
       </p:sp>
       <p:sp>
         <p:nvSpPr>
-          <p:cNvPr id="8" name="Rectangle 7"/>
+          <p:cNvPr id="9" name="Rectangle 8"/>
           <p:cNvSpPr/>
           <p:nvPr/>
         </p:nvSpPr>
         <p:spPr>
           <a:xfrm>
-            <a:off x="502920" y="1481328"/>
-            <a:ext cx="4114800" cy="31750"/>
+            <a:off x="502920" y="1463040"/>
+            <a:ext cx="4023360" cy="31750"/>
           </a:xfrm>
           <a:prstGeom prst="rect">
             <a:avLst/>
@@ -8012,7 +8415,7 @@
       </p:sp>
       <p:pic>
         <p:nvPicPr>
-          <p:cNvPr id="9" name="Picture 8" descr="logo_horiz.png"/>
+          <p:cNvPr id="10" name="Picture 9" descr="logo_horiz.png"/>
           <p:cNvPicPr>
             <a:picLocks noChangeAspect="1"/>
           </p:cNvPicPr>
@@ -8026,8 +8429,8 @@
         </p:blipFill>
         <p:spPr>
           <a:xfrm>
-            <a:off x="10116008" y="6291072"/>
-            <a:ext cx="1874519" cy="420624"/>
+            <a:off x="10161727" y="6291072"/>
+            <a:ext cx="1828800" cy="420624"/>
           </a:xfrm>
           <a:prstGeom prst="rect">
             <a:avLst/>
@@ -8036,7 +8439,7 @@
       </p:pic>
       <p:sp>
         <p:nvSpPr>
-          <p:cNvPr id="10" name="Rectangle 9"/>
+          <p:cNvPr id="11" name="Rectangle 10"/>
           <p:cNvSpPr/>
           <p:nvPr/>
         </p:nvSpPr>
@@ -8049,11 +8452,11 @@
             <a:avLst/>
           </a:prstGeom>
           <a:solidFill>
-            <a:srgbClr val="162A68"/>
+            <a:srgbClr val="F2F7FF"/>
           </a:solidFill>
-          <a:ln w="9525">
+          <a:ln w="6350">
             <a:solidFill>
-              <a:srgbClr val="4A68B8"/>
+              <a:srgbClr val="2FDFE5"/>
             </a:solidFill>
           </a:ln>
         </p:spPr>
@@ -8081,14 +8484,14 @@
       </p:sp>
       <p:sp>
         <p:nvSpPr>
-          <p:cNvPr id="11" name="Rectangle 10"/>
+          <p:cNvPr id="12" name="Rectangle 11"/>
           <p:cNvSpPr/>
           <p:nvPr/>
         </p:nvSpPr>
         <p:spPr>
           <a:xfrm>
             <a:off x="502920" y="1719072"/>
-            <a:ext cx="3688994" cy="38100"/>
+            <a:ext cx="3688994" cy="50800"/>
           </a:xfrm>
           <a:prstGeom prst="rect">
             <a:avLst/>
@@ -8124,14 +8527,14 @@
       </p:sp>
       <p:sp>
         <p:nvSpPr>
-          <p:cNvPr id="12" name="Oval 11"/>
+          <p:cNvPr id="13" name="Oval 12"/>
           <p:cNvSpPr/>
           <p:nvPr/>
         </p:nvSpPr>
         <p:spPr>
           <a:xfrm>
             <a:off x="685800" y="1901952"/>
-            <a:ext cx="233172" cy="233172"/>
+            <a:ext cx="228600" cy="228600"/>
           </a:xfrm>
           <a:prstGeom prst="ellipse">
             <a:avLst/>
@@ -8169,14 +8572,14 @@
       </p:sp>
       <p:sp>
         <p:nvSpPr>
-          <p:cNvPr id="13" name="TextBox 12"/>
+          <p:cNvPr id="14" name="TextBox 13"/>
           <p:cNvSpPr txBox="1"/>
           <p:nvPr/>
         </p:nvSpPr>
         <p:spPr>
           <a:xfrm>
             <a:off x="685800" y="1901952"/>
-            <a:ext cx="233172" cy="233172"/>
+            <a:ext cx="228600" cy="228600"/>
           </a:xfrm>
           <a:prstGeom prst="rect">
             <a:avLst/>
@@ -8203,14 +8606,14 @@
       </p:sp>
       <p:sp>
         <p:nvSpPr>
-          <p:cNvPr id="14" name="TextBox 13"/>
+          <p:cNvPr id="15" name="TextBox 14"/>
           <p:cNvSpPr txBox="1"/>
           <p:nvPr/>
         </p:nvSpPr>
         <p:spPr>
           <a:xfrm>
-            <a:off x="630936" y="2226564"/>
-            <a:ext cx="3432962" cy="493776"/>
+            <a:off x="649224" y="2221992"/>
+            <a:ext cx="3396386" cy="512064"/>
           </a:xfrm>
           <a:prstGeom prst="rect">
             <a:avLst/>
@@ -8227,7 +8630,7 @@
             <a:r>
               <a:rPr sz="950" b="1">
                 <a:solidFill>
-                  <a:srgbClr val="FFFFFF"/>
+                  <a:srgbClr val="081432"/>
                 </a:solidFill>
               </a:rPr>
               <a:t>Informes periódicos</a:t>
@@ -8237,14 +8640,14 @@
       </p:sp>
       <p:sp>
         <p:nvSpPr>
-          <p:cNvPr id="15" name="Rectangle 14"/>
+          <p:cNvPr id="16" name="Rectangle 15"/>
           <p:cNvSpPr/>
           <p:nvPr/>
         </p:nvSpPr>
         <p:spPr>
           <a:xfrm>
-            <a:off x="630936" y="2738628"/>
-            <a:ext cx="3432962" cy="12700"/>
+            <a:off x="630936" y="2752344"/>
+            <a:ext cx="3432962" cy="15240"/>
           </a:xfrm>
           <a:prstGeom prst="rect">
             <a:avLst/>
@@ -8280,21 +8683,21 @@
       </p:sp>
       <p:sp>
         <p:nvSpPr>
-          <p:cNvPr id="16" name="TextBox 15"/>
+          <p:cNvPr id="17" name="TextBox 16"/>
           <p:cNvSpPr txBox="1"/>
           <p:nvPr/>
         </p:nvSpPr>
         <p:spPr>
           <a:xfrm>
-            <a:off x="630936" y="2814828"/>
-            <a:ext cx="3432962" cy="3231388"/>
+            <a:off x="649224" y="2828544"/>
+            <a:ext cx="3414674" cy="3243072"/>
           </a:xfrm>
           <a:prstGeom prst="rect">
             <a:avLst/>
           </a:prstGeom>
           <a:noFill/>
         </p:spPr>
-        <p:txBody lIns="50800" tIns="25400" rIns="50800" bIns="25400">
+        <p:txBody lIns="50800" tIns="38100" rIns="50800" bIns="38100">
           <a:bodyPr wrap="square">
             <a:spAutoFit/>
           </a:bodyPr>
@@ -8316,7 +8719,7 @@
             <a:r>
               <a:rPr sz="750">
                 <a:solidFill>
-                  <a:srgbClr val="E4EEFF"/>
+                  <a:srgbClr val="223A6A"/>
                 </a:solidFill>
               </a:rPr>
               <a:t>Informe semanal de actividad y contactaciones</a:t>
@@ -8339,7 +8742,7 @@
             <a:r>
               <a:rPr sz="750">
                 <a:solidFill>
-                  <a:srgbClr val="E4EEFF"/>
+                  <a:srgbClr val="223A6A"/>
                 </a:solidFill>
               </a:rPr>
               <a:t>Reporte mensual de recuperación y aging</a:t>
@@ -8362,7 +8765,7 @@
             <a:r>
               <a:rPr sz="750">
                 <a:solidFill>
-                  <a:srgbClr val="E4EEFF"/>
+                  <a:srgbClr val="223A6A"/>
                 </a:solidFill>
               </a:rPr>
               <a:t>Cuadro de mando ejecutivo trimestral</a:t>
@@ -8385,7 +8788,7 @@
             <a:r>
               <a:rPr sz="750">
                 <a:solidFill>
-                  <a:srgbClr val="E4EEFF"/>
+                  <a:srgbClr val="223A6A"/>
                 </a:solidFill>
               </a:rPr>
               <a:t>Exportación en PDF, Excel y API JSON</a:t>
@@ -8395,7 +8798,7 @@
       </p:sp>
       <p:sp>
         <p:nvSpPr>
-          <p:cNvPr id="17" name="Rectangle 16"/>
+          <p:cNvPr id="18" name="Rectangle 17"/>
           <p:cNvSpPr/>
           <p:nvPr/>
         </p:nvSpPr>
@@ -8408,11 +8811,11 @@
             <a:avLst/>
           </a:prstGeom>
           <a:solidFill>
-            <a:srgbClr val="162A68"/>
+            <a:srgbClr val="F2F7FF"/>
           </a:solidFill>
-          <a:ln w="9525">
+          <a:ln w="6350">
             <a:solidFill>
-              <a:srgbClr val="4A68B8"/>
+              <a:srgbClr val="2FDFE5"/>
             </a:solidFill>
           </a:ln>
         </p:spPr>
@@ -8440,14 +8843,14 @@
       </p:sp>
       <p:sp>
         <p:nvSpPr>
-          <p:cNvPr id="18" name="Rectangle 17"/>
+          <p:cNvPr id="19" name="Rectangle 18"/>
           <p:cNvSpPr/>
           <p:nvPr/>
         </p:nvSpPr>
         <p:spPr>
           <a:xfrm>
             <a:off x="4338218" y="1719072"/>
-            <a:ext cx="3688994" cy="38100"/>
+            <a:ext cx="3688994" cy="50800"/>
           </a:xfrm>
           <a:prstGeom prst="rect">
             <a:avLst/>
@@ -8483,14 +8886,14 @@
       </p:sp>
       <p:sp>
         <p:nvSpPr>
-          <p:cNvPr id="19" name="Oval 18"/>
+          <p:cNvPr id="20" name="Oval 19"/>
           <p:cNvSpPr/>
           <p:nvPr/>
         </p:nvSpPr>
         <p:spPr>
           <a:xfrm>
             <a:off x="4521098" y="1901952"/>
-            <a:ext cx="233172" cy="233172"/>
+            <a:ext cx="228600" cy="228600"/>
           </a:xfrm>
           <a:prstGeom prst="ellipse">
             <a:avLst/>
@@ -8528,14 +8931,14 @@
       </p:sp>
       <p:sp>
         <p:nvSpPr>
-          <p:cNvPr id="20" name="TextBox 19"/>
+          <p:cNvPr id="21" name="TextBox 20"/>
           <p:cNvSpPr txBox="1"/>
           <p:nvPr/>
         </p:nvSpPr>
         <p:spPr>
           <a:xfrm>
             <a:off x="4521098" y="1901952"/>
-            <a:ext cx="233172" cy="233172"/>
+            <a:ext cx="228600" cy="228600"/>
           </a:xfrm>
           <a:prstGeom prst="rect">
             <a:avLst/>
@@ -8562,14 +8965,14 @@
       </p:sp>
       <p:sp>
         <p:nvSpPr>
-          <p:cNvPr id="21" name="TextBox 20"/>
+          <p:cNvPr id="22" name="TextBox 21"/>
           <p:cNvSpPr txBox="1"/>
           <p:nvPr/>
         </p:nvSpPr>
         <p:spPr>
           <a:xfrm>
-            <a:off x="4466234" y="2226564"/>
-            <a:ext cx="3432962" cy="493776"/>
+            <a:off x="4484522" y="2221992"/>
+            <a:ext cx="3396386" cy="512064"/>
           </a:xfrm>
           <a:prstGeom prst="rect">
             <a:avLst/>
@@ -8586,7 +8989,7 @@
             <a:r>
               <a:rPr sz="950" b="1">
                 <a:solidFill>
-                  <a:srgbClr val="FFFFFF"/>
+                  <a:srgbClr val="081432"/>
                 </a:solidFill>
               </a:rPr>
               <a:t>Liquidación y remesas</a:t>
@@ -8596,14 +8999,14 @@
       </p:sp>
       <p:sp>
         <p:nvSpPr>
-          <p:cNvPr id="22" name="Rectangle 21"/>
+          <p:cNvPr id="23" name="Rectangle 22"/>
           <p:cNvSpPr/>
           <p:nvPr/>
         </p:nvSpPr>
         <p:spPr>
           <a:xfrm>
-            <a:off x="4466234" y="2738628"/>
-            <a:ext cx="3432962" cy="12700"/>
+            <a:off x="4466234" y="2752344"/>
+            <a:ext cx="3432962" cy="15240"/>
           </a:xfrm>
           <a:prstGeom prst="rect">
             <a:avLst/>
@@ -8639,21 +9042,21 @@
       </p:sp>
       <p:sp>
         <p:nvSpPr>
-          <p:cNvPr id="23" name="TextBox 22"/>
+          <p:cNvPr id="24" name="TextBox 23"/>
           <p:cNvSpPr txBox="1"/>
           <p:nvPr/>
         </p:nvSpPr>
         <p:spPr>
           <a:xfrm>
-            <a:off x="4466234" y="2814828"/>
-            <a:ext cx="3432962" cy="3231388"/>
+            <a:off x="4484522" y="2828544"/>
+            <a:ext cx="3414674" cy="3243072"/>
           </a:xfrm>
           <a:prstGeom prst="rect">
             <a:avLst/>
           </a:prstGeom>
           <a:noFill/>
         </p:spPr>
-        <p:txBody lIns="50800" tIns="25400" rIns="50800" bIns="25400">
+        <p:txBody lIns="50800" tIns="38100" rIns="50800" bIns="38100">
           <a:bodyPr wrap="square">
             <a:spAutoFit/>
           </a:bodyPr>
@@ -8675,7 +9078,7 @@
             <a:r>
               <a:rPr sz="750">
                 <a:solidFill>
-                  <a:srgbClr val="E4EEFF"/>
+                  <a:srgbClr val="223A6A"/>
                 </a:solidFill>
               </a:rPr>
               <a:t>Liquidación quincenal por expediente</a:t>
@@ -8698,7 +9101,7 @@
             <a:r>
               <a:rPr sz="750">
                 <a:solidFill>
-                  <a:srgbClr val="E4EEFF"/>
+                  <a:srgbClr val="223A6A"/>
                 </a:solidFill>
               </a:rPr>
               <a:t>Transferencia SEPA en T+2 hábiles</a:t>
@@ -8721,7 +9124,7 @@
             <a:r>
               <a:rPr sz="750">
                 <a:solidFill>
-                  <a:srgbClr val="E4EEFF"/>
+                  <a:srgbClr val="223A6A"/>
                 </a:solidFill>
               </a:rPr>
               <a:t>Conciliación automática con ERP/CRM</a:t>
@@ -8744,7 +9147,7 @@
             <a:r>
               <a:rPr sz="750">
                 <a:solidFill>
-                  <a:srgbClr val="E4EEFF"/>
+                  <a:srgbClr val="223A6A"/>
                 </a:solidFill>
               </a:rPr>
               <a:t>Facturación electrónica certificada</a:t>
@@ -8754,7 +9157,7 @@
       </p:sp>
       <p:sp>
         <p:nvSpPr>
-          <p:cNvPr id="24" name="Rectangle 23"/>
+          <p:cNvPr id="25" name="Rectangle 24"/>
           <p:cNvSpPr/>
           <p:nvPr/>
         </p:nvSpPr>
@@ -8767,11 +9170,11 @@
             <a:avLst/>
           </a:prstGeom>
           <a:solidFill>
-            <a:srgbClr val="162A68"/>
+            <a:srgbClr val="F2F7FF"/>
           </a:solidFill>
-          <a:ln w="9525">
+          <a:ln w="6350">
             <a:solidFill>
-              <a:srgbClr val="4A68B8"/>
+              <a:srgbClr val="2FDFE5"/>
             </a:solidFill>
           </a:ln>
         </p:spPr>
@@ -8799,14 +9202,14 @@
       </p:sp>
       <p:sp>
         <p:nvSpPr>
-          <p:cNvPr id="25" name="Rectangle 24"/>
+          <p:cNvPr id="26" name="Rectangle 25"/>
           <p:cNvSpPr/>
           <p:nvPr/>
         </p:nvSpPr>
         <p:spPr>
           <a:xfrm>
             <a:off x="8173516" y="1719072"/>
-            <a:ext cx="3688994" cy="38100"/>
+            <a:ext cx="3688994" cy="50800"/>
           </a:xfrm>
           <a:prstGeom prst="rect">
             <a:avLst/>
@@ -8842,14 +9245,14 @@
       </p:sp>
       <p:sp>
         <p:nvSpPr>
-          <p:cNvPr id="26" name="Oval 25"/>
+          <p:cNvPr id="27" name="Oval 26"/>
           <p:cNvSpPr/>
           <p:nvPr/>
         </p:nvSpPr>
         <p:spPr>
           <a:xfrm>
             <a:off x="8356396" y="1901952"/>
-            <a:ext cx="233172" cy="233172"/>
+            <a:ext cx="228600" cy="228600"/>
           </a:xfrm>
           <a:prstGeom prst="ellipse">
             <a:avLst/>
@@ -8887,14 +9290,14 @@
       </p:sp>
       <p:sp>
         <p:nvSpPr>
-          <p:cNvPr id="27" name="TextBox 26"/>
+          <p:cNvPr id="28" name="TextBox 27"/>
           <p:cNvSpPr txBox="1"/>
           <p:nvPr/>
         </p:nvSpPr>
         <p:spPr>
           <a:xfrm>
             <a:off x="8356396" y="1901952"/>
-            <a:ext cx="233172" cy="233172"/>
+            <a:ext cx="228600" cy="228600"/>
           </a:xfrm>
           <a:prstGeom prst="rect">
             <a:avLst/>
@@ -8921,14 +9324,14 @@
       </p:sp>
       <p:sp>
         <p:nvSpPr>
-          <p:cNvPr id="28" name="TextBox 27"/>
+          <p:cNvPr id="29" name="TextBox 28"/>
           <p:cNvSpPr txBox="1"/>
           <p:nvPr/>
         </p:nvSpPr>
         <p:spPr>
           <a:xfrm>
-            <a:off x="8301532" y="2226564"/>
-            <a:ext cx="3432962" cy="493776"/>
+            <a:off x="8319820" y="2221992"/>
+            <a:ext cx="3396386" cy="512064"/>
           </a:xfrm>
           <a:prstGeom prst="rect">
             <a:avLst/>
@@ -8945,7 +9348,7 @@
             <a:r>
               <a:rPr sz="950" b="1">
                 <a:solidFill>
-                  <a:srgbClr val="FFFFFF"/>
+                  <a:srgbClr val="081432"/>
                 </a:solidFill>
               </a:rPr>
               <a:t>Control de calidad</a:t>
@@ -8955,14 +9358,14 @@
       </p:sp>
       <p:sp>
         <p:nvSpPr>
-          <p:cNvPr id="29" name="Rectangle 28"/>
+          <p:cNvPr id="30" name="Rectangle 29"/>
           <p:cNvSpPr/>
           <p:nvPr/>
         </p:nvSpPr>
         <p:spPr>
           <a:xfrm>
-            <a:off x="8301532" y="2738628"/>
-            <a:ext cx="3432962" cy="12700"/>
+            <a:off x="8301532" y="2752344"/>
+            <a:ext cx="3432962" cy="15240"/>
           </a:xfrm>
           <a:prstGeom prst="rect">
             <a:avLst/>
@@ -8998,21 +9401,21 @@
       </p:sp>
       <p:sp>
         <p:nvSpPr>
-          <p:cNvPr id="30" name="TextBox 29"/>
+          <p:cNvPr id="31" name="TextBox 30"/>
           <p:cNvSpPr txBox="1"/>
           <p:nvPr/>
         </p:nvSpPr>
         <p:spPr>
           <a:xfrm>
-            <a:off x="8301532" y="2814828"/>
-            <a:ext cx="3432962" cy="3231388"/>
+            <a:off x="8319820" y="2828544"/>
+            <a:ext cx="3414674" cy="3243072"/>
           </a:xfrm>
           <a:prstGeom prst="rect">
             <a:avLst/>
           </a:prstGeom>
           <a:noFill/>
         </p:spPr>
-        <p:txBody lIns="50800" tIns="25400" rIns="50800" bIns="25400">
+        <p:txBody lIns="50800" tIns="38100" rIns="50800" bIns="38100">
           <a:bodyPr wrap="square">
             <a:spAutoFit/>
           </a:bodyPr>
@@ -9034,7 +9437,7 @@
             <a:r>
               <a:rPr sz="750">
                 <a:solidFill>
-                  <a:srgbClr val="E4EEFF"/>
+                  <a:srgbClr val="223A6A"/>
                 </a:solidFill>
               </a:rPr>
               <a:t>Auditoría interna mensual de procesos</a:t>
@@ -9057,7 +9460,7 @@
             <a:r>
               <a:rPr sz="750">
                 <a:solidFill>
-                  <a:srgbClr val="E4EEFF"/>
+                  <a:srgbClr val="223A6A"/>
                 </a:solidFill>
               </a:rPr>
               <a:t>Mystery calling y escucha de grabaciones</a:t>
@@ -9080,7 +9483,7 @@
             <a:r>
               <a:rPr sz="750">
                 <a:solidFill>
-                  <a:srgbClr val="E4EEFF"/>
+                  <a:srgbClr val="223A6A"/>
                 </a:solidFill>
               </a:rPr>
               <a:t>Comité de mejora continua trimestral</a:t>
@@ -9103,7 +9506,7 @@
             <a:r>
               <a:rPr sz="750">
                 <a:solidFill>
-                  <a:srgbClr val="E4EEFF"/>
+                  <a:srgbClr val="223A6A"/>
                 </a:solidFill>
               </a:rPr>
               <a:t>Certificación ISO 9001 y cumplimiento RGPD</a:t>
@@ -9116,8 +9519,90 @@
   <p:clrMapOvr>
     <a:masterClrMapping/>
   </p:clrMapOvr>
-  <p:transition dur="700" spd="fast">
-    <p:fade/>
+  <p:timing>
+    <p:tnLst>
+      <p:par>
+        <p:cTn id="1" dur="indefin" restart="whenNotActive" nodeType="tmRoot">
+          <p:childTnLst>
+            <p:seq concurrent="1" nextAc="seek">
+              <p:cTn id="2" dur="indefin" nodeType="mainSeq">
+                <p:childTnLst>
+                  <p:par>
+                    <p:cTn id="3" fill="hold">
+                      <p:stCondLst>
+                        <p:cond delay="0"/>
+                      </p:stCondLst>
+                      <p:childTnLst>
+                        <p:par>
+                          <p:cTn id="5" fill="hold">
+                            <p:stCondLst>
+                              <p:cond delay="0"/>
+                            </p:stCondLst>
+                            <p:childTnLst>
+                              <p:animEffect transition="in" filter="wipe(up)">
+                                <p:cBhvr>
+                                  <p:cTn id="6" dur="450" fill="hold"/>
+                                  <p:tgtEl>
+                                    <p:spTgt spid="11"/>
+                                  </p:tgtEl>
+                                </p:cBhvr>
+                              </p:animEffect>
+                            </p:childTnLst>
+                          </p:cTn>
+                        </p:par>
+                        <p:par>
+                          <p:cTn id="7" fill="hold">
+                            <p:stCondLst>
+                              <p:cond delay="160"/>
+                            </p:stCondLst>
+                            <p:childTnLst>
+                              <p:animEffect transition="in" filter="wipe(up)">
+                                <p:cBhvr>
+                                  <p:cTn id="8" dur="450" fill="hold"/>
+                                  <p:tgtEl>
+                                    <p:spTgt spid="18"/>
+                                  </p:tgtEl>
+                                </p:cBhvr>
+                              </p:animEffect>
+                            </p:childTnLst>
+                          </p:cTn>
+                        </p:par>
+                        <p:par>
+                          <p:cTn id="9" fill="hold">
+                            <p:stCondLst>
+                              <p:cond delay="320"/>
+                            </p:stCondLst>
+                            <p:childTnLst>
+                              <p:animEffect transition="in" filter="wipe(up)">
+                                <p:cBhvr>
+                                  <p:cTn id="10" dur="450" fill="hold"/>
+                                  <p:tgtEl>
+                                    <p:spTgt spid="25"/>
+                                  </p:tgtEl>
+                                </p:cBhvr>
+                              </p:animEffect>
+                            </p:childTnLst>
+                          </p:cTn>
+                        </p:par>
+                      </p:childTnLst>
+                    </p:cTn>
+                  </p:par>
+                </p:childTnLst>
+              </p:cTn>
+              <p:prevCondLst>
+                <p:cond evt="onPrevClick" delay="0"/>
+              </p:prevCondLst>
+              <p:nextCondLst>
+                <p:cond evt="onNextClick" delay="0"/>
+              </p:nextCondLst>
+            </p:seq>
+          </p:childTnLst>
+        </p:cTn>
+      </p:par>
+    </p:tnLst>
+  </p:timing>
+  <p:transition dur="500" spd="fast">
+    <p:push dir="u"/>
   </p:transition>
 </p:sld>
 </file>
@@ -9172,7 +9657,7 @@
           </a:prstGeom>
           <a:solidFill>
             <a:srgbClr val="060E24">
-              <a:alpha val="52000"/>
+              <a:alpha val="40000"/>
             </a:srgbClr>
           </a:solidFill>
           <a:ln>
@@ -9204,6 +9689,49 @@
       <p:sp>
         <p:nvSpPr>
           <p:cNvPr id="4" name="Rectangle 3"/>
+          <p:cNvSpPr/>
+          <p:nvPr/>
+        </p:nvSpPr>
+        <p:spPr>
+          <a:xfrm>
+            <a:off x="0" y="0"/>
+            <a:ext cx="12191695" cy="1664208"/>
+          </a:xfrm>
+          <a:prstGeom prst="rect">
+            <a:avLst/>
+          </a:prstGeom>
+          <a:solidFill>
+            <a:srgbClr val="0A1638"/>
+          </a:solidFill>
+          <a:ln>
+            <a:noFill/>
+          </a:ln>
+        </p:spPr>
+        <p:style>
+          <a:lnRef idx="1">
+            <a:schemeClr val="accent1"/>
+          </a:lnRef>
+          <a:fillRef idx="3">
+            <a:schemeClr val="accent1"/>
+          </a:fillRef>
+          <a:effectRef idx="2">
+            <a:schemeClr val="accent1"/>
+          </a:effectRef>
+          <a:fontRef idx="minor">
+            <a:schemeClr val="lt1"/>
+          </a:fontRef>
+        </p:style>
+        <p:txBody>
+          <a:bodyPr rtlCol="0" anchor="ctr"/>
+          <a:lstStyle/>
+          <a:p>
+            <a:pPr algn="ctr"/>
+          </a:p>
+        </p:txBody>
+      </p:sp>
+      <p:sp>
+        <p:nvSpPr>
+          <p:cNvPr id="5" name="Rectangle 4"/>
           <p:cNvSpPr/>
           <p:nvPr/>
         </p:nvSpPr>
@@ -9246,7 +9774,7 @@
       </p:sp>
       <p:sp>
         <p:nvSpPr>
-          <p:cNvPr id="5" name="Rectangle 4"/>
+          <p:cNvPr id="6" name="Rectangle 5"/>
           <p:cNvSpPr/>
           <p:nvPr/>
         </p:nvSpPr>
@@ -9289,14 +9817,14 @@
       </p:sp>
       <p:sp>
         <p:nvSpPr>
-          <p:cNvPr id="6" name="Rectangle 5"/>
+          <p:cNvPr id="7" name="Rectangle 6"/>
           <p:cNvSpPr/>
           <p:nvPr/>
         </p:nvSpPr>
         <p:spPr>
           <a:xfrm>
             <a:off x="502920" y="365760"/>
-            <a:ext cx="1417320" cy="237744"/>
+            <a:ext cx="1371600" cy="237744"/>
           </a:xfrm>
           <a:prstGeom prst="rect">
             <a:avLst/>
@@ -9340,14 +9868,14 @@
       </p:sp>
       <p:sp>
         <p:nvSpPr>
-          <p:cNvPr id="7" name="TextBox 6"/>
+          <p:cNvPr id="8" name="TextBox 7"/>
           <p:cNvSpPr txBox="1"/>
           <p:nvPr/>
         </p:nvSpPr>
         <p:spPr>
           <a:xfrm>
             <a:off x="502920" y="694944"/>
-            <a:ext cx="8229600" cy="713232"/>
+            <a:ext cx="8229600" cy="694944"/>
           </a:xfrm>
           <a:prstGeom prst="rect">
             <a:avLst/>
@@ -9382,14 +9910,14 @@
       </p:sp>
       <p:sp>
         <p:nvSpPr>
-          <p:cNvPr id="8" name="Rectangle 7"/>
+          <p:cNvPr id="9" name="Rectangle 8"/>
           <p:cNvSpPr/>
           <p:nvPr/>
         </p:nvSpPr>
         <p:spPr>
           <a:xfrm>
-            <a:off x="502920" y="1481328"/>
-            <a:ext cx="4114800" cy="31750"/>
+            <a:off x="502920" y="1463040"/>
+            <a:ext cx="4023360" cy="31750"/>
           </a:xfrm>
           <a:prstGeom prst="rect">
             <a:avLst/>
@@ -9425,7 +9953,7 @@
       </p:sp>
       <p:pic>
         <p:nvPicPr>
-          <p:cNvPr id="9" name="Picture 8" descr="logo_horiz.png"/>
+          <p:cNvPr id="10" name="Picture 9" descr="logo_horiz.png"/>
           <p:cNvPicPr>
             <a:picLocks noChangeAspect="1"/>
           </p:cNvPicPr>
@@ -9439,8 +9967,8 @@
         </p:blipFill>
         <p:spPr>
           <a:xfrm>
-            <a:off x="10116008" y="6291072"/>
-            <a:ext cx="1874519" cy="420624"/>
+            <a:off x="10161727" y="6291072"/>
+            <a:ext cx="1828800" cy="420624"/>
           </a:xfrm>
           <a:prstGeom prst="rect">
             <a:avLst/>
@@ -9449,7 +9977,7 @@
       </p:pic>
       <p:sp>
         <p:nvSpPr>
-          <p:cNvPr id="10" name="Rectangle 9"/>
+          <p:cNvPr id="11" name="Rectangle 10"/>
           <p:cNvSpPr/>
           <p:nvPr/>
         </p:nvSpPr>
@@ -9462,11 +9990,11 @@
             <a:avLst/>
           </a:prstGeom>
           <a:solidFill>
-            <a:srgbClr val="162A68"/>
+            <a:srgbClr val="F2F7FF"/>
           </a:solidFill>
-          <a:ln w="9525">
+          <a:ln w="6350">
             <a:solidFill>
-              <a:srgbClr val="4A68B8"/>
+              <a:srgbClr val="2FDFE5"/>
             </a:solidFill>
           </a:ln>
         </p:spPr>
@@ -9494,14 +10022,14 @@
       </p:sp>
       <p:sp>
         <p:nvSpPr>
-          <p:cNvPr id="11" name="Rectangle 10"/>
+          <p:cNvPr id="12" name="Rectangle 11"/>
           <p:cNvSpPr/>
           <p:nvPr/>
         </p:nvSpPr>
         <p:spPr>
           <a:xfrm>
             <a:off x="502920" y="1755648"/>
-            <a:ext cx="5588355" cy="38100"/>
+            <a:ext cx="5588355" cy="50800"/>
           </a:xfrm>
           <a:prstGeom prst="rect">
             <a:avLst/>
@@ -9537,13 +10065,13 @@
       </p:sp>
       <p:sp>
         <p:nvSpPr>
-          <p:cNvPr id="12" name="Oval 11"/>
+          <p:cNvPr id="13" name="Oval 12"/>
           <p:cNvSpPr/>
           <p:nvPr/>
         </p:nvSpPr>
         <p:spPr>
           <a:xfrm>
-            <a:off x="658368" y="1883664"/>
+            <a:off x="658368" y="1901952"/>
             <a:ext cx="201168" cy="201168"/>
           </a:xfrm>
           <a:prstGeom prst="ellipse">
@@ -9582,13 +10110,13 @@
       </p:sp>
       <p:sp>
         <p:nvSpPr>
-          <p:cNvPr id="13" name="TextBox 12"/>
+          <p:cNvPr id="14" name="TextBox 13"/>
           <p:cNvSpPr txBox="1"/>
           <p:nvPr/>
         </p:nvSpPr>
         <p:spPr>
           <a:xfrm>
-            <a:off x="658368" y="1883664"/>
+            <a:off x="658368" y="1901952"/>
             <a:ext cx="201168" cy="201168"/>
           </a:xfrm>
           <a:prstGeom prst="rect">
@@ -9616,14 +10144,14 @@
       </p:sp>
       <p:sp>
         <p:nvSpPr>
-          <p:cNvPr id="14" name="TextBox 13"/>
+          <p:cNvPr id="15" name="TextBox 14"/>
           <p:cNvSpPr txBox="1"/>
           <p:nvPr/>
         </p:nvSpPr>
         <p:spPr>
           <a:xfrm>
-            <a:off x="923544" y="1883664"/>
-            <a:ext cx="5076291" cy="365760"/>
+            <a:off x="923544" y="1901952"/>
+            <a:ext cx="5094579" cy="347472"/>
           </a:xfrm>
           <a:prstGeom prst="rect">
             <a:avLst/>
@@ -9640,7 +10168,7 @@
             <a:r>
               <a:rPr sz="900" b="1">
                 <a:solidFill>
-                  <a:srgbClr val="FFFFFF"/>
+                  <a:srgbClr val="081432"/>
                 </a:solidFill>
               </a:rPr>
               <a:t>Gestión de Cobro Amistoso</a:t>
@@ -9650,13 +10178,13 @@
       </p:sp>
       <p:sp>
         <p:nvSpPr>
-          <p:cNvPr id="15" name="Rectangle 14"/>
+          <p:cNvPr id="16" name="Rectangle 15"/>
           <p:cNvSpPr/>
           <p:nvPr/>
         </p:nvSpPr>
         <p:spPr>
           <a:xfrm>
-            <a:off x="630936" y="2139696"/>
+            <a:off x="630936" y="2157984"/>
             <a:ext cx="5332323" cy="12700"/>
           </a:xfrm>
           <a:prstGeom prst="rect">
@@ -9693,14 +10221,14 @@
       </p:sp>
       <p:sp>
         <p:nvSpPr>
-          <p:cNvPr id="16" name="TextBox 15"/>
+          <p:cNvPr id="17" name="TextBox 16"/>
           <p:cNvSpPr txBox="1"/>
           <p:nvPr/>
         </p:nvSpPr>
         <p:spPr>
           <a:xfrm>
-            <a:off x="630936" y="2215896"/>
-            <a:ext cx="5332323" cy="1588008"/>
+            <a:off x="630936" y="2221484"/>
+            <a:ext cx="5332323" cy="1582420"/>
           </a:xfrm>
           <a:prstGeom prst="rect">
             <a:avLst/>
@@ -9717,7 +10245,7 @@
             <a:r>
               <a:rPr sz="750">
                 <a:solidFill>
-                  <a:srgbClr val="E4EEFF"/>
+                  <a:srgbClr val="223A6A"/>
                 </a:solidFill>
               </a:rPr>
               <a:t>Negociación extrajudicial, planes de pago personalizados y seguimiento continuo hasta la resolución del expediente.</a:t>
@@ -9727,7 +10255,7 @@
       </p:sp>
       <p:sp>
         <p:nvSpPr>
-          <p:cNvPr id="17" name="Rectangle 16"/>
+          <p:cNvPr id="18" name="Rectangle 17"/>
           <p:cNvSpPr/>
           <p:nvPr/>
         </p:nvSpPr>
@@ -9740,11 +10268,11 @@
             <a:avLst/>
           </a:prstGeom>
           <a:solidFill>
-            <a:srgbClr val="162A68"/>
+            <a:srgbClr val="F2F7FF"/>
           </a:solidFill>
-          <a:ln w="9525">
+          <a:ln w="6350">
             <a:solidFill>
-              <a:srgbClr val="4A68B8"/>
+              <a:srgbClr val="2FDFE5"/>
             </a:solidFill>
           </a:ln>
         </p:spPr>
@@ -9772,14 +10300,14 @@
       </p:sp>
       <p:sp>
         <p:nvSpPr>
-          <p:cNvPr id="18" name="Rectangle 17"/>
+          <p:cNvPr id="19" name="Rectangle 18"/>
           <p:cNvSpPr/>
           <p:nvPr/>
         </p:nvSpPr>
         <p:spPr>
           <a:xfrm>
             <a:off x="6274155" y="1755648"/>
-            <a:ext cx="5588355" cy="38100"/>
+            <a:ext cx="5588355" cy="50800"/>
           </a:xfrm>
           <a:prstGeom prst="rect">
             <a:avLst/>
@@ -9815,13 +10343,13 @@
       </p:sp>
       <p:sp>
         <p:nvSpPr>
-          <p:cNvPr id="19" name="Oval 18"/>
+          <p:cNvPr id="20" name="Oval 19"/>
           <p:cNvSpPr/>
           <p:nvPr/>
         </p:nvSpPr>
         <p:spPr>
           <a:xfrm>
-            <a:off x="6429603" y="1883664"/>
+            <a:off x="6429603" y="1901952"/>
             <a:ext cx="201168" cy="201168"/>
           </a:xfrm>
           <a:prstGeom prst="ellipse">
@@ -9860,13 +10388,13 @@
       </p:sp>
       <p:sp>
         <p:nvSpPr>
-          <p:cNvPr id="20" name="TextBox 19"/>
+          <p:cNvPr id="21" name="TextBox 20"/>
           <p:cNvSpPr txBox="1"/>
           <p:nvPr/>
         </p:nvSpPr>
         <p:spPr>
           <a:xfrm>
-            <a:off x="6429603" y="1883664"/>
+            <a:off x="6429603" y="1901952"/>
             <a:ext cx="201168" cy="201168"/>
           </a:xfrm>
           <a:prstGeom prst="rect">
@@ -9894,14 +10422,14 @@
       </p:sp>
       <p:sp>
         <p:nvSpPr>
-          <p:cNvPr id="21" name="TextBox 20"/>
+          <p:cNvPr id="22" name="TextBox 21"/>
           <p:cNvSpPr txBox="1"/>
           <p:nvPr/>
         </p:nvSpPr>
         <p:spPr>
           <a:xfrm>
-            <a:off x="6694779" y="1883664"/>
-            <a:ext cx="5076291" cy="365760"/>
+            <a:off x="6694779" y="1901952"/>
+            <a:ext cx="5094579" cy="347472"/>
           </a:xfrm>
           <a:prstGeom prst="rect">
             <a:avLst/>
@@ -9918,7 +10446,7 @@
             <a:r>
               <a:rPr sz="900" b="1">
                 <a:solidFill>
-                  <a:srgbClr val="FFFFFF"/>
+                  <a:srgbClr val="081432"/>
                 </a:solidFill>
               </a:rPr>
               <a:t>Recobro Judicial</a:t>
@@ -9928,13 +10456,13 @@
       </p:sp>
       <p:sp>
         <p:nvSpPr>
-          <p:cNvPr id="22" name="Rectangle 21"/>
+          <p:cNvPr id="23" name="Rectangle 22"/>
           <p:cNvSpPr/>
           <p:nvPr/>
         </p:nvSpPr>
         <p:spPr>
           <a:xfrm>
-            <a:off x="6402171" y="2139696"/>
+            <a:off x="6402171" y="2157984"/>
             <a:ext cx="5332323" cy="12700"/>
           </a:xfrm>
           <a:prstGeom prst="rect">
@@ -9971,14 +10499,14 @@
       </p:sp>
       <p:sp>
         <p:nvSpPr>
-          <p:cNvPr id="23" name="TextBox 22"/>
+          <p:cNvPr id="24" name="TextBox 23"/>
           <p:cNvSpPr txBox="1"/>
           <p:nvPr/>
         </p:nvSpPr>
         <p:spPr>
           <a:xfrm>
-            <a:off x="6402171" y="2215896"/>
-            <a:ext cx="5332323" cy="1588008"/>
+            <a:off x="6402171" y="2221484"/>
+            <a:ext cx="5332323" cy="1582420"/>
           </a:xfrm>
           <a:prstGeom prst="rect">
             <a:avLst/>
@@ -9995,7 +10523,7 @@
             <a:r>
               <a:rPr sz="750">
                 <a:solidFill>
-                  <a:srgbClr val="E4EEFF"/>
+                  <a:srgbClr val="223A6A"/>
                 </a:solidFill>
               </a:rPr>
               <a:t>Interposición de demandas, coordinación con letrados y ejecución de sentencias a través de procuradores especializados.</a:t>
@@ -10005,7 +10533,7 @@
       </p:sp>
       <p:sp>
         <p:nvSpPr>
-          <p:cNvPr id="24" name="Rectangle 23"/>
+          <p:cNvPr id="25" name="Rectangle 24"/>
           <p:cNvSpPr/>
           <p:nvPr/>
         </p:nvSpPr>
@@ -10018,11 +10546,11 @@
             <a:avLst/>
           </a:prstGeom>
           <a:solidFill>
-            <a:srgbClr val="162A68"/>
+            <a:srgbClr val="F2F7FF"/>
           </a:solidFill>
-          <a:ln w="9525">
+          <a:ln w="6350">
             <a:solidFill>
-              <a:srgbClr val="4A68B8"/>
+              <a:srgbClr val="2FDFE5"/>
             </a:solidFill>
           </a:ln>
         </p:spPr>
@@ -10050,14 +10578,14 @@
       </p:sp>
       <p:sp>
         <p:nvSpPr>
-          <p:cNvPr id="25" name="Rectangle 24"/>
+          <p:cNvPr id="26" name="Rectangle 25"/>
           <p:cNvSpPr/>
           <p:nvPr/>
         </p:nvSpPr>
         <p:spPr>
           <a:xfrm>
             <a:off x="502920" y="4023360"/>
-            <a:ext cx="5588355" cy="38100"/>
+            <a:ext cx="5588355" cy="50800"/>
           </a:xfrm>
           <a:prstGeom prst="rect">
             <a:avLst/>
@@ -10093,13 +10621,13 @@
       </p:sp>
       <p:sp>
         <p:nvSpPr>
-          <p:cNvPr id="26" name="Oval 25"/>
+          <p:cNvPr id="27" name="Oval 26"/>
           <p:cNvSpPr/>
           <p:nvPr/>
         </p:nvSpPr>
         <p:spPr>
           <a:xfrm>
-            <a:off x="658368" y="4151376"/>
+            <a:off x="658368" y="4169664"/>
             <a:ext cx="201168" cy="201168"/>
           </a:xfrm>
           <a:prstGeom prst="ellipse">
@@ -10138,13 +10666,13 @@
       </p:sp>
       <p:sp>
         <p:nvSpPr>
-          <p:cNvPr id="27" name="TextBox 26"/>
+          <p:cNvPr id="28" name="TextBox 27"/>
           <p:cNvSpPr txBox="1"/>
           <p:nvPr/>
         </p:nvSpPr>
         <p:spPr>
           <a:xfrm>
-            <a:off x="658368" y="4151376"/>
+            <a:off x="658368" y="4169664"/>
             <a:ext cx="201168" cy="201168"/>
           </a:xfrm>
           <a:prstGeom prst="rect">
@@ -10172,14 +10700,14 @@
       </p:sp>
       <p:sp>
         <p:nvSpPr>
-          <p:cNvPr id="28" name="TextBox 27"/>
+          <p:cNvPr id="29" name="TextBox 28"/>
           <p:cNvSpPr txBox="1"/>
           <p:nvPr/>
         </p:nvSpPr>
         <p:spPr>
           <a:xfrm>
-            <a:off x="923544" y="4151376"/>
-            <a:ext cx="5076291" cy="365760"/>
+            <a:off x="923544" y="4169664"/>
+            <a:ext cx="5094579" cy="347472"/>
           </a:xfrm>
           <a:prstGeom prst="rect">
             <a:avLst/>
@@ -10196,7 +10724,7 @@
             <a:r>
               <a:rPr sz="900" b="1">
                 <a:solidFill>
-                  <a:srgbClr val="FFFFFF"/>
+                  <a:srgbClr val="081432"/>
                 </a:solidFill>
               </a:rPr>
               <a:t>Scoring &amp; Segmentación</a:t>
@@ -10206,13 +10734,13 @@
       </p:sp>
       <p:sp>
         <p:nvSpPr>
-          <p:cNvPr id="29" name="Rectangle 28"/>
+          <p:cNvPr id="30" name="Rectangle 29"/>
           <p:cNvSpPr/>
           <p:nvPr/>
         </p:nvSpPr>
         <p:spPr>
           <a:xfrm>
-            <a:off x="630936" y="4407408"/>
+            <a:off x="630936" y="4425696"/>
             <a:ext cx="5332323" cy="12700"/>
           </a:xfrm>
           <a:prstGeom prst="rect">
@@ -10249,14 +10777,14 @@
       </p:sp>
       <p:sp>
         <p:nvSpPr>
-          <p:cNvPr id="30" name="TextBox 29"/>
+          <p:cNvPr id="31" name="TextBox 30"/>
           <p:cNvSpPr txBox="1"/>
           <p:nvPr/>
         </p:nvSpPr>
         <p:spPr>
           <a:xfrm>
-            <a:off x="630936" y="4483608"/>
-            <a:ext cx="5332323" cy="1588008"/>
+            <a:off x="630936" y="4489196"/>
+            <a:ext cx="5332323" cy="1582420"/>
           </a:xfrm>
           <a:prstGeom prst="rect">
             <a:avLst/>
@@ -10273,7 +10801,7 @@
             <a:r>
               <a:rPr sz="750">
                 <a:solidFill>
-                  <a:srgbClr val="E4EEFF"/>
+                  <a:srgbClr val="223A6A"/>
                 </a:solidFill>
               </a:rPr>
               <a:t>Análisis predictivo de cartera para priorizar expedientes con mayor probabilidad de cobro y optimizar recursos.</a:t>
@@ -10283,7 +10811,7 @@
       </p:sp>
       <p:sp>
         <p:nvSpPr>
-          <p:cNvPr id="31" name="Rectangle 30"/>
+          <p:cNvPr id="32" name="Rectangle 31"/>
           <p:cNvSpPr/>
           <p:nvPr/>
         </p:nvSpPr>
@@ -10296,11 +10824,11 @@
             <a:avLst/>
           </a:prstGeom>
           <a:solidFill>
-            <a:srgbClr val="162A68"/>
+            <a:srgbClr val="F2F7FF"/>
           </a:solidFill>
-          <a:ln w="9525">
+          <a:ln w="6350">
             <a:solidFill>
-              <a:srgbClr val="4A68B8"/>
+              <a:srgbClr val="2FDFE5"/>
             </a:solidFill>
           </a:ln>
         </p:spPr>
@@ -10328,14 +10856,14 @@
       </p:sp>
       <p:sp>
         <p:nvSpPr>
-          <p:cNvPr id="32" name="Rectangle 31"/>
+          <p:cNvPr id="33" name="Rectangle 32"/>
           <p:cNvSpPr/>
           <p:nvPr/>
         </p:nvSpPr>
         <p:spPr>
           <a:xfrm>
             <a:off x="6274155" y="4023360"/>
-            <a:ext cx="5588355" cy="38100"/>
+            <a:ext cx="5588355" cy="50800"/>
           </a:xfrm>
           <a:prstGeom prst="rect">
             <a:avLst/>
@@ -10371,13 +10899,13 @@
       </p:sp>
       <p:sp>
         <p:nvSpPr>
-          <p:cNvPr id="33" name="Oval 32"/>
+          <p:cNvPr id="34" name="Oval 33"/>
           <p:cNvSpPr/>
           <p:nvPr/>
         </p:nvSpPr>
         <p:spPr>
           <a:xfrm>
-            <a:off x="6429603" y="4151376"/>
+            <a:off x="6429603" y="4169664"/>
             <a:ext cx="201168" cy="201168"/>
           </a:xfrm>
           <a:prstGeom prst="ellipse">
@@ -10416,13 +10944,13 @@
       </p:sp>
       <p:sp>
         <p:nvSpPr>
-          <p:cNvPr id="34" name="TextBox 33"/>
+          <p:cNvPr id="35" name="TextBox 34"/>
           <p:cNvSpPr txBox="1"/>
           <p:nvPr/>
         </p:nvSpPr>
         <p:spPr>
           <a:xfrm>
-            <a:off x="6429603" y="4151376"/>
+            <a:off x="6429603" y="4169664"/>
             <a:ext cx="201168" cy="201168"/>
           </a:xfrm>
           <a:prstGeom prst="rect">
@@ -10450,14 +10978,14 @@
       </p:sp>
       <p:sp>
         <p:nvSpPr>
-          <p:cNvPr id="35" name="TextBox 34"/>
+          <p:cNvPr id="36" name="TextBox 35"/>
           <p:cNvSpPr txBox="1"/>
           <p:nvPr/>
         </p:nvSpPr>
         <p:spPr>
           <a:xfrm>
-            <a:off x="6694779" y="4151376"/>
-            <a:ext cx="5076291" cy="365760"/>
+            <a:off x="6694779" y="4169664"/>
+            <a:ext cx="5094579" cy="347472"/>
           </a:xfrm>
           <a:prstGeom prst="rect">
             <a:avLst/>
@@ -10474,7 +11002,7 @@
             <a:r>
               <a:rPr sz="900" b="1">
                 <a:solidFill>
-                  <a:srgbClr val="FFFFFF"/>
+                  <a:srgbClr val="081432"/>
                 </a:solidFill>
               </a:rPr>
               <a:t>Reporting &amp; Dashboard</a:t>
@@ -10484,13 +11012,13 @@
       </p:sp>
       <p:sp>
         <p:nvSpPr>
-          <p:cNvPr id="36" name="Rectangle 35"/>
+          <p:cNvPr id="37" name="Rectangle 36"/>
           <p:cNvSpPr/>
           <p:nvPr/>
         </p:nvSpPr>
         <p:spPr>
           <a:xfrm>
-            <a:off x="6402171" y="4407408"/>
+            <a:off x="6402171" y="4425696"/>
             <a:ext cx="5332323" cy="12700"/>
           </a:xfrm>
           <a:prstGeom prst="rect">
@@ -10527,14 +11055,14 @@
       </p:sp>
       <p:sp>
         <p:nvSpPr>
-          <p:cNvPr id="37" name="TextBox 36"/>
+          <p:cNvPr id="38" name="TextBox 37"/>
           <p:cNvSpPr txBox="1"/>
           <p:nvPr/>
         </p:nvSpPr>
         <p:spPr>
           <a:xfrm>
-            <a:off x="6402171" y="4483608"/>
-            <a:ext cx="5332323" cy="1588008"/>
+            <a:off x="6402171" y="4489196"/>
+            <a:ext cx="5332323" cy="1582420"/>
           </a:xfrm>
           <a:prstGeom prst="rect">
             <a:avLst/>
@@ -10551,7 +11079,7 @@
             <a:r>
               <a:rPr sz="750">
                 <a:solidFill>
-                  <a:srgbClr val="E4EEFF"/>
+                  <a:srgbClr val="223A6A"/>
                 </a:solidFill>
               </a:rPr>
               <a:t>Panel de control en tiempo real con KPIs, tasa de recuperación, aging de cartera y exportación de informes ejecutivos.</a:t>
@@ -10564,8 +11092,107 @@
   <p:clrMapOvr>
     <a:masterClrMapping/>
   </p:clrMapOvr>
-  <p:transition dur="700" spd="fast">
-    <p:fade/>
+  <p:timing>
+    <p:tnLst>
+      <p:par>
+        <p:cTn id="1" dur="indefin" restart="whenNotActive" nodeType="tmRoot">
+          <p:childTnLst>
+            <p:seq concurrent="1" nextAc="seek">
+              <p:cTn id="2" dur="indefin" nodeType="mainSeq">
+                <p:childTnLst>
+                  <p:par>
+                    <p:cTn id="3" fill="hold">
+                      <p:stCondLst>
+                        <p:cond delay="0"/>
+                      </p:stCondLst>
+                      <p:childTnLst>
+                        <p:par>
+                          <p:cTn id="5" fill="hold">
+                            <p:stCondLst>
+                              <p:cond delay="0"/>
+                            </p:stCondLst>
+                            <p:childTnLst>
+                              <p:animEffect transition="in" filter="wipe(up)">
+                                <p:cBhvr>
+                                  <p:cTn id="6" dur="450" fill="hold"/>
+                                  <p:tgtEl>
+                                    <p:spTgt spid="11"/>
+                                  </p:tgtEl>
+                                </p:cBhvr>
+                              </p:animEffect>
+                            </p:childTnLst>
+                          </p:cTn>
+                        </p:par>
+                        <p:par>
+                          <p:cTn id="7" fill="hold">
+                            <p:stCondLst>
+                              <p:cond delay="160"/>
+                            </p:stCondLst>
+                            <p:childTnLst>
+                              <p:animEffect transition="in" filter="wipe(up)">
+                                <p:cBhvr>
+                                  <p:cTn id="8" dur="450" fill="hold"/>
+                                  <p:tgtEl>
+                                    <p:spTgt spid="18"/>
+                                  </p:tgtEl>
+                                </p:cBhvr>
+                              </p:animEffect>
+                            </p:childTnLst>
+                          </p:cTn>
+                        </p:par>
+                        <p:par>
+                          <p:cTn id="9" fill="hold">
+                            <p:stCondLst>
+                              <p:cond delay="320"/>
+                            </p:stCondLst>
+                            <p:childTnLst>
+                              <p:animEffect transition="in" filter="wipe(up)">
+                                <p:cBhvr>
+                                  <p:cTn id="10" dur="450" fill="hold"/>
+                                  <p:tgtEl>
+                                    <p:spTgt spid="25"/>
+                                  </p:tgtEl>
+                                </p:cBhvr>
+                              </p:animEffect>
+                            </p:childTnLst>
+                          </p:cTn>
+                        </p:par>
+                        <p:par>
+                          <p:cTn id="11" fill="hold">
+                            <p:stCondLst>
+                              <p:cond delay="480"/>
+                            </p:stCondLst>
+                            <p:childTnLst>
+                              <p:animEffect transition="in" filter="wipe(up)">
+                                <p:cBhvr>
+                                  <p:cTn id="12" dur="450" fill="hold"/>
+                                  <p:tgtEl>
+                                    <p:spTgt spid="32"/>
+                                  </p:tgtEl>
+                                </p:cBhvr>
+                              </p:animEffect>
+                            </p:childTnLst>
+                          </p:cTn>
+                        </p:par>
+                      </p:childTnLst>
+                    </p:cTn>
+                  </p:par>
+                </p:childTnLst>
+              </p:cTn>
+              <p:prevCondLst>
+                <p:cond evt="onPrevClick" delay="0"/>
+              </p:prevCondLst>
+              <p:nextCondLst>
+                <p:cond evt="onNextClick" delay="0"/>
+              </p:nextCondLst>
+            </p:seq>
+          </p:childTnLst>
+        </p:cTn>
+      </p:par>
+    </p:tnLst>
+  </p:timing>
+  <p:transition dur="500" spd="fast">
+    <p:push dir="u"/>
   </p:transition>
 </p:sld>
 </file>
@@ -10620,8 +11247,8 @@
         </p:blipFill>
         <p:spPr>
           <a:xfrm>
-            <a:off x="6979615" y="0"/>
-            <a:ext cx="5212080" cy="6858000"/>
+            <a:off x="7071055" y="0"/>
+            <a:ext cx="5120640" cy="6858000"/>
           </a:xfrm>
           <a:prstGeom prst="rect">
             <a:avLst/>
@@ -10636,15 +11263,15 @@
         </p:nvSpPr>
         <p:spPr>
           <a:xfrm>
-            <a:off x="6979615" y="0"/>
-            <a:ext cx="5212080" cy="6858000"/>
+            <a:off x="7071055" y="0"/>
+            <a:ext cx="5120640" cy="6858000"/>
           </a:xfrm>
           <a:prstGeom prst="rect">
             <a:avLst/>
           </a:prstGeom>
           <a:solidFill>
             <a:srgbClr val="060E24">
-              <a:alpha val="40000"/>
+              <a:alpha val="30000"/>
             </a:srgbClr>
           </a:solidFill>
           <a:ln>
@@ -10681,7 +11308,7 @@
         </p:nvSpPr>
         <p:spPr>
           <a:xfrm>
-            <a:off x="6941515" y="0"/>
+            <a:off x="7032955" y="0"/>
             <a:ext cx="38100" cy="6858000"/>
           </a:xfrm>
           <a:prstGeom prst="rect">
@@ -10991,7 +11618,7 @@
             <a:r>
               <a:rPr sz="900" i="1">
                 <a:solidFill>
-                  <a:srgbClr val="C8E8FF"/>
+                  <a:srgbClr val="C0E8FF"/>
                 </a:solidFill>
               </a:rPr>
               <a:t>Nuestros equipos están disponibles para comenzar de inmediato.</a:t>
@@ -11007,18 +11634,18 @@
         </p:nvSpPr>
         <p:spPr>
           <a:xfrm>
-            <a:off x="502920" y="3273552"/>
-            <a:ext cx="2103120" cy="1737360"/>
+            <a:off x="502920" y="3291840"/>
+            <a:ext cx="2121408" cy="1737360"/>
           </a:xfrm>
           <a:prstGeom prst="rect">
             <a:avLst/>
           </a:prstGeom>
           <a:solidFill>
-            <a:srgbClr val="162A68"/>
+            <a:srgbClr val="F2F7FF"/>
           </a:solidFill>
-          <a:ln w="9525">
+          <a:ln w="6350">
             <a:solidFill>
-              <a:srgbClr val="4A68B8"/>
+              <a:srgbClr val="2FDFE5"/>
             </a:solidFill>
           </a:ln>
         </p:spPr>
@@ -11052,8 +11679,8 @@
         </p:nvSpPr>
         <p:spPr>
           <a:xfrm>
-            <a:off x="502920" y="3273552"/>
-            <a:ext cx="2103120" cy="38100"/>
+            <a:off x="502920" y="3291840"/>
+            <a:ext cx="2121408" cy="50800"/>
           </a:xfrm>
           <a:prstGeom prst="rect">
             <a:avLst/>
@@ -11095,8 +11722,8 @@
         </p:nvSpPr>
         <p:spPr>
           <a:xfrm>
-            <a:off x="621792" y="3401568"/>
-            <a:ext cx="1865376" cy="256032"/>
+            <a:off x="621792" y="3429000"/>
+            <a:ext cx="1883664" cy="256032"/>
           </a:xfrm>
           <a:prstGeom prst="rect">
             <a:avLst/>
@@ -11113,7 +11740,7 @@
             <a:r>
               <a:rPr sz="950" b="1">
                 <a:solidFill>
-                  <a:srgbClr val="2FDFE5"/>
+                  <a:srgbClr val="081432"/>
                 </a:solidFill>
               </a:rPr>
               <a:t>MADRID</a:t>
@@ -11129,8 +11756,8 @@
         </p:nvSpPr>
         <p:spPr>
           <a:xfrm>
-            <a:off x="621792" y="3694176"/>
-            <a:ext cx="1865376" cy="12700"/>
+            <a:off x="621792" y="3721608"/>
+            <a:ext cx="1883664" cy="12700"/>
           </a:xfrm>
           <a:prstGeom prst="rect">
             <a:avLst/>
@@ -11172,8 +11799,8 @@
         </p:nvSpPr>
         <p:spPr>
           <a:xfrm>
-            <a:off x="621792" y="3757676"/>
-            <a:ext cx="1865376" cy="1143000"/>
+            <a:off x="621792" y="3785108"/>
+            <a:ext cx="1883664" cy="1143000"/>
           </a:xfrm>
           <a:prstGeom prst="rect">
             <a:avLst/>
@@ -11194,7 +11821,7 @@
             <a:r>
               <a:rPr sz="750">
                 <a:solidFill>
-                  <a:srgbClr val="E4EEFF"/>
+                  <a:srgbClr val="223A6A"/>
                 </a:solidFill>
               </a:rPr>
               <a:t>Gran Vía 28, 4ª planta</a:t>
@@ -11224,7 +11851,7 @@
             <a:r>
               <a:rPr sz="750">
                 <a:solidFill>
-                  <a:srgbClr val="B0CCEE"/>
+                  <a:srgbClr val="80A8CC"/>
                 </a:solidFill>
               </a:rPr>
               <a:t>madrid@sendacredit.com</a:t>
@@ -11240,18 +11867,18 @@
         </p:nvSpPr>
         <p:spPr>
           <a:xfrm>
-            <a:off x="2761488" y="3273552"/>
-            <a:ext cx="2103120" cy="1737360"/>
+            <a:off x="2779776" y="3291840"/>
+            <a:ext cx="2121408" cy="1737360"/>
           </a:xfrm>
           <a:prstGeom prst="rect">
             <a:avLst/>
           </a:prstGeom>
           <a:solidFill>
-            <a:srgbClr val="162A68"/>
+            <a:srgbClr val="F2F7FF"/>
           </a:solidFill>
-          <a:ln w="9525">
+          <a:ln w="6350">
             <a:solidFill>
-              <a:srgbClr val="4A68B8"/>
+              <a:srgbClr val="2FDFE5"/>
             </a:solidFill>
           </a:ln>
         </p:spPr>
@@ -11285,8 +11912,8 @@
         </p:nvSpPr>
         <p:spPr>
           <a:xfrm>
-            <a:off x="2761488" y="3273552"/>
-            <a:ext cx="2103120" cy="38100"/>
+            <a:off x="2779776" y="3291840"/>
+            <a:ext cx="2121408" cy="50800"/>
           </a:xfrm>
           <a:prstGeom prst="rect">
             <a:avLst/>
@@ -11328,8 +11955,8 @@
         </p:nvSpPr>
         <p:spPr>
           <a:xfrm>
-            <a:off x="2880360" y="3401568"/>
-            <a:ext cx="1865376" cy="256032"/>
+            <a:off x="2898648" y="3429000"/>
+            <a:ext cx="1883664" cy="256032"/>
           </a:xfrm>
           <a:prstGeom prst="rect">
             <a:avLst/>
@@ -11346,7 +11973,7 @@
             <a:r>
               <a:rPr sz="950" b="1">
                 <a:solidFill>
-                  <a:srgbClr val="2FDFE5"/>
+                  <a:srgbClr val="081432"/>
                 </a:solidFill>
               </a:rPr>
               <a:t>BARCELONA</a:t>
@@ -11362,8 +11989,8 @@
         </p:nvSpPr>
         <p:spPr>
           <a:xfrm>
-            <a:off x="2880360" y="3694176"/>
-            <a:ext cx="1865376" cy="12700"/>
+            <a:off x="2898648" y="3721608"/>
+            <a:ext cx="1883664" cy="12700"/>
           </a:xfrm>
           <a:prstGeom prst="rect">
             <a:avLst/>
@@ -11405,8 +12032,8 @@
         </p:nvSpPr>
         <p:spPr>
           <a:xfrm>
-            <a:off x="2880360" y="3757676"/>
-            <a:ext cx="1865376" cy="1143000"/>
+            <a:off x="2898648" y="3785108"/>
+            <a:ext cx="1883664" cy="1143000"/>
           </a:xfrm>
           <a:prstGeom prst="rect">
             <a:avLst/>
@@ -11427,7 +12054,7 @@
             <a:r>
               <a:rPr sz="750">
                 <a:solidFill>
-                  <a:srgbClr val="E4EEFF"/>
+                  <a:srgbClr val="223A6A"/>
                 </a:solidFill>
               </a:rPr>
               <a:t>Diagonal 211, 3ª planta</a:t>
@@ -11457,7 +12084,7 @@
             <a:r>
               <a:rPr sz="750">
                 <a:solidFill>
-                  <a:srgbClr val="B0CCEE"/>
+                  <a:srgbClr val="80A8CC"/>
                 </a:solidFill>
               </a:rPr>
               <a:t>barcelona@sendacredit.com</a:t>
@@ -11473,18 +12100,18 @@
         </p:nvSpPr>
         <p:spPr>
           <a:xfrm>
-            <a:off x="5020056" y="3273552"/>
-            <a:ext cx="2103120" cy="1737360"/>
+            <a:off x="5056632" y="3291840"/>
+            <a:ext cx="2121408" cy="1737360"/>
           </a:xfrm>
           <a:prstGeom prst="rect">
             <a:avLst/>
           </a:prstGeom>
           <a:solidFill>
-            <a:srgbClr val="162A68"/>
+            <a:srgbClr val="F2F7FF"/>
           </a:solidFill>
-          <a:ln w="9525">
+          <a:ln w="6350">
             <a:solidFill>
-              <a:srgbClr val="4A68B8"/>
+              <a:srgbClr val="2FDFE5"/>
             </a:solidFill>
           </a:ln>
         </p:spPr>
@@ -11518,8 +12145,8 @@
         </p:nvSpPr>
         <p:spPr>
           <a:xfrm>
-            <a:off x="5020056" y="3273552"/>
-            <a:ext cx="2103120" cy="38100"/>
+            <a:off x="5056632" y="3291840"/>
+            <a:ext cx="2121408" cy="50800"/>
           </a:xfrm>
           <a:prstGeom prst="rect">
             <a:avLst/>
@@ -11561,8 +12188,8 @@
         </p:nvSpPr>
         <p:spPr>
           <a:xfrm>
-            <a:off x="5138928" y="3401568"/>
-            <a:ext cx="1865376" cy="256032"/>
+            <a:off x="5175504" y="3429000"/>
+            <a:ext cx="1883664" cy="256032"/>
           </a:xfrm>
           <a:prstGeom prst="rect">
             <a:avLst/>
@@ -11579,7 +12206,7 @@
             <a:r>
               <a:rPr sz="950" b="1">
                 <a:solidFill>
-                  <a:srgbClr val="2FDFE5"/>
+                  <a:srgbClr val="081432"/>
                 </a:solidFill>
               </a:rPr>
               <a:t>MÁLAGA</a:t>
@@ -11595,8 +12222,8 @@
         </p:nvSpPr>
         <p:spPr>
           <a:xfrm>
-            <a:off x="5138928" y="3694176"/>
-            <a:ext cx="1865376" cy="12700"/>
+            <a:off x="5175504" y="3721608"/>
+            <a:ext cx="1883664" cy="12700"/>
           </a:xfrm>
           <a:prstGeom prst="rect">
             <a:avLst/>
@@ -11638,8 +12265,8 @@
         </p:nvSpPr>
         <p:spPr>
           <a:xfrm>
-            <a:off x="5138928" y="3757676"/>
-            <a:ext cx="1865376" cy="1143000"/>
+            <a:off x="5175504" y="3785108"/>
+            <a:ext cx="1883664" cy="1143000"/>
           </a:xfrm>
           <a:prstGeom prst="rect">
             <a:avLst/>
@@ -11660,7 +12287,7 @@
             <a:r>
               <a:rPr sz="750">
                 <a:solidFill>
-                  <a:srgbClr val="E4EEFF"/>
+                  <a:srgbClr val="223A6A"/>
                 </a:solidFill>
               </a:rPr>
               <a:t>Larios 12, 2ª planta</a:t>
@@ -11690,7 +12317,7 @@
             <a:r>
               <a:rPr sz="750">
                 <a:solidFill>
-                  <a:srgbClr val="B0CCEE"/>
+                  <a:srgbClr val="80A8CC"/>
                 </a:solidFill>
               </a:rPr>
               <a:t>malaga@sendacredit.com</a:t>
@@ -11706,8 +12333,8 @@
         </p:nvSpPr>
         <p:spPr>
           <a:xfrm>
-            <a:off x="502920" y="6437376"/>
-            <a:ext cx="4572000" cy="274320"/>
+            <a:off x="502920" y="6455664"/>
+            <a:ext cx="4572000" cy="256032"/>
           </a:xfrm>
           <a:prstGeom prst="rect">
             <a:avLst/>
@@ -11748,8 +12375,8 @@
         </p:blipFill>
         <p:spPr>
           <a:xfrm>
-            <a:off x="10116008" y="6291072"/>
-            <a:ext cx="1874519" cy="420624"/>
+            <a:off x="10161727" y="6291072"/>
+            <a:ext cx="1828800" cy="420624"/>
           </a:xfrm>
           <a:prstGeom prst="rect">
             <a:avLst/>
@@ -11761,8 +12388,90 @@
   <p:clrMapOvr>
     <a:masterClrMapping/>
   </p:clrMapOvr>
-  <p:transition dur="700" spd="fast">
-    <p:fade/>
+  <p:timing>
+    <p:tnLst>
+      <p:par>
+        <p:cTn id="1" dur="indefin" restart="whenNotActive" nodeType="tmRoot">
+          <p:childTnLst>
+            <p:seq concurrent="1" nextAc="seek">
+              <p:cTn id="2" dur="indefin" nodeType="mainSeq">
+                <p:childTnLst>
+                  <p:par>
+                    <p:cTn id="3" fill="hold">
+                      <p:stCondLst>
+                        <p:cond delay="0"/>
+                      </p:stCondLst>
+                      <p:childTnLst>
+                        <p:par>
+                          <p:cTn id="5" fill="hold">
+                            <p:stCondLst>
+                              <p:cond delay="0"/>
+                            </p:stCondLst>
+                            <p:childTnLst>
+                              <p:animEffect transition="in" filter="wipe(up)">
+                                <p:cBhvr>
+                                  <p:cTn id="6" dur="450" fill="hold"/>
+                                  <p:tgtEl>
+                                    <p:spTgt spid="13"/>
+                                  </p:tgtEl>
+                                </p:cBhvr>
+                              </p:animEffect>
+                            </p:childTnLst>
+                          </p:cTn>
+                        </p:par>
+                        <p:par>
+                          <p:cTn id="7" fill="hold">
+                            <p:stCondLst>
+                              <p:cond delay="160"/>
+                            </p:stCondLst>
+                            <p:childTnLst>
+                              <p:animEffect transition="in" filter="wipe(up)">
+                                <p:cBhvr>
+                                  <p:cTn id="8" dur="450" fill="hold"/>
+                                  <p:tgtEl>
+                                    <p:spTgt spid="18"/>
+                                  </p:tgtEl>
+                                </p:cBhvr>
+                              </p:animEffect>
+                            </p:childTnLst>
+                          </p:cTn>
+                        </p:par>
+                        <p:par>
+                          <p:cTn id="9" fill="hold">
+                            <p:stCondLst>
+                              <p:cond delay="320"/>
+                            </p:stCondLst>
+                            <p:childTnLst>
+                              <p:animEffect transition="in" filter="wipe(up)">
+                                <p:cBhvr>
+                                  <p:cTn id="10" dur="450" fill="hold"/>
+                                  <p:tgtEl>
+                                    <p:spTgt spid="23"/>
+                                  </p:tgtEl>
+                                </p:cBhvr>
+                              </p:animEffect>
+                            </p:childTnLst>
+                          </p:cTn>
+                        </p:par>
+                      </p:childTnLst>
+                    </p:cTn>
+                  </p:par>
+                </p:childTnLst>
+              </p:cTn>
+              <p:prevCondLst>
+                <p:cond evt="onPrevClick" delay="0"/>
+              </p:prevCondLst>
+              <p:nextCondLst>
+                <p:cond evt="onNextClick" delay="0"/>
+              </p:nextCondLst>
+            </p:seq>
+          </p:childTnLst>
+        </p:cTn>
+      </p:par>
+    </p:tnLst>
+  </p:timing>
+  <p:transition dur="500" spd="fast">
+    <p:push dir="u"/>
   </p:transition>
 </p:sld>
 </file>

--- a/sendacredit_propuesta.pptx
+++ b/sendacredit_propuesta.pptx
@@ -3158,7 +3158,7 @@
           </a:prstGeom>
           <a:solidFill>
             <a:srgbClr val="060E24">
-              <a:alpha val="35000"/>
+              <a:alpha val="28000"/>
             </a:srgbClr>
           </a:solidFill>
           <a:ln>
@@ -3505,7 +3505,7 @@
           </a:prstGeom>
           <a:solidFill>
             <a:srgbClr val="060E24">
-              <a:alpha val="38000"/>
+              <a:alpha val="22000"/>
             </a:srgbClr>
           </a:solidFill>
           <a:ln>
@@ -3838,9 +3838,9 @@
             <a:avLst/>
           </a:prstGeom>
           <a:solidFill>
-            <a:srgbClr val="F2F7FF"/>
+            <a:srgbClr val="0E1E4A"/>
           </a:solidFill>
-          <a:ln w="6350">
+          <a:ln w="12700">
             <a:solidFill>
               <a:srgbClr val="2FDFE5"/>
             </a:solidFill>
@@ -4016,7 +4016,7 @@
             <a:r>
               <a:rPr sz="950" b="1">
                 <a:solidFill>
-                  <a:srgbClr val="081432"/>
+                  <a:srgbClr val="FFFFFF"/>
                 </a:solidFill>
               </a:rPr>
               <a:t>Recepción de fichero</a:t>
@@ -4105,7 +4105,7 @@
             <a:r>
               <a:rPr sz="750">
                 <a:solidFill>
-                  <a:srgbClr val="223A6A"/>
+                  <a:srgbClr val="E4EEFF"/>
                 </a:solidFill>
               </a:rPr>
               <a:t>Integración vía SFTP seguro o API REST</a:t>
@@ -4128,7 +4128,7 @@
             <a:r>
               <a:rPr sz="750">
                 <a:solidFill>
-                  <a:srgbClr val="223A6A"/>
+                  <a:srgbClr val="E4EEFF"/>
                 </a:solidFill>
               </a:rPr>
               <a:t>Formatos: CSV, Excel, XML, JSON</a:t>
@@ -4151,7 +4151,7 @@
             <a:r>
               <a:rPr sz="750">
                 <a:solidFill>
-                  <a:srgbClr val="223A6A"/>
+                  <a:srgbClr val="E4EEFF"/>
                 </a:solidFill>
               </a:rPr>
               <a:t>Hasta 100.000 registros por lote</a:t>
@@ -4174,7 +4174,7 @@
             <a:r>
               <a:rPr sz="750">
                 <a:solidFill>
-                  <a:srgbClr val="223A6A"/>
+                  <a:srgbClr val="E4EEFF"/>
                 </a:solidFill>
               </a:rPr>
               <a:t>Acuse con hash de integridad automático</a:t>
@@ -4197,9 +4197,9 @@
             <a:avLst/>
           </a:prstGeom>
           <a:solidFill>
-            <a:srgbClr val="F2F7FF"/>
+            <a:srgbClr val="0E1E4A"/>
           </a:solidFill>
-          <a:ln w="6350">
+          <a:ln w="12700">
             <a:solidFill>
               <a:srgbClr val="2FDFE5"/>
             </a:solidFill>
@@ -4375,7 +4375,7 @@
             <a:r>
               <a:rPr sz="950" b="1">
                 <a:solidFill>
-                  <a:srgbClr val="081432"/>
+                  <a:srgbClr val="FFFFFF"/>
                 </a:solidFill>
               </a:rPr>
               <a:t>Validación y limpieza</a:t>
@@ -4464,7 +4464,7 @@
             <a:r>
               <a:rPr sz="750">
                 <a:solidFill>
-                  <a:srgbClr val="223A6A"/>
+                  <a:srgbClr val="E4EEFF"/>
                 </a:solidFill>
               </a:rPr>
               <a:t>Deduplicación y normalización de datos</a:t>
@@ -4487,7 +4487,7 @@
             <a:r>
               <a:rPr sz="750">
                 <a:solidFill>
-                  <a:srgbClr val="223A6A"/>
+                  <a:srgbClr val="E4EEFF"/>
                 </a:solidFill>
               </a:rPr>
               <a:t>Verificación de DNI/NIE y datos civiles</a:t>
@@ -4510,7 +4510,7 @@
             <a:r>
               <a:rPr sz="750">
                 <a:solidFill>
-                  <a:srgbClr val="223A6A"/>
+                  <a:srgbClr val="E4EEFF"/>
                 </a:solidFill>
               </a:rPr>
               <a:t>Actualización de contactos (ASNEF, GGSS)</a:t>
@@ -4533,7 +4533,7 @@
             <a:r>
               <a:rPr sz="750">
                 <a:solidFill>
-                  <a:srgbClr val="223A6A"/>
+                  <a:srgbClr val="E4EEFF"/>
                 </a:solidFill>
               </a:rPr>
               <a:t>Informe de calidad de cartera en 24 h</a:t>
@@ -4556,9 +4556,9 @@
             <a:avLst/>
           </a:prstGeom>
           <a:solidFill>
-            <a:srgbClr val="F2F7FF"/>
+            <a:srgbClr val="0E1E4A"/>
           </a:solidFill>
-          <a:ln w="6350">
+          <a:ln w="12700">
             <a:solidFill>
               <a:srgbClr val="2FDFE5"/>
             </a:solidFill>
@@ -4734,7 +4734,7 @@
             <a:r>
               <a:rPr sz="950" b="1">
                 <a:solidFill>
-                  <a:srgbClr val="081432"/>
+                  <a:srgbClr val="FFFFFF"/>
                 </a:solidFill>
               </a:rPr>
               <a:t>Segmentación inicial</a:t>
@@ -4823,7 +4823,7 @@
             <a:r>
               <a:rPr sz="750">
                 <a:solidFill>
-                  <a:srgbClr val="223A6A"/>
+                  <a:srgbClr val="E4EEFF"/>
                 </a:solidFill>
               </a:rPr>
               <a:t>Clasificación por antigüedad e importe</a:t>
@@ -4846,7 +4846,7 @@
             <a:r>
               <a:rPr sz="750">
                 <a:solidFill>
-                  <a:srgbClr val="223A6A"/>
+                  <a:srgbClr val="E4EEFF"/>
                 </a:solidFill>
               </a:rPr>
               <a:t>Scoring de cobrabilidad con modelo ML</a:t>
@@ -4869,7 +4869,7 @@
             <a:r>
               <a:rPr sz="750">
                 <a:solidFill>
-                  <a:srgbClr val="223A6A"/>
+                  <a:srgbClr val="E4EEFF"/>
                 </a:solidFill>
               </a:rPr>
               <a:t>Asignación de canal de recobro óptimo</a:t>
@@ -4892,7 +4892,7 @@
             <a:r>
               <a:rPr sz="750">
                 <a:solidFill>
-                  <a:srgbClr val="223A6A"/>
+                  <a:srgbClr val="E4EEFF"/>
                 </a:solidFill>
               </a:rPr>
               <a:t>Priorización por rentabilidad esperada</a:t>
@@ -5043,7 +5043,7 @@
           </a:prstGeom>
           <a:solidFill>
             <a:srgbClr val="060E24">
-              <a:alpha val="38000"/>
+              <a:alpha val="22000"/>
             </a:srgbClr>
           </a:solidFill>
           <a:ln>
@@ -5376,9 +5376,9 @@
             <a:avLst/>
           </a:prstGeom>
           <a:solidFill>
-            <a:srgbClr val="F2F7FF"/>
+            <a:srgbClr val="0E1E4A"/>
           </a:solidFill>
-          <a:ln w="6350">
+          <a:ln w="12700">
             <a:solidFill>
               <a:srgbClr val="2FDFE5"/>
             </a:solidFill>
@@ -5554,7 +5554,7 @@
             <a:r>
               <a:rPr sz="950" b="1">
                 <a:solidFill>
-                  <a:srgbClr val="081432"/>
+                  <a:srgbClr val="FFFFFF"/>
                 </a:solidFill>
               </a:rPr>
               <a:t>Contactación multicanal</a:t>
@@ -5643,7 +5643,7 @@
             <a:r>
               <a:rPr sz="750">
                 <a:solidFill>
-                  <a:srgbClr val="223A6A"/>
+                  <a:srgbClr val="E4EEFF"/>
                 </a:solidFill>
               </a:rPr>
               <a:t>Llamadas outbound con IVR especializado</a:t>
@@ -5666,7 +5666,7 @@
             <a:r>
               <a:rPr sz="750">
                 <a:solidFill>
-                  <a:srgbClr val="223A6A"/>
+                  <a:srgbClr val="E4EEFF"/>
                 </a:solidFill>
               </a:rPr>
               <a:t>SMS, email y WhatsApp Business certificado</a:t>
@@ -5689,7 +5689,7 @@
             <a:r>
               <a:rPr sz="750">
                 <a:solidFill>
-                  <a:srgbClr val="223A6A"/>
+                  <a:srgbClr val="E4EEFF"/>
                 </a:solidFill>
               </a:rPr>
               <a:t>Cartas físicas certificadas cuando procede</a:t>
@@ -5712,7 +5712,7 @@
             <a:r>
               <a:rPr sz="750">
                 <a:solidFill>
-                  <a:srgbClr val="223A6A"/>
+                  <a:srgbClr val="E4EEFF"/>
                 </a:solidFill>
               </a:rPr>
               <a:t>Ventana de contacto 8:00-22:00, L-S</a:t>
@@ -5735,9 +5735,9 @@
             <a:avLst/>
           </a:prstGeom>
           <a:solidFill>
-            <a:srgbClr val="F2F7FF"/>
+            <a:srgbClr val="0E1E4A"/>
           </a:solidFill>
-          <a:ln w="6350">
+          <a:ln w="12700">
             <a:solidFill>
               <a:srgbClr val="2FDFE5"/>
             </a:solidFill>
@@ -5913,7 +5913,7 @@
             <a:r>
               <a:rPr sz="950" b="1">
                 <a:solidFill>
-                  <a:srgbClr val="081432"/>
+                  <a:srgbClr val="FFFFFF"/>
                 </a:solidFill>
               </a:rPr>
               <a:t>Negociación de acuerdos</a:t>
@@ -6002,7 +6002,7 @@
             <a:r>
               <a:rPr sz="750">
                 <a:solidFill>
-                  <a:srgbClr val="223A6A"/>
+                  <a:srgbClr val="E4EEFF"/>
                 </a:solidFill>
               </a:rPr>
               <a:t>Quitas y daciones dentro de límites pactados</a:t>
@@ -6025,7 +6025,7 @@
             <a:r>
               <a:rPr sz="750">
                 <a:solidFill>
-                  <a:srgbClr val="223A6A"/>
+                  <a:srgbClr val="E4EEFF"/>
                 </a:solidFill>
               </a:rPr>
               <a:t>Planes de pago de 3 a 48 meses</a:t>
@@ -6048,7 +6048,7 @@
             <a:r>
               <a:rPr sz="750">
                 <a:solidFill>
-                  <a:srgbClr val="223A6A"/>
+                  <a:srgbClr val="E4EEFF"/>
                 </a:solidFill>
               </a:rPr>
               <a:t>Firma de acuerdos digitales con validez legal</a:t>
@@ -6071,7 +6071,7 @@
             <a:r>
               <a:rPr sz="750">
                 <a:solidFill>
-                  <a:srgbClr val="223A6A"/>
+                  <a:srgbClr val="E4EEFF"/>
                 </a:solidFill>
               </a:rPr>
               <a:t>Grabación de llamadas como respaldo</a:t>
@@ -6094,9 +6094,9 @@
             <a:avLst/>
           </a:prstGeom>
           <a:solidFill>
-            <a:srgbClr val="F2F7FF"/>
+            <a:srgbClr val="0E1E4A"/>
           </a:solidFill>
-          <a:ln w="6350">
+          <a:ln w="12700">
             <a:solidFill>
               <a:srgbClr val="2FDFE5"/>
             </a:solidFill>
@@ -6272,7 +6272,7 @@
             <a:r>
               <a:rPr sz="950" b="1">
                 <a:solidFill>
-                  <a:srgbClr val="081432"/>
+                  <a:srgbClr val="FFFFFF"/>
                 </a:solidFill>
               </a:rPr>
               <a:t>Seguimiento y cobro</a:t>
@@ -6361,7 +6361,7 @@
             <a:r>
               <a:rPr sz="750">
                 <a:solidFill>
-                  <a:srgbClr val="223A6A"/>
+                  <a:srgbClr val="E4EEFF"/>
                 </a:solidFill>
               </a:rPr>
               <a:t>Domiciliación SEPA y pasarela de pago online</a:t>
@@ -6384,7 +6384,7 @@
             <a:r>
               <a:rPr sz="750">
                 <a:solidFill>
-                  <a:srgbClr val="223A6A"/>
+                  <a:srgbClr val="E4EEFF"/>
                 </a:solidFill>
               </a:rPr>
               <a:t>Recordatorios automáticos de vencimientos</a:t>
@@ -6407,7 +6407,7 @@
             <a:r>
               <a:rPr sz="750">
                 <a:solidFill>
-                  <a:srgbClr val="223A6A"/>
+                  <a:srgbClr val="E4EEFF"/>
                 </a:solidFill>
               </a:rPr>
               <a:t>Renegociación ante impagos parciales</a:t>
@@ -6430,7 +6430,7 @@
             <a:r>
               <a:rPr sz="750">
                 <a:solidFill>
-                  <a:srgbClr val="223A6A"/>
+                  <a:srgbClr val="E4EEFF"/>
                 </a:solidFill>
               </a:rPr>
               <a:t>Dashboard de seguimiento en tiempo real</a:t>
@@ -6581,7 +6581,7 @@
           </a:prstGeom>
           <a:solidFill>
             <a:srgbClr val="060E24">
-              <a:alpha val="38000"/>
+              <a:alpha val="22000"/>
             </a:srgbClr>
           </a:solidFill>
           <a:ln>
@@ -6914,9 +6914,9 @@
             <a:avLst/>
           </a:prstGeom>
           <a:solidFill>
-            <a:srgbClr val="F2F7FF"/>
+            <a:srgbClr val="0E1E4A"/>
           </a:solidFill>
-          <a:ln w="6350">
+          <a:ln w="12700">
             <a:solidFill>
               <a:srgbClr val="2FDFE5"/>
             </a:solidFill>
@@ -7092,7 +7092,7 @@
             <a:r>
               <a:rPr sz="950" b="1">
                 <a:solidFill>
-                  <a:srgbClr val="081432"/>
+                  <a:srgbClr val="FFFFFF"/>
                 </a:solidFill>
               </a:rPr>
               <a:t>Análisis de viabilidad</a:t>
@@ -7181,7 +7181,7 @@
             <a:r>
               <a:rPr sz="750">
                 <a:solidFill>
-                  <a:srgbClr val="223A6A"/>
+                  <a:srgbClr val="E4EEFF"/>
                 </a:solidFill>
               </a:rPr>
               <a:t>Revisión de prescripción y documentación</a:t>
@@ -7204,7 +7204,7 @@
             <a:r>
               <a:rPr sz="750">
                 <a:solidFill>
-                  <a:srgbClr val="223A6A"/>
+                  <a:srgbClr val="E4EEFF"/>
                 </a:solidFill>
               </a:rPr>
               <a:t>Estudio de solvencia y localización de bienes</a:t>
@@ -7227,7 +7227,7 @@
             <a:r>
               <a:rPr sz="750">
                 <a:solidFill>
-                  <a:srgbClr val="223A6A"/>
+                  <a:srgbClr val="E4EEFF"/>
                 </a:solidFill>
               </a:rPr>
               <a:t>Valoración coste-beneficio por expediente</a:t>
@@ -7250,7 +7250,7 @@
             <a:r>
               <a:rPr sz="750">
                 <a:solidFill>
-                  <a:srgbClr val="223A6A"/>
+                  <a:srgbClr val="E4EEFF"/>
                 </a:solidFill>
               </a:rPr>
               <a:t>Decisión de elevación judicial en 48-72 h</a:t>
@@ -7273,9 +7273,9 @@
             <a:avLst/>
           </a:prstGeom>
           <a:solidFill>
-            <a:srgbClr val="F2F7FF"/>
+            <a:srgbClr val="0E1E4A"/>
           </a:solidFill>
-          <a:ln w="6350">
+          <a:ln w="12700">
             <a:solidFill>
               <a:srgbClr val="2FDFE5"/>
             </a:solidFill>
@@ -7451,7 +7451,7 @@
             <a:r>
               <a:rPr sz="950" b="1">
                 <a:solidFill>
-                  <a:srgbClr val="081432"/>
+                  <a:srgbClr val="FFFFFF"/>
                 </a:solidFill>
               </a:rPr>
               <a:t>Proceso judicial</a:t>
@@ -7540,7 +7540,7 @@
             <a:r>
               <a:rPr sz="750">
                 <a:solidFill>
-                  <a:srgbClr val="223A6A"/>
+                  <a:srgbClr val="E4EEFF"/>
                 </a:solidFill>
               </a:rPr>
               <a:t>Interposición de monitorio o juicio verbal</a:t>
@@ -7563,7 +7563,7 @@
             <a:r>
               <a:rPr sz="750">
                 <a:solidFill>
-                  <a:srgbClr val="223A6A"/>
+                  <a:srgbClr val="E4EEFF"/>
                 </a:solidFill>
               </a:rPr>
               <a:t>Red de letrados en todas las CC.AA.</a:t>
@@ -7586,7 +7586,7 @@
             <a:r>
               <a:rPr sz="750">
                 <a:solidFill>
-                  <a:srgbClr val="223A6A"/>
+                  <a:srgbClr val="E4EEFF"/>
                 </a:solidFill>
               </a:rPr>
               <a:t>Coordinación con procuradores y notificaciones</a:t>
@@ -7609,7 +7609,7 @@
             <a:r>
               <a:rPr sz="750">
                 <a:solidFill>
-                  <a:srgbClr val="223A6A"/>
+                  <a:srgbClr val="E4EEFF"/>
                 </a:solidFill>
               </a:rPr>
               <a:t>Reporting de estado mensual</a:t>
@@ -7632,9 +7632,9 @@
             <a:avLst/>
           </a:prstGeom>
           <a:solidFill>
-            <a:srgbClr val="F2F7FF"/>
+            <a:srgbClr val="0E1E4A"/>
           </a:solidFill>
-          <a:ln w="6350">
+          <a:ln w="12700">
             <a:solidFill>
               <a:srgbClr val="2FDFE5"/>
             </a:solidFill>
@@ -7810,7 +7810,7 @@
             <a:r>
               <a:rPr sz="950" b="1">
                 <a:solidFill>
-                  <a:srgbClr val="081432"/>
+                  <a:srgbClr val="FFFFFF"/>
                 </a:solidFill>
               </a:rPr>
               <a:t>Ejecución y cobro</a:t>
@@ -7899,7 +7899,7 @@
             <a:r>
               <a:rPr sz="750">
                 <a:solidFill>
-                  <a:srgbClr val="223A6A"/>
+                  <a:srgbClr val="E4EEFF"/>
                 </a:solidFill>
               </a:rPr>
               <a:t>Embargo de cuentas, nóminas e inmuebles</a:t>
@@ -7922,7 +7922,7 @@
             <a:r>
               <a:rPr sz="750">
                 <a:solidFill>
-                  <a:srgbClr val="223A6A"/>
+                  <a:srgbClr val="E4EEFF"/>
                 </a:solidFill>
               </a:rPr>
               <a:t>Seguimiento de subastas judiciales</a:t>
@@ -7945,7 +7945,7 @@
             <a:r>
               <a:rPr sz="750">
                 <a:solidFill>
-                  <a:srgbClr val="223A6A"/>
+                  <a:srgbClr val="E4EEFF"/>
                 </a:solidFill>
               </a:rPr>
               <a:t>Liquidación y transferencia en 5 días hábiles</a:t>
@@ -7968,7 +7968,7 @@
             <a:r>
               <a:rPr sz="750">
                 <a:solidFill>
-                  <a:srgbClr val="223A6A"/>
+                  <a:srgbClr val="E4EEFF"/>
                 </a:solidFill>
               </a:rPr>
               <a:t>Acta de cierre con detalle de costas</a:t>
@@ -8119,7 +8119,7 @@
           </a:prstGeom>
           <a:solidFill>
             <a:srgbClr val="060E24">
-              <a:alpha val="38000"/>
+              <a:alpha val="22000"/>
             </a:srgbClr>
           </a:solidFill>
           <a:ln>
@@ -8452,9 +8452,9 @@
             <a:avLst/>
           </a:prstGeom>
           <a:solidFill>
-            <a:srgbClr val="F2F7FF"/>
+            <a:srgbClr val="0E1E4A"/>
           </a:solidFill>
-          <a:ln w="6350">
+          <a:ln w="12700">
             <a:solidFill>
               <a:srgbClr val="2FDFE5"/>
             </a:solidFill>
@@ -8630,7 +8630,7 @@
             <a:r>
               <a:rPr sz="950" b="1">
                 <a:solidFill>
-                  <a:srgbClr val="081432"/>
+                  <a:srgbClr val="FFFFFF"/>
                 </a:solidFill>
               </a:rPr>
               <a:t>Informes periódicos</a:t>
@@ -8719,7 +8719,7 @@
             <a:r>
               <a:rPr sz="750">
                 <a:solidFill>
-                  <a:srgbClr val="223A6A"/>
+                  <a:srgbClr val="E4EEFF"/>
                 </a:solidFill>
               </a:rPr>
               <a:t>Informe semanal de actividad y contactaciones</a:t>
@@ -8742,7 +8742,7 @@
             <a:r>
               <a:rPr sz="750">
                 <a:solidFill>
-                  <a:srgbClr val="223A6A"/>
+                  <a:srgbClr val="E4EEFF"/>
                 </a:solidFill>
               </a:rPr>
               <a:t>Reporte mensual de recuperación y aging</a:t>
@@ -8765,7 +8765,7 @@
             <a:r>
               <a:rPr sz="750">
                 <a:solidFill>
-                  <a:srgbClr val="223A6A"/>
+                  <a:srgbClr val="E4EEFF"/>
                 </a:solidFill>
               </a:rPr>
               <a:t>Cuadro de mando ejecutivo trimestral</a:t>
@@ -8788,7 +8788,7 @@
             <a:r>
               <a:rPr sz="750">
                 <a:solidFill>
-                  <a:srgbClr val="223A6A"/>
+                  <a:srgbClr val="E4EEFF"/>
                 </a:solidFill>
               </a:rPr>
               <a:t>Exportación en PDF, Excel y API JSON</a:t>
@@ -8811,9 +8811,9 @@
             <a:avLst/>
           </a:prstGeom>
           <a:solidFill>
-            <a:srgbClr val="F2F7FF"/>
+            <a:srgbClr val="0E1E4A"/>
           </a:solidFill>
-          <a:ln w="6350">
+          <a:ln w="12700">
             <a:solidFill>
               <a:srgbClr val="2FDFE5"/>
             </a:solidFill>
@@ -8989,7 +8989,7 @@
             <a:r>
               <a:rPr sz="950" b="1">
                 <a:solidFill>
-                  <a:srgbClr val="081432"/>
+                  <a:srgbClr val="FFFFFF"/>
                 </a:solidFill>
               </a:rPr>
               <a:t>Liquidación y remesas</a:t>
@@ -9078,7 +9078,7 @@
             <a:r>
               <a:rPr sz="750">
                 <a:solidFill>
-                  <a:srgbClr val="223A6A"/>
+                  <a:srgbClr val="E4EEFF"/>
                 </a:solidFill>
               </a:rPr>
               <a:t>Liquidación quincenal por expediente</a:t>
@@ -9101,7 +9101,7 @@
             <a:r>
               <a:rPr sz="750">
                 <a:solidFill>
-                  <a:srgbClr val="223A6A"/>
+                  <a:srgbClr val="E4EEFF"/>
                 </a:solidFill>
               </a:rPr>
               <a:t>Transferencia SEPA en T+2 hábiles</a:t>
@@ -9124,7 +9124,7 @@
             <a:r>
               <a:rPr sz="750">
                 <a:solidFill>
-                  <a:srgbClr val="223A6A"/>
+                  <a:srgbClr val="E4EEFF"/>
                 </a:solidFill>
               </a:rPr>
               <a:t>Conciliación automática con ERP/CRM</a:t>
@@ -9147,7 +9147,7 @@
             <a:r>
               <a:rPr sz="750">
                 <a:solidFill>
-                  <a:srgbClr val="223A6A"/>
+                  <a:srgbClr val="E4EEFF"/>
                 </a:solidFill>
               </a:rPr>
               <a:t>Facturación electrónica certificada</a:t>
@@ -9170,9 +9170,9 @@
             <a:avLst/>
           </a:prstGeom>
           <a:solidFill>
-            <a:srgbClr val="F2F7FF"/>
+            <a:srgbClr val="0E1E4A"/>
           </a:solidFill>
-          <a:ln w="6350">
+          <a:ln w="12700">
             <a:solidFill>
               <a:srgbClr val="2FDFE5"/>
             </a:solidFill>
@@ -9348,7 +9348,7 @@
             <a:r>
               <a:rPr sz="950" b="1">
                 <a:solidFill>
-                  <a:srgbClr val="081432"/>
+                  <a:srgbClr val="FFFFFF"/>
                 </a:solidFill>
               </a:rPr>
               <a:t>Control de calidad</a:t>
@@ -9437,7 +9437,7 @@
             <a:r>
               <a:rPr sz="750">
                 <a:solidFill>
-                  <a:srgbClr val="223A6A"/>
+                  <a:srgbClr val="E4EEFF"/>
                 </a:solidFill>
               </a:rPr>
               <a:t>Auditoría interna mensual de procesos</a:t>
@@ -9460,7 +9460,7 @@
             <a:r>
               <a:rPr sz="750">
                 <a:solidFill>
-                  <a:srgbClr val="223A6A"/>
+                  <a:srgbClr val="E4EEFF"/>
                 </a:solidFill>
               </a:rPr>
               <a:t>Mystery calling y escucha de grabaciones</a:t>
@@ -9483,7 +9483,7 @@
             <a:r>
               <a:rPr sz="750">
                 <a:solidFill>
-                  <a:srgbClr val="223A6A"/>
+                  <a:srgbClr val="E4EEFF"/>
                 </a:solidFill>
               </a:rPr>
               <a:t>Comité de mejora continua trimestral</a:t>
@@ -9506,7 +9506,7 @@
             <a:r>
               <a:rPr sz="750">
                 <a:solidFill>
-                  <a:srgbClr val="223A6A"/>
+                  <a:srgbClr val="E4EEFF"/>
                 </a:solidFill>
               </a:rPr>
               <a:t>Certificación ISO 9001 y cumplimiento RGPD</a:t>
@@ -9657,7 +9657,7 @@
           </a:prstGeom>
           <a:solidFill>
             <a:srgbClr val="060E24">
-              <a:alpha val="40000"/>
+              <a:alpha val="22000"/>
             </a:srgbClr>
           </a:solidFill>
           <a:ln>
@@ -9990,7 +9990,7 @@
             <a:avLst/>
           </a:prstGeom>
           <a:solidFill>
-            <a:srgbClr val="F2F7FF"/>
+            <a:srgbClr val="0E1E4A"/>
           </a:solidFill>
           <a:ln w="6350">
             <a:solidFill>
@@ -10168,7 +10168,7 @@
             <a:r>
               <a:rPr sz="900" b="1">
                 <a:solidFill>
-                  <a:srgbClr val="081432"/>
+                  <a:srgbClr val="FFFFFF"/>
                 </a:solidFill>
               </a:rPr>
               <a:t>Gestión de Cobro Amistoso</a:t>
@@ -10245,7 +10245,7 @@
             <a:r>
               <a:rPr sz="750">
                 <a:solidFill>
-                  <a:srgbClr val="223A6A"/>
+                  <a:srgbClr val="E4EEFF"/>
                 </a:solidFill>
               </a:rPr>
               <a:t>Negociación extrajudicial, planes de pago personalizados y seguimiento continuo hasta la resolución del expediente.</a:t>
@@ -10268,7 +10268,7 @@
             <a:avLst/>
           </a:prstGeom>
           <a:solidFill>
-            <a:srgbClr val="F2F7FF"/>
+            <a:srgbClr val="0E1E4A"/>
           </a:solidFill>
           <a:ln w="6350">
             <a:solidFill>
@@ -10446,7 +10446,7 @@
             <a:r>
               <a:rPr sz="900" b="1">
                 <a:solidFill>
-                  <a:srgbClr val="081432"/>
+                  <a:srgbClr val="FFFFFF"/>
                 </a:solidFill>
               </a:rPr>
               <a:t>Recobro Judicial</a:t>
@@ -10523,7 +10523,7 @@
             <a:r>
               <a:rPr sz="750">
                 <a:solidFill>
-                  <a:srgbClr val="223A6A"/>
+                  <a:srgbClr val="E4EEFF"/>
                 </a:solidFill>
               </a:rPr>
               <a:t>Interposición de demandas, coordinación con letrados y ejecución de sentencias a través de procuradores especializados.</a:t>
@@ -10546,7 +10546,7 @@
             <a:avLst/>
           </a:prstGeom>
           <a:solidFill>
-            <a:srgbClr val="F2F7FF"/>
+            <a:srgbClr val="0E1E4A"/>
           </a:solidFill>
           <a:ln w="6350">
             <a:solidFill>
@@ -10724,7 +10724,7 @@
             <a:r>
               <a:rPr sz="900" b="1">
                 <a:solidFill>
-                  <a:srgbClr val="081432"/>
+                  <a:srgbClr val="FFFFFF"/>
                 </a:solidFill>
               </a:rPr>
               <a:t>Scoring &amp; Segmentación</a:t>
@@ -10801,7 +10801,7 @@
             <a:r>
               <a:rPr sz="750">
                 <a:solidFill>
-                  <a:srgbClr val="223A6A"/>
+                  <a:srgbClr val="E4EEFF"/>
                 </a:solidFill>
               </a:rPr>
               <a:t>Análisis predictivo de cartera para priorizar expedientes con mayor probabilidad de cobro y optimizar recursos.</a:t>
@@ -10824,7 +10824,7 @@
             <a:avLst/>
           </a:prstGeom>
           <a:solidFill>
-            <a:srgbClr val="F2F7FF"/>
+            <a:srgbClr val="0E1E4A"/>
           </a:solidFill>
           <a:ln w="6350">
             <a:solidFill>
@@ -11002,7 +11002,7 @@
             <a:r>
               <a:rPr sz="900" b="1">
                 <a:solidFill>
-                  <a:srgbClr val="081432"/>
+                  <a:srgbClr val="FFFFFF"/>
                 </a:solidFill>
               </a:rPr>
               <a:t>Reporting &amp; Dashboard</a:t>
@@ -11079,7 +11079,7 @@
             <a:r>
               <a:rPr sz="750">
                 <a:solidFill>
-                  <a:srgbClr val="223A6A"/>
+                  <a:srgbClr val="E4EEFF"/>
                 </a:solidFill>
               </a:rPr>
               <a:t>Panel de control en tiempo real con KPIs, tasa de recuperación, aging de cartera y exportación de informes ejecutivos.</a:t>
@@ -11271,7 +11271,7 @@
           </a:prstGeom>
           <a:solidFill>
             <a:srgbClr val="060E24">
-              <a:alpha val="30000"/>
+              <a:alpha val="22000"/>
             </a:srgbClr>
           </a:solidFill>
           <a:ln>
@@ -11641,7 +11641,7 @@
             <a:avLst/>
           </a:prstGeom>
           <a:solidFill>
-            <a:srgbClr val="F2F7FF"/>
+            <a:srgbClr val="0E1E4A"/>
           </a:solidFill>
           <a:ln w="6350">
             <a:solidFill>
@@ -11740,7 +11740,7 @@
             <a:r>
               <a:rPr sz="950" b="1">
                 <a:solidFill>
-                  <a:srgbClr val="081432"/>
+                  <a:srgbClr val="FFFFFF"/>
                 </a:solidFill>
               </a:rPr>
               <a:t>MADRID</a:t>
@@ -11821,7 +11821,7 @@
             <a:r>
               <a:rPr sz="750">
                 <a:solidFill>
-                  <a:srgbClr val="223A6A"/>
+                  <a:srgbClr val="E4EEFF"/>
                 </a:solidFill>
               </a:rPr>
               <a:t>Gran Vía 28, 4ª planta</a:t>
@@ -11874,7 +11874,7 @@
             <a:avLst/>
           </a:prstGeom>
           <a:solidFill>
-            <a:srgbClr val="F2F7FF"/>
+            <a:srgbClr val="0E1E4A"/>
           </a:solidFill>
           <a:ln w="6350">
             <a:solidFill>
@@ -11973,7 +11973,7 @@
             <a:r>
               <a:rPr sz="950" b="1">
                 <a:solidFill>
-                  <a:srgbClr val="081432"/>
+                  <a:srgbClr val="FFFFFF"/>
                 </a:solidFill>
               </a:rPr>
               <a:t>BARCELONA</a:t>
@@ -12054,7 +12054,7 @@
             <a:r>
               <a:rPr sz="750">
                 <a:solidFill>
-                  <a:srgbClr val="223A6A"/>
+                  <a:srgbClr val="E4EEFF"/>
                 </a:solidFill>
               </a:rPr>
               <a:t>Diagonal 211, 3ª planta</a:t>
@@ -12107,7 +12107,7 @@
             <a:avLst/>
           </a:prstGeom>
           <a:solidFill>
-            <a:srgbClr val="F2F7FF"/>
+            <a:srgbClr val="0E1E4A"/>
           </a:solidFill>
           <a:ln w="6350">
             <a:solidFill>
@@ -12206,7 +12206,7 @@
             <a:r>
               <a:rPr sz="950" b="1">
                 <a:solidFill>
-                  <a:srgbClr val="081432"/>
+                  <a:srgbClr val="FFFFFF"/>
                 </a:solidFill>
               </a:rPr>
               <a:t>MÁLAGA</a:t>
@@ -12287,7 +12287,7 @@
             <a:r>
               <a:rPr sz="750">
                 <a:solidFill>
-                  <a:srgbClr val="223A6A"/>
+                  <a:srgbClr val="E4EEFF"/>
                 </a:solidFill>
               </a:rPr>
               <a:t>Larios 12, 2ª planta</a:t>

--- a/sendacredit_propuesta.pptx
+++ b/sendacredit_propuesta.pptx
@@ -3246,8 +3246,8 @@
         </p:blipFill>
         <p:spPr>
           <a:xfrm>
-            <a:off x="658368" y="365760"/>
-            <a:ext cx="1024128" cy="1024128"/>
+            <a:off x="658368" y="347472"/>
+            <a:ext cx="1051560" cy="609905"/>
           </a:xfrm>
           <a:prstGeom prst="rect">
             <a:avLst/>
@@ -3505,7 +3505,7 @@
           </a:prstGeom>
           <a:solidFill>
             <a:srgbClr val="060E24">
-              <a:alpha val="22000"/>
+              <a:alpha val="44000"/>
             </a:srgbClr>
           </a:solidFill>
           <a:ln>
@@ -3543,13 +3543,15 @@
         <p:spPr>
           <a:xfrm>
             <a:off x="0" y="0"/>
-            <a:ext cx="12191695" cy="1664208"/>
+            <a:ext cx="12191695" cy="1645920"/>
           </a:xfrm>
           <a:prstGeom prst="rect">
             <a:avLst/>
           </a:prstGeom>
           <a:solidFill>
-            <a:srgbClr val="0A1638"/>
+            <a:srgbClr val="060E24">
+              <a:alpha val="20000"/>
+            </a:srgbClr>
           </a:solidFill>
           <a:ln>
             <a:noFill/>
@@ -3815,8 +3817,8 @@
         </p:blipFill>
         <p:spPr>
           <a:xfrm>
-            <a:off x="10161727" y="6291072"/>
-            <a:ext cx="1828800" cy="420624"/>
+            <a:off x="10161727" y="6124523"/>
+            <a:ext cx="1828800" cy="587173"/>
           </a:xfrm>
           <a:prstGeom prst="rect">
             <a:avLst/>
@@ -5043,7 +5045,7 @@
           </a:prstGeom>
           <a:solidFill>
             <a:srgbClr val="060E24">
-              <a:alpha val="22000"/>
+              <a:alpha val="44000"/>
             </a:srgbClr>
           </a:solidFill>
           <a:ln>
@@ -5081,13 +5083,15 @@
         <p:spPr>
           <a:xfrm>
             <a:off x="0" y="0"/>
-            <a:ext cx="12191695" cy="1664208"/>
+            <a:ext cx="12191695" cy="1645920"/>
           </a:xfrm>
           <a:prstGeom prst="rect">
             <a:avLst/>
           </a:prstGeom>
           <a:solidFill>
-            <a:srgbClr val="0A1638"/>
+            <a:srgbClr val="060E24">
+              <a:alpha val="20000"/>
+            </a:srgbClr>
           </a:solidFill>
           <a:ln>
             <a:noFill/>
@@ -5353,8 +5357,8 @@
         </p:blipFill>
         <p:spPr>
           <a:xfrm>
-            <a:off x="10161727" y="6291072"/>
-            <a:ext cx="1828800" cy="420624"/>
+            <a:off x="10161727" y="6124523"/>
+            <a:ext cx="1828800" cy="587173"/>
           </a:xfrm>
           <a:prstGeom prst="rect">
             <a:avLst/>
@@ -6581,7 +6585,7 @@
           </a:prstGeom>
           <a:solidFill>
             <a:srgbClr val="060E24">
-              <a:alpha val="22000"/>
+              <a:alpha val="44000"/>
             </a:srgbClr>
           </a:solidFill>
           <a:ln>
@@ -6619,13 +6623,15 @@
         <p:spPr>
           <a:xfrm>
             <a:off x="0" y="0"/>
-            <a:ext cx="12191695" cy="1664208"/>
+            <a:ext cx="12191695" cy="1645920"/>
           </a:xfrm>
           <a:prstGeom prst="rect">
             <a:avLst/>
           </a:prstGeom>
           <a:solidFill>
-            <a:srgbClr val="0A1638"/>
+            <a:srgbClr val="060E24">
+              <a:alpha val="20000"/>
+            </a:srgbClr>
           </a:solidFill>
           <a:ln>
             <a:noFill/>
@@ -6891,8 +6897,8 @@
         </p:blipFill>
         <p:spPr>
           <a:xfrm>
-            <a:off x="10161727" y="6291072"/>
-            <a:ext cx="1828800" cy="420624"/>
+            <a:off x="10161727" y="6124523"/>
+            <a:ext cx="1828800" cy="587173"/>
           </a:xfrm>
           <a:prstGeom prst="rect">
             <a:avLst/>
@@ -8119,7 +8125,7 @@
           </a:prstGeom>
           <a:solidFill>
             <a:srgbClr val="060E24">
-              <a:alpha val="22000"/>
+              <a:alpha val="44000"/>
             </a:srgbClr>
           </a:solidFill>
           <a:ln>
@@ -8157,13 +8163,15 @@
         <p:spPr>
           <a:xfrm>
             <a:off x="0" y="0"/>
-            <a:ext cx="12191695" cy="1664208"/>
+            <a:ext cx="12191695" cy="1645920"/>
           </a:xfrm>
           <a:prstGeom prst="rect">
             <a:avLst/>
           </a:prstGeom>
           <a:solidFill>
-            <a:srgbClr val="0A1638"/>
+            <a:srgbClr val="060E24">
+              <a:alpha val="20000"/>
+            </a:srgbClr>
           </a:solidFill>
           <a:ln>
             <a:noFill/>
@@ -8429,8 +8437,8 @@
         </p:blipFill>
         <p:spPr>
           <a:xfrm>
-            <a:off x="10161727" y="6291072"/>
-            <a:ext cx="1828800" cy="420624"/>
+            <a:off x="10161727" y="6124523"/>
+            <a:ext cx="1828800" cy="587173"/>
           </a:xfrm>
           <a:prstGeom prst="rect">
             <a:avLst/>
@@ -9657,7 +9665,7 @@
           </a:prstGeom>
           <a:solidFill>
             <a:srgbClr val="060E24">
-              <a:alpha val="22000"/>
+              <a:alpha val="44000"/>
             </a:srgbClr>
           </a:solidFill>
           <a:ln>
@@ -9695,13 +9703,15 @@
         <p:spPr>
           <a:xfrm>
             <a:off x="0" y="0"/>
-            <a:ext cx="12191695" cy="1664208"/>
+            <a:ext cx="12191695" cy="1645920"/>
           </a:xfrm>
           <a:prstGeom prst="rect">
             <a:avLst/>
           </a:prstGeom>
           <a:solidFill>
-            <a:srgbClr val="0A1638"/>
+            <a:srgbClr val="060E24">
+              <a:alpha val="20000"/>
+            </a:srgbClr>
           </a:solidFill>
           <a:ln>
             <a:noFill/>
@@ -9967,8 +9977,8 @@
         </p:blipFill>
         <p:spPr>
           <a:xfrm>
-            <a:off x="10161727" y="6291072"/>
-            <a:ext cx="1828800" cy="420624"/>
+            <a:off x="10161727" y="6124523"/>
+            <a:ext cx="1828800" cy="587173"/>
           </a:xfrm>
           <a:prstGeom prst="rect">
             <a:avLst/>
@@ -11446,7 +11456,7 @@
         <p:spPr>
           <a:xfrm>
             <a:off x="502920" y="310896"/>
-            <a:ext cx="960120" cy="960120"/>
+            <a:ext cx="1005840" cy="583387"/>
           </a:xfrm>
           <a:prstGeom prst="rect">
             <a:avLst/>
@@ -12375,8 +12385,8 @@
         </p:blipFill>
         <p:spPr>
           <a:xfrm>
-            <a:off x="10161727" y="6291072"/>
-            <a:ext cx="1828800" cy="420624"/>
+            <a:off x="10161727" y="6124523"/>
+            <a:ext cx="1828800" cy="587173"/>
           </a:xfrm>
           <a:prstGeom prst="rect">
             <a:avLst/>

--- a/sendacredit_propuesta.pptx
+++ b/sendacredit_propuesta.pptx
@@ -3467,7 +3467,7 @@
       <p:grpSpPr/>
       <p:pic>
         <p:nvPicPr>
-          <p:cNvPr id="2" name="Picture 1" descr="building.jpg"/>
+          <p:cNvPr id="2" name="Picture 1" descr="content_bg.png"/>
           <p:cNvPicPr>
             <a:picLocks noChangeAspect="1"/>
           </p:cNvPicPr>
@@ -3498,96 +3498,6 @@
         <p:spPr>
           <a:xfrm>
             <a:off x="0" y="0"/>
-            <a:ext cx="12191695" cy="6858000"/>
-          </a:xfrm>
-          <a:prstGeom prst="rect">
-            <a:avLst/>
-          </a:prstGeom>
-          <a:solidFill>
-            <a:srgbClr val="060E24">
-              <a:alpha val="44000"/>
-            </a:srgbClr>
-          </a:solidFill>
-          <a:ln>
-            <a:noFill/>
-          </a:ln>
-        </p:spPr>
-        <p:style>
-          <a:lnRef idx="1">
-            <a:schemeClr val="accent1"/>
-          </a:lnRef>
-          <a:fillRef idx="3">
-            <a:schemeClr val="accent1"/>
-          </a:fillRef>
-          <a:effectRef idx="2">
-            <a:schemeClr val="accent1"/>
-          </a:effectRef>
-          <a:fontRef idx="minor">
-            <a:schemeClr val="lt1"/>
-          </a:fontRef>
-        </p:style>
-        <p:txBody>
-          <a:bodyPr rtlCol="0" anchor="ctr"/>
-          <a:lstStyle/>
-          <a:p>
-            <a:pPr algn="ctr"/>
-          </a:p>
-        </p:txBody>
-      </p:sp>
-      <p:sp>
-        <p:nvSpPr>
-          <p:cNvPr id="4" name="Rectangle 3"/>
-          <p:cNvSpPr/>
-          <p:nvPr/>
-        </p:nvSpPr>
-        <p:spPr>
-          <a:xfrm>
-            <a:off x="0" y="0"/>
-            <a:ext cx="12191695" cy="1645920"/>
-          </a:xfrm>
-          <a:prstGeom prst="rect">
-            <a:avLst/>
-          </a:prstGeom>
-          <a:solidFill>
-            <a:srgbClr val="060E24">
-              <a:alpha val="20000"/>
-            </a:srgbClr>
-          </a:solidFill>
-          <a:ln>
-            <a:noFill/>
-          </a:ln>
-        </p:spPr>
-        <p:style>
-          <a:lnRef idx="1">
-            <a:schemeClr val="accent1"/>
-          </a:lnRef>
-          <a:fillRef idx="3">
-            <a:schemeClr val="accent1"/>
-          </a:fillRef>
-          <a:effectRef idx="2">
-            <a:schemeClr val="accent1"/>
-          </a:effectRef>
-          <a:fontRef idx="minor">
-            <a:schemeClr val="lt1"/>
-          </a:fontRef>
-        </p:style>
-        <p:txBody>
-          <a:bodyPr rtlCol="0" anchor="ctr"/>
-          <a:lstStyle/>
-          <a:p>
-            <a:pPr algn="ctr"/>
-          </a:p>
-        </p:txBody>
-      </p:sp>
-      <p:sp>
-        <p:nvSpPr>
-          <p:cNvPr id="5" name="Rectangle 4"/>
-          <p:cNvSpPr/>
-          <p:nvPr/>
-        </p:nvSpPr>
-        <p:spPr>
-          <a:xfrm>
-            <a:off x="0" y="0"/>
             <a:ext cx="12191695" cy="44450"/>
           </a:xfrm>
           <a:prstGeom prst="rect">
@@ -3624,7 +3534,7 @@
       </p:sp>
       <p:sp>
         <p:nvSpPr>
-          <p:cNvPr id="6" name="Rectangle 5"/>
+          <p:cNvPr id="4" name="Rectangle 3"/>
           <p:cNvSpPr/>
           <p:nvPr/>
         </p:nvSpPr>
@@ -3667,7 +3577,7 @@
       </p:sp>
       <p:sp>
         <p:nvSpPr>
-          <p:cNvPr id="7" name="Rectangle 6"/>
+          <p:cNvPr id="5" name="Rectangle 4"/>
           <p:cNvSpPr/>
           <p:nvPr/>
         </p:nvSpPr>
@@ -3718,7 +3628,7 @@
       </p:sp>
       <p:sp>
         <p:nvSpPr>
-          <p:cNvPr id="8" name="TextBox 7"/>
+          <p:cNvPr id="6" name="TextBox 5"/>
           <p:cNvSpPr txBox="1"/>
           <p:nvPr/>
         </p:nvSpPr>
@@ -3760,7 +3670,7 @@
       </p:sp>
       <p:sp>
         <p:nvSpPr>
-          <p:cNvPr id="9" name="Rectangle 8"/>
+          <p:cNvPr id="7" name="Rectangle 6"/>
           <p:cNvSpPr/>
           <p:nvPr/>
         </p:nvSpPr>
@@ -3803,7 +3713,7 @@
       </p:sp>
       <p:pic>
         <p:nvPicPr>
-          <p:cNvPr id="10" name="Picture 9" descr="logo_horiz.png"/>
+          <p:cNvPr id="8" name="Picture 7" descr="logo_horiz.png"/>
           <p:cNvPicPr>
             <a:picLocks noChangeAspect="1"/>
           </p:cNvPicPr>
@@ -3827,7 +3737,7 @@
       </p:pic>
       <p:sp>
         <p:nvSpPr>
-          <p:cNvPr id="11" name="Rectangle 10"/>
+          <p:cNvPr id="9" name="Rectangle 8"/>
           <p:cNvSpPr/>
           <p:nvPr/>
         </p:nvSpPr>
@@ -3840,7 +3750,7 @@
             <a:avLst/>
           </a:prstGeom>
           <a:solidFill>
-            <a:srgbClr val="0E1E4A"/>
+            <a:srgbClr val="081438"/>
           </a:solidFill>
           <a:ln w="12700">
             <a:solidFill>
@@ -3872,7 +3782,7 @@
       </p:sp>
       <p:sp>
         <p:nvSpPr>
-          <p:cNvPr id="12" name="Rectangle 11"/>
+          <p:cNvPr id="10" name="Rectangle 9"/>
           <p:cNvSpPr/>
           <p:nvPr/>
         </p:nvSpPr>
@@ -3915,7 +3825,7 @@
       </p:sp>
       <p:sp>
         <p:nvSpPr>
-          <p:cNvPr id="13" name="Oval 12"/>
+          <p:cNvPr id="11" name="Oval 10"/>
           <p:cNvSpPr/>
           <p:nvPr/>
         </p:nvSpPr>
@@ -3960,7 +3870,7 @@
       </p:sp>
       <p:sp>
         <p:nvSpPr>
-          <p:cNvPr id="14" name="TextBox 13"/>
+          <p:cNvPr id="12" name="TextBox 11"/>
           <p:cNvSpPr txBox="1"/>
           <p:nvPr/>
         </p:nvSpPr>
@@ -3994,7 +3904,7 @@
       </p:sp>
       <p:sp>
         <p:nvSpPr>
-          <p:cNvPr id="15" name="TextBox 14"/>
+          <p:cNvPr id="13" name="TextBox 12"/>
           <p:cNvSpPr txBox="1"/>
           <p:nvPr/>
         </p:nvSpPr>
@@ -4028,7 +3938,7 @@
       </p:sp>
       <p:sp>
         <p:nvSpPr>
-          <p:cNvPr id="16" name="Rectangle 15"/>
+          <p:cNvPr id="14" name="Rectangle 13"/>
           <p:cNvSpPr/>
           <p:nvPr/>
         </p:nvSpPr>
@@ -4071,7 +3981,7 @@
       </p:sp>
       <p:sp>
         <p:nvSpPr>
-          <p:cNvPr id="17" name="TextBox 16"/>
+          <p:cNvPr id="15" name="TextBox 14"/>
           <p:cNvSpPr txBox="1"/>
           <p:nvPr/>
         </p:nvSpPr>
@@ -4186,7 +4096,7 @@
       </p:sp>
       <p:sp>
         <p:nvSpPr>
-          <p:cNvPr id="18" name="Rectangle 17"/>
+          <p:cNvPr id="16" name="Rectangle 15"/>
           <p:cNvSpPr/>
           <p:nvPr/>
         </p:nvSpPr>
@@ -4199,7 +4109,7 @@
             <a:avLst/>
           </a:prstGeom>
           <a:solidFill>
-            <a:srgbClr val="0E1E4A"/>
+            <a:srgbClr val="081438"/>
           </a:solidFill>
           <a:ln w="12700">
             <a:solidFill>
@@ -4231,7 +4141,7 @@
       </p:sp>
       <p:sp>
         <p:nvSpPr>
-          <p:cNvPr id="19" name="Rectangle 18"/>
+          <p:cNvPr id="17" name="Rectangle 16"/>
           <p:cNvSpPr/>
           <p:nvPr/>
         </p:nvSpPr>
@@ -4274,7 +4184,7 @@
       </p:sp>
       <p:sp>
         <p:nvSpPr>
-          <p:cNvPr id="20" name="Oval 19"/>
+          <p:cNvPr id="18" name="Oval 17"/>
           <p:cNvSpPr/>
           <p:nvPr/>
         </p:nvSpPr>
@@ -4319,7 +4229,7 @@
       </p:sp>
       <p:sp>
         <p:nvSpPr>
-          <p:cNvPr id="21" name="TextBox 20"/>
+          <p:cNvPr id="19" name="TextBox 18"/>
           <p:cNvSpPr txBox="1"/>
           <p:nvPr/>
         </p:nvSpPr>
@@ -4353,7 +4263,7 @@
       </p:sp>
       <p:sp>
         <p:nvSpPr>
-          <p:cNvPr id="22" name="TextBox 21"/>
+          <p:cNvPr id="20" name="TextBox 19"/>
           <p:cNvSpPr txBox="1"/>
           <p:nvPr/>
         </p:nvSpPr>
@@ -4387,7 +4297,7 @@
       </p:sp>
       <p:sp>
         <p:nvSpPr>
-          <p:cNvPr id="23" name="Rectangle 22"/>
+          <p:cNvPr id="21" name="Rectangle 20"/>
           <p:cNvSpPr/>
           <p:nvPr/>
         </p:nvSpPr>
@@ -4430,7 +4340,7 @@
       </p:sp>
       <p:sp>
         <p:nvSpPr>
-          <p:cNvPr id="24" name="TextBox 23"/>
+          <p:cNvPr id="22" name="TextBox 21"/>
           <p:cNvSpPr txBox="1"/>
           <p:nvPr/>
         </p:nvSpPr>
@@ -4545,7 +4455,7 @@
       </p:sp>
       <p:sp>
         <p:nvSpPr>
-          <p:cNvPr id="25" name="Rectangle 24"/>
+          <p:cNvPr id="23" name="Rectangle 22"/>
           <p:cNvSpPr/>
           <p:nvPr/>
         </p:nvSpPr>
@@ -4558,7 +4468,7 @@
             <a:avLst/>
           </a:prstGeom>
           <a:solidFill>
-            <a:srgbClr val="0E1E4A"/>
+            <a:srgbClr val="081438"/>
           </a:solidFill>
           <a:ln w="12700">
             <a:solidFill>
@@ -4590,7 +4500,7 @@
       </p:sp>
       <p:sp>
         <p:nvSpPr>
-          <p:cNvPr id="26" name="Rectangle 25"/>
+          <p:cNvPr id="24" name="Rectangle 23"/>
           <p:cNvSpPr/>
           <p:nvPr/>
         </p:nvSpPr>
@@ -4633,7 +4543,7 @@
       </p:sp>
       <p:sp>
         <p:nvSpPr>
-          <p:cNvPr id="27" name="Oval 26"/>
+          <p:cNvPr id="25" name="Oval 24"/>
           <p:cNvSpPr/>
           <p:nvPr/>
         </p:nvSpPr>
@@ -4678,7 +4588,7 @@
       </p:sp>
       <p:sp>
         <p:nvSpPr>
-          <p:cNvPr id="28" name="TextBox 27"/>
+          <p:cNvPr id="26" name="TextBox 25"/>
           <p:cNvSpPr txBox="1"/>
           <p:nvPr/>
         </p:nvSpPr>
@@ -4712,7 +4622,7 @@
       </p:sp>
       <p:sp>
         <p:nvSpPr>
-          <p:cNvPr id="29" name="TextBox 28"/>
+          <p:cNvPr id="27" name="TextBox 26"/>
           <p:cNvSpPr txBox="1"/>
           <p:nvPr/>
         </p:nvSpPr>
@@ -4746,7 +4656,7 @@
       </p:sp>
       <p:sp>
         <p:nvSpPr>
-          <p:cNvPr id="30" name="Rectangle 29"/>
+          <p:cNvPr id="28" name="Rectangle 27"/>
           <p:cNvSpPr/>
           <p:nvPr/>
         </p:nvSpPr>
@@ -4789,7 +4699,7 @@
       </p:sp>
       <p:sp>
         <p:nvSpPr>
-          <p:cNvPr id="31" name="TextBox 30"/>
+          <p:cNvPr id="29" name="TextBox 28"/>
           <p:cNvSpPr txBox="1"/>
           <p:nvPr/>
         </p:nvSpPr>
@@ -4931,7 +4841,7 @@
                                 <p:cBhvr>
                                   <p:cTn id="6" dur="450" fill="hold"/>
                                   <p:tgtEl>
-                                    <p:spTgt spid="11"/>
+                                    <p:spTgt spid="9"/>
                                   </p:tgtEl>
                                 </p:cBhvr>
                               </p:animEffect>
@@ -4948,7 +4858,7 @@
                                 <p:cBhvr>
                                   <p:cTn id="8" dur="450" fill="hold"/>
                                   <p:tgtEl>
-                                    <p:spTgt spid="18"/>
+                                    <p:spTgt spid="16"/>
                                   </p:tgtEl>
                                 </p:cBhvr>
                               </p:animEffect>
@@ -4965,7 +4875,7 @@
                                 <p:cBhvr>
                                   <p:cTn id="10" dur="450" fill="hold"/>
                                   <p:tgtEl>
-                                    <p:spTgt spid="25"/>
+                                    <p:spTgt spid="23"/>
                                   </p:tgtEl>
                                 </p:cBhvr>
                               </p:animEffect>
@@ -5007,7 +4917,7 @@
       <p:grpSpPr/>
       <p:pic>
         <p:nvPicPr>
-          <p:cNvPr id="2" name="Picture 1" descr="building.jpg"/>
+          <p:cNvPr id="2" name="Picture 1" descr="content_bg.png"/>
           <p:cNvPicPr>
             <a:picLocks noChangeAspect="1"/>
           </p:cNvPicPr>
@@ -5038,96 +4948,6 @@
         <p:spPr>
           <a:xfrm>
             <a:off x="0" y="0"/>
-            <a:ext cx="12191695" cy="6858000"/>
-          </a:xfrm>
-          <a:prstGeom prst="rect">
-            <a:avLst/>
-          </a:prstGeom>
-          <a:solidFill>
-            <a:srgbClr val="060E24">
-              <a:alpha val="44000"/>
-            </a:srgbClr>
-          </a:solidFill>
-          <a:ln>
-            <a:noFill/>
-          </a:ln>
-        </p:spPr>
-        <p:style>
-          <a:lnRef idx="1">
-            <a:schemeClr val="accent1"/>
-          </a:lnRef>
-          <a:fillRef idx="3">
-            <a:schemeClr val="accent1"/>
-          </a:fillRef>
-          <a:effectRef idx="2">
-            <a:schemeClr val="accent1"/>
-          </a:effectRef>
-          <a:fontRef idx="minor">
-            <a:schemeClr val="lt1"/>
-          </a:fontRef>
-        </p:style>
-        <p:txBody>
-          <a:bodyPr rtlCol="0" anchor="ctr"/>
-          <a:lstStyle/>
-          <a:p>
-            <a:pPr algn="ctr"/>
-          </a:p>
-        </p:txBody>
-      </p:sp>
-      <p:sp>
-        <p:nvSpPr>
-          <p:cNvPr id="4" name="Rectangle 3"/>
-          <p:cNvSpPr/>
-          <p:nvPr/>
-        </p:nvSpPr>
-        <p:spPr>
-          <a:xfrm>
-            <a:off x="0" y="0"/>
-            <a:ext cx="12191695" cy="1645920"/>
-          </a:xfrm>
-          <a:prstGeom prst="rect">
-            <a:avLst/>
-          </a:prstGeom>
-          <a:solidFill>
-            <a:srgbClr val="060E24">
-              <a:alpha val="20000"/>
-            </a:srgbClr>
-          </a:solidFill>
-          <a:ln>
-            <a:noFill/>
-          </a:ln>
-        </p:spPr>
-        <p:style>
-          <a:lnRef idx="1">
-            <a:schemeClr val="accent1"/>
-          </a:lnRef>
-          <a:fillRef idx="3">
-            <a:schemeClr val="accent1"/>
-          </a:fillRef>
-          <a:effectRef idx="2">
-            <a:schemeClr val="accent1"/>
-          </a:effectRef>
-          <a:fontRef idx="minor">
-            <a:schemeClr val="lt1"/>
-          </a:fontRef>
-        </p:style>
-        <p:txBody>
-          <a:bodyPr rtlCol="0" anchor="ctr"/>
-          <a:lstStyle/>
-          <a:p>
-            <a:pPr algn="ctr"/>
-          </a:p>
-        </p:txBody>
-      </p:sp>
-      <p:sp>
-        <p:nvSpPr>
-          <p:cNvPr id="5" name="Rectangle 4"/>
-          <p:cNvSpPr/>
-          <p:nvPr/>
-        </p:nvSpPr>
-        <p:spPr>
-          <a:xfrm>
-            <a:off x="0" y="0"/>
             <a:ext cx="12191695" cy="44450"/>
           </a:xfrm>
           <a:prstGeom prst="rect">
@@ -5164,7 +4984,7 @@
       </p:sp>
       <p:sp>
         <p:nvSpPr>
-          <p:cNvPr id="6" name="Rectangle 5"/>
+          <p:cNvPr id="4" name="Rectangle 3"/>
           <p:cNvSpPr/>
           <p:nvPr/>
         </p:nvSpPr>
@@ -5207,7 +5027,7 @@
       </p:sp>
       <p:sp>
         <p:nvSpPr>
-          <p:cNvPr id="7" name="Rectangle 6"/>
+          <p:cNvPr id="5" name="Rectangle 4"/>
           <p:cNvSpPr/>
           <p:nvPr/>
         </p:nvSpPr>
@@ -5258,7 +5078,7 @@
       </p:sp>
       <p:sp>
         <p:nvSpPr>
-          <p:cNvPr id="8" name="TextBox 7"/>
+          <p:cNvPr id="6" name="TextBox 5"/>
           <p:cNvSpPr txBox="1"/>
           <p:nvPr/>
         </p:nvSpPr>
@@ -5300,7 +5120,7 @@
       </p:sp>
       <p:sp>
         <p:nvSpPr>
-          <p:cNvPr id="9" name="Rectangle 8"/>
+          <p:cNvPr id="7" name="Rectangle 6"/>
           <p:cNvSpPr/>
           <p:nvPr/>
         </p:nvSpPr>
@@ -5343,7 +5163,7 @@
       </p:sp>
       <p:pic>
         <p:nvPicPr>
-          <p:cNvPr id="10" name="Picture 9" descr="logo_horiz.png"/>
+          <p:cNvPr id="8" name="Picture 7" descr="logo_horiz.png"/>
           <p:cNvPicPr>
             <a:picLocks noChangeAspect="1"/>
           </p:cNvPicPr>
@@ -5367,7 +5187,7 @@
       </p:pic>
       <p:sp>
         <p:nvSpPr>
-          <p:cNvPr id="11" name="Rectangle 10"/>
+          <p:cNvPr id="9" name="Rectangle 8"/>
           <p:cNvSpPr/>
           <p:nvPr/>
         </p:nvSpPr>
@@ -5380,7 +5200,7 @@
             <a:avLst/>
           </a:prstGeom>
           <a:solidFill>
-            <a:srgbClr val="0E1E4A"/>
+            <a:srgbClr val="081438"/>
           </a:solidFill>
           <a:ln w="12700">
             <a:solidFill>
@@ -5412,7 +5232,7 @@
       </p:sp>
       <p:sp>
         <p:nvSpPr>
-          <p:cNvPr id="12" name="Rectangle 11"/>
+          <p:cNvPr id="10" name="Rectangle 9"/>
           <p:cNvSpPr/>
           <p:nvPr/>
         </p:nvSpPr>
@@ -5455,7 +5275,7 @@
       </p:sp>
       <p:sp>
         <p:nvSpPr>
-          <p:cNvPr id="13" name="Oval 12"/>
+          <p:cNvPr id="11" name="Oval 10"/>
           <p:cNvSpPr/>
           <p:nvPr/>
         </p:nvSpPr>
@@ -5500,7 +5320,7 @@
       </p:sp>
       <p:sp>
         <p:nvSpPr>
-          <p:cNvPr id="14" name="TextBox 13"/>
+          <p:cNvPr id="12" name="TextBox 11"/>
           <p:cNvSpPr txBox="1"/>
           <p:nvPr/>
         </p:nvSpPr>
@@ -5534,7 +5354,7 @@
       </p:sp>
       <p:sp>
         <p:nvSpPr>
-          <p:cNvPr id="15" name="TextBox 14"/>
+          <p:cNvPr id="13" name="TextBox 12"/>
           <p:cNvSpPr txBox="1"/>
           <p:nvPr/>
         </p:nvSpPr>
@@ -5568,7 +5388,7 @@
       </p:sp>
       <p:sp>
         <p:nvSpPr>
-          <p:cNvPr id="16" name="Rectangle 15"/>
+          <p:cNvPr id="14" name="Rectangle 13"/>
           <p:cNvSpPr/>
           <p:nvPr/>
         </p:nvSpPr>
@@ -5611,7 +5431,7 @@
       </p:sp>
       <p:sp>
         <p:nvSpPr>
-          <p:cNvPr id="17" name="TextBox 16"/>
+          <p:cNvPr id="15" name="TextBox 14"/>
           <p:cNvSpPr txBox="1"/>
           <p:nvPr/>
         </p:nvSpPr>
@@ -5726,7 +5546,7 @@
       </p:sp>
       <p:sp>
         <p:nvSpPr>
-          <p:cNvPr id="18" name="Rectangle 17"/>
+          <p:cNvPr id="16" name="Rectangle 15"/>
           <p:cNvSpPr/>
           <p:nvPr/>
         </p:nvSpPr>
@@ -5739,7 +5559,7 @@
             <a:avLst/>
           </a:prstGeom>
           <a:solidFill>
-            <a:srgbClr val="0E1E4A"/>
+            <a:srgbClr val="081438"/>
           </a:solidFill>
           <a:ln w="12700">
             <a:solidFill>
@@ -5771,7 +5591,7 @@
       </p:sp>
       <p:sp>
         <p:nvSpPr>
-          <p:cNvPr id="19" name="Rectangle 18"/>
+          <p:cNvPr id="17" name="Rectangle 16"/>
           <p:cNvSpPr/>
           <p:nvPr/>
         </p:nvSpPr>
@@ -5814,7 +5634,7 @@
       </p:sp>
       <p:sp>
         <p:nvSpPr>
-          <p:cNvPr id="20" name="Oval 19"/>
+          <p:cNvPr id="18" name="Oval 17"/>
           <p:cNvSpPr/>
           <p:nvPr/>
         </p:nvSpPr>
@@ -5859,7 +5679,7 @@
       </p:sp>
       <p:sp>
         <p:nvSpPr>
-          <p:cNvPr id="21" name="TextBox 20"/>
+          <p:cNvPr id="19" name="TextBox 18"/>
           <p:cNvSpPr txBox="1"/>
           <p:nvPr/>
         </p:nvSpPr>
@@ -5893,7 +5713,7 @@
       </p:sp>
       <p:sp>
         <p:nvSpPr>
-          <p:cNvPr id="22" name="TextBox 21"/>
+          <p:cNvPr id="20" name="TextBox 19"/>
           <p:cNvSpPr txBox="1"/>
           <p:nvPr/>
         </p:nvSpPr>
@@ -5927,7 +5747,7 @@
       </p:sp>
       <p:sp>
         <p:nvSpPr>
-          <p:cNvPr id="23" name="Rectangle 22"/>
+          <p:cNvPr id="21" name="Rectangle 20"/>
           <p:cNvSpPr/>
           <p:nvPr/>
         </p:nvSpPr>
@@ -5970,7 +5790,7 @@
       </p:sp>
       <p:sp>
         <p:nvSpPr>
-          <p:cNvPr id="24" name="TextBox 23"/>
+          <p:cNvPr id="22" name="TextBox 21"/>
           <p:cNvSpPr txBox="1"/>
           <p:nvPr/>
         </p:nvSpPr>
@@ -6085,7 +5905,7 @@
       </p:sp>
       <p:sp>
         <p:nvSpPr>
-          <p:cNvPr id="25" name="Rectangle 24"/>
+          <p:cNvPr id="23" name="Rectangle 22"/>
           <p:cNvSpPr/>
           <p:nvPr/>
         </p:nvSpPr>
@@ -6098,7 +5918,7 @@
             <a:avLst/>
           </a:prstGeom>
           <a:solidFill>
-            <a:srgbClr val="0E1E4A"/>
+            <a:srgbClr val="081438"/>
           </a:solidFill>
           <a:ln w="12700">
             <a:solidFill>
@@ -6130,7 +5950,7 @@
       </p:sp>
       <p:sp>
         <p:nvSpPr>
-          <p:cNvPr id="26" name="Rectangle 25"/>
+          <p:cNvPr id="24" name="Rectangle 23"/>
           <p:cNvSpPr/>
           <p:nvPr/>
         </p:nvSpPr>
@@ -6173,7 +5993,7 @@
       </p:sp>
       <p:sp>
         <p:nvSpPr>
-          <p:cNvPr id="27" name="Oval 26"/>
+          <p:cNvPr id="25" name="Oval 24"/>
           <p:cNvSpPr/>
           <p:nvPr/>
         </p:nvSpPr>
@@ -6218,7 +6038,7 @@
       </p:sp>
       <p:sp>
         <p:nvSpPr>
-          <p:cNvPr id="28" name="TextBox 27"/>
+          <p:cNvPr id="26" name="TextBox 25"/>
           <p:cNvSpPr txBox="1"/>
           <p:nvPr/>
         </p:nvSpPr>
@@ -6252,7 +6072,7 @@
       </p:sp>
       <p:sp>
         <p:nvSpPr>
-          <p:cNvPr id="29" name="TextBox 28"/>
+          <p:cNvPr id="27" name="TextBox 26"/>
           <p:cNvSpPr txBox="1"/>
           <p:nvPr/>
         </p:nvSpPr>
@@ -6286,7 +6106,7 @@
       </p:sp>
       <p:sp>
         <p:nvSpPr>
-          <p:cNvPr id="30" name="Rectangle 29"/>
+          <p:cNvPr id="28" name="Rectangle 27"/>
           <p:cNvSpPr/>
           <p:nvPr/>
         </p:nvSpPr>
@@ -6329,7 +6149,7 @@
       </p:sp>
       <p:sp>
         <p:nvSpPr>
-          <p:cNvPr id="31" name="TextBox 30"/>
+          <p:cNvPr id="29" name="TextBox 28"/>
           <p:cNvSpPr txBox="1"/>
           <p:nvPr/>
         </p:nvSpPr>
@@ -6471,7 +6291,7 @@
                                 <p:cBhvr>
                                   <p:cTn id="6" dur="450" fill="hold"/>
                                   <p:tgtEl>
-                                    <p:spTgt spid="11"/>
+                                    <p:spTgt spid="9"/>
                                   </p:tgtEl>
                                 </p:cBhvr>
                               </p:animEffect>
@@ -6488,7 +6308,7 @@
                                 <p:cBhvr>
                                   <p:cTn id="8" dur="450" fill="hold"/>
                                   <p:tgtEl>
-                                    <p:spTgt spid="18"/>
+                                    <p:spTgt spid="16"/>
                                   </p:tgtEl>
                                 </p:cBhvr>
                               </p:animEffect>
@@ -6505,7 +6325,7 @@
                                 <p:cBhvr>
                                   <p:cTn id="10" dur="450" fill="hold"/>
                                   <p:tgtEl>
-                                    <p:spTgt spid="25"/>
+                                    <p:spTgt spid="23"/>
                                   </p:tgtEl>
                                 </p:cBhvr>
                               </p:animEffect>
@@ -6547,7 +6367,7 @@
       <p:grpSpPr/>
       <p:pic>
         <p:nvPicPr>
-          <p:cNvPr id="2" name="Picture 1" descr="building.jpg"/>
+          <p:cNvPr id="2" name="Picture 1" descr="content_bg.png"/>
           <p:cNvPicPr>
             <a:picLocks noChangeAspect="1"/>
           </p:cNvPicPr>
@@ -6578,96 +6398,6 @@
         <p:spPr>
           <a:xfrm>
             <a:off x="0" y="0"/>
-            <a:ext cx="12191695" cy="6858000"/>
-          </a:xfrm>
-          <a:prstGeom prst="rect">
-            <a:avLst/>
-          </a:prstGeom>
-          <a:solidFill>
-            <a:srgbClr val="060E24">
-              <a:alpha val="44000"/>
-            </a:srgbClr>
-          </a:solidFill>
-          <a:ln>
-            <a:noFill/>
-          </a:ln>
-        </p:spPr>
-        <p:style>
-          <a:lnRef idx="1">
-            <a:schemeClr val="accent1"/>
-          </a:lnRef>
-          <a:fillRef idx="3">
-            <a:schemeClr val="accent1"/>
-          </a:fillRef>
-          <a:effectRef idx="2">
-            <a:schemeClr val="accent1"/>
-          </a:effectRef>
-          <a:fontRef idx="minor">
-            <a:schemeClr val="lt1"/>
-          </a:fontRef>
-        </p:style>
-        <p:txBody>
-          <a:bodyPr rtlCol="0" anchor="ctr"/>
-          <a:lstStyle/>
-          <a:p>
-            <a:pPr algn="ctr"/>
-          </a:p>
-        </p:txBody>
-      </p:sp>
-      <p:sp>
-        <p:nvSpPr>
-          <p:cNvPr id="4" name="Rectangle 3"/>
-          <p:cNvSpPr/>
-          <p:nvPr/>
-        </p:nvSpPr>
-        <p:spPr>
-          <a:xfrm>
-            <a:off x="0" y="0"/>
-            <a:ext cx="12191695" cy="1645920"/>
-          </a:xfrm>
-          <a:prstGeom prst="rect">
-            <a:avLst/>
-          </a:prstGeom>
-          <a:solidFill>
-            <a:srgbClr val="060E24">
-              <a:alpha val="20000"/>
-            </a:srgbClr>
-          </a:solidFill>
-          <a:ln>
-            <a:noFill/>
-          </a:ln>
-        </p:spPr>
-        <p:style>
-          <a:lnRef idx="1">
-            <a:schemeClr val="accent1"/>
-          </a:lnRef>
-          <a:fillRef idx="3">
-            <a:schemeClr val="accent1"/>
-          </a:fillRef>
-          <a:effectRef idx="2">
-            <a:schemeClr val="accent1"/>
-          </a:effectRef>
-          <a:fontRef idx="minor">
-            <a:schemeClr val="lt1"/>
-          </a:fontRef>
-        </p:style>
-        <p:txBody>
-          <a:bodyPr rtlCol="0" anchor="ctr"/>
-          <a:lstStyle/>
-          <a:p>
-            <a:pPr algn="ctr"/>
-          </a:p>
-        </p:txBody>
-      </p:sp>
-      <p:sp>
-        <p:nvSpPr>
-          <p:cNvPr id="5" name="Rectangle 4"/>
-          <p:cNvSpPr/>
-          <p:nvPr/>
-        </p:nvSpPr>
-        <p:spPr>
-          <a:xfrm>
-            <a:off x="0" y="0"/>
             <a:ext cx="12191695" cy="44450"/>
           </a:xfrm>
           <a:prstGeom prst="rect">
@@ -6704,7 +6434,7 @@
       </p:sp>
       <p:sp>
         <p:nvSpPr>
-          <p:cNvPr id="6" name="Rectangle 5"/>
+          <p:cNvPr id="4" name="Rectangle 3"/>
           <p:cNvSpPr/>
           <p:nvPr/>
         </p:nvSpPr>
@@ -6747,7 +6477,7 @@
       </p:sp>
       <p:sp>
         <p:nvSpPr>
-          <p:cNvPr id="7" name="Rectangle 6"/>
+          <p:cNvPr id="5" name="Rectangle 4"/>
           <p:cNvSpPr/>
           <p:nvPr/>
         </p:nvSpPr>
@@ -6798,7 +6528,7 @@
       </p:sp>
       <p:sp>
         <p:nvSpPr>
-          <p:cNvPr id="8" name="TextBox 7"/>
+          <p:cNvPr id="6" name="TextBox 5"/>
           <p:cNvSpPr txBox="1"/>
           <p:nvPr/>
         </p:nvSpPr>
@@ -6840,7 +6570,7 @@
       </p:sp>
       <p:sp>
         <p:nvSpPr>
-          <p:cNvPr id="9" name="Rectangle 8"/>
+          <p:cNvPr id="7" name="Rectangle 6"/>
           <p:cNvSpPr/>
           <p:nvPr/>
         </p:nvSpPr>
@@ -6883,7 +6613,7 @@
       </p:sp>
       <p:pic>
         <p:nvPicPr>
-          <p:cNvPr id="10" name="Picture 9" descr="logo_horiz.png"/>
+          <p:cNvPr id="8" name="Picture 7" descr="logo_horiz.png"/>
           <p:cNvPicPr>
             <a:picLocks noChangeAspect="1"/>
           </p:cNvPicPr>
@@ -6907,7 +6637,7 @@
       </p:pic>
       <p:sp>
         <p:nvSpPr>
-          <p:cNvPr id="11" name="Rectangle 10"/>
+          <p:cNvPr id="9" name="Rectangle 8"/>
           <p:cNvSpPr/>
           <p:nvPr/>
         </p:nvSpPr>
@@ -6920,7 +6650,7 @@
             <a:avLst/>
           </a:prstGeom>
           <a:solidFill>
-            <a:srgbClr val="0E1E4A"/>
+            <a:srgbClr val="081438"/>
           </a:solidFill>
           <a:ln w="12700">
             <a:solidFill>
@@ -6952,7 +6682,7 @@
       </p:sp>
       <p:sp>
         <p:nvSpPr>
-          <p:cNvPr id="12" name="Rectangle 11"/>
+          <p:cNvPr id="10" name="Rectangle 9"/>
           <p:cNvSpPr/>
           <p:nvPr/>
         </p:nvSpPr>
@@ -6995,7 +6725,7 @@
       </p:sp>
       <p:sp>
         <p:nvSpPr>
-          <p:cNvPr id="13" name="Oval 12"/>
+          <p:cNvPr id="11" name="Oval 10"/>
           <p:cNvSpPr/>
           <p:nvPr/>
         </p:nvSpPr>
@@ -7040,7 +6770,7 @@
       </p:sp>
       <p:sp>
         <p:nvSpPr>
-          <p:cNvPr id="14" name="TextBox 13"/>
+          <p:cNvPr id="12" name="TextBox 11"/>
           <p:cNvSpPr txBox="1"/>
           <p:nvPr/>
         </p:nvSpPr>
@@ -7074,7 +6804,7 @@
       </p:sp>
       <p:sp>
         <p:nvSpPr>
-          <p:cNvPr id="15" name="TextBox 14"/>
+          <p:cNvPr id="13" name="TextBox 12"/>
           <p:cNvSpPr txBox="1"/>
           <p:nvPr/>
         </p:nvSpPr>
@@ -7108,7 +6838,7 @@
       </p:sp>
       <p:sp>
         <p:nvSpPr>
-          <p:cNvPr id="16" name="Rectangle 15"/>
+          <p:cNvPr id="14" name="Rectangle 13"/>
           <p:cNvSpPr/>
           <p:nvPr/>
         </p:nvSpPr>
@@ -7151,7 +6881,7 @@
       </p:sp>
       <p:sp>
         <p:nvSpPr>
-          <p:cNvPr id="17" name="TextBox 16"/>
+          <p:cNvPr id="15" name="TextBox 14"/>
           <p:cNvSpPr txBox="1"/>
           <p:nvPr/>
         </p:nvSpPr>
@@ -7266,7 +6996,7 @@
       </p:sp>
       <p:sp>
         <p:nvSpPr>
-          <p:cNvPr id="18" name="Rectangle 17"/>
+          <p:cNvPr id="16" name="Rectangle 15"/>
           <p:cNvSpPr/>
           <p:nvPr/>
         </p:nvSpPr>
@@ -7279,7 +7009,7 @@
             <a:avLst/>
           </a:prstGeom>
           <a:solidFill>
-            <a:srgbClr val="0E1E4A"/>
+            <a:srgbClr val="081438"/>
           </a:solidFill>
           <a:ln w="12700">
             <a:solidFill>
@@ -7311,7 +7041,7 @@
       </p:sp>
       <p:sp>
         <p:nvSpPr>
-          <p:cNvPr id="19" name="Rectangle 18"/>
+          <p:cNvPr id="17" name="Rectangle 16"/>
           <p:cNvSpPr/>
           <p:nvPr/>
         </p:nvSpPr>
@@ -7354,7 +7084,7 @@
       </p:sp>
       <p:sp>
         <p:nvSpPr>
-          <p:cNvPr id="20" name="Oval 19"/>
+          <p:cNvPr id="18" name="Oval 17"/>
           <p:cNvSpPr/>
           <p:nvPr/>
         </p:nvSpPr>
@@ -7399,7 +7129,7 @@
       </p:sp>
       <p:sp>
         <p:nvSpPr>
-          <p:cNvPr id="21" name="TextBox 20"/>
+          <p:cNvPr id="19" name="TextBox 18"/>
           <p:cNvSpPr txBox="1"/>
           <p:nvPr/>
         </p:nvSpPr>
@@ -7433,7 +7163,7 @@
       </p:sp>
       <p:sp>
         <p:nvSpPr>
-          <p:cNvPr id="22" name="TextBox 21"/>
+          <p:cNvPr id="20" name="TextBox 19"/>
           <p:cNvSpPr txBox="1"/>
           <p:nvPr/>
         </p:nvSpPr>
@@ -7467,7 +7197,7 @@
       </p:sp>
       <p:sp>
         <p:nvSpPr>
-          <p:cNvPr id="23" name="Rectangle 22"/>
+          <p:cNvPr id="21" name="Rectangle 20"/>
           <p:cNvSpPr/>
           <p:nvPr/>
         </p:nvSpPr>
@@ -7510,7 +7240,7 @@
       </p:sp>
       <p:sp>
         <p:nvSpPr>
-          <p:cNvPr id="24" name="TextBox 23"/>
+          <p:cNvPr id="22" name="TextBox 21"/>
           <p:cNvSpPr txBox="1"/>
           <p:nvPr/>
         </p:nvSpPr>
@@ -7625,7 +7355,7 @@
       </p:sp>
       <p:sp>
         <p:nvSpPr>
-          <p:cNvPr id="25" name="Rectangle 24"/>
+          <p:cNvPr id="23" name="Rectangle 22"/>
           <p:cNvSpPr/>
           <p:nvPr/>
         </p:nvSpPr>
@@ -7638,7 +7368,7 @@
             <a:avLst/>
           </a:prstGeom>
           <a:solidFill>
-            <a:srgbClr val="0E1E4A"/>
+            <a:srgbClr val="081438"/>
           </a:solidFill>
           <a:ln w="12700">
             <a:solidFill>
@@ -7670,7 +7400,7 @@
       </p:sp>
       <p:sp>
         <p:nvSpPr>
-          <p:cNvPr id="26" name="Rectangle 25"/>
+          <p:cNvPr id="24" name="Rectangle 23"/>
           <p:cNvSpPr/>
           <p:nvPr/>
         </p:nvSpPr>
@@ -7713,7 +7443,7 @@
       </p:sp>
       <p:sp>
         <p:nvSpPr>
-          <p:cNvPr id="27" name="Oval 26"/>
+          <p:cNvPr id="25" name="Oval 24"/>
           <p:cNvSpPr/>
           <p:nvPr/>
         </p:nvSpPr>
@@ -7758,7 +7488,7 @@
       </p:sp>
       <p:sp>
         <p:nvSpPr>
-          <p:cNvPr id="28" name="TextBox 27"/>
+          <p:cNvPr id="26" name="TextBox 25"/>
           <p:cNvSpPr txBox="1"/>
           <p:nvPr/>
         </p:nvSpPr>
@@ -7792,7 +7522,7 @@
       </p:sp>
       <p:sp>
         <p:nvSpPr>
-          <p:cNvPr id="29" name="TextBox 28"/>
+          <p:cNvPr id="27" name="TextBox 26"/>
           <p:cNvSpPr txBox="1"/>
           <p:nvPr/>
         </p:nvSpPr>
@@ -7826,7 +7556,7 @@
       </p:sp>
       <p:sp>
         <p:nvSpPr>
-          <p:cNvPr id="30" name="Rectangle 29"/>
+          <p:cNvPr id="28" name="Rectangle 27"/>
           <p:cNvSpPr/>
           <p:nvPr/>
         </p:nvSpPr>
@@ -7869,7 +7599,7 @@
       </p:sp>
       <p:sp>
         <p:nvSpPr>
-          <p:cNvPr id="31" name="TextBox 30"/>
+          <p:cNvPr id="29" name="TextBox 28"/>
           <p:cNvSpPr txBox="1"/>
           <p:nvPr/>
         </p:nvSpPr>
@@ -8011,7 +7741,7 @@
                                 <p:cBhvr>
                                   <p:cTn id="6" dur="450" fill="hold"/>
                                   <p:tgtEl>
-                                    <p:spTgt spid="11"/>
+                                    <p:spTgt spid="9"/>
                                   </p:tgtEl>
                                 </p:cBhvr>
                               </p:animEffect>
@@ -8028,7 +7758,7 @@
                                 <p:cBhvr>
                                   <p:cTn id="8" dur="450" fill="hold"/>
                                   <p:tgtEl>
-                                    <p:spTgt spid="18"/>
+                                    <p:spTgt spid="16"/>
                                   </p:tgtEl>
                                 </p:cBhvr>
                               </p:animEffect>
@@ -8045,7 +7775,7 @@
                                 <p:cBhvr>
                                   <p:cTn id="10" dur="450" fill="hold"/>
                                   <p:tgtEl>
-                                    <p:spTgt spid="25"/>
+                                    <p:spTgt spid="23"/>
                                   </p:tgtEl>
                                 </p:cBhvr>
                               </p:animEffect>
@@ -8087,7 +7817,7 @@
       <p:grpSpPr/>
       <p:pic>
         <p:nvPicPr>
-          <p:cNvPr id="2" name="Picture 1" descr="building.jpg"/>
+          <p:cNvPr id="2" name="Picture 1" descr="content_bg.png"/>
           <p:cNvPicPr>
             <a:picLocks noChangeAspect="1"/>
           </p:cNvPicPr>
@@ -8118,96 +7848,6 @@
         <p:spPr>
           <a:xfrm>
             <a:off x="0" y="0"/>
-            <a:ext cx="12191695" cy="6858000"/>
-          </a:xfrm>
-          <a:prstGeom prst="rect">
-            <a:avLst/>
-          </a:prstGeom>
-          <a:solidFill>
-            <a:srgbClr val="060E24">
-              <a:alpha val="44000"/>
-            </a:srgbClr>
-          </a:solidFill>
-          <a:ln>
-            <a:noFill/>
-          </a:ln>
-        </p:spPr>
-        <p:style>
-          <a:lnRef idx="1">
-            <a:schemeClr val="accent1"/>
-          </a:lnRef>
-          <a:fillRef idx="3">
-            <a:schemeClr val="accent1"/>
-          </a:fillRef>
-          <a:effectRef idx="2">
-            <a:schemeClr val="accent1"/>
-          </a:effectRef>
-          <a:fontRef idx="minor">
-            <a:schemeClr val="lt1"/>
-          </a:fontRef>
-        </p:style>
-        <p:txBody>
-          <a:bodyPr rtlCol="0" anchor="ctr"/>
-          <a:lstStyle/>
-          <a:p>
-            <a:pPr algn="ctr"/>
-          </a:p>
-        </p:txBody>
-      </p:sp>
-      <p:sp>
-        <p:nvSpPr>
-          <p:cNvPr id="4" name="Rectangle 3"/>
-          <p:cNvSpPr/>
-          <p:nvPr/>
-        </p:nvSpPr>
-        <p:spPr>
-          <a:xfrm>
-            <a:off x="0" y="0"/>
-            <a:ext cx="12191695" cy="1645920"/>
-          </a:xfrm>
-          <a:prstGeom prst="rect">
-            <a:avLst/>
-          </a:prstGeom>
-          <a:solidFill>
-            <a:srgbClr val="060E24">
-              <a:alpha val="20000"/>
-            </a:srgbClr>
-          </a:solidFill>
-          <a:ln>
-            <a:noFill/>
-          </a:ln>
-        </p:spPr>
-        <p:style>
-          <a:lnRef idx="1">
-            <a:schemeClr val="accent1"/>
-          </a:lnRef>
-          <a:fillRef idx="3">
-            <a:schemeClr val="accent1"/>
-          </a:fillRef>
-          <a:effectRef idx="2">
-            <a:schemeClr val="accent1"/>
-          </a:effectRef>
-          <a:fontRef idx="minor">
-            <a:schemeClr val="lt1"/>
-          </a:fontRef>
-        </p:style>
-        <p:txBody>
-          <a:bodyPr rtlCol="0" anchor="ctr"/>
-          <a:lstStyle/>
-          <a:p>
-            <a:pPr algn="ctr"/>
-          </a:p>
-        </p:txBody>
-      </p:sp>
-      <p:sp>
-        <p:nvSpPr>
-          <p:cNvPr id="5" name="Rectangle 4"/>
-          <p:cNvSpPr/>
-          <p:nvPr/>
-        </p:nvSpPr>
-        <p:spPr>
-          <a:xfrm>
-            <a:off x="0" y="0"/>
             <a:ext cx="12191695" cy="44450"/>
           </a:xfrm>
           <a:prstGeom prst="rect">
@@ -8244,7 +7884,7 @@
       </p:sp>
       <p:sp>
         <p:nvSpPr>
-          <p:cNvPr id="6" name="Rectangle 5"/>
+          <p:cNvPr id="4" name="Rectangle 3"/>
           <p:cNvSpPr/>
           <p:nvPr/>
         </p:nvSpPr>
@@ -8287,7 +7927,7 @@
       </p:sp>
       <p:sp>
         <p:nvSpPr>
-          <p:cNvPr id="7" name="Rectangle 6"/>
+          <p:cNvPr id="5" name="Rectangle 4"/>
           <p:cNvSpPr/>
           <p:nvPr/>
         </p:nvSpPr>
@@ -8338,7 +7978,7 @@
       </p:sp>
       <p:sp>
         <p:nvSpPr>
-          <p:cNvPr id="8" name="TextBox 7"/>
+          <p:cNvPr id="6" name="TextBox 5"/>
           <p:cNvSpPr txBox="1"/>
           <p:nvPr/>
         </p:nvSpPr>
@@ -8380,7 +8020,7 @@
       </p:sp>
       <p:sp>
         <p:nvSpPr>
-          <p:cNvPr id="9" name="Rectangle 8"/>
+          <p:cNvPr id="7" name="Rectangle 6"/>
           <p:cNvSpPr/>
           <p:nvPr/>
         </p:nvSpPr>
@@ -8423,7 +8063,7 @@
       </p:sp>
       <p:pic>
         <p:nvPicPr>
-          <p:cNvPr id="10" name="Picture 9" descr="logo_horiz.png"/>
+          <p:cNvPr id="8" name="Picture 7" descr="logo_horiz.png"/>
           <p:cNvPicPr>
             <a:picLocks noChangeAspect="1"/>
           </p:cNvPicPr>
@@ -8447,7 +8087,7 @@
       </p:pic>
       <p:sp>
         <p:nvSpPr>
-          <p:cNvPr id="11" name="Rectangle 10"/>
+          <p:cNvPr id="9" name="Rectangle 8"/>
           <p:cNvSpPr/>
           <p:nvPr/>
         </p:nvSpPr>
@@ -8460,7 +8100,7 @@
             <a:avLst/>
           </a:prstGeom>
           <a:solidFill>
-            <a:srgbClr val="0E1E4A"/>
+            <a:srgbClr val="081438"/>
           </a:solidFill>
           <a:ln w="12700">
             <a:solidFill>
@@ -8492,7 +8132,7 @@
       </p:sp>
       <p:sp>
         <p:nvSpPr>
-          <p:cNvPr id="12" name="Rectangle 11"/>
+          <p:cNvPr id="10" name="Rectangle 9"/>
           <p:cNvSpPr/>
           <p:nvPr/>
         </p:nvSpPr>
@@ -8535,7 +8175,7 @@
       </p:sp>
       <p:sp>
         <p:nvSpPr>
-          <p:cNvPr id="13" name="Oval 12"/>
+          <p:cNvPr id="11" name="Oval 10"/>
           <p:cNvSpPr/>
           <p:nvPr/>
         </p:nvSpPr>
@@ -8580,7 +8220,7 @@
       </p:sp>
       <p:sp>
         <p:nvSpPr>
-          <p:cNvPr id="14" name="TextBox 13"/>
+          <p:cNvPr id="12" name="TextBox 11"/>
           <p:cNvSpPr txBox="1"/>
           <p:nvPr/>
         </p:nvSpPr>
@@ -8614,7 +8254,7 @@
       </p:sp>
       <p:sp>
         <p:nvSpPr>
-          <p:cNvPr id="15" name="TextBox 14"/>
+          <p:cNvPr id="13" name="TextBox 12"/>
           <p:cNvSpPr txBox="1"/>
           <p:nvPr/>
         </p:nvSpPr>
@@ -8648,7 +8288,7 @@
       </p:sp>
       <p:sp>
         <p:nvSpPr>
-          <p:cNvPr id="16" name="Rectangle 15"/>
+          <p:cNvPr id="14" name="Rectangle 13"/>
           <p:cNvSpPr/>
           <p:nvPr/>
         </p:nvSpPr>
@@ -8691,7 +8331,7 @@
       </p:sp>
       <p:sp>
         <p:nvSpPr>
-          <p:cNvPr id="17" name="TextBox 16"/>
+          <p:cNvPr id="15" name="TextBox 14"/>
           <p:cNvSpPr txBox="1"/>
           <p:nvPr/>
         </p:nvSpPr>
@@ -8806,7 +8446,7 @@
       </p:sp>
       <p:sp>
         <p:nvSpPr>
-          <p:cNvPr id="18" name="Rectangle 17"/>
+          <p:cNvPr id="16" name="Rectangle 15"/>
           <p:cNvSpPr/>
           <p:nvPr/>
         </p:nvSpPr>
@@ -8819,7 +8459,7 @@
             <a:avLst/>
           </a:prstGeom>
           <a:solidFill>
-            <a:srgbClr val="0E1E4A"/>
+            <a:srgbClr val="081438"/>
           </a:solidFill>
           <a:ln w="12700">
             <a:solidFill>
@@ -8851,7 +8491,7 @@
       </p:sp>
       <p:sp>
         <p:nvSpPr>
-          <p:cNvPr id="19" name="Rectangle 18"/>
+          <p:cNvPr id="17" name="Rectangle 16"/>
           <p:cNvSpPr/>
           <p:nvPr/>
         </p:nvSpPr>
@@ -8894,7 +8534,7 @@
       </p:sp>
       <p:sp>
         <p:nvSpPr>
-          <p:cNvPr id="20" name="Oval 19"/>
+          <p:cNvPr id="18" name="Oval 17"/>
           <p:cNvSpPr/>
           <p:nvPr/>
         </p:nvSpPr>
@@ -8939,7 +8579,7 @@
       </p:sp>
       <p:sp>
         <p:nvSpPr>
-          <p:cNvPr id="21" name="TextBox 20"/>
+          <p:cNvPr id="19" name="TextBox 18"/>
           <p:cNvSpPr txBox="1"/>
           <p:nvPr/>
         </p:nvSpPr>
@@ -8973,7 +8613,7 @@
       </p:sp>
       <p:sp>
         <p:nvSpPr>
-          <p:cNvPr id="22" name="TextBox 21"/>
+          <p:cNvPr id="20" name="TextBox 19"/>
           <p:cNvSpPr txBox="1"/>
           <p:nvPr/>
         </p:nvSpPr>
@@ -9007,7 +8647,7 @@
       </p:sp>
       <p:sp>
         <p:nvSpPr>
-          <p:cNvPr id="23" name="Rectangle 22"/>
+          <p:cNvPr id="21" name="Rectangle 20"/>
           <p:cNvSpPr/>
           <p:nvPr/>
         </p:nvSpPr>
@@ -9050,7 +8690,7 @@
       </p:sp>
       <p:sp>
         <p:nvSpPr>
-          <p:cNvPr id="24" name="TextBox 23"/>
+          <p:cNvPr id="22" name="TextBox 21"/>
           <p:cNvSpPr txBox="1"/>
           <p:nvPr/>
         </p:nvSpPr>
@@ -9165,7 +8805,7 @@
       </p:sp>
       <p:sp>
         <p:nvSpPr>
-          <p:cNvPr id="25" name="Rectangle 24"/>
+          <p:cNvPr id="23" name="Rectangle 22"/>
           <p:cNvSpPr/>
           <p:nvPr/>
         </p:nvSpPr>
@@ -9178,7 +8818,7 @@
             <a:avLst/>
           </a:prstGeom>
           <a:solidFill>
-            <a:srgbClr val="0E1E4A"/>
+            <a:srgbClr val="081438"/>
           </a:solidFill>
           <a:ln w="12700">
             <a:solidFill>
@@ -9210,7 +8850,7 @@
       </p:sp>
       <p:sp>
         <p:nvSpPr>
-          <p:cNvPr id="26" name="Rectangle 25"/>
+          <p:cNvPr id="24" name="Rectangle 23"/>
           <p:cNvSpPr/>
           <p:nvPr/>
         </p:nvSpPr>
@@ -9253,7 +8893,7 @@
       </p:sp>
       <p:sp>
         <p:nvSpPr>
-          <p:cNvPr id="27" name="Oval 26"/>
+          <p:cNvPr id="25" name="Oval 24"/>
           <p:cNvSpPr/>
           <p:nvPr/>
         </p:nvSpPr>
@@ -9298,7 +8938,7 @@
       </p:sp>
       <p:sp>
         <p:nvSpPr>
-          <p:cNvPr id="28" name="TextBox 27"/>
+          <p:cNvPr id="26" name="TextBox 25"/>
           <p:cNvSpPr txBox="1"/>
           <p:nvPr/>
         </p:nvSpPr>
@@ -9332,7 +8972,7 @@
       </p:sp>
       <p:sp>
         <p:nvSpPr>
-          <p:cNvPr id="29" name="TextBox 28"/>
+          <p:cNvPr id="27" name="TextBox 26"/>
           <p:cNvSpPr txBox="1"/>
           <p:nvPr/>
         </p:nvSpPr>
@@ -9366,7 +9006,7 @@
       </p:sp>
       <p:sp>
         <p:nvSpPr>
-          <p:cNvPr id="30" name="Rectangle 29"/>
+          <p:cNvPr id="28" name="Rectangle 27"/>
           <p:cNvSpPr/>
           <p:nvPr/>
         </p:nvSpPr>
@@ -9409,7 +9049,7 @@
       </p:sp>
       <p:sp>
         <p:nvSpPr>
-          <p:cNvPr id="31" name="TextBox 30"/>
+          <p:cNvPr id="29" name="TextBox 28"/>
           <p:cNvSpPr txBox="1"/>
           <p:nvPr/>
         </p:nvSpPr>
@@ -9551,7 +9191,7 @@
                                 <p:cBhvr>
                                   <p:cTn id="6" dur="450" fill="hold"/>
                                   <p:tgtEl>
-                                    <p:spTgt spid="11"/>
+                                    <p:spTgt spid="9"/>
                                   </p:tgtEl>
                                 </p:cBhvr>
                               </p:animEffect>
@@ -9568,7 +9208,7 @@
                                 <p:cBhvr>
                                   <p:cTn id="8" dur="450" fill="hold"/>
                                   <p:tgtEl>
-                                    <p:spTgt spid="18"/>
+                                    <p:spTgt spid="16"/>
                                   </p:tgtEl>
                                 </p:cBhvr>
                               </p:animEffect>
@@ -9585,7 +9225,7 @@
                                 <p:cBhvr>
                                   <p:cTn id="10" dur="450" fill="hold"/>
                                   <p:tgtEl>
-                                    <p:spTgt spid="25"/>
+                                    <p:spTgt spid="23"/>
                                   </p:tgtEl>
                                 </p:cBhvr>
                               </p:animEffect>
@@ -9627,7 +9267,7 @@
       <p:grpSpPr/>
       <p:pic>
         <p:nvPicPr>
-          <p:cNvPr id="2" name="Picture 1" descr="building.jpg"/>
+          <p:cNvPr id="2" name="Picture 1" descr="content_bg.png"/>
           <p:cNvPicPr>
             <a:picLocks noChangeAspect="1"/>
           </p:cNvPicPr>
@@ -9658,96 +9298,6 @@
         <p:spPr>
           <a:xfrm>
             <a:off x="0" y="0"/>
-            <a:ext cx="12191695" cy="6858000"/>
-          </a:xfrm>
-          <a:prstGeom prst="rect">
-            <a:avLst/>
-          </a:prstGeom>
-          <a:solidFill>
-            <a:srgbClr val="060E24">
-              <a:alpha val="44000"/>
-            </a:srgbClr>
-          </a:solidFill>
-          <a:ln>
-            <a:noFill/>
-          </a:ln>
-        </p:spPr>
-        <p:style>
-          <a:lnRef idx="1">
-            <a:schemeClr val="accent1"/>
-          </a:lnRef>
-          <a:fillRef idx="3">
-            <a:schemeClr val="accent1"/>
-          </a:fillRef>
-          <a:effectRef idx="2">
-            <a:schemeClr val="accent1"/>
-          </a:effectRef>
-          <a:fontRef idx="minor">
-            <a:schemeClr val="lt1"/>
-          </a:fontRef>
-        </p:style>
-        <p:txBody>
-          <a:bodyPr rtlCol="0" anchor="ctr"/>
-          <a:lstStyle/>
-          <a:p>
-            <a:pPr algn="ctr"/>
-          </a:p>
-        </p:txBody>
-      </p:sp>
-      <p:sp>
-        <p:nvSpPr>
-          <p:cNvPr id="4" name="Rectangle 3"/>
-          <p:cNvSpPr/>
-          <p:nvPr/>
-        </p:nvSpPr>
-        <p:spPr>
-          <a:xfrm>
-            <a:off x="0" y="0"/>
-            <a:ext cx="12191695" cy="1645920"/>
-          </a:xfrm>
-          <a:prstGeom prst="rect">
-            <a:avLst/>
-          </a:prstGeom>
-          <a:solidFill>
-            <a:srgbClr val="060E24">
-              <a:alpha val="20000"/>
-            </a:srgbClr>
-          </a:solidFill>
-          <a:ln>
-            <a:noFill/>
-          </a:ln>
-        </p:spPr>
-        <p:style>
-          <a:lnRef idx="1">
-            <a:schemeClr val="accent1"/>
-          </a:lnRef>
-          <a:fillRef idx="3">
-            <a:schemeClr val="accent1"/>
-          </a:fillRef>
-          <a:effectRef idx="2">
-            <a:schemeClr val="accent1"/>
-          </a:effectRef>
-          <a:fontRef idx="minor">
-            <a:schemeClr val="lt1"/>
-          </a:fontRef>
-        </p:style>
-        <p:txBody>
-          <a:bodyPr rtlCol="0" anchor="ctr"/>
-          <a:lstStyle/>
-          <a:p>
-            <a:pPr algn="ctr"/>
-          </a:p>
-        </p:txBody>
-      </p:sp>
-      <p:sp>
-        <p:nvSpPr>
-          <p:cNvPr id="5" name="Rectangle 4"/>
-          <p:cNvSpPr/>
-          <p:nvPr/>
-        </p:nvSpPr>
-        <p:spPr>
-          <a:xfrm>
-            <a:off x="0" y="0"/>
             <a:ext cx="12191695" cy="44450"/>
           </a:xfrm>
           <a:prstGeom prst="rect">
@@ -9784,7 +9334,7 @@
       </p:sp>
       <p:sp>
         <p:nvSpPr>
-          <p:cNvPr id="6" name="Rectangle 5"/>
+          <p:cNvPr id="4" name="Rectangle 3"/>
           <p:cNvSpPr/>
           <p:nvPr/>
         </p:nvSpPr>
@@ -9827,7 +9377,7 @@
       </p:sp>
       <p:sp>
         <p:nvSpPr>
-          <p:cNvPr id="7" name="Rectangle 6"/>
+          <p:cNvPr id="5" name="Rectangle 4"/>
           <p:cNvSpPr/>
           <p:nvPr/>
         </p:nvSpPr>
@@ -9878,7 +9428,7 @@
       </p:sp>
       <p:sp>
         <p:nvSpPr>
-          <p:cNvPr id="8" name="TextBox 7"/>
+          <p:cNvPr id="6" name="TextBox 5"/>
           <p:cNvSpPr txBox="1"/>
           <p:nvPr/>
         </p:nvSpPr>
@@ -9920,7 +9470,7 @@
       </p:sp>
       <p:sp>
         <p:nvSpPr>
-          <p:cNvPr id="9" name="Rectangle 8"/>
+          <p:cNvPr id="7" name="Rectangle 6"/>
           <p:cNvSpPr/>
           <p:nvPr/>
         </p:nvSpPr>
@@ -9963,7 +9513,7 @@
       </p:sp>
       <p:pic>
         <p:nvPicPr>
-          <p:cNvPr id="10" name="Picture 9" descr="logo_horiz.png"/>
+          <p:cNvPr id="8" name="Picture 7" descr="logo_horiz.png"/>
           <p:cNvPicPr>
             <a:picLocks noChangeAspect="1"/>
           </p:cNvPicPr>
@@ -9987,7 +9537,7 @@
       </p:pic>
       <p:sp>
         <p:nvSpPr>
-          <p:cNvPr id="11" name="Rectangle 10"/>
+          <p:cNvPr id="9" name="Rectangle 8"/>
           <p:cNvSpPr/>
           <p:nvPr/>
         </p:nvSpPr>
@@ -10000,7 +9550,7 @@
             <a:avLst/>
           </a:prstGeom>
           <a:solidFill>
-            <a:srgbClr val="0E1E4A"/>
+            <a:srgbClr val="081438"/>
           </a:solidFill>
           <a:ln w="6350">
             <a:solidFill>
@@ -10032,7 +9582,7 @@
       </p:sp>
       <p:sp>
         <p:nvSpPr>
-          <p:cNvPr id="12" name="Rectangle 11"/>
+          <p:cNvPr id="10" name="Rectangle 9"/>
           <p:cNvSpPr/>
           <p:nvPr/>
         </p:nvSpPr>
@@ -10075,7 +9625,7 @@
       </p:sp>
       <p:sp>
         <p:nvSpPr>
-          <p:cNvPr id="13" name="Oval 12"/>
+          <p:cNvPr id="11" name="Oval 10"/>
           <p:cNvSpPr/>
           <p:nvPr/>
         </p:nvSpPr>
@@ -10120,7 +9670,7 @@
       </p:sp>
       <p:sp>
         <p:nvSpPr>
-          <p:cNvPr id="14" name="TextBox 13"/>
+          <p:cNvPr id="12" name="TextBox 11"/>
           <p:cNvSpPr txBox="1"/>
           <p:nvPr/>
         </p:nvSpPr>
@@ -10154,7 +9704,7 @@
       </p:sp>
       <p:sp>
         <p:nvSpPr>
-          <p:cNvPr id="15" name="TextBox 14"/>
+          <p:cNvPr id="13" name="TextBox 12"/>
           <p:cNvSpPr txBox="1"/>
           <p:nvPr/>
         </p:nvSpPr>
@@ -10188,7 +9738,7 @@
       </p:sp>
       <p:sp>
         <p:nvSpPr>
-          <p:cNvPr id="16" name="Rectangle 15"/>
+          <p:cNvPr id="14" name="Rectangle 13"/>
           <p:cNvSpPr/>
           <p:nvPr/>
         </p:nvSpPr>
@@ -10231,7 +9781,7 @@
       </p:sp>
       <p:sp>
         <p:nvSpPr>
-          <p:cNvPr id="17" name="TextBox 16"/>
+          <p:cNvPr id="15" name="TextBox 14"/>
           <p:cNvSpPr txBox="1"/>
           <p:nvPr/>
         </p:nvSpPr>
@@ -10265,7 +9815,7 @@
       </p:sp>
       <p:sp>
         <p:nvSpPr>
-          <p:cNvPr id="18" name="Rectangle 17"/>
+          <p:cNvPr id="16" name="Rectangle 15"/>
           <p:cNvSpPr/>
           <p:nvPr/>
         </p:nvSpPr>
@@ -10278,7 +9828,7 @@
             <a:avLst/>
           </a:prstGeom>
           <a:solidFill>
-            <a:srgbClr val="0E1E4A"/>
+            <a:srgbClr val="081438"/>
           </a:solidFill>
           <a:ln w="6350">
             <a:solidFill>
@@ -10310,7 +9860,7 @@
       </p:sp>
       <p:sp>
         <p:nvSpPr>
-          <p:cNvPr id="19" name="Rectangle 18"/>
+          <p:cNvPr id="17" name="Rectangle 16"/>
           <p:cNvSpPr/>
           <p:nvPr/>
         </p:nvSpPr>
@@ -10353,7 +9903,7 @@
       </p:sp>
       <p:sp>
         <p:nvSpPr>
-          <p:cNvPr id="20" name="Oval 19"/>
+          <p:cNvPr id="18" name="Oval 17"/>
           <p:cNvSpPr/>
           <p:nvPr/>
         </p:nvSpPr>
@@ -10398,7 +9948,7 @@
       </p:sp>
       <p:sp>
         <p:nvSpPr>
-          <p:cNvPr id="21" name="TextBox 20"/>
+          <p:cNvPr id="19" name="TextBox 18"/>
           <p:cNvSpPr txBox="1"/>
           <p:nvPr/>
         </p:nvSpPr>
@@ -10432,7 +9982,7 @@
       </p:sp>
       <p:sp>
         <p:nvSpPr>
-          <p:cNvPr id="22" name="TextBox 21"/>
+          <p:cNvPr id="20" name="TextBox 19"/>
           <p:cNvSpPr txBox="1"/>
           <p:nvPr/>
         </p:nvSpPr>
@@ -10466,7 +10016,7 @@
       </p:sp>
       <p:sp>
         <p:nvSpPr>
-          <p:cNvPr id="23" name="Rectangle 22"/>
+          <p:cNvPr id="21" name="Rectangle 20"/>
           <p:cNvSpPr/>
           <p:nvPr/>
         </p:nvSpPr>
@@ -10509,7 +10059,7 @@
       </p:sp>
       <p:sp>
         <p:nvSpPr>
-          <p:cNvPr id="24" name="TextBox 23"/>
+          <p:cNvPr id="22" name="TextBox 21"/>
           <p:cNvSpPr txBox="1"/>
           <p:nvPr/>
         </p:nvSpPr>
@@ -10543,7 +10093,7 @@
       </p:sp>
       <p:sp>
         <p:nvSpPr>
-          <p:cNvPr id="25" name="Rectangle 24"/>
+          <p:cNvPr id="23" name="Rectangle 22"/>
           <p:cNvSpPr/>
           <p:nvPr/>
         </p:nvSpPr>
@@ -10556,7 +10106,7 @@
             <a:avLst/>
           </a:prstGeom>
           <a:solidFill>
-            <a:srgbClr val="0E1E4A"/>
+            <a:srgbClr val="081438"/>
           </a:solidFill>
           <a:ln w="6350">
             <a:solidFill>
@@ -10588,7 +10138,7 @@
       </p:sp>
       <p:sp>
         <p:nvSpPr>
-          <p:cNvPr id="26" name="Rectangle 25"/>
+          <p:cNvPr id="24" name="Rectangle 23"/>
           <p:cNvSpPr/>
           <p:nvPr/>
         </p:nvSpPr>
@@ -10631,7 +10181,7 @@
       </p:sp>
       <p:sp>
         <p:nvSpPr>
-          <p:cNvPr id="27" name="Oval 26"/>
+          <p:cNvPr id="25" name="Oval 24"/>
           <p:cNvSpPr/>
           <p:nvPr/>
         </p:nvSpPr>
@@ -10676,7 +10226,7 @@
       </p:sp>
       <p:sp>
         <p:nvSpPr>
-          <p:cNvPr id="28" name="TextBox 27"/>
+          <p:cNvPr id="26" name="TextBox 25"/>
           <p:cNvSpPr txBox="1"/>
           <p:nvPr/>
         </p:nvSpPr>
@@ -10710,7 +10260,7 @@
       </p:sp>
       <p:sp>
         <p:nvSpPr>
-          <p:cNvPr id="29" name="TextBox 28"/>
+          <p:cNvPr id="27" name="TextBox 26"/>
           <p:cNvSpPr txBox="1"/>
           <p:nvPr/>
         </p:nvSpPr>
@@ -10744,7 +10294,7 @@
       </p:sp>
       <p:sp>
         <p:nvSpPr>
-          <p:cNvPr id="30" name="Rectangle 29"/>
+          <p:cNvPr id="28" name="Rectangle 27"/>
           <p:cNvSpPr/>
           <p:nvPr/>
         </p:nvSpPr>
@@ -10787,7 +10337,7 @@
       </p:sp>
       <p:sp>
         <p:nvSpPr>
-          <p:cNvPr id="31" name="TextBox 30"/>
+          <p:cNvPr id="29" name="TextBox 28"/>
           <p:cNvSpPr txBox="1"/>
           <p:nvPr/>
         </p:nvSpPr>
@@ -10821,7 +10371,7 @@
       </p:sp>
       <p:sp>
         <p:nvSpPr>
-          <p:cNvPr id="32" name="Rectangle 31"/>
+          <p:cNvPr id="30" name="Rectangle 29"/>
           <p:cNvSpPr/>
           <p:nvPr/>
         </p:nvSpPr>
@@ -10834,7 +10384,7 @@
             <a:avLst/>
           </a:prstGeom>
           <a:solidFill>
-            <a:srgbClr val="0E1E4A"/>
+            <a:srgbClr val="081438"/>
           </a:solidFill>
           <a:ln w="6350">
             <a:solidFill>
@@ -10866,7 +10416,7 @@
       </p:sp>
       <p:sp>
         <p:nvSpPr>
-          <p:cNvPr id="33" name="Rectangle 32"/>
+          <p:cNvPr id="31" name="Rectangle 30"/>
           <p:cNvSpPr/>
           <p:nvPr/>
         </p:nvSpPr>
@@ -10909,7 +10459,7 @@
       </p:sp>
       <p:sp>
         <p:nvSpPr>
-          <p:cNvPr id="34" name="Oval 33"/>
+          <p:cNvPr id="32" name="Oval 31"/>
           <p:cNvSpPr/>
           <p:nvPr/>
         </p:nvSpPr>
@@ -10954,7 +10504,7 @@
       </p:sp>
       <p:sp>
         <p:nvSpPr>
-          <p:cNvPr id="35" name="TextBox 34"/>
+          <p:cNvPr id="33" name="TextBox 32"/>
           <p:cNvSpPr txBox="1"/>
           <p:nvPr/>
         </p:nvSpPr>
@@ -10988,7 +10538,7 @@
       </p:sp>
       <p:sp>
         <p:nvSpPr>
-          <p:cNvPr id="36" name="TextBox 35"/>
+          <p:cNvPr id="34" name="TextBox 33"/>
           <p:cNvSpPr txBox="1"/>
           <p:nvPr/>
         </p:nvSpPr>
@@ -11022,7 +10572,7 @@
       </p:sp>
       <p:sp>
         <p:nvSpPr>
-          <p:cNvPr id="37" name="Rectangle 36"/>
+          <p:cNvPr id="35" name="Rectangle 34"/>
           <p:cNvSpPr/>
           <p:nvPr/>
         </p:nvSpPr>
@@ -11065,7 +10615,7 @@
       </p:sp>
       <p:sp>
         <p:nvSpPr>
-          <p:cNvPr id="38" name="TextBox 37"/>
+          <p:cNvPr id="36" name="TextBox 35"/>
           <p:cNvSpPr txBox="1"/>
           <p:nvPr/>
         </p:nvSpPr>
@@ -11126,7 +10676,7 @@
                                 <p:cBhvr>
                                   <p:cTn id="6" dur="450" fill="hold"/>
                                   <p:tgtEl>
-                                    <p:spTgt spid="11"/>
+                                    <p:spTgt spid="9"/>
                                   </p:tgtEl>
                                 </p:cBhvr>
                               </p:animEffect>
@@ -11143,7 +10693,7 @@
                                 <p:cBhvr>
                                   <p:cTn id="8" dur="450" fill="hold"/>
                                   <p:tgtEl>
-                                    <p:spTgt spid="18"/>
+                                    <p:spTgt spid="16"/>
                                   </p:tgtEl>
                                 </p:cBhvr>
                               </p:animEffect>
@@ -11160,7 +10710,7 @@
                                 <p:cBhvr>
                                   <p:cTn id="10" dur="450" fill="hold"/>
                                   <p:tgtEl>
-                                    <p:spTgt spid="25"/>
+                                    <p:spTgt spid="23"/>
                                   </p:tgtEl>
                                 </p:cBhvr>
                               </p:animEffect>
@@ -11177,7 +10727,7 @@
                                 <p:cBhvr>
                                   <p:cTn id="12" dur="450" fill="hold"/>
                                   <p:tgtEl>
-                                    <p:spTgt spid="32"/>
+                                    <p:spTgt spid="30"/>
                                   </p:tgtEl>
                                 </p:cBhvr>
                               </p:animEffect>
@@ -11651,7 +11201,7 @@
             <a:avLst/>
           </a:prstGeom>
           <a:solidFill>
-            <a:srgbClr val="0E1E4A"/>
+            <a:srgbClr val="081438"/>
           </a:solidFill>
           <a:ln w="6350">
             <a:solidFill>
@@ -11884,7 +11434,7 @@
             <a:avLst/>
           </a:prstGeom>
           <a:solidFill>
-            <a:srgbClr val="0E1E4A"/>
+            <a:srgbClr val="081438"/>
           </a:solidFill>
           <a:ln w="6350">
             <a:solidFill>
@@ -12117,7 +11667,7 @@
             <a:avLst/>
           </a:prstGeom>
           <a:solidFill>
-            <a:srgbClr val="0E1E4A"/>
+            <a:srgbClr val="081438"/>
           </a:solidFill>
           <a:ln w="6350">
             <a:solidFill>

--- a/sendacredit_propuesta.pptx
+++ b/sendacredit_propuesta.pptx
@@ -3588,165 +3588,7 @@
       </p:sp>
       <p:sp>
         <p:nvSpPr>
-          <p:cNvPr id="5" name="Oval 4"/>
-          <p:cNvSpPr/>
-          <p:nvPr/>
-        </p:nvSpPr>
-        <p:spPr>
-          <a:xfrm>
-            <a:off x="10618927" y="182880"/>
-            <a:ext cx="1188720" cy="1188720"/>
-          </a:xfrm>
-          <a:prstGeom prst="ellipse">
-            <a:avLst/>
-          </a:prstGeom>
-          <a:solidFill>
-            <a:srgbClr val="2FDFE5"/>
-          </a:solidFill>
-          <a:ln>
-            <a:noFill/>
-          </a:ln>
-        </p:spPr>
-        <p:style>
-          <a:lnRef idx="1">
-            <a:schemeClr val="accent1"/>
-          </a:lnRef>
-          <a:fillRef idx="3">
-            <a:schemeClr val="accent1"/>
-          </a:fillRef>
-          <a:effectRef idx="2">
-            <a:schemeClr val="accent1"/>
-          </a:effectRef>
-          <a:fontRef idx="minor">
-            <a:schemeClr val="lt1"/>
-          </a:fontRef>
-        </p:style>
-        <p:txBody>
-          <a:bodyPr rtlCol="0" anchor="ctr"/>
-          <a:lstStyle/>
-          <a:p>
-            <a:pPr algn="ctr"/>
-          </a:p>
-        </p:txBody>
-      </p:sp>
-      <p:sp>
-        <p:nvSpPr>
-          <p:cNvPr id="6" name="Oval 5"/>
-          <p:cNvSpPr/>
-          <p:nvPr/>
-        </p:nvSpPr>
-        <p:spPr>
-          <a:xfrm>
-            <a:off x="10826953" y="390906"/>
-            <a:ext cx="772668" cy="772668"/>
-          </a:xfrm>
-          <a:prstGeom prst="ellipse">
-            <a:avLst/>
-          </a:prstGeom>
-          <a:solidFill>
-            <a:srgbClr val="0A1638"/>
-          </a:solidFill>
-          <a:ln>
-            <a:noFill/>
-          </a:ln>
-        </p:spPr>
-        <p:style>
-          <a:lnRef idx="1">
-            <a:schemeClr val="accent1"/>
-          </a:lnRef>
-          <a:fillRef idx="3">
-            <a:schemeClr val="accent1"/>
-          </a:fillRef>
-          <a:effectRef idx="2">
-            <a:schemeClr val="accent1"/>
-          </a:effectRef>
-          <a:fontRef idx="minor">
-            <a:schemeClr val="lt1"/>
-          </a:fontRef>
-        </p:style>
-        <p:txBody>
-          <a:bodyPr rtlCol="0" anchor="ctr"/>
-          <a:lstStyle/>
-          <a:p>
-            <a:pPr algn="ctr"/>
-          </a:p>
-        </p:txBody>
-      </p:sp>
-      <p:sp>
-        <p:nvSpPr>
-          <p:cNvPr id="7" name="TextBox 6"/>
-          <p:cNvSpPr txBox="1"/>
-          <p:nvPr/>
-        </p:nvSpPr>
-        <p:spPr>
-          <a:xfrm>
-            <a:off x="10618927" y="182880"/>
-            <a:ext cx="1188720" cy="1188720"/>
-          </a:xfrm>
-          <a:prstGeom prst="rect">
-            <a:avLst/>
-          </a:prstGeom>
-          <a:noFill/>
-        </p:spPr>
-        <p:txBody lIns="0" tIns="0" rIns="0" bIns="0">
-          <a:bodyPr wrap="none">
-            <a:spAutoFit/>
-          </a:bodyPr>
-          <a:lstStyle/>
-          <a:p>
-            <a:pPr algn="ctr">
-              <a:spcBef>
-                <a:spcPts val="2300"/>
-              </a:spcBef>
-            </a:pPr>
-            <a:r>
-              <a:rPr sz="2200" b="1">
-                <a:solidFill>
-                  <a:srgbClr val="2FDFE5"/>
-                </a:solidFill>
-              </a:rPr>
-              <a:t>1</a:t>
-            </a:r>
-          </a:p>
-        </p:txBody>
-      </p:sp>
-      <p:sp>
-        <p:nvSpPr>
-          <p:cNvPr id="8" name="TextBox 7"/>
-          <p:cNvSpPr txBox="1"/>
-          <p:nvPr/>
-        </p:nvSpPr>
-        <p:spPr>
-          <a:xfrm>
-            <a:off x="10618927" y="777240"/>
-            <a:ext cx="1188720" cy="594360"/>
-          </a:xfrm>
-          <a:prstGeom prst="rect">
-            <a:avLst/>
-          </a:prstGeom>
-          <a:noFill/>
-        </p:spPr>
-        <p:txBody lIns="0" tIns="0" rIns="0" bIns="0">
-          <a:bodyPr wrap="none">
-            <a:spAutoFit/>
-          </a:bodyPr>
-          <a:lstStyle/>
-          <a:p>
-            <a:pPr algn="ctr"/>
-            <a:r>
-              <a:rPr sz="950">
-                <a:solidFill>
-                  <a:srgbClr val="FFFFFF"/>
-                </a:solidFill>
-              </a:rPr>
-              <a:t>RECEPCIÓN</a:t>
-            </a:r>
-          </a:p>
-        </p:txBody>
-      </p:sp>
-      <p:sp>
-        <p:nvSpPr>
-          <p:cNvPr id="9" name="Rectangle 8"/>
+          <p:cNvPr id="5" name="Rectangle 4"/>
           <p:cNvSpPr/>
           <p:nvPr/>
         </p:nvSpPr>
@@ -3797,7 +3639,7 @@
       </p:sp>
       <p:sp>
         <p:nvSpPr>
-          <p:cNvPr id="10" name="TextBox 9"/>
+          <p:cNvPr id="6" name="TextBox 5"/>
           <p:cNvSpPr txBox="1"/>
           <p:nvPr/>
         </p:nvSpPr>
@@ -3839,7 +3681,7 @@
       </p:sp>
       <p:sp>
         <p:nvSpPr>
-          <p:cNvPr id="11" name="Rectangle 10"/>
+          <p:cNvPr id="7" name="Rectangle 6"/>
           <p:cNvSpPr/>
           <p:nvPr/>
         </p:nvSpPr>
@@ -3882,7 +3724,7 @@
       </p:sp>
       <p:sp>
         <p:nvSpPr>
-          <p:cNvPr id="12" name="TextBox 11"/>
+          <p:cNvPr id="8" name="TextBox 7"/>
           <p:cNvSpPr txBox="1"/>
           <p:nvPr/>
         </p:nvSpPr>
@@ -3916,7 +3758,7 @@
       </p:sp>
       <p:pic>
         <p:nvPicPr>
-          <p:cNvPr id="13" name="Picture 12" descr="logo_horiz.png"/>
+          <p:cNvPr id="9" name="Picture 8" descr="logo_horiz.png"/>
           <p:cNvPicPr>
             <a:picLocks noChangeAspect="1"/>
           </p:cNvPicPr>
@@ -3940,7 +3782,7 @@
       </p:pic>
       <p:sp>
         <p:nvSpPr>
-          <p:cNvPr id="14" name="Oval 13"/>
+          <p:cNvPr id="10" name="Oval 9"/>
           <p:cNvSpPr/>
           <p:nvPr/>
         </p:nvSpPr>
@@ -3983,7 +3825,7 @@
       </p:sp>
       <p:sp>
         <p:nvSpPr>
-          <p:cNvPr id="15" name="Oval 14"/>
+          <p:cNvPr id="11" name="Oval 10"/>
           <p:cNvSpPr/>
           <p:nvPr/>
         </p:nvSpPr>
@@ -4026,7 +3868,7 @@
       </p:sp>
       <p:sp>
         <p:nvSpPr>
-          <p:cNvPr id="16" name="Oval 15"/>
+          <p:cNvPr id="12" name="Oval 11"/>
           <p:cNvSpPr/>
           <p:nvPr/>
         </p:nvSpPr>
@@ -4069,7 +3911,7 @@
       </p:sp>
       <p:sp>
         <p:nvSpPr>
-          <p:cNvPr id="17" name="Oval 16"/>
+          <p:cNvPr id="13" name="Oval 12"/>
           <p:cNvSpPr/>
           <p:nvPr/>
         </p:nvSpPr>
@@ -4112,7 +3954,7 @@
       </p:sp>
       <p:sp>
         <p:nvSpPr>
-          <p:cNvPr id="18" name="Oval 17"/>
+          <p:cNvPr id="14" name="Oval 13"/>
           <p:cNvSpPr/>
           <p:nvPr/>
         </p:nvSpPr>
@@ -4155,7 +3997,7 @@
       </p:sp>
       <p:sp>
         <p:nvSpPr>
-          <p:cNvPr id="19" name="Rectangle 18"/>
+          <p:cNvPr id="15" name="Rectangle 14"/>
           <p:cNvSpPr/>
           <p:nvPr/>
         </p:nvSpPr>
@@ -4200,7 +4042,7 @@
       </p:sp>
       <p:sp>
         <p:nvSpPr>
-          <p:cNvPr id="20" name="Rectangle 19"/>
+          <p:cNvPr id="16" name="Rectangle 15"/>
           <p:cNvSpPr/>
           <p:nvPr/>
         </p:nvSpPr>
@@ -4243,7 +4085,7 @@
       </p:sp>
       <p:sp>
         <p:nvSpPr>
-          <p:cNvPr id="21" name="Oval 20"/>
+          <p:cNvPr id="17" name="Oval 16"/>
           <p:cNvSpPr/>
           <p:nvPr/>
         </p:nvSpPr>
@@ -4286,7 +4128,7 @@
       </p:sp>
       <p:sp>
         <p:nvSpPr>
-          <p:cNvPr id="22" name="Oval 21"/>
+          <p:cNvPr id="18" name="Oval 17"/>
           <p:cNvSpPr/>
           <p:nvPr/>
         </p:nvSpPr>
@@ -4329,7 +4171,7 @@
       </p:sp>
       <p:sp>
         <p:nvSpPr>
-          <p:cNvPr id="23" name="TextBox 22"/>
+          <p:cNvPr id="19" name="TextBox 18"/>
           <p:cNvSpPr txBox="1"/>
           <p:nvPr/>
         </p:nvSpPr>
@@ -4367,7 +4209,7 @@
       </p:sp>
       <p:sp>
         <p:nvSpPr>
-          <p:cNvPr id="24" name="Oval 23"/>
+          <p:cNvPr id="20" name="Oval 19"/>
           <p:cNvSpPr/>
           <p:nvPr/>
         </p:nvSpPr>
@@ -4412,7 +4254,7 @@
       </p:sp>
       <p:sp>
         <p:nvSpPr>
-          <p:cNvPr id="25" name="TextBox 24"/>
+          <p:cNvPr id="21" name="TextBox 20"/>
           <p:cNvSpPr txBox="1"/>
           <p:nvPr/>
         </p:nvSpPr>
@@ -4446,7 +4288,7 @@
       </p:sp>
       <p:sp>
         <p:nvSpPr>
-          <p:cNvPr id="26" name="TextBox 25"/>
+          <p:cNvPr id="22" name="TextBox 21"/>
           <p:cNvSpPr txBox="1"/>
           <p:nvPr/>
         </p:nvSpPr>
@@ -4480,7 +4322,7 @@
       </p:sp>
       <p:sp>
         <p:nvSpPr>
-          <p:cNvPr id="27" name="Rectangle 26"/>
+          <p:cNvPr id="23" name="Rectangle 22"/>
           <p:cNvSpPr/>
           <p:nvPr/>
         </p:nvSpPr>
@@ -4523,7 +4365,7 @@
       </p:sp>
       <p:sp>
         <p:nvSpPr>
-          <p:cNvPr id="28" name="TextBox 27"/>
+          <p:cNvPr id="24" name="TextBox 23"/>
           <p:cNvSpPr txBox="1"/>
           <p:nvPr/>
         </p:nvSpPr>
@@ -4615,7 +4457,7 @@
       </p:sp>
       <p:sp>
         <p:nvSpPr>
-          <p:cNvPr id="29" name="Rectangle 28"/>
+          <p:cNvPr id="25" name="Rectangle 24"/>
           <p:cNvSpPr/>
           <p:nvPr/>
         </p:nvSpPr>
@@ -4660,7 +4502,7 @@
       </p:sp>
       <p:sp>
         <p:nvSpPr>
-          <p:cNvPr id="30" name="Rectangle 29"/>
+          <p:cNvPr id="26" name="Rectangle 25"/>
           <p:cNvSpPr/>
           <p:nvPr/>
         </p:nvSpPr>
@@ -4703,7 +4545,7 @@
       </p:sp>
       <p:sp>
         <p:nvSpPr>
-          <p:cNvPr id="31" name="Oval 30"/>
+          <p:cNvPr id="27" name="Oval 26"/>
           <p:cNvSpPr/>
           <p:nvPr/>
         </p:nvSpPr>
@@ -4746,7 +4588,7 @@
       </p:sp>
       <p:sp>
         <p:nvSpPr>
-          <p:cNvPr id="32" name="Oval 31"/>
+          <p:cNvPr id="28" name="Oval 27"/>
           <p:cNvSpPr/>
           <p:nvPr/>
         </p:nvSpPr>
@@ -4789,7 +4631,7 @@
       </p:sp>
       <p:sp>
         <p:nvSpPr>
-          <p:cNvPr id="33" name="TextBox 32"/>
+          <p:cNvPr id="29" name="TextBox 28"/>
           <p:cNvSpPr txBox="1"/>
           <p:nvPr/>
         </p:nvSpPr>
@@ -4827,7 +4669,7 @@
       </p:sp>
       <p:sp>
         <p:nvSpPr>
-          <p:cNvPr id="34" name="Oval 33"/>
+          <p:cNvPr id="30" name="Oval 29"/>
           <p:cNvSpPr/>
           <p:nvPr/>
         </p:nvSpPr>
@@ -4872,7 +4714,7 @@
       </p:sp>
       <p:sp>
         <p:nvSpPr>
-          <p:cNvPr id="35" name="TextBox 34"/>
+          <p:cNvPr id="31" name="TextBox 30"/>
           <p:cNvSpPr txBox="1"/>
           <p:nvPr/>
         </p:nvSpPr>
@@ -4906,7 +4748,7 @@
       </p:sp>
       <p:sp>
         <p:nvSpPr>
-          <p:cNvPr id="36" name="TextBox 35"/>
+          <p:cNvPr id="32" name="TextBox 31"/>
           <p:cNvSpPr txBox="1"/>
           <p:nvPr/>
         </p:nvSpPr>
@@ -4940,7 +4782,7 @@
       </p:sp>
       <p:sp>
         <p:nvSpPr>
-          <p:cNvPr id="37" name="Rectangle 36"/>
+          <p:cNvPr id="33" name="Rectangle 32"/>
           <p:cNvSpPr/>
           <p:nvPr/>
         </p:nvSpPr>
@@ -4983,7 +4825,7 @@
       </p:sp>
       <p:sp>
         <p:nvSpPr>
-          <p:cNvPr id="38" name="TextBox 37"/>
+          <p:cNvPr id="34" name="TextBox 33"/>
           <p:cNvSpPr txBox="1"/>
           <p:nvPr/>
         </p:nvSpPr>
@@ -5102,7 +4944,7 @@
                                 <p:cBhvr>
                                   <p:cTn id="6" dur="450" fill="hold"/>
                                   <p:tgtEl>
-                                    <p:spTgt spid="19"/>
+                                    <p:spTgt spid="15"/>
                                   </p:tgtEl>
                                 </p:cBhvr>
                               </p:animEffect>
@@ -5119,7 +4961,7 @@
                                 <p:cBhvr>
                                   <p:cTn id="8" dur="450" fill="hold"/>
                                   <p:tgtEl>
-                                    <p:spTgt spid="29"/>
+                                    <p:spTgt spid="25"/>
                                   </p:tgtEl>
                                 </p:cBhvr>
                               </p:animEffect>
@@ -5271,165 +5113,7 @@
       </p:sp>
       <p:sp>
         <p:nvSpPr>
-          <p:cNvPr id="5" name="Oval 4"/>
-          <p:cNvSpPr/>
-          <p:nvPr/>
-        </p:nvSpPr>
-        <p:spPr>
-          <a:xfrm>
-            <a:off x="10618927" y="182880"/>
-            <a:ext cx="1188720" cy="1188720"/>
-          </a:xfrm>
-          <a:prstGeom prst="ellipse">
-            <a:avLst/>
-          </a:prstGeom>
-          <a:solidFill>
-            <a:srgbClr val="2FDFE5"/>
-          </a:solidFill>
-          <a:ln>
-            <a:noFill/>
-          </a:ln>
-        </p:spPr>
-        <p:style>
-          <a:lnRef idx="1">
-            <a:schemeClr val="accent1"/>
-          </a:lnRef>
-          <a:fillRef idx="3">
-            <a:schemeClr val="accent1"/>
-          </a:fillRef>
-          <a:effectRef idx="2">
-            <a:schemeClr val="accent1"/>
-          </a:effectRef>
-          <a:fontRef idx="minor">
-            <a:schemeClr val="lt1"/>
-          </a:fontRef>
-        </p:style>
-        <p:txBody>
-          <a:bodyPr rtlCol="0" anchor="ctr"/>
-          <a:lstStyle/>
-          <a:p>
-            <a:pPr algn="ctr"/>
-          </a:p>
-        </p:txBody>
-      </p:sp>
-      <p:sp>
-        <p:nvSpPr>
-          <p:cNvPr id="6" name="Oval 5"/>
-          <p:cNvSpPr/>
-          <p:nvPr/>
-        </p:nvSpPr>
-        <p:spPr>
-          <a:xfrm>
-            <a:off x="10826953" y="390906"/>
-            <a:ext cx="772668" cy="772668"/>
-          </a:xfrm>
-          <a:prstGeom prst="ellipse">
-            <a:avLst/>
-          </a:prstGeom>
-          <a:solidFill>
-            <a:srgbClr val="0A1638"/>
-          </a:solidFill>
-          <a:ln>
-            <a:noFill/>
-          </a:ln>
-        </p:spPr>
-        <p:style>
-          <a:lnRef idx="1">
-            <a:schemeClr val="accent1"/>
-          </a:lnRef>
-          <a:fillRef idx="3">
-            <a:schemeClr val="accent1"/>
-          </a:fillRef>
-          <a:effectRef idx="2">
-            <a:schemeClr val="accent1"/>
-          </a:effectRef>
-          <a:fontRef idx="minor">
-            <a:schemeClr val="lt1"/>
-          </a:fontRef>
-        </p:style>
-        <p:txBody>
-          <a:bodyPr rtlCol="0" anchor="ctr"/>
-          <a:lstStyle/>
-          <a:p>
-            <a:pPr algn="ctr"/>
-          </a:p>
-        </p:txBody>
-      </p:sp>
-      <p:sp>
-        <p:nvSpPr>
-          <p:cNvPr id="7" name="TextBox 6"/>
-          <p:cNvSpPr txBox="1"/>
-          <p:nvPr/>
-        </p:nvSpPr>
-        <p:spPr>
-          <a:xfrm>
-            <a:off x="10618927" y="182880"/>
-            <a:ext cx="1188720" cy="1188720"/>
-          </a:xfrm>
-          <a:prstGeom prst="rect">
-            <a:avLst/>
-          </a:prstGeom>
-          <a:noFill/>
-        </p:spPr>
-        <p:txBody lIns="0" tIns="0" rIns="0" bIns="0">
-          <a:bodyPr wrap="none">
-            <a:spAutoFit/>
-          </a:bodyPr>
-          <a:lstStyle/>
-          <a:p>
-            <a:pPr algn="ctr">
-              <a:spcBef>
-                <a:spcPts val="2300"/>
-              </a:spcBef>
-            </a:pPr>
-            <a:r>
-              <a:rPr sz="2200" b="1">
-                <a:solidFill>
-                  <a:srgbClr val="2FDFE5"/>
-                </a:solidFill>
-              </a:rPr>
-              <a:t>2</a:t>
-            </a:r>
-          </a:p>
-        </p:txBody>
-      </p:sp>
-      <p:sp>
-        <p:nvSpPr>
-          <p:cNvPr id="8" name="TextBox 7"/>
-          <p:cNvSpPr txBox="1"/>
-          <p:nvPr/>
-        </p:nvSpPr>
-        <p:spPr>
-          <a:xfrm>
-            <a:off x="10618927" y="777240"/>
-            <a:ext cx="1188720" cy="594360"/>
-          </a:xfrm>
-          <a:prstGeom prst="rect">
-            <a:avLst/>
-          </a:prstGeom>
-          <a:noFill/>
-        </p:spPr>
-        <p:txBody lIns="0" tIns="0" rIns="0" bIns="0">
-          <a:bodyPr wrap="none">
-            <a:spAutoFit/>
-          </a:bodyPr>
-          <a:lstStyle/>
-          <a:p>
-            <a:pPr algn="ctr"/>
-            <a:r>
-              <a:rPr sz="950">
-                <a:solidFill>
-                  <a:srgbClr val="FFFFFF"/>
-                </a:solidFill>
-              </a:rPr>
-              <a:t>GESTIÓN</a:t>
-            </a:r>
-          </a:p>
-        </p:txBody>
-      </p:sp>
-      <p:sp>
-        <p:nvSpPr>
-          <p:cNvPr id="9" name="Rectangle 8"/>
+          <p:cNvPr id="5" name="Rectangle 4"/>
           <p:cNvSpPr/>
           <p:nvPr/>
         </p:nvSpPr>
@@ -5480,7 +5164,7 @@
       </p:sp>
       <p:sp>
         <p:nvSpPr>
-          <p:cNvPr id="10" name="TextBox 9"/>
+          <p:cNvPr id="6" name="TextBox 5"/>
           <p:cNvSpPr txBox="1"/>
           <p:nvPr/>
         </p:nvSpPr>
@@ -5522,7 +5206,7 @@
       </p:sp>
       <p:sp>
         <p:nvSpPr>
-          <p:cNvPr id="11" name="Rectangle 10"/>
+          <p:cNvPr id="7" name="Rectangle 6"/>
           <p:cNvSpPr/>
           <p:nvPr/>
         </p:nvSpPr>
@@ -5565,7 +5249,7 @@
       </p:sp>
       <p:sp>
         <p:nvSpPr>
-          <p:cNvPr id="12" name="TextBox 11"/>
+          <p:cNvPr id="8" name="TextBox 7"/>
           <p:cNvSpPr txBox="1"/>
           <p:nvPr/>
         </p:nvSpPr>
@@ -5599,7 +5283,7 @@
       </p:sp>
       <p:pic>
         <p:nvPicPr>
-          <p:cNvPr id="13" name="Picture 12" descr="logo_horiz.png"/>
+          <p:cNvPr id="9" name="Picture 8" descr="logo_horiz.png"/>
           <p:cNvPicPr>
             <a:picLocks noChangeAspect="1"/>
           </p:cNvPicPr>
@@ -5623,7 +5307,7 @@
       </p:pic>
       <p:sp>
         <p:nvSpPr>
-          <p:cNvPr id="14" name="Oval 13"/>
+          <p:cNvPr id="10" name="Oval 9"/>
           <p:cNvSpPr/>
           <p:nvPr/>
         </p:nvSpPr>
@@ -5666,7 +5350,7 @@
       </p:sp>
       <p:sp>
         <p:nvSpPr>
-          <p:cNvPr id="15" name="Oval 14"/>
+          <p:cNvPr id="11" name="Oval 10"/>
           <p:cNvSpPr/>
           <p:nvPr/>
         </p:nvSpPr>
@@ -5709,7 +5393,7 @@
       </p:sp>
       <p:sp>
         <p:nvSpPr>
-          <p:cNvPr id="16" name="Oval 15"/>
+          <p:cNvPr id="12" name="Oval 11"/>
           <p:cNvSpPr/>
           <p:nvPr/>
         </p:nvSpPr>
@@ -5752,7 +5436,7 @@
       </p:sp>
       <p:sp>
         <p:nvSpPr>
-          <p:cNvPr id="17" name="Oval 16"/>
+          <p:cNvPr id="13" name="Oval 12"/>
           <p:cNvSpPr/>
           <p:nvPr/>
         </p:nvSpPr>
@@ -5795,7 +5479,7 @@
       </p:sp>
       <p:sp>
         <p:nvSpPr>
-          <p:cNvPr id="18" name="Oval 17"/>
+          <p:cNvPr id="14" name="Oval 13"/>
           <p:cNvSpPr/>
           <p:nvPr/>
         </p:nvSpPr>
@@ -5838,7 +5522,7 @@
       </p:sp>
       <p:sp>
         <p:nvSpPr>
-          <p:cNvPr id="19" name="Rectangle 18"/>
+          <p:cNvPr id="15" name="Rectangle 14"/>
           <p:cNvSpPr/>
           <p:nvPr/>
         </p:nvSpPr>
@@ -5883,7 +5567,7 @@
       </p:sp>
       <p:sp>
         <p:nvSpPr>
-          <p:cNvPr id="20" name="Rectangle 19"/>
+          <p:cNvPr id="16" name="Rectangle 15"/>
           <p:cNvSpPr/>
           <p:nvPr/>
         </p:nvSpPr>
@@ -5926,7 +5610,7 @@
       </p:sp>
       <p:sp>
         <p:nvSpPr>
-          <p:cNvPr id="21" name="Oval 20"/>
+          <p:cNvPr id="17" name="Oval 16"/>
           <p:cNvSpPr/>
           <p:nvPr/>
         </p:nvSpPr>
@@ -5969,7 +5653,7 @@
       </p:sp>
       <p:sp>
         <p:nvSpPr>
-          <p:cNvPr id="22" name="Oval 21"/>
+          <p:cNvPr id="18" name="Oval 17"/>
           <p:cNvSpPr/>
           <p:nvPr/>
         </p:nvSpPr>
@@ -6012,7 +5696,7 @@
       </p:sp>
       <p:sp>
         <p:nvSpPr>
-          <p:cNvPr id="23" name="TextBox 22"/>
+          <p:cNvPr id="19" name="TextBox 18"/>
           <p:cNvSpPr txBox="1"/>
           <p:nvPr/>
         </p:nvSpPr>
@@ -6050,7 +5734,7 @@
       </p:sp>
       <p:sp>
         <p:nvSpPr>
-          <p:cNvPr id="24" name="Oval 23"/>
+          <p:cNvPr id="20" name="Oval 19"/>
           <p:cNvSpPr/>
           <p:nvPr/>
         </p:nvSpPr>
@@ -6095,7 +5779,7 @@
       </p:sp>
       <p:sp>
         <p:nvSpPr>
-          <p:cNvPr id="25" name="TextBox 24"/>
+          <p:cNvPr id="21" name="TextBox 20"/>
           <p:cNvSpPr txBox="1"/>
           <p:nvPr/>
         </p:nvSpPr>
@@ -6129,7 +5813,7 @@
       </p:sp>
       <p:sp>
         <p:nvSpPr>
-          <p:cNvPr id="26" name="TextBox 25"/>
+          <p:cNvPr id="22" name="TextBox 21"/>
           <p:cNvSpPr txBox="1"/>
           <p:nvPr/>
         </p:nvSpPr>
@@ -6163,7 +5847,7 @@
       </p:sp>
       <p:sp>
         <p:nvSpPr>
-          <p:cNvPr id="27" name="Rectangle 26"/>
+          <p:cNvPr id="23" name="Rectangle 22"/>
           <p:cNvSpPr/>
           <p:nvPr/>
         </p:nvSpPr>
@@ -6206,7 +5890,7 @@
       </p:sp>
       <p:sp>
         <p:nvSpPr>
-          <p:cNvPr id="28" name="TextBox 27"/>
+          <p:cNvPr id="24" name="TextBox 23"/>
           <p:cNvSpPr txBox="1"/>
           <p:nvPr/>
         </p:nvSpPr>
@@ -6298,7 +5982,7 @@
       </p:sp>
       <p:sp>
         <p:nvSpPr>
-          <p:cNvPr id="29" name="Rectangle 28"/>
+          <p:cNvPr id="25" name="Rectangle 24"/>
           <p:cNvSpPr/>
           <p:nvPr/>
         </p:nvSpPr>
@@ -6343,7 +6027,7 @@
       </p:sp>
       <p:sp>
         <p:nvSpPr>
-          <p:cNvPr id="30" name="Rectangle 29"/>
+          <p:cNvPr id="26" name="Rectangle 25"/>
           <p:cNvSpPr/>
           <p:nvPr/>
         </p:nvSpPr>
@@ -6386,7 +6070,7 @@
       </p:sp>
       <p:sp>
         <p:nvSpPr>
-          <p:cNvPr id="31" name="Oval 30"/>
+          <p:cNvPr id="27" name="Oval 26"/>
           <p:cNvSpPr/>
           <p:nvPr/>
         </p:nvSpPr>
@@ -6429,7 +6113,7 @@
       </p:sp>
       <p:sp>
         <p:nvSpPr>
-          <p:cNvPr id="32" name="Oval 31"/>
+          <p:cNvPr id="28" name="Oval 27"/>
           <p:cNvSpPr/>
           <p:nvPr/>
         </p:nvSpPr>
@@ -6472,7 +6156,7 @@
       </p:sp>
       <p:sp>
         <p:nvSpPr>
-          <p:cNvPr id="33" name="TextBox 32"/>
+          <p:cNvPr id="29" name="TextBox 28"/>
           <p:cNvSpPr txBox="1"/>
           <p:nvPr/>
         </p:nvSpPr>
@@ -6510,7 +6194,7 @@
       </p:sp>
       <p:sp>
         <p:nvSpPr>
-          <p:cNvPr id="34" name="Oval 33"/>
+          <p:cNvPr id="30" name="Oval 29"/>
           <p:cNvSpPr/>
           <p:nvPr/>
         </p:nvSpPr>
@@ -6555,7 +6239,7 @@
       </p:sp>
       <p:sp>
         <p:nvSpPr>
-          <p:cNvPr id="35" name="TextBox 34"/>
+          <p:cNvPr id="31" name="TextBox 30"/>
           <p:cNvSpPr txBox="1"/>
           <p:nvPr/>
         </p:nvSpPr>
@@ -6589,7 +6273,7 @@
       </p:sp>
       <p:sp>
         <p:nvSpPr>
-          <p:cNvPr id="36" name="TextBox 35"/>
+          <p:cNvPr id="32" name="TextBox 31"/>
           <p:cNvSpPr txBox="1"/>
           <p:nvPr/>
         </p:nvSpPr>
@@ -6623,7 +6307,7 @@
       </p:sp>
       <p:sp>
         <p:nvSpPr>
-          <p:cNvPr id="37" name="Rectangle 36"/>
+          <p:cNvPr id="33" name="Rectangle 32"/>
           <p:cNvSpPr/>
           <p:nvPr/>
         </p:nvSpPr>
@@ -6666,7 +6350,7 @@
       </p:sp>
       <p:sp>
         <p:nvSpPr>
-          <p:cNvPr id="38" name="TextBox 37"/>
+          <p:cNvPr id="34" name="TextBox 33"/>
           <p:cNvSpPr txBox="1"/>
           <p:nvPr/>
         </p:nvSpPr>
@@ -6785,7 +6469,7 @@
                                 <p:cBhvr>
                                   <p:cTn id="6" dur="450" fill="hold"/>
                                   <p:tgtEl>
-                                    <p:spTgt spid="19"/>
+                                    <p:spTgt spid="15"/>
                                   </p:tgtEl>
                                 </p:cBhvr>
                               </p:animEffect>
@@ -6802,7 +6486,7 @@
                                 <p:cBhvr>
                                   <p:cTn id="8" dur="450" fill="hold"/>
                                   <p:tgtEl>
-                                    <p:spTgt spid="29"/>
+                                    <p:spTgt spid="25"/>
                                   </p:tgtEl>
                                 </p:cBhvr>
                               </p:animEffect>
@@ -6954,165 +6638,7 @@
       </p:sp>
       <p:sp>
         <p:nvSpPr>
-          <p:cNvPr id="5" name="Oval 4"/>
-          <p:cNvSpPr/>
-          <p:nvPr/>
-        </p:nvSpPr>
-        <p:spPr>
-          <a:xfrm>
-            <a:off x="10618927" y="182880"/>
-            <a:ext cx="1188720" cy="1188720"/>
-          </a:xfrm>
-          <a:prstGeom prst="ellipse">
-            <a:avLst/>
-          </a:prstGeom>
-          <a:solidFill>
-            <a:srgbClr val="2FDFE5"/>
-          </a:solidFill>
-          <a:ln>
-            <a:noFill/>
-          </a:ln>
-        </p:spPr>
-        <p:style>
-          <a:lnRef idx="1">
-            <a:schemeClr val="accent1"/>
-          </a:lnRef>
-          <a:fillRef idx="3">
-            <a:schemeClr val="accent1"/>
-          </a:fillRef>
-          <a:effectRef idx="2">
-            <a:schemeClr val="accent1"/>
-          </a:effectRef>
-          <a:fontRef idx="minor">
-            <a:schemeClr val="lt1"/>
-          </a:fontRef>
-        </p:style>
-        <p:txBody>
-          <a:bodyPr rtlCol="0" anchor="ctr"/>
-          <a:lstStyle/>
-          <a:p>
-            <a:pPr algn="ctr"/>
-          </a:p>
-        </p:txBody>
-      </p:sp>
-      <p:sp>
-        <p:nvSpPr>
-          <p:cNvPr id="6" name="Oval 5"/>
-          <p:cNvSpPr/>
-          <p:nvPr/>
-        </p:nvSpPr>
-        <p:spPr>
-          <a:xfrm>
-            <a:off x="10826953" y="390906"/>
-            <a:ext cx="772668" cy="772668"/>
-          </a:xfrm>
-          <a:prstGeom prst="ellipse">
-            <a:avLst/>
-          </a:prstGeom>
-          <a:solidFill>
-            <a:srgbClr val="0A1638"/>
-          </a:solidFill>
-          <a:ln>
-            <a:noFill/>
-          </a:ln>
-        </p:spPr>
-        <p:style>
-          <a:lnRef idx="1">
-            <a:schemeClr val="accent1"/>
-          </a:lnRef>
-          <a:fillRef idx="3">
-            <a:schemeClr val="accent1"/>
-          </a:fillRef>
-          <a:effectRef idx="2">
-            <a:schemeClr val="accent1"/>
-          </a:effectRef>
-          <a:fontRef idx="minor">
-            <a:schemeClr val="lt1"/>
-          </a:fontRef>
-        </p:style>
-        <p:txBody>
-          <a:bodyPr rtlCol="0" anchor="ctr"/>
-          <a:lstStyle/>
-          <a:p>
-            <a:pPr algn="ctr"/>
-          </a:p>
-        </p:txBody>
-      </p:sp>
-      <p:sp>
-        <p:nvSpPr>
-          <p:cNvPr id="7" name="TextBox 6"/>
-          <p:cNvSpPr txBox="1"/>
-          <p:nvPr/>
-        </p:nvSpPr>
-        <p:spPr>
-          <a:xfrm>
-            <a:off x="10618927" y="182880"/>
-            <a:ext cx="1188720" cy="1188720"/>
-          </a:xfrm>
-          <a:prstGeom prst="rect">
-            <a:avLst/>
-          </a:prstGeom>
-          <a:noFill/>
-        </p:spPr>
-        <p:txBody lIns="0" tIns="0" rIns="0" bIns="0">
-          <a:bodyPr wrap="none">
-            <a:spAutoFit/>
-          </a:bodyPr>
-          <a:lstStyle/>
-          <a:p>
-            <a:pPr algn="ctr">
-              <a:spcBef>
-                <a:spcPts val="2300"/>
-              </a:spcBef>
-            </a:pPr>
-            <a:r>
-              <a:rPr sz="2200" b="1">
-                <a:solidFill>
-                  <a:srgbClr val="2FDFE5"/>
-                </a:solidFill>
-              </a:rPr>
-              <a:t>3</a:t>
-            </a:r>
-          </a:p>
-        </p:txBody>
-      </p:sp>
-      <p:sp>
-        <p:nvSpPr>
-          <p:cNvPr id="8" name="TextBox 7"/>
-          <p:cNvSpPr txBox="1"/>
-          <p:nvPr/>
-        </p:nvSpPr>
-        <p:spPr>
-          <a:xfrm>
-            <a:off x="10618927" y="777240"/>
-            <a:ext cx="1188720" cy="594360"/>
-          </a:xfrm>
-          <a:prstGeom prst="rect">
-            <a:avLst/>
-          </a:prstGeom>
-          <a:noFill/>
-        </p:spPr>
-        <p:txBody lIns="0" tIns="0" rIns="0" bIns="0">
-          <a:bodyPr wrap="none">
-            <a:spAutoFit/>
-          </a:bodyPr>
-          <a:lstStyle/>
-          <a:p>
-            <a:pPr algn="ctr"/>
-            <a:r>
-              <a:rPr sz="950">
-                <a:solidFill>
-                  <a:srgbClr val="FFFFFF"/>
-                </a:solidFill>
-              </a:rPr>
-              <a:t>JUDICIAL</a:t>
-            </a:r>
-          </a:p>
-        </p:txBody>
-      </p:sp>
-      <p:sp>
-        <p:nvSpPr>
-          <p:cNvPr id="9" name="Rectangle 8"/>
+          <p:cNvPr id="5" name="Rectangle 4"/>
           <p:cNvSpPr/>
           <p:nvPr/>
         </p:nvSpPr>
@@ -7163,7 +6689,7 @@
       </p:sp>
       <p:sp>
         <p:nvSpPr>
-          <p:cNvPr id="10" name="TextBox 9"/>
+          <p:cNvPr id="6" name="TextBox 5"/>
           <p:cNvSpPr txBox="1"/>
           <p:nvPr/>
         </p:nvSpPr>
@@ -7205,7 +6731,7 @@
       </p:sp>
       <p:sp>
         <p:nvSpPr>
-          <p:cNvPr id="11" name="Rectangle 10"/>
+          <p:cNvPr id="7" name="Rectangle 6"/>
           <p:cNvSpPr/>
           <p:nvPr/>
         </p:nvSpPr>
@@ -7248,7 +6774,7 @@
       </p:sp>
       <p:sp>
         <p:nvSpPr>
-          <p:cNvPr id="12" name="TextBox 11"/>
+          <p:cNvPr id="8" name="TextBox 7"/>
           <p:cNvSpPr txBox="1"/>
           <p:nvPr/>
         </p:nvSpPr>
@@ -7282,7 +6808,7 @@
       </p:sp>
       <p:pic>
         <p:nvPicPr>
-          <p:cNvPr id="13" name="Picture 12" descr="logo_horiz.png"/>
+          <p:cNvPr id="9" name="Picture 8" descr="logo_horiz.png"/>
           <p:cNvPicPr>
             <a:picLocks noChangeAspect="1"/>
           </p:cNvPicPr>
@@ -7306,7 +6832,7 @@
       </p:pic>
       <p:sp>
         <p:nvSpPr>
-          <p:cNvPr id="14" name="Oval 13"/>
+          <p:cNvPr id="10" name="Oval 9"/>
           <p:cNvSpPr/>
           <p:nvPr/>
         </p:nvSpPr>
@@ -7349,7 +6875,7 @@
       </p:sp>
       <p:sp>
         <p:nvSpPr>
-          <p:cNvPr id="15" name="Oval 14"/>
+          <p:cNvPr id="11" name="Oval 10"/>
           <p:cNvSpPr/>
           <p:nvPr/>
         </p:nvSpPr>
@@ -7392,7 +6918,7 @@
       </p:sp>
       <p:sp>
         <p:nvSpPr>
-          <p:cNvPr id="16" name="Oval 15"/>
+          <p:cNvPr id="12" name="Oval 11"/>
           <p:cNvSpPr/>
           <p:nvPr/>
         </p:nvSpPr>
@@ -7435,7 +6961,7 @@
       </p:sp>
       <p:sp>
         <p:nvSpPr>
-          <p:cNvPr id="17" name="Oval 16"/>
+          <p:cNvPr id="13" name="Oval 12"/>
           <p:cNvSpPr/>
           <p:nvPr/>
         </p:nvSpPr>
@@ -7478,7 +7004,7 @@
       </p:sp>
       <p:sp>
         <p:nvSpPr>
-          <p:cNvPr id="18" name="Oval 17"/>
+          <p:cNvPr id="14" name="Oval 13"/>
           <p:cNvSpPr/>
           <p:nvPr/>
         </p:nvSpPr>
@@ -7521,7 +7047,7 @@
       </p:sp>
       <p:sp>
         <p:nvSpPr>
-          <p:cNvPr id="19" name="Rectangle 18"/>
+          <p:cNvPr id="15" name="Rectangle 14"/>
           <p:cNvSpPr/>
           <p:nvPr/>
         </p:nvSpPr>
@@ -7566,7 +7092,7 @@
       </p:sp>
       <p:sp>
         <p:nvSpPr>
-          <p:cNvPr id="20" name="Rectangle 19"/>
+          <p:cNvPr id="16" name="Rectangle 15"/>
           <p:cNvSpPr/>
           <p:nvPr/>
         </p:nvSpPr>
@@ -7609,7 +7135,7 @@
       </p:sp>
       <p:sp>
         <p:nvSpPr>
-          <p:cNvPr id="21" name="Oval 20"/>
+          <p:cNvPr id="17" name="Oval 16"/>
           <p:cNvSpPr/>
           <p:nvPr/>
         </p:nvSpPr>
@@ -7652,7 +7178,7 @@
       </p:sp>
       <p:sp>
         <p:nvSpPr>
-          <p:cNvPr id="22" name="Oval 21"/>
+          <p:cNvPr id="18" name="Oval 17"/>
           <p:cNvSpPr/>
           <p:nvPr/>
         </p:nvSpPr>
@@ -7695,7 +7221,7 @@
       </p:sp>
       <p:sp>
         <p:nvSpPr>
-          <p:cNvPr id="23" name="TextBox 22"/>
+          <p:cNvPr id="19" name="TextBox 18"/>
           <p:cNvSpPr txBox="1"/>
           <p:nvPr/>
         </p:nvSpPr>
@@ -7733,7 +7259,7 @@
       </p:sp>
       <p:sp>
         <p:nvSpPr>
-          <p:cNvPr id="24" name="Oval 23"/>
+          <p:cNvPr id="20" name="Oval 19"/>
           <p:cNvSpPr/>
           <p:nvPr/>
         </p:nvSpPr>
@@ -7778,7 +7304,7 @@
       </p:sp>
       <p:sp>
         <p:nvSpPr>
-          <p:cNvPr id="25" name="TextBox 24"/>
+          <p:cNvPr id="21" name="TextBox 20"/>
           <p:cNvSpPr txBox="1"/>
           <p:nvPr/>
         </p:nvSpPr>
@@ -7812,7 +7338,7 @@
       </p:sp>
       <p:sp>
         <p:nvSpPr>
-          <p:cNvPr id="26" name="TextBox 25"/>
+          <p:cNvPr id="22" name="TextBox 21"/>
           <p:cNvSpPr txBox="1"/>
           <p:nvPr/>
         </p:nvSpPr>
@@ -7846,7 +7372,7 @@
       </p:sp>
       <p:sp>
         <p:nvSpPr>
-          <p:cNvPr id="27" name="Rectangle 26"/>
+          <p:cNvPr id="23" name="Rectangle 22"/>
           <p:cNvSpPr/>
           <p:nvPr/>
         </p:nvSpPr>
@@ -7889,7 +7415,7 @@
       </p:sp>
       <p:sp>
         <p:nvSpPr>
-          <p:cNvPr id="28" name="TextBox 27"/>
+          <p:cNvPr id="24" name="TextBox 23"/>
           <p:cNvSpPr txBox="1"/>
           <p:nvPr/>
         </p:nvSpPr>
@@ -7981,7 +7507,7 @@
       </p:sp>
       <p:sp>
         <p:nvSpPr>
-          <p:cNvPr id="29" name="Rectangle 28"/>
+          <p:cNvPr id="25" name="Rectangle 24"/>
           <p:cNvSpPr/>
           <p:nvPr/>
         </p:nvSpPr>
@@ -8026,7 +7552,7 @@
       </p:sp>
       <p:sp>
         <p:nvSpPr>
-          <p:cNvPr id="30" name="Rectangle 29"/>
+          <p:cNvPr id="26" name="Rectangle 25"/>
           <p:cNvSpPr/>
           <p:nvPr/>
         </p:nvSpPr>
@@ -8069,7 +7595,7 @@
       </p:sp>
       <p:sp>
         <p:nvSpPr>
-          <p:cNvPr id="31" name="Oval 30"/>
+          <p:cNvPr id="27" name="Oval 26"/>
           <p:cNvSpPr/>
           <p:nvPr/>
         </p:nvSpPr>
@@ -8112,7 +7638,7 @@
       </p:sp>
       <p:sp>
         <p:nvSpPr>
-          <p:cNvPr id="32" name="Oval 31"/>
+          <p:cNvPr id="28" name="Oval 27"/>
           <p:cNvSpPr/>
           <p:nvPr/>
         </p:nvSpPr>
@@ -8155,7 +7681,7 @@
       </p:sp>
       <p:sp>
         <p:nvSpPr>
-          <p:cNvPr id="33" name="TextBox 32"/>
+          <p:cNvPr id="29" name="TextBox 28"/>
           <p:cNvSpPr txBox="1"/>
           <p:nvPr/>
         </p:nvSpPr>
@@ -8193,7 +7719,7 @@
       </p:sp>
       <p:sp>
         <p:nvSpPr>
-          <p:cNvPr id="34" name="Oval 33"/>
+          <p:cNvPr id="30" name="Oval 29"/>
           <p:cNvSpPr/>
           <p:nvPr/>
         </p:nvSpPr>
@@ -8238,7 +7764,7 @@
       </p:sp>
       <p:sp>
         <p:nvSpPr>
-          <p:cNvPr id="35" name="TextBox 34"/>
+          <p:cNvPr id="31" name="TextBox 30"/>
           <p:cNvSpPr txBox="1"/>
           <p:nvPr/>
         </p:nvSpPr>
@@ -8272,7 +7798,7 @@
       </p:sp>
       <p:sp>
         <p:nvSpPr>
-          <p:cNvPr id="36" name="TextBox 35"/>
+          <p:cNvPr id="32" name="TextBox 31"/>
           <p:cNvSpPr txBox="1"/>
           <p:nvPr/>
         </p:nvSpPr>
@@ -8306,7 +7832,7 @@
       </p:sp>
       <p:sp>
         <p:nvSpPr>
-          <p:cNvPr id="37" name="Rectangle 36"/>
+          <p:cNvPr id="33" name="Rectangle 32"/>
           <p:cNvSpPr/>
           <p:nvPr/>
         </p:nvSpPr>
@@ -8349,7 +7875,7 @@
       </p:sp>
       <p:sp>
         <p:nvSpPr>
-          <p:cNvPr id="38" name="TextBox 37"/>
+          <p:cNvPr id="34" name="TextBox 33"/>
           <p:cNvSpPr txBox="1"/>
           <p:nvPr/>
         </p:nvSpPr>
@@ -8468,7 +7994,7 @@
                                 <p:cBhvr>
                                   <p:cTn id="6" dur="450" fill="hold"/>
                                   <p:tgtEl>
-                                    <p:spTgt spid="19"/>
+                                    <p:spTgt spid="15"/>
                                   </p:tgtEl>
                                 </p:cBhvr>
                               </p:animEffect>
@@ -8485,7 +8011,7 @@
                                 <p:cBhvr>
                                   <p:cTn id="8" dur="450" fill="hold"/>
                                   <p:tgtEl>
-                                    <p:spTgt spid="29"/>
+                                    <p:spTgt spid="25"/>
                                   </p:tgtEl>
                                 </p:cBhvr>
                               </p:animEffect>
@@ -8637,165 +8163,7 @@
       </p:sp>
       <p:sp>
         <p:nvSpPr>
-          <p:cNvPr id="5" name="Oval 4"/>
-          <p:cNvSpPr/>
-          <p:nvPr/>
-        </p:nvSpPr>
-        <p:spPr>
-          <a:xfrm>
-            <a:off x="10618927" y="182880"/>
-            <a:ext cx="1188720" cy="1188720"/>
-          </a:xfrm>
-          <a:prstGeom prst="ellipse">
-            <a:avLst/>
-          </a:prstGeom>
-          <a:solidFill>
-            <a:srgbClr val="2FDFE5"/>
-          </a:solidFill>
-          <a:ln>
-            <a:noFill/>
-          </a:ln>
-        </p:spPr>
-        <p:style>
-          <a:lnRef idx="1">
-            <a:schemeClr val="accent1"/>
-          </a:lnRef>
-          <a:fillRef idx="3">
-            <a:schemeClr val="accent1"/>
-          </a:fillRef>
-          <a:effectRef idx="2">
-            <a:schemeClr val="accent1"/>
-          </a:effectRef>
-          <a:fontRef idx="minor">
-            <a:schemeClr val="lt1"/>
-          </a:fontRef>
-        </p:style>
-        <p:txBody>
-          <a:bodyPr rtlCol="0" anchor="ctr"/>
-          <a:lstStyle/>
-          <a:p>
-            <a:pPr algn="ctr"/>
-          </a:p>
-        </p:txBody>
-      </p:sp>
-      <p:sp>
-        <p:nvSpPr>
-          <p:cNvPr id="6" name="Oval 5"/>
-          <p:cNvSpPr/>
-          <p:nvPr/>
-        </p:nvSpPr>
-        <p:spPr>
-          <a:xfrm>
-            <a:off x="10826953" y="390906"/>
-            <a:ext cx="772668" cy="772668"/>
-          </a:xfrm>
-          <a:prstGeom prst="ellipse">
-            <a:avLst/>
-          </a:prstGeom>
-          <a:solidFill>
-            <a:srgbClr val="0A1638"/>
-          </a:solidFill>
-          <a:ln>
-            <a:noFill/>
-          </a:ln>
-        </p:spPr>
-        <p:style>
-          <a:lnRef idx="1">
-            <a:schemeClr val="accent1"/>
-          </a:lnRef>
-          <a:fillRef idx="3">
-            <a:schemeClr val="accent1"/>
-          </a:fillRef>
-          <a:effectRef idx="2">
-            <a:schemeClr val="accent1"/>
-          </a:effectRef>
-          <a:fontRef idx="minor">
-            <a:schemeClr val="lt1"/>
-          </a:fontRef>
-        </p:style>
-        <p:txBody>
-          <a:bodyPr rtlCol="0" anchor="ctr"/>
-          <a:lstStyle/>
-          <a:p>
-            <a:pPr algn="ctr"/>
-          </a:p>
-        </p:txBody>
-      </p:sp>
-      <p:sp>
-        <p:nvSpPr>
-          <p:cNvPr id="7" name="TextBox 6"/>
-          <p:cNvSpPr txBox="1"/>
-          <p:nvPr/>
-        </p:nvSpPr>
-        <p:spPr>
-          <a:xfrm>
-            <a:off x="10618927" y="182880"/>
-            <a:ext cx="1188720" cy="1188720"/>
-          </a:xfrm>
-          <a:prstGeom prst="rect">
-            <a:avLst/>
-          </a:prstGeom>
-          <a:noFill/>
-        </p:spPr>
-        <p:txBody lIns="0" tIns="0" rIns="0" bIns="0">
-          <a:bodyPr wrap="none">
-            <a:spAutoFit/>
-          </a:bodyPr>
-          <a:lstStyle/>
-          <a:p>
-            <a:pPr algn="ctr">
-              <a:spcBef>
-                <a:spcPts val="2300"/>
-              </a:spcBef>
-            </a:pPr>
-            <a:r>
-              <a:rPr sz="2200" b="1">
-                <a:solidFill>
-                  <a:srgbClr val="2FDFE5"/>
-                </a:solidFill>
-              </a:rPr>
-              <a:t>4</a:t>
-            </a:r>
-          </a:p>
-        </p:txBody>
-      </p:sp>
-      <p:sp>
-        <p:nvSpPr>
-          <p:cNvPr id="8" name="TextBox 7"/>
-          <p:cNvSpPr txBox="1"/>
-          <p:nvPr/>
-        </p:nvSpPr>
-        <p:spPr>
-          <a:xfrm>
-            <a:off x="10618927" y="777240"/>
-            <a:ext cx="1188720" cy="594360"/>
-          </a:xfrm>
-          <a:prstGeom prst="rect">
-            <a:avLst/>
-          </a:prstGeom>
-          <a:noFill/>
-        </p:spPr>
-        <p:txBody lIns="0" tIns="0" rIns="0" bIns="0">
-          <a:bodyPr wrap="none">
-            <a:spAutoFit/>
-          </a:bodyPr>
-          <a:lstStyle/>
-          <a:p>
-            <a:pPr algn="ctr"/>
-            <a:r>
-              <a:rPr sz="950">
-                <a:solidFill>
-                  <a:srgbClr val="FFFFFF"/>
-                </a:solidFill>
-              </a:rPr>
-              <a:t>REPORTING</a:t>
-            </a:r>
-          </a:p>
-        </p:txBody>
-      </p:sp>
-      <p:sp>
-        <p:nvSpPr>
-          <p:cNvPr id="9" name="Rectangle 8"/>
+          <p:cNvPr id="5" name="Rectangle 4"/>
           <p:cNvSpPr/>
           <p:nvPr/>
         </p:nvSpPr>
@@ -8846,7 +8214,7 @@
       </p:sp>
       <p:sp>
         <p:nvSpPr>
-          <p:cNvPr id="10" name="TextBox 9"/>
+          <p:cNvPr id="6" name="TextBox 5"/>
           <p:cNvSpPr txBox="1"/>
           <p:nvPr/>
         </p:nvSpPr>
@@ -8888,7 +8256,7 @@
       </p:sp>
       <p:sp>
         <p:nvSpPr>
-          <p:cNvPr id="11" name="Rectangle 10"/>
+          <p:cNvPr id="7" name="Rectangle 6"/>
           <p:cNvSpPr/>
           <p:nvPr/>
         </p:nvSpPr>
@@ -8931,7 +8299,7 @@
       </p:sp>
       <p:sp>
         <p:nvSpPr>
-          <p:cNvPr id="12" name="TextBox 11"/>
+          <p:cNvPr id="8" name="TextBox 7"/>
           <p:cNvSpPr txBox="1"/>
           <p:nvPr/>
         </p:nvSpPr>
@@ -8965,7 +8333,7 @@
       </p:sp>
       <p:pic>
         <p:nvPicPr>
-          <p:cNvPr id="13" name="Picture 12" descr="logo_horiz.png"/>
+          <p:cNvPr id="9" name="Picture 8" descr="logo_horiz.png"/>
           <p:cNvPicPr>
             <a:picLocks noChangeAspect="1"/>
           </p:cNvPicPr>
@@ -8989,7 +8357,7 @@
       </p:pic>
       <p:sp>
         <p:nvSpPr>
-          <p:cNvPr id="14" name="Oval 13"/>
+          <p:cNvPr id="10" name="Oval 9"/>
           <p:cNvSpPr/>
           <p:nvPr/>
         </p:nvSpPr>
@@ -9032,7 +8400,7 @@
       </p:sp>
       <p:sp>
         <p:nvSpPr>
-          <p:cNvPr id="15" name="Oval 14"/>
+          <p:cNvPr id="11" name="Oval 10"/>
           <p:cNvSpPr/>
           <p:nvPr/>
         </p:nvSpPr>
@@ -9075,7 +8443,7 @@
       </p:sp>
       <p:sp>
         <p:nvSpPr>
-          <p:cNvPr id="16" name="Oval 15"/>
+          <p:cNvPr id="12" name="Oval 11"/>
           <p:cNvSpPr/>
           <p:nvPr/>
         </p:nvSpPr>
@@ -9118,7 +8486,7 @@
       </p:sp>
       <p:sp>
         <p:nvSpPr>
-          <p:cNvPr id="17" name="Oval 16"/>
+          <p:cNvPr id="13" name="Oval 12"/>
           <p:cNvSpPr/>
           <p:nvPr/>
         </p:nvSpPr>
@@ -9161,7 +8529,7 @@
       </p:sp>
       <p:sp>
         <p:nvSpPr>
-          <p:cNvPr id="18" name="Oval 17"/>
+          <p:cNvPr id="14" name="Oval 13"/>
           <p:cNvSpPr/>
           <p:nvPr/>
         </p:nvSpPr>
@@ -9204,7 +8572,7 @@
       </p:sp>
       <p:sp>
         <p:nvSpPr>
-          <p:cNvPr id="19" name="Rectangle 18"/>
+          <p:cNvPr id="15" name="Rectangle 14"/>
           <p:cNvSpPr/>
           <p:nvPr/>
         </p:nvSpPr>
@@ -9249,7 +8617,7 @@
       </p:sp>
       <p:sp>
         <p:nvSpPr>
-          <p:cNvPr id="20" name="Rectangle 19"/>
+          <p:cNvPr id="16" name="Rectangle 15"/>
           <p:cNvSpPr/>
           <p:nvPr/>
         </p:nvSpPr>
@@ -9292,7 +8660,7 @@
       </p:sp>
       <p:sp>
         <p:nvSpPr>
-          <p:cNvPr id="21" name="Oval 20"/>
+          <p:cNvPr id="17" name="Oval 16"/>
           <p:cNvSpPr/>
           <p:nvPr/>
         </p:nvSpPr>
@@ -9335,7 +8703,7 @@
       </p:sp>
       <p:sp>
         <p:nvSpPr>
-          <p:cNvPr id="22" name="Oval 21"/>
+          <p:cNvPr id="18" name="Oval 17"/>
           <p:cNvSpPr/>
           <p:nvPr/>
         </p:nvSpPr>
@@ -9378,7 +8746,7 @@
       </p:sp>
       <p:sp>
         <p:nvSpPr>
-          <p:cNvPr id="23" name="TextBox 22"/>
+          <p:cNvPr id="19" name="TextBox 18"/>
           <p:cNvSpPr txBox="1"/>
           <p:nvPr/>
         </p:nvSpPr>
@@ -9416,7 +8784,7 @@
       </p:sp>
       <p:sp>
         <p:nvSpPr>
-          <p:cNvPr id="24" name="Oval 23"/>
+          <p:cNvPr id="20" name="Oval 19"/>
           <p:cNvSpPr/>
           <p:nvPr/>
         </p:nvSpPr>
@@ -9461,7 +8829,7 @@
       </p:sp>
       <p:sp>
         <p:nvSpPr>
-          <p:cNvPr id="25" name="TextBox 24"/>
+          <p:cNvPr id="21" name="TextBox 20"/>
           <p:cNvSpPr txBox="1"/>
           <p:nvPr/>
         </p:nvSpPr>
@@ -9495,7 +8863,7 @@
       </p:sp>
       <p:sp>
         <p:nvSpPr>
-          <p:cNvPr id="26" name="TextBox 25"/>
+          <p:cNvPr id="22" name="TextBox 21"/>
           <p:cNvSpPr txBox="1"/>
           <p:nvPr/>
         </p:nvSpPr>
@@ -9529,7 +8897,7 @@
       </p:sp>
       <p:sp>
         <p:nvSpPr>
-          <p:cNvPr id="27" name="Rectangle 26"/>
+          <p:cNvPr id="23" name="Rectangle 22"/>
           <p:cNvSpPr/>
           <p:nvPr/>
         </p:nvSpPr>
@@ -9572,7 +8940,7 @@
       </p:sp>
       <p:sp>
         <p:nvSpPr>
-          <p:cNvPr id="28" name="TextBox 27"/>
+          <p:cNvPr id="24" name="TextBox 23"/>
           <p:cNvSpPr txBox="1"/>
           <p:nvPr/>
         </p:nvSpPr>
@@ -9664,7 +9032,7 @@
       </p:sp>
       <p:sp>
         <p:nvSpPr>
-          <p:cNvPr id="29" name="Rectangle 28"/>
+          <p:cNvPr id="25" name="Rectangle 24"/>
           <p:cNvSpPr/>
           <p:nvPr/>
         </p:nvSpPr>
@@ -9709,7 +9077,7 @@
       </p:sp>
       <p:sp>
         <p:nvSpPr>
-          <p:cNvPr id="30" name="Rectangle 29"/>
+          <p:cNvPr id="26" name="Rectangle 25"/>
           <p:cNvSpPr/>
           <p:nvPr/>
         </p:nvSpPr>
@@ -9752,7 +9120,7 @@
       </p:sp>
       <p:sp>
         <p:nvSpPr>
-          <p:cNvPr id="31" name="Oval 30"/>
+          <p:cNvPr id="27" name="Oval 26"/>
           <p:cNvSpPr/>
           <p:nvPr/>
         </p:nvSpPr>
@@ -9795,7 +9163,7 @@
       </p:sp>
       <p:sp>
         <p:nvSpPr>
-          <p:cNvPr id="32" name="Oval 31"/>
+          <p:cNvPr id="28" name="Oval 27"/>
           <p:cNvSpPr/>
           <p:nvPr/>
         </p:nvSpPr>
@@ -9838,7 +9206,7 @@
       </p:sp>
       <p:sp>
         <p:nvSpPr>
-          <p:cNvPr id="33" name="TextBox 32"/>
+          <p:cNvPr id="29" name="TextBox 28"/>
           <p:cNvSpPr txBox="1"/>
           <p:nvPr/>
         </p:nvSpPr>
@@ -9876,7 +9244,7 @@
       </p:sp>
       <p:sp>
         <p:nvSpPr>
-          <p:cNvPr id="34" name="Oval 33"/>
+          <p:cNvPr id="30" name="Oval 29"/>
           <p:cNvSpPr/>
           <p:nvPr/>
         </p:nvSpPr>
@@ -9921,7 +9289,7 @@
       </p:sp>
       <p:sp>
         <p:nvSpPr>
-          <p:cNvPr id="35" name="TextBox 34"/>
+          <p:cNvPr id="31" name="TextBox 30"/>
           <p:cNvSpPr txBox="1"/>
           <p:nvPr/>
         </p:nvSpPr>
@@ -9955,7 +9323,7 @@
       </p:sp>
       <p:sp>
         <p:nvSpPr>
-          <p:cNvPr id="36" name="TextBox 35"/>
+          <p:cNvPr id="32" name="TextBox 31"/>
           <p:cNvSpPr txBox="1"/>
           <p:nvPr/>
         </p:nvSpPr>
@@ -9989,7 +9357,7 @@
       </p:sp>
       <p:sp>
         <p:nvSpPr>
-          <p:cNvPr id="37" name="Rectangle 36"/>
+          <p:cNvPr id="33" name="Rectangle 32"/>
           <p:cNvSpPr/>
           <p:nvPr/>
         </p:nvSpPr>
@@ -10032,7 +9400,7 @@
       </p:sp>
       <p:sp>
         <p:nvSpPr>
-          <p:cNvPr id="38" name="TextBox 37"/>
+          <p:cNvPr id="34" name="TextBox 33"/>
           <p:cNvSpPr txBox="1"/>
           <p:nvPr/>
         </p:nvSpPr>
@@ -10151,7 +9519,7 @@
                                 <p:cBhvr>
                                   <p:cTn id="6" dur="450" fill="hold"/>
                                   <p:tgtEl>
-                                    <p:spTgt spid="19"/>
+                                    <p:spTgt spid="15"/>
                                   </p:tgtEl>
                                 </p:cBhvr>
                               </p:animEffect>
@@ -10168,7 +9536,7 @@
                                 <p:cBhvr>
                                   <p:cTn id="8" dur="450" fill="hold"/>
                                   <p:tgtEl>
-                                    <p:spTgt spid="29"/>
+                                    <p:spTgt spid="25"/>
                                   </p:tgtEl>
                                 </p:cBhvr>
                               </p:animEffect>
@@ -10320,165 +9688,7 @@
       </p:sp>
       <p:sp>
         <p:nvSpPr>
-          <p:cNvPr id="5" name="Oval 4"/>
-          <p:cNvSpPr/>
-          <p:nvPr/>
-        </p:nvSpPr>
-        <p:spPr>
-          <a:xfrm>
-            <a:off x="10618927" y="182880"/>
-            <a:ext cx="1188720" cy="1188720"/>
-          </a:xfrm>
-          <a:prstGeom prst="ellipse">
-            <a:avLst/>
-          </a:prstGeom>
-          <a:solidFill>
-            <a:srgbClr val="2FDFE5"/>
-          </a:solidFill>
-          <a:ln>
-            <a:noFill/>
-          </a:ln>
-        </p:spPr>
-        <p:style>
-          <a:lnRef idx="1">
-            <a:schemeClr val="accent1"/>
-          </a:lnRef>
-          <a:fillRef idx="3">
-            <a:schemeClr val="accent1"/>
-          </a:fillRef>
-          <a:effectRef idx="2">
-            <a:schemeClr val="accent1"/>
-          </a:effectRef>
-          <a:fontRef idx="minor">
-            <a:schemeClr val="lt1"/>
-          </a:fontRef>
-        </p:style>
-        <p:txBody>
-          <a:bodyPr rtlCol="0" anchor="ctr"/>
-          <a:lstStyle/>
-          <a:p>
-            <a:pPr algn="ctr"/>
-          </a:p>
-        </p:txBody>
-      </p:sp>
-      <p:sp>
-        <p:nvSpPr>
-          <p:cNvPr id="6" name="Oval 5"/>
-          <p:cNvSpPr/>
-          <p:nvPr/>
-        </p:nvSpPr>
-        <p:spPr>
-          <a:xfrm>
-            <a:off x="10826953" y="390906"/>
-            <a:ext cx="772668" cy="772668"/>
-          </a:xfrm>
-          <a:prstGeom prst="ellipse">
-            <a:avLst/>
-          </a:prstGeom>
-          <a:solidFill>
-            <a:srgbClr val="0A1638"/>
-          </a:solidFill>
-          <a:ln>
-            <a:noFill/>
-          </a:ln>
-        </p:spPr>
-        <p:style>
-          <a:lnRef idx="1">
-            <a:schemeClr val="accent1"/>
-          </a:lnRef>
-          <a:fillRef idx="3">
-            <a:schemeClr val="accent1"/>
-          </a:fillRef>
-          <a:effectRef idx="2">
-            <a:schemeClr val="accent1"/>
-          </a:effectRef>
-          <a:fontRef idx="minor">
-            <a:schemeClr val="lt1"/>
-          </a:fontRef>
-        </p:style>
-        <p:txBody>
-          <a:bodyPr rtlCol="0" anchor="ctr"/>
-          <a:lstStyle/>
-          <a:p>
-            <a:pPr algn="ctr"/>
-          </a:p>
-        </p:txBody>
-      </p:sp>
-      <p:sp>
-        <p:nvSpPr>
-          <p:cNvPr id="7" name="TextBox 6"/>
-          <p:cNvSpPr txBox="1"/>
-          <p:nvPr/>
-        </p:nvSpPr>
-        <p:spPr>
-          <a:xfrm>
-            <a:off x="10618927" y="182880"/>
-            <a:ext cx="1188720" cy="1188720"/>
-          </a:xfrm>
-          <a:prstGeom prst="rect">
-            <a:avLst/>
-          </a:prstGeom>
-          <a:noFill/>
-        </p:spPr>
-        <p:txBody lIns="0" tIns="0" rIns="0" bIns="0">
-          <a:bodyPr wrap="none">
-            <a:spAutoFit/>
-          </a:bodyPr>
-          <a:lstStyle/>
-          <a:p>
-            <a:pPr algn="ctr">
-              <a:spcBef>
-                <a:spcPts val="2300"/>
-              </a:spcBef>
-            </a:pPr>
-            <a:r>
-              <a:rPr sz="2200" b="1">
-                <a:solidFill>
-                  <a:srgbClr val="2FDFE5"/>
-                </a:solidFill>
-              </a:rPr>
-              <a:t>5</a:t>
-            </a:r>
-          </a:p>
-        </p:txBody>
-      </p:sp>
-      <p:sp>
-        <p:nvSpPr>
-          <p:cNvPr id="8" name="TextBox 7"/>
-          <p:cNvSpPr txBox="1"/>
-          <p:nvPr/>
-        </p:nvSpPr>
-        <p:spPr>
-          <a:xfrm>
-            <a:off x="10618927" y="777240"/>
-            <a:ext cx="1188720" cy="594360"/>
-          </a:xfrm>
-          <a:prstGeom prst="rect">
-            <a:avLst/>
-          </a:prstGeom>
-          <a:noFill/>
-        </p:spPr>
-        <p:txBody lIns="0" tIns="0" rIns="0" bIns="0">
-          <a:bodyPr wrap="none">
-            <a:spAutoFit/>
-          </a:bodyPr>
-          <a:lstStyle/>
-          <a:p>
-            <a:pPr algn="ctr"/>
-            <a:r>
-              <a:rPr sz="950">
-                <a:solidFill>
-                  <a:srgbClr val="FFFFFF"/>
-                </a:solidFill>
-              </a:rPr>
-              <a:t>ADICIONALES</a:t>
-            </a:r>
-          </a:p>
-        </p:txBody>
-      </p:sp>
-      <p:sp>
-        <p:nvSpPr>
-          <p:cNvPr id="9" name="Rectangle 8"/>
+          <p:cNvPr id="5" name="Rectangle 4"/>
           <p:cNvSpPr/>
           <p:nvPr/>
         </p:nvSpPr>
@@ -10529,7 +9739,7 @@
       </p:sp>
       <p:sp>
         <p:nvSpPr>
-          <p:cNvPr id="10" name="TextBox 9"/>
+          <p:cNvPr id="6" name="TextBox 5"/>
           <p:cNvSpPr txBox="1"/>
           <p:nvPr/>
         </p:nvSpPr>
@@ -10571,7 +9781,7 @@
       </p:sp>
       <p:sp>
         <p:nvSpPr>
-          <p:cNvPr id="11" name="Rectangle 10"/>
+          <p:cNvPr id="7" name="Rectangle 6"/>
           <p:cNvSpPr/>
           <p:nvPr/>
         </p:nvSpPr>
@@ -10614,7 +9824,7 @@
       </p:sp>
       <p:pic>
         <p:nvPicPr>
-          <p:cNvPr id="12" name="Picture 11" descr="logo_horiz.png"/>
+          <p:cNvPr id="8" name="Picture 7" descr="logo_horiz.png"/>
           <p:cNvPicPr>
             <a:picLocks noChangeAspect="1"/>
           </p:cNvPicPr>
@@ -10638,7 +9848,7 @@
       </p:pic>
       <p:sp>
         <p:nvSpPr>
-          <p:cNvPr id="13" name="Oval 12"/>
+          <p:cNvPr id="9" name="Oval 8"/>
           <p:cNvSpPr/>
           <p:nvPr/>
         </p:nvSpPr>
@@ -10681,7 +9891,7 @@
       </p:sp>
       <p:sp>
         <p:nvSpPr>
-          <p:cNvPr id="14" name="Oval 13"/>
+          <p:cNvPr id="10" name="Oval 9"/>
           <p:cNvSpPr/>
           <p:nvPr/>
         </p:nvSpPr>
@@ -10724,7 +9934,7 @@
       </p:sp>
       <p:sp>
         <p:nvSpPr>
-          <p:cNvPr id="15" name="Oval 14"/>
+          <p:cNvPr id="11" name="Oval 10"/>
           <p:cNvSpPr/>
           <p:nvPr/>
         </p:nvSpPr>
@@ -10767,7 +9977,7 @@
       </p:sp>
       <p:sp>
         <p:nvSpPr>
-          <p:cNvPr id="16" name="Oval 15"/>
+          <p:cNvPr id="12" name="Oval 11"/>
           <p:cNvSpPr/>
           <p:nvPr/>
         </p:nvSpPr>
@@ -10810,7 +10020,7 @@
       </p:sp>
       <p:sp>
         <p:nvSpPr>
-          <p:cNvPr id="17" name="Oval 16"/>
+          <p:cNvPr id="13" name="Oval 12"/>
           <p:cNvSpPr/>
           <p:nvPr/>
         </p:nvSpPr>
@@ -10853,7 +10063,7 @@
       </p:sp>
       <p:sp>
         <p:nvSpPr>
-          <p:cNvPr id="18" name="Rectangle 17"/>
+          <p:cNvPr id="14" name="Rectangle 13"/>
           <p:cNvSpPr/>
           <p:nvPr/>
         </p:nvSpPr>
@@ -10898,7 +10108,7 @@
       </p:sp>
       <p:sp>
         <p:nvSpPr>
-          <p:cNvPr id="19" name="Rectangle 18"/>
+          <p:cNvPr id="15" name="Rectangle 14"/>
           <p:cNvSpPr/>
           <p:nvPr/>
         </p:nvSpPr>
@@ -10941,7 +10151,7 @@
       </p:sp>
       <p:sp>
         <p:nvSpPr>
-          <p:cNvPr id="20" name="Oval 19"/>
+          <p:cNvPr id="16" name="Oval 15"/>
           <p:cNvSpPr/>
           <p:nvPr/>
         </p:nvSpPr>
@@ -10984,7 +10194,7 @@
       </p:sp>
       <p:sp>
         <p:nvSpPr>
-          <p:cNvPr id="21" name="Oval 20"/>
+          <p:cNvPr id="17" name="Oval 16"/>
           <p:cNvSpPr/>
           <p:nvPr/>
         </p:nvSpPr>
@@ -11027,7 +10237,7 @@
       </p:sp>
       <p:sp>
         <p:nvSpPr>
-          <p:cNvPr id="22" name="TextBox 21"/>
+          <p:cNvPr id="18" name="TextBox 17"/>
           <p:cNvSpPr txBox="1"/>
           <p:nvPr/>
         </p:nvSpPr>
@@ -11065,7 +10275,7 @@
       </p:sp>
       <p:sp>
         <p:nvSpPr>
-          <p:cNvPr id="23" name="TextBox 22"/>
+          <p:cNvPr id="19" name="TextBox 18"/>
           <p:cNvSpPr txBox="1"/>
           <p:nvPr/>
         </p:nvSpPr>
@@ -11099,7 +10309,7 @@
       </p:sp>
       <p:sp>
         <p:nvSpPr>
-          <p:cNvPr id="24" name="Rectangle 23"/>
+          <p:cNvPr id="20" name="Rectangle 19"/>
           <p:cNvSpPr/>
           <p:nvPr/>
         </p:nvSpPr>
@@ -11142,7 +10352,7 @@
       </p:sp>
       <p:sp>
         <p:nvSpPr>
-          <p:cNvPr id="25" name="TextBox 24"/>
+          <p:cNvPr id="21" name="TextBox 20"/>
           <p:cNvSpPr txBox="1"/>
           <p:nvPr/>
         </p:nvSpPr>
@@ -11176,7 +10386,7 @@
       </p:sp>
       <p:sp>
         <p:nvSpPr>
-          <p:cNvPr id="26" name="Rectangle 25"/>
+          <p:cNvPr id="22" name="Rectangle 21"/>
           <p:cNvSpPr/>
           <p:nvPr/>
         </p:nvSpPr>
@@ -11221,7 +10431,7 @@
       </p:sp>
       <p:sp>
         <p:nvSpPr>
-          <p:cNvPr id="27" name="Rectangle 26"/>
+          <p:cNvPr id="23" name="Rectangle 22"/>
           <p:cNvSpPr/>
           <p:nvPr/>
         </p:nvSpPr>
@@ -11264,7 +10474,7 @@
       </p:sp>
       <p:sp>
         <p:nvSpPr>
-          <p:cNvPr id="28" name="Oval 27"/>
+          <p:cNvPr id="24" name="Oval 23"/>
           <p:cNvSpPr/>
           <p:nvPr/>
         </p:nvSpPr>
@@ -11307,7 +10517,7 @@
       </p:sp>
       <p:sp>
         <p:nvSpPr>
-          <p:cNvPr id="29" name="Oval 28"/>
+          <p:cNvPr id="25" name="Oval 24"/>
           <p:cNvSpPr/>
           <p:nvPr/>
         </p:nvSpPr>
@@ -11350,7 +10560,7 @@
       </p:sp>
       <p:sp>
         <p:nvSpPr>
-          <p:cNvPr id="30" name="TextBox 29"/>
+          <p:cNvPr id="26" name="TextBox 25"/>
           <p:cNvSpPr txBox="1"/>
           <p:nvPr/>
         </p:nvSpPr>
@@ -11388,7 +10598,7 @@
       </p:sp>
       <p:sp>
         <p:nvSpPr>
-          <p:cNvPr id="31" name="TextBox 30"/>
+          <p:cNvPr id="27" name="TextBox 26"/>
           <p:cNvSpPr txBox="1"/>
           <p:nvPr/>
         </p:nvSpPr>
@@ -11422,7 +10632,7 @@
       </p:sp>
       <p:sp>
         <p:nvSpPr>
-          <p:cNvPr id="32" name="Rectangle 31"/>
+          <p:cNvPr id="28" name="Rectangle 27"/>
           <p:cNvSpPr/>
           <p:nvPr/>
         </p:nvSpPr>
@@ -11465,7 +10675,7 @@
       </p:sp>
       <p:sp>
         <p:nvSpPr>
-          <p:cNvPr id="33" name="TextBox 32"/>
+          <p:cNvPr id="29" name="TextBox 28"/>
           <p:cNvSpPr txBox="1"/>
           <p:nvPr/>
         </p:nvSpPr>
@@ -11499,7 +10709,7 @@
       </p:sp>
       <p:sp>
         <p:nvSpPr>
-          <p:cNvPr id="34" name="Rectangle 33"/>
+          <p:cNvPr id="30" name="Rectangle 29"/>
           <p:cNvSpPr/>
           <p:nvPr/>
         </p:nvSpPr>
@@ -11544,7 +10754,7 @@
       </p:sp>
       <p:sp>
         <p:nvSpPr>
-          <p:cNvPr id="35" name="Rectangle 34"/>
+          <p:cNvPr id="31" name="Rectangle 30"/>
           <p:cNvSpPr/>
           <p:nvPr/>
         </p:nvSpPr>
@@ -11587,7 +10797,7 @@
       </p:sp>
       <p:sp>
         <p:nvSpPr>
-          <p:cNvPr id="36" name="Oval 35"/>
+          <p:cNvPr id="32" name="Oval 31"/>
           <p:cNvSpPr/>
           <p:nvPr/>
         </p:nvSpPr>
@@ -11630,7 +10840,7 @@
       </p:sp>
       <p:sp>
         <p:nvSpPr>
-          <p:cNvPr id="37" name="Oval 36"/>
+          <p:cNvPr id="33" name="Oval 32"/>
           <p:cNvSpPr/>
           <p:nvPr/>
         </p:nvSpPr>
@@ -11673,7 +10883,7 @@
       </p:sp>
       <p:sp>
         <p:nvSpPr>
-          <p:cNvPr id="38" name="TextBox 37"/>
+          <p:cNvPr id="34" name="TextBox 33"/>
           <p:cNvSpPr txBox="1"/>
           <p:nvPr/>
         </p:nvSpPr>
@@ -11711,7 +10921,7 @@
       </p:sp>
       <p:sp>
         <p:nvSpPr>
-          <p:cNvPr id="39" name="TextBox 38"/>
+          <p:cNvPr id="35" name="TextBox 34"/>
           <p:cNvSpPr txBox="1"/>
           <p:nvPr/>
         </p:nvSpPr>
@@ -11745,7 +10955,7 @@
       </p:sp>
       <p:sp>
         <p:nvSpPr>
-          <p:cNvPr id="40" name="Rectangle 39"/>
+          <p:cNvPr id="36" name="Rectangle 35"/>
           <p:cNvSpPr/>
           <p:nvPr/>
         </p:nvSpPr>
@@ -11788,7 +10998,7 @@
       </p:sp>
       <p:sp>
         <p:nvSpPr>
-          <p:cNvPr id="41" name="TextBox 40"/>
+          <p:cNvPr id="37" name="TextBox 36"/>
           <p:cNvSpPr txBox="1"/>
           <p:nvPr/>
         </p:nvSpPr>
@@ -11822,7 +11032,7 @@
       </p:sp>
       <p:sp>
         <p:nvSpPr>
-          <p:cNvPr id="42" name="Rectangle 41"/>
+          <p:cNvPr id="38" name="Rectangle 37"/>
           <p:cNvSpPr/>
           <p:nvPr/>
         </p:nvSpPr>
@@ -11867,7 +11077,7 @@
       </p:sp>
       <p:sp>
         <p:nvSpPr>
-          <p:cNvPr id="43" name="Rectangle 42"/>
+          <p:cNvPr id="39" name="Rectangle 38"/>
           <p:cNvSpPr/>
           <p:nvPr/>
         </p:nvSpPr>
@@ -11910,7 +11120,7 @@
       </p:sp>
       <p:sp>
         <p:nvSpPr>
-          <p:cNvPr id="44" name="Oval 43"/>
+          <p:cNvPr id="40" name="Oval 39"/>
           <p:cNvSpPr/>
           <p:nvPr/>
         </p:nvSpPr>
@@ -11953,7 +11163,7 @@
       </p:sp>
       <p:sp>
         <p:nvSpPr>
-          <p:cNvPr id="45" name="Oval 44"/>
+          <p:cNvPr id="41" name="Oval 40"/>
           <p:cNvSpPr/>
           <p:nvPr/>
         </p:nvSpPr>
@@ -11996,7 +11206,7 @@
       </p:sp>
       <p:sp>
         <p:nvSpPr>
-          <p:cNvPr id="46" name="TextBox 45"/>
+          <p:cNvPr id="42" name="TextBox 41"/>
           <p:cNvSpPr txBox="1"/>
           <p:nvPr/>
         </p:nvSpPr>
@@ -12034,7 +11244,7 @@
       </p:sp>
       <p:sp>
         <p:nvSpPr>
-          <p:cNvPr id="47" name="TextBox 46"/>
+          <p:cNvPr id="43" name="TextBox 42"/>
           <p:cNvSpPr txBox="1"/>
           <p:nvPr/>
         </p:nvSpPr>
@@ -12068,7 +11278,7 @@
       </p:sp>
       <p:sp>
         <p:nvSpPr>
-          <p:cNvPr id="48" name="Rectangle 47"/>
+          <p:cNvPr id="44" name="Rectangle 43"/>
           <p:cNvSpPr/>
           <p:nvPr/>
         </p:nvSpPr>
@@ -12111,7 +11321,7 @@
       </p:sp>
       <p:sp>
         <p:nvSpPr>
-          <p:cNvPr id="49" name="TextBox 48"/>
+          <p:cNvPr id="45" name="TextBox 44"/>
           <p:cNvSpPr txBox="1"/>
           <p:nvPr/>
         </p:nvSpPr>
@@ -12172,7 +11382,7 @@
                                 <p:cBhvr>
                                   <p:cTn id="6" dur="450" fill="hold"/>
                                   <p:tgtEl>
-                                    <p:spTgt spid="18"/>
+                                    <p:spTgt spid="14"/>
                                   </p:tgtEl>
                                 </p:cBhvr>
                               </p:animEffect>
@@ -12189,7 +11399,7 @@
                                 <p:cBhvr>
                                   <p:cTn id="8" dur="450" fill="hold"/>
                                   <p:tgtEl>
-                                    <p:spTgt spid="26"/>
+                                    <p:spTgt spid="22"/>
                                   </p:tgtEl>
                                 </p:cBhvr>
                               </p:animEffect>
@@ -12206,7 +11416,7 @@
                                 <p:cBhvr>
                                   <p:cTn id="10" dur="450" fill="hold"/>
                                   <p:tgtEl>
-                                    <p:spTgt spid="34"/>
+                                    <p:spTgt spid="30"/>
                                   </p:tgtEl>
                                 </p:cBhvr>
                               </p:animEffect>
@@ -12223,7 +11433,7 @@
                                 <p:cBhvr>
                                   <p:cTn id="12" dur="450" fill="hold"/>
                                   <p:tgtEl>
-                                    <p:spTgt spid="42"/>
+                                    <p:spTgt spid="38"/>
                                   </p:tgtEl>
                                 </p:cBhvr>
                               </p:animEffect>

--- a/sendacredit_propuesta.pptx
+++ b/sendacredit_propuesta.pptx
@@ -3756,248 +3756,9 @@
           </a:p>
         </p:txBody>
       </p:sp>
-      <p:pic>
-        <p:nvPicPr>
-          <p:cNvPr id="9" name="Picture 8" descr="logo_horiz.png"/>
-          <p:cNvPicPr>
-            <a:picLocks noChangeAspect="1"/>
-          </p:cNvPicPr>
-          <p:nvPr/>
-        </p:nvPicPr>
-        <p:blipFill>
-          <a:blip r:embed="rId3"/>
-          <a:stretch>
-            <a:fillRect/>
-          </a:stretch>
-        </p:blipFill>
-        <p:spPr>
-          <a:xfrm>
-            <a:off x="10024567" y="6062197"/>
-            <a:ext cx="1965960" cy="631211"/>
-          </a:xfrm>
-          <a:prstGeom prst="rect">
-            <a:avLst/>
-          </a:prstGeom>
-        </p:spPr>
-      </p:pic>
-      <p:sp>
-        <p:nvSpPr>
-          <p:cNvPr id="10" name="Oval 9"/>
-          <p:cNvSpPr/>
-          <p:nvPr/>
-        </p:nvSpPr>
-        <p:spPr>
-          <a:xfrm>
-            <a:off x="5554065" y="6510528"/>
-            <a:ext cx="77724" cy="77724"/>
-          </a:xfrm>
-          <a:prstGeom prst="ellipse">
-            <a:avLst/>
-          </a:prstGeom>
-          <a:solidFill>
-            <a:srgbClr val="2FDFE5"/>
-          </a:solidFill>
-          <a:ln>
-            <a:noFill/>
-          </a:ln>
-        </p:spPr>
-        <p:style>
-          <a:lnRef idx="1">
-            <a:schemeClr val="accent1"/>
-          </a:lnRef>
-          <a:fillRef idx="3">
-            <a:schemeClr val="accent1"/>
-          </a:fillRef>
-          <a:effectRef idx="2">
-            <a:schemeClr val="accent1"/>
-          </a:effectRef>
-          <a:fontRef idx="minor">
-            <a:schemeClr val="lt1"/>
-          </a:fontRef>
-        </p:style>
-        <p:txBody>
-          <a:bodyPr rtlCol="0" anchor="ctr"/>
-          <a:lstStyle/>
-          <a:p>
-            <a:pPr algn="ctr"/>
-          </a:p>
-        </p:txBody>
-      </p:sp>
-      <p:sp>
-        <p:nvSpPr>
-          <p:cNvPr id="11" name="Oval 10"/>
-          <p:cNvSpPr/>
-          <p:nvPr/>
-        </p:nvSpPr>
-        <p:spPr>
-          <a:xfrm>
-            <a:off x="5805525" y="6510528"/>
-            <a:ext cx="77724" cy="77724"/>
-          </a:xfrm>
-          <a:prstGeom prst="ellipse">
-            <a:avLst/>
-          </a:prstGeom>
-          <a:noFill/>
-          <a:ln w="10160">
-            <a:solidFill>
-              <a:srgbClr val="13B9BF"/>
-            </a:solidFill>
-          </a:ln>
-        </p:spPr>
-        <p:style>
-          <a:lnRef idx="1">
-            <a:schemeClr val="accent1"/>
-          </a:lnRef>
-          <a:fillRef idx="3">
-            <a:schemeClr val="accent1"/>
-          </a:fillRef>
-          <a:effectRef idx="2">
-            <a:schemeClr val="accent1"/>
-          </a:effectRef>
-          <a:fontRef idx="minor">
-            <a:schemeClr val="lt1"/>
-          </a:fontRef>
-        </p:style>
-        <p:txBody>
-          <a:bodyPr rtlCol="0" anchor="ctr"/>
-          <a:lstStyle/>
-          <a:p>
-            <a:pPr algn="ctr"/>
-          </a:p>
-        </p:txBody>
-      </p:sp>
-      <p:sp>
-        <p:nvSpPr>
-          <p:cNvPr id="12" name="Oval 11"/>
-          <p:cNvSpPr/>
-          <p:nvPr/>
-        </p:nvSpPr>
-        <p:spPr>
-          <a:xfrm>
-            <a:off x="6056985" y="6510528"/>
-            <a:ext cx="77724" cy="77724"/>
-          </a:xfrm>
-          <a:prstGeom prst="ellipse">
-            <a:avLst/>
-          </a:prstGeom>
-          <a:noFill/>
-          <a:ln w="10160">
-            <a:solidFill>
-              <a:srgbClr val="13B9BF"/>
-            </a:solidFill>
-          </a:ln>
-        </p:spPr>
-        <p:style>
-          <a:lnRef idx="1">
-            <a:schemeClr val="accent1"/>
-          </a:lnRef>
-          <a:fillRef idx="3">
-            <a:schemeClr val="accent1"/>
-          </a:fillRef>
-          <a:effectRef idx="2">
-            <a:schemeClr val="accent1"/>
-          </a:effectRef>
-          <a:fontRef idx="minor">
-            <a:schemeClr val="lt1"/>
-          </a:fontRef>
-        </p:style>
-        <p:txBody>
-          <a:bodyPr rtlCol="0" anchor="ctr"/>
-          <a:lstStyle/>
-          <a:p>
-            <a:pPr algn="ctr"/>
-          </a:p>
-        </p:txBody>
-      </p:sp>
-      <p:sp>
-        <p:nvSpPr>
-          <p:cNvPr id="13" name="Oval 12"/>
-          <p:cNvSpPr/>
-          <p:nvPr/>
-        </p:nvSpPr>
-        <p:spPr>
-          <a:xfrm>
-            <a:off x="6308445" y="6510528"/>
-            <a:ext cx="77724" cy="77724"/>
-          </a:xfrm>
-          <a:prstGeom prst="ellipse">
-            <a:avLst/>
-          </a:prstGeom>
-          <a:noFill/>
-          <a:ln w="10160">
-            <a:solidFill>
-              <a:srgbClr val="13B9BF"/>
-            </a:solidFill>
-          </a:ln>
-        </p:spPr>
-        <p:style>
-          <a:lnRef idx="1">
-            <a:schemeClr val="accent1"/>
-          </a:lnRef>
-          <a:fillRef idx="3">
-            <a:schemeClr val="accent1"/>
-          </a:fillRef>
-          <a:effectRef idx="2">
-            <a:schemeClr val="accent1"/>
-          </a:effectRef>
-          <a:fontRef idx="minor">
-            <a:schemeClr val="lt1"/>
-          </a:fontRef>
-        </p:style>
-        <p:txBody>
-          <a:bodyPr rtlCol="0" anchor="ctr"/>
-          <a:lstStyle/>
-          <a:p>
-            <a:pPr algn="ctr"/>
-          </a:p>
-        </p:txBody>
-      </p:sp>
-      <p:sp>
-        <p:nvSpPr>
-          <p:cNvPr id="14" name="Oval 13"/>
-          <p:cNvSpPr/>
-          <p:nvPr/>
-        </p:nvSpPr>
-        <p:spPr>
-          <a:xfrm>
-            <a:off x="6559905" y="6510528"/>
-            <a:ext cx="77724" cy="77724"/>
-          </a:xfrm>
-          <a:prstGeom prst="ellipse">
-            <a:avLst/>
-          </a:prstGeom>
-          <a:noFill/>
-          <a:ln w="10160">
-            <a:solidFill>
-              <a:srgbClr val="13B9BF"/>
-            </a:solidFill>
-          </a:ln>
-        </p:spPr>
-        <p:style>
-          <a:lnRef idx="1">
-            <a:schemeClr val="accent1"/>
-          </a:lnRef>
-          <a:fillRef idx="3">
-            <a:schemeClr val="accent1"/>
-          </a:fillRef>
-          <a:effectRef idx="2">
-            <a:schemeClr val="accent1"/>
-          </a:effectRef>
-          <a:fontRef idx="minor">
-            <a:schemeClr val="lt1"/>
-          </a:fontRef>
-        </p:style>
-        <p:txBody>
-          <a:bodyPr rtlCol="0" anchor="ctr"/>
-          <a:lstStyle/>
-          <a:p>
-            <a:pPr algn="ctr"/>
-          </a:p>
-        </p:txBody>
-      </p:sp>
-      <p:sp>
-        <p:nvSpPr>
-          <p:cNvPr id="15" name="Rectangle 14"/>
+      <p:sp>
+        <p:nvSpPr>
+          <p:cNvPr id="9" name="Rectangle 8"/>
           <p:cNvSpPr/>
           <p:nvPr/>
         </p:nvSpPr>
@@ -4042,7 +3803,7 @@
       </p:sp>
       <p:sp>
         <p:nvSpPr>
-          <p:cNvPr id="16" name="Rectangle 15"/>
+          <p:cNvPr id="10" name="Rectangle 9"/>
           <p:cNvSpPr/>
           <p:nvPr/>
         </p:nvSpPr>
@@ -4085,138 +3846,14 @@
       </p:sp>
       <p:sp>
         <p:nvSpPr>
-          <p:cNvPr id="17" name="Oval 16"/>
+          <p:cNvPr id="11" name="Oval 10"/>
           <p:cNvSpPr/>
           <p:nvPr/>
         </p:nvSpPr>
         <p:spPr>
           <a:xfrm>
-            <a:off x="704088" y="2450592"/>
-            <a:ext cx="329184" cy="329184"/>
-          </a:xfrm>
-          <a:prstGeom prst="ellipse">
-            <a:avLst/>
-          </a:prstGeom>
-          <a:solidFill>
-            <a:srgbClr val="13B9BF"/>
-          </a:solidFill>
-          <a:ln>
-            <a:noFill/>
-          </a:ln>
-        </p:spPr>
-        <p:style>
-          <a:lnRef idx="1">
-            <a:schemeClr val="accent1"/>
-          </a:lnRef>
-          <a:fillRef idx="3">
-            <a:schemeClr val="accent1"/>
-          </a:fillRef>
-          <a:effectRef idx="2">
-            <a:schemeClr val="accent1"/>
-          </a:effectRef>
-          <a:fontRef idx="minor">
-            <a:schemeClr val="lt1"/>
-          </a:fontRef>
-        </p:style>
-        <p:txBody>
-          <a:bodyPr rtlCol="0" anchor="ctr"/>
-          <a:lstStyle/>
-          <a:p>
-            <a:pPr algn="ctr"/>
-          </a:p>
-        </p:txBody>
-      </p:sp>
-      <p:sp>
-        <p:nvSpPr>
-          <p:cNvPr id="18" name="Oval 17"/>
-          <p:cNvSpPr/>
-          <p:nvPr/>
-        </p:nvSpPr>
-        <p:spPr>
-          <a:xfrm>
-            <a:off x="766632" y="2513136"/>
-            <a:ext cx="204094" cy="204094"/>
-          </a:xfrm>
-          <a:prstGeom prst="ellipse">
-            <a:avLst/>
-          </a:prstGeom>
-          <a:solidFill>
-            <a:srgbClr val="088A8F"/>
-          </a:solidFill>
-          <a:ln>
-            <a:noFill/>
-          </a:ln>
-        </p:spPr>
-        <p:style>
-          <a:lnRef idx="1">
-            <a:schemeClr val="accent1"/>
-          </a:lnRef>
-          <a:fillRef idx="3">
-            <a:schemeClr val="accent1"/>
-          </a:fillRef>
-          <a:effectRef idx="2">
-            <a:schemeClr val="accent1"/>
-          </a:effectRef>
-          <a:fontRef idx="minor">
-            <a:schemeClr val="lt1"/>
-          </a:fontRef>
-        </p:style>
-        <p:txBody>
-          <a:bodyPr rtlCol="0" anchor="ctr"/>
-          <a:lstStyle/>
-          <a:p>
-            <a:pPr algn="ctr"/>
-          </a:p>
-        </p:txBody>
-      </p:sp>
-      <p:sp>
-        <p:nvSpPr>
-          <p:cNvPr id="19" name="TextBox 18"/>
-          <p:cNvSpPr txBox="1"/>
-          <p:nvPr/>
-        </p:nvSpPr>
-        <p:spPr>
-          <a:xfrm>
-            <a:off x="704088" y="2450592"/>
-            <a:ext cx="329184" cy="329184"/>
-          </a:xfrm>
-          <a:prstGeom prst="rect">
-            <a:avLst/>
-          </a:prstGeom>
-          <a:noFill/>
-        </p:spPr>
-        <p:txBody lIns="0" tIns="0" rIns="0" bIns="0">
-          <a:bodyPr wrap="none">
-            <a:spAutoFit/>
-          </a:bodyPr>
-          <a:lstStyle/>
-          <a:p>
-            <a:pPr algn="ctr">
-              <a:spcBef>
-                <a:spcPts val="200"/>
-              </a:spcBef>
-            </a:pPr>
-            <a:r>
-              <a:rPr sz="1100" b="1">
-                <a:solidFill>
-                  <a:srgbClr val="FFFFFF"/>
-                </a:solidFill>
-              </a:rPr>
-              <a:t>▼</a:t>
-            </a:r>
-          </a:p>
-        </p:txBody>
-      </p:sp>
-      <p:sp>
-        <p:nvSpPr>
-          <p:cNvPr id="20" name="Oval 19"/>
-          <p:cNvSpPr/>
-          <p:nvPr/>
-        </p:nvSpPr>
-        <p:spPr>
-          <a:xfrm>
-            <a:off x="1124712" y="2487168"/>
-            <a:ext cx="201168" cy="201168"/>
+            <a:off x="704088" y="2468880"/>
+            <a:ext cx="274320" cy="274320"/>
           </a:xfrm>
           <a:prstGeom prst="ellipse">
             <a:avLst/>
@@ -4254,14 +3891,14 @@
       </p:sp>
       <p:sp>
         <p:nvSpPr>
-          <p:cNvPr id="21" name="TextBox 20"/>
+          <p:cNvPr id="12" name="TextBox 11"/>
           <p:cNvSpPr txBox="1"/>
           <p:nvPr/>
         </p:nvSpPr>
         <p:spPr>
           <a:xfrm>
-            <a:off x="1124712" y="2487168"/>
-            <a:ext cx="201168" cy="201168"/>
+            <a:off x="704088" y="2468880"/>
+            <a:ext cx="274320" cy="274320"/>
           </a:xfrm>
           <a:prstGeom prst="rect">
             <a:avLst/>
@@ -4288,14 +3925,14 @@
       </p:sp>
       <p:sp>
         <p:nvSpPr>
-          <p:cNvPr id="22" name="TextBox 21"/>
+          <p:cNvPr id="13" name="TextBox 12"/>
           <p:cNvSpPr txBox="1"/>
           <p:nvPr/>
         </p:nvSpPr>
         <p:spPr>
           <a:xfrm>
-            <a:off x="1161288" y="2450592"/>
-            <a:ext cx="4792827" cy="658368"/>
+            <a:off x="1088136" y="2468880"/>
+            <a:ext cx="4792827" cy="566928"/>
           </a:xfrm>
           <a:prstGeom prst="rect">
             <a:avLst/>
@@ -4322,13 +3959,13 @@
       </p:sp>
       <p:sp>
         <p:nvSpPr>
-          <p:cNvPr id="23" name="Rectangle 22"/>
+          <p:cNvPr id="14" name="Rectangle 13"/>
           <p:cNvSpPr/>
           <p:nvPr/>
         </p:nvSpPr>
         <p:spPr>
           <a:xfrm>
-            <a:off x="667512" y="2907792"/>
+            <a:off x="667512" y="2852928"/>
             <a:ext cx="5250027" cy="15240"/>
           </a:xfrm>
           <a:prstGeom prst="rect">
@@ -4365,14 +4002,14 @@
       </p:sp>
       <p:sp>
         <p:nvSpPr>
-          <p:cNvPr id="24" name="TextBox 23"/>
+          <p:cNvPr id="15" name="TextBox 14"/>
           <p:cNvSpPr txBox="1"/>
           <p:nvPr/>
         </p:nvSpPr>
         <p:spPr>
           <a:xfrm>
-            <a:off x="667512" y="2996692"/>
-            <a:ext cx="5250027" cy="2959608"/>
+            <a:off x="667512" y="2941828"/>
+            <a:ext cx="5250027" cy="3014472"/>
           </a:xfrm>
           <a:prstGeom prst="rect">
             <a:avLst/>
@@ -4457,7 +4094,7 @@
       </p:sp>
       <p:sp>
         <p:nvSpPr>
-          <p:cNvPr id="25" name="Rectangle 24"/>
+          <p:cNvPr id="16" name="Rectangle 15"/>
           <p:cNvSpPr/>
           <p:nvPr/>
         </p:nvSpPr>
@@ -4502,7 +4139,7 @@
       </p:sp>
       <p:sp>
         <p:nvSpPr>
-          <p:cNvPr id="26" name="Rectangle 25"/>
+          <p:cNvPr id="17" name="Rectangle 16"/>
           <p:cNvSpPr/>
           <p:nvPr/>
         </p:nvSpPr>
@@ -4545,138 +4182,14 @@
       </p:sp>
       <p:sp>
         <p:nvSpPr>
-          <p:cNvPr id="27" name="Oval 26"/>
+          <p:cNvPr id="18" name="Oval 17"/>
           <p:cNvSpPr/>
           <p:nvPr/>
         </p:nvSpPr>
         <p:spPr>
           <a:xfrm>
-            <a:off x="6484467" y="2450592"/>
-            <a:ext cx="329184" cy="329184"/>
-          </a:xfrm>
-          <a:prstGeom prst="ellipse">
-            <a:avLst/>
-          </a:prstGeom>
-          <a:solidFill>
-            <a:srgbClr val="13B9BF"/>
-          </a:solidFill>
-          <a:ln>
-            <a:noFill/>
-          </a:ln>
-        </p:spPr>
-        <p:style>
-          <a:lnRef idx="1">
-            <a:schemeClr val="accent1"/>
-          </a:lnRef>
-          <a:fillRef idx="3">
-            <a:schemeClr val="accent1"/>
-          </a:fillRef>
-          <a:effectRef idx="2">
-            <a:schemeClr val="accent1"/>
-          </a:effectRef>
-          <a:fontRef idx="minor">
-            <a:schemeClr val="lt1"/>
-          </a:fontRef>
-        </p:style>
-        <p:txBody>
-          <a:bodyPr rtlCol="0" anchor="ctr"/>
-          <a:lstStyle/>
-          <a:p>
-            <a:pPr algn="ctr"/>
-          </a:p>
-        </p:txBody>
-      </p:sp>
-      <p:sp>
-        <p:nvSpPr>
-          <p:cNvPr id="28" name="Oval 27"/>
-          <p:cNvSpPr/>
-          <p:nvPr/>
-        </p:nvSpPr>
-        <p:spPr>
-          <a:xfrm>
-            <a:off x="6547012" y="2513136"/>
-            <a:ext cx="204094" cy="204094"/>
-          </a:xfrm>
-          <a:prstGeom prst="ellipse">
-            <a:avLst/>
-          </a:prstGeom>
-          <a:solidFill>
-            <a:srgbClr val="088A8F"/>
-          </a:solidFill>
-          <a:ln>
-            <a:noFill/>
-          </a:ln>
-        </p:spPr>
-        <p:style>
-          <a:lnRef idx="1">
-            <a:schemeClr val="accent1"/>
-          </a:lnRef>
-          <a:fillRef idx="3">
-            <a:schemeClr val="accent1"/>
-          </a:fillRef>
-          <a:effectRef idx="2">
-            <a:schemeClr val="accent1"/>
-          </a:effectRef>
-          <a:fontRef idx="minor">
-            <a:schemeClr val="lt1"/>
-          </a:fontRef>
-        </p:style>
-        <p:txBody>
-          <a:bodyPr rtlCol="0" anchor="ctr"/>
-          <a:lstStyle/>
-          <a:p>
-            <a:pPr algn="ctr"/>
-          </a:p>
-        </p:txBody>
-      </p:sp>
-      <p:sp>
-        <p:nvSpPr>
-          <p:cNvPr id="29" name="TextBox 28"/>
-          <p:cNvSpPr txBox="1"/>
-          <p:nvPr/>
-        </p:nvSpPr>
-        <p:spPr>
-          <a:xfrm>
-            <a:off x="6484467" y="2450592"/>
-            <a:ext cx="329184" cy="329184"/>
-          </a:xfrm>
-          <a:prstGeom prst="rect">
-            <a:avLst/>
-          </a:prstGeom>
-          <a:noFill/>
-        </p:spPr>
-        <p:txBody lIns="0" tIns="0" rIns="0" bIns="0">
-          <a:bodyPr wrap="none">
-            <a:spAutoFit/>
-          </a:bodyPr>
-          <a:lstStyle/>
-          <a:p>
-            <a:pPr algn="ctr">
-              <a:spcBef>
-                <a:spcPts val="200"/>
-              </a:spcBef>
-            </a:pPr>
-            <a:r>
-              <a:rPr sz="1100" b="1">
-                <a:solidFill>
-                  <a:srgbClr val="FFFFFF"/>
-                </a:solidFill>
-              </a:rPr>
-              <a:t>◆</a:t>
-            </a:r>
-          </a:p>
-        </p:txBody>
-      </p:sp>
-      <p:sp>
-        <p:nvSpPr>
-          <p:cNvPr id="30" name="Oval 29"/>
-          <p:cNvSpPr/>
-          <p:nvPr/>
-        </p:nvSpPr>
-        <p:spPr>
-          <a:xfrm>
-            <a:off x="6905091" y="2487168"/>
-            <a:ext cx="201168" cy="201168"/>
+            <a:off x="6484467" y="2468880"/>
+            <a:ext cx="274320" cy="274320"/>
           </a:xfrm>
           <a:prstGeom prst="ellipse">
             <a:avLst/>
@@ -4714,14 +4227,14 @@
       </p:sp>
       <p:sp>
         <p:nvSpPr>
-          <p:cNvPr id="31" name="TextBox 30"/>
+          <p:cNvPr id="19" name="TextBox 18"/>
           <p:cNvSpPr txBox="1"/>
           <p:nvPr/>
         </p:nvSpPr>
         <p:spPr>
           <a:xfrm>
-            <a:off x="6905091" y="2487168"/>
-            <a:ext cx="201168" cy="201168"/>
+            <a:off x="6484467" y="2468880"/>
+            <a:ext cx="274320" cy="274320"/>
           </a:xfrm>
           <a:prstGeom prst="rect">
             <a:avLst/>
@@ -4748,14 +4261,14 @@
       </p:sp>
       <p:sp>
         <p:nvSpPr>
-          <p:cNvPr id="32" name="TextBox 31"/>
+          <p:cNvPr id="20" name="TextBox 19"/>
           <p:cNvSpPr txBox="1"/>
           <p:nvPr/>
         </p:nvSpPr>
         <p:spPr>
           <a:xfrm>
-            <a:off x="6941667" y="2450592"/>
-            <a:ext cx="4792827" cy="658368"/>
+            <a:off x="6868515" y="2468880"/>
+            <a:ext cx="4792827" cy="566928"/>
           </a:xfrm>
           <a:prstGeom prst="rect">
             <a:avLst/>
@@ -4782,13 +4295,13 @@
       </p:sp>
       <p:sp>
         <p:nvSpPr>
-          <p:cNvPr id="33" name="Rectangle 32"/>
+          <p:cNvPr id="21" name="Rectangle 20"/>
           <p:cNvSpPr/>
           <p:nvPr/>
         </p:nvSpPr>
         <p:spPr>
           <a:xfrm>
-            <a:off x="6447891" y="2907792"/>
+            <a:off x="6447891" y="2852928"/>
             <a:ext cx="5250027" cy="15240"/>
           </a:xfrm>
           <a:prstGeom prst="rect">
@@ -4825,14 +4338,14 @@
       </p:sp>
       <p:sp>
         <p:nvSpPr>
-          <p:cNvPr id="34" name="TextBox 33"/>
+          <p:cNvPr id="22" name="TextBox 21"/>
           <p:cNvSpPr txBox="1"/>
           <p:nvPr/>
         </p:nvSpPr>
         <p:spPr>
           <a:xfrm>
-            <a:off x="6447891" y="2996692"/>
-            <a:ext cx="5250027" cy="2959608"/>
+            <a:off x="6447891" y="2941828"/>
+            <a:ext cx="5250027" cy="3014472"/>
           </a:xfrm>
           <a:prstGeom prst="rect">
             <a:avLst/>
@@ -4915,6 +4428,30 @@
           </a:p>
         </p:txBody>
       </p:sp>
+      <p:pic>
+        <p:nvPicPr>
+          <p:cNvPr id="23" name="Picture 22" descr="logo_horiz.png"/>
+          <p:cNvPicPr>
+            <a:picLocks noChangeAspect="1"/>
+          </p:cNvPicPr>
+          <p:nvPr/>
+        </p:nvPicPr>
+        <p:blipFill>
+          <a:blip r:embed="rId3"/>
+          <a:stretch>
+            <a:fillRect/>
+          </a:stretch>
+        </p:blipFill>
+        <p:spPr>
+          <a:xfrm>
+            <a:off x="10024567" y="6062197"/>
+            <a:ext cx="1965960" cy="631211"/>
+          </a:xfrm>
+          <a:prstGeom prst="rect">
+            <a:avLst/>
+          </a:prstGeom>
+        </p:spPr>
+      </p:pic>
     </p:spTree>
   </p:cSld>
   <p:clrMapOvr>
@@ -4944,7 +4481,7 @@
                                 <p:cBhvr>
                                   <p:cTn id="6" dur="450" fill="hold"/>
                                   <p:tgtEl>
-                                    <p:spTgt spid="15"/>
+                                    <p:spTgt spid="9"/>
                                   </p:tgtEl>
                                 </p:cBhvr>
                               </p:animEffect>
@@ -4961,7 +4498,7 @@
                                 <p:cBhvr>
                                   <p:cTn id="8" dur="450" fill="hold"/>
                                   <p:tgtEl>
-                                    <p:spTgt spid="25"/>
+                                    <p:spTgt spid="16"/>
                                   </p:tgtEl>
                                 </p:cBhvr>
                               </p:animEffect>
@@ -5281,248 +4818,9 @@
           </a:p>
         </p:txBody>
       </p:sp>
-      <p:pic>
-        <p:nvPicPr>
-          <p:cNvPr id="9" name="Picture 8" descr="logo_horiz.png"/>
-          <p:cNvPicPr>
-            <a:picLocks noChangeAspect="1"/>
-          </p:cNvPicPr>
-          <p:nvPr/>
-        </p:nvPicPr>
-        <p:blipFill>
-          <a:blip r:embed="rId3"/>
-          <a:stretch>
-            <a:fillRect/>
-          </a:stretch>
-        </p:blipFill>
-        <p:spPr>
-          <a:xfrm>
-            <a:off x="10024567" y="6062197"/>
-            <a:ext cx="1965960" cy="631211"/>
-          </a:xfrm>
-          <a:prstGeom prst="rect">
-            <a:avLst/>
-          </a:prstGeom>
-        </p:spPr>
-      </p:pic>
-      <p:sp>
-        <p:nvSpPr>
-          <p:cNvPr id="10" name="Oval 9"/>
-          <p:cNvSpPr/>
-          <p:nvPr/>
-        </p:nvSpPr>
-        <p:spPr>
-          <a:xfrm>
-            <a:off x="5554065" y="6510528"/>
-            <a:ext cx="77724" cy="77724"/>
-          </a:xfrm>
-          <a:prstGeom prst="ellipse">
-            <a:avLst/>
-          </a:prstGeom>
-          <a:noFill/>
-          <a:ln w="10160">
-            <a:solidFill>
-              <a:srgbClr val="13B9BF"/>
-            </a:solidFill>
-          </a:ln>
-        </p:spPr>
-        <p:style>
-          <a:lnRef idx="1">
-            <a:schemeClr val="accent1"/>
-          </a:lnRef>
-          <a:fillRef idx="3">
-            <a:schemeClr val="accent1"/>
-          </a:fillRef>
-          <a:effectRef idx="2">
-            <a:schemeClr val="accent1"/>
-          </a:effectRef>
-          <a:fontRef idx="minor">
-            <a:schemeClr val="lt1"/>
-          </a:fontRef>
-        </p:style>
-        <p:txBody>
-          <a:bodyPr rtlCol="0" anchor="ctr"/>
-          <a:lstStyle/>
-          <a:p>
-            <a:pPr algn="ctr"/>
-          </a:p>
-        </p:txBody>
-      </p:sp>
-      <p:sp>
-        <p:nvSpPr>
-          <p:cNvPr id="11" name="Oval 10"/>
-          <p:cNvSpPr/>
-          <p:nvPr/>
-        </p:nvSpPr>
-        <p:spPr>
-          <a:xfrm>
-            <a:off x="5805525" y="6510528"/>
-            <a:ext cx="77724" cy="77724"/>
-          </a:xfrm>
-          <a:prstGeom prst="ellipse">
-            <a:avLst/>
-          </a:prstGeom>
-          <a:solidFill>
-            <a:srgbClr val="2FDFE5"/>
-          </a:solidFill>
-          <a:ln>
-            <a:noFill/>
-          </a:ln>
-        </p:spPr>
-        <p:style>
-          <a:lnRef idx="1">
-            <a:schemeClr val="accent1"/>
-          </a:lnRef>
-          <a:fillRef idx="3">
-            <a:schemeClr val="accent1"/>
-          </a:fillRef>
-          <a:effectRef idx="2">
-            <a:schemeClr val="accent1"/>
-          </a:effectRef>
-          <a:fontRef idx="minor">
-            <a:schemeClr val="lt1"/>
-          </a:fontRef>
-        </p:style>
-        <p:txBody>
-          <a:bodyPr rtlCol="0" anchor="ctr"/>
-          <a:lstStyle/>
-          <a:p>
-            <a:pPr algn="ctr"/>
-          </a:p>
-        </p:txBody>
-      </p:sp>
-      <p:sp>
-        <p:nvSpPr>
-          <p:cNvPr id="12" name="Oval 11"/>
-          <p:cNvSpPr/>
-          <p:nvPr/>
-        </p:nvSpPr>
-        <p:spPr>
-          <a:xfrm>
-            <a:off x="6056985" y="6510528"/>
-            <a:ext cx="77724" cy="77724"/>
-          </a:xfrm>
-          <a:prstGeom prst="ellipse">
-            <a:avLst/>
-          </a:prstGeom>
-          <a:noFill/>
-          <a:ln w="10160">
-            <a:solidFill>
-              <a:srgbClr val="13B9BF"/>
-            </a:solidFill>
-          </a:ln>
-        </p:spPr>
-        <p:style>
-          <a:lnRef idx="1">
-            <a:schemeClr val="accent1"/>
-          </a:lnRef>
-          <a:fillRef idx="3">
-            <a:schemeClr val="accent1"/>
-          </a:fillRef>
-          <a:effectRef idx="2">
-            <a:schemeClr val="accent1"/>
-          </a:effectRef>
-          <a:fontRef idx="minor">
-            <a:schemeClr val="lt1"/>
-          </a:fontRef>
-        </p:style>
-        <p:txBody>
-          <a:bodyPr rtlCol="0" anchor="ctr"/>
-          <a:lstStyle/>
-          <a:p>
-            <a:pPr algn="ctr"/>
-          </a:p>
-        </p:txBody>
-      </p:sp>
-      <p:sp>
-        <p:nvSpPr>
-          <p:cNvPr id="13" name="Oval 12"/>
-          <p:cNvSpPr/>
-          <p:nvPr/>
-        </p:nvSpPr>
-        <p:spPr>
-          <a:xfrm>
-            <a:off x="6308445" y="6510528"/>
-            <a:ext cx="77724" cy="77724"/>
-          </a:xfrm>
-          <a:prstGeom prst="ellipse">
-            <a:avLst/>
-          </a:prstGeom>
-          <a:noFill/>
-          <a:ln w="10160">
-            <a:solidFill>
-              <a:srgbClr val="13B9BF"/>
-            </a:solidFill>
-          </a:ln>
-        </p:spPr>
-        <p:style>
-          <a:lnRef idx="1">
-            <a:schemeClr val="accent1"/>
-          </a:lnRef>
-          <a:fillRef idx="3">
-            <a:schemeClr val="accent1"/>
-          </a:fillRef>
-          <a:effectRef idx="2">
-            <a:schemeClr val="accent1"/>
-          </a:effectRef>
-          <a:fontRef idx="minor">
-            <a:schemeClr val="lt1"/>
-          </a:fontRef>
-        </p:style>
-        <p:txBody>
-          <a:bodyPr rtlCol="0" anchor="ctr"/>
-          <a:lstStyle/>
-          <a:p>
-            <a:pPr algn="ctr"/>
-          </a:p>
-        </p:txBody>
-      </p:sp>
-      <p:sp>
-        <p:nvSpPr>
-          <p:cNvPr id="14" name="Oval 13"/>
-          <p:cNvSpPr/>
-          <p:nvPr/>
-        </p:nvSpPr>
-        <p:spPr>
-          <a:xfrm>
-            <a:off x="6559905" y="6510528"/>
-            <a:ext cx="77724" cy="77724"/>
-          </a:xfrm>
-          <a:prstGeom prst="ellipse">
-            <a:avLst/>
-          </a:prstGeom>
-          <a:noFill/>
-          <a:ln w="10160">
-            <a:solidFill>
-              <a:srgbClr val="13B9BF"/>
-            </a:solidFill>
-          </a:ln>
-        </p:spPr>
-        <p:style>
-          <a:lnRef idx="1">
-            <a:schemeClr val="accent1"/>
-          </a:lnRef>
-          <a:fillRef idx="3">
-            <a:schemeClr val="accent1"/>
-          </a:fillRef>
-          <a:effectRef idx="2">
-            <a:schemeClr val="accent1"/>
-          </a:effectRef>
-          <a:fontRef idx="minor">
-            <a:schemeClr val="lt1"/>
-          </a:fontRef>
-        </p:style>
-        <p:txBody>
-          <a:bodyPr rtlCol="0" anchor="ctr"/>
-          <a:lstStyle/>
-          <a:p>
-            <a:pPr algn="ctr"/>
-          </a:p>
-        </p:txBody>
-      </p:sp>
-      <p:sp>
-        <p:nvSpPr>
-          <p:cNvPr id="15" name="Rectangle 14"/>
+      <p:sp>
+        <p:nvSpPr>
+          <p:cNvPr id="9" name="Rectangle 8"/>
           <p:cNvSpPr/>
           <p:nvPr/>
         </p:nvSpPr>
@@ -5567,7 +4865,7 @@
       </p:sp>
       <p:sp>
         <p:nvSpPr>
-          <p:cNvPr id="16" name="Rectangle 15"/>
+          <p:cNvPr id="10" name="Rectangle 9"/>
           <p:cNvSpPr/>
           <p:nvPr/>
         </p:nvSpPr>
@@ -5610,138 +4908,14 @@
       </p:sp>
       <p:sp>
         <p:nvSpPr>
-          <p:cNvPr id="17" name="Oval 16"/>
+          <p:cNvPr id="11" name="Oval 10"/>
           <p:cNvSpPr/>
           <p:nvPr/>
         </p:nvSpPr>
         <p:spPr>
           <a:xfrm>
-            <a:off x="704088" y="2450592"/>
-            <a:ext cx="329184" cy="329184"/>
-          </a:xfrm>
-          <a:prstGeom prst="ellipse">
-            <a:avLst/>
-          </a:prstGeom>
-          <a:solidFill>
-            <a:srgbClr val="13B9BF"/>
-          </a:solidFill>
-          <a:ln>
-            <a:noFill/>
-          </a:ln>
-        </p:spPr>
-        <p:style>
-          <a:lnRef idx="1">
-            <a:schemeClr val="accent1"/>
-          </a:lnRef>
-          <a:fillRef idx="3">
-            <a:schemeClr val="accent1"/>
-          </a:fillRef>
-          <a:effectRef idx="2">
-            <a:schemeClr val="accent1"/>
-          </a:effectRef>
-          <a:fontRef idx="minor">
-            <a:schemeClr val="lt1"/>
-          </a:fontRef>
-        </p:style>
-        <p:txBody>
-          <a:bodyPr rtlCol="0" anchor="ctr"/>
-          <a:lstStyle/>
-          <a:p>
-            <a:pPr algn="ctr"/>
-          </a:p>
-        </p:txBody>
-      </p:sp>
-      <p:sp>
-        <p:nvSpPr>
-          <p:cNvPr id="18" name="Oval 17"/>
-          <p:cNvSpPr/>
-          <p:nvPr/>
-        </p:nvSpPr>
-        <p:spPr>
-          <a:xfrm>
-            <a:off x="766632" y="2513136"/>
-            <a:ext cx="204094" cy="204094"/>
-          </a:xfrm>
-          <a:prstGeom prst="ellipse">
-            <a:avLst/>
-          </a:prstGeom>
-          <a:solidFill>
-            <a:srgbClr val="088A8F"/>
-          </a:solidFill>
-          <a:ln>
-            <a:noFill/>
-          </a:ln>
-        </p:spPr>
-        <p:style>
-          <a:lnRef idx="1">
-            <a:schemeClr val="accent1"/>
-          </a:lnRef>
-          <a:fillRef idx="3">
-            <a:schemeClr val="accent1"/>
-          </a:fillRef>
-          <a:effectRef idx="2">
-            <a:schemeClr val="accent1"/>
-          </a:effectRef>
-          <a:fontRef idx="minor">
-            <a:schemeClr val="lt1"/>
-          </a:fontRef>
-        </p:style>
-        <p:txBody>
-          <a:bodyPr rtlCol="0" anchor="ctr"/>
-          <a:lstStyle/>
-          <a:p>
-            <a:pPr algn="ctr"/>
-          </a:p>
-        </p:txBody>
-      </p:sp>
-      <p:sp>
-        <p:nvSpPr>
-          <p:cNvPr id="19" name="TextBox 18"/>
-          <p:cNvSpPr txBox="1"/>
-          <p:nvPr/>
-        </p:nvSpPr>
-        <p:spPr>
-          <a:xfrm>
-            <a:off x="704088" y="2450592"/>
-            <a:ext cx="329184" cy="329184"/>
-          </a:xfrm>
-          <a:prstGeom prst="rect">
-            <a:avLst/>
-          </a:prstGeom>
-          <a:noFill/>
-        </p:spPr>
-        <p:txBody lIns="0" tIns="0" rIns="0" bIns="0">
-          <a:bodyPr wrap="none">
-            <a:spAutoFit/>
-          </a:bodyPr>
-          <a:lstStyle/>
-          <a:p>
-            <a:pPr algn="ctr">
-              <a:spcBef>
-                <a:spcPts val="200"/>
-              </a:spcBef>
-            </a:pPr>
-            <a:r>
-              <a:rPr sz="1100" b="1">
-                <a:solidFill>
-                  <a:srgbClr val="FFFFFF"/>
-                </a:solidFill>
-              </a:rPr>
-              <a:t>▼</a:t>
-            </a:r>
-          </a:p>
-        </p:txBody>
-      </p:sp>
-      <p:sp>
-        <p:nvSpPr>
-          <p:cNvPr id="20" name="Oval 19"/>
-          <p:cNvSpPr/>
-          <p:nvPr/>
-        </p:nvSpPr>
-        <p:spPr>
-          <a:xfrm>
-            <a:off x="1124712" y="2487168"/>
-            <a:ext cx="201168" cy="201168"/>
+            <a:off x="704088" y="2468880"/>
+            <a:ext cx="274320" cy="274320"/>
           </a:xfrm>
           <a:prstGeom prst="ellipse">
             <a:avLst/>
@@ -5779,14 +4953,14 @@
       </p:sp>
       <p:sp>
         <p:nvSpPr>
-          <p:cNvPr id="21" name="TextBox 20"/>
+          <p:cNvPr id="12" name="TextBox 11"/>
           <p:cNvSpPr txBox="1"/>
           <p:nvPr/>
         </p:nvSpPr>
         <p:spPr>
           <a:xfrm>
-            <a:off x="1124712" y="2487168"/>
-            <a:ext cx="201168" cy="201168"/>
+            <a:off x="704088" y="2468880"/>
+            <a:ext cx="274320" cy="274320"/>
           </a:xfrm>
           <a:prstGeom prst="rect">
             <a:avLst/>
@@ -5813,14 +4987,14 @@
       </p:sp>
       <p:sp>
         <p:nvSpPr>
-          <p:cNvPr id="22" name="TextBox 21"/>
+          <p:cNvPr id="13" name="TextBox 12"/>
           <p:cNvSpPr txBox="1"/>
           <p:nvPr/>
         </p:nvSpPr>
         <p:spPr>
           <a:xfrm>
-            <a:off x="1161288" y="2450592"/>
-            <a:ext cx="4792827" cy="658368"/>
+            <a:off x="1088136" y="2468880"/>
+            <a:ext cx="4792827" cy="566928"/>
           </a:xfrm>
           <a:prstGeom prst="rect">
             <a:avLst/>
@@ -5847,13 +5021,13 @@
       </p:sp>
       <p:sp>
         <p:nvSpPr>
-          <p:cNvPr id="23" name="Rectangle 22"/>
+          <p:cNvPr id="14" name="Rectangle 13"/>
           <p:cNvSpPr/>
           <p:nvPr/>
         </p:nvSpPr>
         <p:spPr>
           <a:xfrm>
-            <a:off x="667512" y="2907792"/>
+            <a:off x="667512" y="2852928"/>
             <a:ext cx="5250027" cy="15240"/>
           </a:xfrm>
           <a:prstGeom prst="rect">
@@ -5890,14 +5064,14 @@
       </p:sp>
       <p:sp>
         <p:nvSpPr>
-          <p:cNvPr id="24" name="TextBox 23"/>
+          <p:cNvPr id="15" name="TextBox 14"/>
           <p:cNvSpPr txBox="1"/>
           <p:nvPr/>
         </p:nvSpPr>
         <p:spPr>
           <a:xfrm>
-            <a:off x="667512" y="2996692"/>
-            <a:ext cx="5250027" cy="2959608"/>
+            <a:off x="667512" y="2941828"/>
+            <a:ext cx="5250027" cy="3014472"/>
           </a:xfrm>
           <a:prstGeom prst="rect">
             <a:avLst/>
@@ -5982,7 +5156,7 @@
       </p:sp>
       <p:sp>
         <p:nvSpPr>
-          <p:cNvPr id="25" name="Rectangle 24"/>
+          <p:cNvPr id="16" name="Rectangle 15"/>
           <p:cNvSpPr/>
           <p:nvPr/>
         </p:nvSpPr>
@@ -6027,7 +5201,7 @@
       </p:sp>
       <p:sp>
         <p:nvSpPr>
-          <p:cNvPr id="26" name="Rectangle 25"/>
+          <p:cNvPr id="17" name="Rectangle 16"/>
           <p:cNvSpPr/>
           <p:nvPr/>
         </p:nvSpPr>
@@ -6070,138 +5244,14 @@
       </p:sp>
       <p:sp>
         <p:nvSpPr>
-          <p:cNvPr id="27" name="Oval 26"/>
+          <p:cNvPr id="18" name="Oval 17"/>
           <p:cNvSpPr/>
           <p:nvPr/>
         </p:nvSpPr>
         <p:spPr>
           <a:xfrm>
-            <a:off x="6484467" y="2450592"/>
-            <a:ext cx="329184" cy="329184"/>
-          </a:xfrm>
-          <a:prstGeom prst="ellipse">
-            <a:avLst/>
-          </a:prstGeom>
-          <a:solidFill>
-            <a:srgbClr val="13B9BF"/>
-          </a:solidFill>
-          <a:ln>
-            <a:noFill/>
-          </a:ln>
-        </p:spPr>
-        <p:style>
-          <a:lnRef idx="1">
-            <a:schemeClr val="accent1"/>
-          </a:lnRef>
-          <a:fillRef idx="3">
-            <a:schemeClr val="accent1"/>
-          </a:fillRef>
-          <a:effectRef idx="2">
-            <a:schemeClr val="accent1"/>
-          </a:effectRef>
-          <a:fontRef idx="minor">
-            <a:schemeClr val="lt1"/>
-          </a:fontRef>
-        </p:style>
-        <p:txBody>
-          <a:bodyPr rtlCol="0" anchor="ctr"/>
-          <a:lstStyle/>
-          <a:p>
-            <a:pPr algn="ctr"/>
-          </a:p>
-        </p:txBody>
-      </p:sp>
-      <p:sp>
-        <p:nvSpPr>
-          <p:cNvPr id="28" name="Oval 27"/>
-          <p:cNvSpPr/>
-          <p:nvPr/>
-        </p:nvSpPr>
-        <p:spPr>
-          <a:xfrm>
-            <a:off x="6547012" y="2513136"/>
-            <a:ext cx="204094" cy="204094"/>
-          </a:xfrm>
-          <a:prstGeom prst="ellipse">
-            <a:avLst/>
-          </a:prstGeom>
-          <a:solidFill>
-            <a:srgbClr val="088A8F"/>
-          </a:solidFill>
-          <a:ln>
-            <a:noFill/>
-          </a:ln>
-        </p:spPr>
-        <p:style>
-          <a:lnRef idx="1">
-            <a:schemeClr val="accent1"/>
-          </a:lnRef>
-          <a:fillRef idx="3">
-            <a:schemeClr val="accent1"/>
-          </a:fillRef>
-          <a:effectRef idx="2">
-            <a:schemeClr val="accent1"/>
-          </a:effectRef>
-          <a:fontRef idx="minor">
-            <a:schemeClr val="lt1"/>
-          </a:fontRef>
-        </p:style>
-        <p:txBody>
-          <a:bodyPr rtlCol="0" anchor="ctr"/>
-          <a:lstStyle/>
-          <a:p>
-            <a:pPr algn="ctr"/>
-          </a:p>
-        </p:txBody>
-      </p:sp>
-      <p:sp>
-        <p:nvSpPr>
-          <p:cNvPr id="29" name="TextBox 28"/>
-          <p:cNvSpPr txBox="1"/>
-          <p:nvPr/>
-        </p:nvSpPr>
-        <p:spPr>
-          <a:xfrm>
-            <a:off x="6484467" y="2450592"/>
-            <a:ext cx="329184" cy="329184"/>
-          </a:xfrm>
-          <a:prstGeom prst="rect">
-            <a:avLst/>
-          </a:prstGeom>
-          <a:noFill/>
-        </p:spPr>
-        <p:txBody lIns="0" tIns="0" rIns="0" bIns="0">
-          <a:bodyPr wrap="none">
-            <a:spAutoFit/>
-          </a:bodyPr>
-          <a:lstStyle/>
-          <a:p>
-            <a:pPr algn="ctr">
-              <a:spcBef>
-                <a:spcPts val="200"/>
-              </a:spcBef>
-            </a:pPr>
-            <a:r>
-              <a:rPr sz="1100" b="1">
-                <a:solidFill>
-                  <a:srgbClr val="FFFFFF"/>
-                </a:solidFill>
-              </a:rPr>
-              <a:t>◆</a:t>
-            </a:r>
-          </a:p>
-        </p:txBody>
-      </p:sp>
-      <p:sp>
-        <p:nvSpPr>
-          <p:cNvPr id="30" name="Oval 29"/>
-          <p:cNvSpPr/>
-          <p:nvPr/>
-        </p:nvSpPr>
-        <p:spPr>
-          <a:xfrm>
-            <a:off x="6905091" y="2487168"/>
-            <a:ext cx="201168" cy="201168"/>
+            <a:off x="6484467" y="2468880"/>
+            <a:ext cx="274320" cy="274320"/>
           </a:xfrm>
           <a:prstGeom prst="ellipse">
             <a:avLst/>
@@ -6239,14 +5289,14 @@
       </p:sp>
       <p:sp>
         <p:nvSpPr>
-          <p:cNvPr id="31" name="TextBox 30"/>
+          <p:cNvPr id="19" name="TextBox 18"/>
           <p:cNvSpPr txBox="1"/>
           <p:nvPr/>
         </p:nvSpPr>
         <p:spPr>
           <a:xfrm>
-            <a:off x="6905091" y="2487168"/>
-            <a:ext cx="201168" cy="201168"/>
+            <a:off x="6484467" y="2468880"/>
+            <a:ext cx="274320" cy="274320"/>
           </a:xfrm>
           <a:prstGeom prst="rect">
             <a:avLst/>
@@ -6273,14 +5323,14 @@
       </p:sp>
       <p:sp>
         <p:nvSpPr>
-          <p:cNvPr id="32" name="TextBox 31"/>
+          <p:cNvPr id="20" name="TextBox 19"/>
           <p:cNvSpPr txBox="1"/>
           <p:nvPr/>
         </p:nvSpPr>
         <p:spPr>
           <a:xfrm>
-            <a:off x="6941667" y="2450592"/>
-            <a:ext cx="4792827" cy="658368"/>
+            <a:off x="6868515" y="2468880"/>
+            <a:ext cx="4792827" cy="566928"/>
           </a:xfrm>
           <a:prstGeom prst="rect">
             <a:avLst/>
@@ -6307,13 +5357,13 @@
       </p:sp>
       <p:sp>
         <p:nvSpPr>
-          <p:cNvPr id="33" name="Rectangle 32"/>
+          <p:cNvPr id="21" name="Rectangle 20"/>
           <p:cNvSpPr/>
           <p:nvPr/>
         </p:nvSpPr>
         <p:spPr>
           <a:xfrm>
-            <a:off x="6447891" y="2907792"/>
+            <a:off x="6447891" y="2852928"/>
             <a:ext cx="5250027" cy="15240"/>
           </a:xfrm>
           <a:prstGeom prst="rect">
@@ -6350,14 +5400,14 @@
       </p:sp>
       <p:sp>
         <p:nvSpPr>
-          <p:cNvPr id="34" name="TextBox 33"/>
+          <p:cNvPr id="22" name="TextBox 21"/>
           <p:cNvSpPr txBox="1"/>
           <p:nvPr/>
         </p:nvSpPr>
         <p:spPr>
           <a:xfrm>
-            <a:off x="6447891" y="2996692"/>
-            <a:ext cx="5250027" cy="2959608"/>
+            <a:off x="6447891" y="2941828"/>
+            <a:ext cx="5250027" cy="3014472"/>
           </a:xfrm>
           <a:prstGeom prst="rect">
             <a:avLst/>
@@ -6440,6 +5490,30 @@
           </a:p>
         </p:txBody>
       </p:sp>
+      <p:pic>
+        <p:nvPicPr>
+          <p:cNvPr id="23" name="Picture 22" descr="logo_horiz.png"/>
+          <p:cNvPicPr>
+            <a:picLocks noChangeAspect="1"/>
+          </p:cNvPicPr>
+          <p:nvPr/>
+        </p:nvPicPr>
+        <p:blipFill>
+          <a:blip r:embed="rId3"/>
+          <a:stretch>
+            <a:fillRect/>
+          </a:stretch>
+        </p:blipFill>
+        <p:spPr>
+          <a:xfrm>
+            <a:off x="10024567" y="6062197"/>
+            <a:ext cx="1965960" cy="631211"/>
+          </a:xfrm>
+          <a:prstGeom prst="rect">
+            <a:avLst/>
+          </a:prstGeom>
+        </p:spPr>
+      </p:pic>
     </p:spTree>
   </p:cSld>
   <p:clrMapOvr>
@@ -6469,7 +5543,7 @@
                                 <p:cBhvr>
                                   <p:cTn id="6" dur="450" fill="hold"/>
                                   <p:tgtEl>
-                                    <p:spTgt spid="15"/>
+                                    <p:spTgt spid="9"/>
                                   </p:tgtEl>
                                 </p:cBhvr>
                               </p:animEffect>
@@ -6486,7 +5560,7 @@
                                 <p:cBhvr>
                                   <p:cTn id="8" dur="450" fill="hold"/>
                                   <p:tgtEl>
-                                    <p:spTgt spid="25"/>
+                                    <p:spTgt spid="16"/>
                                   </p:tgtEl>
                                 </p:cBhvr>
                               </p:animEffect>
@@ -6806,248 +5880,9 @@
           </a:p>
         </p:txBody>
       </p:sp>
-      <p:pic>
-        <p:nvPicPr>
-          <p:cNvPr id="9" name="Picture 8" descr="logo_horiz.png"/>
-          <p:cNvPicPr>
-            <a:picLocks noChangeAspect="1"/>
-          </p:cNvPicPr>
-          <p:nvPr/>
-        </p:nvPicPr>
-        <p:blipFill>
-          <a:blip r:embed="rId3"/>
-          <a:stretch>
-            <a:fillRect/>
-          </a:stretch>
-        </p:blipFill>
-        <p:spPr>
-          <a:xfrm>
-            <a:off x="10024567" y="6062197"/>
-            <a:ext cx="1965960" cy="631211"/>
-          </a:xfrm>
-          <a:prstGeom prst="rect">
-            <a:avLst/>
-          </a:prstGeom>
-        </p:spPr>
-      </p:pic>
-      <p:sp>
-        <p:nvSpPr>
-          <p:cNvPr id="10" name="Oval 9"/>
-          <p:cNvSpPr/>
-          <p:nvPr/>
-        </p:nvSpPr>
-        <p:spPr>
-          <a:xfrm>
-            <a:off x="5554065" y="6510528"/>
-            <a:ext cx="77724" cy="77724"/>
-          </a:xfrm>
-          <a:prstGeom prst="ellipse">
-            <a:avLst/>
-          </a:prstGeom>
-          <a:noFill/>
-          <a:ln w="10160">
-            <a:solidFill>
-              <a:srgbClr val="13B9BF"/>
-            </a:solidFill>
-          </a:ln>
-        </p:spPr>
-        <p:style>
-          <a:lnRef idx="1">
-            <a:schemeClr val="accent1"/>
-          </a:lnRef>
-          <a:fillRef idx="3">
-            <a:schemeClr val="accent1"/>
-          </a:fillRef>
-          <a:effectRef idx="2">
-            <a:schemeClr val="accent1"/>
-          </a:effectRef>
-          <a:fontRef idx="minor">
-            <a:schemeClr val="lt1"/>
-          </a:fontRef>
-        </p:style>
-        <p:txBody>
-          <a:bodyPr rtlCol="0" anchor="ctr"/>
-          <a:lstStyle/>
-          <a:p>
-            <a:pPr algn="ctr"/>
-          </a:p>
-        </p:txBody>
-      </p:sp>
-      <p:sp>
-        <p:nvSpPr>
-          <p:cNvPr id="11" name="Oval 10"/>
-          <p:cNvSpPr/>
-          <p:nvPr/>
-        </p:nvSpPr>
-        <p:spPr>
-          <a:xfrm>
-            <a:off x="5805525" y="6510528"/>
-            <a:ext cx="77724" cy="77724"/>
-          </a:xfrm>
-          <a:prstGeom prst="ellipse">
-            <a:avLst/>
-          </a:prstGeom>
-          <a:noFill/>
-          <a:ln w="10160">
-            <a:solidFill>
-              <a:srgbClr val="13B9BF"/>
-            </a:solidFill>
-          </a:ln>
-        </p:spPr>
-        <p:style>
-          <a:lnRef idx="1">
-            <a:schemeClr val="accent1"/>
-          </a:lnRef>
-          <a:fillRef idx="3">
-            <a:schemeClr val="accent1"/>
-          </a:fillRef>
-          <a:effectRef idx="2">
-            <a:schemeClr val="accent1"/>
-          </a:effectRef>
-          <a:fontRef idx="minor">
-            <a:schemeClr val="lt1"/>
-          </a:fontRef>
-        </p:style>
-        <p:txBody>
-          <a:bodyPr rtlCol="0" anchor="ctr"/>
-          <a:lstStyle/>
-          <a:p>
-            <a:pPr algn="ctr"/>
-          </a:p>
-        </p:txBody>
-      </p:sp>
-      <p:sp>
-        <p:nvSpPr>
-          <p:cNvPr id="12" name="Oval 11"/>
-          <p:cNvSpPr/>
-          <p:nvPr/>
-        </p:nvSpPr>
-        <p:spPr>
-          <a:xfrm>
-            <a:off x="6056985" y="6510528"/>
-            <a:ext cx="77724" cy="77724"/>
-          </a:xfrm>
-          <a:prstGeom prst="ellipse">
-            <a:avLst/>
-          </a:prstGeom>
-          <a:solidFill>
-            <a:srgbClr val="2FDFE5"/>
-          </a:solidFill>
-          <a:ln>
-            <a:noFill/>
-          </a:ln>
-        </p:spPr>
-        <p:style>
-          <a:lnRef idx="1">
-            <a:schemeClr val="accent1"/>
-          </a:lnRef>
-          <a:fillRef idx="3">
-            <a:schemeClr val="accent1"/>
-          </a:fillRef>
-          <a:effectRef idx="2">
-            <a:schemeClr val="accent1"/>
-          </a:effectRef>
-          <a:fontRef idx="minor">
-            <a:schemeClr val="lt1"/>
-          </a:fontRef>
-        </p:style>
-        <p:txBody>
-          <a:bodyPr rtlCol="0" anchor="ctr"/>
-          <a:lstStyle/>
-          <a:p>
-            <a:pPr algn="ctr"/>
-          </a:p>
-        </p:txBody>
-      </p:sp>
-      <p:sp>
-        <p:nvSpPr>
-          <p:cNvPr id="13" name="Oval 12"/>
-          <p:cNvSpPr/>
-          <p:nvPr/>
-        </p:nvSpPr>
-        <p:spPr>
-          <a:xfrm>
-            <a:off x="6308445" y="6510528"/>
-            <a:ext cx="77724" cy="77724"/>
-          </a:xfrm>
-          <a:prstGeom prst="ellipse">
-            <a:avLst/>
-          </a:prstGeom>
-          <a:noFill/>
-          <a:ln w="10160">
-            <a:solidFill>
-              <a:srgbClr val="13B9BF"/>
-            </a:solidFill>
-          </a:ln>
-        </p:spPr>
-        <p:style>
-          <a:lnRef idx="1">
-            <a:schemeClr val="accent1"/>
-          </a:lnRef>
-          <a:fillRef idx="3">
-            <a:schemeClr val="accent1"/>
-          </a:fillRef>
-          <a:effectRef idx="2">
-            <a:schemeClr val="accent1"/>
-          </a:effectRef>
-          <a:fontRef idx="minor">
-            <a:schemeClr val="lt1"/>
-          </a:fontRef>
-        </p:style>
-        <p:txBody>
-          <a:bodyPr rtlCol="0" anchor="ctr"/>
-          <a:lstStyle/>
-          <a:p>
-            <a:pPr algn="ctr"/>
-          </a:p>
-        </p:txBody>
-      </p:sp>
-      <p:sp>
-        <p:nvSpPr>
-          <p:cNvPr id="14" name="Oval 13"/>
-          <p:cNvSpPr/>
-          <p:nvPr/>
-        </p:nvSpPr>
-        <p:spPr>
-          <a:xfrm>
-            <a:off x="6559905" y="6510528"/>
-            <a:ext cx="77724" cy="77724"/>
-          </a:xfrm>
-          <a:prstGeom prst="ellipse">
-            <a:avLst/>
-          </a:prstGeom>
-          <a:noFill/>
-          <a:ln w="10160">
-            <a:solidFill>
-              <a:srgbClr val="13B9BF"/>
-            </a:solidFill>
-          </a:ln>
-        </p:spPr>
-        <p:style>
-          <a:lnRef idx="1">
-            <a:schemeClr val="accent1"/>
-          </a:lnRef>
-          <a:fillRef idx="3">
-            <a:schemeClr val="accent1"/>
-          </a:fillRef>
-          <a:effectRef idx="2">
-            <a:schemeClr val="accent1"/>
-          </a:effectRef>
-          <a:fontRef idx="minor">
-            <a:schemeClr val="lt1"/>
-          </a:fontRef>
-        </p:style>
-        <p:txBody>
-          <a:bodyPr rtlCol="0" anchor="ctr"/>
-          <a:lstStyle/>
-          <a:p>
-            <a:pPr algn="ctr"/>
-          </a:p>
-        </p:txBody>
-      </p:sp>
-      <p:sp>
-        <p:nvSpPr>
-          <p:cNvPr id="15" name="Rectangle 14"/>
+      <p:sp>
+        <p:nvSpPr>
+          <p:cNvPr id="9" name="Rectangle 8"/>
           <p:cNvSpPr/>
           <p:nvPr/>
         </p:nvSpPr>
@@ -7092,7 +5927,7 @@
       </p:sp>
       <p:sp>
         <p:nvSpPr>
-          <p:cNvPr id="16" name="Rectangle 15"/>
+          <p:cNvPr id="10" name="Rectangle 9"/>
           <p:cNvSpPr/>
           <p:nvPr/>
         </p:nvSpPr>
@@ -7135,138 +5970,14 @@
       </p:sp>
       <p:sp>
         <p:nvSpPr>
-          <p:cNvPr id="17" name="Oval 16"/>
+          <p:cNvPr id="11" name="Oval 10"/>
           <p:cNvSpPr/>
           <p:nvPr/>
         </p:nvSpPr>
         <p:spPr>
           <a:xfrm>
-            <a:off x="704088" y="2450592"/>
-            <a:ext cx="329184" cy="329184"/>
-          </a:xfrm>
-          <a:prstGeom prst="ellipse">
-            <a:avLst/>
-          </a:prstGeom>
-          <a:solidFill>
-            <a:srgbClr val="13B9BF"/>
-          </a:solidFill>
-          <a:ln>
-            <a:noFill/>
-          </a:ln>
-        </p:spPr>
-        <p:style>
-          <a:lnRef idx="1">
-            <a:schemeClr val="accent1"/>
-          </a:lnRef>
-          <a:fillRef idx="3">
-            <a:schemeClr val="accent1"/>
-          </a:fillRef>
-          <a:effectRef idx="2">
-            <a:schemeClr val="accent1"/>
-          </a:effectRef>
-          <a:fontRef idx="minor">
-            <a:schemeClr val="lt1"/>
-          </a:fontRef>
-        </p:style>
-        <p:txBody>
-          <a:bodyPr rtlCol="0" anchor="ctr"/>
-          <a:lstStyle/>
-          <a:p>
-            <a:pPr algn="ctr"/>
-          </a:p>
-        </p:txBody>
-      </p:sp>
-      <p:sp>
-        <p:nvSpPr>
-          <p:cNvPr id="18" name="Oval 17"/>
-          <p:cNvSpPr/>
-          <p:nvPr/>
-        </p:nvSpPr>
-        <p:spPr>
-          <a:xfrm>
-            <a:off x="766632" y="2513136"/>
-            <a:ext cx="204094" cy="204094"/>
-          </a:xfrm>
-          <a:prstGeom prst="ellipse">
-            <a:avLst/>
-          </a:prstGeom>
-          <a:solidFill>
-            <a:srgbClr val="088A8F"/>
-          </a:solidFill>
-          <a:ln>
-            <a:noFill/>
-          </a:ln>
-        </p:spPr>
-        <p:style>
-          <a:lnRef idx="1">
-            <a:schemeClr val="accent1"/>
-          </a:lnRef>
-          <a:fillRef idx="3">
-            <a:schemeClr val="accent1"/>
-          </a:fillRef>
-          <a:effectRef idx="2">
-            <a:schemeClr val="accent1"/>
-          </a:effectRef>
-          <a:fontRef idx="minor">
-            <a:schemeClr val="lt1"/>
-          </a:fontRef>
-        </p:style>
-        <p:txBody>
-          <a:bodyPr rtlCol="0" anchor="ctr"/>
-          <a:lstStyle/>
-          <a:p>
-            <a:pPr algn="ctr"/>
-          </a:p>
-        </p:txBody>
-      </p:sp>
-      <p:sp>
-        <p:nvSpPr>
-          <p:cNvPr id="19" name="TextBox 18"/>
-          <p:cNvSpPr txBox="1"/>
-          <p:nvPr/>
-        </p:nvSpPr>
-        <p:spPr>
-          <a:xfrm>
-            <a:off x="704088" y="2450592"/>
-            <a:ext cx="329184" cy="329184"/>
-          </a:xfrm>
-          <a:prstGeom prst="rect">
-            <a:avLst/>
-          </a:prstGeom>
-          <a:noFill/>
-        </p:spPr>
-        <p:txBody lIns="0" tIns="0" rIns="0" bIns="0">
-          <a:bodyPr wrap="none">
-            <a:spAutoFit/>
-          </a:bodyPr>
-          <a:lstStyle/>
-          <a:p>
-            <a:pPr algn="ctr">
-              <a:spcBef>
-                <a:spcPts val="200"/>
-              </a:spcBef>
-            </a:pPr>
-            <a:r>
-              <a:rPr sz="1100" b="1">
-                <a:solidFill>
-                  <a:srgbClr val="FFFFFF"/>
-                </a:solidFill>
-              </a:rPr>
-              <a:t>▼</a:t>
-            </a:r>
-          </a:p>
-        </p:txBody>
-      </p:sp>
-      <p:sp>
-        <p:nvSpPr>
-          <p:cNvPr id="20" name="Oval 19"/>
-          <p:cNvSpPr/>
-          <p:nvPr/>
-        </p:nvSpPr>
-        <p:spPr>
-          <a:xfrm>
-            <a:off x="1124712" y="2487168"/>
-            <a:ext cx="201168" cy="201168"/>
+            <a:off x="704088" y="2468880"/>
+            <a:ext cx="274320" cy="274320"/>
           </a:xfrm>
           <a:prstGeom prst="ellipse">
             <a:avLst/>
@@ -7304,14 +6015,14 @@
       </p:sp>
       <p:sp>
         <p:nvSpPr>
-          <p:cNvPr id="21" name="TextBox 20"/>
+          <p:cNvPr id="12" name="TextBox 11"/>
           <p:cNvSpPr txBox="1"/>
           <p:nvPr/>
         </p:nvSpPr>
         <p:spPr>
           <a:xfrm>
-            <a:off x="1124712" y="2487168"/>
-            <a:ext cx="201168" cy="201168"/>
+            <a:off x="704088" y="2468880"/>
+            <a:ext cx="274320" cy="274320"/>
           </a:xfrm>
           <a:prstGeom prst="rect">
             <a:avLst/>
@@ -7338,14 +6049,14 @@
       </p:sp>
       <p:sp>
         <p:nvSpPr>
-          <p:cNvPr id="22" name="TextBox 21"/>
+          <p:cNvPr id="13" name="TextBox 12"/>
           <p:cNvSpPr txBox="1"/>
           <p:nvPr/>
         </p:nvSpPr>
         <p:spPr>
           <a:xfrm>
-            <a:off x="1161288" y="2450592"/>
-            <a:ext cx="4792827" cy="658368"/>
+            <a:off x="1088136" y="2468880"/>
+            <a:ext cx="4792827" cy="566928"/>
           </a:xfrm>
           <a:prstGeom prst="rect">
             <a:avLst/>
@@ -7372,13 +6083,13 @@
       </p:sp>
       <p:sp>
         <p:nvSpPr>
-          <p:cNvPr id="23" name="Rectangle 22"/>
+          <p:cNvPr id="14" name="Rectangle 13"/>
           <p:cNvSpPr/>
           <p:nvPr/>
         </p:nvSpPr>
         <p:spPr>
           <a:xfrm>
-            <a:off x="667512" y="2907792"/>
+            <a:off x="667512" y="2852928"/>
             <a:ext cx="5250027" cy="15240"/>
           </a:xfrm>
           <a:prstGeom prst="rect">
@@ -7415,14 +6126,14 @@
       </p:sp>
       <p:sp>
         <p:nvSpPr>
-          <p:cNvPr id="24" name="TextBox 23"/>
+          <p:cNvPr id="15" name="TextBox 14"/>
           <p:cNvSpPr txBox="1"/>
           <p:nvPr/>
         </p:nvSpPr>
         <p:spPr>
           <a:xfrm>
-            <a:off x="667512" y="2996692"/>
-            <a:ext cx="5250027" cy="2959608"/>
+            <a:off x="667512" y="2941828"/>
+            <a:ext cx="5250027" cy="3014472"/>
           </a:xfrm>
           <a:prstGeom prst="rect">
             <a:avLst/>
@@ -7507,7 +6218,7 @@
       </p:sp>
       <p:sp>
         <p:nvSpPr>
-          <p:cNvPr id="25" name="Rectangle 24"/>
+          <p:cNvPr id="16" name="Rectangle 15"/>
           <p:cNvSpPr/>
           <p:nvPr/>
         </p:nvSpPr>
@@ -7552,7 +6263,7 @@
       </p:sp>
       <p:sp>
         <p:nvSpPr>
-          <p:cNvPr id="26" name="Rectangle 25"/>
+          <p:cNvPr id="17" name="Rectangle 16"/>
           <p:cNvSpPr/>
           <p:nvPr/>
         </p:nvSpPr>
@@ -7595,138 +6306,14 @@
       </p:sp>
       <p:sp>
         <p:nvSpPr>
-          <p:cNvPr id="27" name="Oval 26"/>
+          <p:cNvPr id="18" name="Oval 17"/>
           <p:cNvSpPr/>
           <p:nvPr/>
         </p:nvSpPr>
         <p:spPr>
           <a:xfrm>
-            <a:off x="6484467" y="2450592"/>
-            <a:ext cx="329184" cy="329184"/>
-          </a:xfrm>
-          <a:prstGeom prst="ellipse">
-            <a:avLst/>
-          </a:prstGeom>
-          <a:solidFill>
-            <a:srgbClr val="13B9BF"/>
-          </a:solidFill>
-          <a:ln>
-            <a:noFill/>
-          </a:ln>
-        </p:spPr>
-        <p:style>
-          <a:lnRef idx="1">
-            <a:schemeClr val="accent1"/>
-          </a:lnRef>
-          <a:fillRef idx="3">
-            <a:schemeClr val="accent1"/>
-          </a:fillRef>
-          <a:effectRef idx="2">
-            <a:schemeClr val="accent1"/>
-          </a:effectRef>
-          <a:fontRef idx="minor">
-            <a:schemeClr val="lt1"/>
-          </a:fontRef>
-        </p:style>
-        <p:txBody>
-          <a:bodyPr rtlCol="0" anchor="ctr"/>
-          <a:lstStyle/>
-          <a:p>
-            <a:pPr algn="ctr"/>
-          </a:p>
-        </p:txBody>
-      </p:sp>
-      <p:sp>
-        <p:nvSpPr>
-          <p:cNvPr id="28" name="Oval 27"/>
-          <p:cNvSpPr/>
-          <p:nvPr/>
-        </p:nvSpPr>
-        <p:spPr>
-          <a:xfrm>
-            <a:off x="6547012" y="2513136"/>
-            <a:ext cx="204094" cy="204094"/>
-          </a:xfrm>
-          <a:prstGeom prst="ellipse">
-            <a:avLst/>
-          </a:prstGeom>
-          <a:solidFill>
-            <a:srgbClr val="088A8F"/>
-          </a:solidFill>
-          <a:ln>
-            <a:noFill/>
-          </a:ln>
-        </p:spPr>
-        <p:style>
-          <a:lnRef idx="1">
-            <a:schemeClr val="accent1"/>
-          </a:lnRef>
-          <a:fillRef idx="3">
-            <a:schemeClr val="accent1"/>
-          </a:fillRef>
-          <a:effectRef idx="2">
-            <a:schemeClr val="accent1"/>
-          </a:effectRef>
-          <a:fontRef idx="minor">
-            <a:schemeClr val="lt1"/>
-          </a:fontRef>
-        </p:style>
-        <p:txBody>
-          <a:bodyPr rtlCol="0" anchor="ctr"/>
-          <a:lstStyle/>
-          <a:p>
-            <a:pPr algn="ctr"/>
-          </a:p>
-        </p:txBody>
-      </p:sp>
-      <p:sp>
-        <p:nvSpPr>
-          <p:cNvPr id="29" name="TextBox 28"/>
-          <p:cNvSpPr txBox="1"/>
-          <p:nvPr/>
-        </p:nvSpPr>
-        <p:spPr>
-          <a:xfrm>
-            <a:off x="6484467" y="2450592"/>
-            <a:ext cx="329184" cy="329184"/>
-          </a:xfrm>
-          <a:prstGeom prst="rect">
-            <a:avLst/>
-          </a:prstGeom>
-          <a:noFill/>
-        </p:spPr>
-        <p:txBody lIns="0" tIns="0" rIns="0" bIns="0">
-          <a:bodyPr wrap="none">
-            <a:spAutoFit/>
-          </a:bodyPr>
-          <a:lstStyle/>
-          <a:p>
-            <a:pPr algn="ctr">
-              <a:spcBef>
-                <a:spcPts val="200"/>
-              </a:spcBef>
-            </a:pPr>
-            <a:r>
-              <a:rPr sz="1100" b="1">
-                <a:solidFill>
-                  <a:srgbClr val="FFFFFF"/>
-                </a:solidFill>
-              </a:rPr>
-              <a:t>◆</a:t>
-            </a:r>
-          </a:p>
-        </p:txBody>
-      </p:sp>
-      <p:sp>
-        <p:nvSpPr>
-          <p:cNvPr id="30" name="Oval 29"/>
-          <p:cNvSpPr/>
-          <p:nvPr/>
-        </p:nvSpPr>
-        <p:spPr>
-          <a:xfrm>
-            <a:off x="6905091" y="2487168"/>
-            <a:ext cx="201168" cy="201168"/>
+            <a:off x="6484467" y="2468880"/>
+            <a:ext cx="274320" cy="274320"/>
           </a:xfrm>
           <a:prstGeom prst="ellipse">
             <a:avLst/>
@@ -7764,14 +6351,14 @@
       </p:sp>
       <p:sp>
         <p:nvSpPr>
-          <p:cNvPr id="31" name="TextBox 30"/>
+          <p:cNvPr id="19" name="TextBox 18"/>
           <p:cNvSpPr txBox="1"/>
           <p:nvPr/>
         </p:nvSpPr>
         <p:spPr>
           <a:xfrm>
-            <a:off x="6905091" y="2487168"/>
-            <a:ext cx="201168" cy="201168"/>
+            <a:off x="6484467" y="2468880"/>
+            <a:ext cx="274320" cy="274320"/>
           </a:xfrm>
           <a:prstGeom prst="rect">
             <a:avLst/>
@@ -7798,14 +6385,14 @@
       </p:sp>
       <p:sp>
         <p:nvSpPr>
-          <p:cNvPr id="32" name="TextBox 31"/>
+          <p:cNvPr id="20" name="TextBox 19"/>
           <p:cNvSpPr txBox="1"/>
           <p:nvPr/>
         </p:nvSpPr>
         <p:spPr>
           <a:xfrm>
-            <a:off x="6941667" y="2450592"/>
-            <a:ext cx="4792827" cy="658368"/>
+            <a:off x="6868515" y="2468880"/>
+            <a:ext cx="4792827" cy="566928"/>
           </a:xfrm>
           <a:prstGeom prst="rect">
             <a:avLst/>
@@ -7832,13 +6419,13 @@
       </p:sp>
       <p:sp>
         <p:nvSpPr>
-          <p:cNvPr id="33" name="Rectangle 32"/>
+          <p:cNvPr id="21" name="Rectangle 20"/>
           <p:cNvSpPr/>
           <p:nvPr/>
         </p:nvSpPr>
         <p:spPr>
           <a:xfrm>
-            <a:off x="6447891" y="2907792"/>
+            <a:off x="6447891" y="2852928"/>
             <a:ext cx="5250027" cy="15240"/>
           </a:xfrm>
           <a:prstGeom prst="rect">
@@ -7875,14 +6462,14 @@
       </p:sp>
       <p:sp>
         <p:nvSpPr>
-          <p:cNvPr id="34" name="TextBox 33"/>
+          <p:cNvPr id="22" name="TextBox 21"/>
           <p:cNvSpPr txBox="1"/>
           <p:nvPr/>
         </p:nvSpPr>
         <p:spPr>
           <a:xfrm>
-            <a:off x="6447891" y="2996692"/>
-            <a:ext cx="5250027" cy="2959608"/>
+            <a:off x="6447891" y="2941828"/>
+            <a:ext cx="5250027" cy="3014472"/>
           </a:xfrm>
           <a:prstGeom prst="rect">
             <a:avLst/>
@@ -7965,6 +6552,30 @@
           </a:p>
         </p:txBody>
       </p:sp>
+      <p:pic>
+        <p:nvPicPr>
+          <p:cNvPr id="23" name="Picture 22" descr="logo_horiz.png"/>
+          <p:cNvPicPr>
+            <a:picLocks noChangeAspect="1"/>
+          </p:cNvPicPr>
+          <p:nvPr/>
+        </p:nvPicPr>
+        <p:blipFill>
+          <a:blip r:embed="rId3"/>
+          <a:stretch>
+            <a:fillRect/>
+          </a:stretch>
+        </p:blipFill>
+        <p:spPr>
+          <a:xfrm>
+            <a:off x="10024567" y="6062197"/>
+            <a:ext cx="1965960" cy="631211"/>
+          </a:xfrm>
+          <a:prstGeom prst="rect">
+            <a:avLst/>
+          </a:prstGeom>
+        </p:spPr>
+      </p:pic>
     </p:spTree>
   </p:cSld>
   <p:clrMapOvr>
@@ -7994,7 +6605,7 @@
                                 <p:cBhvr>
                                   <p:cTn id="6" dur="450" fill="hold"/>
                                   <p:tgtEl>
-                                    <p:spTgt spid="15"/>
+                                    <p:spTgt spid="9"/>
                                   </p:tgtEl>
                                 </p:cBhvr>
                               </p:animEffect>
@@ -8011,7 +6622,7 @@
                                 <p:cBhvr>
                                   <p:cTn id="8" dur="450" fill="hold"/>
                                   <p:tgtEl>
-                                    <p:spTgt spid="25"/>
+                                    <p:spTgt spid="16"/>
                                   </p:tgtEl>
                                 </p:cBhvr>
                               </p:animEffect>
@@ -8331,248 +6942,9 @@
           </a:p>
         </p:txBody>
       </p:sp>
-      <p:pic>
-        <p:nvPicPr>
-          <p:cNvPr id="9" name="Picture 8" descr="logo_horiz.png"/>
-          <p:cNvPicPr>
-            <a:picLocks noChangeAspect="1"/>
-          </p:cNvPicPr>
-          <p:nvPr/>
-        </p:nvPicPr>
-        <p:blipFill>
-          <a:blip r:embed="rId3"/>
-          <a:stretch>
-            <a:fillRect/>
-          </a:stretch>
-        </p:blipFill>
-        <p:spPr>
-          <a:xfrm>
-            <a:off x="10024567" y="6062197"/>
-            <a:ext cx="1965960" cy="631211"/>
-          </a:xfrm>
-          <a:prstGeom prst="rect">
-            <a:avLst/>
-          </a:prstGeom>
-        </p:spPr>
-      </p:pic>
-      <p:sp>
-        <p:nvSpPr>
-          <p:cNvPr id="10" name="Oval 9"/>
-          <p:cNvSpPr/>
-          <p:nvPr/>
-        </p:nvSpPr>
-        <p:spPr>
-          <a:xfrm>
-            <a:off x="5554065" y="6510528"/>
-            <a:ext cx="77724" cy="77724"/>
-          </a:xfrm>
-          <a:prstGeom prst="ellipse">
-            <a:avLst/>
-          </a:prstGeom>
-          <a:noFill/>
-          <a:ln w="10160">
-            <a:solidFill>
-              <a:srgbClr val="13B9BF"/>
-            </a:solidFill>
-          </a:ln>
-        </p:spPr>
-        <p:style>
-          <a:lnRef idx="1">
-            <a:schemeClr val="accent1"/>
-          </a:lnRef>
-          <a:fillRef idx="3">
-            <a:schemeClr val="accent1"/>
-          </a:fillRef>
-          <a:effectRef idx="2">
-            <a:schemeClr val="accent1"/>
-          </a:effectRef>
-          <a:fontRef idx="minor">
-            <a:schemeClr val="lt1"/>
-          </a:fontRef>
-        </p:style>
-        <p:txBody>
-          <a:bodyPr rtlCol="0" anchor="ctr"/>
-          <a:lstStyle/>
-          <a:p>
-            <a:pPr algn="ctr"/>
-          </a:p>
-        </p:txBody>
-      </p:sp>
-      <p:sp>
-        <p:nvSpPr>
-          <p:cNvPr id="11" name="Oval 10"/>
-          <p:cNvSpPr/>
-          <p:nvPr/>
-        </p:nvSpPr>
-        <p:spPr>
-          <a:xfrm>
-            <a:off x="5805525" y="6510528"/>
-            <a:ext cx="77724" cy="77724"/>
-          </a:xfrm>
-          <a:prstGeom prst="ellipse">
-            <a:avLst/>
-          </a:prstGeom>
-          <a:noFill/>
-          <a:ln w="10160">
-            <a:solidFill>
-              <a:srgbClr val="13B9BF"/>
-            </a:solidFill>
-          </a:ln>
-        </p:spPr>
-        <p:style>
-          <a:lnRef idx="1">
-            <a:schemeClr val="accent1"/>
-          </a:lnRef>
-          <a:fillRef idx="3">
-            <a:schemeClr val="accent1"/>
-          </a:fillRef>
-          <a:effectRef idx="2">
-            <a:schemeClr val="accent1"/>
-          </a:effectRef>
-          <a:fontRef idx="minor">
-            <a:schemeClr val="lt1"/>
-          </a:fontRef>
-        </p:style>
-        <p:txBody>
-          <a:bodyPr rtlCol="0" anchor="ctr"/>
-          <a:lstStyle/>
-          <a:p>
-            <a:pPr algn="ctr"/>
-          </a:p>
-        </p:txBody>
-      </p:sp>
-      <p:sp>
-        <p:nvSpPr>
-          <p:cNvPr id="12" name="Oval 11"/>
-          <p:cNvSpPr/>
-          <p:nvPr/>
-        </p:nvSpPr>
-        <p:spPr>
-          <a:xfrm>
-            <a:off x="6056985" y="6510528"/>
-            <a:ext cx="77724" cy="77724"/>
-          </a:xfrm>
-          <a:prstGeom prst="ellipse">
-            <a:avLst/>
-          </a:prstGeom>
-          <a:noFill/>
-          <a:ln w="10160">
-            <a:solidFill>
-              <a:srgbClr val="13B9BF"/>
-            </a:solidFill>
-          </a:ln>
-        </p:spPr>
-        <p:style>
-          <a:lnRef idx="1">
-            <a:schemeClr val="accent1"/>
-          </a:lnRef>
-          <a:fillRef idx="3">
-            <a:schemeClr val="accent1"/>
-          </a:fillRef>
-          <a:effectRef idx="2">
-            <a:schemeClr val="accent1"/>
-          </a:effectRef>
-          <a:fontRef idx="minor">
-            <a:schemeClr val="lt1"/>
-          </a:fontRef>
-        </p:style>
-        <p:txBody>
-          <a:bodyPr rtlCol="0" anchor="ctr"/>
-          <a:lstStyle/>
-          <a:p>
-            <a:pPr algn="ctr"/>
-          </a:p>
-        </p:txBody>
-      </p:sp>
-      <p:sp>
-        <p:nvSpPr>
-          <p:cNvPr id="13" name="Oval 12"/>
-          <p:cNvSpPr/>
-          <p:nvPr/>
-        </p:nvSpPr>
-        <p:spPr>
-          <a:xfrm>
-            <a:off x="6308445" y="6510528"/>
-            <a:ext cx="77724" cy="77724"/>
-          </a:xfrm>
-          <a:prstGeom prst="ellipse">
-            <a:avLst/>
-          </a:prstGeom>
-          <a:solidFill>
-            <a:srgbClr val="2FDFE5"/>
-          </a:solidFill>
-          <a:ln>
-            <a:noFill/>
-          </a:ln>
-        </p:spPr>
-        <p:style>
-          <a:lnRef idx="1">
-            <a:schemeClr val="accent1"/>
-          </a:lnRef>
-          <a:fillRef idx="3">
-            <a:schemeClr val="accent1"/>
-          </a:fillRef>
-          <a:effectRef idx="2">
-            <a:schemeClr val="accent1"/>
-          </a:effectRef>
-          <a:fontRef idx="minor">
-            <a:schemeClr val="lt1"/>
-          </a:fontRef>
-        </p:style>
-        <p:txBody>
-          <a:bodyPr rtlCol="0" anchor="ctr"/>
-          <a:lstStyle/>
-          <a:p>
-            <a:pPr algn="ctr"/>
-          </a:p>
-        </p:txBody>
-      </p:sp>
-      <p:sp>
-        <p:nvSpPr>
-          <p:cNvPr id="14" name="Oval 13"/>
-          <p:cNvSpPr/>
-          <p:nvPr/>
-        </p:nvSpPr>
-        <p:spPr>
-          <a:xfrm>
-            <a:off x="6559905" y="6510528"/>
-            <a:ext cx="77724" cy="77724"/>
-          </a:xfrm>
-          <a:prstGeom prst="ellipse">
-            <a:avLst/>
-          </a:prstGeom>
-          <a:noFill/>
-          <a:ln w="10160">
-            <a:solidFill>
-              <a:srgbClr val="13B9BF"/>
-            </a:solidFill>
-          </a:ln>
-        </p:spPr>
-        <p:style>
-          <a:lnRef idx="1">
-            <a:schemeClr val="accent1"/>
-          </a:lnRef>
-          <a:fillRef idx="3">
-            <a:schemeClr val="accent1"/>
-          </a:fillRef>
-          <a:effectRef idx="2">
-            <a:schemeClr val="accent1"/>
-          </a:effectRef>
-          <a:fontRef idx="minor">
-            <a:schemeClr val="lt1"/>
-          </a:fontRef>
-        </p:style>
-        <p:txBody>
-          <a:bodyPr rtlCol="0" anchor="ctr"/>
-          <a:lstStyle/>
-          <a:p>
-            <a:pPr algn="ctr"/>
-          </a:p>
-        </p:txBody>
-      </p:sp>
-      <p:sp>
-        <p:nvSpPr>
-          <p:cNvPr id="15" name="Rectangle 14"/>
+      <p:sp>
+        <p:nvSpPr>
+          <p:cNvPr id="9" name="Rectangle 8"/>
           <p:cNvSpPr/>
           <p:nvPr/>
         </p:nvSpPr>
@@ -8617,7 +6989,7 @@
       </p:sp>
       <p:sp>
         <p:nvSpPr>
-          <p:cNvPr id="16" name="Rectangle 15"/>
+          <p:cNvPr id="10" name="Rectangle 9"/>
           <p:cNvSpPr/>
           <p:nvPr/>
         </p:nvSpPr>
@@ -8660,138 +7032,14 @@
       </p:sp>
       <p:sp>
         <p:nvSpPr>
-          <p:cNvPr id="17" name="Oval 16"/>
+          <p:cNvPr id="11" name="Oval 10"/>
           <p:cNvSpPr/>
           <p:nvPr/>
         </p:nvSpPr>
         <p:spPr>
           <a:xfrm>
-            <a:off x="704088" y="2450592"/>
-            <a:ext cx="329184" cy="329184"/>
-          </a:xfrm>
-          <a:prstGeom prst="ellipse">
-            <a:avLst/>
-          </a:prstGeom>
-          <a:solidFill>
-            <a:srgbClr val="13B9BF"/>
-          </a:solidFill>
-          <a:ln>
-            <a:noFill/>
-          </a:ln>
-        </p:spPr>
-        <p:style>
-          <a:lnRef idx="1">
-            <a:schemeClr val="accent1"/>
-          </a:lnRef>
-          <a:fillRef idx="3">
-            <a:schemeClr val="accent1"/>
-          </a:fillRef>
-          <a:effectRef idx="2">
-            <a:schemeClr val="accent1"/>
-          </a:effectRef>
-          <a:fontRef idx="minor">
-            <a:schemeClr val="lt1"/>
-          </a:fontRef>
-        </p:style>
-        <p:txBody>
-          <a:bodyPr rtlCol="0" anchor="ctr"/>
-          <a:lstStyle/>
-          <a:p>
-            <a:pPr algn="ctr"/>
-          </a:p>
-        </p:txBody>
-      </p:sp>
-      <p:sp>
-        <p:nvSpPr>
-          <p:cNvPr id="18" name="Oval 17"/>
-          <p:cNvSpPr/>
-          <p:nvPr/>
-        </p:nvSpPr>
-        <p:spPr>
-          <a:xfrm>
-            <a:off x="766632" y="2513136"/>
-            <a:ext cx="204094" cy="204094"/>
-          </a:xfrm>
-          <a:prstGeom prst="ellipse">
-            <a:avLst/>
-          </a:prstGeom>
-          <a:solidFill>
-            <a:srgbClr val="088A8F"/>
-          </a:solidFill>
-          <a:ln>
-            <a:noFill/>
-          </a:ln>
-        </p:spPr>
-        <p:style>
-          <a:lnRef idx="1">
-            <a:schemeClr val="accent1"/>
-          </a:lnRef>
-          <a:fillRef idx="3">
-            <a:schemeClr val="accent1"/>
-          </a:fillRef>
-          <a:effectRef idx="2">
-            <a:schemeClr val="accent1"/>
-          </a:effectRef>
-          <a:fontRef idx="minor">
-            <a:schemeClr val="lt1"/>
-          </a:fontRef>
-        </p:style>
-        <p:txBody>
-          <a:bodyPr rtlCol="0" anchor="ctr"/>
-          <a:lstStyle/>
-          <a:p>
-            <a:pPr algn="ctr"/>
-          </a:p>
-        </p:txBody>
-      </p:sp>
-      <p:sp>
-        <p:nvSpPr>
-          <p:cNvPr id="19" name="TextBox 18"/>
-          <p:cNvSpPr txBox="1"/>
-          <p:nvPr/>
-        </p:nvSpPr>
-        <p:spPr>
-          <a:xfrm>
-            <a:off x="704088" y="2450592"/>
-            <a:ext cx="329184" cy="329184"/>
-          </a:xfrm>
-          <a:prstGeom prst="rect">
-            <a:avLst/>
-          </a:prstGeom>
-          <a:noFill/>
-        </p:spPr>
-        <p:txBody lIns="0" tIns="0" rIns="0" bIns="0">
-          <a:bodyPr wrap="none">
-            <a:spAutoFit/>
-          </a:bodyPr>
-          <a:lstStyle/>
-          <a:p>
-            <a:pPr algn="ctr">
-              <a:spcBef>
-                <a:spcPts val="200"/>
-              </a:spcBef>
-            </a:pPr>
-            <a:r>
-              <a:rPr sz="1100" b="1">
-                <a:solidFill>
-                  <a:srgbClr val="FFFFFF"/>
-                </a:solidFill>
-              </a:rPr>
-              <a:t>▼</a:t>
-            </a:r>
-          </a:p>
-        </p:txBody>
-      </p:sp>
-      <p:sp>
-        <p:nvSpPr>
-          <p:cNvPr id="20" name="Oval 19"/>
-          <p:cNvSpPr/>
-          <p:nvPr/>
-        </p:nvSpPr>
-        <p:spPr>
-          <a:xfrm>
-            <a:off x="1124712" y="2487168"/>
-            <a:ext cx="201168" cy="201168"/>
+            <a:off x="704088" y="2468880"/>
+            <a:ext cx="274320" cy="274320"/>
           </a:xfrm>
           <a:prstGeom prst="ellipse">
             <a:avLst/>
@@ -8829,14 +7077,14 @@
       </p:sp>
       <p:sp>
         <p:nvSpPr>
-          <p:cNvPr id="21" name="TextBox 20"/>
+          <p:cNvPr id="12" name="TextBox 11"/>
           <p:cNvSpPr txBox="1"/>
           <p:nvPr/>
         </p:nvSpPr>
         <p:spPr>
           <a:xfrm>
-            <a:off x="1124712" y="2487168"/>
-            <a:ext cx="201168" cy="201168"/>
+            <a:off x="704088" y="2468880"/>
+            <a:ext cx="274320" cy="274320"/>
           </a:xfrm>
           <a:prstGeom prst="rect">
             <a:avLst/>
@@ -8863,14 +7111,14 @@
       </p:sp>
       <p:sp>
         <p:nvSpPr>
-          <p:cNvPr id="22" name="TextBox 21"/>
+          <p:cNvPr id="13" name="TextBox 12"/>
           <p:cNvSpPr txBox="1"/>
           <p:nvPr/>
         </p:nvSpPr>
         <p:spPr>
           <a:xfrm>
-            <a:off x="1161288" y="2450592"/>
-            <a:ext cx="4792827" cy="658368"/>
+            <a:off x="1088136" y="2468880"/>
+            <a:ext cx="4792827" cy="566928"/>
           </a:xfrm>
           <a:prstGeom prst="rect">
             <a:avLst/>
@@ -8897,13 +7145,13 @@
       </p:sp>
       <p:sp>
         <p:nvSpPr>
-          <p:cNvPr id="23" name="Rectangle 22"/>
+          <p:cNvPr id="14" name="Rectangle 13"/>
           <p:cNvSpPr/>
           <p:nvPr/>
         </p:nvSpPr>
         <p:spPr>
           <a:xfrm>
-            <a:off x="667512" y="2907792"/>
+            <a:off x="667512" y="2852928"/>
             <a:ext cx="5250027" cy="15240"/>
           </a:xfrm>
           <a:prstGeom prst="rect">
@@ -8940,14 +7188,14 @@
       </p:sp>
       <p:sp>
         <p:nvSpPr>
-          <p:cNvPr id="24" name="TextBox 23"/>
+          <p:cNvPr id="15" name="TextBox 14"/>
           <p:cNvSpPr txBox="1"/>
           <p:nvPr/>
         </p:nvSpPr>
         <p:spPr>
           <a:xfrm>
-            <a:off x="667512" y="2996692"/>
-            <a:ext cx="5250027" cy="2959608"/>
+            <a:off x="667512" y="2941828"/>
+            <a:ext cx="5250027" cy="3014472"/>
           </a:xfrm>
           <a:prstGeom prst="rect">
             <a:avLst/>
@@ -9032,7 +7280,7 @@
       </p:sp>
       <p:sp>
         <p:nvSpPr>
-          <p:cNvPr id="25" name="Rectangle 24"/>
+          <p:cNvPr id="16" name="Rectangle 15"/>
           <p:cNvSpPr/>
           <p:nvPr/>
         </p:nvSpPr>
@@ -9077,7 +7325,7 @@
       </p:sp>
       <p:sp>
         <p:nvSpPr>
-          <p:cNvPr id="26" name="Rectangle 25"/>
+          <p:cNvPr id="17" name="Rectangle 16"/>
           <p:cNvSpPr/>
           <p:nvPr/>
         </p:nvSpPr>
@@ -9120,138 +7368,14 @@
       </p:sp>
       <p:sp>
         <p:nvSpPr>
-          <p:cNvPr id="27" name="Oval 26"/>
+          <p:cNvPr id="18" name="Oval 17"/>
           <p:cNvSpPr/>
           <p:nvPr/>
         </p:nvSpPr>
         <p:spPr>
           <a:xfrm>
-            <a:off x="6484467" y="2450592"/>
-            <a:ext cx="329184" cy="329184"/>
-          </a:xfrm>
-          <a:prstGeom prst="ellipse">
-            <a:avLst/>
-          </a:prstGeom>
-          <a:solidFill>
-            <a:srgbClr val="13B9BF"/>
-          </a:solidFill>
-          <a:ln>
-            <a:noFill/>
-          </a:ln>
-        </p:spPr>
-        <p:style>
-          <a:lnRef idx="1">
-            <a:schemeClr val="accent1"/>
-          </a:lnRef>
-          <a:fillRef idx="3">
-            <a:schemeClr val="accent1"/>
-          </a:fillRef>
-          <a:effectRef idx="2">
-            <a:schemeClr val="accent1"/>
-          </a:effectRef>
-          <a:fontRef idx="minor">
-            <a:schemeClr val="lt1"/>
-          </a:fontRef>
-        </p:style>
-        <p:txBody>
-          <a:bodyPr rtlCol="0" anchor="ctr"/>
-          <a:lstStyle/>
-          <a:p>
-            <a:pPr algn="ctr"/>
-          </a:p>
-        </p:txBody>
-      </p:sp>
-      <p:sp>
-        <p:nvSpPr>
-          <p:cNvPr id="28" name="Oval 27"/>
-          <p:cNvSpPr/>
-          <p:nvPr/>
-        </p:nvSpPr>
-        <p:spPr>
-          <a:xfrm>
-            <a:off x="6547012" y="2513136"/>
-            <a:ext cx="204094" cy="204094"/>
-          </a:xfrm>
-          <a:prstGeom prst="ellipse">
-            <a:avLst/>
-          </a:prstGeom>
-          <a:solidFill>
-            <a:srgbClr val="088A8F"/>
-          </a:solidFill>
-          <a:ln>
-            <a:noFill/>
-          </a:ln>
-        </p:spPr>
-        <p:style>
-          <a:lnRef idx="1">
-            <a:schemeClr val="accent1"/>
-          </a:lnRef>
-          <a:fillRef idx="3">
-            <a:schemeClr val="accent1"/>
-          </a:fillRef>
-          <a:effectRef idx="2">
-            <a:schemeClr val="accent1"/>
-          </a:effectRef>
-          <a:fontRef idx="minor">
-            <a:schemeClr val="lt1"/>
-          </a:fontRef>
-        </p:style>
-        <p:txBody>
-          <a:bodyPr rtlCol="0" anchor="ctr"/>
-          <a:lstStyle/>
-          <a:p>
-            <a:pPr algn="ctr"/>
-          </a:p>
-        </p:txBody>
-      </p:sp>
-      <p:sp>
-        <p:nvSpPr>
-          <p:cNvPr id="29" name="TextBox 28"/>
-          <p:cNvSpPr txBox="1"/>
-          <p:nvPr/>
-        </p:nvSpPr>
-        <p:spPr>
-          <a:xfrm>
-            <a:off x="6484467" y="2450592"/>
-            <a:ext cx="329184" cy="329184"/>
-          </a:xfrm>
-          <a:prstGeom prst="rect">
-            <a:avLst/>
-          </a:prstGeom>
-          <a:noFill/>
-        </p:spPr>
-        <p:txBody lIns="0" tIns="0" rIns="0" bIns="0">
-          <a:bodyPr wrap="none">
-            <a:spAutoFit/>
-          </a:bodyPr>
-          <a:lstStyle/>
-          <a:p>
-            <a:pPr algn="ctr">
-              <a:spcBef>
-                <a:spcPts val="200"/>
-              </a:spcBef>
-            </a:pPr>
-            <a:r>
-              <a:rPr sz="1100" b="1">
-                <a:solidFill>
-                  <a:srgbClr val="FFFFFF"/>
-                </a:solidFill>
-              </a:rPr>
-              <a:t>◆</a:t>
-            </a:r>
-          </a:p>
-        </p:txBody>
-      </p:sp>
-      <p:sp>
-        <p:nvSpPr>
-          <p:cNvPr id="30" name="Oval 29"/>
-          <p:cNvSpPr/>
-          <p:nvPr/>
-        </p:nvSpPr>
-        <p:spPr>
-          <a:xfrm>
-            <a:off x="6905091" y="2487168"/>
-            <a:ext cx="201168" cy="201168"/>
+            <a:off x="6484467" y="2468880"/>
+            <a:ext cx="274320" cy="274320"/>
           </a:xfrm>
           <a:prstGeom prst="ellipse">
             <a:avLst/>
@@ -9289,14 +7413,14 @@
       </p:sp>
       <p:sp>
         <p:nvSpPr>
-          <p:cNvPr id="31" name="TextBox 30"/>
+          <p:cNvPr id="19" name="TextBox 18"/>
           <p:cNvSpPr txBox="1"/>
           <p:nvPr/>
         </p:nvSpPr>
         <p:spPr>
           <a:xfrm>
-            <a:off x="6905091" y="2487168"/>
-            <a:ext cx="201168" cy="201168"/>
+            <a:off x="6484467" y="2468880"/>
+            <a:ext cx="274320" cy="274320"/>
           </a:xfrm>
           <a:prstGeom prst="rect">
             <a:avLst/>
@@ -9323,14 +7447,14 @@
       </p:sp>
       <p:sp>
         <p:nvSpPr>
-          <p:cNvPr id="32" name="TextBox 31"/>
+          <p:cNvPr id="20" name="TextBox 19"/>
           <p:cNvSpPr txBox="1"/>
           <p:nvPr/>
         </p:nvSpPr>
         <p:spPr>
           <a:xfrm>
-            <a:off x="6941667" y="2450592"/>
-            <a:ext cx="4792827" cy="658368"/>
+            <a:off x="6868515" y="2468880"/>
+            <a:ext cx="4792827" cy="566928"/>
           </a:xfrm>
           <a:prstGeom prst="rect">
             <a:avLst/>
@@ -9357,13 +7481,13 @@
       </p:sp>
       <p:sp>
         <p:nvSpPr>
-          <p:cNvPr id="33" name="Rectangle 32"/>
+          <p:cNvPr id="21" name="Rectangle 20"/>
           <p:cNvSpPr/>
           <p:nvPr/>
         </p:nvSpPr>
         <p:spPr>
           <a:xfrm>
-            <a:off x="6447891" y="2907792"/>
+            <a:off x="6447891" y="2852928"/>
             <a:ext cx="5250027" cy="15240"/>
           </a:xfrm>
           <a:prstGeom prst="rect">
@@ -9400,14 +7524,14 @@
       </p:sp>
       <p:sp>
         <p:nvSpPr>
-          <p:cNvPr id="34" name="TextBox 33"/>
+          <p:cNvPr id="22" name="TextBox 21"/>
           <p:cNvSpPr txBox="1"/>
           <p:nvPr/>
         </p:nvSpPr>
         <p:spPr>
           <a:xfrm>
-            <a:off x="6447891" y="2996692"/>
-            <a:ext cx="5250027" cy="2959608"/>
+            <a:off x="6447891" y="2941828"/>
+            <a:ext cx="5250027" cy="3014472"/>
           </a:xfrm>
           <a:prstGeom prst="rect">
             <a:avLst/>
@@ -9490,6 +7614,30 @@
           </a:p>
         </p:txBody>
       </p:sp>
+      <p:pic>
+        <p:nvPicPr>
+          <p:cNvPr id="23" name="Picture 22" descr="logo_horiz.png"/>
+          <p:cNvPicPr>
+            <a:picLocks noChangeAspect="1"/>
+          </p:cNvPicPr>
+          <p:nvPr/>
+        </p:nvPicPr>
+        <p:blipFill>
+          <a:blip r:embed="rId3"/>
+          <a:stretch>
+            <a:fillRect/>
+          </a:stretch>
+        </p:blipFill>
+        <p:spPr>
+          <a:xfrm>
+            <a:off x="10024567" y="6062197"/>
+            <a:ext cx="1965960" cy="631211"/>
+          </a:xfrm>
+          <a:prstGeom prst="rect">
+            <a:avLst/>
+          </a:prstGeom>
+        </p:spPr>
+      </p:pic>
     </p:spTree>
   </p:cSld>
   <p:clrMapOvr>
@@ -9519,7 +7667,7 @@
                                 <p:cBhvr>
                                   <p:cTn id="6" dur="450" fill="hold"/>
                                   <p:tgtEl>
-                                    <p:spTgt spid="15"/>
+                                    <p:spTgt spid="9"/>
                                   </p:tgtEl>
                                 </p:cBhvr>
                               </p:animEffect>
@@ -9536,7 +7684,7 @@
                                 <p:cBhvr>
                                   <p:cTn id="8" dur="450" fill="hold"/>
                                   <p:tgtEl>
-                                    <p:spTgt spid="25"/>
+                                    <p:spTgt spid="16"/>
                                   </p:tgtEl>
                                 </p:cBhvr>
                               </p:animEffect>
@@ -9822,248 +7970,9 @@
           </a:p>
         </p:txBody>
       </p:sp>
-      <p:pic>
-        <p:nvPicPr>
-          <p:cNvPr id="8" name="Picture 7" descr="logo_horiz.png"/>
-          <p:cNvPicPr>
-            <a:picLocks noChangeAspect="1"/>
-          </p:cNvPicPr>
-          <p:nvPr/>
-        </p:nvPicPr>
-        <p:blipFill>
-          <a:blip r:embed="rId3"/>
-          <a:stretch>
-            <a:fillRect/>
-          </a:stretch>
-        </p:blipFill>
-        <p:spPr>
-          <a:xfrm>
-            <a:off x="10024567" y="6062197"/>
-            <a:ext cx="1965960" cy="631211"/>
-          </a:xfrm>
-          <a:prstGeom prst="rect">
-            <a:avLst/>
-          </a:prstGeom>
-        </p:spPr>
-      </p:pic>
-      <p:sp>
-        <p:nvSpPr>
-          <p:cNvPr id="9" name="Oval 8"/>
-          <p:cNvSpPr/>
-          <p:nvPr/>
-        </p:nvSpPr>
-        <p:spPr>
-          <a:xfrm>
-            <a:off x="5554065" y="6510528"/>
-            <a:ext cx="77724" cy="77724"/>
-          </a:xfrm>
-          <a:prstGeom prst="ellipse">
-            <a:avLst/>
-          </a:prstGeom>
-          <a:noFill/>
-          <a:ln w="10160">
-            <a:solidFill>
-              <a:srgbClr val="13B9BF"/>
-            </a:solidFill>
-          </a:ln>
-        </p:spPr>
-        <p:style>
-          <a:lnRef idx="1">
-            <a:schemeClr val="accent1"/>
-          </a:lnRef>
-          <a:fillRef idx="3">
-            <a:schemeClr val="accent1"/>
-          </a:fillRef>
-          <a:effectRef idx="2">
-            <a:schemeClr val="accent1"/>
-          </a:effectRef>
-          <a:fontRef idx="minor">
-            <a:schemeClr val="lt1"/>
-          </a:fontRef>
-        </p:style>
-        <p:txBody>
-          <a:bodyPr rtlCol="0" anchor="ctr"/>
-          <a:lstStyle/>
-          <a:p>
-            <a:pPr algn="ctr"/>
-          </a:p>
-        </p:txBody>
-      </p:sp>
-      <p:sp>
-        <p:nvSpPr>
-          <p:cNvPr id="10" name="Oval 9"/>
-          <p:cNvSpPr/>
-          <p:nvPr/>
-        </p:nvSpPr>
-        <p:spPr>
-          <a:xfrm>
-            <a:off x="5805525" y="6510528"/>
-            <a:ext cx="77724" cy="77724"/>
-          </a:xfrm>
-          <a:prstGeom prst="ellipse">
-            <a:avLst/>
-          </a:prstGeom>
-          <a:noFill/>
-          <a:ln w="10160">
-            <a:solidFill>
-              <a:srgbClr val="13B9BF"/>
-            </a:solidFill>
-          </a:ln>
-        </p:spPr>
-        <p:style>
-          <a:lnRef idx="1">
-            <a:schemeClr val="accent1"/>
-          </a:lnRef>
-          <a:fillRef idx="3">
-            <a:schemeClr val="accent1"/>
-          </a:fillRef>
-          <a:effectRef idx="2">
-            <a:schemeClr val="accent1"/>
-          </a:effectRef>
-          <a:fontRef idx="minor">
-            <a:schemeClr val="lt1"/>
-          </a:fontRef>
-        </p:style>
-        <p:txBody>
-          <a:bodyPr rtlCol="0" anchor="ctr"/>
-          <a:lstStyle/>
-          <a:p>
-            <a:pPr algn="ctr"/>
-          </a:p>
-        </p:txBody>
-      </p:sp>
-      <p:sp>
-        <p:nvSpPr>
-          <p:cNvPr id="11" name="Oval 10"/>
-          <p:cNvSpPr/>
-          <p:nvPr/>
-        </p:nvSpPr>
-        <p:spPr>
-          <a:xfrm>
-            <a:off x="6056985" y="6510528"/>
-            <a:ext cx="77724" cy="77724"/>
-          </a:xfrm>
-          <a:prstGeom prst="ellipse">
-            <a:avLst/>
-          </a:prstGeom>
-          <a:noFill/>
-          <a:ln w="10160">
-            <a:solidFill>
-              <a:srgbClr val="13B9BF"/>
-            </a:solidFill>
-          </a:ln>
-        </p:spPr>
-        <p:style>
-          <a:lnRef idx="1">
-            <a:schemeClr val="accent1"/>
-          </a:lnRef>
-          <a:fillRef idx="3">
-            <a:schemeClr val="accent1"/>
-          </a:fillRef>
-          <a:effectRef idx="2">
-            <a:schemeClr val="accent1"/>
-          </a:effectRef>
-          <a:fontRef idx="minor">
-            <a:schemeClr val="lt1"/>
-          </a:fontRef>
-        </p:style>
-        <p:txBody>
-          <a:bodyPr rtlCol="0" anchor="ctr"/>
-          <a:lstStyle/>
-          <a:p>
-            <a:pPr algn="ctr"/>
-          </a:p>
-        </p:txBody>
-      </p:sp>
-      <p:sp>
-        <p:nvSpPr>
-          <p:cNvPr id="12" name="Oval 11"/>
-          <p:cNvSpPr/>
-          <p:nvPr/>
-        </p:nvSpPr>
-        <p:spPr>
-          <a:xfrm>
-            <a:off x="6308445" y="6510528"/>
-            <a:ext cx="77724" cy="77724"/>
-          </a:xfrm>
-          <a:prstGeom prst="ellipse">
-            <a:avLst/>
-          </a:prstGeom>
-          <a:noFill/>
-          <a:ln w="10160">
-            <a:solidFill>
-              <a:srgbClr val="13B9BF"/>
-            </a:solidFill>
-          </a:ln>
-        </p:spPr>
-        <p:style>
-          <a:lnRef idx="1">
-            <a:schemeClr val="accent1"/>
-          </a:lnRef>
-          <a:fillRef idx="3">
-            <a:schemeClr val="accent1"/>
-          </a:fillRef>
-          <a:effectRef idx="2">
-            <a:schemeClr val="accent1"/>
-          </a:effectRef>
-          <a:fontRef idx="minor">
-            <a:schemeClr val="lt1"/>
-          </a:fontRef>
-        </p:style>
-        <p:txBody>
-          <a:bodyPr rtlCol="0" anchor="ctr"/>
-          <a:lstStyle/>
-          <a:p>
-            <a:pPr algn="ctr"/>
-          </a:p>
-        </p:txBody>
-      </p:sp>
-      <p:sp>
-        <p:nvSpPr>
-          <p:cNvPr id="13" name="Oval 12"/>
-          <p:cNvSpPr/>
-          <p:nvPr/>
-        </p:nvSpPr>
-        <p:spPr>
-          <a:xfrm>
-            <a:off x="6559905" y="6510528"/>
-            <a:ext cx="77724" cy="77724"/>
-          </a:xfrm>
-          <a:prstGeom prst="ellipse">
-            <a:avLst/>
-          </a:prstGeom>
-          <a:solidFill>
-            <a:srgbClr val="2FDFE5"/>
-          </a:solidFill>
-          <a:ln>
-            <a:noFill/>
-          </a:ln>
-        </p:spPr>
-        <p:style>
-          <a:lnRef idx="1">
-            <a:schemeClr val="accent1"/>
-          </a:lnRef>
-          <a:fillRef idx="3">
-            <a:schemeClr val="accent1"/>
-          </a:fillRef>
-          <a:effectRef idx="2">
-            <a:schemeClr val="accent1"/>
-          </a:effectRef>
-          <a:fontRef idx="minor">
-            <a:schemeClr val="lt1"/>
-          </a:fontRef>
-        </p:style>
-        <p:txBody>
-          <a:bodyPr rtlCol="0" anchor="ctr"/>
-          <a:lstStyle/>
-          <a:p>
-            <a:pPr algn="ctr"/>
-          </a:p>
-        </p:txBody>
-      </p:sp>
-      <p:sp>
-        <p:nvSpPr>
-          <p:cNvPr id="14" name="Rectangle 13"/>
+      <p:sp>
+        <p:nvSpPr>
+          <p:cNvPr id="8" name="Rectangle 7"/>
           <p:cNvSpPr/>
           <p:nvPr/>
         </p:nvSpPr>
@@ -10108,7 +8017,7 @@
       </p:sp>
       <p:sp>
         <p:nvSpPr>
-          <p:cNvPr id="15" name="Rectangle 14"/>
+          <p:cNvPr id="9" name="Rectangle 8"/>
           <p:cNvSpPr/>
           <p:nvPr/>
         </p:nvSpPr>
@@ -10151,16 +8060,129 @@
       </p:sp>
       <p:sp>
         <p:nvSpPr>
-          <p:cNvPr id="16" name="Oval 15"/>
+          <p:cNvPr id="10" name="Oval 9"/>
           <p:cNvSpPr/>
           <p:nvPr/>
         </p:nvSpPr>
         <p:spPr>
           <a:xfrm>
             <a:off x="685800" y="2084832"/>
-            <a:ext cx="292608" cy="292608"/>
+            <a:ext cx="256032" cy="256032"/>
           </a:xfrm>
           <a:prstGeom prst="ellipse">
+            <a:avLst/>
+          </a:prstGeom>
+          <a:solidFill>
+            <a:srgbClr val="0A1638"/>
+          </a:solidFill>
+          <a:ln w="15240">
+            <a:solidFill>
+              <a:srgbClr val="2FDFE5"/>
+            </a:solidFill>
+          </a:ln>
+        </p:spPr>
+        <p:style>
+          <a:lnRef idx="1">
+            <a:schemeClr val="accent1"/>
+          </a:lnRef>
+          <a:fillRef idx="3">
+            <a:schemeClr val="accent1"/>
+          </a:fillRef>
+          <a:effectRef idx="2">
+            <a:schemeClr val="accent1"/>
+          </a:effectRef>
+          <a:fontRef idx="minor">
+            <a:schemeClr val="lt1"/>
+          </a:fontRef>
+        </p:style>
+        <p:txBody>
+          <a:bodyPr rtlCol="0" anchor="ctr"/>
+          <a:lstStyle/>
+          <a:p>
+            <a:pPr algn="ctr"/>
+          </a:p>
+        </p:txBody>
+      </p:sp>
+      <p:sp>
+        <p:nvSpPr>
+          <p:cNvPr id="11" name="TextBox 10"/>
+          <p:cNvSpPr txBox="1"/>
+          <p:nvPr/>
+        </p:nvSpPr>
+        <p:spPr>
+          <a:xfrm>
+            <a:off x="685800" y="2084832"/>
+            <a:ext cx="256032" cy="256032"/>
+          </a:xfrm>
+          <a:prstGeom prst="rect">
+            <a:avLst/>
+          </a:prstGeom>
+          <a:noFill/>
+        </p:spPr>
+        <p:txBody lIns="0" tIns="12700" rIns="0" bIns="0">
+          <a:bodyPr wrap="none">
+            <a:spAutoFit/>
+          </a:bodyPr>
+          <a:lstStyle/>
+          <a:p>
+            <a:pPr algn="ctr"/>
+            <a:r>
+              <a:rPr sz="1100" b="1">
+                <a:solidFill>
+                  <a:srgbClr val="2FDFE5"/>
+                </a:solidFill>
+              </a:rPr>
+              <a:t>1</a:t>
+            </a:r>
+          </a:p>
+        </p:txBody>
+      </p:sp>
+      <p:sp>
+        <p:nvSpPr>
+          <p:cNvPr id="12" name="TextBox 11"/>
+          <p:cNvSpPr txBox="1"/>
+          <p:nvPr/>
+        </p:nvSpPr>
+        <p:spPr>
+          <a:xfrm>
+            <a:off x="1051560" y="2084832"/>
+            <a:ext cx="4865979" cy="512064"/>
+          </a:xfrm>
+          <a:prstGeom prst="rect">
+            <a:avLst/>
+          </a:prstGeom>
+          <a:noFill/>
+        </p:spPr>
+        <p:txBody lIns="38100" tIns="25400" rIns="38100" bIns="25400">
+          <a:bodyPr wrap="square">
+            <a:spAutoFit/>
+          </a:bodyPr>
+          <a:lstStyle/>
+          <a:p>
+            <a:pPr algn="l"/>
+            <a:r>
+              <a:rPr sz="1400" b="1">
+                <a:solidFill>
+                  <a:srgbClr val="FFFFFF"/>
+                </a:solidFill>
+              </a:rPr>
+              <a:t>Vía monitoria</a:t>
+            </a:r>
+          </a:p>
+        </p:txBody>
+      </p:sp>
+      <p:sp>
+        <p:nvSpPr>
+          <p:cNvPr id="13" name="Rectangle 12"/>
+          <p:cNvSpPr/>
+          <p:nvPr/>
+        </p:nvSpPr>
+        <p:spPr>
+          <a:xfrm>
+            <a:off x="649224" y="2450592"/>
+            <a:ext cx="5286603" cy="12700"/>
+          </a:xfrm>
+          <a:prstGeom prst="rect">
             <a:avLst/>
           </a:prstGeom>
           <a:solidFill>
@@ -10194,172 +8216,14 @@
       </p:sp>
       <p:sp>
         <p:nvSpPr>
-          <p:cNvPr id="17" name="Oval 16"/>
-          <p:cNvSpPr/>
-          <p:nvPr/>
-        </p:nvSpPr>
-        <p:spPr>
-          <a:xfrm>
-            <a:off x="741395" y="2140427"/>
-            <a:ext cx="181416" cy="181416"/>
-          </a:xfrm>
-          <a:prstGeom prst="ellipse">
-            <a:avLst/>
-          </a:prstGeom>
-          <a:solidFill>
-            <a:srgbClr val="088A8F"/>
-          </a:solidFill>
-          <a:ln>
-            <a:noFill/>
-          </a:ln>
-        </p:spPr>
-        <p:style>
-          <a:lnRef idx="1">
-            <a:schemeClr val="accent1"/>
-          </a:lnRef>
-          <a:fillRef idx="3">
-            <a:schemeClr val="accent1"/>
-          </a:fillRef>
-          <a:effectRef idx="2">
-            <a:schemeClr val="accent1"/>
-          </a:effectRef>
-          <a:fontRef idx="minor">
-            <a:schemeClr val="lt1"/>
-          </a:fontRef>
-        </p:style>
-        <p:txBody>
-          <a:bodyPr rtlCol="0" anchor="ctr"/>
-          <a:lstStyle/>
-          <a:p>
-            <a:pPr algn="ctr"/>
-          </a:p>
-        </p:txBody>
-      </p:sp>
-      <p:sp>
-        <p:nvSpPr>
-          <p:cNvPr id="18" name="TextBox 17"/>
+          <p:cNvPr id="14" name="TextBox 13"/>
           <p:cNvSpPr txBox="1"/>
           <p:nvPr/>
         </p:nvSpPr>
         <p:spPr>
           <a:xfrm>
-            <a:off x="685800" y="2084832"/>
-            <a:ext cx="292608" cy="292608"/>
-          </a:xfrm>
-          <a:prstGeom prst="rect">
-            <a:avLst/>
-          </a:prstGeom>
-          <a:noFill/>
-        </p:spPr>
-        <p:txBody lIns="0" tIns="0" rIns="0" bIns="0">
-          <a:bodyPr wrap="none">
-            <a:spAutoFit/>
-          </a:bodyPr>
-          <a:lstStyle/>
-          <a:p>
-            <a:pPr algn="ctr">
-              <a:spcBef>
-                <a:spcPts val="200"/>
-              </a:spcBef>
-            </a:pPr>
-            <a:r>
-              <a:rPr sz="1100" b="1">
-                <a:solidFill>
-                  <a:srgbClr val="FFFFFF"/>
-                </a:solidFill>
-              </a:rPr>
-              <a:t>▼</a:t>
-            </a:r>
-          </a:p>
-        </p:txBody>
-      </p:sp>
-      <p:sp>
-        <p:nvSpPr>
-          <p:cNvPr id="19" name="TextBox 18"/>
-          <p:cNvSpPr txBox="1"/>
-          <p:nvPr/>
-        </p:nvSpPr>
-        <p:spPr>
-          <a:xfrm>
-            <a:off x="1088136" y="2084832"/>
-            <a:ext cx="4884267" cy="566928"/>
-          </a:xfrm>
-          <a:prstGeom prst="rect">
-            <a:avLst/>
-          </a:prstGeom>
-          <a:noFill/>
-        </p:spPr>
-        <p:txBody lIns="38100" tIns="25400" rIns="38100" bIns="25400">
-          <a:bodyPr wrap="square">
-            <a:spAutoFit/>
-          </a:bodyPr>
-          <a:lstStyle/>
-          <a:p>
-            <a:pPr algn="l"/>
-            <a:r>
-              <a:rPr sz="1400" b="1">
-                <a:solidFill>
-                  <a:srgbClr val="FFFFFF"/>
-                </a:solidFill>
-              </a:rPr>
-              <a:t>Vía monitoria</a:t>
-            </a:r>
-          </a:p>
-        </p:txBody>
-      </p:sp>
-      <p:sp>
-        <p:nvSpPr>
-          <p:cNvPr id="20" name="Rectangle 19"/>
-          <p:cNvSpPr/>
-          <p:nvPr/>
-        </p:nvSpPr>
-        <p:spPr>
-          <a:xfrm>
-            <a:off x="649224" y="2487168"/>
-            <a:ext cx="5286603" cy="12700"/>
-          </a:xfrm>
-          <a:prstGeom prst="rect">
-            <a:avLst/>
-          </a:prstGeom>
-          <a:solidFill>
-            <a:srgbClr val="13B9BF"/>
-          </a:solidFill>
-          <a:ln>
-            <a:noFill/>
-          </a:ln>
-        </p:spPr>
-        <p:style>
-          <a:lnRef idx="1">
-            <a:schemeClr val="accent1"/>
-          </a:lnRef>
-          <a:fillRef idx="3">
-            <a:schemeClr val="accent1"/>
-          </a:fillRef>
-          <a:effectRef idx="2">
-            <a:schemeClr val="accent1"/>
-          </a:effectRef>
-          <a:fontRef idx="minor">
-            <a:schemeClr val="lt1"/>
-          </a:fontRef>
-        </p:style>
-        <p:txBody>
-          <a:bodyPr rtlCol="0" anchor="ctr"/>
-          <a:lstStyle/>
-          <a:p>
-            <a:pPr algn="ctr"/>
-          </a:p>
-        </p:txBody>
-      </p:sp>
-      <p:sp>
-        <p:nvSpPr>
-          <p:cNvPr id="21" name="TextBox 20"/>
-          <p:cNvSpPr txBox="1"/>
-          <p:nvPr/>
-        </p:nvSpPr>
-        <p:spPr>
-          <a:xfrm>
-            <a:off x="649224" y="2563368"/>
-            <a:ext cx="5286603" cy="1271524"/>
+            <a:off x="649224" y="2526792"/>
+            <a:ext cx="5286603" cy="1308100"/>
           </a:xfrm>
           <a:prstGeom prst="rect">
             <a:avLst/>
@@ -10386,7 +8250,7 @@
       </p:sp>
       <p:sp>
         <p:nvSpPr>
-          <p:cNvPr id="22" name="Rectangle 21"/>
+          <p:cNvPr id="15" name="Rectangle 14"/>
           <p:cNvSpPr/>
           <p:nvPr/>
         </p:nvSpPr>
@@ -10431,7 +8295,7 @@
       </p:sp>
       <p:sp>
         <p:nvSpPr>
-          <p:cNvPr id="23" name="Rectangle 22"/>
+          <p:cNvPr id="16" name="Rectangle 15"/>
           <p:cNvSpPr/>
           <p:nvPr/>
         </p:nvSpPr>
@@ -10474,16 +8338,129 @@
       </p:sp>
       <p:sp>
         <p:nvSpPr>
-          <p:cNvPr id="24" name="Oval 23"/>
+          <p:cNvPr id="17" name="Oval 16"/>
           <p:cNvSpPr/>
           <p:nvPr/>
         </p:nvSpPr>
         <p:spPr>
           <a:xfrm>
             <a:off x="6466179" y="2084832"/>
-            <a:ext cx="292608" cy="292608"/>
+            <a:ext cx="256032" cy="256032"/>
           </a:xfrm>
           <a:prstGeom prst="ellipse">
+            <a:avLst/>
+          </a:prstGeom>
+          <a:solidFill>
+            <a:srgbClr val="0A1638"/>
+          </a:solidFill>
+          <a:ln w="15240">
+            <a:solidFill>
+              <a:srgbClr val="2FDFE5"/>
+            </a:solidFill>
+          </a:ln>
+        </p:spPr>
+        <p:style>
+          <a:lnRef idx="1">
+            <a:schemeClr val="accent1"/>
+          </a:lnRef>
+          <a:fillRef idx="3">
+            <a:schemeClr val="accent1"/>
+          </a:fillRef>
+          <a:effectRef idx="2">
+            <a:schemeClr val="accent1"/>
+          </a:effectRef>
+          <a:fontRef idx="minor">
+            <a:schemeClr val="lt1"/>
+          </a:fontRef>
+        </p:style>
+        <p:txBody>
+          <a:bodyPr rtlCol="0" anchor="ctr"/>
+          <a:lstStyle/>
+          <a:p>
+            <a:pPr algn="ctr"/>
+          </a:p>
+        </p:txBody>
+      </p:sp>
+      <p:sp>
+        <p:nvSpPr>
+          <p:cNvPr id="18" name="TextBox 17"/>
+          <p:cNvSpPr txBox="1"/>
+          <p:nvPr/>
+        </p:nvSpPr>
+        <p:spPr>
+          <a:xfrm>
+            <a:off x="6466179" y="2084832"/>
+            <a:ext cx="256032" cy="256032"/>
+          </a:xfrm>
+          <a:prstGeom prst="rect">
+            <a:avLst/>
+          </a:prstGeom>
+          <a:noFill/>
+        </p:spPr>
+        <p:txBody lIns="0" tIns="12700" rIns="0" bIns="0">
+          <a:bodyPr wrap="none">
+            <a:spAutoFit/>
+          </a:bodyPr>
+          <a:lstStyle/>
+          <a:p>
+            <a:pPr algn="ctr"/>
+            <a:r>
+              <a:rPr sz="1100" b="1">
+                <a:solidFill>
+                  <a:srgbClr val="2FDFE5"/>
+                </a:solidFill>
+              </a:rPr>
+              <a:t>2</a:t>
+            </a:r>
+          </a:p>
+        </p:txBody>
+      </p:sp>
+      <p:sp>
+        <p:nvSpPr>
+          <p:cNvPr id="19" name="TextBox 18"/>
+          <p:cNvSpPr txBox="1"/>
+          <p:nvPr/>
+        </p:nvSpPr>
+        <p:spPr>
+          <a:xfrm>
+            <a:off x="6831939" y="2084832"/>
+            <a:ext cx="4865979" cy="512064"/>
+          </a:xfrm>
+          <a:prstGeom prst="rect">
+            <a:avLst/>
+          </a:prstGeom>
+          <a:noFill/>
+        </p:spPr>
+        <p:txBody lIns="38100" tIns="25400" rIns="38100" bIns="25400">
+          <a:bodyPr wrap="square">
+            <a:spAutoFit/>
+          </a:bodyPr>
+          <a:lstStyle/>
+          <a:p>
+            <a:pPr algn="l"/>
+            <a:r>
+              <a:rPr sz="1400" b="1">
+                <a:solidFill>
+                  <a:srgbClr val="FFFFFF"/>
+                </a:solidFill>
+              </a:rPr>
+              <a:t>Acción disuasoria</a:t>
+            </a:r>
+          </a:p>
+        </p:txBody>
+      </p:sp>
+      <p:sp>
+        <p:nvSpPr>
+          <p:cNvPr id="20" name="Rectangle 19"/>
+          <p:cNvSpPr/>
+          <p:nvPr/>
+        </p:nvSpPr>
+        <p:spPr>
+          <a:xfrm>
+            <a:off x="6429603" y="2450592"/>
+            <a:ext cx="5286603" cy="12700"/>
+          </a:xfrm>
+          <a:prstGeom prst="rect">
             <a:avLst/>
           </a:prstGeom>
           <a:solidFill>
@@ -10517,172 +8494,14 @@
       </p:sp>
       <p:sp>
         <p:nvSpPr>
-          <p:cNvPr id="25" name="Oval 24"/>
-          <p:cNvSpPr/>
-          <p:nvPr/>
-        </p:nvSpPr>
-        <p:spPr>
-          <a:xfrm>
-            <a:off x="6521775" y="2140427"/>
-            <a:ext cx="181416" cy="181416"/>
-          </a:xfrm>
-          <a:prstGeom prst="ellipse">
-            <a:avLst/>
-          </a:prstGeom>
-          <a:solidFill>
-            <a:srgbClr val="088A8F"/>
-          </a:solidFill>
-          <a:ln>
-            <a:noFill/>
-          </a:ln>
-        </p:spPr>
-        <p:style>
-          <a:lnRef idx="1">
-            <a:schemeClr val="accent1"/>
-          </a:lnRef>
-          <a:fillRef idx="3">
-            <a:schemeClr val="accent1"/>
-          </a:fillRef>
-          <a:effectRef idx="2">
-            <a:schemeClr val="accent1"/>
-          </a:effectRef>
-          <a:fontRef idx="minor">
-            <a:schemeClr val="lt1"/>
-          </a:fontRef>
-        </p:style>
-        <p:txBody>
-          <a:bodyPr rtlCol="0" anchor="ctr"/>
-          <a:lstStyle/>
-          <a:p>
-            <a:pPr algn="ctr"/>
-          </a:p>
-        </p:txBody>
-      </p:sp>
-      <p:sp>
-        <p:nvSpPr>
-          <p:cNvPr id="26" name="TextBox 25"/>
+          <p:cNvPr id="21" name="TextBox 20"/>
           <p:cNvSpPr txBox="1"/>
           <p:nvPr/>
         </p:nvSpPr>
         <p:spPr>
           <a:xfrm>
-            <a:off x="6466179" y="2084832"/>
-            <a:ext cx="292608" cy="292608"/>
-          </a:xfrm>
-          <a:prstGeom prst="rect">
-            <a:avLst/>
-          </a:prstGeom>
-          <a:noFill/>
-        </p:spPr>
-        <p:txBody lIns="0" tIns="0" rIns="0" bIns="0">
-          <a:bodyPr wrap="none">
-            <a:spAutoFit/>
-          </a:bodyPr>
-          <a:lstStyle/>
-          <a:p>
-            <a:pPr algn="ctr">
-              <a:spcBef>
-                <a:spcPts val="200"/>
-              </a:spcBef>
-            </a:pPr>
-            <a:r>
-              <a:rPr sz="1100" b="1">
-                <a:solidFill>
-                  <a:srgbClr val="FFFFFF"/>
-                </a:solidFill>
-              </a:rPr>
-              <a:t>◆</a:t>
-            </a:r>
-          </a:p>
-        </p:txBody>
-      </p:sp>
-      <p:sp>
-        <p:nvSpPr>
-          <p:cNvPr id="27" name="TextBox 26"/>
-          <p:cNvSpPr txBox="1"/>
-          <p:nvPr/>
-        </p:nvSpPr>
-        <p:spPr>
-          <a:xfrm>
-            <a:off x="6868515" y="2084832"/>
-            <a:ext cx="4884267" cy="566928"/>
-          </a:xfrm>
-          <a:prstGeom prst="rect">
-            <a:avLst/>
-          </a:prstGeom>
-          <a:noFill/>
-        </p:spPr>
-        <p:txBody lIns="38100" tIns="25400" rIns="38100" bIns="25400">
-          <a:bodyPr wrap="square">
-            <a:spAutoFit/>
-          </a:bodyPr>
-          <a:lstStyle/>
-          <a:p>
-            <a:pPr algn="l"/>
-            <a:r>
-              <a:rPr sz="1400" b="1">
-                <a:solidFill>
-                  <a:srgbClr val="FFFFFF"/>
-                </a:solidFill>
-              </a:rPr>
-              <a:t>Acción disuasoria</a:t>
-            </a:r>
-          </a:p>
-        </p:txBody>
-      </p:sp>
-      <p:sp>
-        <p:nvSpPr>
-          <p:cNvPr id="28" name="Rectangle 27"/>
-          <p:cNvSpPr/>
-          <p:nvPr/>
-        </p:nvSpPr>
-        <p:spPr>
-          <a:xfrm>
-            <a:off x="6429603" y="2487168"/>
-            <a:ext cx="5286603" cy="12700"/>
-          </a:xfrm>
-          <a:prstGeom prst="rect">
-            <a:avLst/>
-          </a:prstGeom>
-          <a:solidFill>
-            <a:srgbClr val="13B9BF"/>
-          </a:solidFill>
-          <a:ln>
-            <a:noFill/>
-          </a:ln>
-        </p:spPr>
-        <p:style>
-          <a:lnRef idx="1">
-            <a:schemeClr val="accent1"/>
-          </a:lnRef>
-          <a:fillRef idx="3">
-            <a:schemeClr val="accent1"/>
-          </a:fillRef>
-          <a:effectRef idx="2">
-            <a:schemeClr val="accent1"/>
-          </a:effectRef>
-          <a:fontRef idx="minor">
-            <a:schemeClr val="lt1"/>
-          </a:fontRef>
-        </p:style>
-        <p:txBody>
-          <a:bodyPr rtlCol="0" anchor="ctr"/>
-          <a:lstStyle/>
-          <a:p>
-            <a:pPr algn="ctr"/>
-          </a:p>
-        </p:txBody>
-      </p:sp>
-      <p:sp>
-        <p:nvSpPr>
-          <p:cNvPr id="29" name="TextBox 28"/>
-          <p:cNvSpPr txBox="1"/>
-          <p:nvPr/>
-        </p:nvSpPr>
-        <p:spPr>
-          <a:xfrm>
-            <a:off x="6429603" y="2563368"/>
-            <a:ext cx="5286603" cy="1271524"/>
+            <a:off x="6429603" y="2526792"/>
+            <a:ext cx="5286603" cy="1308100"/>
           </a:xfrm>
           <a:prstGeom prst="rect">
             <a:avLst/>
@@ -10709,7 +8528,7 @@
       </p:sp>
       <p:sp>
         <p:nvSpPr>
-          <p:cNvPr id="30" name="Rectangle 29"/>
+          <p:cNvPr id="22" name="Rectangle 21"/>
           <p:cNvSpPr/>
           <p:nvPr/>
         </p:nvSpPr>
@@ -10754,7 +8573,7 @@
       </p:sp>
       <p:sp>
         <p:nvSpPr>
-          <p:cNvPr id="31" name="Rectangle 30"/>
+          <p:cNvPr id="23" name="Rectangle 22"/>
           <p:cNvSpPr/>
           <p:nvPr/>
         </p:nvSpPr>
@@ -10797,16 +8616,129 @@
       </p:sp>
       <p:sp>
         <p:nvSpPr>
-          <p:cNvPr id="32" name="Oval 31"/>
+          <p:cNvPr id="24" name="Oval 23"/>
           <p:cNvSpPr/>
           <p:nvPr/>
         </p:nvSpPr>
         <p:spPr>
           <a:xfrm>
             <a:off x="685800" y="4224528"/>
-            <a:ext cx="292608" cy="292608"/>
+            <a:ext cx="256032" cy="256032"/>
           </a:xfrm>
           <a:prstGeom prst="ellipse">
+            <a:avLst/>
+          </a:prstGeom>
+          <a:solidFill>
+            <a:srgbClr val="0A1638"/>
+          </a:solidFill>
+          <a:ln w="15240">
+            <a:solidFill>
+              <a:srgbClr val="2FDFE5"/>
+            </a:solidFill>
+          </a:ln>
+        </p:spPr>
+        <p:style>
+          <a:lnRef idx="1">
+            <a:schemeClr val="accent1"/>
+          </a:lnRef>
+          <a:fillRef idx="3">
+            <a:schemeClr val="accent1"/>
+          </a:fillRef>
+          <a:effectRef idx="2">
+            <a:schemeClr val="accent1"/>
+          </a:effectRef>
+          <a:fontRef idx="minor">
+            <a:schemeClr val="lt1"/>
+          </a:fontRef>
+        </p:style>
+        <p:txBody>
+          <a:bodyPr rtlCol="0" anchor="ctr"/>
+          <a:lstStyle/>
+          <a:p>
+            <a:pPr algn="ctr"/>
+          </a:p>
+        </p:txBody>
+      </p:sp>
+      <p:sp>
+        <p:nvSpPr>
+          <p:cNvPr id="25" name="TextBox 24"/>
+          <p:cNvSpPr txBox="1"/>
+          <p:nvPr/>
+        </p:nvSpPr>
+        <p:spPr>
+          <a:xfrm>
+            <a:off x="685800" y="4224528"/>
+            <a:ext cx="256032" cy="256032"/>
+          </a:xfrm>
+          <a:prstGeom prst="rect">
+            <a:avLst/>
+          </a:prstGeom>
+          <a:noFill/>
+        </p:spPr>
+        <p:txBody lIns="0" tIns="12700" rIns="0" bIns="0">
+          <a:bodyPr wrap="none">
+            <a:spAutoFit/>
+          </a:bodyPr>
+          <a:lstStyle/>
+          <a:p>
+            <a:pPr algn="ctr"/>
+            <a:r>
+              <a:rPr sz="1100" b="1">
+                <a:solidFill>
+                  <a:srgbClr val="2FDFE5"/>
+                </a:solidFill>
+              </a:rPr>
+              <a:t>3</a:t>
+            </a:r>
+          </a:p>
+        </p:txBody>
+      </p:sp>
+      <p:sp>
+        <p:nvSpPr>
+          <p:cNvPr id="26" name="TextBox 25"/>
+          <p:cNvSpPr txBox="1"/>
+          <p:nvPr/>
+        </p:nvSpPr>
+        <p:spPr>
+          <a:xfrm>
+            <a:off x="1051560" y="4224528"/>
+            <a:ext cx="4865979" cy="512064"/>
+          </a:xfrm>
+          <a:prstGeom prst="rect">
+            <a:avLst/>
+          </a:prstGeom>
+          <a:noFill/>
+        </p:spPr>
+        <p:txBody lIns="38100" tIns="25400" rIns="38100" bIns="25400">
+          <a:bodyPr wrap="square">
+            <a:spAutoFit/>
+          </a:bodyPr>
+          <a:lstStyle/>
+          <a:p>
+            <a:pPr algn="l"/>
+            <a:r>
+              <a:rPr sz="1400" b="1">
+                <a:solidFill>
+                  <a:srgbClr val="FFFFFF"/>
+                </a:solidFill>
+              </a:rPr>
+              <a:t>Análisis de solvencia</a:t>
+            </a:r>
+          </a:p>
+        </p:txBody>
+      </p:sp>
+      <p:sp>
+        <p:nvSpPr>
+          <p:cNvPr id="27" name="Rectangle 26"/>
+          <p:cNvSpPr/>
+          <p:nvPr/>
+        </p:nvSpPr>
+        <p:spPr>
+          <a:xfrm>
+            <a:off x="649224" y="4590288"/>
+            <a:ext cx="5286603" cy="12700"/>
+          </a:xfrm>
+          <a:prstGeom prst="rect">
             <a:avLst/>
           </a:prstGeom>
           <a:solidFill>
@@ -10840,172 +8772,14 @@
       </p:sp>
       <p:sp>
         <p:nvSpPr>
-          <p:cNvPr id="33" name="Oval 32"/>
-          <p:cNvSpPr/>
-          <p:nvPr/>
-        </p:nvSpPr>
-        <p:spPr>
-          <a:xfrm>
-            <a:off x="741395" y="4280123"/>
-            <a:ext cx="181416" cy="181416"/>
-          </a:xfrm>
-          <a:prstGeom prst="ellipse">
-            <a:avLst/>
-          </a:prstGeom>
-          <a:solidFill>
-            <a:srgbClr val="088A8F"/>
-          </a:solidFill>
-          <a:ln>
-            <a:noFill/>
-          </a:ln>
-        </p:spPr>
-        <p:style>
-          <a:lnRef idx="1">
-            <a:schemeClr val="accent1"/>
-          </a:lnRef>
-          <a:fillRef idx="3">
-            <a:schemeClr val="accent1"/>
-          </a:fillRef>
-          <a:effectRef idx="2">
-            <a:schemeClr val="accent1"/>
-          </a:effectRef>
-          <a:fontRef idx="minor">
-            <a:schemeClr val="lt1"/>
-          </a:fontRef>
-        </p:style>
-        <p:txBody>
-          <a:bodyPr rtlCol="0" anchor="ctr"/>
-          <a:lstStyle/>
-          <a:p>
-            <a:pPr algn="ctr"/>
-          </a:p>
-        </p:txBody>
-      </p:sp>
-      <p:sp>
-        <p:nvSpPr>
-          <p:cNvPr id="34" name="TextBox 33"/>
+          <p:cNvPr id="28" name="TextBox 27"/>
           <p:cNvSpPr txBox="1"/>
           <p:nvPr/>
         </p:nvSpPr>
         <p:spPr>
           <a:xfrm>
-            <a:off x="685800" y="4224528"/>
-            <a:ext cx="292608" cy="292608"/>
-          </a:xfrm>
-          <a:prstGeom prst="rect">
-            <a:avLst/>
-          </a:prstGeom>
-          <a:noFill/>
-        </p:spPr>
-        <p:txBody lIns="0" tIns="0" rIns="0" bIns="0">
-          <a:bodyPr wrap="none">
-            <a:spAutoFit/>
-          </a:bodyPr>
-          <a:lstStyle/>
-          <a:p>
-            <a:pPr algn="ctr">
-              <a:spcBef>
-                <a:spcPts val="200"/>
-              </a:spcBef>
-            </a:pPr>
-            <a:r>
-              <a:rPr sz="1100" b="1">
-                <a:solidFill>
-                  <a:srgbClr val="FFFFFF"/>
-                </a:solidFill>
-              </a:rPr>
-              <a:t>✓</a:t>
-            </a:r>
-          </a:p>
-        </p:txBody>
-      </p:sp>
-      <p:sp>
-        <p:nvSpPr>
-          <p:cNvPr id="35" name="TextBox 34"/>
-          <p:cNvSpPr txBox="1"/>
-          <p:nvPr/>
-        </p:nvSpPr>
-        <p:spPr>
-          <a:xfrm>
-            <a:off x="1088136" y="4224528"/>
-            <a:ext cx="4884267" cy="566928"/>
-          </a:xfrm>
-          <a:prstGeom prst="rect">
-            <a:avLst/>
-          </a:prstGeom>
-          <a:noFill/>
-        </p:spPr>
-        <p:txBody lIns="38100" tIns="25400" rIns="38100" bIns="25400">
-          <a:bodyPr wrap="square">
-            <a:spAutoFit/>
-          </a:bodyPr>
-          <a:lstStyle/>
-          <a:p>
-            <a:pPr algn="l"/>
-            <a:r>
-              <a:rPr sz="1400" b="1">
-                <a:solidFill>
-                  <a:srgbClr val="FFFFFF"/>
-                </a:solidFill>
-              </a:rPr>
-              <a:t>Análisis de solvencia</a:t>
-            </a:r>
-          </a:p>
-        </p:txBody>
-      </p:sp>
-      <p:sp>
-        <p:nvSpPr>
-          <p:cNvPr id="36" name="Rectangle 35"/>
-          <p:cNvSpPr/>
-          <p:nvPr/>
-        </p:nvSpPr>
-        <p:spPr>
-          <a:xfrm>
-            <a:off x="649224" y="4626864"/>
-            <a:ext cx="5286603" cy="12700"/>
-          </a:xfrm>
-          <a:prstGeom prst="rect">
-            <a:avLst/>
-          </a:prstGeom>
-          <a:solidFill>
-            <a:srgbClr val="13B9BF"/>
-          </a:solidFill>
-          <a:ln>
-            <a:noFill/>
-          </a:ln>
-        </p:spPr>
-        <p:style>
-          <a:lnRef idx="1">
-            <a:schemeClr val="accent1"/>
-          </a:lnRef>
-          <a:fillRef idx="3">
-            <a:schemeClr val="accent1"/>
-          </a:fillRef>
-          <a:effectRef idx="2">
-            <a:schemeClr val="accent1"/>
-          </a:effectRef>
-          <a:fontRef idx="minor">
-            <a:schemeClr val="lt1"/>
-          </a:fontRef>
-        </p:style>
-        <p:txBody>
-          <a:bodyPr rtlCol="0" anchor="ctr"/>
-          <a:lstStyle/>
-          <a:p>
-            <a:pPr algn="ctr"/>
-          </a:p>
-        </p:txBody>
-      </p:sp>
-      <p:sp>
-        <p:nvSpPr>
-          <p:cNvPr id="37" name="TextBox 36"/>
-          <p:cNvSpPr txBox="1"/>
-          <p:nvPr/>
-        </p:nvSpPr>
-        <p:spPr>
-          <a:xfrm>
-            <a:off x="649224" y="4703064"/>
-            <a:ext cx="5286603" cy="1271524"/>
+            <a:off x="649224" y="4666488"/>
+            <a:ext cx="5286603" cy="1308100"/>
           </a:xfrm>
           <a:prstGeom prst="rect">
             <a:avLst/>
@@ -11032,7 +8806,7 @@
       </p:sp>
       <p:sp>
         <p:nvSpPr>
-          <p:cNvPr id="38" name="Rectangle 37"/>
+          <p:cNvPr id="29" name="Rectangle 28"/>
           <p:cNvSpPr/>
           <p:nvPr/>
         </p:nvSpPr>
@@ -11077,7 +8851,7 @@
       </p:sp>
       <p:sp>
         <p:nvSpPr>
-          <p:cNvPr id="39" name="Rectangle 38"/>
+          <p:cNvPr id="30" name="Rectangle 29"/>
           <p:cNvSpPr/>
           <p:nvPr/>
         </p:nvSpPr>
@@ -11120,16 +8894,129 @@
       </p:sp>
       <p:sp>
         <p:nvSpPr>
-          <p:cNvPr id="40" name="Oval 39"/>
+          <p:cNvPr id="31" name="Oval 30"/>
           <p:cNvSpPr/>
           <p:nvPr/>
         </p:nvSpPr>
         <p:spPr>
           <a:xfrm>
             <a:off x="6466179" y="4224528"/>
-            <a:ext cx="292608" cy="292608"/>
+            <a:ext cx="256032" cy="256032"/>
           </a:xfrm>
           <a:prstGeom prst="ellipse">
+            <a:avLst/>
+          </a:prstGeom>
+          <a:solidFill>
+            <a:srgbClr val="0A1638"/>
+          </a:solidFill>
+          <a:ln w="15240">
+            <a:solidFill>
+              <a:srgbClr val="2FDFE5"/>
+            </a:solidFill>
+          </a:ln>
+        </p:spPr>
+        <p:style>
+          <a:lnRef idx="1">
+            <a:schemeClr val="accent1"/>
+          </a:lnRef>
+          <a:fillRef idx="3">
+            <a:schemeClr val="accent1"/>
+          </a:fillRef>
+          <a:effectRef idx="2">
+            <a:schemeClr val="accent1"/>
+          </a:effectRef>
+          <a:fontRef idx="minor">
+            <a:schemeClr val="lt1"/>
+          </a:fontRef>
+        </p:style>
+        <p:txBody>
+          <a:bodyPr rtlCol="0" anchor="ctr"/>
+          <a:lstStyle/>
+          <a:p>
+            <a:pPr algn="ctr"/>
+          </a:p>
+        </p:txBody>
+      </p:sp>
+      <p:sp>
+        <p:nvSpPr>
+          <p:cNvPr id="32" name="TextBox 31"/>
+          <p:cNvSpPr txBox="1"/>
+          <p:nvPr/>
+        </p:nvSpPr>
+        <p:spPr>
+          <a:xfrm>
+            <a:off x="6466179" y="4224528"/>
+            <a:ext cx="256032" cy="256032"/>
+          </a:xfrm>
+          <a:prstGeom prst="rect">
+            <a:avLst/>
+          </a:prstGeom>
+          <a:noFill/>
+        </p:spPr>
+        <p:txBody lIns="0" tIns="12700" rIns="0" bIns="0">
+          <a:bodyPr wrap="none">
+            <a:spAutoFit/>
+          </a:bodyPr>
+          <a:lstStyle/>
+          <a:p>
+            <a:pPr algn="ctr"/>
+            <a:r>
+              <a:rPr sz="1100" b="1">
+                <a:solidFill>
+                  <a:srgbClr val="2FDFE5"/>
+                </a:solidFill>
+              </a:rPr>
+              <a:t>4</a:t>
+            </a:r>
+          </a:p>
+        </p:txBody>
+      </p:sp>
+      <p:sp>
+        <p:nvSpPr>
+          <p:cNvPr id="33" name="TextBox 32"/>
+          <p:cNvSpPr txBox="1"/>
+          <p:nvPr/>
+        </p:nvSpPr>
+        <p:spPr>
+          <a:xfrm>
+            <a:off x="6831939" y="4224528"/>
+            <a:ext cx="4865979" cy="512064"/>
+          </a:xfrm>
+          <a:prstGeom prst="rect">
+            <a:avLst/>
+          </a:prstGeom>
+          <a:noFill/>
+        </p:spPr>
+        <p:txBody lIns="38100" tIns="25400" rIns="38100" bIns="25400">
+          <a:bodyPr wrap="square">
+            <a:spAutoFit/>
+          </a:bodyPr>
+          <a:lstStyle/>
+          <a:p>
+            <a:pPr algn="l"/>
+            <a:r>
+              <a:rPr sz="1400" b="1">
+                <a:solidFill>
+                  <a:srgbClr val="FFFFFF"/>
+                </a:solidFill>
+              </a:rPr>
+              <a:t>Ficheros de morosidad</a:t>
+            </a:r>
+          </a:p>
+        </p:txBody>
+      </p:sp>
+      <p:sp>
+        <p:nvSpPr>
+          <p:cNvPr id="34" name="Rectangle 33"/>
+          <p:cNvSpPr/>
+          <p:nvPr/>
+        </p:nvSpPr>
+        <p:spPr>
+          <a:xfrm>
+            <a:off x="6429603" y="4590288"/>
+            <a:ext cx="5286603" cy="12700"/>
+          </a:xfrm>
+          <a:prstGeom prst="rect">
             <a:avLst/>
           </a:prstGeom>
           <a:solidFill>
@@ -11163,172 +9050,14 @@
       </p:sp>
       <p:sp>
         <p:nvSpPr>
-          <p:cNvPr id="41" name="Oval 40"/>
-          <p:cNvSpPr/>
-          <p:nvPr/>
-        </p:nvSpPr>
-        <p:spPr>
-          <a:xfrm>
-            <a:off x="6521775" y="4280123"/>
-            <a:ext cx="181416" cy="181416"/>
-          </a:xfrm>
-          <a:prstGeom prst="ellipse">
-            <a:avLst/>
-          </a:prstGeom>
-          <a:solidFill>
-            <a:srgbClr val="088A8F"/>
-          </a:solidFill>
-          <a:ln>
-            <a:noFill/>
-          </a:ln>
-        </p:spPr>
-        <p:style>
-          <a:lnRef idx="1">
-            <a:schemeClr val="accent1"/>
-          </a:lnRef>
-          <a:fillRef idx="3">
-            <a:schemeClr val="accent1"/>
-          </a:fillRef>
-          <a:effectRef idx="2">
-            <a:schemeClr val="accent1"/>
-          </a:effectRef>
-          <a:fontRef idx="minor">
-            <a:schemeClr val="lt1"/>
-          </a:fontRef>
-        </p:style>
-        <p:txBody>
-          <a:bodyPr rtlCol="0" anchor="ctr"/>
-          <a:lstStyle/>
-          <a:p>
-            <a:pPr algn="ctr"/>
-          </a:p>
-        </p:txBody>
-      </p:sp>
-      <p:sp>
-        <p:nvSpPr>
-          <p:cNvPr id="42" name="TextBox 41"/>
+          <p:cNvPr id="35" name="TextBox 34"/>
           <p:cNvSpPr txBox="1"/>
           <p:nvPr/>
         </p:nvSpPr>
         <p:spPr>
           <a:xfrm>
-            <a:off x="6466179" y="4224528"/>
-            <a:ext cx="292608" cy="292608"/>
-          </a:xfrm>
-          <a:prstGeom prst="rect">
-            <a:avLst/>
-          </a:prstGeom>
-          <a:noFill/>
-        </p:spPr>
-        <p:txBody lIns="0" tIns="0" rIns="0" bIns="0">
-          <a:bodyPr wrap="none">
-            <a:spAutoFit/>
-          </a:bodyPr>
-          <a:lstStyle/>
-          <a:p>
-            <a:pPr algn="ctr">
-              <a:spcBef>
-                <a:spcPts val="200"/>
-              </a:spcBef>
-            </a:pPr>
-            <a:r>
-              <a:rPr sz="1100" b="1">
-                <a:solidFill>
-                  <a:srgbClr val="FFFFFF"/>
-                </a:solidFill>
-              </a:rPr>
-              <a:t>▼</a:t>
-            </a:r>
-          </a:p>
-        </p:txBody>
-      </p:sp>
-      <p:sp>
-        <p:nvSpPr>
-          <p:cNvPr id="43" name="TextBox 42"/>
-          <p:cNvSpPr txBox="1"/>
-          <p:nvPr/>
-        </p:nvSpPr>
-        <p:spPr>
-          <a:xfrm>
-            <a:off x="6868515" y="4224528"/>
-            <a:ext cx="4884267" cy="566928"/>
-          </a:xfrm>
-          <a:prstGeom prst="rect">
-            <a:avLst/>
-          </a:prstGeom>
-          <a:noFill/>
-        </p:spPr>
-        <p:txBody lIns="38100" tIns="25400" rIns="38100" bIns="25400">
-          <a:bodyPr wrap="square">
-            <a:spAutoFit/>
-          </a:bodyPr>
-          <a:lstStyle/>
-          <a:p>
-            <a:pPr algn="l"/>
-            <a:r>
-              <a:rPr sz="1400" b="1">
-                <a:solidFill>
-                  <a:srgbClr val="FFFFFF"/>
-                </a:solidFill>
-              </a:rPr>
-              <a:t>Ficheros de morosidad</a:t>
-            </a:r>
-          </a:p>
-        </p:txBody>
-      </p:sp>
-      <p:sp>
-        <p:nvSpPr>
-          <p:cNvPr id="44" name="Rectangle 43"/>
-          <p:cNvSpPr/>
-          <p:nvPr/>
-        </p:nvSpPr>
-        <p:spPr>
-          <a:xfrm>
-            <a:off x="6429603" y="4626864"/>
-            <a:ext cx="5286603" cy="12700"/>
-          </a:xfrm>
-          <a:prstGeom prst="rect">
-            <a:avLst/>
-          </a:prstGeom>
-          <a:solidFill>
-            <a:srgbClr val="13B9BF"/>
-          </a:solidFill>
-          <a:ln>
-            <a:noFill/>
-          </a:ln>
-        </p:spPr>
-        <p:style>
-          <a:lnRef idx="1">
-            <a:schemeClr val="accent1"/>
-          </a:lnRef>
-          <a:fillRef idx="3">
-            <a:schemeClr val="accent1"/>
-          </a:fillRef>
-          <a:effectRef idx="2">
-            <a:schemeClr val="accent1"/>
-          </a:effectRef>
-          <a:fontRef idx="minor">
-            <a:schemeClr val="lt1"/>
-          </a:fontRef>
-        </p:style>
-        <p:txBody>
-          <a:bodyPr rtlCol="0" anchor="ctr"/>
-          <a:lstStyle/>
-          <a:p>
-            <a:pPr algn="ctr"/>
-          </a:p>
-        </p:txBody>
-      </p:sp>
-      <p:sp>
-        <p:nvSpPr>
-          <p:cNvPr id="45" name="TextBox 44"/>
-          <p:cNvSpPr txBox="1"/>
-          <p:nvPr/>
-        </p:nvSpPr>
-        <p:spPr>
-          <a:xfrm>
-            <a:off x="6429603" y="4703064"/>
-            <a:ext cx="5286603" cy="1271524"/>
+            <a:off x="6429603" y="4666488"/>
+            <a:ext cx="5286603" cy="1308100"/>
           </a:xfrm>
           <a:prstGeom prst="rect">
             <a:avLst/>
@@ -11353,6 +9082,30 @@
           </a:p>
         </p:txBody>
       </p:sp>
+      <p:pic>
+        <p:nvPicPr>
+          <p:cNvPr id="36" name="Picture 35" descr="logo_horiz.png"/>
+          <p:cNvPicPr>
+            <a:picLocks noChangeAspect="1"/>
+          </p:cNvPicPr>
+          <p:nvPr/>
+        </p:nvPicPr>
+        <p:blipFill>
+          <a:blip r:embed="rId3"/>
+          <a:stretch>
+            <a:fillRect/>
+          </a:stretch>
+        </p:blipFill>
+        <p:spPr>
+          <a:xfrm>
+            <a:off x="10024567" y="6062197"/>
+            <a:ext cx="1965960" cy="631211"/>
+          </a:xfrm>
+          <a:prstGeom prst="rect">
+            <a:avLst/>
+          </a:prstGeom>
+        </p:spPr>
+      </p:pic>
     </p:spTree>
   </p:cSld>
   <p:clrMapOvr>
@@ -11382,7 +9135,7 @@
                                 <p:cBhvr>
                                   <p:cTn id="6" dur="450" fill="hold"/>
                                   <p:tgtEl>
-                                    <p:spTgt spid="14"/>
+                                    <p:spTgt spid="8"/>
                                   </p:tgtEl>
                                 </p:cBhvr>
                               </p:animEffect>
@@ -11399,7 +9152,7 @@
                                 <p:cBhvr>
                                   <p:cTn id="8" dur="450" fill="hold"/>
                                   <p:tgtEl>
-                                    <p:spTgt spid="22"/>
+                                    <p:spTgt spid="15"/>
                                   </p:tgtEl>
                                 </p:cBhvr>
                               </p:animEffect>
@@ -11416,7 +9169,7 @@
                                 <p:cBhvr>
                                   <p:cTn id="10" dur="450" fill="hold"/>
                                   <p:tgtEl>
-                                    <p:spTgt spid="30"/>
+                                    <p:spTgt spid="22"/>
                                   </p:tgtEl>
                                 </p:cBhvr>
                               </p:animEffect>
@@ -11433,7 +9186,7 @@
                                 <p:cBhvr>
                                   <p:cTn id="12" dur="450" fill="hold"/>
                                   <p:tgtEl>
-                                    <p:spTgt spid="38"/>
+                                    <p:spTgt spid="29"/>
                                   </p:tgtEl>
                                 </p:cBhvr>
                               </p:animEffect>

--- a/sendacredit_propuesta.pptx
+++ b/sendacredit_propuesta.pptx
@@ -3746,7 +3746,7 @@
           <a:p>
             <a:pPr algn="l"/>
             <a:r>
-              <a:rPr sz="1100" i="1">
+              <a:rPr sz="1300" i="1">
                 <a:solidFill>
                   <a:srgbClr val="80A8CC"/>
                 </a:solidFill>
@@ -3853,7 +3853,7 @@
         <p:spPr>
           <a:xfrm>
             <a:off x="704088" y="2468880"/>
-            <a:ext cx="274320" cy="274320"/>
+            <a:ext cx="347472" cy="347472"/>
           </a:xfrm>
           <a:prstGeom prst="ellipse">
             <a:avLst/>
@@ -3861,7 +3861,7 @@
           <a:solidFill>
             <a:srgbClr val="0A1638"/>
           </a:solidFill>
-          <a:ln w="15240">
+          <a:ln w="19050">
             <a:solidFill>
               <a:srgbClr val="2FDFE5"/>
             </a:solidFill>
@@ -3881,11 +3881,19 @@
             <a:schemeClr val="lt1"/>
           </a:fontRef>
         </p:style>
-        <p:txBody>
-          <a:bodyPr rtlCol="0" anchor="ctr"/>
+        <p:txBody lIns="0" tIns="0" rIns="0" bIns="0">
+          <a:bodyPr rtlCol="0" anchor="ctr" wrap="none"/>
           <a:lstStyle/>
           <a:p>
             <a:pPr algn="ctr"/>
+            <a:r>
+              <a:rPr sz="1600" b="1">
+                <a:solidFill>
+                  <a:srgbClr val="2FDFE5"/>
+                </a:solidFill>
+              </a:rPr>
+              <a:t>1</a:t>
+            </a:r>
           </a:p>
         </p:txBody>
       </p:sp>
@@ -3897,42 +3905,8 @@
         </p:nvSpPr>
         <p:spPr>
           <a:xfrm>
-            <a:off x="704088" y="2468880"/>
-            <a:ext cx="274320" cy="274320"/>
-          </a:xfrm>
-          <a:prstGeom prst="rect">
-            <a:avLst/>
-          </a:prstGeom>
-          <a:noFill/>
-        </p:spPr>
-        <p:txBody lIns="0" tIns="12700" rIns="0" bIns="0">
-          <a:bodyPr wrap="none">
-            <a:spAutoFit/>
-          </a:bodyPr>
-          <a:lstStyle/>
-          <a:p>
-            <a:pPr algn="ctr"/>
-            <a:r>
-              <a:rPr sz="1100" b="1">
-                <a:solidFill>
-                  <a:srgbClr val="2FDFE5"/>
-                </a:solidFill>
-              </a:rPr>
-              <a:t>1</a:t>
-            </a:r>
-          </a:p>
-        </p:txBody>
-      </p:sp>
-      <p:sp>
-        <p:nvSpPr>
-          <p:cNvPr id="13" name="TextBox 12"/>
-          <p:cNvSpPr txBox="1"/>
-          <p:nvPr/>
-        </p:nvSpPr>
-        <p:spPr>
-          <a:xfrm>
-            <a:off x="1088136" y="2468880"/>
-            <a:ext cx="4792827" cy="566928"/>
+            <a:off x="1179576" y="2468880"/>
+            <a:ext cx="4683099" cy="658368"/>
           </a:xfrm>
           <a:prstGeom prst="rect">
             <a:avLst/>
@@ -3947,7 +3921,7 @@
           <a:p>
             <a:pPr algn="l"/>
             <a:r>
-              <a:rPr sz="1500" b="1">
+              <a:rPr sz="1800" b="1">
                 <a:solidFill>
                   <a:srgbClr val="FFFFFF"/>
                 </a:solidFill>
@@ -3959,13 +3933,13 @@
       </p:sp>
       <p:sp>
         <p:nvSpPr>
-          <p:cNvPr id="14" name="Rectangle 13"/>
+          <p:cNvPr id="13" name="Rectangle 12"/>
           <p:cNvSpPr/>
           <p:nvPr/>
         </p:nvSpPr>
         <p:spPr>
           <a:xfrm>
-            <a:off x="667512" y="2852928"/>
+            <a:off x="667512" y="2944368"/>
             <a:ext cx="5250027" cy="15240"/>
           </a:xfrm>
           <a:prstGeom prst="rect">
@@ -4002,14 +3976,14 @@
       </p:sp>
       <p:sp>
         <p:nvSpPr>
-          <p:cNvPr id="15" name="TextBox 14"/>
+          <p:cNvPr id="14" name="TextBox 13"/>
           <p:cNvSpPr txBox="1"/>
           <p:nvPr/>
         </p:nvSpPr>
         <p:spPr>
           <a:xfrm>
-            <a:off x="667512" y="2941828"/>
-            <a:ext cx="5250027" cy="3014472"/>
+            <a:off x="667512" y="3045968"/>
+            <a:ext cx="5250027" cy="2923032"/>
           </a:xfrm>
           <a:prstGeom prst="rect">
             <a:avLst/>
@@ -4024,11 +3998,11 @@
           <a:p>
             <a:pPr algn="l">
               <a:spcBef>
-                <a:spcPts val="400"/>
+                <a:spcPts val="500"/>
               </a:spcBef>
             </a:pPr>
             <a:r>
-              <a:rPr sz="1100">
+              <a:rPr sz="1300">
                 <a:solidFill>
                   <a:srgbClr val="2FDFE5"/>
                 </a:solidFill>
@@ -4036,7 +4010,7 @@
               <a:t>▸  </a:t>
             </a:r>
             <a:r>
-              <a:rPr sz="1200">
+              <a:rPr sz="1400">
                 <a:solidFill>
                   <a:srgbClr val="D8EAFF"/>
                 </a:solidFill>
@@ -4047,11 +4021,11 @@
           <a:p>
             <a:pPr algn="l">
               <a:spcBef>
-                <a:spcPts val="400"/>
+                <a:spcPts val="500"/>
               </a:spcBef>
             </a:pPr>
             <a:r>
-              <a:rPr sz="1100">
+              <a:rPr sz="1300">
                 <a:solidFill>
                   <a:srgbClr val="2FDFE5"/>
                 </a:solidFill>
@@ -4059,7 +4033,7 @@
               <a:t>▸  </a:t>
             </a:r>
             <a:r>
-              <a:rPr sz="1200">
+              <a:rPr sz="1400">
                 <a:solidFill>
                   <a:srgbClr val="D8EAFF"/>
                 </a:solidFill>
@@ -4070,11 +4044,11 @@
           <a:p>
             <a:pPr algn="l">
               <a:spcBef>
-                <a:spcPts val="400"/>
+                <a:spcPts val="500"/>
               </a:spcBef>
             </a:pPr>
             <a:r>
-              <a:rPr sz="1100">
+              <a:rPr sz="1300">
                 <a:solidFill>
                   <a:srgbClr val="2FDFE5"/>
                 </a:solidFill>
@@ -4082,7 +4056,7 @@
               <a:t>▸  </a:t>
             </a:r>
             <a:r>
-              <a:rPr sz="1200">
+              <a:rPr sz="1400">
                 <a:solidFill>
                   <a:srgbClr val="D8EAFF"/>
                 </a:solidFill>
@@ -4094,7 +4068,7 @@
       </p:sp>
       <p:sp>
         <p:nvSpPr>
-          <p:cNvPr id="16" name="Rectangle 15"/>
+          <p:cNvPr id="15" name="Rectangle 14"/>
           <p:cNvSpPr/>
           <p:nvPr/>
         </p:nvSpPr>
@@ -4139,7 +4113,7 @@
       </p:sp>
       <p:sp>
         <p:nvSpPr>
-          <p:cNvPr id="17" name="Rectangle 16"/>
+          <p:cNvPr id="16" name="Rectangle 15"/>
           <p:cNvSpPr/>
           <p:nvPr/>
         </p:nvSpPr>
@@ -4182,14 +4156,14 @@
       </p:sp>
       <p:sp>
         <p:nvSpPr>
-          <p:cNvPr id="18" name="Oval 17"/>
+          <p:cNvPr id="17" name="Oval 16"/>
           <p:cNvSpPr/>
           <p:nvPr/>
         </p:nvSpPr>
         <p:spPr>
           <a:xfrm>
             <a:off x="6484467" y="2468880"/>
-            <a:ext cx="274320" cy="274320"/>
+            <a:ext cx="347472" cy="347472"/>
           </a:xfrm>
           <a:prstGeom prst="ellipse">
             <a:avLst/>
@@ -4197,7 +4171,7 @@
           <a:solidFill>
             <a:srgbClr val="0A1638"/>
           </a:solidFill>
-          <a:ln w="15240">
+          <a:ln w="19050">
             <a:solidFill>
               <a:srgbClr val="2FDFE5"/>
             </a:solidFill>
@@ -4217,58 +4191,32 @@
             <a:schemeClr val="lt1"/>
           </a:fontRef>
         </p:style>
-        <p:txBody>
-          <a:bodyPr rtlCol="0" anchor="ctr"/>
+        <p:txBody lIns="0" tIns="0" rIns="0" bIns="0">
+          <a:bodyPr rtlCol="0" anchor="ctr" wrap="none"/>
           <a:lstStyle/>
           <a:p>
             <a:pPr algn="ctr"/>
-          </a:p>
-        </p:txBody>
-      </p:sp>
-      <p:sp>
-        <p:nvSpPr>
-          <p:cNvPr id="19" name="TextBox 18"/>
+            <a:r>
+              <a:rPr sz="1600" b="1">
+                <a:solidFill>
+                  <a:srgbClr val="2FDFE5"/>
+                </a:solidFill>
+              </a:rPr>
+              <a:t>2</a:t>
+            </a:r>
+          </a:p>
+        </p:txBody>
+      </p:sp>
+      <p:sp>
+        <p:nvSpPr>
+          <p:cNvPr id="18" name="TextBox 17"/>
           <p:cNvSpPr txBox="1"/>
           <p:nvPr/>
         </p:nvSpPr>
         <p:spPr>
           <a:xfrm>
-            <a:off x="6484467" y="2468880"/>
-            <a:ext cx="274320" cy="274320"/>
-          </a:xfrm>
-          <a:prstGeom prst="rect">
-            <a:avLst/>
-          </a:prstGeom>
-          <a:noFill/>
-        </p:spPr>
-        <p:txBody lIns="0" tIns="12700" rIns="0" bIns="0">
-          <a:bodyPr wrap="none">
-            <a:spAutoFit/>
-          </a:bodyPr>
-          <a:lstStyle/>
-          <a:p>
-            <a:pPr algn="ctr"/>
-            <a:r>
-              <a:rPr sz="1100" b="1">
-                <a:solidFill>
-                  <a:srgbClr val="2FDFE5"/>
-                </a:solidFill>
-              </a:rPr>
-              <a:t>2</a:t>
-            </a:r>
-          </a:p>
-        </p:txBody>
-      </p:sp>
-      <p:sp>
-        <p:nvSpPr>
-          <p:cNvPr id="20" name="TextBox 19"/>
-          <p:cNvSpPr txBox="1"/>
-          <p:nvPr/>
-        </p:nvSpPr>
-        <p:spPr>
-          <a:xfrm>
-            <a:off x="6868515" y="2468880"/>
-            <a:ext cx="4792827" cy="566928"/>
+            <a:off x="6959955" y="2468880"/>
+            <a:ext cx="4683099" cy="658368"/>
           </a:xfrm>
           <a:prstGeom prst="rect">
             <a:avLst/>
@@ -4283,7 +4231,7 @@
           <a:p>
             <a:pPr algn="l"/>
             <a:r>
-              <a:rPr sz="1500" b="1">
+              <a:rPr sz="1800" b="1">
                 <a:solidFill>
                   <a:srgbClr val="FFFFFF"/>
                 </a:solidFill>
@@ -4295,13 +4243,13 @@
       </p:sp>
       <p:sp>
         <p:nvSpPr>
-          <p:cNvPr id="21" name="Rectangle 20"/>
+          <p:cNvPr id="19" name="Rectangle 18"/>
           <p:cNvSpPr/>
           <p:nvPr/>
         </p:nvSpPr>
         <p:spPr>
           <a:xfrm>
-            <a:off x="6447891" y="2852928"/>
+            <a:off x="6447891" y="2944368"/>
             <a:ext cx="5250027" cy="15240"/>
           </a:xfrm>
           <a:prstGeom prst="rect">
@@ -4338,14 +4286,14 @@
       </p:sp>
       <p:sp>
         <p:nvSpPr>
-          <p:cNvPr id="22" name="TextBox 21"/>
+          <p:cNvPr id="20" name="TextBox 19"/>
           <p:cNvSpPr txBox="1"/>
           <p:nvPr/>
         </p:nvSpPr>
         <p:spPr>
           <a:xfrm>
-            <a:off x="6447891" y="2941828"/>
-            <a:ext cx="5250027" cy="3014472"/>
+            <a:off x="6447891" y="3045968"/>
+            <a:ext cx="5250027" cy="2923032"/>
           </a:xfrm>
           <a:prstGeom prst="rect">
             <a:avLst/>
@@ -4360,11 +4308,11 @@
           <a:p>
             <a:pPr algn="l">
               <a:spcBef>
-                <a:spcPts val="400"/>
+                <a:spcPts val="500"/>
               </a:spcBef>
             </a:pPr>
             <a:r>
-              <a:rPr sz="1100">
+              <a:rPr sz="1300">
                 <a:solidFill>
                   <a:srgbClr val="2FDFE5"/>
                 </a:solidFill>
@@ -4372,7 +4320,7 @@
               <a:t>▸  </a:t>
             </a:r>
             <a:r>
-              <a:rPr sz="1200">
+              <a:rPr sz="1400">
                 <a:solidFill>
                   <a:srgbClr val="D8EAFF"/>
                 </a:solidFill>
@@ -4383,11 +4331,11 @@
           <a:p>
             <a:pPr algn="l">
               <a:spcBef>
-                <a:spcPts val="400"/>
+                <a:spcPts val="500"/>
               </a:spcBef>
             </a:pPr>
             <a:r>
-              <a:rPr sz="1100">
+              <a:rPr sz="1300">
                 <a:solidFill>
                   <a:srgbClr val="2FDFE5"/>
                 </a:solidFill>
@@ -4395,7 +4343,7 @@
               <a:t>▸  </a:t>
             </a:r>
             <a:r>
-              <a:rPr sz="1200">
+              <a:rPr sz="1400">
                 <a:solidFill>
                   <a:srgbClr val="D8EAFF"/>
                 </a:solidFill>
@@ -4406,11 +4354,11 @@
           <a:p>
             <a:pPr algn="l">
               <a:spcBef>
-                <a:spcPts val="400"/>
+                <a:spcPts val="500"/>
               </a:spcBef>
             </a:pPr>
             <a:r>
-              <a:rPr sz="1100">
+              <a:rPr sz="1300">
                 <a:solidFill>
                   <a:srgbClr val="2FDFE5"/>
                 </a:solidFill>
@@ -4418,7 +4366,7 @@
               <a:t>▸  </a:t>
             </a:r>
             <a:r>
-              <a:rPr sz="1200">
+              <a:rPr sz="1400">
                 <a:solidFill>
                   <a:srgbClr val="D8EAFF"/>
                 </a:solidFill>
@@ -4430,7 +4378,7 @@
       </p:sp>
       <p:pic>
         <p:nvPicPr>
-          <p:cNvPr id="23" name="Picture 22" descr="logo_horiz.png"/>
+          <p:cNvPr id="21" name="Picture 20" descr="logo_horiz.png"/>
           <p:cNvPicPr>
             <a:picLocks noChangeAspect="1"/>
           </p:cNvPicPr>
@@ -4498,7 +4446,7 @@
                                 <p:cBhvr>
                                   <p:cTn id="8" dur="450" fill="hold"/>
                                   <p:tgtEl>
-                                    <p:spTgt spid="16"/>
+                                    <p:spTgt spid="15"/>
                                   </p:tgtEl>
                                 </p:cBhvr>
                               </p:animEffect>
@@ -4808,7 +4756,7 @@
           <a:p>
             <a:pPr algn="l"/>
             <a:r>
-              <a:rPr sz="1100" i="1">
+              <a:rPr sz="1300" i="1">
                 <a:solidFill>
                   <a:srgbClr val="80A8CC"/>
                 </a:solidFill>
@@ -4915,7 +4863,7 @@
         <p:spPr>
           <a:xfrm>
             <a:off x="704088" y="2468880"/>
-            <a:ext cx="274320" cy="274320"/>
+            <a:ext cx="347472" cy="347472"/>
           </a:xfrm>
           <a:prstGeom prst="ellipse">
             <a:avLst/>
@@ -4923,7 +4871,7 @@
           <a:solidFill>
             <a:srgbClr val="0A1638"/>
           </a:solidFill>
-          <a:ln w="15240">
+          <a:ln w="19050">
             <a:solidFill>
               <a:srgbClr val="2FDFE5"/>
             </a:solidFill>
@@ -4943,11 +4891,19 @@
             <a:schemeClr val="lt1"/>
           </a:fontRef>
         </p:style>
-        <p:txBody>
-          <a:bodyPr rtlCol="0" anchor="ctr"/>
+        <p:txBody lIns="0" tIns="0" rIns="0" bIns="0">
+          <a:bodyPr rtlCol="0" anchor="ctr" wrap="none"/>
           <a:lstStyle/>
           <a:p>
             <a:pPr algn="ctr"/>
+            <a:r>
+              <a:rPr sz="1600" b="1">
+                <a:solidFill>
+                  <a:srgbClr val="2FDFE5"/>
+                </a:solidFill>
+              </a:rPr>
+              <a:t>3</a:t>
+            </a:r>
           </a:p>
         </p:txBody>
       </p:sp>
@@ -4959,42 +4915,8 @@
         </p:nvSpPr>
         <p:spPr>
           <a:xfrm>
-            <a:off x="704088" y="2468880"/>
-            <a:ext cx="274320" cy="274320"/>
-          </a:xfrm>
-          <a:prstGeom prst="rect">
-            <a:avLst/>
-          </a:prstGeom>
-          <a:noFill/>
-        </p:spPr>
-        <p:txBody lIns="0" tIns="12700" rIns="0" bIns="0">
-          <a:bodyPr wrap="none">
-            <a:spAutoFit/>
-          </a:bodyPr>
-          <a:lstStyle/>
-          <a:p>
-            <a:pPr algn="ctr"/>
-            <a:r>
-              <a:rPr sz="1100" b="1">
-                <a:solidFill>
-                  <a:srgbClr val="2FDFE5"/>
-                </a:solidFill>
-              </a:rPr>
-              <a:t>3</a:t>
-            </a:r>
-          </a:p>
-        </p:txBody>
-      </p:sp>
-      <p:sp>
-        <p:nvSpPr>
-          <p:cNvPr id="13" name="TextBox 12"/>
-          <p:cNvSpPr txBox="1"/>
-          <p:nvPr/>
-        </p:nvSpPr>
-        <p:spPr>
-          <a:xfrm>
-            <a:off x="1088136" y="2468880"/>
-            <a:ext cx="4792827" cy="566928"/>
+            <a:off x="1179576" y="2468880"/>
+            <a:ext cx="4683099" cy="658368"/>
           </a:xfrm>
           <a:prstGeom prst="rect">
             <a:avLst/>
@@ -5009,7 +4931,7 @@
           <a:p>
             <a:pPr algn="l"/>
             <a:r>
-              <a:rPr sz="1500" b="1">
+              <a:rPr sz="1800" b="1">
                 <a:solidFill>
                   <a:srgbClr val="FFFFFF"/>
                 </a:solidFill>
@@ -5021,13 +4943,13 @@
       </p:sp>
       <p:sp>
         <p:nvSpPr>
-          <p:cNvPr id="14" name="Rectangle 13"/>
+          <p:cNvPr id="13" name="Rectangle 12"/>
           <p:cNvSpPr/>
           <p:nvPr/>
         </p:nvSpPr>
         <p:spPr>
           <a:xfrm>
-            <a:off x="667512" y="2852928"/>
+            <a:off x="667512" y="2944368"/>
             <a:ext cx="5250027" cy="15240"/>
           </a:xfrm>
           <a:prstGeom prst="rect">
@@ -5064,14 +4986,14 @@
       </p:sp>
       <p:sp>
         <p:nvSpPr>
-          <p:cNvPr id="15" name="TextBox 14"/>
+          <p:cNvPr id="14" name="TextBox 13"/>
           <p:cNvSpPr txBox="1"/>
           <p:nvPr/>
         </p:nvSpPr>
         <p:spPr>
           <a:xfrm>
-            <a:off x="667512" y="2941828"/>
-            <a:ext cx="5250027" cy="3014472"/>
+            <a:off x="667512" y="3045968"/>
+            <a:ext cx="5250027" cy="2923032"/>
           </a:xfrm>
           <a:prstGeom prst="rect">
             <a:avLst/>
@@ -5086,11 +5008,11 @@
           <a:p>
             <a:pPr algn="l">
               <a:spcBef>
-                <a:spcPts val="400"/>
+                <a:spcPts val="500"/>
               </a:spcBef>
             </a:pPr>
             <a:r>
-              <a:rPr sz="1100">
+              <a:rPr sz="1300">
                 <a:solidFill>
                   <a:srgbClr val="2FDFE5"/>
                 </a:solidFill>
@@ -5098,7 +5020,7 @@
               <a:t>▸  </a:t>
             </a:r>
             <a:r>
-              <a:rPr sz="1200">
+              <a:rPr sz="1400">
                 <a:solidFill>
                   <a:srgbClr val="D8EAFF"/>
                 </a:solidFill>
@@ -5109,11 +5031,11 @@
           <a:p>
             <a:pPr algn="l">
               <a:spcBef>
-                <a:spcPts val="400"/>
+                <a:spcPts val="500"/>
               </a:spcBef>
             </a:pPr>
             <a:r>
-              <a:rPr sz="1100">
+              <a:rPr sz="1300">
                 <a:solidFill>
                   <a:srgbClr val="2FDFE5"/>
                 </a:solidFill>
@@ -5121,7 +5043,7 @@
               <a:t>▸  </a:t>
             </a:r>
             <a:r>
-              <a:rPr sz="1200">
+              <a:rPr sz="1400">
                 <a:solidFill>
                   <a:srgbClr val="D8EAFF"/>
                 </a:solidFill>
@@ -5132,11 +5054,11 @@
           <a:p>
             <a:pPr algn="l">
               <a:spcBef>
-                <a:spcPts val="400"/>
+                <a:spcPts val="500"/>
               </a:spcBef>
             </a:pPr>
             <a:r>
-              <a:rPr sz="1100">
+              <a:rPr sz="1300">
                 <a:solidFill>
                   <a:srgbClr val="2FDFE5"/>
                 </a:solidFill>
@@ -5144,7 +5066,7 @@
               <a:t>▸  </a:t>
             </a:r>
             <a:r>
-              <a:rPr sz="1200">
+              <a:rPr sz="1400">
                 <a:solidFill>
                   <a:srgbClr val="D8EAFF"/>
                 </a:solidFill>
@@ -5156,7 +5078,7 @@
       </p:sp>
       <p:sp>
         <p:nvSpPr>
-          <p:cNvPr id="16" name="Rectangle 15"/>
+          <p:cNvPr id="15" name="Rectangle 14"/>
           <p:cNvSpPr/>
           <p:nvPr/>
         </p:nvSpPr>
@@ -5201,7 +5123,7 @@
       </p:sp>
       <p:sp>
         <p:nvSpPr>
-          <p:cNvPr id="17" name="Rectangle 16"/>
+          <p:cNvPr id="16" name="Rectangle 15"/>
           <p:cNvSpPr/>
           <p:nvPr/>
         </p:nvSpPr>
@@ -5244,14 +5166,14 @@
       </p:sp>
       <p:sp>
         <p:nvSpPr>
-          <p:cNvPr id="18" name="Oval 17"/>
+          <p:cNvPr id="17" name="Oval 16"/>
           <p:cNvSpPr/>
           <p:nvPr/>
         </p:nvSpPr>
         <p:spPr>
           <a:xfrm>
             <a:off x="6484467" y="2468880"/>
-            <a:ext cx="274320" cy="274320"/>
+            <a:ext cx="347472" cy="347472"/>
           </a:xfrm>
           <a:prstGeom prst="ellipse">
             <a:avLst/>
@@ -5259,7 +5181,7 @@
           <a:solidFill>
             <a:srgbClr val="0A1638"/>
           </a:solidFill>
-          <a:ln w="15240">
+          <a:ln w="19050">
             <a:solidFill>
               <a:srgbClr val="2FDFE5"/>
             </a:solidFill>
@@ -5279,58 +5201,32 @@
             <a:schemeClr val="lt1"/>
           </a:fontRef>
         </p:style>
-        <p:txBody>
-          <a:bodyPr rtlCol="0" anchor="ctr"/>
+        <p:txBody lIns="0" tIns="0" rIns="0" bIns="0">
+          <a:bodyPr rtlCol="0" anchor="ctr" wrap="none"/>
           <a:lstStyle/>
           <a:p>
             <a:pPr algn="ctr"/>
-          </a:p>
-        </p:txBody>
-      </p:sp>
-      <p:sp>
-        <p:nvSpPr>
-          <p:cNvPr id="19" name="TextBox 18"/>
+            <a:r>
+              <a:rPr sz="1600" b="1">
+                <a:solidFill>
+                  <a:srgbClr val="2FDFE5"/>
+                </a:solidFill>
+              </a:rPr>
+              <a:t>4</a:t>
+            </a:r>
+          </a:p>
+        </p:txBody>
+      </p:sp>
+      <p:sp>
+        <p:nvSpPr>
+          <p:cNvPr id="18" name="TextBox 17"/>
           <p:cNvSpPr txBox="1"/>
           <p:nvPr/>
         </p:nvSpPr>
         <p:spPr>
           <a:xfrm>
-            <a:off x="6484467" y="2468880"/>
-            <a:ext cx="274320" cy="274320"/>
-          </a:xfrm>
-          <a:prstGeom prst="rect">
-            <a:avLst/>
-          </a:prstGeom>
-          <a:noFill/>
-        </p:spPr>
-        <p:txBody lIns="0" tIns="12700" rIns="0" bIns="0">
-          <a:bodyPr wrap="none">
-            <a:spAutoFit/>
-          </a:bodyPr>
-          <a:lstStyle/>
-          <a:p>
-            <a:pPr algn="ctr"/>
-            <a:r>
-              <a:rPr sz="1100" b="1">
-                <a:solidFill>
-                  <a:srgbClr val="2FDFE5"/>
-                </a:solidFill>
-              </a:rPr>
-              <a:t>4</a:t>
-            </a:r>
-          </a:p>
-        </p:txBody>
-      </p:sp>
-      <p:sp>
-        <p:nvSpPr>
-          <p:cNvPr id="20" name="TextBox 19"/>
-          <p:cNvSpPr txBox="1"/>
-          <p:nvPr/>
-        </p:nvSpPr>
-        <p:spPr>
-          <a:xfrm>
-            <a:off x="6868515" y="2468880"/>
-            <a:ext cx="4792827" cy="566928"/>
+            <a:off x="6959955" y="2468880"/>
+            <a:ext cx="4683099" cy="658368"/>
           </a:xfrm>
           <a:prstGeom prst="rect">
             <a:avLst/>
@@ -5345,7 +5241,7 @@
           <a:p>
             <a:pPr algn="l"/>
             <a:r>
-              <a:rPr sz="1500" b="1">
+              <a:rPr sz="1800" b="1">
                 <a:solidFill>
                   <a:srgbClr val="FFFFFF"/>
                 </a:solidFill>
@@ -5357,13 +5253,13 @@
       </p:sp>
       <p:sp>
         <p:nvSpPr>
-          <p:cNvPr id="21" name="Rectangle 20"/>
+          <p:cNvPr id="19" name="Rectangle 18"/>
           <p:cNvSpPr/>
           <p:nvPr/>
         </p:nvSpPr>
         <p:spPr>
           <a:xfrm>
-            <a:off x="6447891" y="2852928"/>
+            <a:off x="6447891" y="2944368"/>
             <a:ext cx="5250027" cy="15240"/>
           </a:xfrm>
           <a:prstGeom prst="rect">
@@ -5400,14 +5296,14 @@
       </p:sp>
       <p:sp>
         <p:nvSpPr>
-          <p:cNvPr id="22" name="TextBox 21"/>
+          <p:cNvPr id="20" name="TextBox 19"/>
           <p:cNvSpPr txBox="1"/>
           <p:nvPr/>
         </p:nvSpPr>
         <p:spPr>
           <a:xfrm>
-            <a:off x="6447891" y="2941828"/>
-            <a:ext cx="5250027" cy="3014472"/>
+            <a:off x="6447891" y="3045968"/>
+            <a:ext cx="5250027" cy="2923032"/>
           </a:xfrm>
           <a:prstGeom prst="rect">
             <a:avLst/>
@@ -5422,11 +5318,11 @@
           <a:p>
             <a:pPr algn="l">
               <a:spcBef>
-                <a:spcPts val="400"/>
+                <a:spcPts val="500"/>
               </a:spcBef>
             </a:pPr>
             <a:r>
-              <a:rPr sz="1100">
+              <a:rPr sz="1300">
                 <a:solidFill>
                   <a:srgbClr val="2FDFE5"/>
                 </a:solidFill>
@@ -5434,7 +5330,7 @@
               <a:t>▸  </a:t>
             </a:r>
             <a:r>
-              <a:rPr sz="1200">
+              <a:rPr sz="1400">
                 <a:solidFill>
                   <a:srgbClr val="D8EAFF"/>
                 </a:solidFill>
@@ -5445,11 +5341,11 @@
           <a:p>
             <a:pPr algn="l">
               <a:spcBef>
-                <a:spcPts val="400"/>
+                <a:spcPts val="500"/>
               </a:spcBef>
             </a:pPr>
             <a:r>
-              <a:rPr sz="1100">
+              <a:rPr sz="1300">
                 <a:solidFill>
                   <a:srgbClr val="2FDFE5"/>
                 </a:solidFill>
@@ -5457,7 +5353,7 @@
               <a:t>▸  </a:t>
             </a:r>
             <a:r>
-              <a:rPr sz="1200">
+              <a:rPr sz="1400">
                 <a:solidFill>
                   <a:srgbClr val="D8EAFF"/>
                 </a:solidFill>
@@ -5468,11 +5364,11 @@
           <a:p>
             <a:pPr algn="l">
               <a:spcBef>
-                <a:spcPts val="400"/>
+                <a:spcPts val="500"/>
               </a:spcBef>
             </a:pPr>
             <a:r>
-              <a:rPr sz="1100">
+              <a:rPr sz="1300">
                 <a:solidFill>
                   <a:srgbClr val="2FDFE5"/>
                 </a:solidFill>
@@ -5480,7 +5376,7 @@
               <a:t>▸  </a:t>
             </a:r>
             <a:r>
-              <a:rPr sz="1200">
+              <a:rPr sz="1400">
                 <a:solidFill>
                   <a:srgbClr val="D8EAFF"/>
                 </a:solidFill>
@@ -5492,7 +5388,7 @@
       </p:sp>
       <p:pic>
         <p:nvPicPr>
-          <p:cNvPr id="23" name="Picture 22" descr="logo_horiz.png"/>
+          <p:cNvPr id="21" name="Picture 20" descr="logo_horiz.png"/>
           <p:cNvPicPr>
             <a:picLocks noChangeAspect="1"/>
           </p:cNvPicPr>
@@ -5560,7 +5456,7 @@
                                 <p:cBhvr>
                                   <p:cTn id="8" dur="450" fill="hold"/>
                                   <p:tgtEl>
-                                    <p:spTgt spid="16"/>
+                                    <p:spTgt spid="15"/>
                                   </p:tgtEl>
                                 </p:cBhvr>
                               </p:animEffect>
@@ -5870,7 +5766,7 @@
           <a:p>
             <a:pPr algn="l"/>
             <a:r>
-              <a:rPr sz="1100" i="1">
+              <a:rPr sz="1300" i="1">
                 <a:solidFill>
                   <a:srgbClr val="80A8CC"/>
                 </a:solidFill>
@@ -5977,7 +5873,7 @@
         <p:spPr>
           <a:xfrm>
             <a:off x="704088" y="2468880"/>
-            <a:ext cx="274320" cy="274320"/>
+            <a:ext cx="347472" cy="347472"/>
           </a:xfrm>
           <a:prstGeom prst="ellipse">
             <a:avLst/>
@@ -5985,7 +5881,7 @@
           <a:solidFill>
             <a:srgbClr val="0A1638"/>
           </a:solidFill>
-          <a:ln w="15240">
+          <a:ln w="19050">
             <a:solidFill>
               <a:srgbClr val="2FDFE5"/>
             </a:solidFill>
@@ -6005,11 +5901,19 @@
             <a:schemeClr val="lt1"/>
           </a:fontRef>
         </p:style>
-        <p:txBody>
-          <a:bodyPr rtlCol="0" anchor="ctr"/>
+        <p:txBody lIns="0" tIns="0" rIns="0" bIns="0">
+          <a:bodyPr rtlCol="0" anchor="ctr" wrap="none"/>
           <a:lstStyle/>
           <a:p>
             <a:pPr algn="ctr"/>
+            <a:r>
+              <a:rPr sz="1600" b="1">
+                <a:solidFill>
+                  <a:srgbClr val="2FDFE5"/>
+                </a:solidFill>
+              </a:rPr>
+              <a:t>5</a:t>
+            </a:r>
           </a:p>
         </p:txBody>
       </p:sp>
@@ -6021,42 +5925,8 @@
         </p:nvSpPr>
         <p:spPr>
           <a:xfrm>
-            <a:off x="704088" y="2468880"/>
-            <a:ext cx="274320" cy="274320"/>
-          </a:xfrm>
-          <a:prstGeom prst="rect">
-            <a:avLst/>
-          </a:prstGeom>
-          <a:noFill/>
-        </p:spPr>
-        <p:txBody lIns="0" tIns="12700" rIns="0" bIns="0">
-          <a:bodyPr wrap="none">
-            <a:spAutoFit/>
-          </a:bodyPr>
-          <a:lstStyle/>
-          <a:p>
-            <a:pPr algn="ctr"/>
-            <a:r>
-              <a:rPr sz="1100" b="1">
-                <a:solidFill>
-                  <a:srgbClr val="2FDFE5"/>
-                </a:solidFill>
-              </a:rPr>
-              <a:t>5</a:t>
-            </a:r>
-          </a:p>
-        </p:txBody>
-      </p:sp>
-      <p:sp>
-        <p:nvSpPr>
-          <p:cNvPr id="13" name="TextBox 12"/>
-          <p:cNvSpPr txBox="1"/>
-          <p:nvPr/>
-        </p:nvSpPr>
-        <p:spPr>
-          <a:xfrm>
-            <a:off x="1088136" y="2468880"/>
-            <a:ext cx="4792827" cy="566928"/>
+            <a:off x="1179576" y="2468880"/>
+            <a:ext cx="4683099" cy="658368"/>
           </a:xfrm>
           <a:prstGeom prst="rect">
             <a:avLst/>
@@ -6071,7 +5941,7 @@
           <a:p>
             <a:pPr algn="l"/>
             <a:r>
-              <a:rPr sz="1500" b="1">
+              <a:rPr sz="1800" b="1">
                 <a:solidFill>
                   <a:srgbClr val="FFFFFF"/>
                 </a:solidFill>
@@ -6083,13 +5953,13 @@
       </p:sp>
       <p:sp>
         <p:nvSpPr>
-          <p:cNvPr id="14" name="Rectangle 13"/>
+          <p:cNvPr id="13" name="Rectangle 12"/>
           <p:cNvSpPr/>
           <p:nvPr/>
         </p:nvSpPr>
         <p:spPr>
           <a:xfrm>
-            <a:off x="667512" y="2852928"/>
+            <a:off x="667512" y="2944368"/>
             <a:ext cx="5250027" cy="15240"/>
           </a:xfrm>
           <a:prstGeom prst="rect">
@@ -6126,14 +5996,14 @@
       </p:sp>
       <p:sp>
         <p:nvSpPr>
-          <p:cNvPr id="15" name="TextBox 14"/>
+          <p:cNvPr id="14" name="TextBox 13"/>
           <p:cNvSpPr txBox="1"/>
           <p:nvPr/>
         </p:nvSpPr>
         <p:spPr>
           <a:xfrm>
-            <a:off x="667512" y="2941828"/>
-            <a:ext cx="5250027" cy="3014472"/>
+            <a:off x="667512" y="3045968"/>
+            <a:ext cx="5250027" cy="2923032"/>
           </a:xfrm>
           <a:prstGeom prst="rect">
             <a:avLst/>
@@ -6148,11 +6018,11 @@
           <a:p>
             <a:pPr algn="l">
               <a:spcBef>
-                <a:spcPts val="400"/>
+                <a:spcPts val="500"/>
               </a:spcBef>
             </a:pPr>
             <a:r>
-              <a:rPr sz="1100">
+              <a:rPr sz="1300">
                 <a:solidFill>
                   <a:srgbClr val="2FDFE5"/>
                 </a:solidFill>
@@ -6160,7 +6030,7 @@
               <a:t>▸  </a:t>
             </a:r>
             <a:r>
-              <a:rPr sz="1200">
+              <a:rPr sz="1400">
                 <a:solidFill>
                   <a:srgbClr val="D8EAFF"/>
                 </a:solidFill>
@@ -6171,11 +6041,11 @@
           <a:p>
             <a:pPr algn="l">
               <a:spcBef>
-                <a:spcPts val="400"/>
+                <a:spcPts val="500"/>
               </a:spcBef>
             </a:pPr>
             <a:r>
-              <a:rPr sz="1100">
+              <a:rPr sz="1300">
                 <a:solidFill>
                   <a:srgbClr val="2FDFE5"/>
                 </a:solidFill>
@@ -6183,7 +6053,7 @@
               <a:t>▸  </a:t>
             </a:r>
             <a:r>
-              <a:rPr sz="1200">
+              <a:rPr sz="1400">
                 <a:solidFill>
                   <a:srgbClr val="D8EAFF"/>
                 </a:solidFill>
@@ -6194,11 +6064,11 @@
           <a:p>
             <a:pPr algn="l">
               <a:spcBef>
-                <a:spcPts val="400"/>
+                <a:spcPts val="500"/>
               </a:spcBef>
             </a:pPr>
             <a:r>
-              <a:rPr sz="1100">
+              <a:rPr sz="1300">
                 <a:solidFill>
                   <a:srgbClr val="2FDFE5"/>
                 </a:solidFill>
@@ -6206,7 +6076,7 @@
               <a:t>▸  </a:t>
             </a:r>
             <a:r>
-              <a:rPr sz="1200">
+              <a:rPr sz="1400">
                 <a:solidFill>
                   <a:srgbClr val="D8EAFF"/>
                 </a:solidFill>
@@ -6218,7 +6088,7 @@
       </p:sp>
       <p:sp>
         <p:nvSpPr>
-          <p:cNvPr id="16" name="Rectangle 15"/>
+          <p:cNvPr id="15" name="Rectangle 14"/>
           <p:cNvSpPr/>
           <p:nvPr/>
         </p:nvSpPr>
@@ -6263,7 +6133,7 @@
       </p:sp>
       <p:sp>
         <p:nvSpPr>
-          <p:cNvPr id="17" name="Rectangle 16"/>
+          <p:cNvPr id="16" name="Rectangle 15"/>
           <p:cNvSpPr/>
           <p:nvPr/>
         </p:nvSpPr>
@@ -6306,14 +6176,14 @@
       </p:sp>
       <p:sp>
         <p:nvSpPr>
-          <p:cNvPr id="18" name="Oval 17"/>
+          <p:cNvPr id="17" name="Oval 16"/>
           <p:cNvSpPr/>
           <p:nvPr/>
         </p:nvSpPr>
         <p:spPr>
           <a:xfrm>
             <a:off x="6484467" y="2468880"/>
-            <a:ext cx="274320" cy="274320"/>
+            <a:ext cx="347472" cy="347472"/>
           </a:xfrm>
           <a:prstGeom prst="ellipse">
             <a:avLst/>
@@ -6321,7 +6191,7 @@
           <a:solidFill>
             <a:srgbClr val="0A1638"/>
           </a:solidFill>
-          <a:ln w="15240">
+          <a:ln w="19050">
             <a:solidFill>
               <a:srgbClr val="2FDFE5"/>
             </a:solidFill>
@@ -6341,58 +6211,32 @@
             <a:schemeClr val="lt1"/>
           </a:fontRef>
         </p:style>
-        <p:txBody>
-          <a:bodyPr rtlCol="0" anchor="ctr"/>
+        <p:txBody lIns="0" tIns="0" rIns="0" bIns="0">
+          <a:bodyPr rtlCol="0" anchor="ctr" wrap="none"/>
           <a:lstStyle/>
           <a:p>
             <a:pPr algn="ctr"/>
-          </a:p>
-        </p:txBody>
-      </p:sp>
-      <p:sp>
-        <p:nvSpPr>
-          <p:cNvPr id="19" name="TextBox 18"/>
+            <a:r>
+              <a:rPr sz="1600" b="1">
+                <a:solidFill>
+                  <a:srgbClr val="2FDFE5"/>
+                </a:solidFill>
+              </a:rPr>
+              <a:t>6</a:t>
+            </a:r>
+          </a:p>
+        </p:txBody>
+      </p:sp>
+      <p:sp>
+        <p:nvSpPr>
+          <p:cNvPr id="18" name="TextBox 17"/>
           <p:cNvSpPr txBox="1"/>
           <p:nvPr/>
         </p:nvSpPr>
         <p:spPr>
           <a:xfrm>
-            <a:off x="6484467" y="2468880"/>
-            <a:ext cx="274320" cy="274320"/>
-          </a:xfrm>
-          <a:prstGeom prst="rect">
-            <a:avLst/>
-          </a:prstGeom>
-          <a:noFill/>
-        </p:spPr>
-        <p:txBody lIns="0" tIns="12700" rIns="0" bIns="0">
-          <a:bodyPr wrap="none">
-            <a:spAutoFit/>
-          </a:bodyPr>
-          <a:lstStyle/>
-          <a:p>
-            <a:pPr algn="ctr"/>
-            <a:r>
-              <a:rPr sz="1100" b="1">
-                <a:solidFill>
-                  <a:srgbClr val="2FDFE5"/>
-                </a:solidFill>
-              </a:rPr>
-              <a:t>6</a:t>
-            </a:r>
-          </a:p>
-        </p:txBody>
-      </p:sp>
-      <p:sp>
-        <p:nvSpPr>
-          <p:cNvPr id="20" name="TextBox 19"/>
-          <p:cNvSpPr txBox="1"/>
-          <p:nvPr/>
-        </p:nvSpPr>
-        <p:spPr>
-          <a:xfrm>
-            <a:off x="6868515" y="2468880"/>
-            <a:ext cx="4792827" cy="566928"/>
+            <a:off x="6959955" y="2468880"/>
+            <a:ext cx="4683099" cy="658368"/>
           </a:xfrm>
           <a:prstGeom prst="rect">
             <a:avLst/>
@@ -6407,7 +6251,7 @@
           <a:p>
             <a:pPr algn="l"/>
             <a:r>
-              <a:rPr sz="1500" b="1">
+              <a:rPr sz="1800" b="1">
                 <a:solidFill>
                   <a:srgbClr val="FFFFFF"/>
                 </a:solidFill>
@@ -6419,13 +6263,13 @@
       </p:sp>
       <p:sp>
         <p:nvSpPr>
-          <p:cNvPr id="21" name="Rectangle 20"/>
+          <p:cNvPr id="19" name="Rectangle 18"/>
           <p:cNvSpPr/>
           <p:nvPr/>
         </p:nvSpPr>
         <p:spPr>
           <a:xfrm>
-            <a:off x="6447891" y="2852928"/>
+            <a:off x="6447891" y="2944368"/>
             <a:ext cx="5250027" cy="15240"/>
           </a:xfrm>
           <a:prstGeom prst="rect">
@@ -6462,14 +6306,14 @@
       </p:sp>
       <p:sp>
         <p:nvSpPr>
-          <p:cNvPr id="22" name="TextBox 21"/>
+          <p:cNvPr id="20" name="TextBox 19"/>
           <p:cNvSpPr txBox="1"/>
           <p:nvPr/>
         </p:nvSpPr>
         <p:spPr>
           <a:xfrm>
-            <a:off x="6447891" y="2941828"/>
-            <a:ext cx="5250027" cy="3014472"/>
+            <a:off x="6447891" y="3045968"/>
+            <a:ext cx="5250027" cy="2923032"/>
           </a:xfrm>
           <a:prstGeom prst="rect">
             <a:avLst/>
@@ -6484,11 +6328,11 @@
           <a:p>
             <a:pPr algn="l">
               <a:spcBef>
-                <a:spcPts val="400"/>
+                <a:spcPts val="500"/>
               </a:spcBef>
             </a:pPr>
             <a:r>
-              <a:rPr sz="1100">
+              <a:rPr sz="1300">
                 <a:solidFill>
                   <a:srgbClr val="2FDFE5"/>
                 </a:solidFill>
@@ -6496,7 +6340,7 @@
               <a:t>▸  </a:t>
             </a:r>
             <a:r>
-              <a:rPr sz="1200">
+              <a:rPr sz="1400">
                 <a:solidFill>
                   <a:srgbClr val="D8EAFF"/>
                 </a:solidFill>
@@ -6507,11 +6351,11 @@
           <a:p>
             <a:pPr algn="l">
               <a:spcBef>
-                <a:spcPts val="400"/>
+                <a:spcPts val="500"/>
               </a:spcBef>
             </a:pPr>
             <a:r>
-              <a:rPr sz="1100">
+              <a:rPr sz="1300">
                 <a:solidFill>
                   <a:srgbClr val="2FDFE5"/>
                 </a:solidFill>
@@ -6519,7 +6363,7 @@
               <a:t>▸  </a:t>
             </a:r>
             <a:r>
-              <a:rPr sz="1200">
+              <a:rPr sz="1400">
                 <a:solidFill>
                   <a:srgbClr val="D8EAFF"/>
                 </a:solidFill>
@@ -6530,11 +6374,11 @@
           <a:p>
             <a:pPr algn="l">
               <a:spcBef>
-                <a:spcPts val="400"/>
+                <a:spcPts val="500"/>
               </a:spcBef>
             </a:pPr>
             <a:r>
-              <a:rPr sz="1100">
+              <a:rPr sz="1300">
                 <a:solidFill>
                   <a:srgbClr val="2FDFE5"/>
                 </a:solidFill>
@@ -6542,7 +6386,7 @@
               <a:t>▸  </a:t>
             </a:r>
             <a:r>
-              <a:rPr sz="1200">
+              <a:rPr sz="1400">
                 <a:solidFill>
                   <a:srgbClr val="D8EAFF"/>
                 </a:solidFill>
@@ -6554,7 +6398,7 @@
       </p:sp>
       <p:pic>
         <p:nvPicPr>
-          <p:cNvPr id="23" name="Picture 22" descr="logo_horiz.png"/>
+          <p:cNvPr id="21" name="Picture 20" descr="logo_horiz.png"/>
           <p:cNvPicPr>
             <a:picLocks noChangeAspect="1"/>
           </p:cNvPicPr>
@@ -6622,7 +6466,7 @@
                                 <p:cBhvr>
                                   <p:cTn id="8" dur="450" fill="hold"/>
                                   <p:tgtEl>
-                                    <p:spTgt spid="16"/>
+                                    <p:spTgt spid="15"/>
                                   </p:tgtEl>
                                 </p:cBhvr>
                               </p:animEffect>
@@ -6932,7 +6776,7 @@
           <a:p>
             <a:pPr algn="l"/>
             <a:r>
-              <a:rPr sz="1100" i="1">
+              <a:rPr sz="1300" i="1">
                 <a:solidFill>
                   <a:srgbClr val="80A8CC"/>
                 </a:solidFill>
@@ -7039,7 +6883,7 @@
         <p:spPr>
           <a:xfrm>
             <a:off x="704088" y="2468880"/>
-            <a:ext cx="274320" cy="274320"/>
+            <a:ext cx="347472" cy="347472"/>
           </a:xfrm>
           <a:prstGeom prst="ellipse">
             <a:avLst/>
@@ -7047,7 +6891,7 @@
           <a:solidFill>
             <a:srgbClr val="0A1638"/>
           </a:solidFill>
-          <a:ln w="15240">
+          <a:ln w="19050">
             <a:solidFill>
               <a:srgbClr val="2FDFE5"/>
             </a:solidFill>
@@ -7067,11 +6911,19 @@
             <a:schemeClr val="lt1"/>
           </a:fontRef>
         </p:style>
-        <p:txBody>
-          <a:bodyPr rtlCol="0" anchor="ctr"/>
+        <p:txBody lIns="0" tIns="0" rIns="0" bIns="0">
+          <a:bodyPr rtlCol="0" anchor="ctr" wrap="none"/>
           <a:lstStyle/>
           <a:p>
             <a:pPr algn="ctr"/>
+            <a:r>
+              <a:rPr sz="1600" b="1">
+                <a:solidFill>
+                  <a:srgbClr val="2FDFE5"/>
+                </a:solidFill>
+              </a:rPr>
+              <a:t>7</a:t>
+            </a:r>
           </a:p>
         </p:txBody>
       </p:sp>
@@ -7083,42 +6935,8 @@
         </p:nvSpPr>
         <p:spPr>
           <a:xfrm>
-            <a:off x="704088" y="2468880"/>
-            <a:ext cx="274320" cy="274320"/>
-          </a:xfrm>
-          <a:prstGeom prst="rect">
-            <a:avLst/>
-          </a:prstGeom>
-          <a:noFill/>
-        </p:spPr>
-        <p:txBody lIns="0" tIns="12700" rIns="0" bIns="0">
-          <a:bodyPr wrap="none">
-            <a:spAutoFit/>
-          </a:bodyPr>
-          <a:lstStyle/>
-          <a:p>
-            <a:pPr algn="ctr"/>
-            <a:r>
-              <a:rPr sz="1100" b="1">
-                <a:solidFill>
-                  <a:srgbClr val="2FDFE5"/>
-                </a:solidFill>
-              </a:rPr>
-              <a:t>7</a:t>
-            </a:r>
-          </a:p>
-        </p:txBody>
-      </p:sp>
-      <p:sp>
-        <p:nvSpPr>
-          <p:cNvPr id="13" name="TextBox 12"/>
-          <p:cNvSpPr txBox="1"/>
-          <p:nvPr/>
-        </p:nvSpPr>
-        <p:spPr>
-          <a:xfrm>
-            <a:off x="1088136" y="2468880"/>
-            <a:ext cx="4792827" cy="566928"/>
+            <a:off x="1179576" y="2468880"/>
+            <a:ext cx="4683099" cy="658368"/>
           </a:xfrm>
           <a:prstGeom prst="rect">
             <a:avLst/>
@@ -7133,7 +6951,7 @@
           <a:p>
             <a:pPr algn="l"/>
             <a:r>
-              <a:rPr sz="1500" b="1">
+              <a:rPr sz="1800" b="1">
                 <a:solidFill>
                   <a:srgbClr val="FFFFFF"/>
                 </a:solidFill>
@@ -7145,13 +6963,13 @@
       </p:sp>
       <p:sp>
         <p:nvSpPr>
-          <p:cNvPr id="14" name="Rectangle 13"/>
+          <p:cNvPr id="13" name="Rectangle 12"/>
           <p:cNvSpPr/>
           <p:nvPr/>
         </p:nvSpPr>
         <p:spPr>
           <a:xfrm>
-            <a:off x="667512" y="2852928"/>
+            <a:off x="667512" y="2944368"/>
             <a:ext cx="5250027" cy="15240"/>
           </a:xfrm>
           <a:prstGeom prst="rect">
@@ -7188,14 +7006,14 @@
       </p:sp>
       <p:sp>
         <p:nvSpPr>
-          <p:cNvPr id="15" name="TextBox 14"/>
+          <p:cNvPr id="14" name="TextBox 13"/>
           <p:cNvSpPr txBox="1"/>
           <p:nvPr/>
         </p:nvSpPr>
         <p:spPr>
           <a:xfrm>
-            <a:off x="667512" y="2941828"/>
-            <a:ext cx="5250027" cy="3014472"/>
+            <a:off x="667512" y="3045968"/>
+            <a:ext cx="5250027" cy="2923032"/>
           </a:xfrm>
           <a:prstGeom prst="rect">
             <a:avLst/>
@@ -7210,11 +7028,11 @@
           <a:p>
             <a:pPr algn="l">
               <a:spcBef>
-                <a:spcPts val="400"/>
+                <a:spcPts val="500"/>
               </a:spcBef>
             </a:pPr>
             <a:r>
-              <a:rPr sz="1100">
+              <a:rPr sz="1300">
                 <a:solidFill>
                   <a:srgbClr val="2FDFE5"/>
                 </a:solidFill>
@@ -7222,7 +7040,7 @@
               <a:t>▸  </a:t>
             </a:r>
             <a:r>
-              <a:rPr sz="1200">
+              <a:rPr sz="1400">
                 <a:solidFill>
                   <a:srgbClr val="D8EAFF"/>
                 </a:solidFill>
@@ -7233,11 +7051,11 @@
           <a:p>
             <a:pPr algn="l">
               <a:spcBef>
-                <a:spcPts val="400"/>
+                <a:spcPts val="500"/>
               </a:spcBef>
             </a:pPr>
             <a:r>
-              <a:rPr sz="1100">
+              <a:rPr sz="1300">
                 <a:solidFill>
                   <a:srgbClr val="2FDFE5"/>
                 </a:solidFill>
@@ -7245,7 +7063,7 @@
               <a:t>▸  </a:t>
             </a:r>
             <a:r>
-              <a:rPr sz="1200">
+              <a:rPr sz="1400">
                 <a:solidFill>
                   <a:srgbClr val="D8EAFF"/>
                 </a:solidFill>
@@ -7256,11 +7074,11 @@
           <a:p>
             <a:pPr algn="l">
               <a:spcBef>
-                <a:spcPts val="400"/>
+                <a:spcPts val="500"/>
               </a:spcBef>
             </a:pPr>
             <a:r>
-              <a:rPr sz="1100">
+              <a:rPr sz="1300">
                 <a:solidFill>
                   <a:srgbClr val="2FDFE5"/>
                 </a:solidFill>
@@ -7268,7 +7086,7 @@
               <a:t>▸  </a:t>
             </a:r>
             <a:r>
-              <a:rPr sz="1200">
+              <a:rPr sz="1400">
                 <a:solidFill>
                   <a:srgbClr val="D8EAFF"/>
                 </a:solidFill>
@@ -7280,7 +7098,7 @@
       </p:sp>
       <p:sp>
         <p:nvSpPr>
-          <p:cNvPr id="16" name="Rectangle 15"/>
+          <p:cNvPr id="15" name="Rectangle 14"/>
           <p:cNvSpPr/>
           <p:nvPr/>
         </p:nvSpPr>
@@ -7325,7 +7143,7 @@
       </p:sp>
       <p:sp>
         <p:nvSpPr>
-          <p:cNvPr id="17" name="Rectangle 16"/>
+          <p:cNvPr id="16" name="Rectangle 15"/>
           <p:cNvSpPr/>
           <p:nvPr/>
         </p:nvSpPr>
@@ -7368,14 +7186,14 @@
       </p:sp>
       <p:sp>
         <p:nvSpPr>
-          <p:cNvPr id="18" name="Oval 17"/>
+          <p:cNvPr id="17" name="Oval 16"/>
           <p:cNvSpPr/>
           <p:nvPr/>
         </p:nvSpPr>
         <p:spPr>
           <a:xfrm>
             <a:off x="6484467" y="2468880"/>
-            <a:ext cx="274320" cy="274320"/>
+            <a:ext cx="347472" cy="347472"/>
           </a:xfrm>
           <a:prstGeom prst="ellipse">
             <a:avLst/>
@@ -7383,7 +7201,7 @@
           <a:solidFill>
             <a:srgbClr val="0A1638"/>
           </a:solidFill>
-          <a:ln w="15240">
+          <a:ln w="19050">
             <a:solidFill>
               <a:srgbClr val="2FDFE5"/>
             </a:solidFill>
@@ -7403,58 +7221,32 @@
             <a:schemeClr val="lt1"/>
           </a:fontRef>
         </p:style>
-        <p:txBody>
-          <a:bodyPr rtlCol="0" anchor="ctr"/>
+        <p:txBody lIns="0" tIns="0" rIns="0" bIns="0">
+          <a:bodyPr rtlCol="0" anchor="ctr" wrap="none"/>
           <a:lstStyle/>
           <a:p>
             <a:pPr algn="ctr"/>
-          </a:p>
-        </p:txBody>
-      </p:sp>
-      <p:sp>
-        <p:nvSpPr>
-          <p:cNvPr id="19" name="TextBox 18"/>
+            <a:r>
+              <a:rPr sz="1600" b="1">
+                <a:solidFill>
+                  <a:srgbClr val="2FDFE5"/>
+                </a:solidFill>
+              </a:rPr>
+              <a:t>8</a:t>
+            </a:r>
+          </a:p>
+        </p:txBody>
+      </p:sp>
+      <p:sp>
+        <p:nvSpPr>
+          <p:cNvPr id="18" name="TextBox 17"/>
           <p:cNvSpPr txBox="1"/>
           <p:nvPr/>
         </p:nvSpPr>
         <p:spPr>
           <a:xfrm>
-            <a:off x="6484467" y="2468880"/>
-            <a:ext cx="274320" cy="274320"/>
-          </a:xfrm>
-          <a:prstGeom prst="rect">
-            <a:avLst/>
-          </a:prstGeom>
-          <a:noFill/>
-        </p:spPr>
-        <p:txBody lIns="0" tIns="12700" rIns="0" bIns="0">
-          <a:bodyPr wrap="none">
-            <a:spAutoFit/>
-          </a:bodyPr>
-          <a:lstStyle/>
-          <a:p>
-            <a:pPr algn="ctr"/>
-            <a:r>
-              <a:rPr sz="1100" b="1">
-                <a:solidFill>
-                  <a:srgbClr val="2FDFE5"/>
-                </a:solidFill>
-              </a:rPr>
-              <a:t>8</a:t>
-            </a:r>
-          </a:p>
-        </p:txBody>
-      </p:sp>
-      <p:sp>
-        <p:nvSpPr>
-          <p:cNvPr id="20" name="TextBox 19"/>
-          <p:cNvSpPr txBox="1"/>
-          <p:nvPr/>
-        </p:nvSpPr>
-        <p:spPr>
-          <a:xfrm>
-            <a:off x="6868515" y="2468880"/>
-            <a:ext cx="4792827" cy="566928"/>
+            <a:off x="6959955" y="2468880"/>
+            <a:ext cx="4683099" cy="658368"/>
           </a:xfrm>
           <a:prstGeom prst="rect">
             <a:avLst/>
@@ -7469,7 +7261,7 @@
           <a:p>
             <a:pPr algn="l"/>
             <a:r>
-              <a:rPr sz="1500" b="1">
+              <a:rPr sz="1800" b="1">
                 <a:solidFill>
                   <a:srgbClr val="FFFFFF"/>
                 </a:solidFill>
@@ -7481,13 +7273,13 @@
       </p:sp>
       <p:sp>
         <p:nvSpPr>
-          <p:cNvPr id="21" name="Rectangle 20"/>
+          <p:cNvPr id="19" name="Rectangle 18"/>
           <p:cNvSpPr/>
           <p:nvPr/>
         </p:nvSpPr>
         <p:spPr>
           <a:xfrm>
-            <a:off x="6447891" y="2852928"/>
+            <a:off x="6447891" y="2944368"/>
             <a:ext cx="5250027" cy="15240"/>
           </a:xfrm>
           <a:prstGeom prst="rect">
@@ -7524,14 +7316,14 @@
       </p:sp>
       <p:sp>
         <p:nvSpPr>
-          <p:cNvPr id="22" name="TextBox 21"/>
+          <p:cNvPr id="20" name="TextBox 19"/>
           <p:cNvSpPr txBox="1"/>
           <p:nvPr/>
         </p:nvSpPr>
         <p:spPr>
           <a:xfrm>
-            <a:off x="6447891" y="2941828"/>
-            <a:ext cx="5250027" cy="3014472"/>
+            <a:off x="6447891" y="3045968"/>
+            <a:ext cx="5250027" cy="2923032"/>
           </a:xfrm>
           <a:prstGeom prst="rect">
             <a:avLst/>
@@ -7546,11 +7338,11 @@
           <a:p>
             <a:pPr algn="l">
               <a:spcBef>
-                <a:spcPts val="400"/>
+                <a:spcPts val="500"/>
               </a:spcBef>
             </a:pPr>
             <a:r>
-              <a:rPr sz="1100">
+              <a:rPr sz="1300">
                 <a:solidFill>
                   <a:srgbClr val="2FDFE5"/>
                 </a:solidFill>
@@ -7558,7 +7350,7 @@
               <a:t>▸  </a:t>
             </a:r>
             <a:r>
-              <a:rPr sz="1200">
+              <a:rPr sz="1400">
                 <a:solidFill>
                   <a:srgbClr val="D8EAFF"/>
                 </a:solidFill>
@@ -7569,11 +7361,11 @@
           <a:p>
             <a:pPr algn="l">
               <a:spcBef>
-                <a:spcPts val="400"/>
+                <a:spcPts val="500"/>
               </a:spcBef>
             </a:pPr>
             <a:r>
-              <a:rPr sz="1100">
+              <a:rPr sz="1300">
                 <a:solidFill>
                   <a:srgbClr val="2FDFE5"/>
                 </a:solidFill>
@@ -7581,7 +7373,7 @@
               <a:t>▸  </a:t>
             </a:r>
             <a:r>
-              <a:rPr sz="1200">
+              <a:rPr sz="1400">
                 <a:solidFill>
                   <a:srgbClr val="D8EAFF"/>
                 </a:solidFill>
@@ -7592,11 +7384,11 @@
           <a:p>
             <a:pPr algn="l">
               <a:spcBef>
-                <a:spcPts val="400"/>
+                <a:spcPts val="500"/>
               </a:spcBef>
             </a:pPr>
             <a:r>
-              <a:rPr sz="1100">
+              <a:rPr sz="1300">
                 <a:solidFill>
                   <a:srgbClr val="2FDFE5"/>
                 </a:solidFill>
@@ -7604,7 +7396,7 @@
               <a:t>▸  </a:t>
             </a:r>
             <a:r>
-              <a:rPr sz="1200">
+              <a:rPr sz="1400">
                 <a:solidFill>
                   <a:srgbClr val="D8EAFF"/>
                 </a:solidFill>
@@ -7616,7 +7408,7 @@
       </p:sp>
       <p:pic>
         <p:nvPicPr>
-          <p:cNvPr id="23" name="Picture 22" descr="logo_horiz.png"/>
+          <p:cNvPr id="21" name="Picture 20" descr="logo_horiz.png"/>
           <p:cNvPicPr>
             <a:picLocks noChangeAspect="1"/>
           </p:cNvPicPr>
@@ -7684,7 +7476,7 @@
                                 <p:cBhvr>
                                   <p:cTn id="8" dur="450" fill="hold"/>
                                   <p:tgtEl>
-                                    <p:spTgt spid="16"/>
+                                    <p:spTgt spid="15"/>
                                   </p:tgtEl>
                                 </p:cBhvr>
                               </p:animEffect>
@@ -8067,7 +7859,7 @@
         <p:spPr>
           <a:xfrm>
             <a:off x="685800" y="2084832"/>
-            <a:ext cx="256032" cy="256032"/>
+            <a:ext cx="329184" cy="329184"/>
           </a:xfrm>
           <a:prstGeom prst="ellipse">
             <a:avLst/>
@@ -8075,7 +7867,7 @@
           <a:solidFill>
             <a:srgbClr val="0A1638"/>
           </a:solidFill>
-          <a:ln w="15240">
+          <a:ln w="19050">
             <a:solidFill>
               <a:srgbClr val="2FDFE5"/>
             </a:solidFill>
@@ -8095,11 +7887,19 @@
             <a:schemeClr val="lt1"/>
           </a:fontRef>
         </p:style>
-        <p:txBody>
-          <a:bodyPr rtlCol="0" anchor="ctr"/>
+        <p:txBody lIns="0" tIns="0" rIns="0" bIns="0">
+          <a:bodyPr rtlCol="0" anchor="ctr" wrap="none"/>
           <a:lstStyle/>
           <a:p>
             <a:pPr algn="ctr"/>
+            <a:r>
+              <a:rPr sz="1600" b="1">
+                <a:solidFill>
+                  <a:srgbClr val="2FDFE5"/>
+                </a:solidFill>
+              </a:rPr>
+              <a:t>1</a:t>
+            </a:r>
           </a:p>
         </p:txBody>
       </p:sp>
@@ -8111,42 +7911,8 @@
         </p:nvSpPr>
         <p:spPr>
           <a:xfrm>
-            <a:off x="685800" y="2084832"/>
-            <a:ext cx="256032" cy="256032"/>
-          </a:xfrm>
-          <a:prstGeom prst="rect">
-            <a:avLst/>
-          </a:prstGeom>
-          <a:noFill/>
-        </p:spPr>
-        <p:txBody lIns="0" tIns="12700" rIns="0" bIns="0">
-          <a:bodyPr wrap="none">
-            <a:spAutoFit/>
-          </a:bodyPr>
-          <a:lstStyle/>
-          <a:p>
-            <a:pPr algn="ctr"/>
-            <a:r>
-              <a:rPr sz="1100" b="1">
-                <a:solidFill>
-                  <a:srgbClr val="2FDFE5"/>
-                </a:solidFill>
-              </a:rPr>
-              <a:t>1</a:t>
-            </a:r>
-          </a:p>
-        </p:txBody>
-      </p:sp>
-      <p:sp>
-        <p:nvSpPr>
-          <p:cNvPr id="12" name="TextBox 11"/>
-          <p:cNvSpPr txBox="1"/>
-          <p:nvPr/>
-        </p:nvSpPr>
-        <p:spPr>
-          <a:xfrm>
-            <a:off x="1051560" y="2084832"/>
-            <a:ext cx="4865979" cy="512064"/>
+            <a:off x="1143000" y="2084832"/>
+            <a:ext cx="4756251" cy="585216"/>
           </a:xfrm>
           <a:prstGeom prst="rect">
             <a:avLst/>
@@ -8161,7 +7927,7 @@
           <a:p>
             <a:pPr algn="l"/>
             <a:r>
-              <a:rPr sz="1400" b="1">
+              <a:rPr sz="1700" b="1">
                 <a:solidFill>
                   <a:srgbClr val="FFFFFF"/>
                 </a:solidFill>
@@ -8173,13 +7939,13 @@
       </p:sp>
       <p:sp>
         <p:nvSpPr>
-          <p:cNvPr id="13" name="Rectangle 12"/>
+          <p:cNvPr id="12" name="Rectangle 11"/>
           <p:cNvSpPr/>
           <p:nvPr/>
         </p:nvSpPr>
         <p:spPr>
           <a:xfrm>
-            <a:off x="649224" y="2450592"/>
+            <a:off x="649224" y="2542032"/>
             <a:ext cx="5286603" cy="12700"/>
           </a:xfrm>
           <a:prstGeom prst="rect">
@@ -8216,14 +7982,14 @@
       </p:sp>
       <p:sp>
         <p:nvSpPr>
-          <p:cNvPr id="14" name="TextBox 13"/>
+          <p:cNvPr id="13" name="TextBox 12"/>
           <p:cNvSpPr txBox="1"/>
           <p:nvPr/>
         </p:nvSpPr>
         <p:spPr>
           <a:xfrm>
-            <a:off x="649224" y="2526792"/>
-            <a:ext cx="5286603" cy="1308100"/>
+            <a:off x="649224" y="2630932"/>
+            <a:ext cx="5286603" cy="1216660"/>
           </a:xfrm>
           <a:prstGeom prst="rect">
             <a:avLst/>
@@ -8238,7 +8004,7 @@
           <a:p>
             <a:pPr algn="l"/>
             <a:r>
-              <a:rPr sz="1150">
+              <a:rPr sz="1400">
                 <a:solidFill>
                   <a:srgbClr val="D8EAFF"/>
                 </a:solidFill>
@@ -8250,7 +8016,7 @@
       </p:sp>
       <p:sp>
         <p:nvSpPr>
-          <p:cNvPr id="15" name="Rectangle 14"/>
+          <p:cNvPr id="14" name="Rectangle 13"/>
           <p:cNvSpPr/>
           <p:nvPr/>
         </p:nvSpPr>
@@ -8295,7 +8061,7 @@
       </p:sp>
       <p:sp>
         <p:nvSpPr>
-          <p:cNvPr id="16" name="Rectangle 15"/>
+          <p:cNvPr id="15" name="Rectangle 14"/>
           <p:cNvSpPr/>
           <p:nvPr/>
         </p:nvSpPr>
@@ -8338,14 +8104,14 @@
       </p:sp>
       <p:sp>
         <p:nvSpPr>
-          <p:cNvPr id="17" name="Oval 16"/>
+          <p:cNvPr id="16" name="Oval 15"/>
           <p:cNvSpPr/>
           <p:nvPr/>
         </p:nvSpPr>
         <p:spPr>
           <a:xfrm>
             <a:off x="6466179" y="2084832"/>
-            <a:ext cx="256032" cy="256032"/>
+            <a:ext cx="329184" cy="329184"/>
           </a:xfrm>
           <a:prstGeom prst="ellipse">
             <a:avLst/>
@@ -8353,7 +8119,7 @@
           <a:solidFill>
             <a:srgbClr val="0A1638"/>
           </a:solidFill>
-          <a:ln w="15240">
+          <a:ln w="19050">
             <a:solidFill>
               <a:srgbClr val="2FDFE5"/>
             </a:solidFill>
@@ -8373,58 +8139,32 @@
             <a:schemeClr val="lt1"/>
           </a:fontRef>
         </p:style>
-        <p:txBody>
-          <a:bodyPr rtlCol="0" anchor="ctr"/>
+        <p:txBody lIns="0" tIns="0" rIns="0" bIns="0">
+          <a:bodyPr rtlCol="0" anchor="ctr" wrap="none"/>
           <a:lstStyle/>
           <a:p>
             <a:pPr algn="ctr"/>
-          </a:p>
-        </p:txBody>
-      </p:sp>
-      <p:sp>
-        <p:nvSpPr>
-          <p:cNvPr id="18" name="TextBox 17"/>
+            <a:r>
+              <a:rPr sz="1600" b="1">
+                <a:solidFill>
+                  <a:srgbClr val="2FDFE5"/>
+                </a:solidFill>
+              </a:rPr>
+              <a:t>2</a:t>
+            </a:r>
+          </a:p>
+        </p:txBody>
+      </p:sp>
+      <p:sp>
+        <p:nvSpPr>
+          <p:cNvPr id="17" name="TextBox 16"/>
           <p:cNvSpPr txBox="1"/>
           <p:nvPr/>
         </p:nvSpPr>
         <p:spPr>
           <a:xfrm>
-            <a:off x="6466179" y="2084832"/>
-            <a:ext cx="256032" cy="256032"/>
-          </a:xfrm>
-          <a:prstGeom prst="rect">
-            <a:avLst/>
-          </a:prstGeom>
-          <a:noFill/>
-        </p:spPr>
-        <p:txBody lIns="0" tIns="12700" rIns="0" bIns="0">
-          <a:bodyPr wrap="none">
-            <a:spAutoFit/>
-          </a:bodyPr>
-          <a:lstStyle/>
-          <a:p>
-            <a:pPr algn="ctr"/>
-            <a:r>
-              <a:rPr sz="1100" b="1">
-                <a:solidFill>
-                  <a:srgbClr val="2FDFE5"/>
-                </a:solidFill>
-              </a:rPr>
-              <a:t>2</a:t>
-            </a:r>
-          </a:p>
-        </p:txBody>
-      </p:sp>
-      <p:sp>
-        <p:nvSpPr>
-          <p:cNvPr id="19" name="TextBox 18"/>
-          <p:cNvSpPr txBox="1"/>
-          <p:nvPr/>
-        </p:nvSpPr>
-        <p:spPr>
-          <a:xfrm>
-            <a:off x="6831939" y="2084832"/>
-            <a:ext cx="4865979" cy="512064"/>
+            <a:off x="6923379" y="2084832"/>
+            <a:ext cx="4756251" cy="585216"/>
           </a:xfrm>
           <a:prstGeom prst="rect">
             <a:avLst/>
@@ -8439,7 +8179,7 @@
           <a:p>
             <a:pPr algn="l"/>
             <a:r>
-              <a:rPr sz="1400" b="1">
+              <a:rPr sz="1700" b="1">
                 <a:solidFill>
                   <a:srgbClr val="FFFFFF"/>
                 </a:solidFill>
@@ -8451,13 +8191,13 @@
       </p:sp>
       <p:sp>
         <p:nvSpPr>
-          <p:cNvPr id="20" name="Rectangle 19"/>
+          <p:cNvPr id="18" name="Rectangle 17"/>
           <p:cNvSpPr/>
           <p:nvPr/>
         </p:nvSpPr>
         <p:spPr>
           <a:xfrm>
-            <a:off x="6429603" y="2450592"/>
+            <a:off x="6429603" y="2542032"/>
             <a:ext cx="5286603" cy="12700"/>
           </a:xfrm>
           <a:prstGeom prst="rect">
@@ -8494,14 +8234,14 @@
       </p:sp>
       <p:sp>
         <p:nvSpPr>
-          <p:cNvPr id="21" name="TextBox 20"/>
+          <p:cNvPr id="19" name="TextBox 18"/>
           <p:cNvSpPr txBox="1"/>
           <p:nvPr/>
         </p:nvSpPr>
         <p:spPr>
           <a:xfrm>
-            <a:off x="6429603" y="2526792"/>
-            <a:ext cx="5286603" cy="1308100"/>
+            <a:off x="6429603" y="2630932"/>
+            <a:ext cx="5286603" cy="1216660"/>
           </a:xfrm>
           <a:prstGeom prst="rect">
             <a:avLst/>
@@ -8516,7 +8256,7 @@
           <a:p>
             <a:pPr algn="l"/>
             <a:r>
-              <a:rPr sz="1150">
+              <a:rPr sz="1400">
                 <a:solidFill>
                   <a:srgbClr val="D8EAFF"/>
                 </a:solidFill>
@@ -8528,7 +8268,7 @@
       </p:sp>
       <p:sp>
         <p:nvSpPr>
-          <p:cNvPr id="22" name="Rectangle 21"/>
+          <p:cNvPr id="20" name="Rectangle 19"/>
           <p:cNvSpPr/>
           <p:nvPr/>
         </p:nvSpPr>
@@ -8573,7 +8313,7 @@
       </p:sp>
       <p:sp>
         <p:nvSpPr>
-          <p:cNvPr id="23" name="Rectangle 22"/>
+          <p:cNvPr id="21" name="Rectangle 20"/>
           <p:cNvSpPr/>
           <p:nvPr/>
         </p:nvSpPr>
@@ -8616,14 +8356,14 @@
       </p:sp>
       <p:sp>
         <p:nvSpPr>
-          <p:cNvPr id="24" name="Oval 23"/>
+          <p:cNvPr id="22" name="Oval 21"/>
           <p:cNvSpPr/>
           <p:nvPr/>
         </p:nvSpPr>
         <p:spPr>
           <a:xfrm>
             <a:off x="685800" y="4224528"/>
-            <a:ext cx="256032" cy="256032"/>
+            <a:ext cx="329184" cy="329184"/>
           </a:xfrm>
           <a:prstGeom prst="ellipse">
             <a:avLst/>
@@ -8631,7 +8371,7 @@
           <a:solidFill>
             <a:srgbClr val="0A1638"/>
           </a:solidFill>
-          <a:ln w="15240">
+          <a:ln w="19050">
             <a:solidFill>
               <a:srgbClr val="2FDFE5"/>
             </a:solidFill>
@@ -8651,58 +8391,32 @@
             <a:schemeClr val="lt1"/>
           </a:fontRef>
         </p:style>
-        <p:txBody>
-          <a:bodyPr rtlCol="0" anchor="ctr"/>
+        <p:txBody lIns="0" tIns="0" rIns="0" bIns="0">
+          <a:bodyPr rtlCol="0" anchor="ctr" wrap="none"/>
           <a:lstStyle/>
           <a:p>
             <a:pPr algn="ctr"/>
-          </a:p>
-        </p:txBody>
-      </p:sp>
-      <p:sp>
-        <p:nvSpPr>
-          <p:cNvPr id="25" name="TextBox 24"/>
+            <a:r>
+              <a:rPr sz="1600" b="1">
+                <a:solidFill>
+                  <a:srgbClr val="2FDFE5"/>
+                </a:solidFill>
+              </a:rPr>
+              <a:t>3</a:t>
+            </a:r>
+          </a:p>
+        </p:txBody>
+      </p:sp>
+      <p:sp>
+        <p:nvSpPr>
+          <p:cNvPr id="23" name="TextBox 22"/>
           <p:cNvSpPr txBox="1"/>
           <p:nvPr/>
         </p:nvSpPr>
         <p:spPr>
           <a:xfrm>
-            <a:off x="685800" y="4224528"/>
-            <a:ext cx="256032" cy="256032"/>
-          </a:xfrm>
-          <a:prstGeom prst="rect">
-            <a:avLst/>
-          </a:prstGeom>
-          <a:noFill/>
-        </p:spPr>
-        <p:txBody lIns="0" tIns="12700" rIns="0" bIns="0">
-          <a:bodyPr wrap="none">
-            <a:spAutoFit/>
-          </a:bodyPr>
-          <a:lstStyle/>
-          <a:p>
-            <a:pPr algn="ctr"/>
-            <a:r>
-              <a:rPr sz="1100" b="1">
-                <a:solidFill>
-                  <a:srgbClr val="2FDFE5"/>
-                </a:solidFill>
-              </a:rPr>
-              <a:t>3</a:t>
-            </a:r>
-          </a:p>
-        </p:txBody>
-      </p:sp>
-      <p:sp>
-        <p:nvSpPr>
-          <p:cNvPr id="26" name="TextBox 25"/>
-          <p:cNvSpPr txBox="1"/>
-          <p:nvPr/>
-        </p:nvSpPr>
-        <p:spPr>
-          <a:xfrm>
-            <a:off x="1051560" y="4224528"/>
-            <a:ext cx="4865979" cy="512064"/>
+            <a:off x="1143000" y="4224528"/>
+            <a:ext cx="4756251" cy="585216"/>
           </a:xfrm>
           <a:prstGeom prst="rect">
             <a:avLst/>
@@ -8717,7 +8431,7 @@
           <a:p>
             <a:pPr algn="l"/>
             <a:r>
-              <a:rPr sz="1400" b="1">
+              <a:rPr sz="1700" b="1">
                 <a:solidFill>
                   <a:srgbClr val="FFFFFF"/>
                 </a:solidFill>
@@ -8729,13 +8443,13 @@
       </p:sp>
       <p:sp>
         <p:nvSpPr>
-          <p:cNvPr id="27" name="Rectangle 26"/>
+          <p:cNvPr id="24" name="Rectangle 23"/>
           <p:cNvSpPr/>
           <p:nvPr/>
         </p:nvSpPr>
         <p:spPr>
           <a:xfrm>
-            <a:off x="649224" y="4590288"/>
+            <a:off x="649224" y="4681728"/>
             <a:ext cx="5286603" cy="12700"/>
           </a:xfrm>
           <a:prstGeom prst="rect">
@@ -8772,14 +8486,14 @@
       </p:sp>
       <p:sp>
         <p:nvSpPr>
-          <p:cNvPr id="28" name="TextBox 27"/>
+          <p:cNvPr id="25" name="TextBox 24"/>
           <p:cNvSpPr txBox="1"/>
           <p:nvPr/>
         </p:nvSpPr>
         <p:spPr>
           <a:xfrm>
-            <a:off x="649224" y="4666488"/>
-            <a:ext cx="5286603" cy="1308100"/>
+            <a:off x="649224" y="4770628"/>
+            <a:ext cx="5286603" cy="1216660"/>
           </a:xfrm>
           <a:prstGeom prst="rect">
             <a:avLst/>
@@ -8794,7 +8508,7 @@
           <a:p>
             <a:pPr algn="l"/>
             <a:r>
-              <a:rPr sz="1150">
+              <a:rPr sz="1400">
                 <a:solidFill>
                   <a:srgbClr val="D8EAFF"/>
                 </a:solidFill>
@@ -8806,7 +8520,7 @@
       </p:sp>
       <p:sp>
         <p:nvSpPr>
-          <p:cNvPr id="29" name="Rectangle 28"/>
+          <p:cNvPr id="26" name="Rectangle 25"/>
           <p:cNvSpPr/>
           <p:nvPr/>
         </p:nvSpPr>
@@ -8851,7 +8565,7 @@
       </p:sp>
       <p:sp>
         <p:nvSpPr>
-          <p:cNvPr id="30" name="Rectangle 29"/>
+          <p:cNvPr id="27" name="Rectangle 26"/>
           <p:cNvSpPr/>
           <p:nvPr/>
         </p:nvSpPr>
@@ -8894,14 +8608,14 @@
       </p:sp>
       <p:sp>
         <p:nvSpPr>
-          <p:cNvPr id="31" name="Oval 30"/>
+          <p:cNvPr id="28" name="Oval 27"/>
           <p:cNvSpPr/>
           <p:nvPr/>
         </p:nvSpPr>
         <p:spPr>
           <a:xfrm>
             <a:off x="6466179" y="4224528"/>
-            <a:ext cx="256032" cy="256032"/>
+            <a:ext cx="329184" cy="329184"/>
           </a:xfrm>
           <a:prstGeom prst="ellipse">
             <a:avLst/>
@@ -8909,7 +8623,7 @@
           <a:solidFill>
             <a:srgbClr val="0A1638"/>
           </a:solidFill>
-          <a:ln w="15240">
+          <a:ln w="19050">
             <a:solidFill>
               <a:srgbClr val="2FDFE5"/>
             </a:solidFill>
@@ -8929,58 +8643,32 @@
             <a:schemeClr val="lt1"/>
           </a:fontRef>
         </p:style>
-        <p:txBody>
-          <a:bodyPr rtlCol="0" anchor="ctr"/>
+        <p:txBody lIns="0" tIns="0" rIns="0" bIns="0">
+          <a:bodyPr rtlCol="0" anchor="ctr" wrap="none"/>
           <a:lstStyle/>
           <a:p>
             <a:pPr algn="ctr"/>
-          </a:p>
-        </p:txBody>
-      </p:sp>
-      <p:sp>
-        <p:nvSpPr>
-          <p:cNvPr id="32" name="TextBox 31"/>
+            <a:r>
+              <a:rPr sz="1600" b="1">
+                <a:solidFill>
+                  <a:srgbClr val="2FDFE5"/>
+                </a:solidFill>
+              </a:rPr>
+              <a:t>4</a:t>
+            </a:r>
+          </a:p>
+        </p:txBody>
+      </p:sp>
+      <p:sp>
+        <p:nvSpPr>
+          <p:cNvPr id="29" name="TextBox 28"/>
           <p:cNvSpPr txBox="1"/>
           <p:nvPr/>
         </p:nvSpPr>
         <p:spPr>
           <a:xfrm>
-            <a:off x="6466179" y="4224528"/>
-            <a:ext cx="256032" cy="256032"/>
-          </a:xfrm>
-          <a:prstGeom prst="rect">
-            <a:avLst/>
-          </a:prstGeom>
-          <a:noFill/>
-        </p:spPr>
-        <p:txBody lIns="0" tIns="12700" rIns="0" bIns="0">
-          <a:bodyPr wrap="none">
-            <a:spAutoFit/>
-          </a:bodyPr>
-          <a:lstStyle/>
-          <a:p>
-            <a:pPr algn="ctr"/>
-            <a:r>
-              <a:rPr sz="1100" b="1">
-                <a:solidFill>
-                  <a:srgbClr val="2FDFE5"/>
-                </a:solidFill>
-              </a:rPr>
-              <a:t>4</a:t>
-            </a:r>
-          </a:p>
-        </p:txBody>
-      </p:sp>
-      <p:sp>
-        <p:nvSpPr>
-          <p:cNvPr id="33" name="TextBox 32"/>
-          <p:cNvSpPr txBox="1"/>
-          <p:nvPr/>
-        </p:nvSpPr>
-        <p:spPr>
-          <a:xfrm>
-            <a:off x="6831939" y="4224528"/>
-            <a:ext cx="4865979" cy="512064"/>
+            <a:off x="6923379" y="4224528"/>
+            <a:ext cx="4756251" cy="585216"/>
           </a:xfrm>
           <a:prstGeom prst="rect">
             <a:avLst/>
@@ -8995,7 +8683,7 @@
           <a:p>
             <a:pPr algn="l"/>
             <a:r>
-              <a:rPr sz="1400" b="1">
+              <a:rPr sz="1700" b="1">
                 <a:solidFill>
                   <a:srgbClr val="FFFFFF"/>
                 </a:solidFill>
@@ -9007,13 +8695,13 @@
       </p:sp>
       <p:sp>
         <p:nvSpPr>
-          <p:cNvPr id="34" name="Rectangle 33"/>
+          <p:cNvPr id="30" name="Rectangle 29"/>
           <p:cNvSpPr/>
           <p:nvPr/>
         </p:nvSpPr>
         <p:spPr>
           <a:xfrm>
-            <a:off x="6429603" y="4590288"/>
+            <a:off x="6429603" y="4681728"/>
             <a:ext cx="5286603" cy="12700"/>
           </a:xfrm>
           <a:prstGeom prst="rect">
@@ -9050,14 +8738,14 @@
       </p:sp>
       <p:sp>
         <p:nvSpPr>
-          <p:cNvPr id="35" name="TextBox 34"/>
+          <p:cNvPr id="31" name="TextBox 30"/>
           <p:cNvSpPr txBox="1"/>
           <p:nvPr/>
         </p:nvSpPr>
         <p:spPr>
           <a:xfrm>
-            <a:off x="6429603" y="4666488"/>
-            <a:ext cx="5286603" cy="1308100"/>
+            <a:off x="6429603" y="4770628"/>
+            <a:ext cx="5286603" cy="1216660"/>
           </a:xfrm>
           <a:prstGeom prst="rect">
             <a:avLst/>
@@ -9072,7 +8760,7 @@
           <a:p>
             <a:pPr algn="l"/>
             <a:r>
-              <a:rPr sz="1150">
+              <a:rPr sz="1400">
                 <a:solidFill>
                   <a:srgbClr val="D8EAFF"/>
                 </a:solidFill>
@@ -9084,7 +8772,7 @@
       </p:sp>
       <p:pic>
         <p:nvPicPr>
-          <p:cNvPr id="36" name="Picture 35" descr="logo_horiz.png"/>
+          <p:cNvPr id="32" name="Picture 31" descr="logo_horiz.png"/>
           <p:cNvPicPr>
             <a:picLocks noChangeAspect="1"/>
           </p:cNvPicPr>
@@ -9152,7 +8840,7 @@
                                 <p:cBhvr>
                                   <p:cTn id="8" dur="450" fill="hold"/>
                                   <p:tgtEl>
-                                    <p:spTgt spid="15"/>
+                                    <p:spTgt spid="14"/>
                                   </p:tgtEl>
                                 </p:cBhvr>
                               </p:animEffect>
@@ -9169,7 +8857,7 @@
                                 <p:cBhvr>
                                   <p:cTn id="10" dur="450" fill="hold"/>
                                   <p:tgtEl>
-                                    <p:spTgt spid="22"/>
+                                    <p:spTgt spid="20"/>
                                   </p:tgtEl>
                                 </p:cBhvr>
                               </p:animEffect>
@@ -9186,7 +8874,7 @@
                                 <p:cBhvr>
                                   <p:cTn id="12" dur="450" fill="hold"/>
                                   <p:tgtEl>
-                                    <p:spTgt spid="29"/>
+                                    <p:spTgt spid="26"/>
                                   </p:tgtEl>
                                 </p:cBhvr>
                               </p:animEffect>

--- a/sendacredit_propuesta.pptx
+++ b/sendacredit_propuesta.pptx
@@ -3846,74 +3846,21 @@
       </p:sp>
       <p:sp>
         <p:nvSpPr>
-          <p:cNvPr id="11" name="Oval 10"/>
-          <p:cNvSpPr/>
+          <p:cNvPr id="11" name="TextBox 10"/>
+          <p:cNvSpPr txBox="1"/>
           <p:nvPr/>
         </p:nvSpPr>
         <p:spPr>
           <a:xfrm>
             <a:off x="704088" y="2468880"/>
-            <a:ext cx="347472" cy="347472"/>
-          </a:xfrm>
-          <a:prstGeom prst="ellipse">
-            <a:avLst/>
-          </a:prstGeom>
-          <a:solidFill>
-            <a:srgbClr val="0A1638"/>
-          </a:solidFill>
-          <a:ln w="19050">
-            <a:solidFill>
-              <a:srgbClr val="2FDFE5"/>
-            </a:solidFill>
-          </a:ln>
-        </p:spPr>
-        <p:style>
-          <a:lnRef idx="1">
-            <a:schemeClr val="accent1"/>
-          </a:lnRef>
-          <a:fillRef idx="3">
-            <a:schemeClr val="accent1"/>
-          </a:fillRef>
-          <a:effectRef idx="2">
-            <a:schemeClr val="accent1"/>
-          </a:effectRef>
-          <a:fontRef idx="minor">
-            <a:schemeClr val="lt1"/>
-          </a:fontRef>
-        </p:style>
-        <p:txBody lIns="0" tIns="0" rIns="0" bIns="0">
-          <a:bodyPr rtlCol="0" anchor="ctr" wrap="none"/>
-          <a:lstStyle/>
-          <a:p>
-            <a:pPr algn="ctr"/>
-            <a:r>
-              <a:rPr sz="1600" b="1">
-                <a:solidFill>
-                  <a:srgbClr val="2FDFE5"/>
-                </a:solidFill>
-              </a:rPr>
-              <a:t>1</a:t>
-            </a:r>
-          </a:p>
-        </p:txBody>
-      </p:sp>
-      <p:sp>
-        <p:nvSpPr>
-          <p:cNvPr id="12" name="TextBox 11"/>
-          <p:cNvSpPr txBox="1"/>
-          <p:nvPr/>
-        </p:nvSpPr>
-        <p:spPr>
-          <a:xfrm>
-            <a:off x="1179576" y="2468880"/>
-            <a:ext cx="4683099" cy="658368"/>
+            <a:ext cx="5176875" cy="621792"/>
           </a:xfrm>
           <a:prstGeom prst="rect">
             <a:avLst/>
           </a:prstGeom>
           <a:noFill/>
         </p:spPr>
-        <p:txBody lIns="38100" tIns="25400" rIns="38100" bIns="25400">
+        <p:txBody lIns="38100" tIns="50800" rIns="38100" bIns="25400">
           <a:bodyPr wrap="square">
             <a:spAutoFit/>
           </a:bodyPr>
@@ -3923,6 +3870,14 @@
             <a:r>
               <a:rPr sz="1800" b="1">
                 <a:solidFill>
+                  <a:srgbClr val="2FDFE5"/>
+                </a:solidFill>
+              </a:rPr>
+              <a:t>1  </a:t>
+            </a:r>
+            <a:r>
+              <a:rPr sz="1800" b="1">
+                <a:solidFill>
                   <a:srgbClr val="FFFFFF"/>
                 </a:solidFill>
               </a:rPr>
@@ -3933,13 +3888,13 @@
       </p:sp>
       <p:sp>
         <p:nvSpPr>
-          <p:cNvPr id="13" name="Rectangle 12"/>
+          <p:cNvPr id="12" name="Rectangle 11"/>
           <p:cNvSpPr/>
           <p:nvPr/>
         </p:nvSpPr>
         <p:spPr>
           <a:xfrm>
-            <a:off x="667512" y="2944368"/>
+            <a:off x="667512" y="3182112"/>
             <a:ext cx="5250027" cy="15240"/>
           </a:xfrm>
           <a:prstGeom prst="rect">
@@ -3976,14 +3931,14 @@
       </p:sp>
       <p:sp>
         <p:nvSpPr>
-          <p:cNvPr id="14" name="TextBox 13"/>
+          <p:cNvPr id="13" name="TextBox 12"/>
           <p:cNvSpPr txBox="1"/>
           <p:nvPr/>
         </p:nvSpPr>
         <p:spPr>
           <a:xfrm>
-            <a:off x="667512" y="3045968"/>
-            <a:ext cx="5250027" cy="2923032"/>
+            <a:off x="667512" y="3283712"/>
+            <a:ext cx="5250027" cy="2685288"/>
           </a:xfrm>
           <a:prstGeom prst="rect">
             <a:avLst/>
@@ -4068,7 +4023,7 @@
       </p:sp>
       <p:sp>
         <p:nvSpPr>
-          <p:cNvPr id="15" name="Rectangle 14"/>
+          <p:cNvPr id="14" name="Rectangle 13"/>
           <p:cNvSpPr/>
           <p:nvPr/>
         </p:nvSpPr>
@@ -4113,7 +4068,7 @@
       </p:sp>
       <p:sp>
         <p:nvSpPr>
-          <p:cNvPr id="16" name="Rectangle 15"/>
+          <p:cNvPr id="15" name="Rectangle 14"/>
           <p:cNvSpPr/>
           <p:nvPr/>
         </p:nvSpPr>
@@ -4156,74 +4111,21 @@
       </p:sp>
       <p:sp>
         <p:nvSpPr>
-          <p:cNvPr id="17" name="Oval 16"/>
-          <p:cNvSpPr/>
+          <p:cNvPr id="16" name="TextBox 15"/>
+          <p:cNvSpPr txBox="1"/>
           <p:nvPr/>
         </p:nvSpPr>
         <p:spPr>
           <a:xfrm>
             <a:off x="6484467" y="2468880"/>
-            <a:ext cx="347472" cy="347472"/>
-          </a:xfrm>
-          <a:prstGeom prst="ellipse">
-            <a:avLst/>
-          </a:prstGeom>
-          <a:solidFill>
-            <a:srgbClr val="0A1638"/>
-          </a:solidFill>
-          <a:ln w="19050">
-            <a:solidFill>
-              <a:srgbClr val="2FDFE5"/>
-            </a:solidFill>
-          </a:ln>
-        </p:spPr>
-        <p:style>
-          <a:lnRef idx="1">
-            <a:schemeClr val="accent1"/>
-          </a:lnRef>
-          <a:fillRef idx="3">
-            <a:schemeClr val="accent1"/>
-          </a:fillRef>
-          <a:effectRef idx="2">
-            <a:schemeClr val="accent1"/>
-          </a:effectRef>
-          <a:fontRef idx="minor">
-            <a:schemeClr val="lt1"/>
-          </a:fontRef>
-        </p:style>
-        <p:txBody lIns="0" tIns="0" rIns="0" bIns="0">
-          <a:bodyPr rtlCol="0" anchor="ctr" wrap="none"/>
-          <a:lstStyle/>
-          <a:p>
-            <a:pPr algn="ctr"/>
-            <a:r>
-              <a:rPr sz="1600" b="1">
-                <a:solidFill>
-                  <a:srgbClr val="2FDFE5"/>
-                </a:solidFill>
-              </a:rPr>
-              <a:t>2</a:t>
-            </a:r>
-          </a:p>
-        </p:txBody>
-      </p:sp>
-      <p:sp>
-        <p:nvSpPr>
-          <p:cNvPr id="18" name="TextBox 17"/>
-          <p:cNvSpPr txBox="1"/>
-          <p:nvPr/>
-        </p:nvSpPr>
-        <p:spPr>
-          <a:xfrm>
-            <a:off x="6959955" y="2468880"/>
-            <a:ext cx="4683099" cy="658368"/>
+            <a:ext cx="5176875" cy="621792"/>
           </a:xfrm>
           <a:prstGeom prst="rect">
             <a:avLst/>
           </a:prstGeom>
           <a:noFill/>
         </p:spPr>
-        <p:txBody lIns="38100" tIns="25400" rIns="38100" bIns="25400">
+        <p:txBody lIns="38100" tIns="50800" rIns="38100" bIns="25400">
           <a:bodyPr wrap="square">
             <a:spAutoFit/>
           </a:bodyPr>
@@ -4233,6 +4135,14 @@
             <a:r>
               <a:rPr sz="1800" b="1">
                 <a:solidFill>
+                  <a:srgbClr val="2FDFE5"/>
+                </a:solidFill>
+              </a:rPr>
+              <a:t>2  </a:t>
+            </a:r>
+            <a:r>
+              <a:rPr sz="1800" b="1">
+                <a:solidFill>
                   <a:srgbClr val="FFFFFF"/>
                 </a:solidFill>
               </a:rPr>
@@ -4243,13 +4153,13 @@
       </p:sp>
       <p:sp>
         <p:nvSpPr>
-          <p:cNvPr id="19" name="Rectangle 18"/>
+          <p:cNvPr id="17" name="Rectangle 16"/>
           <p:cNvSpPr/>
           <p:nvPr/>
         </p:nvSpPr>
         <p:spPr>
           <a:xfrm>
-            <a:off x="6447891" y="2944368"/>
+            <a:off x="6447891" y="3182112"/>
             <a:ext cx="5250027" cy="15240"/>
           </a:xfrm>
           <a:prstGeom prst="rect">
@@ -4286,14 +4196,14 @@
       </p:sp>
       <p:sp>
         <p:nvSpPr>
-          <p:cNvPr id="20" name="TextBox 19"/>
+          <p:cNvPr id="18" name="TextBox 17"/>
           <p:cNvSpPr txBox="1"/>
           <p:nvPr/>
         </p:nvSpPr>
         <p:spPr>
           <a:xfrm>
-            <a:off x="6447891" y="3045968"/>
-            <a:ext cx="5250027" cy="2923032"/>
+            <a:off x="6447891" y="3283712"/>
+            <a:ext cx="5250027" cy="2685288"/>
           </a:xfrm>
           <a:prstGeom prst="rect">
             <a:avLst/>
@@ -4378,7 +4288,7 @@
       </p:sp>
       <p:pic>
         <p:nvPicPr>
-          <p:cNvPr id="21" name="Picture 20" descr="logo_horiz.png"/>
+          <p:cNvPr id="19" name="Picture 18" descr="logo_horiz.png"/>
           <p:cNvPicPr>
             <a:picLocks noChangeAspect="1"/>
           </p:cNvPicPr>
@@ -4446,7 +4356,7 @@
                                 <p:cBhvr>
                                   <p:cTn id="8" dur="450" fill="hold"/>
                                   <p:tgtEl>
-                                    <p:spTgt spid="15"/>
+                                    <p:spTgt spid="14"/>
                                   </p:tgtEl>
                                 </p:cBhvr>
                               </p:animEffect>
@@ -4856,74 +4766,21 @@
       </p:sp>
       <p:sp>
         <p:nvSpPr>
-          <p:cNvPr id="11" name="Oval 10"/>
-          <p:cNvSpPr/>
+          <p:cNvPr id="11" name="TextBox 10"/>
+          <p:cNvSpPr txBox="1"/>
           <p:nvPr/>
         </p:nvSpPr>
         <p:spPr>
           <a:xfrm>
             <a:off x="704088" y="2468880"/>
-            <a:ext cx="347472" cy="347472"/>
-          </a:xfrm>
-          <a:prstGeom prst="ellipse">
-            <a:avLst/>
-          </a:prstGeom>
-          <a:solidFill>
-            <a:srgbClr val="0A1638"/>
-          </a:solidFill>
-          <a:ln w="19050">
-            <a:solidFill>
-              <a:srgbClr val="2FDFE5"/>
-            </a:solidFill>
-          </a:ln>
-        </p:spPr>
-        <p:style>
-          <a:lnRef idx="1">
-            <a:schemeClr val="accent1"/>
-          </a:lnRef>
-          <a:fillRef idx="3">
-            <a:schemeClr val="accent1"/>
-          </a:fillRef>
-          <a:effectRef idx="2">
-            <a:schemeClr val="accent1"/>
-          </a:effectRef>
-          <a:fontRef idx="minor">
-            <a:schemeClr val="lt1"/>
-          </a:fontRef>
-        </p:style>
-        <p:txBody lIns="0" tIns="0" rIns="0" bIns="0">
-          <a:bodyPr rtlCol="0" anchor="ctr" wrap="none"/>
-          <a:lstStyle/>
-          <a:p>
-            <a:pPr algn="ctr"/>
-            <a:r>
-              <a:rPr sz="1600" b="1">
-                <a:solidFill>
-                  <a:srgbClr val="2FDFE5"/>
-                </a:solidFill>
-              </a:rPr>
-              <a:t>3</a:t>
-            </a:r>
-          </a:p>
-        </p:txBody>
-      </p:sp>
-      <p:sp>
-        <p:nvSpPr>
-          <p:cNvPr id="12" name="TextBox 11"/>
-          <p:cNvSpPr txBox="1"/>
-          <p:nvPr/>
-        </p:nvSpPr>
-        <p:spPr>
-          <a:xfrm>
-            <a:off x="1179576" y="2468880"/>
-            <a:ext cx="4683099" cy="658368"/>
+            <a:ext cx="5176875" cy="621792"/>
           </a:xfrm>
           <a:prstGeom prst="rect">
             <a:avLst/>
           </a:prstGeom>
           <a:noFill/>
         </p:spPr>
-        <p:txBody lIns="38100" tIns="25400" rIns="38100" bIns="25400">
+        <p:txBody lIns="38100" tIns="50800" rIns="38100" bIns="25400">
           <a:bodyPr wrap="square">
             <a:spAutoFit/>
           </a:bodyPr>
@@ -4933,6 +4790,14 @@
             <a:r>
               <a:rPr sz="1800" b="1">
                 <a:solidFill>
+                  <a:srgbClr val="2FDFE5"/>
+                </a:solidFill>
+              </a:rPr>
+              <a:t>3  </a:t>
+            </a:r>
+            <a:r>
+              <a:rPr sz="1800" b="1">
+                <a:solidFill>
                   <a:srgbClr val="FFFFFF"/>
                 </a:solidFill>
               </a:rPr>
@@ -4943,13 +4808,13 @@
       </p:sp>
       <p:sp>
         <p:nvSpPr>
-          <p:cNvPr id="13" name="Rectangle 12"/>
+          <p:cNvPr id="12" name="Rectangle 11"/>
           <p:cNvSpPr/>
           <p:nvPr/>
         </p:nvSpPr>
         <p:spPr>
           <a:xfrm>
-            <a:off x="667512" y="2944368"/>
+            <a:off x="667512" y="3182112"/>
             <a:ext cx="5250027" cy="15240"/>
           </a:xfrm>
           <a:prstGeom prst="rect">
@@ -4986,14 +4851,14 @@
       </p:sp>
       <p:sp>
         <p:nvSpPr>
-          <p:cNvPr id="14" name="TextBox 13"/>
+          <p:cNvPr id="13" name="TextBox 12"/>
           <p:cNvSpPr txBox="1"/>
           <p:nvPr/>
         </p:nvSpPr>
         <p:spPr>
           <a:xfrm>
-            <a:off x="667512" y="3045968"/>
-            <a:ext cx="5250027" cy="2923032"/>
+            <a:off x="667512" y="3283712"/>
+            <a:ext cx="5250027" cy="2685288"/>
           </a:xfrm>
           <a:prstGeom prst="rect">
             <a:avLst/>
@@ -5078,7 +4943,7 @@
       </p:sp>
       <p:sp>
         <p:nvSpPr>
-          <p:cNvPr id="15" name="Rectangle 14"/>
+          <p:cNvPr id="14" name="Rectangle 13"/>
           <p:cNvSpPr/>
           <p:nvPr/>
         </p:nvSpPr>
@@ -5123,7 +4988,7 @@
       </p:sp>
       <p:sp>
         <p:nvSpPr>
-          <p:cNvPr id="16" name="Rectangle 15"/>
+          <p:cNvPr id="15" name="Rectangle 14"/>
           <p:cNvSpPr/>
           <p:nvPr/>
         </p:nvSpPr>
@@ -5166,74 +5031,21 @@
       </p:sp>
       <p:sp>
         <p:nvSpPr>
-          <p:cNvPr id="17" name="Oval 16"/>
-          <p:cNvSpPr/>
+          <p:cNvPr id="16" name="TextBox 15"/>
+          <p:cNvSpPr txBox="1"/>
           <p:nvPr/>
         </p:nvSpPr>
         <p:spPr>
           <a:xfrm>
             <a:off x="6484467" y="2468880"/>
-            <a:ext cx="347472" cy="347472"/>
-          </a:xfrm>
-          <a:prstGeom prst="ellipse">
-            <a:avLst/>
-          </a:prstGeom>
-          <a:solidFill>
-            <a:srgbClr val="0A1638"/>
-          </a:solidFill>
-          <a:ln w="19050">
-            <a:solidFill>
-              <a:srgbClr val="2FDFE5"/>
-            </a:solidFill>
-          </a:ln>
-        </p:spPr>
-        <p:style>
-          <a:lnRef idx="1">
-            <a:schemeClr val="accent1"/>
-          </a:lnRef>
-          <a:fillRef idx="3">
-            <a:schemeClr val="accent1"/>
-          </a:fillRef>
-          <a:effectRef idx="2">
-            <a:schemeClr val="accent1"/>
-          </a:effectRef>
-          <a:fontRef idx="minor">
-            <a:schemeClr val="lt1"/>
-          </a:fontRef>
-        </p:style>
-        <p:txBody lIns="0" tIns="0" rIns="0" bIns="0">
-          <a:bodyPr rtlCol="0" anchor="ctr" wrap="none"/>
-          <a:lstStyle/>
-          <a:p>
-            <a:pPr algn="ctr"/>
-            <a:r>
-              <a:rPr sz="1600" b="1">
-                <a:solidFill>
-                  <a:srgbClr val="2FDFE5"/>
-                </a:solidFill>
-              </a:rPr>
-              <a:t>4</a:t>
-            </a:r>
-          </a:p>
-        </p:txBody>
-      </p:sp>
-      <p:sp>
-        <p:nvSpPr>
-          <p:cNvPr id="18" name="TextBox 17"/>
-          <p:cNvSpPr txBox="1"/>
-          <p:nvPr/>
-        </p:nvSpPr>
-        <p:spPr>
-          <a:xfrm>
-            <a:off x="6959955" y="2468880"/>
-            <a:ext cx="4683099" cy="658368"/>
+            <a:ext cx="5176875" cy="621792"/>
           </a:xfrm>
           <a:prstGeom prst="rect">
             <a:avLst/>
           </a:prstGeom>
           <a:noFill/>
         </p:spPr>
-        <p:txBody lIns="38100" tIns="25400" rIns="38100" bIns="25400">
+        <p:txBody lIns="38100" tIns="50800" rIns="38100" bIns="25400">
           <a:bodyPr wrap="square">
             <a:spAutoFit/>
           </a:bodyPr>
@@ -5243,6 +5055,14 @@
             <a:r>
               <a:rPr sz="1800" b="1">
                 <a:solidFill>
+                  <a:srgbClr val="2FDFE5"/>
+                </a:solidFill>
+              </a:rPr>
+              <a:t>4  </a:t>
+            </a:r>
+            <a:r>
+              <a:rPr sz="1800" b="1">
+                <a:solidFill>
                   <a:srgbClr val="FFFFFF"/>
                 </a:solidFill>
               </a:rPr>
@@ -5253,13 +5073,13 @@
       </p:sp>
       <p:sp>
         <p:nvSpPr>
-          <p:cNvPr id="19" name="Rectangle 18"/>
+          <p:cNvPr id="17" name="Rectangle 16"/>
           <p:cNvSpPr/>
           <p:nvPr/>
         </p:nvSpPr>
         <p:spPr>
           <a:xfrm>
-            <a:off x="6447891" y="2944368"/>
+            <a:off x="6447891" y="3182112"/>
             <a:ext cx="5250027" cy="15240"/>
           </a:xfrm>
           <a:prstGeom prst="rect">
@@ -5296,14 +5116,14 @@
       </p:sp>
       <p:sp>
         <p:nvSpPr>
-          <p:cNvPr id="20" name="TextBox 19"/>
+          <p:cNvPr id="18" name="TextBox 17"/>
           <p:cNvSpPr txBox="1"/>
           <p:nvPr/>
         </p:nvSpPr>
         <p:spPr>
           <a:xfrm>
-            <a:off x="6447891" y="3045968"/>
-            <a:ext cx="5250027" cy="2923032"/>
+            <a:off x="6447891" y="3283712"/>
+            <a:ext cx="5250027" cy="2685288"/>
           </a:xfrm>
           <a:prstGeom prst="rect">
             <a:avLst/>
@@ -5388,7 +5208,7 @@
       </p:sp>
       <p:pic>
         <p:nvPicPr>
-          <p:cNvPr id="21" name="Picture 20" descr="logo_horiz.png"/>
+          <p:cNvPr id="19" name="Picture 18" descr="logo_horiz.png"/>
           <p:cNvPicPr>
             <a:picLocks noChangeAspect="1"/>
           </p:cNvPicPr>
@@ -5456,7 +5276,7 @@
                                 <p:cBhvr>
                                   <p:cTn id="8" dur="450" fill="hold"/>
                                   <p:tgtEl>
-                                    <p:spTgt spid="15"/>
+                                    <p:spTgt spid="14"/>
                                   </p:tgtEl>
                                 </p:cBhvr>
                               </p:animEffect>
@@ -5866,74 +5686,21 @@
       </p:sp>
       <p:sp>
         <p:nvSpPr>
-          <p:cNvPr id="11" name="Oval 10"/>
-          <p:cNvSpPr/>
+          <p:cNvPr id="11" name="TextBox 10"/>
+          <p:cNvSpPr txBox="1"/>
           <p:nvPr/>
         </p:nvSpPr>
         <p:spPr>
           <a:xfrm>
             <a:off x="704088" y="2468880"/>
-            <a:ext cx="347472" cy="347472"/>
-          </a:xfrm>
-          <a:prstGeom prst="ellipse">
-            <a:avLst/>
-          </a:prstGeom>
-          <a:solidFill>
-            <a:srgbClr val="0A1638"/>
-          </a:solidFill>
-          <a:ln w="19050">
-            <a:solidFill>
-              <a:srgbClr val="2FDFE5"/>
-            </a:solidFill>
-          </a:ln>
-        </p:spPr>
-        <p:style>
-          <a:lnRef idx="1">
-            <a:schemeClr val="accent1"/>
-          </a:lnRef>
-          <a:fillRef idx="3">
-            <a:schemeClr val="accent1"/>
-          </a:fillRef>
-          <a:effectRef idx="2">
-            <a:schemeClr val="accent1"/>
-          </a:effectRef>
-          <a:fontRef idx="minor">
-            <a:schemeClr val="lt1"/>
-          </a:fontRef>
-        </p:style>
-        <p:txBody lIns="0" tIns="0" rIns="0" bIns="0">
-          <a:bodyPr rtlCol="0" anchor="ctr" wrap="none"/>
-          <a:lstStyle/>
-          <a:p>
-            <a:pPr algn="ctr"/>
-            <a:r>
-              <a:rPr sz="1600" b="1">
-                <a:solidFill>
-                  <a:srgbClr val="2FDFE5"/>
-                </a:solidFill>
-              </a:rPr>
-              <a:t>5</a:t>
-            </a:r>
-          </a:p>
-        </p:txBody>
-      </p:sp>
-      <p:sp>
-        <p:nvSpPr>
-          <p:cNvPr id="12" name="TextBox 11"/>
-          <p:cNvSpPr txBox="1"/>
-          <p:nvPr/>
-        </p:nvSpPr>
-        <p:spPr>
-          <a:xfrm>
-            <a:off x="1179576" y="2468880"/>
-            <a:ext cx="4683099" cy="658368"/>
+            <a:ext cx="5176875" cy="621792"/>
           </a:xfrm>
           <a:prstGeom prst="rect">
             <a:avLst/>
           </a:prstGeom>
           <a:noFill/>
         </p:spPr>
-        <p:txBody lIns="38100" tIns="25400" rIns="38100" bIns="25400">
+        <p:txBody lIns="38100" tIns="50800" rIns="38100" bIns="25400">
           <a:bodyPr wrap="square">
             <a:spAutoFit/>
           </a:bodyPr>
@@ -5943,6 +5710,14 @@
             <a:r>
               <a:rPr sz="1800" b="1">
                 <a:solidFill>
+                  <a:srgbClr val="2FDFE5"/>
+                </a:solidFill>
+              </a:rPr>
+              <a:t>5  </a:t>
+            </a:r>
+            <a:r>
+              <a:rPr sz="1800" b="1">
+                <a:solidFill>
                   <a:srgbClr val="FFFFFF"/>
                 </a:solidFill>
               </a:rPr>
@@ -5953,13 +5728,13 @@
       </p:sp>
       <p:sp>
         <p:nvSpPr>
-          <p:cNvPr id="13" name="Rectangle 12"/>
+          <p:cNvPr id="12" name="Rectangle 11"/>
           <p:cNvSpPr/>
           <p:nvPr/>
         </p:nvSpPr>
         <p:spPr>
           <a:xfrm>
-            <a:off x="667512" y="2944368"/>
+            <a:off x="667512" y="3182112"/>
             <a:ext cx="5250027" cy="15240"/>
           </a:xfrm>
           <a:prstGeom prst="rect">
@@ -5996,14 +5771,14 @@
       </p:sp>
       <p:sp>
         <p:nvSpPr>
-          <p:cNvPr id="14" name="TextBox 13"/>
+          <p:cNvPr id="13" name="TextBox 12"/>
           <p:cNvSpPr txBox="1"/>
           <p:nvPr/>
         </p:nvSpPr>
         <p:spPr>
           <a:xfrm>
-            <a:off x="667512" y="3045968"/>
-            <a:ext cx="5250027" cy="2923032"/>
+            <a:off x="667512" y="3283712"/>
+            <a:ext cx="5250027" cy="2685288"/>
           </a:xfrm>
           <a:prstGeom prst="rect">
             <a:avLst/>
@@ -6088,7 +5863,7 @@
       </p:sp>
       <p:sp>
         <p:nvSpPr>
-          <p:cNvPr id="15" name="Rectangle 14"/>
+          <p:cNvPr id="14" name="Rectangle 13"/>
           <p:cNvSpPr/>
           <p:nvPr/>
         </p:nvSpPr>
@@ -6133,7 +5908,7 @@
       </p:sp>
       <p:sp>
         <p:nvSpPr>
-          <p:cNvPr id="16" name="Rectangle 15"/>
+          <p:cNvPr id="15" name="Rectangle 14"/>
           <p:cNvSpPr/>
           <p:nvPr/>
         </p:nvSpPr>
@@ -6176,74 +5951,21 @@
       </p:sp>
       <p:sp>
         <p:nvSpPr>
-          <p:cNvPr id="17" name="Oval 16"/>
-          <p:cNvSpPr/>
+          <p:cNvPr id="16" name="TextBox 15"/>
+          <p:cNvSpPr txBox="1"/>
           <p:nvPr/>
         </p:nvSpPr>
         <p:spPr>
           <a:xfrm>
             <a:off x="6484467" y="2468880"/>
-            <a:ext cx="347472" cy="347472"/>
-          </a:xfrm>
-          <a:prstGeom prst="ellipse">
-            <a:avLst/>
-          </a:prstGeom>
-          <a:solidFill>
-            <a:srgbClr val="0A1638"/>
-          </a:solidFill>
-          <a:ln w="19050">
-            <a:solidFill>
-              <a:srgbClr val="2FDFE5"/>
-            </a:solidFill>
-          </a:ln>
-        </p:spPr>
-        <p:style>
-          <a:lnRef idx="1">
-            <a:schemeClr val="accent1"/>
-          </a:lnRef>
-          <a:fillRef idx="3">
-            <a:schemeClr val="accent1"/>
-          </a:fillRef>
-          <a:effectRef idx="2">
-            <a:schemeClr val="accent1"/>
-          </a:effectRef>
-          <a:fontRef idx="minor">
-            <a:schemeClr val="lt1"/>
-          </a:fontRef>
-        </p:style>
-        <p:txBody lIns="0" tIns="0" rIns="0" bIns="0">
-          <a:bodyPr rtlCol="0" anchor="ctr" wrap="none"/>
-          <a:lstStyle/>
-          <a:p>
-            <a:pPr algn="ctr"/>
-            <a:r>
-              <a:rPr sz="1600" b="1">
-                <a:solidFill>
-                  <a:srgbClr val="2FDFE5"/>
-                </a:solidFill>
-              </a:rPr>
-              <a:t>6</a:t>
-            </a:r>
-          </a:p>
-        </p:txBody>
-      </p:sp>
-      <p:sp>
-        <p:nvSpPr>
-          <p:cNvPr id="18" name="TextBox 17"/>
-          <p:cNvSpPr txBox="1"/>
-          <p:nvPr/>
-        </p:nvSpPr>
-        <p:spPr>
-          <a:xfrm>
-            <a:off x="6959955" y="2468880"/>
-            <a:ext cx="4683099" cy="658368"/>
+            <a:ext cx="5176875" cy="621792"/>
           </a:xfrm>
           <a:prstGeom prst="rect">
             <a:avLst/>
           </a:prstGeom>
           <a:noFill/>
         </p:spPr>
-        <p:txBody lIns="38100" tIns="25400" rIns="38100" bIns="25400">
+        <p:txBody lIns="38100" tIns="50800" rIns="38100" bIns="25400">
           <a:bodyPr wrap="square">
             <a:spAutoFit/>
           </a:bodyPr>
@@ -6253,6 +5975,14 @@
             <a:r>
               <a:rPr sz="1800" b="1">
                 <a:solidFill>
+                  <a:srgbClr val="2FDFE5"/>
+                </a:solidFill>
+              </a:rPr>
+              <a:t>6  </a:t>
+            </a:r>
+            <a:r>
+              <a:rPr sz="1800" b="1">
+                <a:solidFill>
                   <a:srgbClr val="FFFFFF"/>
                 </a:solidFill>
               </a:rPr>
@@ -6263,13 +5993,13 @@
       </p:sp>
       <p:sp>
         <p:nvSpPr>
-          <p:cNvPr id="19" name="Rectangle 18"/>
+          <p:cNvPr id="17" name="Rectangle 16"/>
           <p:cNvSpPr/>
           <p:nvPr/>
         </p:nvSpPr>
         <p:spPr>
           <a:xfrm>
-            <a:off x="6447891" y="2944368"/>
+            <a:off x="6447891" y="3182112"/>
             <a:ext cx="5250027" cy="15240"/>
           </a:xfrm>
           <a:prstGeom prst="rect">
@@ -6306,14 +6036,14 @@
       </p:sp>
       <p:sp>
         <p:nvSpPr>
-          <p:cNvPr id="20" name="TextBox 19"/>
+          <p:cNvPr id="18" name="TextBox 17"/>
           <p:cNvSpPr txBox="1"/>
           <p:nvPr/>
         </p:nvSpPr>
         <p:spPr>
           <a:xfrm>
-            <a:off x="6447891" y="3045968"/>
-            <a:ext cx="5250027" cy="2923032"/>
+            <a:off x="6447891" y="3283712"/>
+            <a:ext cx="5250027" cy="2685288"/>
           </a:xfrm>
           <a:prstGeom prst="rect">
             <a:avLst/>
@@ -6398,7 +6128,7 @@
       </p:sp>
       <p:pic>
         <p:nvPicPr>
-          <p:cNvPr id="21" name="Picture 20" descr="logo_horiz.png"/>
+          <p:cNvPr id="19" name="Picture 18" descr="logo_horiz.png"/>
           <p:cNvPicPr>
             <a:picLocks noChangeAspect="1"/>
           </p:cNvPicPr>
@@ -6466,7 +6196,7 @@
                                 <p:cBhvr>
                                   <p:cTn id="8" dur="450" fill="hold"/>
                                   <p:tgtEl>
-                                    <p:spTgt spid="15"/>
+                                    <p:spTgt spid="14"/>
                                   </p:tgtEl>
                                 </p:cBhvr>
                               </p:animEffect>
@@ -6876,74 +6606,21 @@
       </p:sp>
       <p:sp>
         <p:nvSpPr>
-          <p:cNvPr id="11" name="Oval 10"/>
-          <p:cNvSpPr/>
+          <p:cNvPr id="11" name="TextBox 10"/>
+          <p:cNvSpPr txBox="1"/>
           <p:nvPr/>
         </p:nvSpPr>
         <p:spPr>
           <a:xfrm>
             <a:off x="704088" y="2468880"/>
-            <a:ext cx="347472" cy="347472"/>
-          </a:xfrm>
-          <a:prstGeom prst="ellipse">
-            <a:avLst/>
-          </a:prstGeom>
-          <a:solidFill>
-            <a:srgbClr val="0A1638"/>
-          </a:solidFill>
-          <a:ln w="19050">
-            <a:solidFill>
-              <a:srgbClr val="2FDFE5"/>
-            </a:solidFill>
-          </a:ln>
-        </p:spPr>
-        <p:style>
-          <a:lnRef idx="1">
-            <a:schemeClr val="accent1"/>
-          </a:lnRef>
-          <a:fillRef idx="3">
-            <a:schemeClr val="accent1"/>
-          </a:fillRef>
-          <a:effectRef idx="2">
-            <a:schemeClr val="accent1"/>
-          </a:effectRef>
-          <a:fontRef idx="minor">
-            <a:schemeClr val="lt1"/>
-          </a:fontRef>
-        </p:style>
-        <p:txBody lIns="0" tIns="0" rIns="0" bIns="0">
-          <a:bodyPr rtlCol="0" anchor="ctr" wrap="none"/>
-          <a:lstStyle/>
-          <a:p>
-            <a:pPr algn="ctr"/>
-            <a:r>
-              <a:rPr sz="1600" b="1">
-                <a:solidFill>
-                  <a:srgbClr val="2FDFE5"/>
-                </a:solidFill>
-              </a:rPr>
-              <a:t>7</a:t>
-            </a:r>
-          </a:p>
-        </p:txBody>
-      </p:sp>
-      <p:sp>
-        <p:nvSpPr>
-          <p:cNvPr id="12" name="TextBox 11"/>
-          <p:cNvSpPr txBox="1"/>
-          <p:nvPr/>
-        </p:nvSpPr>
-        <p:spPr>
-          <a:xfrm>
-            <a:off x="1179576" y="2468880"/>
-            <a:ext cx="4683099" cy="658368"/>
+            <a:ext cx="5176875" cy="621792"/>
           </a:xfrm>
           <a:prstGeom prst="rect">
             <a:avLst/>
           </a:prstGeom>
           <a:noFill/>
         </p:spPr>
-        <p:txBody lIns="38100" tIns="25400" rIns="38100" bIns="25400">
+        <p:txBody lIns="38100" tIns="50800" rIns="38100" bIns="25400">
           <a:bodyPr wrap="square">
             <a:spAutoFit/>
           </a:bodyPr>
@@ -6953,6 +6630,14 @@
             <a:r>
               <a:rPr sz="1800" b="1">
                 <a:solidFill>
+                  <a:srgbClr val="2FDFE5"/>
+                </a:solidFill>
+              </a:rPr>
+              <a:t>7  </a:t>
+            </a:r>
+            <a:r>
+              <a:rPr sz="1800" b="1">
+                <a:solidFill>
                   <a:srgbClr val="FFFFFF"/>
                 </a:solidFill>
               </a:rPr>
@@ -6963,13 +6648,13 @@
       </p:sp>
       <p:sp>
         <p:nvSpPr>
-          <p:cNvPr id="13" name="Rectangle 12"/>
+          <p:cNvPr id="12" name="Rectangle 11"/>
           <p:cNvSpPr/>
           <p:nvPr/>
         </p:nvSpPr>
         <p:spPr>
           <a:xfrm>
-            <a:off x="667512" y="2944368"/>
+            <a:off x="667512" y="3182112"/>
             <a:ext cx="5250027" cy="15240"/>
           </a:xfrm>
           <a:prstGeom prst="rect">
@@ -7006,14 +6691,14 @@
       </p:sp>
       <p:sp>
         <p:nvSpPr>
-          <p:cNvPr id="14" name="TextBox 13"/>
+          <p:cNvPr id="13" name="TextBox 12"/>
           <p:cNvSpPr txBox="1"/>
           <p:nvPr/>
         </p:nvSpPr>
         <p:spPr>
           <a:xfrm>
-            <a:off x="667512" y="3045968"/>
-            <a:ext cx="5250027" cy="2923032"/>
+            <a:off x="667512" y="3283712"/>
+            <a:ext cx="5250027" cy="2685288"/>
           </a:xfrm>
           <a:prstGeom prst="rect">
             <a:avLst/>
@@ -7098,7 +6783,7 @@
       </p:sp>
       <p:sp>
         <p:nvSpPr>
-          <p:cNvPr id="15" name="Rectangle 14"/>
+          <p:cNvPr id="14" name="Rectangle 13"/>
           <p:cNvSpPr/>
           <p:nvPr/>
         </p:nvSpPr>
@@ -7143,7 +6828,7 @@
       </p:sp>
       <p:sp>
         <p:nvSpPr>
-          <p:cNvPr id="16" name="Rectangle 15"/>
+          <p:cNvPr id="15" name="Rectangle 14"/>
           <p:cNvSpPr/>
           <p:nvPr/>
         </p:nvSpPr>
@@ -7186,74 +6871,21 @@
       </p:sp>
       <p:sp>
         <p:nvSpPr>
-          <p:cNvPr id="17" name="Oval 16"/>
-          <p:cNvSpPr/>
+          <p:cNvPr id="16" name="TextBox 15"/>
+          <p:cNvSpPr txBox="1"/>
           <p:nvPr/>
         </p:nvSpPr>
         <p:spPr>
           <a:xfrm>
             <a:off x="6484467" y="2468880"/>
-            <a:ext cx="347472" cy="347472"/>
-          </a:xfrm>
-          <a:prstGeom prst="ellipse">
-            <a:avLst/>
-          </a:prstGeom>
-          <a:solidFill>
-            <a:srgbClr val="0A1638"/>
-          </a:solidFill>
-          <a:ln w="19050">
-            <a:solidFill>
-              <a:srgbClr val="2FDFE5"/>
-            </a:solidFill>
-          </a:ln>
-        </p:spPr>
-        <p:style>
-          <a:lnRef idx="1">
-            <a:schemeClr val="accent1"/>
-          </a:lnRef>
-          <a:fillRef idx="3">
-            <a:schemeClr val="accent1"/>
-          </a:fillRef>
-          <a:effectRef idx="2">
-            <a:schemeClr val="accent1"/>
-          </a:effectRef>
-          <a:fontRef idx="minor">
-            <a:schemeClr val="lt1"/>
-          </a:fontRef>
-        </p:style>
-        <p:txBody lIns="0" tIns="0" rIns="0" bIns="0">
-          <a:bodyPr rtlCol="0" anchor="ctr" wrap="none"/>
-          <a:lstStyle/>
-          <a:p>
-            <a:pPr algn="ctr"/>
-            <a:r>
-              <a:rPr sz="1600" b="1">
-                <a:solidFill>
-                  <a:srgbClr val="2FDFE5"/>
-                </a:solidFill>
-              </a:rPr>
-              <a:t>8</a:t>
-            </a:r>
-          </a:p>
-        </p:txBody>
-      </p:sp>
-      <p:sp>
-        <p:nvSpPr>
-          <p:cNvPr id="18" name="TextBox 17"/>
-          <p:cNvSpPr txBox="1"/>
-          <p:nvPr/>
-        </p:nvSpPr>
-        <p:spPr>
-          <a:xfrm>
-            <a:off x="6959955" y="2468880"/>
-            <a:ext cx="4683099" cy="658368"/>
+            <a:ext cx="5176875" cy="621792"/>
           </a:xfrm>
           <a:prstGeom prst="rect">
             <a:avLst/>
           </a:prstGeom>
           <a:noFill/>
         </p:spPr>
-        <p:txBody lIns="38100" tIns="25400" rIns="38100" bIns="25400">
+        <p:txBody lIns="38100" tIns="50800" rIns="38100" bIns="25400">
           <a:bodyPr wrap="square">
             <a:spAutoFit/>
           </a:bodyPr>
@@ -7263,6 +6895,14 @@
             <a:r>
               <a:rPr sz="1800" b="1">
                 <a:solidFill>
+                  <a:srgbClr val="2FDFE5"/>
+                </a:solidFill>
+              </a:rPr>
+              <a:t>8  </a:t>
+            </a:r>
+            <a:r>
+              <a:rPr sz="1800" b="1">
+                <a:solidFill>
                   <a:srgbClr val="FFFFFF"/>
                 </a:solidFill>
               </a:rPr>
@@ -7273,13 +6913,13 @@
       </p:sp>
       <p:sp>
         <p:nvSpPr>
-          <p:cNvPr id="19" name="Rectangle 18"/>
+          <p:cNvPr id="17" name="Rectangle 16"/>
           <p:cNvSpPr/>
           <p:nvPr/>
         </p:nvSpPr>
         <p:spPr>
           <a:xfrm>
-            <a:off x="6447891" y="2944368"/>
+            <a:off x="6447891" y="3182112"/>
             <a:ext cx="5250027" cy="15240"/>
           </a:xfrm>
           <a:prstGeom prst="rect">
@@ -7316,14 +6956,14 @@
       </p:sp>
       <p:sp>
         <p:nvSpPr>
-          <p:cNvPr id="20" name="TextBox 19"/>
+          <p:cNvPr id="18" name="TextBox 17"/>
           <p:cNvSpPr txBox="1"/>
           <p:nvPr/>
         </p:nvSpPr>
         <p:spPr>
           <a:xfrm>
-            <a:off x="6447891" y="3045968"/>
-            <a:ext cx="5250027" cy="2923032"/>
+            <a:off x="6447891" y="3283712"/>
+            <a:ext cx="5250027" cy="2685288"/>
           </a:xfrm>
           <a:prstGeom prst="rect">
             <a:avLst/>
@@ -7408,7 +7048,7 @@
       </p:sp>
       <p:pic>
         <p:nvPicPr>
-          <p:cNvPr id="21" name="Picture 20" descr="logo_horiz.png"/>
+          <p:cNvPr id="19" name="Picture 18" descr="logo_horiz.png"/>
           <p:cNvPicPr>
             <a:picLocks noChangeAspect="1"/>
           </p:cNvPicPr>
@@ -7476,7 +7116,7 @@
                                 <p:cBhvr>
                                   <p:cTn id="8" dur="450" fill="hold"/>
                                   <p:tgtEl>
-                                    <p:spTgt spid="15"/>
+                                    <p:spTgt spid="14"/>
                                   </p:tgtEl>
                                 </p:cBhvr>
                               </p:animEffect>
@@ -7852,74 +7492,21 @@
       </p:sp>
       <p:sp>
         <p:nvSpPr>
-          <p:cNvPr id="10" name="Oval 9"/>
-          <p:cNvSpPr/>
+          <p:cNvPr id="10" name="TextBox 9"/>
+          <p:cNvSpPr txBox="1"/>
           <p:nvPr/>
         </p:nvSpPr>
         <p:spPr>
           <a:xfrm>
             <a:off x="685800" y="2084832"/>
-            <a:ext cx="329184" cy="329184"/>
-          </a:xfrm>
-          <a:prstGeom prst="ellipse">
-            <a:avLst/>
-          </a:prstGeom>
-          <a:solidFill>
-            <a:srgbClr val="0A1638"/>
-          </a:solidFill>
-          <a:ln w="19050">
-            <a:solidFill>
-              <a:srgbClr val="2FDFE5"/>
-            </a:solidFill>
-          </a:ln>
-        </p:spPr>
-        <p:style>
-          <a:lnRef idx="1">
-            <a:schemeClr val="accent1"/>
-          </a:lnRef>
-          <a:fillRef idx="3">
-            <a:schemeClr val="accent1"/>
-          </a:fillRef>
-          <a:effectRef idx="2">
-            <a:schemeClr val="accent1"/>
-          </a:effectRef>
-          <a:fontRef idx="minor">
-            <a:schemeClr val="lt1"/>
-          </a:fontRef>
-        </p:style>
-        <p:txBody lIns="0" tIns="0" rIns="0" bIns="0">
-          <a:bodyPr rtlCol="0" anchor="ctr" wrap="none"/>
-          <a:lstStyle/>
-          <a:p>
-            <a:pPr algn="ctr"/>
-            <a:r>
-              <a:rPr sz="1600" b="1">
-                <a:solidFill>
-                  <a:srgbClr val="2FDFE5"/>
-                </a:solidFill>
-              </a:rPr>
-              <a:t>1</a:t>
-            </a:r>
-          </a:p>
-        </p:txBody>
-      </p:sp>
-      <p:sp>
-        <p:nvSpPr>
-          <p:cNvPr id="11" name="TextBox 10"/>
-          <p:cNvSpPr txBox="1"/>
-          <p:nvPr/>
-        </p:nvSpPr>
-        <p:spPr>
-          <a:xfrm>
-            <a:off x="1143000" y="2084832"/>
-            <a:ext cx="4756251" cy="585216"/>
+            <a:ext cx="5213451" cy="548640"/>
           </a:xfrm>
           <a:prstGeom prst="rect">
             <a:avLst/>
           </a:prstGeom>
           <a:noFill/>
         </p:spPr>
-        <p:txBody lIns="38100" tIns="25400" rIns="38100" bIns="25400">
+        <p:txBody lIns="38100" tIns="50800" rIns="38100" bIns="25400">
           <a:bodyPr wrap="square">
             <a:spAutoFit/>
           </a:bodyPr>
@@ -7929,6 +7516,14 @@
             <a:r>
               <a:rPr sz="1700" b="1">
                 <a:solidFill>
+                  <a:srgbClr val="2FDFE5"/>
+                </a:solidFill>
+              </a:rPr>
+              <a:t>1  </a:t>
+            </a:r>
+            <a:r>
+              <a:rPr sz="1700" b="1">
+                <a:solidFill>
                   <a:srgbClr val="FFFFFF"/>
                 </a:solidFill>
               </a:rPr>
@@ -7939,13 +7534,13 @@
       </p:sp>
       <p:sp>
         <p:nvSpPr>
-          <p:cNvPr id="12" name="Rectangle 11"/>
+          <p:cNvPr id="11" name="Rectangle 10"/>
           <p:cNvSpPr/>
           <p:nvPr/>
         </p:nvSpPr>
         <p:spPr>
           <a:xfrm>
-            <a:off x="649224" y="2542032"/>
+            <a:off x="649224" y="2724912"/>
             <a:ext cx="5286603" cy="12700"/>
           </a:xfrm>
           <a:prstGeom prst="rect">
@@ -7982,14 +7577,14 @@
       </p:sp>
       <p:sp>
         <p:nvSpPr>
-          <p:cNvPr id="13" name="TextBox 12"/>
+          <p:cNvPr id="12" name="TextBox 11"/>
           <p:cNvSpPr txBox="1"/>
           <p:nvPr/>
         </p:nvSpPr>
         <p:spPr>
           <a:xfrm>
-            <a:off x="649224" y="2630932"/>
-            <a:ext cx="5286603" cy="1216660"/>
+            <a:off x="649224" y="2813812"/>
+            <a:ext cx="5286603" cy="1033780"/>
           </a:xfrm>
           <a:prstGeom prst="rect">
             <a:avLst/>
@@ -8016,7 +7611,7 @@
       </p:sp>
       <p:sp>
         <p:nvSpPr>
-          <p:cNvPr id="14" name="Rectangle 13"/>
+          <p:cNvPr id="13" name="Rectangle 12"/>
           <p:cNvSpPr/>
           <p:nvPr/>
         </p:nvSpPr>
@@ -8061,7 +7656,7 @@
       </p:sp>
       <p:sp>
         <p:nvSpPr>
-          <p:cNvPr id="15" name="Rectangle 14"/>
+          <p:cNvPr id="14" name="Rectangle 13"/>
           <p:cNvSpPr/>
           <p:nvPr/>
         </p:nvSpPr>
@@ -8104,74 +7699,21 @@
       </p:sp>
       <p:sp>
         <p:nvSpPr>
-          <p:cNvPr id="16" name="Oval 15"/>
-          <p:cNvSpPr/>
+          <p:cNvPr id="15" name="TextBox 14"/>
+          <p:cNvSpPr txBox="1"/>
           <p:nvPr/>
         </p:nvSpPr>
         <p:spPr>
           <a:xfrm>
             <a:off x="6466179" y="2084832"/>
-            <a:ext cx="329184" cy="329184"/>
-          </a:xfrm>
-          <a:prstGeom prst="ellipse">
-            <a:avLst/>
-          </a:prstGeom>
-          <a:solidFill>
-            <a:srgbClr val="0A1638"/>
-          </a:solidFill>
-          <a:ln w="19050">
-            <a:solidFill>
-              <a:srgbClr val="2FDFE5"/>
-            </a:solidFill>
-          </a:ln>
-        </p:spPr>
-        <p:style>
-          <a:lnRef idx="1">
-            <a:schemeClr val="accent1"/>
-          </a:lnRef>
-          <a:fillRef idx="3">
-            <a:schemeClr val="accent1"/>
-          </a:fillRef>
-          <a:effectRef idx="2">
-            <a:schemeClr val="accent1"/>
-          </a:effectRef>
-          <a:fontRef idx="minor">
-            <a:schemeClr val="lt1"/>
-          </a:fontRef>
-        </p:style>
-        <p:txBody lIns="0" tIns="0" rIns="0" bIns="0">
-          <a:bodyPr rtlCol="0" anchor="ctr" wrap="none"/>
-          <a:lstStyle/>
-          <a:p>
-            <a:pPr algn="ctr"/>
-            <a:r>
-              <a:rPr sz="1600" b="1">
-                <a:solidFill>
-                  <a:srgbClr val="2FDFE5"/>
-                </a:solidFill>
-              </a:rPr>
-              <a:t>2</a:t>
-            </a:r>
-          </a:p>
-        </p:txBody>
-      </p:sp>
-      <p:sp>
-        <p:nvSpPr>
-          <p:cNvPr id="17" name="TextBox 16"/>
-          <p:cNvSpPr txBox="1"/>
-          <p:nvPr/>
-        </p:nvSpPr>
-        <p:spPr>
-          <a:xfrm>
-            <a:off x="6923379" y="2084832"/>
-            <a:ext cx="4756251" cy="585216"/>
+            <a:ext cx="5213451" cy="548640"/>
           </a:xfrm>
           <a:prstGeom prst="rect">
             <a:avLst/>
           </a:prstGeom>
           <a:noFill/>
         </p:spPr>
-        <p:txBody lIns="38100" tIns="25400" rIns="38100" bIns="25400">
+        <p:txBody lIns="38100" tIns="50800" rIns="38100" bIns="25400">
           <a:bodyPr wrap="square">
             <a:spAutoFit/>
           </a:bodyPr>
@@ -8181,6 +7723,14 @@
             <a:r>
               <a:rPr sz="1700" b="1">
                 <a:solidFill>
+                  <a:srgbClr val="2FDFE5"/>
+                </a:solidFill>
+              </a:rPr>
+              <a:t>2  </a:t>
+            </a:r>
+            <a:r>
+              <a:rPr sz="1700" b="1">
+                <a:solidFill>
                   <a:srgbClr val="FFFFFF"/>
                 </a:solidFill>
               </a:rPr>
@@ -8191,13 +7741,13 @@
       </p:sp>
       <p:sp>
         <p:nvSpPr>
-          <p:cNvPr id="18" name="Rectangle 17"/>
+          <p:cNvPr id="16" name="Rectangle 15"/>
           <p:cNvSpPr/>
           <p:nvPr/>
         </p:nvSpPr>
         <p:spPr>
           <a:xfrm>
-            <a:off x="6429603" y="2542032"/>
+            <a:off x="6429603" y="2724912"/>
             <a:ext cx="5286603" cy="12700"/>
           </a:xfrm>
           <a:prstGeom prst="rect">
@@ -8234,14 +7784,14 @@
       </p:sp>
       <p:sp>
         <p:nvSpPr>
-          <p:cNvPr id="19" name="TextBox 18"/>
+          <p:cNvPr id="17" name="TextBox 16"/>
           <p:cNvSpPr txBox="1"/>
           <p:nvPr/>
         </p:nvSpPr>
         <p:spPr>
           <a:xfrm>
-            <a:off x="6429603" y="2630932"/>
-            <a:ext cx="5286603" cy="1216660"/>
+            <a:off x="6429603" y="2813812"/>
+            <a:ext cx="5286603" cy="1033780"/>
           </a:xfrm>
           <a:prstGeom prst="rect">
             <a:avLst/>
@@ -8268,7 +7818,7 @@
       </p:sp>
       <p:sp>
         <p:nvSpPr>
-          <p:cNvPr id="20" name="Rectangle 19"/>
+          <p:cNvPr id="18" name="Rectangle 17"/>
           <p:cNvSpPr/>
           <p:nvPr/>
         </p:nvSpPr>
@@ -8313,7 +7863,7 @@
       </p:sp>
       <p:sp>
         <p:nvSpPr>
-          <p:cNvPr id="21" name="Rectangle 20"/>
+          <p:cNvPr id="19" name="Rectangle 18"/>
           <p:cNvSpPr/>
           <p:nvPr/>
         </p:nvSpPr>
@@ -8356,74 +7906,21 @@
       </p:sp>
       <p:sp>
         <p:nvSpPr>
-          <p:cNvPr id="22" name="Oval 21"/>
-          <p:cNvSpPr/>
+          <p:cNvPr id="20" name="TextBox 19"/>
+          <p:cNvSpPr txBox="1"/>
           <p:nvPr/>
         </p:nvSpPr>
         <p:spPr>
           <a:xfrm>
             <a:off x="685800" y="4224528"/>
-            <a:ext cx="329184" cy="329184"/>
-          </a:xfrm>
-          <a:prstGeom prst="ellipse">
-            <a:avLst/>
-          </a:prstGeom>
-          <a:solidFill>
-            <a:srgbClr val="0A1638"/>
-          </a:solidFill>
-          <a:ln w="19050">
-            <a:solidFill>
-              <a:srgbClr val="2FDFE5"/>
-            </a:solidFill>
-          </a:ln>
-        </p:spPr>
-        <p:style>
-          <a:lnRef idx="1">
-            <a:schemeClr val="accent1"/>
-          </a:lnRef>
-          <a:fillRef idx="3">
-            <a:schemeClr val="accent1"/>
-          </a:fillRef>
-          <a:effectRef idx="2">
-            <a:schemeClr val="accent1"/>
-          </a:effectRef>
-          <a:fontRef idx="minor">
-            <a:schemeClr val="lt1"/>
-          </a:fontRef>
-        </p:style>
-        <p:txBody lIns="0" tIns="0" rIns="0" bIns="0">
-          <a:bodyPr rtlCol="0" anchor="ctr" wrap="none"/>
-          <a:lstStyle/>
-          <a:p>
-            <a:pPr algn="ctr"/>
-            <a:r>
-              <a:rPr sz="1600" b="1">
-                <a:solidFill>
-                  <a:srgbClr val="2FDFE5"/>
-                </a:solidFill>
-              </a:rPr>
-              <a:t>3</a:t>
-            </a:r>
-          </a:p>
-        </p:txBody>
-      </p:sp>
-      <p:sp>
-        <p:nvSpPr>
-          <p:cNvPr id="23" name="TextBox 22"/>
-          <p:cNvSpPr txBox="1"/>
-          <p:nvPr/>
-        </p:nvSpPr>
-        <p:spPr>
-          <a:xfrm>
-            <a:off x="1143000" y="4224528"/>
-            <a:ext cx="4756251" cy="585216"/>
+            <a:ext cx="5213451" cy="548640"/>
           </a:xfrm>
           <a:prstGeom prst="rect">
             <a:avLst/>
           </a:prstGeom>
           <a:noFill/>
         </p:spPr>
-        <p:txBody lIns="38100" tIns="25400" rIns="38100" bIns="25400">
+        <p:txBody lIns="38100" tIns="50800" rIns="38100" bIns="25400">
           <a:bodyPr wrap="square">
             <a:spAutoFit/>
           </a:bodyPr>
@@ -8433,6 +7930,14 @@
             <a:r>
               <a:rPr sz="1700" b="1">
                 <a:solidFill>
+                  <a:srgbClr val="2FDFE5"/>
+                </a:solidFill>
+              </a:rPr>
+              <a:t>3  </a:t>
+            </a:r>
+            <a:r>
+              <a:rPr sz="1700" b="1">
+                <a:solidFill>
                   <a:srgbClr val="FFFFFF"/>
                 </a:solidFill>
               </a:rPr>
@@ -8443,13 +7948,13 @@
       </p:sp>
       <p:sp>
         <p:nvSpPr>
-          <p:cNvPr id="24" name="Rectangle 23"/>
+          <p:cNvPr id="21" name="Rectangle 20"/>
           <p:cNvSpPr/>
           <p:nvPr/>
         </p:nvSpPr>
         <p:spPr>
           <a:xfrm>
-            <a:off x="649224" y="4681728"/>
+            <a:off x="649224" y="4864608"/>
             <a:ext cx="5286603" cy="12700"/>
           </a:xfrm>
           <a:prstGeom prst="rect">
@@ -8486,14 +7991,14 @@
       </p:sp>
       <p:sp>
         <p:nvSpPr>
-          <p:cNvPr id="25" name="TextBox 24"/>
+          <p:cNvPr id="22" name="TextBox 21"/>
           <p:cNvSpPr txBox="1"/>
           <p:nvPr/>
         </p:nvSpPr>
         <p:spPr>
           <a:xfrm>
-            <a:off x="649224" y="4770628"/>
-            <a:ext cx="5286603" cy="1216660"/>
+            <a:off x="649224" y="4953508"/>
+            <a:ext cx="5286603" cy="1033780"/>
           </a:xfrm>
           <a:prstGeom prst="rect">
             <a:avLst/>
@@ -8520,7 +8025,7 @@
       </p:sp>
       <p:sp>
         <p:nvSpPr>
-          <p:cNvPr id="26" name="Rectangle 25"/>
+          <p:cNvPr id="23" name="Rectangle 22"/>
           <p:cNvSpPr/>
           <p:nvPr/>
         </p:nvSpPr>
@@ -8565,7 +8070,7 @@
       </p:sp>
       <p:sp>
         <p:nvSpPr>
-          <p:cNvPr id="27" name="Rectangle 26"/>
+          <p:cNvPr id="24" name="Rectangle 23"/>
           <p:cNvSpPr/>
           <p:nvPr/>
         </p:nvSpPr>
@@ -8608,74 +8113,21 @@
       </p:sp>
       <p:sp>
         <p:nvSpPr>
-          <p:cNvPr id="28" name="Oval 27"/>
-          <p:cNvSpPr/>
+          <p:cNvPr id="25" name="TextBox 24"/>
+          <p:cNvSpPr txBox="1"/>
           <p:nvPr/>
         </p:nvSpPr>
         <p:spPr>
           <a:xfrm>
             <a:off x="6466179" y="4224528"/>
-            <a:ext cx="329184" cy="329184"/>
-          </a:xfrm>
-          <a:prstGeom prst="ellipse">
-            <a:avLst/>
-          </a:prstGeom>
-          <a:solidFill>
-            <a:srgbClr val="0A1638"/>
-          </a:solidFill>
-          <a:ln w="19050">
-            <a:solidFill>
-              <a:srgbClr val="2FDFE5"/>
-            </a:solidFill>
-          </a:ln>
-        </p:spPr>
-        <p:style>
-          <a:lnRef idx="1">
-            <a:schemeClr val="accent1"/>
-          </a:lnRef>
-          <a:fillRef idx="3">
-            <a:schemeClr val="accent1"/>
-          </a:fillRef>
-          <a:effectRef idx="2">
-            <a:schemeClr val="accent1"/>
-          </a:effectRef>
-          <a:fontRef idx="minor">
-            <a:schemeClr val="lt1"/>
-          </a:fontRef>
-        </p:style>
-        <p:txBody lIns="0" tIns="0" rIns="0" bIns="0">
-          <a:bodyPr rtlCol="0" anchor="ctr" wrap="none"/>
-          <a:lstStyle/>
-          <a:p>
-            <a:pPr algn="ctr"/>
-            <a:r>
-              <a:rPr sz="1600" b="1">
-                <a:solidFill>
-                  <a:srgbClr val="2FDFE5"/>
-                </a:solidFill>
-              </a:rPr>
-              <a:t>4</a:t>
-            </a:r>
-          </a:p>
-        </p:txBody>
-      </p:sp>
-      <p:sp>
-        <p:nvSpPr>
-          <p:cNvPr id="29" name="TextBox 28"/>
-          <p:cNvSpPr txBox="1"/>
-          <p:nvPr/>
-        </p:nvSpPr>
-        <p:spPr>
-          <a:xfrm>
-            <a:off x="6923379" y="4224528"/>
-            <a:ext cx="4756251" cy="585216"/>
+            <a:ext cx="5213451" cy="548640"/>
           </a:xfrm>
           <a:prstGeom prst="rect">
             <a:avLst/>
           </a:prstGeom>
           <a:noFill/>
         </p:spPr>
-        <p:txBody lIns="38100" tIns="25400" rIns="38100" bIns="25400">
+        <p:txBody lIns="38100" tIns="50800" rIns="38100" bIns="25400">
           <a:bodyPr wrap="square">
             <a:spAutoFit/>
           </a:bodyPr>
@@ -8685,6 +8137,14 @@
             <a:r>
               <a:rPr sz="1700" b="1">
                 <a:solidFill>
+                  <a:srgbClr val="2FDFE5"/>
+                </a:solidFill>
+              </a:rPr>
+              <a:t>4  </a:t>
+            </a:r>
+            <a:r>
+              <a:rPr sz="1700" b="1">
+                <a:solidFill>
                   <a:srgbClr val="FFFFFF"/>
                 </a:solidFill>
               </a:rPr>
@@ -8695,13 +8155,13 @@
       </p:sp>
       <p:sp>
         <p:nvSpPr>
-          <p:cNvPr id="30" name="Rectangle 29"/>
+          <p:cNvPr id="26" name="Rectangle 25"/>
           <p:cNvSpPr/>
           <p:nvPr/>
         </p:nvSpPr>
         <p:spPr>
           <a:xfrm>
-            <a:off x="6429603" y="4681728"/>
+            <a:off x="6429603" y="4864608"/>
             <a:ext cx="5286603" cy="12700"/>
           </a:xfrm>
           <a:prstGeom prst="rect">
@@ -8738,14 +8198,14 @@
       </p:sp>
       <p:sp>
         <p:nvSpPr>
-          <p:cNvPr id="31" name="TextBox 30"/>
+          <p:cNvPr id="27" name="TextBox 26"/>
           <p:cNvSpPr txBox="1"/>
           <p:nvPr/>
         </p:nvSpPr>
         <p:spPr>
           <a:xfrm>
-            <a:off x="6429603" y="4770628"/>
-            <a:ext cx="5286603" cy="1216660"/>
+            <a:off x="6429603" y="4953508"/>
+            <a:ext cx="5286603" cy="1033780"/>
           </a:xfrm>
           <a:prstGeom prst="rect">
             <a:avLst/>
@@ -8772,7 +8232,7 @@
       </p:sp>
       <p:pic>
         <p:nvPicPr>
-          <p:cNvPr id="32" name="Picture 31" descr="logo_horiz.png"/>
+          <p:cNvPr id="28" name="Picture 27" descr="logo_horiz.png"/>
           <p:cNvPicPr>
             <a:picLocks noChangeAspect="1"/>
           </p:cNvPicPr>
@@ -8840,7 +8300,7 @@
                                 <p:cBhvr>
                                   <p:cTn id="8" dur="450" fill="hold"/>
                                   <p:tgtEl>
-                                    <p:spTgt spid="14"/>
+                                    <p:spTgt spid="13"/>
                                   </p:tgtEl>
                                 </p:cBhvr>
                               </p:animEffect>
@@ -8857,7 +8317,7 @@
                                 <p:cBhvr>
                                   <p:cTn id="10" dur="450" fill="hold"/>
                                   <p:tgtEl>
-                                    <p:spTgt spid="20"/>
+                                    <p:spTgt spid="18"/>
                                   </p:tgtEl>
                                 </p:cBhvr>
                               </p:animEffect>
@@ -8874,7 +8334,7 @@
                                 <p:cBhvr>
                                   <p:cTn id="12" dur="450" fill="hold"/>
                                   <p:tgtEl>
-                                    <p:spTgt spid="26"/>
+                                    <p:spTgt spid="23"/>
                                   </p:tgtEl>
                                 </p:cBhvr>
                               </p:animEffect>

--- a/sendacredit_propuesta.pptx
+++ b/sendacredit_propuesta.pptx
@@ -3595,100 +3595,7 @@
         <p:spPr>
           <a:xfrm>
             <a:off x="502920" y="365760"/>
-            <a:ext cx="1463040" cy="274320"/>
-          </a:xfrm>
-          <a:prstGeom prst="rect">
-            <a:avLst/>
-          </a:prstGeom>
-          <a:noFill/>
-          <a:ln w="15240">
-            <a:solidFill>
-              <a:srgbClr val="2FDFE5"/>
-            </a:solidFill>
-          </a:ln>
-        </p:spPr>
-        <p:style>
-          <a:lnRef idx="1">
-            <a:schemeClr val="accent1"/>
-          </a:lnRef>
-          <a:fillRef idx="3">
-            <a:schemeClr val="accent1"/>
-          </a:fillRef>
-          <a:effectRef idx="2">
-            <a:schemeClr val="accent1"/>
-          </a:effectRef>
-          <a:fontRef idx="minor">
-            <a:schemeClr val="lt1"/>
-          </a:fontRef>
-        </p:style>
-        <p:txBody lIns="76200" tIns="12700" rIns="76200" bIns="12700">
-          <a:bodyPr rtlCol="0" anchor="ctr" wrap="none"/>
-          <a:lstStyle/>
-          <a:p>
-            <a:pPr algn="ctr"/>
-            <a:r>
-              <a:rPr sz="800" b="1">
-                <a:solidFill>
-                  <a:srgbClr val="2FDFE5"/>
-                </a:solidFill>
-              </a:rPr>
-              <a:t>FASE 1</a:t>
-            </a:r>
-          </a:p>
-        </p:txBody>
-      </p:sp>
-      <p:sp>
-        <p:nvSpPr>
-          <p:cNvPr id="6" name="TextBox 5"/>
-          <p:cNvSpPr txBox="1"/>
-          <p:nvPr/>
-        </p:nvSpPr>
-        <p:spPr>
-          <a:xfrm>
-            <a:off x="502920" y="731520"/>
-            <a:ext cx="8961120" cy="960120"/>
-          </a:xfrm>
-          <a:prstGeom prst="rect">
-            <a:avLst/>
-          </a:prstGeom>
-          <a:noFill/>
-        </p:spPr>
-        <p:txBody lIns="0" tIns="0" rIns="0" bIns="0">
-          <a:bodyPr wrap="square">
-            <a:spAutoFit/>
-          </a:bodyPr>
-          <a:lstStyle/>
-          <a:p>
-            <a:pPr algn="l"/>
-            <a:r>
-              <a:rPr sz="4000" b="1">
-                <a:solidFill>
-                  <a:srgbClr val="FFFFFF"/>
-                </a:solidFill>
-              </a:rPr>
-              <a:t>Inicio del </a:t>
-            </a:r>
-            <a:r>
-              <a:rPr sz="4000" b="1">
-                <a:solidFill>
-                  <a:srgbClr val="2FDFE5"/>
-                </a:solidFill>
-              </a:rPr>
-              <a:t>expediente</a:t>
-            </a:r>
-          </a:p>
-        </p:txBody>
-      </p:sp>
-      <p:sp>
-        <p:nvSpPr>
-          <p:cNvPr id="7" name="Rectangle 6"/>
-          <p:cNvSpPr/>
-          <p:nvPr/>
-        </p:nvSpPr>
-        <p:spPr>
-          <a:xfrm>
-            <a:off x="502920" y="1737360"/>
-            <a:ext cx="4389120" cy="31750"/>
+            <a:ext cx="1737360" cy="301752"/>
           </a:xfrm>
           <a:prstGeom prst="rect">
             <a:avLst/>
@@ -3714,24 +3621,32 @@
             <a:schemeClr val="lt1"/>
           </a:fontRef>
         </p:style>
-        <p:txBody>
-          <a:bodyPr rtlCol="0" anchor="ctr"/>
+        <p:txBody lIns="101600" tIns="25400" rIns="101600" bIns="25400">
+          <a:bodyPr rtlCol="0" anchor="ctr" wrap="none"/>
           <a:lstStyle/>
           <a:p>
             <a:pPr algn="ctr"/>
-          </a:p>
-        </p:txBody>
-      </p:sp>
-      <p:sp>
-        <p:nvSpPr>
-          <p:cNvPr id="8" name="TextBox 7"/>
+            <a:r>
+              <a:rPr sz="1100" b="1">
+                <a:solidFill>
+                  <a:srgbClr val="0A1638"/>
+                </a:solidFill>
+              </a:rPr>
+              <a:t>FASE 1</a:t>
+            </a:r>
+          </a:p>
+        </p:txBody>
+      </p:sp>
+      <p:sp>
+        <p:nvSpPr>
+          <p:cNvPr id="6" name="TextBox 5"/>
           <p:cNvSpPr txBox="1"/>
           <p:nvPr/>
         </p:nvSpPr>
         <p:spPr>
           <a:xfrm>
-            <a:off x="502920" y="1810512"/>
-            <a:ext cx="9265615" cy="384048"/>
+            <a:off x="502920" y="731520"/>
+            <a:ext cx="8961120" cy="960120"/>
           </a:xfrm>
           <a:prstGeom prst="rect">
             <a:avLst/>
@@ -3739,78 +3654,41 @@
           <a:noFill/>
         </p:spPr>
         <p:txBody lIns="0" tIns="0" rIns="0" bIns="0">
-          <a:bodyPr wrap="none">
+          <a:bodyPr wrap="square">
             <a:spAutoFit/>
           </a:bodyPr>
           <a:lstStyle/>
           <a:p>
             <a:pPr algn="l"/>
             <a:r>
-              <a:rPr sz="1300" i="1">
-                <a:solidFill>
-                  <a:srgbClr val="80A8CC"/>
-                </a:solidFill>
-              </a:rPr>
-              <a:t>Cada caso entra en nuestro circuito con un punto de partida limpio, verificado y correctamente segmentado.</a:t>
-            </a:r>
-          </a:p>
-        </p:txBody>
-      </p:sp>
-      <p:sp>
-        <p:nvSpPr>
-          <p:cNvPr id="9" name="Rectangle 8"/>
+              <a:rPr sz="4000" b="1">
+                <a:solidFill>
+                  <a:srgbClr val="FFFFFF"/>
+                </a:solidFill>
+              </a:rPr>
+              <a:t>Inicio del </a:t>
+            </a:r>
+            <a:r>
+              <a:rPr sz="4000" b="1">
+                <a:solidFill>
+                  <a:srgbClr val="2FDFE5"/>
+                </a:solidFill>
+              </a:rPr>
+              <a:t>expediente</a:t>
+            </a:r>
+          </a:p>
+        </p:txBody>
+      </p:sp>
+      <p:sp>
+        <p:nvSpPr>
+          <p:cNvPr id="7" name="Rectangle 6"/>
           <p:cNvSpPr/>
           <p:nvPr/>
         </p:nvSpPr>
         <p:spPr>
           <a:xfrm>
-            <a:off x="502920" y="2267712"/>
-            <a:ext cx="5579211" cy="3785616"/>
-          </a:xfrm>
-          <a:prstGeom prst="rect">
-            <a:avLst/>
-          </a:prstGeom>
-          <a:solidFill>
-            <a:srgbClr val="081438"/>
-          </a:solidFill>
-          <a:ln w="10160">
-            <a:solidFill>
-              <a:srgbClr val="2FDFE5"/>
-            </a:solidFill>
-          </a:ln>
-        </p:spPr>
-        <p:style>
-          <a:lnRef idx="1">
-            <a:schemeClr val="accent1"/>
-          </a:lnRef>
-          <a:fillRef idx="3">
-            <a:schemeClr val="accent1"/>
-          </a:fillRef>
-          <a:effectRef idx="2">
-            <a:schemeClr val="accent1"/>
-          </a:effectRef>
-          <a:fontRef idx="minor">
-            <a:schemeClr val="lt1"/>
-          </a:fontRef>
-        </p:style>
-        <p:txBody>
-          <a:bodyPr rtlCol="0" anchor="ctr"/>
-          <a:lstStyle/>
-          <a:p>
-            <a:pPr algn="ctr"/>
-          </a:p>
-        </p:txBody>
-      </p:sp>
-      <p:sp>
-        <p:nvSpPr>
-          <p:cNvPr id="10" name="Rectangle 9"/>
-          <p:cNvSpPr/>
-          <p:nvPr/>
-        </p:nvSpPr>
-        <p:spPr>
-          <a:xfrm>
-            <a:off x="502920" y="2267712"/>
-            <a:ext cx="5579211" cy="63500"/>
+            <a:off x="502920" y="1737360"/>
+            <a:ext cx="4389120" cy="31750"/>
           </a:xfrm>
           <a:prstGeom prst="rect">
             <a:avLst/>
@@ -3846,21 +3724,143 @@
       </p:sp>
       <p:sp>
         <p:nvSpPr>
+          <p:cNvPr id="8" name="TextBox 7"/>
+          <p:cNvSpPr txBox="1"/>
+          <p:nvPr/>
+        </p:nvSpPr>
+        <p:spPr>
+          <a:xfrm>
+            <a:off x="502920" y="1810512"/>
+            <a:ext cx="9265615" cy="384048"/>
+          </a:xfrm>
+          <a:prstGeom prst="rect">
+            <a:avLst/>
+          </a:prstGeom>
+          <a:noFill/>
+        </p:spPr>
+        <p:txBody lIns="0" tIns="0" rIns="0" bIns="0">
+          <a:bodyPr wrap="none">
+            <a:spAutoFit/>
+          </a:bodyPr>
+          <a:lstStyle/>
+          <a:p>
+            <a:pPr algn="l"/>
+            <a:r>
+              <a:rPr sz="1300" i="1">
+                <a:solidFill>
+                  <a:srgbClr val="80A8CC"/>
+                </a:solidFill>
+              </a:rPr>
+              <a:t>Cada caso entra en nuestro circuito con un punto de partida limpio, verificado y correctamente segmentado.</a:t>
+            </a:r>
+          </a:p>
+        </p:txBody>
+      </p:sp>
+      <p:sp>
+        <p:nvSpPr>
+          <p:cNvPr id="9" name="Rectangle 8"/>
+          <p:cNvSpPr/>
+          <p:nvPr/>
+        </p:nvSpPr>
+        <p:spPr>
+          <a:xfrm>
+            <a:off x="502920" y="2267712"/>
+            <a:ext cx="5579211" cy="3328416"/>
+          </a:xfrm>
+          <a:prstGeom prst="rect">
+            <a:avLst/>
+          </a:prstGeom>
+          <a:solidFill>
+            <a:srgbClr val="081438"/>
+          </a:solidFill>
+          <a:ln w="12700">
+            <a:solidFill>
+              <a:srgbClr val="2FDFE5"/>
+            </a:solidFill>
+          </a:ln>
+        </p:spPr>
+        <p:style>
+          <a:lnRef idx="1">
+            <a:schemeClr val="accent1"/>
+          </a:lnRef>
+          <a:fillRef idx="3">
+            <a:schemeClr val="accent1"/>
+          </a:fillRef>
+          <a:effectRef idx="2">
+            <a:schemeClr val="accent1"/>
+          </a:effectRef>
+          <a:fontRef idx="minor">
+            <a:schemeClr val="lt1"/>
+          </a:fontRef>
+        </p:style>
+        <p:txBody>
+          <a:bodyPr rtlCol="0" anchor="ctr"/>
+          <a:lstStyle/>
+          <a:p>
+            <a:pPr algn="ctr"/>
+          </a:p>
+        </p:txBody>
+      </p:sp>
+      <p:sp>
+        <p:nvSpPr>
+          <p:cNvPr id="10" name="Rectangle 9"/>
+          <p:cNvSpPr/>
+          <p:nvPr/>
+        </p:nvSpPr>
+        <p:spPr>
+          <a:xfrm>
+            <a:off x="502920" y="2267712"/>
+            <a:ext cx="5579211" cy="63500"/>
+          </a:xfrm>
+          <a:prstGeom prst="rect">
+            <a:avLst/>
+          </a:prstGeom>
+          <a:solidFill>
+            <a:srgbClr val="2FDFE5"/>
+          </a:solidFill>
+          <a:ln>
+            <a:noFill/>
+          </a:ln>
+        </p:spPr>
+        <p:style>
+          <a:lnRef idx="1">
+            <a:schemeClr val="accent1"/>
+          </a:lnRef>
+          <a:fillRef idx="3">
+            <a:schemeClr val="accent1"/>
+          </a:fillRef>
+          <a:effectRef idx="2">
+            <a:schemeClr val="accent1"/>
+          </a:effectRef>
+          <a:fontRef idx="minor">
+            <a:schemeClr val="lt1"/>
+          </a:fontRef>
+        </p:style>
+        <p:txBody>
+          <a:bodyPr rtlCol="0" anchor="ctr"/>
+          <a:lstStyle/>
+          <a:p>
+            <a:pPr algn="ctr"/>
+          </a:p>
+        </p:txBody>
+      </p:sp>
+      <p:sp>
+        <p:nvSpPr>
           <p:cNvPr id="11" name="TextBox 10"/>
           <p:cNvSpPr txBox="1"/>
           <p:nvPr/>
         </p:nvSpPr>
         <p:spPr>
           <a:xfrm>
-            <a:off x="704088" y="2468880"/>
-            <a:ext cx="5176875" cy="621792"/>
+            <a:off x="704088" y="2487168"/>
+            <a:ext cx="5176875" cy="640080"/>
           </a:xfrm>
           <a:prstGeom prst="rect">
             <a:avLst/>
           </a:prstGeom>
           <a:noFill/>
         </p:spPr>
-        <p:txBody lIns="38100" tIns="50800" rIns="38100" bIns="25400">
+        <p:txBody lIns="38100" tIns="63500" rIns="38100" bIns="25400">
           <a:bodyPr wrap="square">
             <a:spAutoFit/>
           </a:bodyPr>
@@ -3868,7 +3868,7 @@
           <a:p>
             <a:pPr algn="l"/>
             <a:r>
-              <a:rPr sz="1800" b="1">
+              <a:rPr sz="1900" b="1">
                 <a:solidFill>
                   <a:srgbClr val="2FDFE5"/>
                 </a:solidFill>
@@ -3876,7 +3876,7 @@
               <a:t>1  </a:t>
             </a:r>
             <a:r>
-              <a:rPr sz="1800" b="1">
+              <a:rPr sz="1900" b="1">
                 <a:solidFill>
                   <a:srgbClr val="FFFFFF"/>
                 </a:solidFill>
@@ -3894,8 +3894,8 @@
         </p:nvSpPr>
         <p:spPr>
           <a:xfrm>
-            <a:off x="667512" y="3182112"/>
-            <a:ext cx="5250027" cy="15240"/>
+            <a:off x="667512" y="3218688"/>
+            <a:ext cx="5250027" cy="19050"/>
           </a:xfrm>
           <a:prstGeom prst="rect">
             <a:avLst/>
@@ -3937,15 +3937,15 @@
         </p:nvSpPr>
         <p:spPr>
           <a:xfrm>
-            <a:off x="667512" y="3283712"/>
-            <a:ext cx="5250027" cy="2685288"/>
+            <a:off x="667512" y="3345688"/>
+            <a:ext cx="5250027" cy="2249424"/>
           </a:xfrm>
           <a:prstGeom prst="rect">
             <a:avLst/>
           </a:prstGeom>
           <a:noFill/>
         </p:spPr>
-        <p:txBody lIns="50800" tIns="38100" rIns="50800" bIns="38100">
+        <p:txBody lIns="50800" tIns="50800" rIns="50800" bIns="50800">
           <a:bodyPr wrap="square">
             <a:spAutoFit/>
           </a:bodyPr>
@@ -3953,11 +3953,11 @@
           <a:p>
             <a:pPr algn="l">
               <a:spcBef>
-                <a:spcPts val="500"/>
+                <a:spcPts val="1800"/>
               </a:spcBef>
             </a:pPr>
             <a:r>
-              <a:rPr sz="1300">
+              <a:rPr sz="1400">
                 <a:solidFill>
                   <a:srgbClr val="2FDFE5"/>
                 </a:solidFill>
@@ -3965,7 +3965,7 @@
               <a:t>▸  </a:t>
             </a:r>
             <a:r>
-              <a:rPr sz="1400">
+              <a:rPr sz="1700">
                 <a:solidFill>
                   <a:srgbClr val="D8EAFF"/>
                 </a:solidFill>
@@ -3976,11 +3976,11 @@
           <a:p>
             <a:pPr algn="l">
               <a:spcBef>
-                <a:spcPts val="500"/>
+                <a:spcPts val="1800"/>
               </a:spcBef>
             </a:pPr>
             <a:r>
-              <a:rPr sz="1300">
+              <a:rPr sz="1400">
                 <a:solidFill>
                   <a:srgbClr val="2FDFE5"/>
                 </a:solidFill>
@@ -3988,7 +3988,7 @@
               <a:t>▸  </a:t>
             </a:r>
             <a:r>
-              <a:rPr sz="1400">
+              <a:rPr sz="1700">
                 <a:solidFill>
                   <a:srgbClr val="D8EAFF"/>
                 </a:solidFill>
@@ -3999,11 +3999,11 @@
           <a:p>
             <a:pPr algn="l">
               <a:spcBef>
-                <a:spcPts val="500"/>
+                <a:spcPts val="1800"/>
               </a:spcBef>
             </a:pPr>
             <a:r>
-              <a:rPr sz="1300">
+              <a:rPr sz="1400">
                 <a:solidFill>
                   <a:srgbClr val="2FDFE5"/>
                 </a:solidFill>
@@ -4011,7 +4011,7 @@
               <a:t>▸  </a:t>
             </a:r>
             <a:r>
-              <a:rPr sz="1400">
+              <a:rPr sz="1700">
                 <a:solidFill>
                   <a:srgbClr val="D8EAFF"/>
                 </a:solidFill>
@@ -4030,7 +4030,7 @@
         <p:spPr>
           <a:xfrm>
             <a:off x="6283299" y="2267712"/>
-            <a:ext cx="5579211" cy="3785616"/>
+            <a:ext cx="5579211" cy="3328416"/>
           </a:xfrm>
           <a:prstGeom prst="rect">
             <a:avLst/>
@@ -4038,7 +4038,7 @@
           <a:solidFill>
             <a:srgbClr val="081438"/>
           </a:solidFill>
-          <a:ln w="10160">
+          <a:ln w="12700">
             <a:solidFill>
               <a:srgbClr val="2FDFE5"/>
             </a:solidFill>
@@ -4117,15 +4117,15 @@
         </p:nvSpPr>
         <p:spPr>
           <a:xfrm>
-            <a:off x="6484467" y="2468880"/>
-            <a:ext cx="5176875" cy="621792"/>
+            <a:off x="6484467" y="2487168"/>
+            <a:ext cx="5176875" cy="640080"/>
           </a:xfrm>
           <a:prstGeom prst="rect">
             <a:avLst/>
           </a:prstGeom>
           <a:noFill/>
         </p:spPr>
-        <p:txBody lIns="38100" tIns="50800" rIns="38100" bIns="25400">
+        <p:txBody lIns="38100" tIns="63500" rIns="38100" bIns="25400">
           <a:bodyPr wrap="square">
             <a:spAutoFit/>
           </a:bodyPr>
@@ -4133,7 +4133,7 @@
           <a:p>
             <a:pPr algn="l"/>
             <a:r>
-              <a:rPr sz="1800" b="1">
+              <a:rPr sz="1900" b="1">
                 <a:solidFill>
                   <a:srgbClr val="2FDFE5"/>
                 </a:solidFill>
@@ -4141,7 +4141,7 @@
               <a:t>2  </a:t>
             </a:r>
             <a:r>
-              <a:rPr sz="1800" b="1">
+              <a:rPr sz="1900" b="1">
                 <a:solidFill>
                   <a:srgbClr val="FFFFFF"/>
                 </a:solidFill>
@@ -4159,8 +4159,8 @@
         </p:nvSpPr>
         <p:spPr>
           <a:xfrm>
-            <a:off x="6447891" y="3182112"/>
-            <a:ext cx="5250027" cy="15240"/>
+            <a:off x="6447891" y="3218688"/>
+            <a:ext cx="5250027" cy="19050"/>
           </a:xfrm>
           <a:prstGeom prst="rect">
             <a:avLst/>
@@ -4202,15 +4202,15 @@
         </p:nvSpPr>
         <p:spPr>
           <a:xfrm>
-            <a:off x="6447891" y="3283712"/>
-            <a:ext cx="5250027" cy="2685288"/>
+            <a:off x="6447891" y="3345688"/>
+            <a:ext cx="5250027" cy="2249424"/>
           </a:xfrm>
           <a:prstGeom prst="rect">
             <a:avLst/>
           </a:prstGeom>
           <a:noFill/>
         </p:spPr>
-        <p:txBody lIns="50800" tIns="38100" rIns="50800" bIns="38100">
+        <p:txBody lIns="50800" tIns="50800" rIns="50800" bIns="50800">
           <a:bodyPr wrap="square">
             <a:spAutoFit/>
           </a:bodyPr>
@@ -4218,11 +4218,11 @@
           <a:p>
             <a:pPr algn="l">
               <a:spcBef>
-                <a:spcPts val="500"/>
+                <a:spcPts val="1800"/>
               </a:spcBef>
             </a:pPr>
             <a:r>
-              <a:rPr sz="1300">
+              <a:rPr sz="1400">
                 <a:solidFill>
                   <a:srgbClr val="2FDFE5"/>
                 </a:solidFill>
@@ -4230,7 +4230,7 @@
               <a:t>▸  </a:t>
             </a:r>
             <a:r>
-              <a:rPr sz="1400">
+              <a:rPr sz="1700">
                 <a:solidFill>
                   <a:srgbClr val="D8EAFF"/>
                 </a:solidFill>
@@ -4241,11 +4241,11 @@
           <a:p>
             <a:pPr algn="l">
               <a:spcBef>
-                <a:spcPts val="500"/>
+                <a:spcPts val="1800"/>
               </a:spcBef>
             </a:pPr>
             <a:r>
-              <a:rPr sz="1300">
+              <a:rPr sz="1400">
                 <a:solidFill>
                   <a:srgbClr val="2FDFE5"/>
                 </a:solidFill>
@@ -4253,7 +4253,7 @@
               <a:t>▸  </a:t>
             </a:r>
             <a:r>
-              <a:rPr sz="1400">
+              <a:rPr sz="1700">
                 <a:solidFill>
                   <a:srgbClr val="D8EAFF"/>
                 </a:solidFill>
@@ -4264,11 +4264,11 @@
           <a:p>
             <a:pPr algn="l">
               <a:spcBef>
-                <a:spcPts val="500"/>
+                <a:spcPts val="1800"/>
               </a:spcBef>
             </a:pPr>
             <a:r>
-              <a:rPr sz="1300">
+              <a:rPr sz="1400">
                 <a:solidFill>
                   <a:srgbClr val="2FDFE5"/>
                 </a:solidFill>
@@ -4276,7 +4276,7 @@
               <a:t>▸  </a:t>
             </a:r>
             <a:r>
-              <a:rPr sz="1400">
+              <a:rPr sz="1700">
                 <a:solidFill>
                   <a:srgbClr val="D8EAFF"/>
                 </a:solidFill>
@@ -4288,7 +4288,7 @@
       </p:sp>
       <p:pic>
         <p:nvPicPr>
-          <p:cNvPr id="19" name="Picture 18" descr="logo_horiz.png"/>
+          <p:cNvPr id="25" name="Picture 24" descr="logo_horiz.png"/>
           <p:cNvPicPr>
             <a:picLocks noChangeAspect="1"/>
           </p:cNvPicPr>
@@ -4337,7 +4337,7 @@
                             <p:childTnLst>
                               <p:animEffect transition="in" filter="wipe(up)">
                                 <p:cBhvr>
-                                  <p:cTn id="6" dur="450" fill="hold"/>
+                                  <p:cTn id="6" dur="380" fill="hold"/>
                                   <p:tgtEl>
                                     <p:spTgt spid="9"/>
                                   </p:tgtEl>
@@ -4349,14 +4349,150 @@
                         <p:par>
                           <p:cTn id="7" fill="hold">
                             <p:stCondLst>
+                              <p:cond delay="0"/>
+                            </p:stCondLst>
+                            <p:childTnLst>
+                              <p:animEffect transition="in" filter="wipe(up)">
+                                <p:cBhvr>
+                                  <p:cTn id="8" dur="380" fill="hold"/>
+                                  <p:tgtEl>
+                                    <p:spTgt spid="10"/>
+                                  </p:tgtEl>
+                                </p:cBhvr>
+                              </p:animEffect>
+                            </p:childTnLst>
+                          </p:cTn>
+                        </p:par>
+                        <p:par>
+                          <p:cTn id="9" fill="hold">
+                            <p:stCondLst>
+                              <p:cond delay="0"/>
+                            </p:stCondLst>
+                            <p:childTnLst>
+                              <p:animEffect transition="in" filter="wipe(up)">
+                                <p:cBhvr>
+                                  <p:cTn id="10" dur="380" fill="hold"/>
+                                  <p:tgtEl>
+                                    <p:spTgt spid="11"/>
+                                  </p:tgtEl>
+                                </p:cBhvr>
+                              </p:animEffect>
+                            </p:childTnLst>
+                          </p:cTn>
+                        </p:par>
+                        <p:par>
+                          <p:cTn id="11" fill="hold">
+                            <p:stCondLst>
+                              <p:cond delay="0"/>
+                            </p:stCondLst>
+                            <p:childTnLst>
+                              <p:animEffect transition="in" filter="wipe(up)">
+                                <p:cBhvr>
+                                  <p:cTn id="12" dur="380" fill="hold"/>
+                                  <p:tgtEl>
+                                    <p:spTgt spid="12"/>
+                                  </p:tgtEl>
+                                </p:cBhvr>
+                              </p:animEffect>
+                            </p:childTnLst>
+                          </p:cTn>
+                        </p:par>
+                        <p:par>
+                          <p:cTn id="13" fill="hold">
+                            <p:stCondLst>
+                              <p:cond delay="0"/>
+                            </p:stCondLst>
+                            <p:childTnLst>
+                              <p:animEffect transition="in" filter="wipe(up)">
+                                <p:cBhvr>
+                                  <p:cTn id="14" dur="380" fill="hold"/>
+                                  <p:tgtEl>
+                                    <p:spTgt spid="13"/>
+                                  </p:tgtEl>
+                                </p:cBhvr>
+                              </p:animEffect>
+                            </p:childTnLst>
+                          </p:cTn>
+                        </p:par>
+                        <p:par>
+                          <p:cTn id="15" fill="hold">
+                            <p:stCondLst>
                               <p:cond delay="160"/>
                             </p:stCondLst>
                             <p:childTnLst>
                               <p:animEffect transition="in" filter="wipe(up)">
                                 <p:cBhvr>
-                                  <p:cTn id="8" dur="450" fill="hold"/>
+                                  <p:cTn id="16" dur="380" fill="hold"/>
                                   <p:tgtEl>
                                     <p:spTgt spid="14"/>
+                                  </p:tgtEl>
+                                </p:cBhvr>
+                              </p:animEffect>
+                            </p:childTnLst>
+                          </p:cTn>
+                        </p:par>
+                        <p:par>
+                          <p:cTn id="17" fill="hold">
+                            <p:stCondLst>
+                              <p:cond delay="160"/>
+                            </p:stCondLst>
+                            <p:childTnLst>
+                              <p:animEffect transition="in" filter="wipe(up)">
+                                <p:cBhvr>
+                                  <p:cTn id="18" dur="380" fill="hold"/>
+                                  <p:tgtEl>
+                                    <p:spTgt spid="15"/>
+                                  </p:tgtEl>
+                                </p:cBhvr>
+                              </p:animEffect>
+                            </p:childTnLst>
+                          </p:cTn>
+                        </p:par>
+                        <p:par>
+                          <p:cTn id="19" fill="hold">
+                            <p:stCondLst>
+                              <p:cond delay="160"/>
+                            </p:stCondLst>
+                            <p:childTnLst>
+                              <p:animEffect transition="in" filter="wipe(up)">
+                                <p:cBhvr>
+                                  <p:cTn id="20" dur="380" fill="hold"/>
+                                  <p:tgtEl>
+                                    <p:spTgt spid="16"/>
+                                  </p:tgtEl>
+                                </p:cBhvr>
+                              </p:animEffect>
+                            </p:childTnLst>
+                          </p:cTn>
+                        </p:par>
+                        <p:par>
+                          <p:cTn id="21" fill="hold">
+                            <p:stCondLst>
+                              <p:cond delay="160"/>
+                            </p:stCondLst>
+                            <p:childTnLst>
+                              <p:animEffect transition="in" filter="wipe(up)">
+                                <p:cBhvr>
+                                  <p:cTn id="22" dur="380" fill="hold"/>
+                                  <p:tgtEl>
+                                    <p:spTgt spid="17"/>
+                                  </p:tgtEl>
+                                </p:cBhvr>
+                              </p:animEffect>
+                            </p:childTnLst>
+                          </p:cTn>
+                        </p:par>
+                        <p:par>
+                          <p:cTn id="23" fill="hold">
+                            <p:stCondLst>
+                              <p:cond delay="160"/>
+                            </p:stCondLst>
+                            <p:childTnLst>
+                              <p:animEffect transition="in" filter="wipe(up)">
+                                <p:cBhvr>
+                                  <p:cTn id="24" dur="380" fill="hold"/>
+                                  <p:tgtEl>
+                                    <p:spTgt spid="18"/>
                                   </p:tgtEl>
                                 </p:cBhvr>
                               </p:animEffect>
@@ -4515,100 +4651,7 @@
         <p:spPr>
           <a:xfrm>
             <a:off x="502920" y="365760"/>
-            <a:ext cx="1463040" cy="274320"/>
-          </a:xfrm>
-          <a:prstGeom prst="rect">
-            <a:avLst/>
-          </a:prstGeom>
-          <a:noFill/>
-          <a:ln w="15240">
-            <a:solidFill>
-              <a:srgbClr val="2FDFE5"/>
-            </a:solidFill>
-          </a:ln>
-        </p:spPr>
-        <p:style>
-          <a:lnRef idx="1">
-            <a:schemeClr val="accent1"/>
-          </a:lnRef>
-          <a:fillRef idx="3">
-            <a:schemeClr val="accent1"/>
-          </a:fillRef>
-          <a:effectRef idx="2">
-            <a:schemeClr val="accent1"/>
-          </a:effectRef>
-          <a:fontRef idx="minor">
-            <a:schemeClr val="lt1"/>
-          </a:fontRef>
-        </p:style>
-        <p:txBody lIns="76200" tIns="12700" rIns="76200" bIns="12700">
-          <a:bodyPr rtlCol="0" anchor="ctr" wrap="none"/>
-          <a:lstStyle/>
-          <a:p>
-            <a:pPr algn="ctr"/>
-            <a:r>
-              <a:rPr sz="800" b="1">
-                <a:solidFill>
-                  <a:srgbClr val="2FDFE5"/>
-                </a:solidFill>
-              </a:rPr>
-              <a:t>FASE 2</a:t>
-            </a:r>
-          </a:p>
-        </p:txBody>
-      </p:sp>
-      <p:sp>
-        <p:nvSpPr>
-          <p:cNvPr id="6" name="TextBox 5"/>
-          <p:cNvSpPr txBox="1"/>
-          <p:nvPr/>
-        </p:nvSpPr>
-        <p:spPr>
-          <a:xfrm>
-            <a:off x="502920" y="731520"/>
-            <a:ext cx="8961120" cy="960120"/>
-          </a:xfrm>
-          <a:prstGeom prst="rect">
-            <a:avLst/>
-          </a:prstGeom>
-          <a:noFill/>
-        </p:spPr>
-        <p:txBody lIns="0" tIns="0" rIns="0" bIns="0">
-          <a:bodyPr wrap="square">
-            <a:spAutoFit/>
-          </a:bodyPr>
-          <a:lstStyle/>
-          <a:p>
-            <a:pPr algn="l"/>
-            <a:r>
-              <a:rPr sz="4000" b="1">
-                <a:solidFill>
-                  <a:srgbClr val="FFFFFF"/>
-                </a:solidFill>
-              </a:rPr>
-              <a:t>Activación y </a:t>
-            </a:r>
-            <a:r>
-              <a:rPr sz="4000" b="1">
-                <a:solidFill>
-                  <a:srgbClr val="2FDFE5"/>
-                </a:solidFill>
-              </a:rPr>
-              <a:t>contacto</a:t>
-            </a:r>
-          </a:p>
-        </p:txBody>
-      </p:sp>
-      <p:sp>
-        <p:nvSpPr>
-          <p:cNvPr id="7" name="Rectangle 6"/>
-          <p:cNvSpPr/>
-          <p:nvPr/>
-        </p:nvSpPr>
-        <p:spPr>
-          <a:xfrm>
-            <a:off x="502920" y="1737360"/>
-            <a:ext cx="4389120" cy="31750"/>
+            <a:ext cx="1737360" cy="301752"/>
           </a:xfrm>
           <a:prstGeom prst="rect">
             <a:avLst/>
@@ -4634,24 +4677,32 @@
             <a:schemeClr val="lt1"/>
           </a:fontRef>
         </p:style>
-        <p:txBody>
-          <a:bodyPr rtlCol="0" anchor="ctr"/>
+        <p:txBody lIns="101600" tIns="25400" rIns="101600" bIns="25400">
+          <a:bodyPr rtlCol="0" anchor="ctr" wrap="none"/>
           <a:lstStyle/>
           <a:p>
             <a:pPr algn="ctr"/>
-          </a:p>
-        </p:txBody>
-      </p:sp>
-      <p:sp>
-        <p:nvSpPr>
-          <p:cNvPr id="8" name="TextBox 7"/>
+            <a:r>
+              <a:rPr sz="1100" b="1">
+                <a:solidFill>
+                  <a:srgbClr val="0A1638"/>
+                </a:solidFill>
+              </a:rPr>
+              <a:t>FASE 2</a:t>
+            </a:r>
+          </a:p>
+        </p:txBody>
+      </p:sp>
+      <p:sp>
+        <p:nvSpPr>
+          <p:cNvPr id="6" name="TextBox 5"/>
           <p:cNvSpPr txBox="1"/>
           <p:nvPr/>
         </p:nvSpPr>
         <p:spPr>
           <a:xfrm>
-            <a:off x="502920" y="1810512"/>
-            <a:ext cx="9265615" cy="384048"/>
+            <a:off x="502920" y="731520"/>
+            <a:ext cx="8961120" cy="960120"/>
           </a:xfrm>
           <a:prstGeom prst="rect">
             <a:avLst/>
@@ -4659,78 +4710,41 @@
           <a:noFill/>
         </p:spPr>
         <p:txBody lIns="0" tIns="0" rIns="0" bIns="0">
-          <a:bodyPr wrap="none">
+          <a:bodyPr wrap="square">
             <a:spAutoFit/>
           </a:bodyPr>
           <a:lstStyle/>
           <a:p>
             <a:pPr algn="l"/>
             <a:r>
-              <a:rPr sz="1300" i="1">
-                <a:solidFill>
-                  <a:srgbClr val="80A8CC"/>
-                </a:solidFill>
-              </a:rPr>
-              <a:t>Multiplicamos los canales de contacto y buscamos siempre la vía amistosa para llegar a un acuerdo.</a:t>
-            </a:r>
-          </a:p>
-        </p:txBody>
-      </p:sp>
-      <p:sp>
-        <p:nvSpPr>
-          <p:cNvPr id="9" name="Rectangle 8"/>
+              <a:rPr sz="4000" b="1">
+                <a:solidFill>
+                  <a:srgbClr val="FFFFFF"/>
+                </a:solidFill>
+              </a:rPr>
+              <a:t>Activación y </a:t>
+            </a:r>
+            <a:r>
+              <a:rPr sz="4000" b="1">
+                <a:solidFill>
+                  <a:srgbClr val="2FDFE5"/>
+                </a:solidFill>
+              </a:rPr>
+              <a:t>contacto</a:t>
+            </a:r>
+          </a:p>
+        </p:txBody>
+      </p:sp>
+      <p:sp>
+        <p:nvSpPr>
+          <p:cNvPr id="7" name="Rectangle 6"/>
           <p:cNvSpPr/>
           <p:nvPr/>
         </p:nvSpPr>
         <p:spPr>
           <a:xfrm>
-            <a:off x="502920" y="2267712"/>
-            <a:ext cx="5579211" cy="3785616"/>
-          </a:xfrm>
-          <a:prstGeom prst="rect">
-            <a:avLst/>
-          </a:prstGeom>
-          <a:solidFill>
-            <a:srgbClr val="081438"/>
-          </a:solidFill>
-          <a:ln w="10160">
-            <a:solidFill>
-              <a:srgbClr val="2FDFE5"/>
-            </a:solidFill>
-          </a:ln>
-        </p:spPr>
-        <p:style>
-          <a:lnRef idx="1">
-            <a:schemeClr val="accent1"/>
-          </a:lnRef>
-          <a:fillRef idx="3">
-            <a:schemeClr val="accent1"/>
-          </a:fillRef>
-          <a:effectRef idx="2">
-            <a:schemeClr val="accent1"/>
-          </a:effectRef>
-          <a:fontRef idx="minor">
-            <a:schemeClr val="lt1"/>
-          </a:fontRef>
-        </p:style>
-        <p:txBody>
-          <a:bodyPr rtlCol="0" anchor="ctr"/>
-          <a:lstStyle/>
-          <a:p>
-            <a:pPr algn="ctr"/>
-          </a:p>
-        </p:txBody>
-      </p:sp>
-      <p:sp>
-        <p:nvSpPr>
-          <p:cNvPr id="10" name="Rectangle 9"/>
-          <p:cNvSpPr/>
-          <p:nvPr/>
-        </p:nvSpPr>
-        <p:spPr>
-          <a:xfrm>
-            <a:off x="502920" y="2267712"/>
-            <a:ext cx="5579211" cy="63500"/>
+            <a:off x="502920" y="1737360"/>
+            <a:ext cx="4389120" cy="31750"/>
           </a:xfrm>
           <a:prstGeom prst="rect">
             <a:avLst/>
@@ -4766,21 +4780,143 @@
       </p:sp>
       <p:sp>
         <p:nvSpPr>
+          <p:cNvPr id="8" name="TextBox 7"/>
+          <p:cNvSpPr txBox="1"/>
+          <p:nvPr/>
+        </p:nvSpPr>
+        <p:spPr>
+          <a:xfrm>
+            <a:off x="502920" y="1810512"/>
+            <a:ext cx="9265615" cy="384048"/>
+          </a:xfrm>
+          <a:prstGeom prst="rect">
+            <a:avLst/>
+          </a:prstGeom>
+          <a:noFill/>
+        </p:spPr>
+        <p:txBody lIns="0" tIns="0" rIns="0" bIns="0">
+          <a:bodyPr wrap="none">
+            <a:spAutoFit/>
+          </a:bodyPr>
+          <a:lstStyle/>
+          <a:p>
+            <a:pPr algn="l"/>
+            <a:r>
+              <a:rPr sz="1300" i="1">
+                <a:solidFill>
+                  <a:srgbClr val="80A8CC"/>
+                </a:solidFill>
+              </a:rPr>
+              <a:t>Multiplicamos los canales de contacto y buscamos siempre la vía amistosa para llegar a un acuerdo.</a:t>
+            </a:r>
+          </a:p>
+        </p:txBody>
+      </p:sp>
+      <p:sp>
+        <p:nvSpPr>
+          <p:cNvPr id="9" name="Rectangle 8"/>
+          <p:cNvSpPr/>
+          <p:nvPr/>
+        </p:nvSpPr>
+        <p:spPr>
+          <a:xfrm>
+            <a:off x="502920" y="2267712"/>
+            <a:ext cx="5579211" cy="3328416"/>
+          </a:xfrm>
+          <a:prstGeom prst="rect">
+            <a:avLst/>
+          </a:prstGeom>
+          <a:solidFill>
+            <a:srgbClr val="081438"/>
+          </a:solidFill>
+          <a:ln w="12700">
+            <a:solidFill>
+              <a:srgbClr val="2FDFE5"/>
+            </a:solidFill>
+          </a:ln>
+        </p:spPr>
+        <p:style>
+          <a:lnRef idx="1">
+            <a:schemeClr val="accent1"/>
+          </a:lnRef>
+          <a:fillRef idx="3">
+            <a:schemeClr val="accent1"/>
+          </a:fillRef>
+          <a:effectRef idx="2">
+            <a:schemeClr val="accent1"/>
+          </a:effectRef>
+          <a:fontRef idx="minor">
+            <a:schemeClr val="lt1"/>
+          </a:fontRef>
+        </p:style>
+        <p:txBody>
+          <a:bodyPr rtlCol="0" anchor="ctr"/>
+          <a:lstStyle/>
+          <a:p>
+            <a:pPr algn="ctr"/>
+          </a:p>
+        </p:txBody>
+      </p:sp>
+      <p:sp>
+        <p:nvSpPr>
+          <p:cNvPr id="10" name="Rectangle 9"/>
+          <p:cNvSpPr/>
+          <p:nvPr/>
+        </p:nvSpPr>
+        <p:spPr>
+          <a:xfrm>
+            <a:off x="502920" y="2267712"/>
+            <a:ext cx="5579211" cy="63500"/>
+          </a:xfrm>
+          <a:prstGeom prst="rect">
+            <a:avLst/>
+          </a:prstGeom>
+          <a:solidFill>
+            <a:srgbClr val="2FDFE5"/>
+          </a:solidFill>
+          <a:ln>
+            <a:noFill/>
+          </a:ln>
+        </p:spPr>
+        <p:style>
+          <a:lnRef idx="1">
+            <a:schemeClr val="accent1"/>
+          </a:lnRef>
+          <a:fillRef idx="3">
+            <a:schemeClr val="accent1"/>
+          </a:fillRef>
+          <a:effectRef idx="2">
+            <a:schemeClr val="accent1"/>
+          </a:effectRef>
+          <a:fontRef idx="minor">
+            <a:schemeClr val="lt1"/>
+          </a:fontRef>
+        </p:style>
+        <p:txBody>
+          <a:bodyPr rtlCol="0" anchor="ctr"/>
+          <a:lstStyle/>
+          <a:p>
+            <a:pPr algn="ctr"/>
+          </a:p>
+        </p:txBody>
+      </p:sp>
+      <p:sp>
+        <p:nvSpPr>
           <p:cNvPr id="11" name="TextBox 10"/>
           <p:cNvSpPr txBox="1"/>
           <p:nvPr/>
         </p:nvSpPr>
         <p:spPr>
           <a:xfrm>
-            <a:off x="704088" y="2468880"/>
-            <a:ext cx="5176875" cy="621792"/>
+            <a:off x="704088" y="2487168"/>
+            <a:ext cx="5176875" cy="640080"/>
           </a:xfrm>
           <a:prstGeom prst="rect">
             <a:avLst/>
           </a:prstGeom>
           <a:noFill/>
         </p:spPr>
-        <p:txBody lIns="38100" tIns="50800" rIns="38100" bIns="25400">
+        <p:txBody lIns="38100" tIns="63500" rIns="38100" bIns="25400">
           <a:bodyPr wrap="square">
             <a:spAutoFit/>
           </a:bodyPr>
@@ -4788,7 +4924,7 @@
           <a:p>
             <a:pPr algn="l"/>
             <a:r>
-              <a:rPr sz="1800" b="1">
+              <a:rPr sz="1900" b="1">
                 <a:solidFill>
                   <a:srgbClr val="2FDFE5"/>
                 </a:solidFill>
@@ -4796,7 +4932,7 @@
               <a:t>3  </a:t>
             </a:r>
             <a:r>
-              <a:rPr sz="1800" b="1">
+              <a:rPr sz="1900" b="1">
                 <a:solidFill>
                   <a:srgbClr val="FFFFFF"/>
                 </a:solidFill>
@@ -4814,8 +4950,8 @@
         </p:nvSpPr>
         <p:spPr>
           <a:xfrm>
-            <a:off x="667512" y="3182112"/>
-            <a:ext cx="5250027" cy="15240"/>
+            <a:off x="667512" y="3218688"/>
+            <a:ext cx="5250027" cy="19050"/>
           </a:xfrm>
           <a:prstGeom prst="rect">
             <a:avLst/>
@@ -4857,15 +4993,15 @@
         </p:nvSpPr>
         <p:spPr>
           <a:xfrm>
-            <a:off x="667512" y="3283712"/>
-            <a:ext cx="5250027" cy="2685288"/>
+            <a:off x="667512" y="3345688"/>
+            <a:ext cx="5250027" cy="2249424"/>
           </a:xfrm>
           <a:prstGeom prst="rect">
             <a:avLst/>
           </a:prstGeom>
           <a:noFill/>
         </p:spPr>
-        <p:txBody lIns="50800" tIns="38100" rIns="50800" bIns="38100">
+        <p:txBody lIns="50800" tIns="50800" rIns="50800" bIns="50800">
           <a:bodyPr wrap="square">
             <a:spAutoFit/>
           </a:bodyPr>
@@ -4873,11 +5009,11 @@
           <a:p>
             <a:pPr algn="l">
               <a:spcBef>
-                <a:spcPts val="500"/>
+                <a:spcPts val="1800"/>
               </a:spcBef>
             </a:pPr>
             <a:r>
-              <a:rPr sz="1300">
+              <a:rPr sz="1400">
                 <a:solidFill>
                   <a:srgbClr val="2FDFE5"/>
                 </a:solidFill>
@@ -4885,7 +5021,7 @@
               <a:t>▸  </a:t>
             </a:r>
             <a:r>
-              <a:rPr sz="1400">
+              <a:rPr sz="1700">
                 <a:solidFill>
                   <a:srgbClr val="D8EAFF"/>
                 </a:solidFill>
@@ -4896,11 +5032,11 @@
           <a:p>
             <a:pPr algn="l">
               <a:spcBef>
-                <a:spcPts val="500"/>
+                <a:spcPts val="1800"/>
               </a:spcBef>
             </a:pPr>
             <a:r>
-              <a:rPr sz="1300">
+              <a:rPr sz="1400">
                 <a:solidFill>
                   <a:srgbClr val="2FDFE5"/>
                 </a:solidFill>
@@ -4908,7 +5044,7 @@
               <a:t>▸  </a:t>
             </a:r>
             <a:r>
-              <a:rPr sz="1400">
+              <a:rPr sz="1700">
                 <a:solidFill>
                   <a:srgbClr val="D8EAFF"/>
                 </a:solidFill>
@@ -4919,11 +5055,11 @@
           <a:p>
             <a:pPr algn="l">
               <a:spcBef>
-                <a:spcPts val="500"/>
+                <a:spcPts val="1800"/>
               </a:spcBef>
             </a:pPr>
             <a:r>
-              <a:rPr sz="1300">
+              <a:rPr sz="1400">
                 <a:solidFill>
                   <a:srgbClr val="2FDFE5"/>
                 </a:solidFill>
@@ -4931,7 +5067,7 @@
               <a:t>▸  </a:t>
             </a:r>
             <a:r>
-              <a:rPr sz="1400">
+              <a:rPr sz="1700">
                 <a:solidFill>
                   <a:srgbClr val="D8EAFF"/>
                 </a:solidFill>
@@ -4950,7 +5086,7 @@
         <p:spPr>
           <a:xfrm>
             <a:off x="6283299" y="2267712"/>
-            <a:ext cx="5579211" cy="3785616"/>
+            <a:ext cx="5579211" cy="3328416"/>
           </a:xfrm>
           <a:prstGeom prst="rect">
             <a:avLst/>
@@ -4958,7 +5094,7 @@
           <a:solidFill>
             <a:srgbClr val="081438"/>
           </a:solidFill>
-          <a:ln w="10160">
+          <a:ln w="12700">
             <a:solidFill>
               <a:srgbClr val="2FDFE5"/>
             </a:solidFill>
@@ -5037,15 +5173,15 @@
         </p:nvSpPr>
         <p:spPr>
           <a:xfrm>
-            <a:off x="6484467" y="2468880"/>
-            <a:ext cx="5176875" cy="621792"/>
+            <a:off x="6484467" y="2487168"/>
+            <a:ext cx="5176875" cy="640080"/>
           </a:xfrm>
           <a:prstGeom prst="rect">
             <a:avLst/>
           </a:prstGeom>
           <a:noFill/>
         </p:spPr>
-        <p:txBody lIns="38100" tIns="50800" rIns="38100" bIns="25400">
+        <p:txBody lIns="38100" tIns="63500" rIns="38100" bIns="25400">
           <a:bodyPr wrap="square">
             <a:spAutoFit/>
           </a:bodyPr>
@@ -5053,7 +5189,7 @@
           <a:p>
             <a:pPr algn="l"/>
             <a:r>
-              <a:rPr sz="1800" b="1">
+              <a:rPr sz="1900" b="1">
                 <a:solidFill>
                   <a:srgbClr val="2FDFE5"/>
                 </a:solidFill>
@@ -5061,7 +5197,7 @@
               <a:t>4  </a:t>
             </a:r>
             <a:r>
-              <a:rPr sz="1800" b="1">
+              <a:rPr sz="1900" b="1">
                 <a:solidFill>
                   <a:srgbClr val="FFFFFF"/>
                 </a:solidFill>
@@ -5079,8 +5215,8 @@
         </p:nvSpPr>
         <p:spPr>
           <a:xfrm>
-            <a:off x="6447891" y="3182112"/>
-            <a:ext cx="5250027" cy="15240"/>
+            <a:off x="6447891" y="3218688"/>
+            <a:ext cx="5250027" cy="19050"/>
           </a:xfrm>
           <a:prstGeom prst="rect">
             <a:avLst/>
@@ -5122,15 +5258,15 @@
         </p:nvSpPr>
         <p:spPr>
           <a:xfrm>
-            <a:off x="6447891" y="3283712"/>
-            <a:ext cx="5250027" cy="2685288"/>
+            <a:off x="6447891" y="3345688"/>
+            <a:ext cx="5250027" cy="2249424"/>
           </a:xfrm>
           <a:prstGeom prst="rect">
             <a:avLst/>
           </a:prstGeom>
           <a:noFill/>
         </p:spPr>
-        <p:txBody lIns="50800" tIns="38100" rIns="50800" bIns="38100">
+        <p:txBody lIns="50800" tIns="50800" rIns="50800" bIns="50800">
           <a:bodyPr wrap="square">
             <a:spAutoFit/>
           </a:bodyPr>
@@ -5138,11 +5274,11 @@
           <a:p>
             <a:pPr algn="l">
               <a:spcBef>
-                <a:spcPts val="500"/>
+                <a:spcPts val="1800"/>
               </a:spcBef>
             </a:pPr>
             <a:r>
-              <a:rPr sz="1300">
+              <a:rPr sz="1400">
                 <a:solidFill>
                   <a:srgbClr val="2FDFE5"/>
                 </a:solidFill>
@@ -5150,7 +5286,7 @@
               <a:t>▸  </a:t>
             </a:r>
             <a:r>
-              <a:rPr sz="1400">
+              <a:rPr sz="1700">
                 <a:solidFill>
                   <a:srgbClr val="D8EAFF"/>
                 </a:solidFill>
@@ -5161,11 +5297,11 @@
           <a:p>
             <a:pPr algn="l">
               <a:spcBef>
-                <a:spcPts val="500"/>
+                <a:spcPts val="1800"/>
               </a:spcBef>
             </a:pPr>
             <a:r>
-              <a:rPr sz="1300">
+              <a:rPr sz="1400">
                 <a:solidFill>
                   <a:srgbClr val="2FDFE5"/>
                 </a:solidFill>
@@ -5173,7 +5309,7 @@
               <a:t>▸  </a:t>
             </a:r>
             <a:r>
-              <a:rPr sz="1400">
+              <a:rPr sz="1700">
                 <a:solidFill>
                   <a:srgbClr val="D8EAFF"/>
                 </a:solidFill>
@@ -5184,11 +5320,11 @@
           <a:p>
             <a:pPr algn="l">
               <a:spcBef>
-                <a:spcPts val="500"/>
+                <a:spcPts val="1800"/>
               </a:spcBef>
             </a:pPr>
             <a:r>
-              <a:rPr sz="1300">
+              <a:rPr sz="1400">
                 <a:solidFill>
                   <a:srgbClr val="2FDFE5"/>
                 </a:solidFill>
@@ -5196,7 +5332,7 @@
               <a:t>▸  </a:t>
             </a:r>
             <a:r>
-              <a:rPr sz="1400">
+              <a:rPr sz="1700">
                 <a:solidFill>
                   <a:srgbClr val="D8EAFF"/>
                 </a:solidFill>
@@ -5208,7 +5344,7 @@
       </p:sp>
       <p:pic>
         <p:nvPicPr>
-          <p:cNvPr id="19" name="Picture 18" descr="logo_horiz.png"/>
+          <p:cNvPr id="25" name="Picture 24" descr="logo_horiz.png"/>
           <p:cNvPicPr>
             <a:picLocks noChangeAspect="1"/>
           </p:cNvPicPr>
@@ -5257,7 +5393,7 @@
                             <p:childTnLst>
                               <p:animEffect transition="in" filter="wipe(up)">
                                 <p:cBhvr>
-                                  <p:cTn id="6" dur="450" fill="hold"/>
+                                  <p:cTn id="6" dur="380" fill="hold"/>
                                   <p:tgtEl>
                                     <p:spTgt spid="9"/>
                                   </p:tgtEl>
@@ -5269,14 +5405,150 @@
                         <p:par>
                           <p:cTn id="7" fill="hold">
                             <p:stCondLst>
+                              <p:cond delay="0"/>
+                            </p:stCondLst>
+                            <p:childTnLst>
+                              <p:animEffect transition="in" filter="wipe(up)">
+                                <p:cBhvr>
+                                  <p:cTn id="8" dur="380" fill="hold"/>
+                                  <p:tgtEl>
+                                    <p:spTgt spid="10"/>
+                                  </p:tgtEl>
+                                </p:cBhvr>
+                              </p:animEffect>
+                            </p:childTnLst>
+                          </p:cTn>
+                        </p:par>
+                        <p:par>
+                          <p:cTn id="9" fill="hold">
+                            <p:stCondLst>
+                              <p:cond delay="0"/>
+                            </p:stCondLst>
+                            <p:childTnLst>
+                              <p:animEffect transition="in" filter="wipe(up)">
+                                <p:cBhvr>
+                                  <p:cTn id="10" dur="380" fill="hold"/>
+                                  <p:tgtEl>
+                                    <p:spTgt spid="11"/>
+                                  </p:tgtEl>
+                                </p:cBhvr>
+                              </p:animEffect>
+                            </p:childTnLst>
+                          </p:cTn>
+                        </p:par>
+                        <p:par>
+                          <p:cTn id="11" fill="hold">
+                            <p:stCondLst>
+                              <p:cond delay="0"/>
+                            </p:stCondLst>
+                            <p:childTnLst>
+                              <p:animEffect transition="in" filter="wipe(up)">
+                                <p:cBhvr>
+                                  <p:cTn id="12" dur="380" fill="hold"/>
+                                  <p:tgtEl>
+                                    <p:spTgt spid="12"/>
+                                  </p:tgtEl>
+                                </p:cBhvr>
+                              </p:animEffect>
+                            </p:childTnLst>
+                          </p:cTn>
+                        </p:par>
+                        <p:par>
+                          <p:cTn id="13" fill="hold">
+                            <p:stCondLst>
+                              <p:cond delay="0"/>
+                            </p:stCondLst>
+                            <p:childTnLst>
+                              <p:animEffect transition="in" filter="wipe(up)">
+                                <p:cBhvr>
+                                  <p:cTn id="14" dur="380" fill="hold"/>
+                                  <p:tgtEl>
+                                    <p:spTgt spid="13"/>
+                                  </p:tgtEl>
+                                </p:cBhvr>
+                              </p:animEffect>
+                            </p:childTnLst>
+                          </p:cTn>
+                        </p:par>
+                        <p:par>
+                          <p:cTn id="15" fill="hold">
+                            <p:stCondLst>
                               <p:cond delay="160"/>
                             </p:stCondLst>
                             <p:childTnLst>
                               <p:animEffect transition="in" filter="wipe(up)">
                                 <p:cBhvr>
-                                  <p:cTn id="8" dur="450" fill="hold"/>
+                                  <p:cTn id="16" dur="380" fill="hold"/>
                                   <p:tgtEl>
                                     <p:spTgt spid="14"/>
+                                  </p:tgtEl>
+                                </p:cBhvr>
+                              </p:animEffect>
+                            </p:childTnLst>
+                          </p:cTn>
+                        </p:par>
+                        <p:par>
+                          <p:cTn id="17" fill="hold">
+                            <p:stCondLst>
+                              <p:cond delay="160"/>
+                            </p:stCondLst>
+                            <p:childTnLst>
+                              <p:animEffect transition="in" filter="wipe(up)">
+                                <p:cBhvr>
+                                  <p:cTn id="18" dur="380" fill="hold"/>
+                                  <p:tgtEl>
+                                    <p:spTgt spid="15"/>
+                                  </p:tgtEl>
+                                </p:cBhvr>
+                              </p:animEffect>
+                            </p:childTnLst>
+                          </p:cTn>
+                        </p:par>
+                        <p:par>
+                          <p:cTn id="19" fill="hold">
+                            <p:stCondLst>
+                              <p:cond delay="160"/>
+                            </p:stCondLst>
+                            <p:childTnLst>
+                              <p:animEffect transition="in" filter="wipe(up)">
+                                <p:cBhvr>
+                                  <p:cTn id="20" dur="380" fill="hold"/>
+                                  <p:tgtEl>
+                                    <p:spTgt spid="16"/>
+                                  </p:tgtEl>
+                                </p:cBhvr>
+                              </p:animEffect>
+                            </p:childTnLst>
+                          </p:cTn>
+                        </p:par>
+                        <p:par>
+                          <p:cTn id="21" fill="hold">
+                            <p:stCondLst>
+                              <p:cond delay="160"/>
+                            </p:stCondLst>
+                            <p:childTnLst>
+                              <p:animEffect transition="in" filter="wipe(up)">
+                                <p:cBhvr>
+                                  <p:cTn id="22" dur="380" fill="hold"/>
+                                  <p:tgtEl>
+                                    <p:spTgt spid="17"/>
+                                  </p:tgtEl>
+                                </p:cBhvr>
+                              </p:animEffect>
+                            </p:childTnLst>
+                          </p:cTn>
+                        </p:par>
+                        <p:par>
+                          <p:cTn id="23" fill="hold">
+                            <p:stCondLst>
+                              <p:cond delay="160"/>
+                            </p:stCondLst>
+                            <p:childTnLst>
+                              <p:animEffect transition="in" filter="wipe(up)">
+                                <p:cBhvr>
+                                  <p:cTn id="24" dur="380" fill="hold"/>
+                                  <p:tgtEl>
+                                    <p:spTgt spid="18"/>
                                   </p:tgtEl>
                                 </p:cBhvr>
                               </p:animEffect>
@@ -5435,100 +5707,7 @@
         <p:spPr>
           <a:xfrm>
             <a:off x="502920" y="365760"/>
-            <a:ext cx="1463040" cy="274320"/>
-          </a:xfrm>
-          <a:prstGeom prst="rect">
-            <a:avLst/>
-          </a:prstGeom>
-          <a:noFill/>
-          <a:ln w="15240">
-            <a:solidFill>
-              <a:srgbClr val="2FDFE5"/>
-            </a:solidFill>
-          </a:ln>
-        </p:spPr>
-        <p:style>
-          <a:lnRef idx="1">
-            <a:schemeClr val="accent1"/>
-          </a:lnRef>
-          <a:fillRef idx="3">
-            <a:schemeClr val="accent1"/>
-          </a:fillRef>
-          <a:effectRef idx="2">
-            <a:schemeClr val="accent1"/>
-          </a:effectRef>
-          <a:fontRef idx="minor">
-            <a:schemeClr val="lt1"/>
-          </a:fontRef>
-        </p:style>
-        <p:txBody lIns="76200" tIns="12700" rIns="76200" bIns="12700">
-          <a:bodyPr rtlCol="0" anchor="ctr" wrap="none"/>
-          <a:lstStyle/>
-          <a:p>
-            <a:pPr algn="ctr"/>
-            <a:r>
-              <a:rPr sz="800" b="1">
-                <a:solidFill>
-                  <a:srgbClr val="2FDFE5"/>
-                </a:solidFill>
-              </a:rPr>
-              <a:t>FASE 3</a:t>
-            </a:r>
-          </a:p>
-        </p:txBody>
-      </p:sp>
-      <p:sp>
-        <p:nvSpPr>
-          <p:cNvPr id="6" name="TextBox 5"/>
-          <p:cNvSpPr txBox="1"/>
-          <p:nvPr/>
-        </p:nvSpPr>
-        <p:spPr>
-          <a:xfrm>
-            <a:off x="502920" y="731520"/>
-            <a:ext cx="8961120" cy="960120"/>
-          </a:xfrm>
-          <a:prstGeom prst="rect">
-            <a:avLst/>
-          </a:prstGeom>
-          <a:noFill/>
-        </p:spPr>
-        <p:txBody lIns="0" tIns="0" rIns="0" bIns="0">
-          <a:bodyPr wrap="square">
-            <a:spAutoFit/>
-          </a:bodyPr>
-          <a:lstStyle/>
-          <a:p>
-            <a:pPr algn="l"/>
-            <a:r>
-              <a:rPr sz="4000" b="1">
-                <a:solidFill>
-                  <a:srgbClr val="FFFFFF"/>
-                </a:solidFill>
-              </a:rPr>
-              <a:t>Gestión </a:t>
-            </a:r>
-            <a:r>
-              <a:rPr sz="4000" b="1">
-                <a:solidFill>
-                  <a:srgbClr val="2FDFE5"/>
-                </a:solidFill>
-              </a:rPr>
-              <a:t>continuada</a:t>
-            </a:r>
-          </a:p>
-        </p:txBody>
-      </p:sp>
-      <p:sp>
-        <p:nvSpPr>
-          <p:cNvPr id="7" name="Rectangle 6"/>
-          <p:cNvSpPr/>
-          <p:nvPr/>
-        </p:nvSpPr>
-        <p:spPr>
-          <a:xfrm>
-            <a:off x="502920" y="1737360"/>
-            <a:ext cx="4389120" cy="31750"/>
+            <a:ext cx="1737360" cy="301752"/>
           </a:xfrm>
           <a:prstGeom prst="rect">
             <a:avLst/>
@@ -5554,24 +5733,32 @@
             <a:schemeClr val="lt1"/>
           </a:fontRef>
         </p:style>
-        <p:txBody>
-          <a:bodyPr rtlCol="0" anchor="ctr"/>
+        <p:txBody lIns="101600" tIns="25400" rIns="101600" bIns="25400">
+          <a:bodyPr rtlCol="0" anchor="ctr" wrap="none"/>
           <a:lstStyle/>
           <a:p>
             <a:pPr algn="ctr"/>
-          </a:p>
-        </p:txBody>
-      </p:sp>
-      <p:sp>
-        <p:nvSpPr>
-          <p:cNvPr id="8" name="TextBox 7"/>
+            <a:r>
+              <a:rPr sz="1100" b="1">
+                <a:solidFill>
+                  <a:srgbClr val="0A1638"/>
+                </a:solidFill>
+              </a:rPr>
+              <a:t>FASE 3</a:t>
+            </a:r>
+          </a:p>
+        </p:txBody>
+      </p:sp>
+      <p:sp>
+        <p:nvSpPr>
+          <p:cNvPr id="6" name="TextBox 5"/>
           <p:cNvSpPr txBox="1"/>
           <p:nvPr/>
         </p:nvSpPr>
         <p:spPr>
           <a:xfrm>
-            <a:off x="502920" y="1810512"/>
-            <a:ext cx="9265615" cy="384048"/>
+            <a:off x="502920" y="731520"/>
+            <a:ext cx="8961120" cy="960120"/>
           </a:xfrm>
           <a:prstGeom prst="rect">
             <a:avLst/>
@@ -5579,78 +5766,41 @@
           <a:noFill/>
         </p:spPr>
         <p:txBody lIns="0" tIns="0" rIns="0" bIns="0">
-          <a:bodyPr wrap="none">
+          <a:bodyPr wrap="square">
             <a:spAutoFit/>
           </a:bodyPr>
           <a:lstStyle/>
           <a:p>
             <a:pPr algn="l"/>
             <a:r>
-              <a:rPr sz="1300" i="1">
-                <a:solidFill>
-                  <a:srgbClr val="80A8CC"/>
-                </a:solidFill>
-              </a:rPr>
-              <a:t>El seguimiento constante y la transparencia en el reporting mantienen cada expediente bajo control.</a:t>
-            </a:r>
-          </a:p>
-        </p:txBody>
-      </p:sp>
-      <p:sp>
-        <p:nvSpPr>
-          <p:cNvPr id="9" name="Rectangle 8"/>
+              <a:rPr sz="4000" b="1">
+                <a:solidFill>
+                  <a:srgbClr val="FFFFFF"/>
+                </a:solidFill>
+              </a:rPr>
+              <a:t>Gestión </a:t>
+            </a:r>
+            <a:r>
+              <a:rPr sz="4000" b="1">
+                <a:solidFill>
+                  <a:srgbClr val="2FDFE5"/>
+                </a:solidFill>
+              </a:rPr>
+              <a:t>continuada</a:t>
+            </a:r>
+          </a:p>
+        </p:txBody>
+      </p:sp>
+      <p:sp>
+        <p:nvSpPr>
+          <p:cNvPr id="7" name="Rectangle 6"/>
           <p:cNvSpPr/>
           <p:nvPr/>
         </p:nvSpPr>
         <p:spPr>
           <a:xfrm>
-            <a:off x="502920" y="2267712"/>
-            <a:ext cx="5579211" cy="3785616"/>
-          </a:xfrm>
-          <a:prstGeom prst="rect">
-            <a:avLst/>
-          </a:prstGeom>
-          <a:solidFill>
-            <a:srgbClr val="081438"/>
-          </a:solidFill>
-          <a:ln w="10160">
-            <a:solidFill>
-              <a:srgbClr val="2FDFE5"/>
-            </a:solidFill>
-          </a:ln>
-        </p:spPr>
-        <p:style>
-          <a:lnRef idx="1">
-            <a:schemeClr val="accent1"/>
-          </a:lnRef>
-          <a:fillRef idx="3">
-            <a:schemeClr val="accent1"/>
-          </a:fillRef>
-          <a:effectRef idx="2">
-            <a:schemeClr val="accent1"/>
-          </a:effectRef>
-          <a:fontRef idx="minor">
-            <a:schemeClr val="lt1"/>
-          </a:fontRef>
-        </p:style>
-        <p:txBody>
-          <a:bodyPr rtlCol="0" anchor="ctr"/>
-          <a:lstStyle/>
-          <a:p>
-            <a:pPr algn="ctr"/>
-          </a:p>
-        </p:txBody>
-      </p:sp>
-      <p:sp>
-        <p:nvSpPr>
-          <p:cNvPr id="10" name="Rectangle 9"/>
-          <p:cNvSpPr/>
-          <p:nvPr/>
-        </p:nvSpPr>
-        <p:spPr>
-          <a:xfrm>
-            <a:off x="502920" y="2267712"/>
-            <a:ext cx="5579211" cy="63500"/>
+            <a:off x="502920" y="1737360"/>
+            <a:ext cx="4389120" cy="31750"/>
           </a:xfrm>
           <a:prstGeom prst="rect">
             <a:avLst/>
@@ -5686,21 +5836,143 @@
       </p:sp>
       <p:sp>
         <p:nvSpPr>
+          <p:cNvPr id="8" name="TextBox 7"/>
+          <p:cNvSpPr txBox="1"/>
+          <p:nvPr/>
+        </p:nvSpPr>
+        <p:spPr>
+          <a:xfrm>
+            <a:off x="502920" y="1810512"/>
+            <a:ext cx="9265615" cy="384048"/>
+          </a:xfrm>
+          <a:prstGeom prst="rect">
+            <a:avLst/>
+          </a:prstGeom>
+          <a:noFill/>
+        </p:spPr>
+        <p:txBody lIns="0" tIns="0" rIns="0" bIns="0">
+          <a:bodyPr wrap="none">
+            <a:spAutoFit/>
+          </a:bodyPr>
+          <a:lstStyle/>
+          <a:p>
+            <a:pPr algn="l"/>
+            <a:r>
+              <a:rPr sz="1300" i="1">
+                <a:solidFill>
+                  <a:srgbClr val="80A8CC"/>
+                </a:solidFill>
+              </a:rPr>
+              <a:t>El seguimiento constante y la transparencia en el reporting mantienen cada expediente bajo control.</a:t>
+            </a:r>
+          </a:p>
+        </p:txBody>
+      </p:sp>
+      <p:sp>
+        <p:nvSpPr>
+          <p:cNvPr id="9" name="Rectangle 8"/>
+          <p:cNvSpPr/>
+          <p:nvPr/>
+        </p:nvSpPr>
+        <p:spPr>
+          <a:xfrm>
+            <a:off x="502920" y="2267712"/>
+            <a:ext cx="5579211" cy="3328416"/>
+          </a:xfrm>
+          <a:prstGeom prst="rect">
+            <a:avLst/>
+          </a:prstGeom>
+          <a:solidFill>
+            <a:srgbClr val="081438"/>
+          </a:solidFill>
+          <a:ln w="12700">
+            <a:solidFill>
+              <a:srgbClr val="2FDFE5"/>
+            </a:solidFill>
+          </a:ln>
+        </p:spPr>
+        <p:style>
+          <a:lnRef idx="1">
+            <a:schemeClr val="accent1"/>
+          </a:lnRef>
+          <a:fillRef idx="3">
+            <a:schemeClr val="accent1"/>
+          </a:fillRef>
+          <a:effectRef idx="2">
+            <a:schemeClr val="accent1"/>
+          </a:effectRef>
+          <a:fontRef idx="minor">
+            <a:schemeClr val="lt1"/>
+          </a:fontRef>
+        </p:style>
+        <p:txBody>
+          <a:bodyPr rtlCol="0" anchor="ctr"/>
+          <a:lstStyle/>
+          <a:p>
+            <a:pPr algn="ctr"/>
+          </a:p>
+        </p:txBody>
+      </p:sp>
+      <p:sp>
+        <p:nvSpPr>
+          <p:cNvPr id="10" name="Rectangle 9"/>
+          <p:cNvSpPr/>
+          <p:nvPr/>
+        </p:nvSpPr>
+        <p:spPr>
+          <a:xfrm>
+            <a:off x="502920" y="2267712"/>
+            <a:ext cx="5579211" cy="63500"/>
+          </a:xfrm>
+          <a:prstGeom prst="rect">
+            <a:avLst/>
+          </a:prstGeom>
+          <a:solidFill>
+            <a:srgbClr val="2FDFE5"/>
+          </a:solidFill>
+          <a:ln>
+            <a:noFill/>
+          </a:ln>
+        </p:spPr>
+        <p:style>
+          <a:lnRef idx="1">
+            <a:schemeClr val="accent1"/>
+          </a:lnRef>
+          <a:fillRef idx="3">
+            <a:schemeClr val="accent1"/>
+          </a:fillRef>
+          <a:effectRef idx="2">
+            <a:schemeClr val="accent1"/>
+          </a:effectRef>
+          <a:fontRef idx="minor">
+            <a:schemeClr val="lt1"/>
+          </a:fontRef>
+        </p:style>
+        <p:txBody>
+          <a:bodyPr rtlCol="0" anchor="ctr"/>
+          <a:lstStyle/>
+          <a:p>
+            <a:pPr algn="ctr"/>
+          </a:p>
+        </p:txBody>
+      </p:sp>
+      <p:sp>
+        <p:nvSpPr>
           <p:cNvPr id="11" name="TextBox 10"/>
           <p:cNvSpPr txBox="1"/>
           <p:nvPr/>
         </p:nvSpPr>
         <p:spPr>
           <a:xfrm>
-            <a:off x="704088" y="2468880"/>
-            <a:ext cx="5176875" cy="621792"/>
+            <a:off x="704088" y="2487168"/>
+            <a:ext cx="5176875" cy="640080"/>
           </a:xfrm>
           <a:prstGeom prst="rect">
             <a:avLst/>
           </a:prstGeom>
           <a:noFill/>
         </p:spPr>
-        <p:txBody lIns="38100" tIns="50800" rIns="38100" bIns="25400">
+        <p:txBody lIns="38100" tIns="63500" rIns="38100" bIns="25400">
           <a:bodyPr wrap="square">
             <a:spAutoFit/>
           </a:bodyPr>
@@ -5708,7 +5980,7 @@
           <a:p>
             <a:pPr algn="l"/>
             <a:r>
-              <a:rPr sz="1800" b="1">
+              <a:rPr sz="1900" b="1">
                 <a:solidFill>
                   <a:srgbClr val="2FDFE5"/>
                 </a:solidFill>
@@ -5716,7 +5988,7 @@
               <a:t>5  </a:t>
             </a:r>
             <a:r>
-              <a:rPr sz="1800" b="1">
+              <a:rPr sz="1900" b="1">
                 <a:solidFill>
                   <a:srgbClr val="FFFFFF"/>
                 </a:solidFill>
@@ -5734,8 +6006,8 @@
         </p:nvSpPr>
         <p:spPr>
           <a:xfrm>
-            <a:off x="667512" y="3182112"/>
-            <a:ext cx="5250027" cy="15240"/>
+            <a:off x="667512" y="3218688"/>
+            <a:ext cx="5250027" cy="19050"/>
           </a:xfrm>
           <a:prstGeom prst="rect">
             <a:avLst/>
@@ -5777,15 +6049,15 @@
         </p:nvSpPr>
         <p:spPr>
           <a:xfrm>
-            <a:off x="667512" y="3283712"/>
-            <a:ext cx="5250027" cy="2685288"/>
+            <a:off x="667512" y="3345688"/>
+            <a:ext cx="5250027" cy="2249424"/>
           </a:xfrm>
           <a:prstGeom prst="rect">
             <a:avLst/>
           </a:prstGeom>
           <a:noFill/>
         </p:spPr>
-        <p:txBody lIns="50800" tIns="38100" rIns="50800" bIns="38100">
+        <p:txBody lIns="50800" tIns="50800" rIns="50800" bIns="50800">
           <a:bodyPr wrap="square">
             <a:spAutoFit/>
           </a:bodyPr>
@@ -5793,11 +6065,11 @@
           <a:p>
             <a:pPr algn="l">
               <a:spcBef>
-                <a:spcPts val="500"/>
+                <a:spcPts val="1800"/>
               </a:spcBef>
             </a:pPr>
             <a:r>
-              <a:rPr sz="1300">
+              <a:rPr sz="1400">
                 <a:solidFill>
                   <a:srgbClr val="2FDFE5"/>
                 </a:solidFill>
@@ -5805,7 +6077,7 @@
               <a:t>▸  </a:t>
             </a:r>
             <a:r>
-              <a:rPr sz="1400">
+              <a:rPr sz="1700">
                 <a:solidFill>
                   <a:srgbClr val="D8EAFF"/>
                 </a:solidFill>
@@ -5816,11 +6088,11 @@
           <a:p>
             <a:pPr algn="l">
               <a:spcBef>
-                <a:spcPts val="500"/>
+                <a:spcPts val="1800"/>
               </a:spcBef>
             </a:pPr>
             <a:r>
-              <a:rPr sz="1300">
+              <a:rPr sz="1400">
                 <a:solidFill>
                   <a:srgbClr val="2FDFE5"/>
                 </a:solidFill>
@@ -5828,7 +6100,7 @@
               <a:t>▸  </a:t>
             </a:r>
             <a:r>
-              <a:rPr sz="1400">
+              <a:rPr sz="1700">
                 <a:solidFill>
                   <a:srgbClr val="D8EAFF"/>
                 </a:solidFill>
@@ -5839,11 +6111,11 @@
           <a:p>
             <a:pPr algn="l">
               <a:spcBef>
-                <a:spcPts val="500"/>
+                <a:spcPts val="1800"/>
               </a:spcBef>
             </a:pPr>
             <a:r>
-              <a:rPr sz="1300">
+              <a:rPr sz="1400">
                 <a:solidFill>
                   <a:srgbClr val="2FDFE5"/>
                 </a:solidFill>
@@ -5851,7 +6123,7 @@
               <a:t>▸  </a:t>
             </a:r>
             <a:r>
-              <a:rPr sz="1400">
+              <a:rPr sz="1700">
                 <a:solidFill>
                   <a:srgbClr val="D8EAFF"/>
                 </a:solidFill>
@@ -5870,7 +6142,7 @@
         <p:spPr>
           <a:xfrm>
             <a:off x="6283299" y="2267712"/>
-            <a:ext cx="5579211" cy="3785616"/>
+            <a:ext cx="5579211" cy="3328416"/>
           </a:xfrm>
           <a:prstGeom prst="rect">
             <a:avLst/>
@@ -5878,7 +6150,7 @@
           <a:solidFill>
             <a:srgbClr val="081438"/>
           </a:solidFill>
-          <a:ln w="10160">
+          <a:ln w="12700">
             <a:solidFill>
               <a:srgbClr val="2FDFE5"/>
             </a:solidFill>
@@ -5957,15 +6229,15 @@
         </p:nvSpPr>
         <p:spPr>
           <a:xfrm>
-            <a:off x="6484467" y="2468880"/>
-            <a:ext cx="5176875" cy="621792"/>
+            <a:off x="6484467" y="2487168"/>
+            <a:ext cx="5176875" cy="640080"/>
           </a:xfrm>
           <a:prstGeom prst="rect">
             <a:avLst/>
           </a:prstGeom>
           <a:noFill/>
         </p:spPr>
-        <p:txBody lIns="38100" tIns="50800" rIns="38100" bIns="25400">
+        <p:txBody lIns="38100" tIns="63500" rIns="38100" bIns="25400">
           <a:bodyPr wrap="square">
             <a:spAutoFit/>
           </a:bodyPr>
@@ -5973,7 +6245,7 @@
           <a:p>
             <a:pPr algn="l"/>
             <a:r>
-              <a:rPr sz="1800" b="1">
+              <a:rPr sz="1900" b="1">
                 <a:solidFill>
                   <a:srgbClr val="2FDFE5"/>
                 </a:solidFill>
@@ -5981,7 +6253,7 @@
               <a:t>6  </a:t>
             </a:r>
             <a:r>
-              <a:rPr sz="1800" b="1">
+              <a:rPr sz="1900" b="1">
                 <a:solidFill>
                   <a:srgbClr val="FFFFFF"/>
                 </a:solidFill>
@@ -5999,8 +6271,8 @@
         </p:nvSpPr>
         <p:spPr>
           <a:xfrm>
-            <a:off x="6447891" y="3182112"/>
-            <a:ext cx="5250027" cy="15240"/>
+            <a:off x="6447891" y="3218688"/>
+            <a:ext cx="5250027" cy="19050"/>
           </a:xfrm>
           <a:prstGeom prst="rect">
             <a:avLst/>
@@ -6042,15 +6314,15 @@
         </p:nvSpPr>
         <p:spPr>
           <a:xfrm>
-            <a:off x="6447891" y="3283712"/>
-            <a:ext cx="5250027" cy="2685288"/>
+            <a:off x="6447891" y="3345688"/>
+            <a:ext cx="5250027" cy="2249424"/>
           </a:xfrm>
           <a:prstGeom prst="rect">
             <a:avLst/>
           </a:prstGeom>
           <a:noFill/>
         </p:spPr>
-        <p:txBody lIns="50800" tIns="38100" rIns="50800" bIns="38100">
+        <p:txBody lIns="50800" tIns="50800" rIns="50800" bIns="50800">
           <a:bodyPr wrap="square">
             <a:spAutoFit/>
           </a:bodyPr>
@@ -6058,11 +6330,11 @@
           <a:p>
             <a:pPr algn="l">
               <a:spcBef>
-                <a:spcPts val="500"/>
+                <a:spcPts val="1800"/>
               </a:spcBef>
             </a:pPr>
             <a:r>
-              <a:rPr sz="1300">
+              <a:rPr sz="1400">
                 <a:solidFill>
                   <a:srgbClr val="2FDFE5"/>
                 </a:solidFill>
@@ -6070,7 +6342,7 @@
               <a:t>▸  </a:t>
             </a:r>
             <a:r>
-              <a:rPr sz="1400">
+              <a:rPr sz="1700">
                 <a:solidFill>
                   <a:srgbClr val="D8EAFF"/>
                 </a:solidFill>
@@ -6081,11 +6353,11 @@
           <a:p>
             <a:pPr algn="l">
               <a:spcBef>
-                <a:spcPts val="500"/>
+                <a:spcPts val="1800"/>
               </a:spcBef>
             </a:pPr>
             <a:r>
-              <a:rPr sz="1300">
+              <a:rPr sz="1400">
                 <a:solidFill>
                   <a:srgbClr val="2FDFE5"/>
                 </a:solidFill>
@@ -6093,7 +6365,7 @@
               <a:t>▸  </a:t>
             </a:r>
             <a:r>
-              <a:rPr sz="1400">
+              <a:rPr sz="1700">
                 <a:solidFill>
                   <a:srgbClr val="D8EAFF"/>
                 </a:solidFill>
@@ -6104,11 +6376,11 @@
           <a:p>
             <a:pPr algn="l">
               <a:spcBef>
-                <a:spcPts val="500"/>
+                <a:spcPts val="1800"/>
               </a:spcBef>
             </a:pPr>
             <a:r>
-              <a:rPr sz="1300">
+              <a:rPr sz="1400">
                 <a:solidFill>
                   <a:srgbClr val="2FDFE5"/>
                 </a:solidFill>
@@ -6116,7 +6388,7 @@
               <a:t>▸  </a:t>
             </a:r>
             <a:r>
-              <a:rPr sz="1400">
+              <a:rPr sz="1700">
                 <a:solidFill>
                   <a:srgbClr val="D8EAFF"/>
                 </a:solidFill>
@@ -6128,7 +6400,7 @@
       </p:sp>
       <p:pic>
         <p:nvPicPr>
-          <p:cNvPr id="19" name="Picture 18" descr="logo_horiz.png"/>
+          <p:cNvPr id="25" name="Picture 24" descr="logo_horiz.png"/>
           <p:cNvPicPr>
             <a:picLocks noChangeAspect="1"/>
           </p:cNvPicPr>
@@ -6177,7 +6449,7 @@
                             <p:childTnLst>
                               <p:animEffect transition="in" filter="wipe(up)">
                                 <p:cBhvr>
-                                  <p:cTn id="6" dur="450" fill="hold"/>
+                                  <p:cTn id="6" dur="380" fill="hold"/>
                                   <p:tgtEl>
                                     <p:spTgt spid="9"/>
                                   </p:tgtEl>
@@ -6189,14 +6461,150 @@
                         <p:par>
                           <p:cTn id="7" fill="hold">
                             <p:stCondLst>
+                              <p:cond delay="0"/>
+                            </p:stCondLst>
+                            <p:childTnLst>
+                              <p:animEffect transition="in" filter="wipe(up)">
+                                <p:cBhvr>
+                                  <p:cTn id="8" dur="380" fill="hold"/>
+                                  <p:tgtEl>
+                                    <p:spTgt spid="10"/>
+                                  </p:tgtEl>
+                                </p:cBhvr>
+                              </p:animEffect>
+                            </p:childTnLst>
+                          </p:cTn>
+                        </p:par>
+                        <p:par>
+                          <p:cTn id="9" fill="hold">
+                            <p:stCondLst>
+                              <p:cond delay="0"/>
+                            </p:stCondLst>
+                            <p:childTnLst>
+                              <p:animEffect transition="in" filter="wipe(up)">
+                                <p:cBhvr>
+                                  <p:cTn id="10" dur="380" fill="hold"/>
+                                  <p:tgtEl>
+                                    <p:spTgt spid="11"/>
+                                  </p:tgtEl>
+                                </p:cBhvr>
+                              </p:animEffect>
+                            </p:childTnLst>
+                          </p:cTn>
+                        </p:par>
+                        <p:par>
+                          <p:cTn id="11" fill="hold">
+                            <p:stCondLst>
+                              <p:cond delay="0"/>
+                            </p:stCondLst>
+                            <p:childTnLst>
+                              <p:animEffect transition="in" filter="wipe(up)">
+                                <p:cBhvr>
+                                  <p:cTn id="12" dur="380" fill="hold"/>
+                                  <p:tgtEl>
+                                    <p:spTgt spid="12"/>
+                                  </p:tgtEl>
+                                </p:cBhvr>
+                              </p:animEffect>
+                            </p:childTnLst>
+                          </p:cTn>
+                        </p:par>
+                        <p:par>
+                          <p:cTn id="13" fill="hold">
+                            <p:stCondLst>
+                              <p:cond delay="0"/>
+                            </p:stCondLst>
+                            <p:childTnLst>
+                              <p:animEffect transition="in" filter="wipe(up)">
+                                <p:cBhvr>
+                                  <p:cTn id="14" dur="380" fill="hold"/>
+                                  <p:tgtEl>
+                                    <p:spTgt spid="13"/>
+                                  </p:tgtEl>
+                                </p:cBhvr>
+                              </p:animEffect>
+                            </p:childTnLst>
+                          </p:cTn>
+                        </p:par>
+                        <p:par>
+                          <p:cTn id="15" fill="hold">
+                            <p:stCondLst>
                               <p:cond delay="160"/>
                             </p:stCondLst>
                             <p:childTnLst>
                               <p:animEffect transition="in" filter="wipe(up)">
                                 <p:cBhvr>
-                                  <p:cTn id="8" dur="450" fill="hold"/>
+                                  <p:cTn id="16" dur="380" fill="hold"/>
                                   <p:tgtEl>
                                     <p:spTgt spid="14"/>
+                                  </p:tgtEl>
+                                </p:cBhvr>
+                              </p:animEffect>
+                            </p:childTnLst>
+                          </p:cTn>
+                        </p:par>
+                        <p:par>
+                          <p:cTn id="17" fill="hold">
+                            <p:stCondLst>
+                              <p:cond delay="160"/>
+                            </p:stCondLst>
+                            <p:childTnLst>
+                              <p:animEffect transition="in" filter="wipe(up)">
+                                <p:cBhvr>
+                                  <p:cTn id="18" dur="380" fill="hold"/>
+                                  <p:tgtEl>
+                                    <p:spTgt spid="15"/>
+                                  </p:tgtEl>
+                                </p:cBhvr>
+                              </p:animEffect>
+                            </p:childTnLst>
+                          </p:cTn>
+                        </p:par>
+                        <p:par>
+                          <p:cTn id="19" fill="hold">
+                            <p:stCondLst>
+                              <p:cond delay="160"/>
+                            </p:stCondLst>
+                            <p:childTnLst>
+                              <p:animEffect transition="in" filter="wipe(up)">
+                                <p:cBhvr>
+                                  <p:cTn id="20" dur="380" fill="hold"/>
+                                  <p:tgtEl>
+                                    <p:spTgt spid="16"/>
+                                  </p:tgtEl>
+                                </p:cBhvr>
+                              </p:animEffect>
+                            </p:childTnLst>
+                          </p:cTn>
+                        </p:par>
+                        <p:par>
+                          <p:cTn id="21" fill="hold">
+                            <p:stCondLst>
+                              <p:cond delay="160"/>
+                            </p:stCondLst>
+                            <p:childTnLst>
+                              <p:animEffect transition="in" filter="wipe(up)">
+                                <p:cBhvr>
+                                  <p:cTn id="22" dur="380" fill="hold"/>
+                                  <p:tgtEl>
+                                    <p:spTgt spid="17"/>
+                                  </p:tgtEl>
+                                </p:cBhvr>
+                              </p:animEffect>
+                            </p:childTnLst>
+                          </p:cTn>
+                        </p:par>
+                        <p:par>
+                          <p:cTn id="23" fill="hold">
+                            <p:stCondLst>
+                              <p:cond delay="160"/>
+                            </p:stCondLst>
+                            <p:childTnLst>
+                              <p:animEffect transition="in" filter="wipe(up)">
+                                <p:cBhvr>
+                                  <p:cTn id="24" dur="380" fill="hold"/>
+                                  <p:tgtEl>
+                                    <p:spTgt spid="18"/>
                                   </p:tgtEl>
                                 </p:cBhvr>
                               </p:animEffect>
@@ -6355,100 +6763,7 @@
         <p:spPr>
           <a:xfrm>
             <a:off x="502920" y="365760"/>
-            <a:ext cx="1463040" cy="274320"/>
-          </a:xfrm>
-          <a:prstGeom prst="rect">
-            <a:avLst/>
-          </a:prstGeom>
-          <a:noFill/>
-          <a:ln w="15240">
-            <a:solidFill>
-              <a:srgbClr val="2FDFE5"/>
-            </a:solidFill>
-          </a:ln>
-        </p:spPr>
-        <p:style>
-          <a:lnRef idx="1">
-            <a:schemeClr val="accent1"/>
-          </a:lnRef>
-          <a:fillRef idx="3">
-            <a:schemeClr val="accent1"/>
-          </a:fillRef>
-          <a:effectRef idx="2">
-            <a:schemeClr val="accent1"/>
-          </a:effectRef>
-          <a:fontRef idx="minor">
-            <a:schemeClr val="lt1"/>
-          </a:fontRef>
-        </p:style>
-        <p:txBody lIns="76200" tIns="12700" rIns="76200" bIns="12700">
-          <a:bodyPr rtlCol="0" anchor="ctr" wrap="none"/>
-          <a:lstStyle/>
-          <a:p>
-            <a:pPr algn="ctr"/>
-            <a:r>
-              <a:rPr sz="800" b="1">
-                <a:solidFill>
-                  <a:srgbClr val="2FDFE5"/>
-                </a:solidFill>
-              </a:rPr>
-              <a:t>FASE 4</a:t>
-            </a:r>
-          </a:p>
-        </p:txBody>
-      </p:sp>
-      <p:sp>
-        <p:nvSpPr>
-          <p:cNvPr id="6" name="TextBox 5"/>
-          <p:cNvSpPr txBox="1"/>
-          <p:nvPr/>
-        </p:nvSpPr>
-        <p:spPr>
-          <a:xfrm>
-            <a:off x="502920" y="731520"/>
-            <a:ext cx="8961120" cy="960120"/>
-          </a:xfrm>
-          <a:prstGeom prst="rect">
-            <a:avLst/>
-          </a:prstGeom>
-          <a:noFill/>
-        </p:spPr>
-        <p:txBody lIns="0" tIns="0" rIns="0" bIns="0">
-          <a:bodyPr wrap="square">
-            <a:spAutoFit/>
-          </a:bodyPr>
-          <a:lstStyle/>
-          <a:p>
-            <a:pPr algn="l"/>
-            <a:r>
-              <a:rPr sz="4000" b="1">
-                <a:solidFill>
-                  <a:srgbClr val="FFFFFF"/>
-                </a:solidFill>
-              </a:rPr>
-              <a:t>Cierre y </a:t>
-            </a:r>
-            <a:r>
-              <a:rPr sz="4000" b="1">
-                <a:solidFill>
-                  <a:srgbClr val="2FDFE5"/>
-                </a:solidFill>
-              </a:rPr>
-              <a:t>condiciones</a:t>
-            </a:r>
-          </a:p>
-        </p:txBody>
-      </p:sp>
-      <p:sp>
-        <p:nvSpPr>
-          <p:cNvPr id="7" name="Rectangle 6"/>
-          <p:cNvSpPr/>
-          <p:nvPr/>
-        </p:nvSpPr>
-        <p:spPr>
-          <a:xfrm>
-            <a:off x="502920" y="1737360"/>
-            <a:ext cx="4389120" cy="31750"/>
+            <a:ext cx="1737360" cy="301752"/>
           </a:xfrm>
           <a:prstGeom prst="rect">
             <a:avLst/>
@@ -6474,24 +6789,32 @@
             <a:schemeClr val="lt1"/>
           </a:fontRef>
         </p:style>
-        <p:txBody>
-          <a:bodyPr rtlCol="0" anchor="ctr"/>
+        <p:txBody lIns="101600" tIns="25400" rIns="101600" bIns="25400">
+          <a:bodyPr rtlCol="0" anchor="ctr" wrap="none"/>
           <a:lstStyle/>
           <a:p>
             <a:pPr algn="ctr"/>
-          </a:p>
-        </p:txBody>
-      </p:sp>
-      <p:sp>
-        <p:nvSpPr>
-          <p:cNvPr id="8" name="TextBox 7"/>
+            <a:r>
+              <a:rPr sz="1100" b="1">
+                <a:solidFill>
+                  <a:srgbClr val="0A1638"/>
+                </a:solidFill>
+              </a:rPr>
+              <a:t>FASE 4</a:t>
+            </a:r>
+          </a:p>
+        </p:txBody>
+      </p:sp>
+      <p:sp>
+        <p:nvSpPr>
+          <p:cNvPr id="6" name="TextBox 5"/>
           <p:cNvSpPr txBox="1"/>
           <p:nvPr/>
         </p:nvSpPr>
         <p:spPr>
           <a:xfrm>
-            <a:off x="502920" y="1810512"/>
-            <a:ext cx="9265615" cy="384048"/>
+            <a:off x="502920" y="731520"/>
+            <a:ext cx="8961120" cy="960120"/>
           </a:xfrm>
           <a:prstGeom prst="rect">
             <a:avLst/>
@@ -6499,78 +6822,41 @@
           <a:noFill/>
         </p:spPr>
         <p:txBody lIns="0" tIns="0" rIns="0" bIns="0">
-          <a:bodyPr wrap="none">
+          <a:bodyPr wrap="square">
             <a:spAutoFit/>
           </a:bodyPr>
           <a:lstStyle/>
           <a:p>
             <a:pPr algn="l"/>
             <a:r>
-              <a:rPr sz="1300" i="1">
-                <a:solidFill>
-                  <a:srgbClr val="80A8CC"/>
-                </a:solidFill>
-              </a:rPr>
-              <a:t>Solo facturamos cuando recuperamos: nuestros incentivos están alineados con los de nuestro cliente.</a:t>
-            </a:r>
-          </a:p>
-        </p:txBody>
-      </p:sp>
-      <p:sp>
-        <p:nvSpPr>
-          <p:cNvPr id="9" name="Rectangle 8"/>
+              <a:rPr sz="4000" b="1">
+                <a:solidFill>
+                  <a:srgbClr val="FFFFFF"/>
+                </a:solidFill>
+              </a:rPr>
+              <a:t>Cierre y </a:t>
+            </a:r>
+            <a:r>
+              <a:rPr sz="4000" b="1">
+                <a:solidFill>
+                  <a:srgbClr val="2FDFE5"/>
+                </a:solidFill>
+              </a:rPr>
+              <a:t>condiciones</a:t>
+            </a:r>
+          </a:p>
+        </p:txBody>
+      </p:sp>
+      <p:sp>
+        <p:nvSpPr>
+          <p:cNvPr id="7" name="Rectangle 6"/>
           <p:cNvSpPr/>
           <p:nvPr/>
         </p:nvSpPr>
         <p:spPr>
           <a:xfrm>
-            <a:off x="502920" y="2267712"/>
-            <a:ext cx="5579211" cy="3785616"/>
-          </a:xfrm>
-          <a:prstGeom prst="rect">
-            <a:avLst/>
-          </a:prstGeom>
-          <a:solidFill>
-            <a:srgbClr val="081438"/>
-          </a:solidFill>
-          <a:ln w="10160">
-            <a:solidFill>
-              <a:srgbClr val="2FDFE5"/>
-            </a:solidFill>
-          </a:ln>
-        </p:spPr>
-        <p:style>
-          <a:lnRef idx="1">
-            <a:schemeClr val="accent1"/>
-          </a:lnRef>
-          <a:fillRef idx="3">
-            <a:schemeClr val="accent1"/>
-          </a:fillRef>
-          <a:effectRef idx="2">
-            <a:schemeClr val="accent1"/>
-          </a:effectRef>
-          <a:fontRef idx="minor">
-            <a:schemeClr val="lt1"/>
-          </a:fontRef>
-        </p:style>
-        <p:txBody>
-          <a:bodyPr rtlCol="0" anchor="ctr"/>
-          <a:lstStyle/>
-          <a:p>
-            <a:pPr algn="ctr"/>
-          </a:p>
-        </p:txBody>
-      </p:sp>
-      <p:sp>
-        <p:nvSpPr>
-          <p:cNvPr id="10" name="Rectangle 9"/>
-          <p:cNvSpPr/>
-          <p:nvPr/>
-        </p:nvSpPr>
-        <p:spPr>
-          <a:xfrm>
-            <a:off x="502920" y="2267712"/>
-            <a:ext cx="5579211" cy="63500"/>
+            <a:off x="502920" y="1737360"/>
+            <a:ext cx="4389120" cy="31750"/>
           </a:xfrm>
           <a:prstGeom prst="rect">
             <a:avLst/>
@@ -6606,21 +6892,143 @@
       </p:sp>
       <p:sp>
         <p:nvSpPr>
+          <p:cNvPr id="8" name="TextBox 7"/>
+          <p:cNvSpPr txBox="1"/>
+          <p:nvPr/>
+        </p:nvSpPr>
+        <p:spPr>
+          <a:xfrm>
+            <a:off x="502920" y="1810512"/>
+            <a:ext cx="9265615" cy="384048"/>
+          </a:xfrm>
+          <a:prstGeom prst="rect">
+            <a:avLst/>
+          </a:prstGeom>
+          <a:noFill/>
+        </p:spPr>
+        <p:txBody lIns="0" tIns="0" rIns="0" bIns="0">
+          <a:bodyPr wrap="none">
+            <a:spAutoFit/>
+          </a:bodyPr>
+          <a:lstStyle/>
+          <a:p>
+            <a:pPr algn="l"/>
+            <a:r>
+              <a:rPr sz="1300" i="1">
+                <a:solidFill>
+                  <a:srgbClr val="80A8CC"/>
+                </a:solidFill>
+              </a:rPr>
+              <a:t>Solo facturamos cuando recuperamos: nuestros incentivos están alineados con los de nuestro cliente.</a:t>
+            </a:r>
+          </a:p>
+        </p:txBody>
+      </p:sp>
+      <p:sp>
+        <p:nvSpPr>
+          <p:cNvPr id="9" name="Rectangle 8"/>
+          <p:cNvSpPr/>
+          <p:nvPr/>
+        </p:nvSpPr>
+        <p:spPr>
+          <a:xfrm>
+            <a:off x="502920" y="2267712"/>
+            <a:ext cx="5579211" cy="3328416"/>
+          </a:xfrm>
+          <a:prstGeom prst="rect">
+            <a:avLst/>
+          </a:prstGeom>
+          <a:solidFill>
+            <a:srgbClr val="081438"/>
+          </a:solidFill>
+          <a:ln w="12700">
+            <a:solidFill>
+              <a:srgbClr val="2FDFE5"/>
+            </a:solidFill>
+          </a:ln>
+        </p:spPr>
+        <p:style>
+          <a:lnRef idx="1">
+            <a:schemeClr val="accent1"/>
+          </a:lnRef>
+          <a:fillRef idx="3">
+            <a:schemeClr val="accent1"/>
+          </a:fillRef>
+          <a:effectRef idx="2">
+            <a:schemeClr val="accent1"/>
+          </a:effectRef>
+          <a:fontRef idx="minor">
+            <a:schemeClr val="lt1"/>
+          </a:fontRef>
+        </p:style>
+        <p:txBody>
+          <a:bodyPr rtlCol="0" anchor="ctr"/>
+          <a:lstStyle/>
+          <a:p>
+            <a:pPr algn="ctr"/>
+          </a:p>
+        </p:txBody>
+      </p:sp>
+      <p:sp>
+        <p:nvSpPr>
+          <p:cNvPr id="10" name="Rectangle 9"/>
+          <p:cNvSpPr/>
+          <p:nvPr/>
+        </p:nvSpPr>
+        <p:spPr>
+          <a:xfrm>
+            <a:off x="502920" y="2267712"/>
+            <a:ext cx="5579211" cy="63500"/>
+          </a:xfrm>
+          <a:prstGeom prst="rect">
+            <a:avLst/>
+          </a:prstGeom>
+          <a:solidFill>
+            <a:srgbClr val="2FDFE5"/>
+          </a:solidFill>
+          <a:ln>
+            <a:noFill/>
+          </a:ln>
+        </p:spPr>
+        <p:style>
+          <a:lnRef idx="1">
+            <a:schemeClr val="accent1"/>
+          </a:lnRef>
+          <a:fillRef idx="3">
+            <a:schemeClr val="accent1"/>
+          </a:fillRef>
+          <a:effectRef idx="2">
+            <a:schemeClr val="accent1"/>
+          </a:effectRef>
+          <a:fontRef idx="minor">
+            <a:schemeClr val="lt1"/>
+          </a:fontRef>
+        </p:style>
+        <p:txBody>
+          <a:bodyPr rtlCol="0" anchor="ctr"/>
+          <a:lstStyle/>
+          <a:p>
+            <a:pPr algn="ctr"/>
+          </a:p>
+        </p:txBody>
+      </p:sp>
+      <p:sp>
+        <p:nvSpPr>
           <p:cNvPr id="11" name="TextBox 10"/>
           <p:cNvSpPr txBox="1"/>
           <p:nvPr/>
         </p:nvSpPr>
         <p:spPr>
           <a:xfrm>
-            <a:off x="704088" y="2468880"/>
-            <a:ext cx="5176875" cy="621792"/>
+            <a:off x="704088" y="2487168"/>
+            <a:ext cx="5176875" cy="640080"/>
           </a:xfrm>
           <a:prstGeom prst="rect">
             <a:avLst/>
           </a:prstGeom>
           <a:noFill/>
         </p:spPr>
-        <p:txBody lIns="38100" tIns="50800" rIns="38100" bIns="25400">
+        <p:txBody lIns="38100" tIns="63500" rIns="38100" bIns="25400">
           <a:bodyPr wrap="square">
             <a:spAutoFit/>
           </a:bodyPr>
@@ -6628,7 +7036,7 @@
           <a:p>
             <a:pPr algn="l"/>
             <a:r>
-              <a:rPr sz="1800" b="1">
+              <a:rPr sz="1900" b="1">
                 <a:solidFill>
                   <a:srgbClr val="2FDFE5"/>
                 </a:solidFill>
@@ -6636,7 +7044,7 @@
               <a:t>7  </a:t>
             </a:r>
             <a:r>
-              <a:rPr sz="1800" b="1">
+              <a:rPr sz="1900" b="1">
                 <a:solidFill>
                   <a:srgbClr val="FFFFFF"/>
                 </a:solidFill>
@@ -6654,8 +7062,8 @@
         </p:nvSpPr>
         <p:spPr>
           <a:xfrm>
-            <a:off x="667512" y="3182112"/>
-            <a:ext cx="5250027" cy="15240"/>
+            <a:off x="667512" y="3218688"/>
+            <a:ext cx="5250027" cy="19050"/>
           </a:xfrm>
           <a:prstGeom prst="rect">
             <a:avLst/>
@@ -6697,15 +7105,15 @@
         </p:nvSpPr>
         <p:spPr>
           <a:xfrm>
-            <a:off x="667512" y="3283712"/>
-            <a:ext cx="5250027" cy="2685288"/>
+            <a:off x="667512" y="3345688"/>
+            <a:ext cx="5250027" cy="2249424"/>
           </a:xfrm>
           <a:prstGeom prst="rect">
             <a:avLst/>
           </a:prstGeom>
           <a:noFill/>
         </p:spPr>
-        <p:txBody lIns="50800" tIns="38100" rIns="50800" bIns="38100">
+        <p:txBody lIns="50800" tIns="50800" rIns="50800" bIns="50800">
           <a:bodyPr wrap="square">
             <a:spAutoFit/>
           </a:bodyPr>
@@ -6713,11 +7121,11 @@
           <a:p>
             <a:pPr algn="l">
               <a:spcBef>
-                <a:spcPts val="500"/>
+                <a:spcPts val="1800"/>
               </a:spcBef>
             </a:pPr>
             <a:r>
-              <a:rPr sz="1300">
+              <a:rPr sz="1400">
                 <a:solidFill>
                   <a:srgbClr val="2FDFE5"/>
                 </a:solidFill>
@@ -6725,7 +7133,7 @@
               <a:t>▸  </a:t>
             </a:r>
             <a:r>
-              <a:rPr sz="1400">
+              <a:rPr sz="1700">
                 <a:solidFill>
                   <a:srgbClr val="D8EAFF"/>
                 </a:solidFill>
@@ -6736,11 +7144,11 @@
           <a:p>
             <a:pPr algn="l">
               <a:spcBef>
-                <a:spcPts val="500"/>
+                <a:spcPts val="1800"/>
               </a:spcBef>
             </a:pPr>
             <a:r>
-              <a:rPr sz="1300">
+              <a:rPr sz="1400">
                 <a:solidFill>
                   <a:srgbClr val="2FDFE5"/>
                 </a:solidFill>
@@ -6748,7 +7156,7 @@
               <a:t>▸  </a:t>
             </a:r>
             <a:r>
-              <a:rPr sz="1400">
+              <a:rPr sz="1700">
                 <a:solidFill>
                   <a:srgbClr val="D8EAFF"/>
                 </a:solidFill>
@@ -6759,11 +7167,11 @@
           <a:p>
             <a:pPr algn="l">
               <a:spcBef>
-                <a:spcPts val="500"/>
+                <a:spcPts val="1800"/>
               </a:spcBef>
             </a:pPr>
             <a:r>
-              <a:rPr sz="1300">
+              <a:rPr sz="1400">
                 <a:solidFill>
                   <a:srgbClr val="2FDFE5"/>
                 </a:solidFill>
@@ -6771,7 +7179,7 @@
               <a:t>▸  </a:t>
             </a:r>
             <a:r>
-              <a:rPr sz="1400">
+              <a:rPr sz="1700">
                 <a:solidFill>
                   <a:srgbClr val="D8EAFF"/>
                 </a:solidFill>
@@ -6790,7 +7198,7 @@
         <p:spPr>
           <a:xfrm>
             <a:off x="6283299" y="2267712"/>
-            <a:ext cx="5579211" cy="3785616"/>
+            <a:ext cx="5579211" cy="3328416"/>
           </a:xfrm>
           <a:prstGeom prst="rect">
             <a:avLst/>
@@ -6798,7 +7206,7 @@
           <a:solidFill>
             <a:srgbClr val="081438"/>
           </a:solidFill>
-          <a:ln w="10160">
+          <a:ln w="12700">
             <a:solidFill>
               <a:srgbClr val="2FDFE5"/>
             </a:solidFill>
@@ -6877,15 +7285,15 @@
         </p:nvSpPr>
         <p:spPr>
           <a:xfrm>
-            <a:off x="6484467" y="2468880"/>
-            <a:ext cx="5176875" cy="621792"/>
+            <a:off x="6484467" y="2487168"/>
+            <a:ext cx="5176875" cy="640080"/>
           </a:xfrm>
           <a:prstGeom prst="rect">
             <a:avLst/>
           </a:prstGeom>
           <a:noFill/>
         </p:spPr>
-        <p:txBody lIns="38100" tIns="50800" rIns="38100" bIns="25400">
+        <p:txBody lIns="38100" tIns="63500" rIns="38100" bIns="25400">
           <a:bodyPr wrap="square">
             <a:spAutoFit/>
           </a:bodyPr>
@@ -6893,7 +7301,7 @@
           <a:p>
             <a:pPr algn="l"/>
             <a:r>
-              <a:rPr sz="1800" b="1">
+              <a:rPr sz="1900" b="1">
                 <a:solidFill>
                   <a:srgbClr val="2FDFE5"/>
                 </a:solidFill>
@@ -6901,7 +7309,7 @@
               <a:t>8  </a:t>
             </a:r>
             <a:r>
-              <a:rPr sz="1800" b="1">
+              <a:rPr sz="1900" b="1">
                 <a:solidFill>
                   <a:srgbClr val="FFFFFF"/>
                 </a:solidFill>
@@ -6919,8 +7327,8 @@
         </p:nvSpPr>
         <p:spPr>
           <a:xfrm>
-            <a:off x="6447891" y="3182112"/>
-            <a:ext cx="5250027" cy="15240"/>
+            <a:off x="6447891" y="3218688"/>
+            <a:ext cx="5250027" cy="19050"/>
           </a:xfrm>
           <a:prstGeom prst="rect">
             <a:avLst/>
@@ -6962,15 +7370,15 @@
         </p:nvSpPr>
         <p:spPr>
           <a:xfrm>
-            <a:off x="6447891" y="3283712"/>
-            <a:ext cx="5250027" cy="2685288"/>
+            <a:off x="6447891" y="3345688"/>
+            <a:ext cx="5250027" cy="2249424"/>
           </a:xfrm>
           <a:prstGeom prst="rect">
             <a:avLst/>
           </a:prstGeom>
           <a:noFill/>
         </p:spPr>
-        <p:txBody lIns="50800" tIns="38100" rIns="50800" bIns="38100">
+        <p:txBody lIns="50800" tIns="50800" rIns="50800" bIns="50800">
           <a:bodyPr wrap="square">
             <a:spAutoFit/>
           </a:bodyPr>
@@ -6978,11 +7386,11 @@
           <a:p>
             <a:pPr algn="l">
               <a:spcBef>
-                <a:spcPts val="500"/>
+                <a:spcPts val="1800"/>
               </a:spcBef>
             </a:pPr>
             <a:r>
-              <a:rPr sz="1300">
+              <a:rPr sz="1400">
                 <a:solidFill>
                   <a:srgbClr val="2FDFE5"/>
                 </a:solidFill>
@@ -6990,7 +7398,7 @@
               <a:t>▸  </a:t>
             </a:r>
             <a:r>
-              <a:rPr sz="1400">
+              <a:rPr sz="1700">
                 <a:solidFill>
                   <a:srgbClr val="D8EAFF"/>
                 </a:solidFill>
@@ -7001,11 +7409,11 @@
           <a:p>
             <a:pPr algn="l">
               <a:spcBef>
-                <a:spcPts val="500"/>
+                <a:spcPts val="1800"/>
               </a:spcBef>
             </a:pPr>
             <a:r>
-              <a:rPr sz="1300">
+              <a:rPr sz="1400">
                 <a:solidFill>
                   <a:srgbClr val="2FDFE5"/>
                 </a:solidFill>
@@ -7013,7 +7421,7 @@
               <a:t>▸  </a:t>
             </a:r>
             <a:r>
-              <a:rPr sz="1400">
+              <a:rPr sz="1700">
                 <a:solidFill>
                   <a:srgbClr val="D8EAFF"/>
                 </a:solidFill>
@@ -7024,11 +7432,11 @@
           <a:p>
             <a:pPr algn="l">
               <a:spcBef>
-                <a:spcPts val="500"/>
+                <a:spcPts val="1800"/>
               </a:spcBef>
             </a:pPr>
             <a:r>
-              <a:rPr sz="1300">
+              <a:rPr sz="1400">
                 <a:solidFill>
                   <a:srgbClr val="2FDFE5"/>
                 </a:solidFill>
@@ -7036,7 +7444,7 @@
               <a:t>▸  </a:t>
             </a:r>
             <a:r>
-              <a:rPr sz="1400">
+              <a:rPr sz="1700">
                 <a:solidFill>
                   <a:srgbClr val="D8EAFF"/>
                 </a:solidFill>
@@ -7048,7 +7456,7 @@
       </p:sp>
       <p:pic>
         <p:nvPicPr>
-          <p:cNvPr id="19" name="Picture 18" descr="logo_horiz.png"/>
+          <p:cNvPr id="25" name="Picture 24" descr="logo_horiz.png"/>
           <p:cNvPicPr>
             <a:picLocks noChangeAspect="1"/>
           </p:cNvPicPr>
@@ -7097,7 +7505,7 @@
                             <p:childTnLst>
                               <p:animEffect transition="in" filter="wipe(up)">
                                 <p:cBhvr>
-                                  <p:cTn id="6" dur="450" fill="hold"/>
+                                  <p:cTn id="6" dur="380" fill="hold"/>
                                   <p:tgtEl>
                                     <p:spTgt spid="9"/>
                                   </p:tgtEl>
@@ -7109,14 +7517,150 @@
                         <p:par>
                           <p:cTn id="7" fill="hold">
                             <p:stCondLst>
+                              <p:cond delay="0"/>
+                            </p:stCondLst>
+                            <p:childTnLst>
+                              <p:animEffect transition="in" filter="wipe(up)">
+                                <p:cBhvr>
+                                  <p:cTn id="8" dur="380" fill="hold"/>
+                                  <p:tgtEl>
+                                    <p:spTgt spid="10"/>
+                                  </p:tgtEl>
+                                </p:cBhvr>
+                              </p:animEffect>
+                            </p:childTnLst>
+                          </p:cTn>
+                        </p:par>
+                        <p:par>
+                          <p:cTn id="9" fill="hold">
+                            <p:stCondLst>
+                              <p:cond delay="0"/>
+                            </p:stCondLst>
+                            <p:childTnLst>
+                              <p:animEffect transition="in" filter="wipe(up)">
+                                <p:cBhvr>
+                                  <p:cTn id="10" dur="380" fill="hold"/>
+                                  <p:tgtEl>
+                                    <p:spTgt spid="11"/>
+                                  </p:tgtEl>
+                                </p:cBhvr>
+                              </p:animEffect>
+                            </p:childTnLst>
+                          </p:cTn>
+                        </p:par>
+                        <p:par>
+                          <p:cTn id="11" fill="hold">
+                            <p:stCondLst>
+                              <p:cond delay="0"/>
+                            </p:stCondLst>
+                            <p:childTnLst>
+                              <p:animEffect transition="in" filter="wipe(up)">
+                                <p:cBhvr>
+                                  <p:cTn id="12" dur="380" fill="hold"/>
+                                  <p:tgtEl>
+                                    <p:spTgt spid="12"/>
+                                  </p:tgtEl>
+                                </p:cBhvr>
+                              </p:animEffect>
+                            </p:childTnLst>
+                          </p:cTn>
+                        </p:par>
+                        <p:par>
+                          <p:cTn id="13" fill="hold">
+                            <p:stCondLst>
+                              <p:cond delay="0"/>
+                            </p:stCondLst>
+                            <p:childTnLst>
+                              <p:animEffect transition="in" filter="wipe(up)">
+                                <p:cBhvr>
+                                  <p:cTn id="14" dur="380" fill="hold"/>
+                                  <p:tgtEl>
+                                    <p:spTgt spid="13"/>
+                                  </p:tgtEl>
+                                </p:cBhvr>
+                              </p:animEffect>
+                            </p:childTnLst>
+                          </p:cTn>
+                        </p:par>
+                        <p:par>
+                          <p:cTn id="15" fill="hold">
+                            <p:stCondLst>
                               <p:cond delay="160"/>
                             </p:stCondLst>
                             <p:childTnLst>
                               <p:animEffect transition="in" filter="wipe(up)">
                                 <p:cBhvr>
-                                  <p:cTn id="8" dur="450" fill="hold"/>
+                                  <p:cTn id="16" dur="380" fill="hold"/>
                                   <p:tgtEl>
                                     <p:spTgt spid="14"/>
+                                  </p:tgtEl>
+                                </p:cBhvr>
+                              </p:animEffect>
+                            </p:childTnLst>
+                          </p:cTn>
+                        </p:par>
+                        <p:par>
+                          <p:cTn id="17" fill="hold">
+                            <p:stCondLst>
+                              <p:cond delay="160"/>
+                            </p:stCondLst>
+                            <p:childTnLst>
+                              <p:animEffect transition="in" filter="wipe(up)">
+                                <p:cBhvr>
+                                  <p:cTn id="18" dur="380" fill="hold"/>
+                                  <p:tgtEl>
+                                    <p:spTgt spid="15"/>
+                                  </p:tgtEl>
+                                </p:cBhvr>
+                              </p:animEffect>
+                            </p:childTnLst>
+                          </p:cTn>
+                        </p:par>
+                        <p:par>
+                          <p:cTn id="19" fill="hold">
+                            <p:stCondLst>
+                              <p:cond delay="160"/>
+                            </p:stCondLst>
+                            <p:childTnLst>
+                              <p:animEffect transition="in" filter="wipe(up)">
+                                <p:cBhvr>
+                                  <p:cTn id="20" dur="380" fill="hold"/>
+                                  <p:tgtEl>
+                                    <p:spTgt spid="16"/>
+                                  </p:tgtEl>
+                                </p:cBhvr>
+                              </p:animEffect>
+                            </p:childTnLst>
+                          </p:cTn>
+                        </p:par>
+                        <p:par>
+                          <p:cTn id="21" fill="hold">
+                            <p:stCondLst>
+                              <p:cond delay="160"/>
+                            </p:stCondLst>
+                            <p:childTnLst>
+                              <p:animEffect transition="in" filter="wipe(up)">
+                                <p:cBhvr>
+                                  <p:cTn id="22" dur="380" fill="hold"/>
+                                  <p:tgtEl>
+                                    <p:spTgt spid="17"/>
+                                  </p:tgtEl>
+                                </p:cBhvr>
+                              </p:animEffect>
+                            </p:childTnLst>
+                          </p:cTn>
+                        </p:par>
+                        <p:par>
+                          <p:cTn id="23" fill="hold">
+                            <p:stCondLst>
+                              <p:cond delay="160"/>
+                            </p:stCondLst>
+                            <p:childTnLst>
+                              <p:animEffect transition="in" filter="wipe(up)">
+                                <p:cBhvr>
+                                  <p:cTn id="24" dur="380" fill="hold"/>
+                                  <p:tgtEl>
+                                    <p:spTgt spid="18"/>
                                   </p:tgtEl>
                                 </p:cBhvr>
                               </p:animEffect>
@@ -7275,100 +7819,7 @@
         <p:spPr>
           <a:xfrm>
             <a:off x="502920" y="365760"/>
-            <a:ext cx="1463040" cy="274320"/>
-          </a:xfrm>
-          <a:prstGeom prst="rect">
-            <a:avLst/>
-          </a:prstGeom>
-          <a:noFill/>
-          <a:ln w="15240">
-            <a:solidFill>
-              <a:srgbClr val="2FDFE5"/>
-            </a:solidFill>
-          </a:ln>
-        </p:spPr>
-        <p:style>
-          <a:lnRef idx="1">
-            <a:schemeClr val="accent1"/>
-          </a:lnRef>
-          <a:fillRef idx="3">
-            <a:schemeClr val="accent1"/>
-          </a:fillRef>
-          <a:effectRef idx="2">
-            <a:schemeClr val="accent1"/>
-          </a:effectRef>
-          <a:fontRef idx="minor">
-            <a:schemeClr val="lt1"/>
-          </a:fontRef>
-        </p:style>
-        <p:txBody lIns="76200" tIns="12700" rIns="76200" bIns="12700">
-          <a:bodyPr rtlCol="0" anchor="ctr" wrap="none"/>
-          <a:lstStyle/>
-          <a:p>
-            <a:pPr algn="ctr"/>
-            <a:r>
-              <a:rPr sz="800" b="1">
-                <a:solidFill>
-                  <a:srgbClr val="2FDFE5"/>
-                </a:solidFill>
-              </a:rPr>
-              <a:t>FASE 5</a:t>
-            </a:r>
-          </a:p>
-        </p:txBody>
-      </p:sp>
-      <p:sp>
-        <p:nvSpPr>
-          <p:cNvPr id="6" name="TextBox 5"/>
-          <p:cNvSpPr txBox="1"/>
-          <p:nvPr/>
-        </p:nvSpPr>
-        <p:spPr>
-          <a:xfrm>
-            <a:off x="502920" y="731520"/>
-            <a:ext cx="8961120" cy="960120"/>
-          </a:xfrm>
-          <a:prstGeom prst="rect">
-            <a:avLst/>
-          </a:prstGeom>
-          <a:noFill/>
-        </p:spPr>
-        <p:txBody lIns="0" tIns="0" rIns="0" bIns="0">
-          <a:bodyPr wrap="square">
-            <a:spAutoFit/>
-          </a:bodyPr>
-          <a:lstStyle/>
-          <a:p>
-            <a:pPr algn="l"/>
-            <a:r>
-              <a:rPr sz="4000" b="1">
-                <a:solidFill>
-                  <a:srgbClr val="FFFFFF"/>
-                </a:solidFill>
-              </a:rPr>
-              <a:t>Servicios </a:t>
-            </a:r>
-            <a:r>
-              <a:rPr sz="4000" b="1">
-                <a:solidFill>
-                  <a:srgbClr val="2FDFE5"/>
-                </a:solidFill>
-              </a:rPr>
-              <a:t>adicionales</a:t>
-            </a:r>
-          </a:p>
-        </p:txBody>
-      </p:sp>
-      <p:sp>
-        <p:nvSpPr>
-          <p:cNvPr id="7" name="Rectangle 6"/>
-          <p:cNvSpPr/>
-          <p:nvPr/>
-        </p:nvSpPr>
-        <p:spPr>
-          <a:xfrm>
-            <a:off x="502920" y="1737360"/>
-            <a:ext cx="4389120" cy="31750"/>
+            <a:ext cx="1737360" cy="301752"/>
           </a:xfrm>
           <a:prstGeom prst="rect">
             <a:avLst/>
@@ -7394,69 +7845,74 @@
             <a:schemeClr val="lt1"/>
           </a:fontRef>
         </p:style>
-        <p:txBody>
-          <a:bodyPr rtlCol="0" anchor="ctr"/>
+        <p:txBody lIns="101600" tIns="25400" rIns="101600" bIns="25400">
+          <a:bodyPr rtlCol="0" anchor="ctr" wrap="none"/>
           <a:lstStyle/>
           <a:p>
             <a:pPr algn="ctr"/>
-          </a:p>
-        </p:txBody>
-      </p:sp>
-      <p:sp>
-        <p:nvSpPr>
-          <p:cNvPr id="8" name="Rectangle 7"/>
+            <a:r>
+              <a:rPr sz="1100" b="1">
+                <a:solidFill>
+                  <a:srgbClr val="0A1638"/>
+                </a:solidFill>
+              </a:rPr>
+              <a:t>FASE 5</a:t>
+            </a:r>
+          </a:p>
+        </p:txBody>
+      </p:sp>
+      <p:sp>
+        <p:nvSpPr>
+          <p:cNvPr id="6" name="TextBox 5"/>
+          <p:cNvSpPr txBox="1"/>
+          <p:nvPr/>
+        </p:nvSpPr>
+        <p:spPr>
+          <a:xfrm>
+            <a:off x="502920" y="731520"/>
+            <a:ext cx="8961120" cy="960120"/>
+          </a:xfrm>
+          <a:prstGeom prst="rect">
+            <a:avLst/>
+          </a:prstGeom>
+          <a:noFill/>
+        </p:spPr>
+        <p:txBody lIns="0" tIns="0" rIns="0" bIns="0">
+          <a:bodyPr wrap="square">
+            <a:spAutoFit/>
+          </a:bodyPr>
+          <a:lstStyle/>
+          <a:p>
+            <a:pPr algn="l"/>
+            <a:r>
+              <a:rPr sz="4000" b="1">
+                <a:solidFill>
+                  <a:srgbClr val="FFFFFF"/>
+                </a:solidFill>
+              </a:rPr>
+              <a:t>Servicios </a:t>
+            </a:r>
+            <a:r>
+              <a:rPr sz="4000" b="1">
+                <a:solidFill>
+                  <a:srgbClr val="2FDFE5"/>
+                </a:solidFill>
+              </a:rPr>
+              <a:t>adicionales</a:t>
+            </a:r>
+          </a:p>
+        </p:txBody>
+      </p:sp>
+      <p:sp>
+        <p:nvSpPr>
+          <p:cNvPr id="7" name="Rectangle 6"/>
           <p:cNvSpPr/>
           <p:nvPr/>
         </p:nvSpPr>
         <p:spPr>
           <a:xfrm>
-            <a:off x="502920" y="1920240"/>
-            <a:ext cx="5579211" cy="1993392"/>
-          </a:xfrm>
-          <a:prstGeom prst="rect">
-            <a:avLst/>
-          </a:prstGeom>
-          <a:solidFill>
-            <a:srgbClr val="081438"/>
-          </a:solidFill>
-          <a:ln w="10160">
-            <a:solidFill>
-              <a:srgbClr val="2FDFE5"/>
-            </a:solidFill>
-          </a:ln>
-        </p:spPr>
-        <p:style>
-          <a:lnRef idx="1">
-            <a:schemeClr val="accent1"/>
-          </a:lnRef>
-          <a:fillRef idx="3">
-            <a:schemeClr val="accent1"/>
-          </a:fillRef>
-          <a:effectRef idx="2">
-            <a:schemeClr val="accent1"/>
-          </a:effectRef>
-          <a:fontRef idx="minor">
-            <a:schemeClr val="lt1"/>
-          </a:fontRef>
-        </p:style>
-        <p:txBody>
-          <a:bodyPr rtlCol="0" anchor="ctr"/>
-          <a:lstStyle/>
-          <a:p>
-            <a:pPr algn="ctr"/>
-          </a:p>
-        </p:txBody>
-      </p:sp>
-      <p:sp>
-        <p:nvSpPr>
-          <p:cNvPr id="9" name="Rectangle 8"/>
-          <p:cNvSpPr/>
-          <p:nvPr/>
-        </p:nvSpPr>
-        <p:spPr>
-          <a:xfrm>
-            <a:off x="502920" y="1920240"/>
-            <a:ext cx="5579211" cy="63500"/>
+            <a:off x="502920" y="1737360"/>
+            <a:ext cx="4389120" cy="31750"/>
           </a:xfrm>
           <a:prstGeom prst="rect">
             <a:avLst/>
@@ -7492,21 +7948,109 @@
       </p:sp>
       <p:sp>
         <p:nvSpPr>
+          <p:cNvPr id="8" name="Rectangle 7"/>
+          <p:cNvSpPr/>
+          <p:nvPr/>
+        </p:nvSpPr>
+        <p:spPr>
+          <a:xfrm>
+            <a:off x="502920" y="1920240"/>
+            <a:ext cx="5579211" cy="1993392"/>
+          </a:xfrm>
+          <a:prstGeom prst="rect">
+            <a:avLst/>
+          </a:prstGeom>
+          <a:solidFill>
+            <a:srgbClr val="081438"/>
+          </a:solidFill>
+          <a:ln w="12700">
+            <a:solidFill>
+              <a:srgbClr val="2FDFE5"/>
+            </a:solidFill>
+          </a:ln>
+        </p:spPr>
+        <p:style>
+          <a:lnRef idx="1">
+            <a:schemeClr val="accent1"/>
+          </a:lnRef>
+          <a:fillRef idx="3">
+            <a:schemeClr val="accent1"/>
+          </a:fillRef>
+          <a:effectRef idx="2">
+            <a:schemeClr val="accent1"/>
+          </a:effectRef>
+          <a:fontRef idx="minor">
+            <a:schemeClr val="lt1"/>
+          </a:fontRef>
+        </p:style>
+        <p:txBody>
+          <a:bodyPr rtlCol="0" anchor="ctr"/>
+          <a:lstStyle/>
+          <a:p>
+            <a:pPr algn="ctr"/>
+          </a:p>
+        </p:txBody>
+      </p:sp>
+      <p:sp>
+        <p:nvSpPr>
+          <p:cNvPr id="9" name="Rectangle 8"/>
+          <p:cNvSpPr/>
+          <p:nvPr/>
+        </p:nvSpPr>
+        <p:spPr>
+          <a:xfrm>
+            <a:off x="502920" y="1920240"/>
+            <a:ext cx="5579211" cy="63500"/>
+          </a:xfrm>
+          <a:prstGeom prst="rect">
+            <a:avLst/>
+          </a:prstGeom>
+          <a:solidFill>
+            <a:srgbClr val="2FDFE5"/>
+          </a:solidFill>
+          <a:ln>
+            <a:noFill/>
+          </a:ln>
+        </p:spPr>
+        <p:style>
+          <a:lnRef idx="1">
+            <a:schemeClr val="accent1"/>
+          </a:lnRef>
+          <a:fillRef idx="3">
+            <a:schemeClr val="accent1"/>
+          </a:fillRef>
+          <a:effectRef idx="2">
+            <a:schemeClr val="accent1"/>
+          </a:effectRef>
+          <a:fontRef idx="minor">
+            <a:schemeClr val="lt1"/>
+          </a:fontRef>
+        </p:style>
+        <p:txBody>
+          <a:bodyPr rtlCol="0" anchor="ctr"/>
+          <a:lstStyle/>
+          <a:p>
+            <a:pPr algn="ctr"/>
+          </a:p>
+        </p:txBody>
+      </p:sp>
+      <p:sp>
+        <p:nvSpPr>
           <p:cNvPr id="10" name="TextBox 9"/>
           <p:cNvSpPr txBox="1"/>
           <p:nvPr/>
         </p:nvSpPr>
         <p:spPr>
           <a:xfrm>
-            <a:off x="685800" y="2084832"/>
-            <a:ext cx="5213451" cy="548640"/>
+            <a:off x="685800" y="2103120"/>
+            <a:ext cx="5213451" cy="585216"/>
           </a:xfrm>
           <a:prstGeom prst="rect">
             <a:avLst/>
           </a:prstGeom>
           <a:noFill/>
         </p:spPr>
-        <p:txBody lIns="38100" tIns="50800" rIns="38100" bIns="25400">
+        <p:txBody lIns="38100" tIns="63500" rIns="38100" bIns="25400">
           <a:bodyPr wrap="square">
             <a:spAutoFit/>
           </a:bodyPr>
@@ -7540,8 +8084,8 @@
         </p:nvSpPr>
         <p:spPr>
           <a:xfrm>
-            <a:off x="649224" y="2724912"/>
-            <a:ext cx="5286603" cy="12700"/>
+            <a:off x="649224" y="2779776"/>
+            <a:ext cx="5286603" cy="19050"/>
           </a:xfrm>
           <a:prstGeom prst="rect">
             <a:avLst/>
@@ -7583,15 +8127,15 @@
         </p:nvSpPr>
         <p:spPr>
           <a:xfrm>
-            <a:off x="649224" y="2813812"/>
-            <a:ext cx="5286603" cy="1033780"/>
+            <a:off x="649224" y="2881376"/>
+            <a:ext cx="5286603" cy="1005840"/>
           </a:xfrm>
           <a:prstGeom prst="rect">
             <a:avLst/>
           </a:prstGeom>
           <a:noFill/>
         </p:spPr>
-        <p:txBody lIns="50800" tIns="25400" rIns="50800" bIns="25400">
+        <p:txBody lIns="50800" tIns="50800" rIns="50800" bIns="50800">
           <a:bodyPr wrap="square">
             <a:spAutoFit/>
           </a:bodyPr>
@@ -7599,7 +8143,7 @@
           <a:p>
             <a:pPr algn="l"/>
             <a:r>
-              <a:rPr sz="1400">
+              <a:rPr sz="1500">
                 <a:solidFill>
                   <a:srgbClr val="D8EAFF"/>
                 </a:solidFill>
@@ -7626,7 +8170,7 @@
           <a:solidFill>
             <a:srgbClr val="081438"/>
           </a:solidFill>
-          <a:ln w="10160">
+          <a:ln w="12700">
             <a:solidFill>
               <a:srgbClr val="2FDFE5"/>
             </a:solidFill>
@@ -7705,15 +8249,15 @@
         </p:nvSpPr>
         <p:spPr>
           <a:xfrm>
-            <a:off x="6466179" y="2084832"/>
-            <a:ext cx="5213451" cy="548640"/>
+            <a:off x="6466179" y="2103120"/>
+            <a:ext cx="5213451" cy="585216"/>
           </a:xfrm>
           <a:prstGeom prst="rect">
             <a:avLst/>
           </a:prstGeom>
           <a:noFill/>
         </p:spPr>
-        <p:txBody lIns="38100" tIns="50800" rIns="38100" bIns="25400">
+        <p:txBody lIns="38100" tIns="63500" rIns="38100" bIns="25400">
           <a:bodyPr wrap="square">
             <a:spAutoFit/>
           </a:bodyPr>
@@ -7747,8 +8291,8 @@
         </p:nvSpPr>
         <p:spPr>
           <a:xfrm>
-            <a:off x="6429603" y="2724912"/>
-            <a:ext cx="5286603" cy="12700"/>
+            <a:off x="6429603" y="2779776"/>
+            <a:ext cx="5286603" cy="19050"/>
           </a:xfrm>
           <a:prstGeom prst="rect">
             <a:avLst/>
@@ -7790,15 +8334,15 @@
         </p:nvSpPr>
         <p:spPr>
           <a:xfrm>
-            <a:off x="6429603" y="2813812"/>
-            <a:ext cx="5286603" cy="1033780"/>
+            <a:off x="6429603" y="2881376"/>
+            <a:ext cx="5286603" cy="1005840"/>
           </a:xfrm>
           <a:prstGeom prst="rect">
             <a:avLst/>
           </a:prstGeom>
           <a:noFill/>
         </p:spPr>
-        <p:txBody lIns="50800" tIns="25400" rIns="50800" bIns="25400">
+        <p:txBody lIns="50800" tIns="50800" rIns="50800" bIns="50800">
           <a:bodyPr wrap="square">
             <a:spAutoFit/>
           </a:bodyPr>
@@ -7806,7 +8350,7 @@
           <a:p>
             <a:pPr algn="l"/>
             <a:r>
-              <a:rPr sz="1400">
+              <a:rPr sz="1500">
                 <a:solidFill>
                   <a:srgbClr val="D8EAFF"/>
                 </a:solidFill>
@@ -7833,7 +8377,7 @@
           <a:solidFill>
             <a:srgbClr val="081438"/>
           </a:solidFill>
-          <a:ln w="10160">
+          <a:ln w="12700">
             <a:solidFill>
               <a:srgbClr val="2FDFE5"/>
             </a:solidFill>
@@ -7912,15 +8456,15 @@
         </p:nvSpPr>
         <p:spPr>
           <a:xfrm>
-            <a:off x="685800" y="4224528"/>
-            <a:ext cx="5213451" cy="548640"/>
+            <a:off x="685800" y="4242816"/>
+            <a:ext cx="5213451" cy="585216"/>
           </a:xfrm>
           <a:prstGeom prst="rect">
             <a:avLst/>
           </a:prstGeom>
           <a:noFill/>
         </p:spPr>
-        <p:txBody lIns="38100" tIns="50800" rIns="38100" bIns="25400">
+        <p:txBody lIns="38100" tIns="63500" rIns="38100" bIns="25400">
           <a:bodyPr wrap="square">
             <a:spAutoFit/>
           </a:bodyPr>
@@ -7954,8 +8498,8 @@
         </p:nvSpPr>
         <p:spPr>
           <a:xfrm>
-            <a:off x="649224" y="4864608"/>
-            <a:ext cx="5286603" cy="12700"/>
+            <a:off x="649224" y="4919472"/>
+            <a:ext cx="5286603" cy="19050"/>
           </a:xfrm>
           <a:prstGeom prst="rect">
             <a:avLst/>
@@ -7997,15 +8541,15 @@
         </p:nvSpPr>
         <p:spPr>
           <a:xfrm>
-            <a:off x="649224" y="4953508"/>
-            <a:ext cx="5286603" cy="1033780"/>
+            <a:off x="649224" y="5021072"/>
+            <a:ext cx="5286603" cy="1005840"/>
           </a:xfrm>
           <a:prstGeom prst="rect">
             <a:avLst/>
           </a:prstGeom>
           <a:noFill/>
         </p:spPr>
-        <p:txBody lIns="50800" tIns="25400" rIns="50800" bIns="25400">
+        <p:txBody lIns="50800" tIns="50800" rIns="50800" bIns="50800">
           <a:bodyPr wrap="square">
             <a:spAutoFit/>
           </a:bodyPr>
@@ -8013,7 +8557,7 @@
           <a:p>
             <a:pPr algn="l"/>
             <a:r>
-              <a:rPr sz="1400">
+              <a:rPr sz="1500">
                 <a:solidFill>
                   <a:srgbClr val="D8EAFF"/>
                 </a:solidFill>
@@ -8040,7 +8584,7 @@
           <a:solidFill>
             <a:srgbClr val="081438"/>
           </a:solidFill>
-          <a:ln w="10160">
+          <a:ln w="12700">
             <a:solidFill>
               <a:srgbClr val="2FDFE5"/>
             </a:solidFill>
@@ -8119,15 +8663,15 @@
         </p:nvSpPr>
         <p:spPr>
           <a:xfrm>
-            <a:off x="6466179" y="4224528"/>
-            <a:ext cx="5213451" cy="548640"/>
+            <a:off x="6466179" y="4242816"/>
+            <a:ext cx="5213451" cy="585216"/>
           </a:xfrm>
           <a:prstGeom prst="rect">
             <a:avLst/>
           </a:prstGeom>
           <a:noFill/>
         </p:spPr>
-        <p:txBody lIns="38100" tIns="50800" rIns="38100" bIns="25400">
+        <p:txBody lIns="38100" tIns="63500" rIns="38100" bIns="25400">
           <a:bodyPr wrap="square">
             <a:spAutoFit/>
           </a:bodyPr>
@@ -8161,8 +8705,8 @@
         </p:nvSpPr>
         <p:spPr>
           <a:xfrm>
-            <a:off x="6429603" y="4864608"/>
-            <a:ext cx="5286603" cy="12700"/>
+            <a:off x="6429603" y="4919472"/>
+            <a:ext cx="5286603" cy="19050"/>
           </a:xfrm>
           <a:prstGeom prst="rect">
             <a:avLst/>
@@ -8204,15 +8748,15 @@
         </p:nvSpPr>
         <p:spPr>
           <a:xfrm>
-            <a:off x="6429603" y="4953508"/>
-            <a:ext cx="5286603" cy="1033780"/>
+            <a:off x="6429603" y="5021072"/>
+            <a:ext cx="5286603" cy="1005840"/>
           </a:xfrm>
           <a:prstGeom prst="rect">
             <a:avLst/>
           </a:prstGeom>
           <a:noFill/>
         </p:spPr>
-        <p:txBody lIns="50800" tIns="25400" rIns="50800" bIns="25400">
+        <p:txBody lIns="50800" tIns="50800" rIns="50800" bIns="50800">
           <a:bodyPr wrap="square">
             <a:spAutoFit/>
           </a:bodyPr>
@@ -8220,7 +8764,7 @@
           <a:p>
             <a:pPr algn="l"/>
             <a:r>
-              <a:rPr sz="1400">
+              <a:rPr sz="1500">
                 <a:solidFill>
                   <a:srgbClr val="D8EAFF"/>
                 </a:solidFill>
@@ -8232,7 +8776,7 @@
       </p:sp>
       <p:pic>
         <p:nvPicPr>
-          <p:cNvPr id="28" name="Picture 27" descr="logo_horiz.png"/>
+          <p:cNvPr id="45" name="Picture 44" descr="logo_horiz.png"/>
           <p:cNvPicPr>
             <a:picLocks noChangeAspect="1"/>
           </p:cNvPicPr>
@@ -8281,7 +8825,7 @@
                             <p:childTnLst>
                               <p:animEffect transition="in" filter="wipe(up)">
                                 <p:cBhvr>
-                                  <p:cTn id="6" dur="450" fill="hold"/>
+                                  <p:cTn id="6" dur="380" fill="hold"/>
                                   <p:tgtEl>
                                     <p:spTgt spid="8"/>
                                   </p:tgtEl>
@@ -8293,12 +8837,80 @@
                         <p:par>
                           <p:cTn id="7" fill="hold">
                             <p:stCondLst>
-                              <p:cond delay="160"/>
+                              <p:cond delay="0"/>
                             </p:stCondLst>
                             <p:childTnLst>
                               <p:animEffect transition="in" filter="wipe(up)">
                                 <p:cBhvr>
-                                  <p:cTn id="8" dur="450" fill="hold"/>
+                                  <p:cTn id="8" dur="380" fill="hold"/>
+                                  <p:tgtEl>
+                                    <p:spTgt spid="9"/>
+                                  </p:tgtEl>
+                                </p:cBhvr>
+                              </p:animEffect>
+                            </p:childTnLst>
+                          </p:cTn>
+                        </p:par>
+                        <p:par>
+                          <p:cTn id="9" fill="hold">
+                            <p:stCondLst>
+                              <p:cond delay="0"/>
+                            </p:stCondLst>
+                            <p:childTnLst>
+                              <p:animEffect transition="in" filter="wipe(up)">
+                                <p:cBhvr>
+                                  <p:cTn id="10" dur="380" fill="hold"/>
+                                  <p:tgtEl>
+                                    <p:spTgt spid="10"/>
+                                  </p:tgtEl>
+                                </p:cBhvr>
+                              </p:animEffect>
+                            </p:childTnLst>
+                          </p:cTn>
+                        </p:par>
+                        <p:par>
+                          <p:cTn id="11" fill="hold">
+                            <p:stCondLst>
+                              <p:cond delay="0"/>
+                            </p:stCondLst>
+                            <p:childTnLst>
+                              <p:animEffect transition="in" filter="wipe(up)">
+                                <p:cBhvr>
+                                  <p:cTn id="12" dur="380" fill="hold"/>
+                                  <p:tgtEl>
+                                    <p:spTgt spid="11"/>
+                                  </p:tgtEl>
+                                </p:cBhvr>
+                              </p:animEffect>
+                            </p:childTnLst>
+                          </p:cTn>
+                        </p:par>
+                        <p:par>
+                          <p:cTn id="13" fill="hold">
+                            <p:stCondLst>
+                              <p:cond delay="0"/>
+                            </p:stCondLst>
+                            <p:childTnLst>
+                              <p:animEffect transition="in" filter="wipe(up)">
+                                <p:cBhvr>
+                                  <p:cTn id="14" dur="380" fill="hold"/>
+                                  <p:tgtEl>
+                                    <p:spTgt spid="12"/>
+                                  </p:tgtEl>
+                                </p:cBhvr>
+                              </p:animEffect>
+                            </p:childTnLst>
+                          </p:cTn>
+                        </p:par>
+                        <p:par>
+                          <p:cTn id="15" fill="hold">
+                            <p:stCondLst>
+                              <p:cond delay="140"/>
+                            </p:stCondLst>
+                            <p:childTnLst>
+                              <p:animEffect transition="in" filter="wipe(up)">
+                                <p:cBhvr>
+                                  <p:cTn id="16" dur="380" fill="hold"/>
                                   <p:tgtEl>
                                     <p:spTgt spid="13"/>
                                   </p:tgtEl>
@@ -8308,14 +8920,82 @@
                           </p:cTn>
                         </p:par>
                         <p:par>
-                          <p:cTn id="9" fill="hold">
+                          <p:cTn id="17" fill="hold">
                             <p:stCondLst>
-                              <p:cond delay="320"/>
+                              <p:cond delay="140"/>
                             </p:stCondLst>
                             <p:childTnLst>
                               <p:animEffect transition="in" filter="wipe(up)">
                                 <p:cBhvr>
-                                  <p:cTn id="10" dur="450" fill="hold"/>
+                                  <p:cTn id="18" dur="380" fill="hold"/>
+                                  <p:tgtEl>
+                                    <p:spTgt spid="14"/>
+                                  </p:tgtEl>
+                                </p:cBhvr>
+                              </p:animEffect>
+                            </p:childTnLst>
+                          </p:cTn>
+                        </p:par>
+                        <p:par>
+                          <p:cTn id="19" fill="hold">
+                            <p:stCondLst>
+                              <p:cond delay="140"/>
+                            </p:stCondLst>
+                            <p:childTnLst>
+                              <p:animEffect transition="in" filter="wipe(up)">
+                                <p:cBhvr>
+                                  <p:cTn id="20" dur="380" fill="hold"/>
+                                  <p:tgtEl>
+                                    <p:spTgt spid="15"/>
+                                  </p:tgtEl>
+                                </p:cBhvr>
+                              </p:animEffect>
+                            </p:childTnLst>
+                          </p:cTn>
+                        </p:par>
+                        <p:par>
+                          <p:cTn id="21" fill="hold">
+                            <p:stCondLst>
+                              <p:cond delay="140"/>
+                            </p:stCondLst>
+                            <p:childTnLst>
+                              <p:animEffect transition="in" filter="wipe(up)">
+                                <p:cBhvr>
+                                  <p:cTn id="22" dur="380" fill="hold"/>
+                                  <p:tgtEl>
+                                    <p:spTgt spid="16"/>
+                                  </p:tgtEl>
+                                </p:cBhvr>
+                              </p:animEffect>
+                            </p:childTnLst>
+                          </p:cTn>
+                        </p:par>
+                        <p:par>
+                          <p:cTn id="23" fill="hold">
+                            <p:stCondLst>
+                              <p:cond delay="140"/>
+                            </p:stCondLst>
+                            <p:childTnLst>
+                              <p:animEffect transition="in" filter="wipe(up)">
+                                <p:cBhvr>
+                                  <p:cTn id="24" dur="380" fill="hold"/>
+                                  <p:tgtEl>
+                                    <p:spTgt spid="17"/>
+                                  </p:tgtEl>
+                                </p:cBhvr>
+                              </p:animEffect>
+                            </p:childTnLst>
+                          </p:cTn>
+                        </p:par>
+                        <p:par>
+                          <p:cTn id="25" fill="hold">
+                            <p:stCondLst>
+                              <p:cond delay="280"/>
+                            </p:stCondLst>
+                            <p:childTnLst>
+                              <p:animEffect transition="in" filter="wipe(up)">
+                                <p:cBhvr>
+                                  <p:cTn id="26" dur="380" fill="hold"/>
                                   <p:tgtEl>
                                     <p:spTgt spid="18"/>
                                   </p:tgtEl>
@@ -8325,16 +9005,152 @@
                           </p:cTn>
                         </p:par>
                         <p:par>
-                          <p:cTn id="11" fill="hold">
+                          <p:cTn id="27" fill="hold">
                             <p:stCondLst>
-                              <p:cond delay="480"/>
+                              <p:cond delay="280"/>
                             </p:stCondLst>
                             <p:childTnLst>
                               <p:animEffect transition="in" filter="wipe(up)">
                                 <p:cBhvr>
-                                  <p:cTn id="12" dur="450" fill="hold"/>
+                                  <p:cTn id="28" dur="380" fill="hold"/>
+                                  <p:tgtEl>
+                                    <p:spTgt spid="19"/>
+                                  </p:tgtEl>
+                                </p:cBhvr>
+                              </p:animEffect>
+                            </p:childTnLst>
+                          </p:cTn>
+                        </p:par>
+                        <p:par>
+                          <p:cTn id="29" fill="hold">
+                            <p:stCondLst>
+                              <p:cond delay="280"/>
+                            </p:stCondLst>
+                            <p:childTnLst>
+                              <p:animEffect transition="in" filter="wipe(up)">
+                                <p:cBhvr>
+                                  <p:cTn id="30" dur="380" fill="hold"/>
+                                  <p:tgtEl>
+                                    <p:spTgt spid="20"/>
+                                  </p:tgtEl>
+                                </p:cBhvr>
+                              </p:animEffect>
+                            </p:childTnLst>
+                          </p:cTn>
+                        </p:par>
+                        <p:par>
+                          <p:cTn id="31" fill="hold">
+                            <p:stCondLst>
+                              <p:cond delay="280"/>
+                            </p:stCondLst>
+                            <p:childTnLst>
+                              <p:animEffect transition="in" filter="wipe(up)">
+                                <p:cBhvr>
+                                  <p:cTn id="32" dur="380" fill="hold"/>
+                                  <p:tgtEl>
+                                    <p:spTgt spid="21"/>
+                                  </p:tgtEl>
+                                </p:cBhvr>
+                              </p:animEffect>
+                            </p:childTnLst>
+                          </p:cTn>
+                        </p:par>
+                        <p:par>
+                          <p:cTn id="33" fill="hold">
+                            <p:stCondLst>
+                              <p:cond delay="280"/>
+                            </p:stCondLst>
+                            <p:childTnLst>
+                              <p:animEffect transition="in" filter="wipe(up)">
+                                <p:cBhvr>
+                                  <p:cTn id="34" dur="380" fill="hold"/>
+                                  <p:tgtEl>
+                                    <p:spTgt spid="22"/>
+                                  </p:tgtEl>
+                                </p:cBhvr>
+                              </p:animEffect>
+                            </p:childTnLst>
+                          </p:cTn>
+                        </p:par>
+                        <p:par>
+                          <p:cTn id="35" fill="hold">
+                            <p:stCondLst>
+                              <p:cond delay="420"/>
+                            </p:stCondLst>
+                            <p:childTnLst>
+                              <p:animEffect transition="in" filter="wipe(up)">
+                                <p:cBhvr>
+                                  <p:cTn id="36" dur="380" fill="hold"/>
                                   <p:tgtEl>
                                     <p:spTgt spid="23"/>
+                                  </p:tgtEl>
+                                </p:cBhvr>
+                              </p:animEffect>
+                            </p:childTnLst>
+                          </p:cTn>
+                        </p:par>
+                        <p:par>
+                          <p:cTn id="37" fill="hold">
+                            <p:stCondLst>
+                              <p:cond delay="420"/>
+                            </p:stCondLst>
+                            <p:childTnLst>
+                              <p:animEffect transition="in" filter="wipe(up)">
+                                <p:cBhvr>
+                                  <p:cTn id="38" dur="380" fill="hold"/>
+                                  <p:tgtEl>
+                                    <p:spTgt spid="24"/>
+                                  </p:tgtEl>
+                                </p:cBhvr>
+                              </p:animEffect>
+                            </p:childTnLst>
+                          </p:cTn>
+                        </p:par>
+                        <p:par>
+                          <p:cTn id="39" fill="hold">
+                            <p:stCondLst>
+                              <p:cond delay="420"/>
+                            </p:stCondLst>
+                            <p:childTnLst>
+                              <p:animEffect transition="in" filter="wipe(up)">
+                                <p:cBhvr>
+                                  <p:cTn id="40" dur="380" fill="hold"/>
+                                  <p:tgtEl>
+                                    <p:spTgt spid="25"/>
+                                  </p:tgtEl>
+                                </p:cBhvr>
+                              </p:animEffect>
+                            </p:childTnLst>
+                          </p:cTn>
+                        </p:par>
+                        <p:par>
+                          <p:cTn id="41" fill="hold">
+                            <p:stCondLst>
+                              <p:cond delay="420"/>
+                            </p:stCondLst>
+                            <p:childTnLst>
+                              <p:animEffect transition="in" filter="wipe(up)">
+                                <p:cBhvr>
+                                  <p:cTn id="42" dur="380" fill="hold"/>
+                                  <p:tgtEl>
+                                    <p:spTgt spid="26"/>
+                                  </p:tgtEl>
+                                </p:cBhvr>
+                              </p:animEffect>
+                            </p:childTnLst>
+                          </p:cTn>
+                        </p:par>
+                        <p:par>
+                          <p:cTn id="43" fill="hold">
+                            <p:stCondLst>
+                              <p:cond delay="420"/>
+                            </p:stCondLst>
+                            <p:childTnLst>
+                              <p:animEffect transition="in" filter="wipe(up)">
+                                <p:cBhvr>
+                                  <p:cTn id="44" dur="380" fill="hold"/>
+                                  <p:tgtEl>
+                                    <p:spTgt spid="27"/>
                                   </p:tgtEl>
                                 </p:cBhvr>
                               </p:animEffect>
@@ -8634,11 +9450,11 @@
           <a:prstGeom prst="rect">
             <a:avLst/>
           </a:prstGeom>
-          <a:noFill/>
-          <a:ln w="15240">
-            <a:solidFill>
-              <a:srgbClr val="2FDFE5"/>
-            </a:solidFill>
+          <a:solidFill>
+            <a:srgbClr val="2FDFE5"/>
+          </a:solidFill>
+          <a:ln>
+            <a:noFill/>
           </a:ln>
         </p:spPr>
         <p:style>
@@ -8655,15 +9471,15 @@
             <a:schemeClr val="lt1"/>
           </a:fontRef>
         </p:style>
-        <p:txBody lIns="76200" tIns="12700" rIns="76200" bIns="12700">
+        <p:txBody lIns="101600" tIns="25400" rIns="101600" bIns="25400">
           <a:bodyPr rtlCol="0" anchor="ctr" wrap="none"/>
           <a:lstStyle/>
           <a:p>
             <a:pPr algn="ctr"/>
             <a:r>
-              <a:rPr sz="800" b="1">
-                <a:solidFill>
-                  <a:srgbClr val="2FDFE5"/>
+              <a:rPr sz="1100" b="1">
+                <a:solidFill>
+                  <a:srgbClr val="0A1638"/>
                 </a:solidFill>
               </a:rPr>
               <a:t>CONTACTO</a:t>

--- a/sendacredit_propuesta.pptx
+++ b/sendacredit_propuesta.pptx
@@ -9216,7 +9216,7 @@
       </p:pic>
       <p:pic>
         <p:nvPicPr>
-          <p:cNvPr id="3" name="Picture 2" descr="building_cropped.jpg"/>
+          <p:cNvPr id="3" name="Picture 2" descr="contact_panel.png"/>
           <p:cNvPicPr>
             <a:picLocks noChangeAspect="1"/>
           </p:cNvPicPr>
@@ -9254,7 +9254,7 @@
           </a:prstGeom>
           <a:solidFill>
             <a:srgbClr val="060E24">
-              <a:alpha val="22000"/>
+              <a:alpha val="8000"/>
             </a:srgbClr>
           </a:solidFill>
           <a:ln>
@@ -9618,7 +9618,7 @@
         <p:spPr>
           <a:xfrm>
             <a:off x="502920" y="3401568"/>
-            <a:ext cx="2157984" cy="1920240"/>
+            <a:ext cx="1965960" cy="1920240"/>
           </a:xfrm>
           <a:prstGeom prst="rect">
             <a:avLst/>
@@ -9663,7 +9663,7 @@
         <p:spPr>
           <a:xfrm>
             <a:off x="502920" y="3401568"/>
-            <a:ext cx="2157984" cy="63500"/>
+            <a:ext cx="1965960" cy="63500"/>
           </a:xfrm>
           <a:prstGeom prst="rect">
             <a:avLst/>
@@ -9706,7 +9706,7 @@
         <p:spPr>
           <a:xfrm>
             <a:off x="630936" y="3557016"/>
-            <a:ext cx="1901952" cy="310896"/>
+            <a:ext cx="1709928" cy="310896"/>
           </a:xfrm>
           <a:prstGeom prst="rect">
             <a:avLst/>
@@ -9740,7 +9740,7 @@
         <p:spPr>
           <a:xfrm>
             <a:off x="630936" y="3904488"/>
-            <a:ext cx="1901952" cy="12700"/>
+            <a:ext cx="1709928" cy="12700"/>
           </a:xfrm>
           <a:prstGeom prst="rect">
             <a:avLst/>
@@ -9783,7 +9783,7 @@
         <p:spPr>
           <a:xfrm>
             <a:off x="630936" y="3980688"/>
-            <a:ext cx="1901952" cy="1234440"/>
+            <a:ext cx="1709928" cy="1234440"/>
           </a:xfrm>
           <a:prstGeom prst="rect">
             <a:avLst/>
@@ -9850,8 +9850,8 @@
         </p:nvSpPr>
         <p:spPr>
           <a:xfrm>
-            <a:off x="2825496" y="3401568"/>
-            <a:ext cx="2157984" cy="1920240"/>
+            <a:off x="2633472" y="3401568"/>
+            <a:ext cx="1965960" cy="1920240"/>
           </a:xfrm>
           <a:prstGeom prst="rect">
             <a:avLst/>
@@ -9895,8 +9895,8 @@
         </p:nvSpPr>
         <p:spPr>
           <a:xfrm>
-            <a:off x="2825496" y="3401568"/>
-            <a:ext cx="2157984" cy="63500"/>
+            <a:off x="2633472" y="3401568"/>
+            <a:ext cx="1965960" cy="63500"/>
           </a:xfrm>
           <a:prstGeom prst="rect">
             <a:avLst/>
@@ -9938,8 +9938,8 @@
         </p:nvSpPr>
         <p:spPr>
           <a:xfrm>
-            <a:off x="2953512" y="3557016"/>
-            <a:ext cx="1901952" cy="310896"/>
+            <a:off x="2761488" y="3557016"/>
+            <a:ext cx="1709928" cy="310896"/>
           </a:xfrm>
           <a:prstGeom prst="rect">
             <a:avLst/>
@@ -9972,8 +9972,8 @@
         </p:nvSpPr>
         <p:spPr>
           <a:xfrm>
-            <a:off x="2953512" y="3904488"/>
-            <a:ext cx="1901952" cy="12700"/>
+            <a:off x="2761488" y="3904488"/>
+            <a:ext cx="1709928" cy="12700"/>
           </a:xfrm>
           <a:prstGeom prst="rect">
             <a:avLst/>
@@ -10015,8 +10015,8 @@
         </p:nvSpPr>
         <p:spPr>
           <a:xfrm>
-            <a:off x="2953512" y="3980688"/>
-            <a:ext cx="1901952" cy="1234440"/>
+            <a:off x="2761488" y="3980688"/>
+            <a:ext cx="1709928" cy="1234440"/>
           </a:xfrm>
           <a:prstGeom prst="rect">
             <a:avLst/>
@@ -10083,8 +10083,8 @@
         </p:nvSpPr>
         <p:spPr>
           <a:xfrm>
-            <a:off x="5148072" y="3401568"/>
-            <a:ext cx="2157984" cy="1920240"/>
+            <a:off x="4764024" y="3401568"/>
+            <a:ext cx="1965960" cy="1920240"/>
           </a:xfrm>
           <a:prstGeom prst="rect">
             <a:avLst/>
@@ -10128,8 +10128,8 @@
         </p:nvSpPr>
         <p:spPr>
           <a:xfrm>
-            <a:off x="5148072" y="3401568"/>
-            <a:ext cx="2157984" cy="63500"/>
+            <a:off x="4764024" y="3401568"/>
+            <a:ext cx="1965960" cy="63500"/>
           </a:xfrm>
           <a:prstGeom prst="rect">
             <a:avLst/>
@@ -10171,8 +10171,8 @@
         </p:nvSpPr>
         <p:spPr>
           <a:xfrm>
-            <a:off x="5276088" y="3557016"/>
-            <a:ext cx="1901952" cy="310896"/>
+            <a:off x="4892040" y="3557016"/>
+            <a:ext cx="1709928" cy="310896"/>
           </a:xfrm>
           <a:prstGeom prst="rect">
             <a:avLst/>
@@ -10205,8 +10205,8 @@
         </p:nvSpPr>
         <p:spPr>
           <a:xfrm>
-            <a:off x="5276088" y="3904488"/>
-            <a:ext cx="1901952" cy="12700"/>
+            <a:off x="4892040" y="3904488"/>
+            <a:ext cx="1709928" cy="12700"/>
           </a:xfrm>
           <a:prstGeom prst="rect">
             <a:avLst/>
@@ -10248,8 +10248,8 @@
         </p:nvSpPr>
         <p:spPr>
           <a:xfrm>
-            <a:off x="5276088" y="3980688"/>
-            <a:ext cx="1901952" cy="1234440"/>
+            <a:off x="4892040" y="3980688"/>
+            <a:ext cx="1709928" cy="1234440"/>
           </a:xfrm>
           <a:prstGeom prst="rect">
             <a:avLst/>

--- a/sendacredit_propuesta.pptx
+++ b/sendacredit_propuesta.pptx
@@ -4286,30 +4286,6 @@
           </a:p>
         </p:txBody>
       </p:sp>
-      <p:pic>
-        <p:nvPicPr>
-          <p:cNvPr id="25" name="Picture 24" descr="logo_horiz.png"/>
-          <p:cNvPicPr>
-            <a:picLocks noChangeAspect="1"/>
-          </p:cNvPicPr>
-          <p:nvPr/>
-        </p:nvPicPr>
-        <p:blipFill>
-          <a:blip r:embed="rId3"/>
-          <a:stretch>
-            <a:fillRect/>
-          </a:stretch>
-        </p:blipFill>
-        <p:spPr>
-          <a:xfrm>
-            <a:off x="10024567" y="6062197"/>
-            <a:ext cx="1965960" cy="631211"/>
-          </a:xfrm>
-          <a:prstGeom prst="rect">
-            <a:avLst/>
-          </a:prstGeom>
-        </p:spPr>
-      </p:pic>
     </p:spTree>
   </p:cSld>
   <p:clrMapOvr>
@@ -5342,30 +5318,6 @@
           </a:p>
         </p:txBody>
       </p:sp>
-      <p:pic>
-        <p:nvPicPr>
-          <p:cNvPr id="25" name="Picture 24" descr="logo_horiz.png"/>
-          <p:cNvPicPr>
-            <a:picLocks noChangeAspect="1"/>
-          </p:cNvPicPr>
-          <p:nvPr/>
-        </p:nvPicPr>
-        <p:blipFill>
-          <a:blip r:embed="rId3"/>
-          <a:stretch>
-            <a:fillRect/>
-          </a:stretch>
-        </p:blipFill>
-        <p:spPr>
-          <a:xfrm>
-            <a:off x="10024567" y="6062197"/>
-            <a:ext cx="1965960" cy="631211"/>
-          </a:xfrm>
-          <a:prstGeom prst="rect">
-            <a:avLst/>
-          </a:prstGeom>
-        </p:spPr>
-      </p:pic>
     </p:spTree>
   </p:cSld>
   <p:clrMapOvr>
@@ -6398,30 +6350,6 @@
           </a:p>
         </p:txBody>
       </p:sp>
-      <p:pic>
-        <p:nvPicPr>
-          <p:cNvPr id="25" name="Picture 24" descr="logo_horiz.png"/>
-          <p:cNvPicPr>
-            <a:picLocks noChangeAspect="1"/>
-          </p:cNvPicPr>
-          <p:nvPr/>
-        </p:nvPicPr>
-        <p:blipFill>
-          <a:blip r:embed="rId3"/>
-          <a:stretch>
-            <a:fillRect/>
-          </a:stretch>
-        </p:blipFill>
-        <p:spPr>
-          <a:xfrm>
-            <a:off x="10024567" y="6062197"/>
-            <a:ext cx="1965960" cy="631211"/>
-          </a:xfrm>
-          <a:prstGeom prst="rect">
-            <a:avLst/>
-          </a:prstGeom>
-        </p:spPr>
-      </p:pic>
     </p:spTree>
   </p:cSld>
   <p:clrMapOvr>
@@ -7454,30 +7382,6 @@
           </a:p>
         </p:txBody>
       </p:sp>
-      <p:pic>
-        <p:nvPicPr>
-          <p:cNvPr id="25" name="Picture 24" descr="logo_horiz.png"/>
-          <p:cNvPicPr>
-            <a:picLocks noChangeAspect="1"/>
-          </p:cNvPicPr>
-          <p:nvPr/>
-        </p:nvPicPr>
-        <p:blipFill>
-          <a:blip r:embed="rId3"/>
-          <a:stretch>
-            <a:fillRect/>
-          </a:stretch>
-        </p:blipFill>
-        <p:spPr>
-          <a:xfrm>
-            <a:off x="10024567" y="6062197"/>
-            <a:ext cx="1965960" cy="631211"/>
-          </a:xfrm>
-          <a:prstGeom prst="rect">
-            <a:avLst/>
-          </a:prstGeom>
-        </p:spPr>
-      </p:pic>
     </p:spTree>
   </p:cSld>
   <p:clrMapOvr>
@@ -8774,30 +8678,6 @@
           </a:p>
         </p:txBody>
       </p:sp>
-      <p:pic>
-        <p:nvPicPr>
-          <p:cNvPr id="45" name="Picture 44" descr="logo_horiz.png"/>
-          <p:cNvPicPr>
-            <a:picLocks noChangeAspect="1"/>
-          </p:cNvPicPr>
-          <p:nvPr/>
-        </p:nvPicPr>
-        <p:blipFill>
-          <a:blip r:embed="rId3"/>
-          <a:stretch>
-            <a:fillRect/>
-          </a:stretch>
-        </p:blipFill>
-        <p:spPr>
-          <a:xfrm>
-            <a:off x="10024567" y="6062197"/>
-            <a:ext cx="1965960" cy="631211"/>
-          </a:xfrm>
-          <a:prstGeom prst="rect">
-            <a:avLst/>
-          </a:prstGeom>
-        </p:spPr>
-      </p:pic>
     </p:spTree>
   </p:cSld>
   <p:clrMapOvr>
@@ -10342,30 +10222,6 @@
           </a:p>
         </p:txBody>
       </p:sp>
-      <p:pic>
-        <p:nvPicPr>
-          <p:cNvPr id="29" name="Picture 28" descr="logo_horiz.png"/>
-          <p:cNvPicPr>
-            <a:picLocks noChangeAspect="1"/>
-          </p:cNvPicPr>
-          <p:nvPr/>
-        </p:nvPicPr>
-        <p:blipFill>
-          <a:blip r:embed="rId5"/>
-          <a:stretch>
-            <a:fillRect/>
-          </a:stretch>
-        </p:blipFill>
-        <p:spPr>
-          <a:xfrm>
-            <a:off x="10024567" y="6062197"/>
-            <a:ext cx="1965960" cy="631211"/>
-          </a:xfrm>
-          <a:prstGeom prst="rect">
-            <a:avLst/>
-          </a:prstGeom>
-        </p:spPr>
-      </p:pic>
     </p:spTree>
   </p:cSld>
   <p:clrMapOvr>

--- a/sendacredit_propuesta.pptx
+++ b/sendacredit_propuesta.pptx
@@ -9094,9 +9094,95 @@
           </a:prstGeom>
         </p:spPr>
       </p:pic>
+      <p:sp>
+        <p:nvSpPr>
+          <p:cNvPr id="3" name="Rectangle 2"/>
+          <p:cNvSpPr/>
+          <p:nvPr/>
+        </p:nvSpPr>
+        <p:spPr>
+          <a:xfrm>
+            <a:off x="0" y="0"/>
+            <a:ext cx="63500" cy="6858000"/>
+          </a:xfrm>
+          <a:prstGeom prst="rect">
+            <a:avLst/>
+          </a:prstGeom>
+          <a:solidFill>
+            <a:srgbClr val="13B9BF"/>
+          </a:solidFill>
+          <a:ln>
+            <a:noFill/>
+          </a:ln>
+        </p:spPr>
+        <p:style>
+          <a:lnRef idx="1">
+            <a:schemeClr val="accent1"/>
+          </a:lnRef>
+          <a:fillRef idx="3">
+            <a:schemeClr val="accent1"/>
+          </a:fillRef>
+          <a:effectRef idx="2">
+            <a:schemeClr val="accent1"/>
+          </a:effectRef>
+          <a:fontRef idx="minor">
+            <a:schemeClr val="lt1"/>
+          </a:fontRef>
+        </p:style>
+        <p:txBody>
+          <a:bodyPr rtlCol="0" anchor="ctr"/>
+          <a:lstStyle/>
+          <a:p>
+            <a:pPr algn="ctr"/>
+          </a:p>
+        </p:txBody>
+      </p:sp>
+      <p:sp>
+        <p:nvSpPr>
+          <p:cNvPr id="4" name="Rectangle 3"/>
+          <p:cNvSpPr/>
+          <p:nvPr/>
+        </p:nvSpPr>
+        <p:spPr>
+          <a:xfrm>
+            <a:off x="0" y="0"/>
+            <a:ext cx="12191695" cy="50800"/>
+          </a:xfrm>
+          <a:prstGeom prst="rect">
+            <a:avLst/>
+          </a:prstGeom>
+          <a:solidFill>
+            <a:srgbClr val="2FDFE5"/>
+          </a:solidFill>
+          <a:ln>
+            <a:noFill/>
+          </a:ln>
+        </p:spPr>
+        <p:style>
+          <a:lnRef idx="1">
+            <a:schemeClr val="accent1"/>
+          </a:lnRef>
+          <a:fillRef idx="3">
+            <a:schemeClr val="accent1"/>
+          </a:fillRef>
+          <a:effectRef idx="2">
+            <a:schemeClr val="accent1"/>
+          </a:effectRef>
+          <a:fontRef idx="minor">
+            <a:schemeClr val="lt1"/>
+          </a:fontRef>
+        </p:style>
+        <p:txBody>
+          <a:bodyPr rtlCol="0" anchor="ctr"/>
+          <a:lstStyle/>
+          <a:p>
+            <a:pPr algn="ctr"/>
+          </a:p>
+        </p:txBody>
+      </p:sp>
       <p:pic>
         <p:nvPicPr>
-          <p:cNvPr id="3" name="Picture 2" descr="contact_panel.png"/>
+          <p:cNvPr id="5" name="Picture 4" descr="logo_round.png"/>
           <p:cNvPicPr>
             <a:picLocks noChangeAspect="1"/>
           </p:cNvPicPr>
@@ -9110,102 +9196,14 @@
         </p:blipFill>
         <p:spPr>
           <a:xfrm>
-            <a:off x="7071055" y="0"/>
-            <a:ext cx="5120640" cy="6858000"/>
+            <a:off x="502920" y="274320"/>
+            <a:ext cx="1024128" cy="593994"/>
           </a:xfrm>
           <a:prstGeom prst="rect">
             <a:avLst/>
           </a:prstGeom>
         </p:spPr>
       </p:pic>
-      <p:sp>
-        <p:nvSpPr>
-          <p:cNvPr id="4" name="Rectangle 3"/>
-          <p:cNvSpPr/>
-          <p:nvPr/>
-        </p:nvSpPr>
-        <p:spPr>
-          <a:xfrm>
-            <a:off x="7071055" y="0"/>
-            <a:ext cx="5120640" cy="6858000"/>
-          </a:xfrm>
-          <a:prstGeom prst="rect">
-            <a:avLst/>
-          </a:prstGeom>
-          <a:solidFill>
-            <a:srgbClr val="060E24">
-              <a:alpha val="8000"/>
-            </a:srgbClr>
-          </a:solidFill>
-          <a:ln>
-            <a:noFill/>
-          </a:ln>
-        </p:spPr>
-        <p:style>
-          <a:lnRef idx="1">
-            <a:schemeClr val="accent1"/>
-          </a:lnRef>
-          <a:fillRef idx="3">
-            <a:schemeClr val="accent1"/>
-          </a:fillRef>
-          <a:effectRef idx="2">
-            <a:schemeClr val="accent1"/>
-          </a:effectRef>
-          <a:fontRef idx="minor">
-            <a:schemeClr val="lt1"/>
-          </a:fontRef>
-        </p:style>
-        <p:txBody>
-          <a:bodyPr rtlCol="0" anchor="ctr"/>
-          <a:lstStyle/>
-          <a:p>
-            <a:pPr algn="ctr"/>
-          </a:p>
-        </p:txBody>
-      </p:sp>
-      <p:sp>
-        <p:nvSpPr>
-          <p:cNvPr id="5" name="Rectangle 4"/>
-          <p:cNvSpPr/>
-          <p:nvPr/>
-        </p:nvSpPr>
-        <p:spPr>
-          <a:xfrm>
-            <a:off x="7032955" y="0"/>
-            <a:ext cx="38100" cy="6858000"/>
-          </a:xfrm>
-          <a:prstGeom prst="rect">
-            <a:avLst/>
-          </a:prstGeom>
-          <a:solidFill>
-            <a:srgbClr val="2FDFE5"/>
-          </a:solidFill>
-          <a:ln>
-            <a:noFill/>
-          </a:ln>
-        </p:spPr>
-        <p:style>
-          <a:lnRef idx="1">
-            <a:schemeClr val="accent1"/>
-          </a:lnRef>
-          <a:fillRef idx="3">
-            <a:schemeClr val="accent1"/>
-          </a:fillRef>
-          <a:effectRef idx="2">
-            <a:schemeClr val="accent1"/>
-          </a:effectRef>
-          <a:fontRef idx="minor">
-            <a:schemeClr val="lt1"/>
-          </a:fontRef>
-        </p:style>
-        <p:txBody>
-          <a:bodyPr rtlCol="0" anchor="ctr"/>
-          <a:lstStyle/>
-          <a:p>
-            <a:pPr algn="ctr"/>
-          </a:p>
-        </p:txBody>
-      </p:sp>
       <p:sp>
         <p:nvSpPr>
           <p:cNvPr id="6" name="Rectangle 5"/>
@@ -9214,117 +9212,7 @@
         </p:nvSpPr>
         <p:spPr>
           <a:xfrm>
-            <a:off x="0" y="0"/>
-            <a:ext cx="63500" cy="6858000"/>
-          </a:xfrm>
-          <a:prstGeom prst="rect">
-            <a:avLst/>
-          </a:prstGeom>
-          <a:solidFill>
-            <a:srgbClr val="13B9BF"/>
-          </a:solidFill>
-          <a:ln>
-            <a:noFill/>
-          </a:ln>
-        </p:spPr>
-        <p:style>
-          <a:lnRef idx="1">
-            <a:schemeClr val="accent1"/>
-          </a:lnRef>
-          <a:fillRef idx="3">
-            <a:schemeClr val="accent1"/>
-          </a:fillRef>
-          <a:effectRef idx="2">
-            <a:schemeClr val="accent1"/>
-          </a:effectRef>
-          <a:fontRef idx="minor">
-            <a:schemeClr val="lt1"/>
-          </a:fontRef>
-        </p:style>
-        <p:txBody>
-          <a:bodyPr rtlCol="0" anchor="ctr"/>
-          <a:lstStyle/>
-          <a:p>
-            <a:pPr algn="ctr"/>
-          </a:p>
-        </p:txBody>
-      </p:sp>
-      <p:sp>
-        <p:nvSpPr>
-          <p:cNvPr id="7" name="Rectangle 6"/>
-          <p:cNvSpPr/>
-          <p:nvPr/>
-        </p:nvSpPr>
-        <p:spPr>
-          <a:xfrm>
-            <a:off x="0" y="0"/>
-            <a:ext cx="12191695" cy="50800"/>
-          </a:xfrm>
-          <a:prstGeom prst="rect">
-            <a:avLst/>
-          </a:prstGeom>
-          <a:solidFill>
-            <a:srgbClr val="2FDFE5"/>
-          </a:solidFill>
-          <a:ln>
-            <a:noFill/>
-          </a:ln>
-        </p:spPr>
-        <p:style>
-          <a:lnRef idx="1">
-            <a:schemeClr val="accent1"/>
-          </a:lnRef>
-          <a:fillRef idx="3">
-            <a:schemeClr val="accent1"/>
-          </a:fillRef>
-          <a:effectRef idx="2">
-            <a:schemeClr val="accent1"/>
-          </a:effectRef>
-          <a:fontRef idx="minor">
-            <a:schemeClr val="lt1"/>
-          </a:fontRef>
-        </p:style>
-        <p:txBody>
-          <a:bodyPr rtlCol="0" anchor="ctr"/>
-          <a:lstStyle/>
-          <a:p>
-            <a:pPr algn="ctr"/>
-          </a:p>
-        </p:txBody>
-      </p:sp>
-      <p:pic>
-        <p:nvPicPr>
-          <p:cNvPr id="8" name="Picture 7" descr="logo_round.png"/>
-          <p:cNvPicPr>
-            <a:picLocks noChangeAspect="1"/>
-          </p:cNvPicPr>
-          <p:nvPr/>
-        </p:nvPicPr>
-        <p:blipFill>
-          <a:blip r:embed="rId4"/>
-          <a:stretch>
-            <a:fillRect/>
-          </a:stretch>
-        </p:blipFill>
-        <p:spPr>
-          <a:xfrm>
-            <a:off x="502920" y="310896"/>
-            <a:ext cx="1024128" cy="593994"/>
-          </a:xfrm>
-          <a:prstGeom prst="rect">
-            <a:avLst/>
-          </a:prstGeom>
-        </p:spPr>
-      </p:pic>
-      <p:sp>
-        <p:nvSpPr>
-          <p:cNvPr id="9" name="Rectangle 8"/>
-          <p:cNvSpPr/>
-          <p:nvPr/>
-        </p:nvSpPr>
-        <p:spPr>
-          <a:xfrm>
-            <a:off x="502920" y="1417320"/>
+            <a:off x="502920" y="1389888"/>
             <a:ext cx="1554480" cy="274320"/>
           </a:xfrm>
           <a:prstGeom prst="rect">
@@ -9369,14 +9257,14 @@
       </p:sp>
       <p:sp>
         <p:nvSpPr>
-          <p:cNvPr id="10" name="TextBox 9"/>
+          <p:cNvPr id="7" name="TextBox 6"/>
           <p:cNvSpPr txBox="1"/>
           <p:nvPr/>
         </p:nvSpPr>
         <p:spPr>
           <a:xfrm>
-            <a:off x="502920" y="1801368"/>
-            <a:ext cx="5852160" cy="1051560"/>
+            <a:off x="502920" y="1755648"/>
+            <a:ext cx="11323015" cy="1005840"/>
           </a:xfrm>
           <a:prstGeom prst="rect">
             <a:avLst/>
@@ -9391,7 +9279,7 @@
           <a:p>
             <a:pPr algn="l"/>
             <a:r>
-              <a:rPr sz="3000" b="1">
+              <a:rPr sz="3800" b="1">
                 <a:solidFill>
                   <a:srgbClr val="FFFFFF"/>
                 </a:solidFill>
@@ -9402,7 +9290,7 @@
           <a:p>
             <a:pPr algn="l"/>
             <a:r>
-              <a:rPr sz="3000" b="1">
+              <a:rPr sz="3800" b="1">
                 <a:solidFill>
                   <a:srgbClr val="2FDFE5"/>
                 </a:solidFill>
@@ -9414,14 +9302,14 @@
       </p:sp>
       <p:sp>
         <p:nvSpPr>
-          <p:cNvPr id="11" name="Rectangle 10"/>
+          <p:cNvPr id="8" name="Rectangle 7"/>
           <p:cNvSpPr/>
           <p:nvPr/>
         </p:nvSpPr>
         <p:spPr>
           <a:xfrm>
-            <a:off x="502920" y="2834640"/>
-            <a:ext cx="3474720" cy="31750"/>
+            <a:off x="502920" y="2816352"/>
+            <a:ext cx="11323015" cy="31750"/>
           </a:xfrm>
           <a:prstGeom prst="rect">
             <a:avLst/>
@@ -9457,14 +9345,14 @@
       </p:sp>
       <p:sp>
         <p:nvSpPr>
-          <p:cNvPr id="12" name="TextBox 11"/>
+          <p:cNvPr id="9" name="TextBox 8"/>
           <p:cNvSpPr txBox="1"/>
           <p:nvPr/>
         </p:nvSpPr>
         <p:spPr>
           <a:xfrm>
-            <a:off x="502920" y="2971800"/>
-            <a:ext cx="5669280" cy="402336"/>
+            <a:off x="502920" y="2944368"/>
+            <a:ext cx="11323015" cy="402336"/>
           </a:xfrm>
           <a:prstGeom prst="rect">
             <a:avLst/>
@@ -9479,7 +9367,7 @@
           <a:p>
             <a:pPr algn="l"/>
             <a:r>
-              <a:rPr sz="1100" i="1">
+              <a:rPr sz="1300" i="1">
                 <a:solidFill>
                   <a:srgbClr val="C0E8FF"/>
                 </a:solidFill>
@@ -9491,14 +9379,14 @@
       </p:sp>
       <p:sp>
         <p:nvSpPr>
-          <p:cNvPr id="13" name="Rectangle 12"/>
+          <p:cNvPr id="10" name="Rectangle 9"/>
           <p:cNvSpPr/>
           <p:nvPr/>
         </p:nvSpPr>
         <p:spPr>
           <a:xfrm>
-            <a:off x="502920" y="3401568"/>
-            <a:ext cx="1965960" cy="1920240"/>
+            <a:off x="502920" y="3547872"/>
+            <a:ext cx="3603650" cy="2514600"/>
           </a:xfrm>
           <a:prstGeom prst="rect">
             <a:avLst/>
@@ -9536,14 +9424,14 @@
       </p:sp>
       <p:sp>
         <p:nvSpPr>
-          <p:cNvPr id="14" name="Rectangle 13"/>
+          <p:cNvPr id="11" name="Rectangle 10"/>
           <p:cNvSpPr/>
           <p:nvPr/>
         </p:nvSpPr>
         <p:spPr>
           <a:xfrm>
-            <a:off x="502920" y="3401568"/>
-            <a:ext cx="1965960" cy="63500"/>
+            <a:off x="502920" y="3547872"/>
+            <a:ext cx="3603650" cy="63500"/>
           </a:xfrm>
           <a:prstGeom prst="rect">
             <a:avLst/>
@@ -9579,14 +9467,14 @@
       </p:sp>
       <p:sp>
         <p:nvSpPr>
-          <p:cNvPr id="15" name="TextBox 14"/>
+          <p:cNvPr id="12" name="TextBox 11"/>
           <p:cNvSpPr txBox="1"/>
           <p:nvPr/>
         </p:nvSpPr>
         <p:spPr>
           <a:xfrm>
-            <a:off x="630936" y="3557016"/>
-            <a:ext cx="1709928" cy="310896"/>
+            <a:off x="704088" y="3767328"/>
+            <a:ext cx="3201314" cy="384048"/>
           </a:xfrm>
           <a:prstGeom prst="rect">
             <a:avLst/>
@@ -9601,7 +9489,7 @@
           <a:p>
             <a:pPr algn="l"/>
             <a:r>
-              <a:rPr sz="1300" b="1">
+              <a:rPr sz="1700" b="1">
                 <a:solidFill>
                   <a:srgbClr val="2FDFE5"/>
                 </a:solidFill>
@@ -9613,14 +9501,14 @@
       </p:sp>
       <p:sp>
         <p:nvSpPr>
-          <p:cNvPr id="16" name="Rectangle 15"/>
+          <p:cNvPr id="13" name="Rectangle 12"/>
           <p:cNvSpPr/>
           <p:nvPr/>
         </p:nvSpPr>
         <p:spPr>
           <a:xfrm>
-            <a:off x="630936" y="3904488"/>
-            <a:ext cx="1709928" cy="12700"/>
+            <a:off x="667512" y="4206240"/>
+            <a:ext cx="3274466" cy="12700"/>
           </a:xfrm>
           <a:prstGeom prst="rect">
             <a:avLst/>
@@ -9656,21 +9544,21 @@
       </p:sp>
       <p:sp>
         <p:nvSpPr>
-          <p:cNvPr id="17" name="TextBox 16"/>
+          <p:cNvPr id="14" name="TextBox 13"/>
           <p:cNvSpPr txBox="1"/>
           <p:nvPr/>
         </p:nvSpPr>
         <p:spPr>
           <a:xfrm>
-            <a:off x="630936" y="3980688"/>
-            <a:ext cx="1709928" cy="1234440"/>
+            <a:off x="704088" y="4333240"/>
+            <a:ext cx="3201314" cy="1572768"/>
           </a:xfrm>
           <a:prstGeom prst="rect">
             <a:avLst/>
           </a:prstGeom>
           <a:noFill/>
         </p:spPr>
-        <p:txBody lIns="38100" tIns="25400" rIns="38100" bIns="25400">
+        <p:txBody lIns="38100" tIns="38100" rIns="38100" bIns="38100">
           <a:bodyPr wrap="square">
             <a:spAutoFit/>
           </a:bodyPr>
@@ -9678,11 +9566,11 @@
           <a:p>
             <a:pPr algn="l">
               <a:spcBef>
-                <a:spcPts val="300"/>
+                <a:spcPts val="800"/>
               </a:spcBef>
             </a:pPr>
             <a:r>
-              <a:rPr sz="1000">
+              <a:rPr sz="1300">
                 <a:solidFill>
                   <a:srgbClr val="D8EAFF"/>
                 </a:solidFill>
@@ -9693,11 +9581,11 @@
           <a:p>
             <a:pPr algn="l">
               <a:spcBef>
-                <a:spcPts val="300"/>
+                <a:spcPts val="800"/>
               </a:spcBef>
             </a:pPr>
             <a:r>
-              <a:rPr sz="1000">
+              <a:rPr sz="1300">
                 <a:solidFill>
                   <a:srgbClr val="2FDFE5"/>
                 </a:solidFill>
@@ -9708,11 +9596,11 @@
           <a:p>
             <a:pPr algn="l">
               <a:spcBef>
-                <a:spcPts val="300"/>
+                <a:spcPts val="800"/>
               </a:spcBef>
             </a:pPr>
             <a:r>
-              <a:rPr sz="1000">
+              <a:rPr sz="1300">
                 <a:solidFill>
                   <a:srgbClr val="80A8CC"/>
                 </a:solidFill>
@@ -9724,14 +9612,14 @@
       </p:sp>
       <p:sp>
         <p:nvSpPr>
-          <p:cNvPr id="18" name="Rectangle 17"/>
+          <p:cNvPr id="15" name="Rectangle 14"/>
           <p:cNvSpPr/>
           <p:nvPr/>
         </p:nvSpPr>
         <p:spPr>
           <a:xfrm>
-            <a:off x="2633472" y="3401568"/>
-            <a:ext cx="1965960" cy="1920240"/>
+            <a:off x="4380890" y="3547872"/>
+            <a:ext cx="3603650" cy="2514600"/>
           </a:xfrm>
           <a:prstGeom prst="rect">
             <a:avLst/>
@@ -9769,14 +9657,14 @@
       </p:sp>
       <p:sp>
         <p:nvSpPr>
-          <p:cNvPr id="19" name="Rectangle 18"/>
+          <p:cNvPr id="16" name="Rectangle 15"/>
           <p:cNvSpPr/>
           <p:nvPr/>
         </p:nvSpPr>
         <p:spPr>
           <a:xfrm>
-            <a:off x="2633472" y="3401568"/>
-            <a:ext cx="1965960" cy="63500"/>
+            <a:off x="4380890" y="3547872"/>
+            <a:ext cx="3603650" cy="63500"/>
           </a:xfrm>
           <a:prstGeom prst="rect">
             <a:avLst/>
@@ -9812,14 +9700,14 @@
       </p:sp>
       <p:sp>
         <p:nvSpPr>
-          <p:cNvPr id="20" name="TextBox 19"/>
+          <p:cNvPr id="17" name="TextBox 16"/>
           <p:cNvSpPr txBox="1"/>
           <p:nvPr/>
         </p:nvSpPr>
         <p:spPr>
           <a:xfrm>
-            <a:off x="2761488" y="3557016"/>
-            <a:ext cx="1709928" cy="310896"/>
+            <a:off x="4582058" y="3767328"/>
+            <a:ext cx="3201314" cy="384048"/>
           </a:xfrm>
           <a:prstGeom prst="rect">
             <a:avLst/>
@@ -9834,7 +9722,7 @@
           <a:p>
             <a:pPr algn="l"/>
             <a:r>
-              <a:rPr sz="1300" b="1">
+              <a:rPr sz="1700" b="1">
                 <a:solidFill>
                   <a:srgbClr val="2FDFE5"/>
                 </a:solidFill>
@@ -9846,14 +9734,14 @@
       </p:sp>
       <p:sp>
         <p:nvSpPr>
-          <p:cNvPr id="21" name="Rectangle 20"/>
+          <p:cNvPr id="18" name="Rectangle 17"/>
           <p:cNvSpPr/>
           <p:nvPr/>
         </p:nvSpPr>
         <p:spPr>
           <a:xfrm>
-            <a:off x="2761488" y="3904488"/>
-            <a:ext cx="1709928" cy="12700"/>
+            <a:off x="4545482" y="4206240"/>
+            <a:ext cx="3274466" cy="12700"/>
           </a:xfrm>
           <a:prstGeom prst="rect">
             <a:avLst/>
@@ -9889,21 +9777,21 @@
       </p:sp>
       <p:sp>
         <p:nvSpPr>
-          <p:cNvPr id="22" name="TextBox 21"/>
+          <p:cNvPr id="19" name="TextBox 18"/>
           <p:cNvSpPr txBox="1"/>
           <p:nvPr/>
         </p:nvSpPr>
         <p:spPr>
           <a:xfrm>
-            <a:off x="2761488" y="3980688"/>
-            <a:ext cx="1709928" cy="1234440"/>
+            <a:off x="4582058" y="4333240"/>
+            <a:ext cx="3201314" cy="1572768"/>
           </a:xfrm>
           <a:prstGeom prst="rect">
             <a:avLst/>
           </a:prstGeom>
           <a:noFill/>
         </p:spPr>
-        <p:txBody lIns="38100" tIns="25400" rIns="38100" bIns="25400">
+        <p:txBody lIns="38100" tIns="38100" rIns="38100" bIns="38100">
           <a:bodyPr wrap="square">
             <a:spAutoFit/>
           </a:bodyPr>
@@ -9911,11 +9799,11 @@
           <a:p>
             <a:pPr algn="l">
               <a:spcBef>
-                <a:spcPts val="300"/>
+                <a:spcPts val="800"/>
               </a:spcBef>
             </a:pPr>
             <a:r>
-              <a:rPr sz="1000">
+              <a:rPr sz="1300">
                 <a:solidFill>
                   <a:srgbClr val="D8EAFF"/>
                 </a:solidFill>
@@ -9926,11 +9814,11 @@
           <a:p>
             <a:pPr algn="l">
               <a:spcBef>
-                <a:spcPts val="300"/>
+                <a:spcPts val="800"/>
               </a:spcBef>
             </a:pPr>
             <a:r>
-              <a:rPr sz="1000">
+              <a:rPr sz="1300">
                 <a:solidFill>
                   <a:srgbClr val="2FDFE5"/>
                 </a:solidFill>
@@ -9941,11 +9829,11 @@
           <a:p>
             <a:pPr algn="l">
               <a:spcBef>
-                <a:spcPts val="300"/>
+                <a:spcPts val="800"/>
               </a:spcBef>
             </a:pPr>
             <a:r>
-              <a:rPr sz="1000">
+              <a:rPr sz="1300">
                 <a:solidFill>
                   <a:srgbClr val="80A8CC"/>
                 </a:solidFill>
@@ -9957,14 +9845,14 @@
       </p:sp>
       <p:sp>
         <p:nvSpPr>
-          <p:cNvPr id="23" name="Rectangle 22"/>
+          <p:cNvPr id="20" name="Rectangle 19"/>
           <p:cNvSpPr/>
           <p:nvPr/>
         </p:nvSpPr>
         <p:spPr>
           <a:xfrm>
-            <a:off x="4764024" y="3401568"/>
-            <a:ext cx="1965960" cy="1920240"/>
+            <a:off x="8258860" y="3547872"/>
+            <a:ext cx="3603650" cy="2514600"/>
           </a:xfrm>
           <a:prstGeom prst="rect">
             <a:avLst/>
@@ -10002,14 +9890,14 @@
       </p:sp>
       <p:sp>
         <p:nvSpPr>
-          <p:cNvPr id="24" name="Rectangle 23"/>
+          <p:cNvPr id="21" name="Rectangle 20"/>
           <p:cNvSpPr/>
           <p:nvPr/>
         </p:nvSpPr>
         <p:spPr>
           <a:xfrm>
-            <a:off x="4764024" y="3401568"/>
-            <a:ext cx="1965960" cy="63500"/>
+            <a:off x="8258860" y="3547872"/>
+            <a:ext cx="3603650" cy="63500"/>
           </a:xfrm>
           <a:prstGeom prst="rect">
             <a:avLst/>
@@ -10045,14 +9933,14 @@
       </p:sp>
       <p:sp>
         <p:nvSpPr>
-          <p:cNvPr id="25" name="TextBox 24"/>
+          <p:cNvPr id="22" name="TextBox 21"/>
           <p:cNvSpPr txBox="1"/>
           <p:nvPr/>
         </p:nvSpPr>
         <p:spPr>
           <a:xfrm>
-            <a:off x="4892040" y="3557016"/>
-            <a:ext cx="1709928" cy="310896"/>
+            <a:off x="8460028" y="3767328"/>
+            <a:ext cx="3201314" cy="384048"/>
           </a:xfrm>
           <a:prstGeom prst="rect">
             <a:avLst/>
@@ -10067,7 +9955,7 @@
           <a:p>
             <a:pPr algn="l"/>
             <a:r>
-              <a:rPr sz="1300" b="1">
+              <a:rPr sz="1700" b="1">
                 <a:solidFill>
                   <a:srgbClr val="2FDFE5"/>
                 </a:solidFill>
@@ -10079,14 +9967,14 @@
       </p:sp>
       <p:sp>
         <p:nvSpPr>
-          <p:cNvPr id="26" name="Rectangle 25"/>
+          <p:cNvPr id="23" name="Rectangle 22"/>
           <p:cNvSpPr/>
           <p:nvPr/>
         </p:nvSpPr>
         <p:spPr>
           <a:xfrm>
-            <a:off x="4892040" y="3904488"/>
-            <a:ext cx="1709928" cy="12700"/>
+            <a:off x="8423452" y="4206240"/>
+            <a:ext cx="3274466" cy="12700"/>
           </a:xfrm>
           <a:prstGeom prst="rect">
             <a:avLst/>
@@ -10122,21 +10010,21 @@
       </p:sp>
       <p:sp>
         <p:nvSpPr>
-          <p:cNvPr id="27" name="TextBox 26"/>
+          <p:cNvPr id="24" name="TextBox 23"/>
           <p:cNvSpPr txBox="1"/>
           <p:nvPr/>
         </p:nvSpPr>
         <p:spPr>
           <a:xfrm>
-            <a:off x="4892040" y="3980688"/>
-            <a:ext cx="1709928" cy="1234440"/>
+            <a:off x="8460028" y="4333240"/>
+            <a:ext cx="3201314" cy="1572768"/>
           </a:xfrm>
           <a:prstGeom prst="rect">
             <a:avLst/>
           </a:prstGeom>
           <a:noFill/>
         </p:spPr>
-        <p:txBody lIns="38100" tIns="25400" rIns="38100" bIns="25400">
+        <p:txBody lIns="38100" tIns="38100" rIns="38100" bIns="38100">
           <a:bodyPr wrap="square">
             <a:spAutoFit/>
           </a:bodyPr>
@@ -10144,11 +10032,11 @@
           <a:p>
             <a:pPr algn="l">
               <a:spcBef>
-                <a:spcPts val="300"/>
+                <a:spcPts val="800"/>
               </a:spcBef>
             </a:pPr>
             <a:r>
-              <a:rPr sz="1000">
+              <a:rPr sz="1300">
                 <a:solidFill>
                   <a:srgbClr val="D8EAFF"/>
                 </a:solidFill>
@@ -10159,11 +10047,11 @@
           <a:p>
             <a:pPr algn="l">
               <a:spcBef>
-                <a:spcPts val="300"/>
+                <a:spcPts val="800"/>
               </a:spcBef>
             </a:pPr>
             <a:r>
-              <a:rPr sz="1000">
+              <a:rPr sz="1300">
                 <a:solidFill>
                   <a:srgbClr val="2FDFE5"/>
                 </a:solidFill>
@@ -10174,11 +10062,11 @@
           <a:p>
             <a:pPr algn="l">
               <a:spcBef>
-                <a:spcPts val="300"/>
+                <a:spcPts val="800"/>
               </a:spcBef>
             </a:pPr>
             <a:r>
-              <a:rPr sz="1000">
+              <a:rPr sz="1300">
                 <a:solidFill>
                   <a:srgbClr val="80A8CC"/>
                 </a:solidFill>
@@ -10190,14 +10078,14 @@
       </p:sp>
       <p:sp>
         <p:nvSpPr>
-          <p:cNvPr id="28" name="TextBox 27"/>
+          <p:cNvPr id="25" name="TextBox 24"/>
           <p:cNvSpPr txBox="1"/>
           <p:nvPr/>
         </p:nvSpPr>
         <p:spPr>
           <a:xfrm>
-            <a:off x="502920" y="6419088"/>
-            <a:ext cx="4572000" cy="274320"/>
+            <a:off x="502920" y="6437376"/>
+            <a:ext cx="5486400" cy="274320"/>
           </a:xfrm>
           <a:prstGeom prst="rect">
             <a:avLst/>
@@ -10212,7 +10100,7 @@
           <a:p>
             <a:pPr algn="l"/>
             <a:r>
-              <a:rPr sz="950">
+              <a:rPr sz="1000">
                 <a:solidFill>
                   <a:srgbClr val="2FDFE5"/>
                 </a:solidFill>
@@ -10251,7 +10139,7 @@
                                 <p:cBhvr>
                                   <p:cTn id="6" dur="450" fill="hold"/>
                                   <p:tgtEl>
-                                    <p:spTgt spid="13"/>
+                                    <p:spTgt spid="10"/>
                                   </p:tgtEl>
                                 </p:cBhvr>
                               </p:animEffect>
@@ -10268,7 +10156,7 @@
                                 <p:cBhvr>
                                   <p:cTn id="8" dur="450" fill="hold"/>
                                   <p:tgtEl>
-                                    <p:spTgt spid="18"/>
+                                    <p:spTgt spid="15"/>
                                   </p:tgtEl>
                                 </p:cBhvr>
                               </p:animEffect>
@@ -10285,7 +10173,7 @@
                                 <p:cBhvr>
                                   <p:cTn id="10" dur="450" fill="hold"/>
                                   <p:tgtEl>
-                                    <p:spTgt spid="23"/>
+                                    <p:spTgt spid="20"/>
                                   </p:tgtEl>
                                 </p:cBhvr>
                               </p:animEffect>

--- a/sendacredit_propuesta.pptx
+++ b/sendacredit_propuesta.pptx
@@ -9264,7 +9264,7 @@
         <p:spPr>
           <a:xfrm>
             <a:off x="502920" y="1755648"/>
-            <a:ext cx="11323015" cy="1005840"/>
+            <a:ext cx="11323015" cy="1280160"/>
           </a:xfrm>
           <a:prstGeom prst="rect">
             <a:avLst/>
@@ -9308,7 +9308,7 @@
         </p:nvSpPr>
         <p:spPr>
           <a:xfrm>
-            <a:off x="502920" y="2816352"/>
+            <a:off x="502920" y="3127248"/>
             <a:ext cx="11323015" cy="31750"/>
           </a:xfrm>
           <a:prstGeom prst="rect">
@@ -9351,8 +9351,8 @@
         </p:nvSpPr>
         <p:spPr>
           <a:xfrm>
-            <a:off x="502920" y="2944368"/>
-            <a:ext cx="11323015" cy="402336"/>
+            <a:off x="502920" y="3255264"/>
+            <a:ext cx="11323015" cy="365760"/>
           </a:xfrm>
           <a:prstGeom prst="rect">
             <a:avLst/>
@@ -9385,8 +9385,8 @@
         </p:nvSpPr>
         <p:spPr>
           <a:xfrm>
-            <a:off x="502920" y="3547872"/>
-            <a:ext cx="3603650" cy="2514600"/>
+            <a:off x="502920" y="3730752"/>
+            <a:ext cx="3603650" cy="2304288"/>
           </a:xfrm>
           <a:prstGeom prst="rect">
             <a:avLst/>
@@ -9430,7 +9430,7 @@
         </p:nvSpPr>
         <p:spPr>
           <a:xfrm>
-            <a:off x="502920" y="3547872"/>
+            <a:off x="502920" y="3730752"/>
             <a:ext cx="3603650" cy="63500"/>
           </a:xfrm>
           <a:prstGeom prst="rect">
@@ -9473,7 +9473,7 @@
         </p:nvSpPr>
         <p:spPr>
           <a:xfrm>
-            <a:off x="704088" y="3767328"/>
+            <a:off x="704088" y="3950208"/>
             <a:ext cx="3201314" cy="384048"/>
           </a:xfrm>
           <a:prstGeom prst="rect">
@@ -9507,7 +9507,7 @@
         </p:nvSpPr>
         <p:spPr>
           <a:xfrm>
-            <a:off x="667512" y="4206240"/>
+            <a:off x="667512" y="4389120"/>
             <a:ext cx="3274466" cy="12700"/>
           </a:xfrm>
           <a:prstGeom prst="rect">
@@ -9550,7 +9550,7 @@
         </p:nvSpPr>
         <p:spPr>
           <a:xfrm>
-            <a:off x="704088" y="4333240"/>
+            <a:off x="704088" y="4516120"/>
             <a:ext cx="3201314" cy="1572768"/>
           </a:xfrm>
           <a:prstGeom prst="rect">
@@ -9618,8 +9618,8 @@
         </p:nvSpPr>
         <p:spPr>
           <a:xfrm>
-            <a:off x="4380890" y="3547872"/>
-            <a:ext cx="3603650" cy="2514600"/>
+            <a:off x="4380890" y="3730752"/>
+            <a:ext cx="3603650" cy="2304288"/>
           </a:xfrm>
           <a:prstGeom prst="rect">
             <a:avLst/>
@@ -9663,7 +9663,7 @@
         </p:nvSpPr>
         <p:spPr>
           <a:xfrm>
-            <a:off x="4380890" y="3547872"/>
+            <a:off x="4380890" y="3730752"/>
             <a:ext cx="3603650" cy="63500"/>
           </a:xfrm>
           <a:prstGeom prst="rect">
@@ -9706,7 +9706,7 @@
         </p:nvSpPr>
         <p:spPr>
           <a:xfrm>
-            <a:off x="4582058" y="3767328"/>
+            <a:off x="4582058" y="3950208"/>
             <a:ext cx="3201314" cy="384048"/>
           </a:xfrm>
           <a:prstGeom prst="rect">
@@ -9740,7 +9740,7 @@
         </p:nvSpPr>
         <p:spPr>
           <a:xfrm>
-            <a:off x="4545482" y="4206240"/>
+            <a:off x="4545482" y="4389120"/>
             <a:ext cx="3274466" cy="12700"/>
           </a:xfrm>
           <a:prstGeom prst="rect">
@@ -9783,7 +9783,7 @@
         </p:nvSpPr>
         <p:spPr>
           <a:xfrm>
-            <a:off x="4582058" y="4333240"/>
+            <a:off x="4582058" y="4516120"/>
             <a:ext cx="3201314" cy="1572768"/>
           </a:xfrm>
           <a:prstGeom prst="rect">
@@ -9851,8 +9851,8 @@
         </p:nvSpPr>
         <p:spPr>
           <a:xfrm>
-            <a:off x="8258860" y="3547872"/>
-            <a:ext cx="3603650" cy="2514600"/>
+            <a:off x="8258860" y="3730752"/>
+            <a:ext cx="3603650" cy="2304288"/>
           </a:xfrm>
           <a:prstGeom prst="rect">
             <a:avLst/>
@@ -9896,7 +9896,7 @@
         </p:nvSpPr>
         <p:spPr>
           <a:xfrm>
-            <a:off x="8258860" y="3547872"/>
+            <a:off x="8258860" y="3730752"/>
             <a:ext cx="3603650" cy="63500"/>
           </a:xfrm>
           <a:prstGeom prst="rect">
@@ -9939,7 +9939,7 @@
         </p:nvSpPr>
         <p:spPr>
           <a:xfrm>
-            <a:off x="8460028" y="3767328"/>
+            <a:off x="8460028" y="3950208"/>
             <a:ext cx="3201314" cy="384048"/>
           </a:xfrm>
           <a:prstGeom prst="rect">
@@ -9973,7 +9973,7 @@
         </p:nvSpPr>
         <p:spPr>
           <a:xfrm>
-            <a:off x="8423452" y="4206240"/>
+            <a:off x="8423452" y="4389120"/>
             <a:ext cx="3274466" cy="12700"/>
           </a:xfrm>
           <a:prstGeom prst="rect">
@@ -10016,7 +10016,7 @@
         </p:nvSpPr>
         <p:spPr>
           <a:xfrm>
-            <a:off x="8460028" y="4333240"/>
+            <a:off x="8460028" y="4516120"/>
             <a:ext cx="3201314" cy="1572768"/>
           </a:xfrm>
           <a:prstGeom prst="rect">

--- a/sendacredit_propuesta.pptx
+++ b/sendacredit_propuesta.pptx
@@ -3246,8 +3246,8 @@
         </p:blipFill>
         <p:spPr>
           <a:xfrm>
-            <a:off x="658368" y="347472"/>
-            <a:ext cx="1078992" cy="625815"/>
+            <a:off x="658368" y="182880"/>
+            <a:ext cx="1417320" cy="822046"/>
           </a:xfrm>
           <a:prstGeom prst="rect">
             <a:avLst/>
@@ -3751,7 +3751,7 @@
                   <a:srgbClr val="80A8CC"/>
                 </a:solidFill>
               </a:rPr>
-              <a:t>Cada caso entra en nuestro circuito con un punto de partida limpio, verificado y correctamente segmentado.</a:t>
+              <a:t>En un tiempo no superior a 48H para el inicio de las gestiones.</a:t>
             </a:r>
           </a:p>
         </p:txBody>
@@ -7377,7 +7377,7 @@
                   <a:srgbClr val="D8EAFF"/>
                 </a:solidFill>
               </a:rPr>
-              <a:t>Sin costes fijos: solo pagamos si recuperamos</a:t>
+              <a:t>Sin costes fijos: solo cobramos si recuperamos</a:t>
             </a:r>
           </a:p>
         </p:txBody>
@@ -8182,7 +8182,7 @@
                   <a:srgbClr val="FFFFFF"/>
                 </a:solidFill>
               </a:rPr>
-              <a:t>Acción disuasoria</a:t>
+              <a:t>Valoración y compra de carteras</a:t>
             </a:r>
           </a:p>
         </p:txBody>
@@ -8259,7 +8259,7 @@
                   <a:srgbClr val="D8EAFF"/>
                 </a:solidFill>
               </a:rPr>
-              <a:t>Identificación visible de la gestión por parte de Sendacredit como elemento disuasorio frente al impago.</a:t>
+              <a:t>Análisis, valoración y adquisición de carteras de deuda fallida para maximizar la recuperación de activos.</a:t>
             </a:r>
           </a:p>
         </p:txBody>
@@ -8596,7 +8596,7 @@
                   <a:srgbClr val="FFFFFF"/>
                 </a:solidFill>
               </a:rPr>
-              <a:t>Ficheros de morosidad</a:t>
+              <a:t>Sello preventivo Sendacredit</a:t>
             </a:r>
           </a:p>
         </p:txBody>
@@ -8653,7 +8653,7 @@
         <p:spPr>
           <a:xfrm>
             <a:off x="6429603" y="5021072"/>
-            <a:ext cx="5286603" cy="1005840"/>
+            <a:ext cx="4079595" cy="1005840"/>
           </a:xfrm>
           <a:prstGeom prst="rect">
             <a:avLst/>
@@ -8673,11 +8673,35 @@
                   <a:srgbClr val="D8EAFF"/>
                 </a:solidFill>
               </a:rPr>
-              <a:t>Registro del deudor en ficheros de morosidad como medida adicional de presión y prevención.</a:t>
-            </a:r>
-          </a:p>
-        </p:txBody>
-      </p:sp>
+              <a:t>Siéntase protegido frente a sus impagados.</a:t>
+            </a:r>
+          </a:p>
+        </p:txBody>
+      </p:sp>
+      <p:pic>
+        <p:nvPicPr>
+          <p:cNvPr id="28" name="Picture 27" descr="seal.png"/>
+          <p:cNvPicPr>
+            <a:picLocks noChangeAspect="1"/>
+          </p:cNvPicPr>
+          <p:nvPr/>
+        </p:nvPicPr>
+        <p:blipFill>
+          <a:blip r:embed="rId3"/>
+          <a:stretch>
+            <a:fillRect/>
+          </a:stretch>
+        </p:blipFill>
+        <p:spPr>
+          <a:xfrm>
+            <a:off x="10582351" y="4966208"/>
+            <a:ext cx="1115568" cy="1115568"/>
+          </a:xfrm>
+          <a:prstGeom prst="rect">
+            <a:avLst/>
+          </a:prstGeom>
+        </p:spPr>
+      </p:pic>
     </p:spTree>
   </p:cSld>
   <p:clrMapOvr>

--- a/sendacredit_propuesta.pptx
+++ b/sendacredit_propuesta.pptx
@@ -7606,7 +7606,7 @@
       <p:grpSpPr/>
       <p:pic>
         <p:nvPicPr>
-          <p:cNvPr id="2" name="Picture 1" descr="content_bg.png"/>
+          <p:cNvPr id="2" name="Picture 1" descr="content_bg_nolog.png"/>
           <p:cNvPicPr>
             <a:picLocks noChangeAspect="1"/>
           </p:cNvPicPr>

--- a/sendacredit_propuesta.pptx
+++ b/sendacredit_propuesta.pptx
@@ -9614,7 +9614,7 @@
                   <a:srgbClr val="2FDFE5"/>
                 </a:solidFill>
               </a:rPr>
-              <a:t>+34 910 000 001</a:t>
+              <a:t>91 038 00 81</a:t>
             </a:r>
           </a:p>
           <a:p>
@@ -9629,7 +9629,7 @@
                   <a:srgbClr val="80A8CC"/>
                 </a:solidFill>
               </a:rPr>
-              <a:t>madrid@sendacredit.com</a:t>
+              <a:t>info@sendacredit.com</a:t>
             </a:r>
           </a:p>
         </p:txBody>
@@ -9847,7 +9847,7 @@
                   <a:srgbClr val="2FDFE5"/>
                 </a:solidFill>
               </a:rPr>
-              <a:t>+34 932 000 002</a:t>
+              <a:t>93 860 36 60</a:t>
             </a:r>
           </a:p>
           <a:p>
@@ -9862,7 +9862,7 @@
                   <a:srgbClr val="80A8CC"/>
                 </a:solidFill>
               </a:rPr>
-              <a:t>barcelona@sendacredit.com</a:t>
+              <a:t>info@sendacredit.com</a:t>
             </a:r>
           </a:p>
         </p:txBody>
@@ -10080,7 +10080,7 @@
                   <a:srgbClr val="2FDFE5"/>
                 </a:solidFill>
               </a:rPr>
-              <a:t>+34 952 000 003</a:t>
+              <a:t>95 174 57 01</a:t>
             </a:r>
           </a:p>
           <a:p>
@@ -10095,7 +10095,7 @@
                   <a:srgbClr val="80A8CC"/>
                 </a:solidFill>
               </a:rPr>
-              <a:t>malaga@sendacredit.com</a:t>
+              <a:t>info@sendacredit.com</a:t>
             </a:r>
           </a:p>
         </p:txBody>

--- a/sendacredit_propuesta.pptx
+++ b/sendacredit_propuesta.pptx
@@ -3232,7 +3232,7 @@
       </p:sp>
       <p:pic>
         <p:nvPicPr>
-          <p:cNvPr id="6" name="Picture 5" descr="logo_round.png"/>
+          <p:cNvPr id="6" name="Picture 5" descr="logo_round_bright.png"/>
           <p:cNvPicPr>
             <a:picLocks noChangeAspect="1"/>
           </p:cNvPicPr>
@@ -3478,7 +3478,7 @@
       <p:grpSpPr/>
       <p:pic>
         <p:nvPicPr>
-          <p:cNvPr id="2" name="Picture 1" descr="content_bg.png"/>
+          <p:cNvPr id="2" name="Picture 1" descr="content_bg_nolog.png"/>
           <p:cNvPicPr>
             <a:picLocks noChangeAspect="1"/>
           </p:cNvPicPr>
@@ -3586,9 +3586,33 @@
           </a:p>
         </p:txBody>
       </p:sp>
-      <p:sp>
-        <p:nvSpPr>
-          <p:cNvPr id="5" name="Rectangle 4"/>
+      <p:pic>
+        <p:nvPicPr>
+          <p:cNvPr id="5" name="Picture 4" descr="logo_round_bright.png"/>
+          <p:cNvPicPr>
+            <a:picLocks noChangeAspect="1"/>
+          </p:cNvPicPr>
+          <p:nvPr/>
+        </p:nvPicPr>
+        <p:blipFill>
+          <a:blip r:embed="rId3"/>
+          <a:stretch>
+            <a:fillRect/>
+          </a:stretch>
+        </p:blipFill>
+        <p:spPr>
+          <a:xfrm>
+            <a:off x="91440" y="54864"/>
+            <a:ext cx="1463040" cy="848563"/>
+          </a:xfrm>
+          <a:prstGeom prst="rect">
+            <a:avLst/>
+          </a:prstGeom>
+        </p:spPr>
+      </p:pic>
+      <p:sp>
+        <p:nvSpPr>
+          <p:cNvPr id="6" name="Rectangle 5"/>
           <p:cNvSpPr/>
           <p:nvPr/>
         </p:nvSpPr>
@@ -3639,7 +3663,7 @@
       </p:sp>
       <p:sp>
         <p:nvSpPr>
-          <p:cNvPr id="6" name="TextBox 5"/>
+          <p:cNvPr id="7" name="TextBox 6"/>
           <p:cNvSpPr txBox="1"/>
           <p:nvPr/>
         </p:nvSpPr>
@@ -3681,7 +3705,7 @@
       </p:sp>
       <p:sp>
         <p:nvSpPr>
-          <p:cNvPr id="7" name="Rectangle 6"/>
+          <p:cNvPr id="8" name="Rectangle 7"/>
           <p:cNvSpPr/>
           <p:nvPr/>
         </p:nvSpPr>
@@ -3724,7 +3748,7 @@
       </p:sp>
       <p:sp>
         <p:nvSpPr>
-          <p:cNvPr id="8" name="TextBox 7"/>
+          <p:cNvPr id="9" name="TextBox 8"/>
           <p:cNvSpPr txBox="1"/>
           <p:nvPr/>
         </p:nvSpPr>
@@ -3758,7 +3782,7 @@
       </p:sp>
       <p:sp>
         <p:nvSpPr>
-          <p:cNvPr id="9" name="Rectangle 8"/>
+          <p:cNvPr id="10" name="Rectangle 9"/>
           <p:cNvSpPr/>
           <p:nvPr/>
         </p:nvSpPr>
@@ -3803,7 +3827,7 @@
       </p:sp>
       <p:sp>
         <p:nvSpPr>
-          <p:cNvPr id="10" name="Rectangle 9"/>
+          <p:cNvPr id="11" name="Rectangle 10"/>
           <p:cNvSpPr/>
           <p:nvPr/>
         </p:nvSpPr>
@@ -3846,7 +3870,7 @@
       </p:sp>
       <p:sp>
         <p:nvSpPr>
-          <p:cNvPr id="11" name="TextBox 10"/>
+          <p:cNvPr id="12" name="TextBox 11"/>
           <p:cNvSpPr txBox="1"/>
           <p:nvPr/>
         </p:nvSpPr>
@@ -3888,7 +3912,7 @@
       </p:sp>
       <p:sp>
         <p:nvSpPr>
-          <p:cNvPr id="12" name="Rectangle 11"/>
+          <p:cNvPr id="13" name="Rectangle 12"/>
           <p:cNvSpPr/>
           <p:nvPr/>
         </p:nvSpPr>
@@ -3931,7 +3955,7 @@
       </p:sp>
       <p:sp>
         <p:nvSpPr>
-          <p:cNvPr id="13" name="TextBox 12"/>
+          <p:cNvPr id="14" name="TextBox 13"/>
           <p:cNvSpPr txBox="1"/>
           <p:nvPr/>
         </p:nvSpPr>
@@ -4023,7 +4047,7 @@
       </p:sp>
       <p:sp>
         <p:nvSpPr>
-          <p:cNvPr id="14" name="Rectangle 13"/>
+          <p:cNvPr id="15" name="Rectangle 14"/>
           <p:cNvSpPr/>
           <p:nvPr/>
         </p:nvSpPr>
@@ -4068,7 +4092,7 @@
       </p:sp>
       <p:sp>
         <p:nvSpPr>
-          <p:cNvPr id="15" name="Rectangle 14"/>
+          <p:cNvPr id="16" name="Rectangle 15"/>
           <p:cNvSpPr/>
           <p:nvPr/>
         </p:nvSpPr>
@@ -4111,7 +4135,7 @@
       </p:sp>
       <p:sp>
         <p:nvSpPr>
-          <p:cNvPr id="16" name="TextBox 15"/>
+          <p:cNvPr id="17" name="TextBox 16"/>
           <p:cNvSpPr txBox="1"/>
           <p:nvPr/>
         </p:nvSpPr>
@@ -4153,7 +4177,7 @@
       </p:sp>
       <p:sp>
         <p:nvSpPr>
-          <p:cNvPr id="17" name="Rectangle 16"/>
+          <p:cNvPr id="18" name="Rectangle 17"/>
           <p:cNvSpPr/>
           <p:nvPr/>
         </p:nvSpPr>
@@ -4196,7 +4220,7 @@
       </p:sp>
       <p:sp>
         <p:nvSpPr>
-          <p:cNvPr id="18" name="TextBox 17"/>
+          <p:cNvPr id="19" name="TextBox 18"/>
           <p:cNvSpPr txBox="1"/>
           <p:nvPr/>
         </p:nvSpPr>
@@ -4286,6 +4310,4518 @@
           </a:p>
         </p:txBody>
       </p:sp>
+    </p:spTree>
+  </p:cSld>
+  <p:clrMapOvr>
+    <a:masterClrMapping/>
+  </p:clrMapOvr>
+  <p:timing>
+    <p:tnLst>
+      <p:par>
+        <p:cTn id="1" dur="indefin" restart="whenNotActive" nodeType="tmRoot">
+          <p:childTnLst>
+            <p:seq concurrent="1" nextAc="seek">
+              <p:cTn id="2" dur="indefin" nodeType="mainSeq">
+                <p:childTnLst>
+                  <p:par>
+                    <p:cTn id="3" fill="hold">
+                      <p:stCondLst>
+                        <p:cond delay="0"/>
+                      </p:stCondLst>
+                      <p:childTnLst>
+                        <p:par>
+                          <p:cTn id="5" fill="hold">
+                            <p:stCondLst>
+                              <p:cond delay="0"/>
+                            </p:stCondLst>
+                            <p:childTnLst>
+                              <p:animEffect transition="in" filter="wipe(up)">
+                                <p:cBhvr>
+                                  <p:cTn id="6" dur="380" fill="hold"/>
+                                  <p:tgtEl>
+                                    <p:spTgt spid="10"/>
+                                  </p:tgtEl>
+                                </p:cBhvr>
+                              </p:animEffect>
+                            </p:childTnLst>
+                          </p:cTn>
+                        </p:par>
+                        <p:par>
+                          <p:cTn id="7" fill="hold">
+                            <p:stCondLst>
+                              <p:cond delay="0"/>
+                            </p:stCondLst>
+                            <p:childTnLst>
+                              <p:animEffect transition="in" filter="wipe(up)">
+                                <p:cBhvr>
+                                  <p:cTn id="8" dur="380" fill="hold"/>
+                                  <p:tgtEl>
+                                    <p:spTgt spid="11"/>
+                                  </p:tgtEl>
+                                </p:cBhvr>
+                              </p:animEffect>
+                            </p:childTnLst>
+                          </p:cTn>
+                        </p:par>
+                        <p:par>
+                          <p:cTn id="9" fill="hold">
+                            <p:stCondLst>
+                              <p:cond delay="0"/>
+                            </p:stCondLst>
+                            <p:childTnLst>
+                              <p:animEffect transition="in" filter="wipe(up)">
+                                <p:cBhvr>
+                                  <p:cTn id="10" dur="380" fill="hold"/>
+                                  <p:tgtEl>
+                                    <p:spTgt spid="12"/>
+                                  </p:tgtEl>
+                                </p:cBhvr>
+                              </p:animEffect>
+                            </p:childTnLst>
+                          </p:cTn>
+                        </p:par>
+                        <p:par>
+                          <p:cTn id="11" fill="hold">
+                            <p:stCondLst>
+                              <p:cond delay="0"/>
+                            </p:stCondLst>
+                            <p:childTnLst>
+                              <p:animEffect transition="in" filter="wipe(up)">
+                                <p:cBhvr>
+                                  <p:cTn id="12" dur="380" fill="hold"/>
+                                  <p:tgtEl>
+                                    <p:spTgt spid="13"/>
+                                  </p:tgtEl>
+                                </p:cBhvr>
+                              </p:animEffect>
+                            </p:childTnLst>
+                          </p:cTn>
+                        </p:par>
+                        <p:par>
+                          <p:cTn id="13" fill="hold">
+                            <p:stCondLst>
+                              <p:cond delay="0"/>
+                            </p:stCondLst>
+                            <p:childTnLst>
+                              <p:animEffect transition="in" filter="wipe(up)">
+                                <p:cBhvr>
+                                  <p:cTn id="14" dur="380" fill="hold"/>
+                                  <p:tgtEl>
+                                    <p:spTgt spid="14"/>
+                                  </p:tgtEl>
+                                </p:cBhvr>
+                              </p:animEffect>
+                            </p:childTnLst>
+                          </p:cTn>
+                        </p:par>
+                        <p:par>
+                          <p:cTn id="15" fill="hold">
+                            <p:stCondLst>
+                              <p:cond delay="160"/>
+                            </p:stCondLst>
+                            <p:childTnLst>
+                              <p:animEffect transition="in" filter="wipe(up)">
+                                <p:cBhvr>
+                                  <p:cTn id="16" dur="380" fill="hold"/>
+                                  <p:tgtEl>
+                                    <p:spTgt spid="15"/>
+                                  </p:tgtEl>
+                                </p:cBhvr>
+                              </p:animEffect>
+                            </p:childTnLst>
+                          </p:cTn>
+                        </p:par>
+                        <p:par>
+                          <p:cTn id="17" fill="hold">
+                            <p:stCondLst>
+                              <p:cond delay="160"/>
+                            </p:stCondLst>
+                            <p:childTnLst>
+                              <p:animEffect transition="in" filter="wipe(up)">
+                                <p:cBhvr>
+                                  <p:cTn id="18" dur="380" fill="hold"/>
+                                  <p:tgtEl>
+                                    <p:spTgt spid="16"/>
+                                  </p:tgtEl>
+                                </p:cBhvr>
+                              </p:animEffect>
+                            </p:childTnLst>
+                          </p:cTn>
+                        </p:par>
+                        <p:par>
+                          <p:cTn id="19" fill="hold">
+                            <p:stCondLst>
+                              <p:cond delay="160"/>
+                            </p:stCondLst>
+                            <p:childTnLst>
+                              <p:animEffect transition="in" filter="wipe(up)">
+                                <p:cBhvr>
+                                  <p:cTn id="20" dur="380" fill="hold"/>
+                                  <p:tgtEl>
+                                    <p:spTgt spid="17"/>
+                                  </p:tgtEl>
+                                </p:cBhvr>
+                              </p:animEffect>
+                            </p:childTnLst>
+                          </p:cTn>
+                        </p:par>
+                        <p:par>
+                          <p:cTn id="21" fill="hold">
+                            <p:stCondLst>
+                              <p:cond delay="160"/>
+                            </p:stCondLst>
+                            <p:childTnLst>
+                              <p:animEffect transition="in" filter="wipe(up)">
+                                <p:cBhvr>
+                                  <p:cTn id="22" dur="380" fill="hold"/>
+                                  <p:tgtEl>
+                                    <p:spTgt spid="18"/>
+                                  </p:tgtEl>
+                                </p:cBhvr>
+                              </p:animEffect>
+                            </p:childTnLst>
+                          </p:cTn>
+                        </p:par>
+                        <p:par>
+                          <p:cTn id="23" fill="hold">
+                            <p:stCondLst>
+                              <p:cond delay="160"/>
+                            </p:stCondLst>
+                            <p:childTnLst>
+                              <p:animEffect transition="in" filter="wipe(up)">
+                                <p:cBhvr>
+                                  <p:cTn id="24" dur="380" fill="hold"/>
+                                  <p:tgtEl>
+                                    <p:spTgt spid="19"/>
+                                  </p:tgtEl>
+                                </p:cBhvr>
+                              </p:animEffect>
+                            </p:childTnLst>
+                          </p:cTn>
+                        </p:par>
+                      </p:childTnLst>
+                    </p:cTn>
+                  </p:par>
+                </p:childTnLst>
+              </p:cTn>
+              <p:prevCondLst>
+                <p:cond evt="onPrevClick" delay="0"/>
+              </p:prevCondLst>
+              <p:nextCondLst>
+                <p:cond evt="onNextClick" delay="0"/>
+              </p:nextCondLst>
+            </p:seq>
+          </p:childTnLst>
+        </p:cTn>
+      </p:par>
+    </p:tnLst>
+  </p:timing>
+  <p:transition dur="550" spd="fast">
+    <p:push dir="u"/>
+  </p:transition>
+</p:sld>
+</file>
+
+<file path=ppt/slides/slide3.xml><?xml version="1.0" encoding="utf-8"?>
+<p:sld xmlns:a="http://schemas.openxmlformats.org/drawingml/2006/main" xmlns:p="http://schemas.openxmlformats.org/presentationml/2006/main" xmlns:r="http://schemas.openxmlformats.org/officeDocument/2006/relationships">
+  <p:cSld>
+    <p:spTree>
+      <p:nvGrpSpPr>
+        <p:cNvPr id="1" name=""/>
+        <p:cNvGrpSpPr/>
+        <p:nvPr/>
+      </p:nvGrpSpPr>
+      <p:grpSpPr/>
+      <p:pic>
+        <p:nvPicPr>
+          <p:cNvPr id="2" name="Picture 1" descr="content_bg_nolog.png"/>
+          <p:cNvPicPr>
+            <a:picLocks noChangeAspect="1"/>
+          </p:cNvPicPr>
+          <p:nvPr/>
+        </p:nvPicPr>
+        <p:blipFill>
+          <a:blip r:embed="rId2"/>
+          <a:stretch>
+            <a:fillRect/>
+          </a:stretch>
+        </p:blipFill>
+        <p:spPr>
+          <a:xfrm>
+            <a:off x="0" y="0"/>
+            <a:ext cx="12191695" cy="6858000"/>
+          </a:xfrm>
+          <a:prstGeom prst="rect">
+            <a:avLst/>
+          </a:prstGeom>
+        </p:spPr>
+      </p:pic>
+      <p:sp>
+        <p:nvSpPr>
+          <p:cNvPr id="3" name="Rectangle 2"/>
+          <p:cNvSpPr/>
+          <p:nvPr/>
+        </p:nvSpPr>
+        <p:spPr>
+          <a:xfrm>
+            <a:off x="0" y="0"/>
+            <a:ext cx="12191695" cy="50800"/>
+          </a:xfrm>
+          <a:prstGeom prst="rect">
+            <a:avLst/>
+          </a:prstGeom>
+          <a:solidFill>
+            <a:srgbClr val="2FDFE5"/>
+          </a:solidFill>
+          <a:ln>
+            <a:noFill/>
+          </a:ln>
+        </p:spPr>
+        <p:style>
+          <a:lnRef idx="1">
+            <a:schemeClr val="accent1"/>
+          </a:lnRef>
+          <a:fillRef idx="3">
+            <a:schemeClr val="accent1"/>
+          </a:fillRef>
+          <a:effectRef idx="2">
+            <a:schemeClr val="accent1"/>
+          </a:effectRef>
+          <a:fontRef idx="minor">
+            <a:schemeClr val="lt1"/>
+          </a:fontRef>
+        </p:style>
+        <p:txBody>
+          <a:bodyPr rtlCol="0" anchor="ctr"/>
+          <a:lstStyle/>
+          <a:p>
+            <a:pPr algn="ctr"/>
+          </a:p>
+        </p:txBody>
+      </p:sp>
+      <p:sp>
+        <p:nvSpPr>
+          <p:cNvPr id="4" name="Rectangle 3"/>
+          <p:cNvSpPr/>
+          <p:nvPr/>
+        </p:nvSpPr>
+        <p:spPr>
+          <a:xfrm>
+            <a:off x="0" y="0"/>
+            <a:ext cx="63500" cy="6858000"/>
+          </a:xfrm>
+          <a:prstGeom prst="rect">
+            <a:avLst/>
+          </a:prstGeom>
+          <a:solidFill>
+            <a:srgbClr val="13B9BF"/>
+          </a:solidFill>
+          <a:ln>
+            <a:noFill/>
+          </a:ln>
+        </p:spPr>
+        <p:style>
+          <a:lnRef idx="1">
+            <a:schemeClr val="accent1"/>
+          </a:lnRef>
+          <a:fillRef idx="3">
+            <a:schemeClr val="accent1"/>
+          </a:fillRef>
+          <a:effectRef idx="2">
+            <a:schemeClr val="accent1"/>
+          </a:effectRef>
+          <a:fontRef idx="minor">
+            <a:schemeClr val="lt1"/>
+          </a:fontRef>
+        </p:style>
+        <p:txBody>
+          <a:bodyPr rtlCol="0" anchor="ctr"/>
+          <a:lstStyle/>
+          <a:p>
+            <a:pPr algn="ctr"/>
+          </a:p>
+        </p:txBody>
+      </p:sp>
+      <p:pic>
+        <p:nvPicPr>
+          <p:cNvPr id="5" name="Picture 4" descr="logo_round_bright.png"/>
+          <p:cNvPicPr>
+            <a:picLocks noChangeAspect="1"/>
+          </p:cNvPicPr>
+          <p:nvPr/>
+        </p:nvPicPr>
+        <p:blipFill>
+          <a:blip r:embed="rId3"/>
+          <a:stretch>
+            <a:fillRect/>
+          </a:stretch>
+        </p:blipFill>
+        <p:spPr>
+          <a:xfrm>
+            <a:off x="91440" y="54864"/>
+            <a:ext cx="1463040" cy="848563"/>
+          </a:xfrm>
+          <a:prstGeom prst="rect">
+            <a:avLst/>
+          </a:prstGeom>
+        </p:spPr>
+      </p:pic>
+      <p:sp>
+        <p:nvSpPr>
+          <p:cNvPr id="6" name="Rectangle 5"/>
+          <p:cNvSpPr/>
+          <p:nvPr/>
+        </p:nvSpPr>
+        <p:spPr>
+          <a:xfrm>
+            <a:off x="502920" y="365760"/>
+            <a:ext cx="1737360" cy="301752"/>
+          </a:xfrm>
+          <a:prstGeom prst="rect">
+            <a:avLst/>
+          </a:prstGeom>
+          <a:solidFill>
+            <a:srgbClr val="2FDFE5"/>
+          </a:solidFill>
+          <a:ln>
+            <a:noFill/>
+          </a:ln>
+        </p:spPr>
+        <p:style>
+          <a:lnRef idx="1">
+            <a:schemeClr val="accent1"/>
+          </a:lnRef>
+          <a:fillRef idx="3">
+            <a:schemeClr val="accent1"/>
+          </a:fillRef>
+          <a:effectRef idx="2">
+            <a:schemeClr val="accent1"/>
+          </a:effectRef>
+          <a:fontRef idx="minor">
+            <a:schemeClr val="lt1"/>
+          </a:fontRef>
+        </p:style>
+        <p:txBody lIns="101600" tIns="25400" rIns="101600" bIns="25400">
+          <a:bodyPr rtlCol="0" anchor="ctr" wrap="none"/>
+          <a:lstStyle/>
+          <a:p>
+            <a:pPr algn="ctr"/>
+            <a:r>
+              <a:rPr sz="1100" b="1">
+                <a:solidFill>
+                  <a:srgbClr val="0A1638"/>
+                </a:solidFill>
+              </a:rPr>
+              <a:t>FASE 2</a:t>
+            </a:r>
+          </a:p>
+        </p:txBody>
+      </p:sp>
+      <p:sp>
+        <p:nvSpPr>
+          <p:cNvPr id="7" name="TextBox 6"/>
+          <p:cNvSpPr txBox="1"/>
+          <p:nvPr/>
+        </p:nvSpPr>
+        <p:spPr>
+          <a:xfrm>
+            <a:off x="502920" y="731520"/>
+            <a:ext cx="8961120" cy="960120"/>
+          </a:xfrm>
+          <a:prstGeom prst="rect">
+            <a:avLst/>
+          </a:prstGeom>
+          <a:noFill/>
+        </p:spPr>
+        <p:txBody lIns="0" tIns="0" rIns="0" bIns="0">
+          <a:bodyPr wrap="square">
+            <a:spAutoFit/>
+          </a:bodyPr>
+          <a:lstStyle/>
+          <a:p>
+            <a:pPr algn="l"/>
+            <a:r>
+              <a:rPr sz="4000" b="1">
+                <a:solidFill>
+                  <a:srgbClr val="FFFFFF"/>
+                </a:solidFill>
+              </a:rPr>
+              <a:t>Activación y </a:t>
+            </a:r>
+            <a:r>
+              <a:rPr sz="4000" b="1">
+                <a:solidFill>
+                  <a:srgbClr val="2FDFE5"/>
+                </a:solidFill>
+              </a:rPr>
+              <a:t>contacto</a:t>
+            </a:r>
+          </a:p>
+        </p:txBody>
+      </p:sp>
+      <p:sp>
+        <p:nvSpPr>
+          <p:cNvPr id="8" name="Rectangle 7"/>
+          <p:cNvSpPr/>
+          <p:nvPr/>
+        </p:nvSpPr>
+        <p:spPr>
+          <a:xfrm>
+            <a:off x="502920" y="1737360"/>
+            <a:ext cx="4389120" cy="31750"/>
+          </a:xfrm>
+          <a:prstGeom prst="rect">
+            <a:avLst/>
+          </a:prstGeom>
+          <a:solidFill>
+            <a:srgbClr val="2FDFE5"/>
+          </a:solidFill>
+          <a:ln>
+            <a:noFill/>
+          </a:ln>
+        </p:spPr>
+        <p:style>
+          <a:lnRef idx="1">
+            <a:schemeClr val="accent1"/>
+          </a:lnRef>
+          <a:fillRef idx="3">
+            <a:schemeClr val="accent1"/>
+          </a:fillRef>
+          <a:effectRef idx="2">
+            <a:schemeClr val="accent1"/>
+          </a:effectRef>
+          <a:fontRef idx="minor">
+            <a:schemeClr val="lt1"/>
+          </a:fontRef>
+        </p:style>
+        <p:txBody>
+          <a:bodyPr rtlCol="0" anchor="ctr"/>
+          <a:lstStyle/>
+          <a:p>
+            <a:pPr algn="ctr"/>
+          </a:p>
+        </p:txBody>
+      </p:sp>
+      <p:sp>
+        <p:nvSpPr>
+          <p:cNvPr id="9" name="TextBox 8"/>
+          <p:cNvSpPr txBox="1"/>
+          <p:nvPr/>
+        </p:nvSpPr>
+        <p:spPr>
+          <a:xfrm>
+            <a:off x="502920" y="1810512"/>
+            <a:ext cx="9265615" cy="384048"/>
+          </a:xfrm>
+          <a:prstGeom prst="rect">
+            <a:avLst/>
+          </a:prstGeom>
+          <a:noFill/>
+        </p:spPr>
+        <p:txBody lIns="0" tIns="0" rIns="0" bIns="0">
+          <a:bodyPr wrap="none">
+            <a:spAutoFit/>
+          </a:bodyPr>
+          <a:lstStyle/>
+          <a:p>
+            <a:pPr algn="l"/>
+            <a:r>
+              <a:rPr sz="1300" i="1">
+                <a:solidFill>
+                  <a:srgbClr val="80A8CC"/>
+                </a:solidFill>
+              </a:rPr>
+              <a:t>Multiplicamos los canales de contacto y buscamos siempre la vía amistosa para llegar a un acuerdo.</a:t>
+            </a:r>
+          </a:p>
+        </p:txBody>
+      </p:sp>
+      <p:sp>
+        <p:nvSpPr>
+          <p:cNvPr id="10" name="Rectangle 9"/>
+          <p:cNvSpPr/>
+          <p:nvPr/>
+        </p:nvSpPr>
+        <p:spPr>
+          <a:xfrm>
+            <a:off x="502920" y="2267712"/>
+            <a:ext cx="5579211" cy="3328416"/>
+          </a:xfrm>
+          <a:prstGeom prst="rect">
+            <a:avLst/>
+          </a:prstGeom>
+          <a:solidFill>
+            <a:srgbClr val="081438"/>
+          </a:solidFill>
+          <a:ln w="12700">
+            <a:solidFill>
+              <a:srgbClr val="2FDFE5"/>
+            </a:solidFill>
+          </a:ln>
+        </p:spPr>
+        <p:style>
+          <a:lnRef idx="1">
+            <a:schemeClr val="accent1"/>
+          </a:lnRef>
+          <a:fillRef idx="3">
+            <a:schemeClr val="accent1"/>
+          </a:fillRef>
+          <a:effectRef idx="2">
+            <a:schemeClr val="accent1"/>
+          </a:effectRef>
+          <a:fontRef idx="minor">
+            <a:schemeClr val="lt1"/>
+          </a:fontRef>
+        </p:style>
+        <p:txBody>
+          <a:bodyPr rtlCol="0" anchor="ctr"/>
+          <a:lstStyle/>
+          <a:p>
+            <a:pPr algn="ctr"/>
+          </a:p>
+        </p:txBody>
+      </p:sp>
+      <p:sp>
+        <p:nvSpPr>
+          <p:cNvPr id="11" name="Rectangle 10"/>
+          <p:cNvSpPr/>
+          <p:nvPr/>
+        </p:nvSpPr>
+        <p:spPr>
+          <a:xfrm>
+            <a:off x="502920" y="2267712"/>
+            <a:ext cx="5579211" cy="63500"/>
+          </a:xfrm>
+          <a:prstGeom prst="rect">
+            <a:avLst/>
+          </a:prstGeom>
+          <a:solidFill>
+            <a:srgbClr val="2FDFE5"/>
+          </a:solidFill>
+          <a:ln>
+            <a:noFill/>
+          </a:ln>
+        </p:spPr>
+        <p:style>
+          <a:lnRef idx="1">
+            <a:schemeClr val="accent1"/>
+          </a:lnRef>
+          <a:fillRef idx="3">
+            <a:schemeClr val="accent1"/>
+          </a:fillRef>
+          <a:effectRef idx="2">
+            <a:schemeClr val="accent1"/>
+          </a:effectRef>
+          <a:fontRef idx="minor">
+            <a:schemeClr val="lt1"/>
+          </a:fontRef>
+        </p:style>
+        <p:txBody>
+          <a:bodyPr rtlCol="0" anchor="ctr"/>
+          <a:lstStyle/>
+          <a:p>
+            <a:pPr algn="ctr"/>
+          </a:p>
+        </p:txBody>
+      </p:sp>
+      <p:sp>
+        <p:nvSpPr>
+          <p:cNvPr id="12" name="TextBox 11"/>
+          <p:cNvSpPr txBox="1"/>
+          <p:nvPr/>
+        </p:nvSpPr>
+        <p:spPr>
+          <a:xfrm>
+            <a:off x="704088" y="2487168"/>
+            <a:ext cx="5176875" cy="640080"/>
+          </a:xfrm>
+          <a:prstGeom prst="rect">
+            <a:avLst/>
+          </a:prstGeom>
+          <a:noFill/>
+        </p:spPr>
+        <p:txBody lIns="38100" tIns="63500" rIns="38100" bIns="25400">
+          <a:bodyPr wrap="square">
+            <a:spAutoFit/>
+          </a:bodyPr>
+          <a:lstStyle/>
+          <a:p>
+            <a:pPr algn="l"/>
+            <a:r>
+              <a:rPr sz="1900" b="1">
+                <a:solidFill>
+                  <a:srgbClr val="2FDFE5"/>
+                </a:solidFill>
+              </a:rPr>
+              <a:t>3  </a:t>
+            </a:r>
+            <a:r>
+              <a:rPr sz="1900" b="1">
+                <a:solidFill>
+                  <a:srgbClr val="FFFFFF"/>
+                </a:solidFill>
+              </a:rPr>
+              <a:t>Contactación multicanal</a:t>
+            </a:r>
+          </a:p>
+        </p:txBody>
+      </p:sp>
+      <p:sp>
+        <p:nvSpPr>
+          <p:cNvPr id="13" name="Rectangle 12"/>
+          <p:cNvSpPr/>
+          <p:nvPr/>
+        </p:nvSpPr>
+        <p:spPr>
+          <a:xfrm>
+            <a:off x="667512" y="3218688"/>
+            <a:ext cx="5250027" cy="19050"/>
+          </a:xfrm>
+          <a:prstGeom prst="rect">
+            <a:avLst/>
+          </a:prstGeom>
+          <a:solidFill>
+            <a:srgbClr val="13B9BF"/>
+          </a:solidFill>
+          <a:ln>
+            <a:noFill/>
+          </a:ln>
+        </p:spPr>
+        <p:style>
+          <a:lnRef idx="1">
+            <a:schemeClr val="accent1"/>
+          </a:lnRef>
+          <a:fillRef idx="3">
+            <a:schemeClr val="accent1"/>
+          </a:fillRef>
+          <a:effectRef idx="2">
+            <a:schemeClr val="accent1"/>
+          </a:effectRef>
+          <a:fontRef idx="minor">
+            <a:schemeClr val="lt1"/>
+          </a:fontRef>
+        </p:style>
+        <p:txBody>
+          <a:bodyPr rtlCol="0" anchor="ctr"/>
+          <a:lstStyle/>
+          <a:p>
+            <a:pPr algn="ctr"/>
+          </a:p>
+        </p:txBody>
+      </p:sp>
+      <p:sp>
+        <p:nvSpPr>
+          <p:cNvPr id="14" name="TextBox 13"/>
+          <p:cNvSpPr txBox="1"/>
+          <p:nvPr/>
+        </p:nvSpPr>
+        <p:spPr>
+          <a:xfrm>
+            <a:off x="667512" y="3345688"/>
+            <a:ext cx="5250027" cy="2249424"/>
+          </a:xfrm>
+          <a:prstGeom prst="rect">
+            <a:avLst/>
+          </a:prstGeom>
+          <a:noFill/>
+        </p:spPr>
+        <p:txBody lIns="50800" tIns="50800" rIns="50800" bIns="50800">
+          <a:bodyPr wrap="square">
+            <a:spAutoFit/>
+          </a:bodyPr>
+          <a:lstStyle/>
+          <a:p>
+            <a:pPr algn="l">
+              <a:spcBef>
+                <a:spcPts val="1800"/>
+              </a:spcBef>
+            </a:pPr>
+            <a:r>
+              <a:rPr sz="1400">
+                <a:solidFill>
+                  <a:srgbClr val="2FDFE5"/>
+                </a:solidFill>
+              </a:rPr>
+              <a:t>▸  </a:t>
+            </a:r>
+            <a:r>
+              <a:rPr sz="1700">
+                <a:solidFill>
+                  <a:srgbClr val="D8EAFF"/>
+                </a:solidFill>
+              </a:rPr>
+              <a:t>Primeras comunicaciones: teléfono, SMS, email y mensajería</a:t>
+            </a:r>
+          </a:p>
+          <a:p>
+            <a:pPr algn="l">
+              <a:spcBef>
+                <a:spcPts val="1800"/>
+              </a:spcBef>
+            </a:pPr>
+            <a:r>
+              <a:rPr sz="1400">
+                <a:solidFill>
+                  <a:srgbClr val="2FDFE5"/>
+                </a:solidFill>
+              </a:rPr>
+              <a:t>▸  </a:t>
+            </a:r>
+            <a:r>
+              <a:rPr sz="1700">
+                <a:solidFill>
+                  <a:srgbClr val="D8EAFF"/>
+                </a:solidFill>
+              </a:rPr>
+              <a:t>Verificación de datos de contacto y situación del cliente</a:t>
+            </a:r>
+          </a:p>
+          <a:p>
+            <a:pPr algn="l">
+              <a:spcBef>
+                <a:spcPts val="1800"/>
+              </a:spcBef>
+            </a:pPr>
+            <a:r>
+              <a:rPr sz="1400">
+                <a:solidFill>
+                  <a:srgbClr val="2FDFE5"/>
+                </a:solidFill>
+              </a:rPr>
+              <a:t>▸  </a:t>
+            </a:r>
+            <a:r>
+              <a:rPr sz="1700">
+                <a:solidFill>
+                  <a:srgbClr val="D8EAFF"/>
+                </a:solidFill>
+              </a:rPr>
+              <a:t>Búsqueda activa de datos en no contactados o sin localización</a:t>
+            </a:r>
+          </a:p>
+        </p:txBody>
+      </p:sp>
+      <p:sp>
+        <p:nvSpPr>
+          <p:cNvPr id="15" name="Rectangle 14"/>
+          <p:cNvSpPr/>
+          <p:nvPr/>
+        </p:nvSpPr>
+        <p:spPr>
+          <a:xfrm>
+            <a:off x="6283299" y="2267712"/>
+            <a:ext cx="5579211" cy="3328416"/>
+          </a:xfrm>
+          <a:prstGeom prst="rect">
+            <a:avLst/>
+          </a:prstGeom>
+          <a:solidFill>
+            <a:srgbClr val="081438"/>
+          </a:solidFill>
+          <a:ln w="12700">
+            <a:solidFill>
+              <a:srgbClr val="2FDFE5"/>
+            </a:solidFill>
+          </a:ln>
+        </p:spPr>
+        <p:style>
+          <a:lnRef idx="1">
+            <a:schemeClr val="accent1"/>
+          </a:lnRef>
+          <a:fillRef idx="3">
+            <a:schemeClr val="accent1"/>
+          </a:fillRef>
+          <a:effectRef idx="2">
+            <a:schemeClr val="accent1"/>
+          </a:effectRef>
+          <a:fontRef idx="minor">
+            <a:schemeClr val="lt1"/>
+          </a:fontRef>
+        </p:style>
+        <p:txBody>
+          <a:bodyPr rtlCol="0" anchor="ctr"/>
+          <a:lstStyle/>
+          <a:p>
+            <a:pPr algn="ctr"/>
+          </a:p>
+        </p:txBody>
+      </p:sp>
+      <p:sp>
+        <p:nvSpPr>
+          <p:cNvPr id="16" name="Rectangle 15"/>
+          <p:cNvSpPr/>
+          <p:nvPr/>
+        </p:nvSpPr>
+        <p:spPr>
+          <a:xfrm>
+            <a:off x="6283299" y="2267712"/>
+            <a:ext cx="5579211" cy="63500"/>
+          </a:xfrm>
+          <a:prstGeom prst="rect">
+            <a:avLst/>
+          </a:prstGeom>
+          <a:solidFill>
+            <a:srgbClr val="2FDFE5"/>
+          </a:solidFill>
+          <a:ln>
+            <a:noFill/>
+          </a:ln>
+        </p:spPr>
+        <p:style>
+          <a:lnRef idx="1">
+            <a:schemeClr val="accent1"/>
+          </a:lnRef>
+          <a:fillRef idx="3">
+            <a:schemeClr val="accent1"/>
+          </a:fillRef>
+          <a:effectRef idx="2">
+            <a:schemeClr val="accent1"/>
+          </a:effectRef>
+          <a:fontRef idx="minor">
+            <a:schemeClr val="lt1"/>
+          </a:fontRef>
+        </p:style>
+        <p:txBody>
+          <a:bodyPr rtlCol="0" anchor="ctr"/>
+          <a:lstStyle/>
+          <a:p>
+            <a:pPr algn="ctr"/>
+          </a:p>
+        </p:txBody>
+      </p:sp>
+      <p:sp>
+        <p:nvSpPr>
+          <p:cNvPr id="17" name="TextBox 16"/>
+          <p:cNvSpPr txBox="1"/>
+          <p:nvPr/>
+        </p:nvSpPr>
+        <p:spPr>
+          <a:xfrm>
+            <a:off x="6484467" y="2487168"/>
+            <a:ext cx="5176875" cy="640080"/>
+          </a:xfrm>
+          <a:prstGeom prst="rect">
+            <a:avLst/>
+          </a:prstGeom>
+          <a:noFill/>
+        </p:spPr>
+        <p:txBody lIns="38100" tIns="63500" rIns="38100" bIns="25400">
+          <a:bodyPr wrap="square">
+            <a:spAutoFit/>
+          </a:bodyPr>
+          <a:lstStyle/>
+          <a:p>
+            <a:pPr algn="l"/>
+            <a:r>
+              <a:rPr sz="1900" b="1">
+                <a:solidFill>
+                  <a:srgbClr val="2FDFE5"/>
+                </a:solidFill>
+              </a:rPr>
+              <a:t>4  </a:t>
+            </a:r>
+            <a:r>
+              <a:rPr sz="1900" b="1">
+                <a:solidFill>
+                  <a:srgbClr val="FFFFFF"/>
+                </a:solidFill>
+              </a:rPr>
+              <a:t>Acuerdos personalizados</a:t>
+            </a:r>
+          </a:p>
+        </p:txBody>
+      </p:sp>
+      <p:sp>
+        <p:nvSpPr>
+          <p:cNvPr id="18" name="Rectangle 17"/>
+          <p:cNvSpPr/>
+          <p:nvPr/>
+        </p:nvSpPr>
+        <p:spPr>
+          <a:xfrm>
+            <a:off x="6447891" y="3218688"/>
+            <a:ext cx="5250027" cy="19050"/>
+          </a:xfrm>
+          <a:prstGeom prst="rect">
+            <a:avLst/>
+          </a:prstGeom>
+          <a:solidFill>
+            <a:srgbClr val="13B9BF"/>
+          </a:solidFill>
+          <a:ln>
+            <a:noFill/>
+          </a:ln>
+        </p:spPr>
+        <p:style>
+          <a:lnRef idx="1">
+            <a:schemeClr val="accent1"/>
+          </a:lnRef>
+          <a:fillRef idx="3">
+            <a:schemeClr val="accent1"/>
+          </a:fillRef>
+          <a:effectRef idx="2">
+            <a:schemeClr val="accent1"/>
+          </a:effectRef>
+          <a:fontRef idx="minor">
+            <a:schemeClr val="lt1"/>
+          </a:fontRef>
+        </p:style>
+        <p:txBody>
+          <a:bodyPr rtlCol="0" anchor="ctr"/>
+          <a:lstStyle/>
+          <a:p>
+            <a:pPr algn="ctr"/>
+          </a:p>
+        </p:txBody>
+      </p:sp>
+      <p:sp>
+        <p:nvSpPr>
+          <p:cNvPr id="19" name="TextBox 18"/>
+          <p:cNvSpPr txBox="1"/>
+          <p:nvPr/>
+        </p:nvSpPr>
+        <p:spPr>
+          <a:xfrm>
+            <a:off x="6447891" y="3345688"/>
+            <a:ext cx="5250027" cy="2249424"/>
+          </a:xfrm>
+          <a:prstGeom prst="rect">
+            <a:avLst/>
+          </a:prstGeom>
+          <a:noFill/>
+        </p:spPr>
+        <p:txBody lIns="50800" tIns="50800" rIns="50800" bIns="50800">
+          <a:bodyPr wrap="square">
+            <a:spAutoFit/>
+          </a:bodyPr>
+          <a:lstStyle/>
+          <a:p>
+            <a:pPr algn="l">
+              <a:spcBef>
+                <a:spcPts val="1800"/>
+              </a:spcBef>
+            </a:pPr>
+            <a:r>
+              <a:rPr sz="1400">
+                <a:solidFill>
+                  <a:srgbClr val="2FDFE5"/>
+                </a:solidFill>
+              </a:rPr>
+              <a:t>▸  </a:t>
+            </a:r>
+            <a:r>
+              <a:rPr sz="1700">
+                <a:solidFill>
+                  <a:srgbClr val="D8EAFF"/>
+                </a:solidFill>
+              </a:rPr>
+              <a:t>Análisis de la capacidad de pago del deudor</a:t>
+            </a:r>
+          </a:p>
+          <a:p>
+            <a:pPr algn="l">
+              <a:spcBef>
+                <a:spcPts val="1800"/>
+              </a:spcBef>
+            </a:pPr>
+            <a:r>
+              <a:rPr sz="1400">
+                <a:solidFill>
+                  <a:srgbClr val="2FDFE5"/>
+                </a:solidFill>
+              </a:rPr>
+              <a:t>▸  </a:t>
+            </a:r>
+            <a:r>
+              <a:rPr sz="1700">
+                <a:solidFill>
+                  <a:srgbClr val="D8EAFF"/>
+                </a:solidFill>
+              </a:rPr>
+              <a:t>Propuesta de acuerdos personalizados</a:t>
+            </a:r>
+          </a:p>
+          <a:p>
+            <a:pPr algn="l">
+              <a:spcBef>
+                <a:spcPts val="1800"/>
+              </a:spcBef>
+            </a:pPr>
+            <a:r>
+              <a:rPr sz="1400">
+                <a:solidFill>
+                  <a:srgbClr val="2FDFE5"/>
+                </a:solidFill>
+              </a:rPr>
+              <a:t>▸  </a:t>
+            </a:r>
+            <a:r>
+              <a:rPr sz="1700">
+                <a:solidFill>
+                  <a:srgbClr val="D8EAFF"/>
+                </a:solidFill>
+              </a:rPr>
+              <a:t>Formalización y seguimiento de planes de pago</a:t>
+            </a:r>
+          </a:p>
+        </p:txBody>
+      </p:sp>
+    </p:spTree>
+  </p:cSld>
+  <p:clrMapOvr>
+    <a:masterClrMapping/>
+  </p:clrMapOvr>
+  <p:timing>
+    <p:tnLst>
+      <p:par>
+        <p:cTn id="1" dur="indefin" restart="whenNotActive" nodeType="tmRoot">
+          <p:childTnLst>
+            <p:seq concurrent="1" nextAc="seek">
+              <p:cTn id="2" dur="indefin" nodeType="mainSeq">
+                <p:childTnLst>
+                  <p:par>
+                    <p:cTn id="3" fill="hold">
+                      <p:stCondLst>
+                        <p:cond delay="0"/>
+                      </p:stCondLst>
+                      <p:childTnLst>
+                        <p:par>
+                          <p:cTn id="5" fill="hold">
+                            <p:stCondLst>
+                              <p:cond delay="0"/>
+                            </p:stCondLst>
+                            <p:childTnLst>
+                              <p:animEffect transition="in" filter="wipe(up)">
+                                <p:cBhvr>
+                                  <p:cTn id="6" dur="380" fill="hold"/>
+                                  <p:tgtEl>
+                                    <p:spTgt spid="10"/>
+                                  </p:tgtEl>
+                                </p:cBhvr>
+                              </p:animEffect>
+                            </p:childTnLst>
+                          </p:cTn>
+                        </p:par>
+                        <p:par>
+                          <p:cTn id="7" fill="hold">
+                            <p:stCondLst>
+                              <p:cond delay="0"/>
+                            </p:stCondLst>
+                            <p:childTnLst>
+                              <p:animEffect transition="in" filter="wipe(up)">
+                                <p:cBhvr>
+                                  <p:cTn id="8" dur="380" fill="hold"/>
+                                  <p:tgtEl>
+                                    <p:spTgt spid="11"/>
+                                  </p:tgtEl>
+                                </p:cBhvr>
+                              </p:animEffect>
+                            </p:childTnLst>
+                          </p:cTn>
+                        </p:par>
+                        <p:par>
+                          <p:cTn id="9" fill="hold">
+                            <p:stCondLst>
+                              <p:cond delay="0"/>
+                            </p:stCondLst>
+                            <p:childTnLst>
+                              <p:animEffect transition="in" filter="wipe(up)">
+                                <p:cBhvr>
+                                  <p:cTn id="10" dur="380" fill="hold"/>
+                                  <p:tgtEl>
+                                    <p:spTgt spid="12"/>
+                                  </p:tgtEl>
+                                </p:cBhvr>
+                              </p:animEffect>
+                            </p:childTnLst>
+                          </p:cTn>
+                        </p:par>
+                        <p:par>
+                          <p:cTn id="11" fill="hold">
+                            <p:stCondLst>
+                              <p:cond delay="0"/>
+                            </p:stCondLst>
+                            <p:childTnLst>
+                              <p:animEffect transition="in" filter="wipe(up)">
+                                <p:cBhvr>
+                                  <p:cTn id="12" dur="380" fill="hold"/>
+                                  <p:tgtEl>
+                                    <p:spTgt spid="13"/>
+                                  </p:tgtEl>
+                                </p:cBhvr>
+                              </p:animEffect>
+                            </p:childTnLst>
+                          </p:cTn>
+                        </p:par>
+                        <p:par>
+                          <p:cTn id="13" fill="hold">
+                            <p:stCondLst>
+                              <p:cond delay="0"/>
+                            </p:stCondLst>
+                            <p:childTnLst>
+                              <p:animEffect transition="in" filter="wipe(up)">
+                                <p:cBhvr>
+                                  <p:cTn id="14" dur="380" fill="hold"/>
+                                  <p:tgtEl>
+                                    <p:spTgt spid="14"/>
+                                  </p:tgtEl>
+                                </p:cBhvr>
+                              </p:animEffect>
+                            </p:childTnLst>
+                          </p:cTn>
+                        </p:par>
+                        <p:par>
+                          <p:cTn id="15" fill="hold">
+                            <p:stCondLst>
+                              <p:cond delay="160"/>
+                            </p:stCondLst>
+                            <p:childTnLst>
+                              <p:animEffect transition="in" filter="wipe(up)">
+                                <p:cBhvr>
+                                  <p:cTn id="16" dur="380" fill="hold"/>
+                                  <p:tgtEl>
+                                    <p:spTgt spid="15"/>
+                                  </p:tgtEl>
+                                </p:cBhvr>
+                              </p:animEffect>
+                            </p:childTnLst>
+                          </p:cTn>
+                        </p:par>
+                        <p:par>
+                          <p:cTn id="17" fill="hold">
+                            <p:stCondLst>
+                              <p:cond delay="160"/>
+                            </p:stCondLst>
+                            <p:childTnLst>
+                              <p:animEffect transition="in" filter="wipe(up)">
+                                <p:cBhvr>
+                                  <p:cTn id="18" dur="380" fill="hold"/>
+                                  <p:tgtEl>
+                                    <p:spTgt spid="16"/>
+                                  </p:tgtEl>
+                                </p:cBhvr>
+                              </p:animEffect>
+                            </p:childTnLst>
+                          </p:cTn>
+                        </p:par>
+                        <p:par>
+                          <p:cTn id="19" fill="hold">
+                            <p:stCondLst>
+                              <p:cond delay="160"/>
+                            </p:stCondLst>
+                            <p:childTnLst>
+                              <p:animEffect transition="in" filter="wipe(up)">
+                                <p:cBhvr>
+                                  <p:cTn id="20" dur="380" fill="hold"/>
+                                  <p:tgtEl>
+                                    <p:spTgt spid="17"/>
+                                  </p:tgtEl>
+                                </p:cBhvr>
+                              </p:animEffect>
+                            </p:childTnLst>
+                          </p:cTn>
+                        </p:par>
+                        <p:par>
+                          <p:cTn id="21" fill="hold">
+                            <p:stCondLst>
+                              <p:cond delay="160"/>
+                            </p:stCondLst>
+                            <p:childTnLst>
+                              <p:animEffect transition="in" filter="wipe(up)">
+                                <p:cBhvr>
+                                  <p:cTn id="22" dur="380" fill="hold"/>
+                                  <p:tgtEl>
+                                    <p:spTgt spid="18"/>
+                                  </p:tgtEl>
+                                </p:cBhvr>
+                              </p:animEffect>
+                            </p:childTnLst>
+                          </p:cTn>
+                        </p:par>
+                        <p:par>
+                          <p:cTn id="23" fill="hold">
+                            <p:stCondLst>
+                              <p:cond delay="160"/>
+                            </p:stCondLst>
+                            <p:childTnLst>
+                              <p:animEffect transition="in" filter="wipe(up)">
+                                <p:cBhvr>
+                                  <p:cTn id="24" dur="380" fill="hold"/>
+                                  <p:tgtEl>
+                                    <p:spTgt spid="19"/>
+                                  </p:tgtEl>
+                                </p:cBhvr>
+                              </p:animEffect>
+                            </p:childTnLst>
+                          </p:cTn>
+                        </p:par>
+                      </p:childTnLst>
+                    </p:cTn>
+                  </p:par>
+                </p:childTnLst>
+              </p:cTn>
+              <p:prevCondLst>
+                <p:cond evt="onPrevClick" delay="0"/>
+              </p:prevCondLst>
+              <p:nextCondLst>
+                <p:cond evt="onNextClick" delay="0"/>
+              </p:nextCondLst>
+            </p:seq>
+          </p:childTnLst>
+        </p:cTn>
+      </p:par>
+    </p:tnLst>
+  </p:timing>
+  <p:transition dur="550" spd="fast">
+    <p:push dir="u"/>
+  </p:transition>
+</p:sld>
+</file>
+
+<file path=ppt/slides/slide4.xml><?xml version="1.0" encoding="utf-8"?>
+<p:sld xmlns:a="http://schemas.openxmlformats.org/drawingml/2006/main" xmlns:p="http://schemas.openxmlformats.org/presentationml/2006/main" xmlns:r="http://schemas.openxmlformats.org/officeDocument/2006/relationships">
+  <p:cSld>
+    <p:spTree>
+      <p:nvGrpSpPr>
+        <p:cNvPr id="1" name=""/>
+        <p:cNvGrpSpPr/>
+        <p:nvPr/>
+      </p:nvGrpSpPr>
+      <p:grpSpPr/>
+      <p:pic>
+        <p:nvPicPr>
+          <p:cNvPr id="2" name="Picture 1" descr="content_bg_nolog.png"/>
+          <p:cNvPicPr>
+            <a:picLocks noChangeAspect="1"/>
+          </p:cNvPicPr>
+          <p:nvPr/>
+        </p:nvPicPr>
+        <p:blipFill>
+          <a:blip r:embed="rId2"/>
+          <a:stretch>
+            <a:fillRect/>
+          </a:stretch>
+        </p:blipFill>
+        <p:spPr>
+          <a:xfrm>
+            <a:off x="0" y="0"/>
+            <a:ext cx="12191695" cy="6858000"/>
+          </a:xfrm>
+          <a:prstGeom prst="rect">
+            <a:avLst/>
+          </a:prstGeom>
+        </p:spPr>
+      </p:pic>
+      <p:sp>
+        <p:nvSpPr>
+          <p:cNvPr id="3" name="Rectangle 2"/>
+          <p:cNvSpPr/>
+          <p:nvPr/>
+        </p:nvSpPr>
+        <p:spPr>
+          <a:xfrm>
+            <a:off x="0" y="0"/>
+            <a:ext cx="12191695" cy="50800"/>
+          </a:xfrm>
+          <a:prstGeom prst="rect">
+            <a:avLst/>
+          </a:prstGeom>
+          <a:solidFill>
+            <a:srgbClr val="2FDFE5"/>
+          </a:solidFill>
+          <a:ln>
+            <a:noFill/>
+          </a:ln>
+        </p:spPr>
+        <p:style>
+          <a:lnRef idx="1">
+            <a:schemeClr val="accent1"/>
+          </a:lnRef>
+          <a:fillRef idx="3">
+            <a:schemeClr val="accent1"/>
+          </a:fillRef>
+          <a:effectRef idx="2">
+            <a:schemeClr val="accent1"/>
+          </a:effectRef>
+          <a:fontRef idx="minor">
+            <a:schemeClr val="lt1"/>
+          </a:fontRef>
+        </p:style>
+        <p:txBody>
+          <a:bodyPr rtlCol="0" anchor="ctr"/>
+          <a:lstStyle/>
+          <a:p>
+            <a:pPr algn="ctr"/>
+          </a:p>
+        </p:txBody>
+      </p:sp>
+      <p:sp>
+        <p:nvSpPr>
+          <p:cNvPr id="4" name="Rectangle 3"/>
+          <p:cNvSpPr/>
+          <p:nvPr/>
+        </p:nvSpPr>
+        <p:spPr>
+          <a:xfrm>
+            <a:off x="0" y="0"/>
+            <a:ext cx="63500" cy="6858000"/>
+          </a:xfrm>
+          <a:prstGeom prst="rect">
+            <a:avLst/>
+          </a:prstGeom>
+          <a:solidFill>
+            <a:srgbClr val="13B9BF"/>
+          </a:solidFill>
+          <a:ln>
+            <a:noFill/>
+          </a:ln>
+        </p:spPr>
+        <p:style>
+          <a:lnRef idx="1">
+            <a:schemeClr val="accent1"/>
+          </a:lnRef>
+          <a:fillRef idx="3">
+            <a:schemeClr val="accent1"/>
+          </a:fillRef>
+          <a:effectRef idx="2">
+            <a:schemeClr val="accent1"/>
+          </a:effectRef>
+          <a:fontRef idx="minor">
+            <a:schemeClr val="lt1"/>
+          </a:fontRef>
+        </p:style>
+        <p:txBody>
+          <a:bodyPr rtlCol="0" anchor="ctr"/>
+          <a:lstStyle/>
+          <a:p>
+            <a:pPr algn="ctr"/>
+          </a:p>
+        </p:txBody>
+      </p:sp>
+      <p:pic>
+        <p:nvPicPr>
+          <p:cNvPr id="5" name="Picture 4" descr="logo_round_bright.png"/>
+          <p:cNvPicPr>
+            <a:picLocks noChangeAspect="1"/>
+          </p:cNvPicPr>
+          <p:nvPr/>
+        </p:nvPicPr>
+        <p:blipFill>
+          <a:blip r:embed="rId3"/>
+          <a:stretch>
+            <a:fillRect/>
+          </a:stretch>
+        </p:blipFill>
+        <p:spPr>
+          <a:xfrm>
+            <a:off x="91440" y="54864"/>
+            <a:ext cx="1463040" cy="848563"/>
+          </a:xfrm>
+          <a:prstGeom prst="rect">
+            <a:avLst/>
+          </a:prstGeom>
+        </p:spPr>
+      </p:pic>
+      <p:sp>
+        <p:nvSpPr>
+          <p:cNvPr id="6" name="Rectangle 5"/>
+          <p:cNvSpPr/>
+          <p:nvPr/>
+        </p:nvSpPr>
+        <p:spPr>
+          <a:xfrm>
+            <a:off x="502920" y="365760"/>
+            <a:ext cx="1737360" cy="301752"/>
+          </a:xfrm>
+          <a:prstGeom prst="rect">
+            <a:avLst/>
+          </a:prstGeom>
+          <a:solidFill>
+            <a:srgbClr val="2FDFE5"/>
+          </a:solidFill>
+          <a:ln>
+            <a:noFill/>
+          </a:ln>
+        </p:spPr>
+        <p:style>
+          <a:lnRef idx="1">
+            <a:schemeClr val="accent1"/>
+          </a:lnRef>
+          <a:fillRef idx="3">
+            <a:schemeClr val="accent1"/>
+          </a:fillRef>
+          <a:effectRef idx="2">
+            <a:schemeClr val="accent1"/>
+          </a:effectRef>
+          <a:fontRef idx="minor">
+            <a:schemeClr val="lt1"/>
+          </a:fontRef>
+        </p:style>
+        <p:txBody lIns="101600" tIns="25400" rIns="101600" bIns="25400">
+          <a:bodyPr rtlCol="0" anchor="ctr" wrap="none"/>
+          <a:lstStyle/>
+          <a:p>
+            <a:pPr algn="ctr"/>
+            <a:r>
+              <a:rPr sz="1100" b="1">
+                <a:solidFill>
+                  <a:srgbClr val="0A1638"/>
+                </a:solidFill>
+              </a:rPr>
+              <a:t>FASE 3</a:t>
+            </a:r>
+          </a:p>
+        </p:txBody>
+      </p:sp>
+      <p:sp>
+        <p:nvSpPr>
+          <p:cNvPr id="7" name="TextBox 6"/>
+          <p:cNvSpPr txBox="1"/>
+          <p:nvPr/>
+        </p:nvSpPr>
+        <p:spPr>
+          <a:xfrm>
+            <a:off x="502920" y="731520"/>
+            <a:ext cx="8961120" cy="960120"/>
+          </a:xfrm>
+          <a:prstGeom prst="rect">
+            <a:avLst/>
+          </a:prstGeom>
+          <a:noFill/>
+        </p:spPr>
+        <p:txBody lIns="0" tIns="0" rIns="0" bIns="0">
+          <a:bodyPr wrap="square">
+            <a:spAutoFit/>
+          </a:bodyPr>
+          <a:lstStyle/>
+          <a:p>
+            <a:pPr algn="l"/>
+            <a:r>
+              <a:rPr sz="4000" b="1">
+                <a:solidFill>
+                  <a:srgbClr val="FFFFFF"/>
+                </a:solidFill>
+              </a:rPr>
+              <a:t>Gestión </a:t>
+            </a:r>
+            <a:r>
+              <a:rPr sz="4000" b="1">
+                <a:solidFill>
+                  <a:srgbClr val="2FDFE5"/>
+                </a:solidFill>
+              </a:rPr>
+              <a:t>continuada</a:t>
+            </a:r>
+          </a:p>
+        </p:txBody>
+      </p:sp>
+      <p:sp>
+        <p:nvSpPr>
+          <p:cNvPr id="8" name="Rectangle 7"/>
+          <p:cNvSpPr/>
+          <p:nvPr/>
+        </p:nvSpPr>
+        <p:spPr>
+          <a:xfrm>
+            <a:off x="502920" y="1737360"/>
+            <a:ext cx="4389120" cy="31750"/>
+          </a:xfrm>
+          <a:prstGeom prst="rect">
+            <a:avLst/>
+          </a:prstGeom>
+          <a:solidFill>
+            <a:srgbClr val="2FDFE5"/>
+          </a:solidFill>
+          <a:ln>
+            <a:noFill/>
+          </a:ln>
+        </p:spPr>
+        <p:style>
+          <a:lnRef idx="1">
+            <a:schemeClr val="accent1"/>
+          </a:lnRef>
+          <a:fillRef idx="3">
+            <a:schemeClr val="accent1"/>
+          </a:fillRef>
+          <a:effectRef idx="2">
+            <a:schemeClr val="accent1"/>
+          </a:effectRef>
+          <a:fontRef idx="minor">
+            <a:schemeClr val="lt1"/>
+          </a:fontRef>
+        </p:style>
+        <p:txBody>
+          <a:bodyPr rtlCol="0" anchor="ctr"/>
+          <a:lstStyle/>
+          <a:p>
+            <a:pPr algn="ctr"/>
+          </a:p>
+        </p:txBody>
+      </p:sp>
+      <p:sp>
+        <p:nvSpPr>
+          <p:cNvPr id="9" name="TextBox 8"/>
+          <p:cNvSpPr txBox="1"/>
+          <p:nvPr/>
+        </p:nvSpPr>
+        <p:spPr>
+          <a:xfrm>
+            <a:off x="502920" y="1810512"/>
+            <a:ext cx="9265615" cy="384048"/>
+          </a:xfrm>
+          <a:prstGeom prst="rect">
+            <a:avLst/>
+          </a:prstGeom>
+          <a:noFill/>
+        </p:spPr>
+        <p:txBody lIns="0" tIns="0" rIns="0" bIns="0">
+          <a:bodyPr wrap="none">
+            <a:spAutoFit/>
+          </a:bodyPr>
+          <a:lstStyle/>
+          <a:p>
+            <a:pPr algn="l"/>
+            <a:r>
+              <a:rPr sz="1300" i="1">
+                <a:solidFill>
+                  <a:srgbClr val="80A8CC"/>
+                </a:solidFill>
+              </a:rPr>
+              <a:t>El seguimiento constante y la transparencia en el reporting mantienen cada expediente bajo control.</a:t>
+            </a:r>
+          </a:p>
+        </p:txBody>
+      </p:sp>
+      <p:sp>
+        <p:nvSpPr>
+          <p:cNvPr id="10" name="Rectangle 9"/>
+          <p:cNvSpPr/>
+          <p:nvPr/>
+        </p:nvSpPr>
+        <p:spPr>
+          <a:xfrm>
+            <a:off x="502920" y="2267712"/>
+            <a:ext cx="5579211" cy="3328416"/>
+          </a:xfrm>
+          <a:prstGeom prst="rect">
+            <a:avLst/>
+          </a:prstGeom>
+          <a:solidFill>
+            <a:srgbClr val="081438"/>
+          </a:solidFill>
+          <a:ln w="12700">
+            <a:solidFill>
+              <a:srgbClr val="2FDFE5"/>
+            </a:solidFill>
+          </a:ln>
+        </p:spPr>
+        <p:style>
+          <a:lnRef idx="1">
+            <a:schemeClr val="accent1"/>
+          </a:lnRef>
+          <a:fillRef idx="3">
+            <a:schemeClr val="accent1"/>
+          </a:fillRef>
+          <a:effectRef idx="2">
+            <a:schemeClr val="accent1"/>
+          </a:effectRef>
+          <a:fontRef idx="minor">
+            <a:schemeClr val="lt1"/>
+          </a:fontRef>
+        </p:style>
+        <p:txBody>
+          <a:bodyPr rtlCol="0" anchor="ctr"/>
+          <a:lstStyle/>
+          <a:p>
+            <a:pPr algn="ctr"/>
+          </a:p>
+        </p:txBody>
+      </p:sp>
+      <p:sp>
+        <p:nvSpPr>
+          <p:cNvPr id="11" name="Rectangle 10"/>
+          <p:cNvSpPr/>
+          <p:nvPr/>
+        </p:nvSpPr>
+        <p:spPr>
+          <a:xfrm>
+            <a:off x="502920" y="2267712"/>
+            <a:ext cx="5579211" cy="63500"/>
+          </a:xfrm>
+          <a:prstGeom prst="rect">
+            <a:avLst/>
+          </a:prstGeom>
+          <a:solidFill>
+            <a:srgbClr val="2FDFE5"/>
+          </a:solidFill>
+          <a:ln>
+            <a:noFill/>
+          </a:ln>
+        </p:spPr>
+        <p:style>
+          <a:lnRef idx="1">
+            <a:schemeClr val="accent1"/>
+          </a:lnRef>
+          <a:fillRef idx="3">
+            <a:schemeClr val="accent1"/>
+          </a:fillRef>
+          <a:effectRef idx="2">
+            <a:schemeClr val="accent1"/>
+          </a:effectRef>
+          <a:fontRef idx="minor">
+            <a:schemeClr val="lt1"/>
+          </a:fontRef>
+        </p:style>
+        <p:txBody>
+          <a:bodyPr rtlCol="0" anchor="ctr"/>
+          <a:lstStyle/>
+          <a:p>
+            <a:pPr algn="ctr"/>
+          </a:p>
+        </p:txBody>
+      </p:sp>
+      <p:sp>
+        <p:nvSpPr>
+          <p:cNvPr id="12" name="TextBox 11"/>
+          <p:cNvSpPr txBox="1"/>
+          <p:nvPr/>
+        </p:nvSpPr>
+        <p:spPr>
+          <a:xfrm>
+            <a:off x="704088" y="2487168"/>
+            <a:ext cx="5176875" cy="640080"/>
+          </a:xfrm>
+          <a:prstGeom prst="rect">
+            <a:avLst/>
+          </a:prstGeom>
+          <a:noFill/>
+        </p:spPr>
+        <p:txBody lIns="38100" tIns="63500" rIns="38100" bIns="25400">
+          <a:bodyPr wrap="square">
+            <a:spAutoFit/>
+          </a:bodyPr>
+          <a:lstStyle/>
+          <a:p>
+            <a:pPr algn="l"/>
+            <a:r>
+              <a:rPr sz="1900" b="1">
+                <a:solidFill>
+                  <a:srgbClr val="2FDFE5"/>
+                </a:solidFill>
+              </a:rPr>
+              <a:t>5  </a:t>
+            </a:r>
+            <a:r>
+              <a:rPr sz="1900" b="1">
+                <a:solidFill>
+                  <a:srgbClr val="FFFFFF"/>
+                </a:solidFill>
+              </a:rPr>
+              <a:t>Monitorización activa</a:t>
+            </a:r>
+          </a:p>
+        </p:txBody>
+      </p:sp>
+      <p:sp>
+        <p:nvSpPr>
+          <p:cNvPr id="13" name="Rectangle 12"/>
+          <p:cNvSpPr/>
+          <p:nvPr/>
+        </p:nvSpPr>
+        <p:spPr>
+          <a:xfrm>
+            <a:off x="667512" y="3218688"/>
+            <a:ext cx="5250027" cy="19050"/>
+          </a:xfrm>
+          <a:prstGeom prst="rect">
+            <a:avLst/>
+          </a:prstGeom>
+          <a:solidFill>
+            <a:srgbClr val="13B9BF"/>
+          </a:solidFill>
+          <a:ln>
+            <a:noFill/>
+          </a:ln>
+        </p:spPr>
+        <p:style>
+          <a:lnRef idx="1">
+            <a:schemeClr val="accent1"/>
+          </a:lnRef>
+          <a:fillRef idx="3">
+            <a:schemeClr val="accent1"/>
+          </a:fillRef>
+          <a:effectRef idx="2">
+            <a:schemeClr val="accent1"/>
+          </a:effectRef>
+          <a:fontRef idx="minor">
+            <a:schemeClr val="lt1"/>
+          </a:fontRef>
+        </p:style>
+        <p:txBody>
+          <a:bodyPr rtlCol="0" anchor="ctr"/>
+          <a:lstStyle/>
+          <a:p>
+            <a:pPr algn="ctr"/>
+          </a:p>
+        </p:txBody>
+      </p:sp>
+      <p:sp>
+        <p:nvSpPr>
+          <p:cNvPr id="14" name="TextBox 13"/>
+          <p:cNvSpPr txBox="1"/>
+          <p:nvPr/>
+        </p:nvSpPr>
+        <p:spPr>
+          <a:xfrm>
+            <a:off x="667512" y="3345688"/>
+            <a:ext cx="5250027" cy="2249424"/>
+          </a:xfrm>
+          <a:prstGeom prst="rect">
+            <a:avLst/>
+          </a:prstGeom>
+          <a:noFill/>
+        </p:spPr>
+        <p:txBody lIns="50800" tIns="50800" rIns="50800" bIns="50800">
+          <a:bodyPr wrap="square">
+            <a:spAutoFit/>
+          </a:bodyPr>
+          <a:lstStyle/>
+          <a:p>
+            <a:pPr algn="l">
+              <a:spcBef>
+                <a:spcPts val="1800"/>
+              </a:spcBef>
+            </a:pPr>
+            <a:r>
+              <a:rPr sz="1400">
+                <a:solidFill>
+                  <a:srgbClr val="2FDFE5"/>
+                </a:solidFill>
+              </a:rPr>
+              <a:t>▸  </a:t>
+            </a:r>
+            <a:r>
+              <a:rPr sz="1700">
+                <a:solidFill>
+                  <a:srgbClr val="D8EAFF"/>
+                </a:solidFill>
+              </a:rPr>
+              <a:t>Monitorización activa de los acuerdos alcanzados</a:t>
+            </a:r>
+          </a:p>
+          <a:p>
+            <a:pPr algn="l">
+              <a:spcBef>
+                <a:spcPts val="1800"/>
+              </a:spcBef>
+            </a:pPr>
+            <a:r>
+              <a:rPr sz="1400">
+                <a:solidFill>
+                  <a:srgbClr val="2FDFE5"/>
+                </a:solidFill>
+              </a:rPr>
+              <a:t>▸  </a:t>
+            </a:r>
+            <a:r>
+              <a:rPr sz="1700">
+                <a:solidFill>
+                  <a:srgbClr val="D8EAFF"/>
+                </a:solidFill>
+              </a:rPr>
+              <a:t>Recordatorios preventivos de vencimiento</a:t>
+            </a:r>
+          </a:p>
+          <a:p>
+            <a:pPr algn="l">
+              <a:spcBef>
+                <a:spcPts val="1800"/>
+              </a:spcBef>
+            </a:pPr>
+            <a:r>
+              <a:rPr sz="1400">
+                <a:solidFill>
+                  <a:srgbClr val="2FDFE5"/>
+                </a:solidFill>
+              </a:rPr>
+              <a:t>▸  </a:t>
+            </a:r>
+            <a:r>
+              <a:rPr sz="1700">
+                <a:solidFill>
+                  <a:srgbClr val="D8EAFF"/>
+                </a:solidFill>
+              </a:rPr>
+              <a:t>Reactivación inmediata ante incidencias o incumplimientos</a:t>
+            </a:r>
+          </a:p>
+        </p:txBody>
+      </p:sp>
+      <p:sp>
+        <p:nvSpPr>
+          <p:cNvPr id="15" name="Rectangle 14"/>
+          <p:cNvSpPr/>
+          <p:nvPr/>
+        </p:nvSpPr>
+        <p:spPr>
+          <a:xfrm>
+            <a:off x="6283299" y="2267712"/>
+            <a:ext cx="5579211" cy="3328416"/>
+          </a:xfrm>
+          <a:prstGeom prst="rect">
+            <a:avLst/>
+          </a:prstGeom>
+          <a:solidFill>
+            <a:srgbClr val="081438"/>
+          </a:solidFill>
+          <a:ln w="12700">
+            <a:solidFill>
+              <a:srgbClr val="2FDFE5"/>
+            </a:solidFill>
+          </a:ln>
+        </p:spPr>
+        <p:style>
+          <a:lnRef idx="1">
+            <a:schemeClr val="accent1"/>
+          </a:lnRef>
+          <a:fillRef idx="3">
+            <a:schemeClr val="accent1"/>
+          </a:fillRef>
+          <a:effectRef idx="2">
+            <a:schemeClr val="accent1"/>
+          </a:effectRef>
+          <a:fontRef idx="minor">
+            <a:schemeClr val="lt1"/>
+          </a:fontRef>
+        </p:style>
+        <p:txBody>
+          <a:bodyPr rtlCol="0" anchor="ctr"/>
+          <a:lstStyle/>
+          <a:p>
+            <a:pPr algn="ctr"/>
+          </a:p>
+        </p:txBody>
+      </p:sp>
+      <p:sp>
+        <p:nvSpPr>
+          <p:cNvPr id="16" name="Rectangle 15"/>
+          <p:cNvSpPr/>
+          <p:nvPr/>
+        </p:nvSpPr>
+        <p:spPr>
+          <a:xfrm>
+            <a:off x="6283299" y="2267712"/>
+            <a:ext cx="5579211" cy="63500"/>
+          </a:xfrm>
+          <a:prstGeom prst="rect">
+            <a:avLst/>
+          </a:prstGeom>
+          <a:solidFill>
+            <a:srgbClr val="2FDFE5"/>
+          </a:solidFill>
+          <a:ln>
+            <a:noFill/>
+          </a:ln>
+        </p:spPr>
+        <p:style>
+          <a:lnRef idx="1">
+            <a:schemeClr val="accent1"/>
+          </a:lnRef>
+          <a:fillRef idx="3">
+            <a:schemeClr val="accent1"/>
+          </a:fillRef>
+          <a:effectRef idx="2">
+            <a:schemeClr val="accent1"/>
+          </a:effectRef>
+          <a:fontRef idx="minor">
+            <a:schemeClr val="lt1"/>
+          </a:fontRef>
+        </p:style>
+        <p:txBody>
+          <a:bodyPr rtlCol="0" anchor="ctr"/>
+          <a:lstStyle/>
+          <a:p>
+            <a:pPr algn="ctr"/>
+          </a:p>
+        </p:txBody>
+      </p:sp>
+      <p:sp>
+        <p:nvSpPr>
+          <p:cNvPr id="17" name="TextBox 16"/>
+          <p:cNvSpPr txBox="1"/>
+          <p:nvPr/>
+        </p:nvSpPr>
+        <p:spPr>
+          <a:xfrm>
+            <a:off x="6484467" y="2487168"/>
+            <a:ext cx="5176875" cy="640080"/>
+          </a:xfrm>
+          <a:prstGeom prst="rect">
+            <a:avLst/>
+          </a:prstGeom>
+          <a:noFill/>
+        </p:spPr>
+        <p:txBody lIns="38100" tIns="63500" rIns="38100" bIns="25400">
+          <a:bodyPr wrap="square">
+            <a:spAutoFit/>
+          </a:bodyPr>
+          <a:lstStyle/>
+          <a:p>
+            <a:pPr algn="l"/>
+            <a:r>
+              <a:rPr sz="1900" b="1">
+                <a:solidFill>
+                  <a:srgbClr val="2FDFE5"/>
+                </a:solidFill>
+              </a:rPr>
+              <a:t>6  </a:t>
+            </a:r>
+            <a:r>
+              <a:rPr sz="1900" b="1">
+                <a:solidFill>
+                  <a:srgbClr val="FFFFFF"/>
+                </a:solidFill>
+              </a:rPr>
+              <a:t>Reporting y resultados</a:t>
+            </a:r>
+          </a:p>
+        </p:txBody>
+      </p:sp>
+      <p:sp>
+        <p:nvSpPr>
+          <p:cNvPr id="18" name="Rectangle 17"/>
+          <p:cNvSpPr/>
+          <p:nvPr/>
+        </p:nvSpPr>
+        <p:spPr>
+          <a:xfrm>
+            <a:off x="6447891" y="3218688"/>
+            <a:ext cx="5250027" cy="19050"/>
+          </a:xfrm>
+          <a:prstGeom prst="rect">
+            <a:avLst/>
+          </a:prstGeom>
+          <a:solidFill>
+            <a:srgbClr val="13B9BF"/>
+          </a:solidFill>
+          <a:ln>
+            <a:noFill/>
+          </a:ln>
+        </p:spPr>
+        <p:style>
+          <a:lnRef idx="1">
+            <a:schemeClr val="accent1"/>
+          </a:lnRef>
+          <a:fillRef idx="3">
+            <a:schemeClr val="accent1"/>
+          </a:fillRef>
+          <a:effectRef idx="2">
+            <a:schemeClr val="accent1"/>
+          </a:effectRef>
+          <a:fontRef idx="minor">
+            <a:schemeClr val="lt1"/>
+          </a:fontRef>
+        </p:style>
+        <p:txBody>
+          <a:bodyPr rtlCol="0" anchor="ctr"/>
+          <a:lstStyle/>
+          <a:p>
+            <a:pPr algn="ctr"/>
+          </a:p>
+        </p:txBody>
+      </p:sp>
+      <p:sp>
+        <p:nvSpPr>
+          <p:cNvPr id="19" name="TextBox 18"/>
+          <p:cNvSpPr txBox="1"/>
+          <p:nvPr/>
+        </p:nvSpPr>
+        <p:spPr>
+          <a:xfrm>
+            <a:off x="6447891" y="3345688"/>
+            <a:ext cx="5250027" cy="2249424"/>
+          </a:xfrm>
+          <a:prstGeom prst="rect">
+            <a:avLst/>
+          </a:prstGeom>
+          <a:noFill/>
+        </p:spPr>
+        <p:txBody lIns="50800" tIns="50800" rIns="50800" bIns="50800">
+          <a:bodyPr wrap="square">
+            <a:spAutoFit/>
+          </a:bodyPr>
+          <a:lstStyle/>
+          <a:p>
+            <a:pPr algn="l">
+              <a:spcBef>
+                <a:spcPts val="1800"/>
+              </a:spcBef>
+            </a:pPr>
+            <a:r>
+              <a:rPr sz="1400">
+                <a:solidFill>
+                  <a:srgbClr val="2FDFE5"/>
+                </a:solidFill>
+              </a:rPr>
+              <a:t>▸  </a:t>
+            </a:r>
+            <a:r>
+              <a:rPr sz="1700">
+                <a:solidFill>
+                  <a:srgbClr val="D8EAFF"/>
+                </a:solidFill>
+              </a:rPr>
+              <a:t>Actualización permanente del estado de cada expediente</a:t>
+            </a:r>
+          </a:p>
+          <a:p>
+            <a:pPr algn="l">
+              <a:spcBef>
+                <a:spcPts val="1800"/>
+              </a:spcBef>
+            </a:pPr>
+            <a:r>
+              <a:rPr sz="1400">
+                <a:solidFill>
+                  <a:srgbClr val="2FDFE5"/>
+                </a:solidFill>
+              </a:rPr>
+              <a:t>▸  </a:t>
+            </a:r>
+            <a:r>
+              <a:rPr sz="1700">
+                <a:solidFill>
+                  <a:srgbClr val="D8EAFF"/>
+                </a:solidFill>
+              </a:rPr>
+              <a:t>Informes periódicos de actividad y resultados</a:t>
+            </a:r>
+          </a:p>
+          <a:p>
+            <a:pPr algn="l">
+              <a:spcBef>
+                <a:spcPts val="1800"/>
+              </a:spcBef>
+            </a:pPr>
+            <a:r>
+              <a:rPr sz="1400">
+                <a:solidFill>
+                  <a:srgbClr val="2FDFE5"/>
+                </a:solidFill>
+              </a:rPr>
+              <a:t>▸  </a:t>
+            </a:r>
+            <a:r>
+              <a:rPr sz="1700">
+                <a:solidFill>
+                  <a:srgbClr val="D8EAFF"/>
+                </a:solidFill>
+              </a:rPr>
+              <a:t>KPIs de recuperación y productividad</a:t>
+            </a:r>
+          </a:p>
+        </p:txBody>
+      </p:sp>
+    </p:spTree>
+  </p:cSld>
+  <p:clrMapOvr>
+    <a:masterClrMapping/>
+  </p:clrMapOvr>
+  <p:timing>
+    <p:tnLst>
+      <p:par>
+        <p:cTn id="1" dur="indefin" restart="whenNotActive" nodeType="tmRoot">
+          <p:childTnLst>
+            <p:seq concurrent="1" nextAc="seek">
+              <p:cTn id="2" dur="indefin" nodeType="mainSeq">
+                <p:childTnLst>
+                  <p:par>
+                    <p:cTn id="3" fill="hold">
+                      <p:stCondLst>
+                        <p:cond delay="0"/>
+                      </p:stCondLst>
+                      <p:childTnLst>
+                        <p:par>
+                          <p:cTn id="5" fill="hold">
+                            <p:stCondLst>
+                              <p:cond delay="0"/>
+                            </p:stCondLst>
+                            <p:childTnLst>
+                              <p:animEffect transition="in" filter="wipe(up)">
+                                <p:cBhvr>
+                                  <p:cTn id="6" dur="380" fill="hold"/>
+                                  <p:tgtEl>
+                                    <p:spTgt spid="10"/>
+                                  </p:tgtEl>
+                                </p:cBhvr>
+                              </p:animEffect>
+                            </p:childTnLst>
+                          </p:cTn>
+                        </p:par>
+                        <p:par>
+                          <p:cTn id="7" fill="hold">
+                            <p:stCondLst>
+                              <p:cond delay="0"/>
+                            </p:stCondLst>
+                            <p:childTnLst>
+                              <p:animEffect transition="in" filter="wipe(up)">
+                                <p:cBhvr>
+                                  <p:cTn id="8" dur="380" fill="hold"/>
+                                  <p:tgtEl>
+                                    <p:spTgt spid="11"/>
+                                  </p:tgtEl>
+                                </p:cBhvr>
+                              </p:animEffect>
+                            </p:childTnLst>
+                          </p:cTn>
+                        </p:par>
+                        <p:par>
+                          <p:cTn id="9" fill="hold">
+                            <p:stCondLst>
+                              <p:cond delay="0"/>
+                            </p:stCondLst>
+                            <p:childTnLst>
+                              <p:animEffect transition="in" filter="wipe(up)">
+                                <p:cBhvr>
+                                  <p:cTn id="10" dur="380" fill="hold"/>
+                                  <p:tgtEl>
+                                    <p:spTgt spid="12"/>
+                                  </p:tgtEl>
+                                </p:cBhvr>
+                              </p:animEffect>
+                            </p:childTnLst>
+                          </p:cTn>
+                        </p:par>
+                        <p:par>
+                          <p:cTn id="11" fill="hold">
+                            <p:stCondLst>
+                              <p:cond delay="0"/>
+                            </p:stCondLst>
+                            <p:childTnLst>
+                              <p:animEffect transition="in" filter="wipe(up)">
+                                <p:cBhvr>
+                                  <p:cTn id="12" dur="380" fill="hold"/>
+                                  <p:tgtEl>
+                                    <p:spTgt spid="13"/>
+                                  </p:tgtEl>
+                                </p:cBhvr>
+                              </p:animEffect>
+                            </p:childTnLst>
+                          </p:cTn>
+                        </p:par>
+                        <p:par>
+                          <p:cTn id="13" fill="hold">
+                            <p:stCondLst>
+                              <p:cond delay="0"/>
+                            </p:stCondLst>
+                            <p:childTnLst>
+                              <p:animEffect transition="in" filter="wipe(up)">
+                                <p:cBhvr>
+                                  <p:cTn id="14" dur="380" fill="hold"/>
+                                  <p:tgtEl>
+                                    <p:spTgt spid="14"/>
+                                  </p:tgtEl>
+                                </p:cBhvr>
+                              </p:animEffect>
+                            </p:childTnLst>
+                          </p:cTn>
+                        </p:par>
+                        <p:par>
+                          <p:cTn id="15" fill="hold">
+                            <p:stCondLst>
+                              <p:cond delay="160"/>
+                            </p:stCondLst>
+                            <p:childTnLst>
+                              <p:animEffect transition="in" filter="wipe(up)">
+                                <p:cBhvr>
+                                  <p:cTn id="16" dur="380" fill="hold"/>
+                                  <p:tgtEl>
+                                    <p:spTgt spid="15"/>
+                                  </p:tgtEl>
+                                </p:cBhvr>
+                              </p:animEffect>
+                            </p:childTnLst>
+                          </p:cTn>
+                        </p:par>
+                        <p:par>
+                          <p:cTn id="17" fill="hold">
+                            <p:stCondLst>
+                              <p:cond delay="160"/>
+                            </p:stCondLst>
+                            <p:childTnLst>
+                              <p:animEffect transition="in" filter="wipe(up)">
+                                <p:cBhvr>
+                                  <p:cTn id="18" dur="380" fill="hold"/>
+                                  <p:tgtEl>
+                                    <p:spTgt spid="16"/>
+                                  </p:tgtEl>
+                                </p:cBhvr>
+                              </p:animEffect>
+                            </p:childTnLst>
+                          </p:cTn>
+                        </p:par>
+                        <p:par>
+                          <p:cTn id="19" fill="hold">
+                            <p:stCondLst>
+                              <p:cond delay="160"/>
+                            </p:stCondLst>
+                            <p:childTnLst>
+                              <p:animEffect transition="in" filter="wipe(up)">
+                                <p:cBhvr>
+                                  <p:cTn id="20" dur="380" fill="hold"/>
+                                  <p:tgtEl>
+                                    <p:spTgt spid="17"/>
+                                  </p:tgtEl>
+                                </p:cBhvr>
+                              </p:animEffect>
+                            </p:childTnLst>
+                          </p:cTn>
+                        </p:par>
+                        <p:par>
+                          <p:cTn id="21" fill="hold">
+                            <p:stCondLst>
+                              <p:cond delay="160"/>
+                            </p:stCondLst>
+                            <p:childTnLst>
+                              <p:animEffect transition="in" filter="wipe(up)">
+                                <p:cBhvr>
+                                  <p:cTn id="22" dur="380" fill="hold"/>
+                                  <p:tgtEl>
+                                    <p:spTgt spid="18"/>
+                                  </p:tgtEl>
+                                </p:cBhvr>
+                              </p:animEffect>
+                            </p:childTnLst>
+                          </p:cTn>
+                        </p:par>
+                        <p:par>
+                          <p:cTn id="23" fill="hold">
+                            <p:stCondLst>
+                              <p:cond delay="160"/>
+                            </p:stCondLst>
+                            <p:childTnLst>
+                              <p:animEffect transition="in" filter="wipe(up)">
+                                <p:cBhvr>
+                                  <p:cTn id="24" dur="380" fill="hold"/>
+                                  <p:tgtEl>
+                                    <p:spTgt spid="19"/>
+                                  </p:tgtEl>
+                                </p:cBhvr>
+                              </p:animEffect>
+                            </p:childTnLst>
+                          </p:cTn>
+                        </p:par>
+                      </p:childTnLst>
+                    </p:cTn>
+                  </p:par>
+                </p:childTnLst>
+              </p:cTn>
+              <p:prevCondLst>
+                <p:cond evt="onPrevClick" delay="0"/>
+              </p:prevCondLst>
+              <p:nextCondLst>
+                <p:cond evt="onNextClick" delay="0"/>
+              </p:nextCondLst>
+            </p:seq>
+          </p:childTnLst>
+        </p:cTn>
+      </p:par>
+    </p:tnLst>
+  </p:timing>
+  <p:transition dur="550" spd="fast">
+    <p:push dir="u"/>
+  </p:transition>
+</p:sld>
+</file>
+
+<file path=ppt/slides/slide5.xml><?xml version="1.0" encoding="utf-8"?>
+<p:sld xmlns:a="http://schemas.openxmlformats.org/drawingml/2006/main" xmlns:p="http://schemas.openxmlformats.org/presentationml/2006/main" xmlns:r="http://schemas.openxmlformats.org/officeDocument/2006/relationships">
+  <p:cSld>
+    <p:spTree>
+      <p:nvGrpSpPr>
+        <p:cNvPr id="1" name=""/>
+        <p:cNvGrpSpPr/>
+        <p:nvPr/>
+      </p:nvGrpSpPr>
+      <p:grpSpPr/>
+      <p:pic>
+        <p:nvPicPr>
+          <p:cNvPr id="2" name="Picture 1" descr="content_bg_nolog.png"/>
+          <p:cNvPicPr>
+            <a:picLocks noChangeAspect="1"/>
+          </p:cNvPicPr>
+          <p:nvPr/>
+        </p:nvPicPr>
+        <p:blipFill>
+          <a:blip r:embed="rId2"/>
+          <a:stretch>
+            <a:fillRect/>
+          </a:stretch>
+        </p:blipFill>
+        <p:spPr>
+          <a:xfrm>
+            <a:off x="0" y="0"/>
+            <a:ext cx="12191695" cy="6858000"/>
+          </a:xfrm>
+          <a:prstGeom prst="rect">
+            <a:avLst/>
+          </a:prstGeom>
+        </p:spPr>
+      </p:pic>
+      <p:sp>
+        <p:nvSpPr>
+          <p:cNvPr id="3" name="Rectangle 2"/>
+          <p:cNvSpPr/>
+          <p:nvPr/>
+        </p:nvSpPr>
+        <p:spPr>
+          <a:xfrm>
+            <a:off x="0" y="0"/>
+            <a:ext cx="12191695" cy="50800"/>
+          </a:xfrm>
+          <a:prstGeom prst="rect">
+            <a:avLst/>
+          </a:prstGeom>
+          <a:solidFill>
+            <a:srgbClr val="2FDFE5"/>
+          </a:solidFill>
+          <a:ln>
+            <a:noFill/>
+          </a:ln>
+        </p:spPr>
+        <p:style>
+          <a:lnRef idx="1">
+            <a:schemeClr val="accent1"/>
+          </a:lnRef>
+          <a:fillRef idx="3">
+            <a:schemeClr val="accent1"/>
+          </a:fillRef>
+          <a:effectRef idx="2">
+            <a:schemeClr val="accent1"/>
+          </a:effectRef>
+          <a:fontRef idx="minor">
+            <a:schemeClr val="lt1"/>
+          </a:fontRef>
+        </p:style>
+        <p:txBody>
+          <a:bodyPr rtlCol="0" anchor="ctr"/>
+          <a:lstStyle/>
+          <a:p>
+            <a:pPr algn="ctr"/>
+          </a:p>
+        </p:txBody>
+      </p:sp>
+      <p:sp>
+        <p:nvSpPr>
+          <p:cNvPr id="4" name="Rectangle 3"/>
+          <p:cNvSpPr/>
+          <p:nvPr/>
+        </p:nvSpPr>
+        <p:spPr>
+          <a:xfrm>
+            <a:off x="0" y="0"/>
+            <a:ext cx="63500" cy="6858000"/>
+          </a:xfrm>
+          <a:prstGeom prst="rect">
+            <a:avLst/>
+          </a:prstGeom>
+          <a:solidFill>
+            <a:srgbClr val="13B9BF"/>
+          </a:solidFill>
+          <a:ln>
+            <a:noFill/>
+          </a:ln>
+        </p:spPr>
+        <p:style>
+          <a:lnRef idx="1">
+            <a:schemeClr val="accent1"/>
+          </a:lnRef>
+          <a:fillRef idx="3">
+            <a:schemeClr val="accent1"/>
+          </a:fillRef>
+          <a:effectRef idx="2">
+            <a:schemeClr val="accent1"/>
+          </a:effectRef>
+          <a:fontRef idx="minor">
+            <a:schemeClr val="lt1"/>
+          </a:fontRef>
+        </p:style>
+        <p:txBody>
+          <a:bodyPr rtlCol="0" anchor="ctr"/>
+          <a:lstStyle/>
+          <a:p>
+            <a:pPr algn="ctr"/>
+          </a:p>
+        </p:txBody>
+      </p:sp>
+      <p:pic>
+        <p:nvPicPr>
+          <p:cNvPr id="5" name="Picture 4" descr="logo_round_bright.png"/>
+          <p:cNvPicPr>
+            <a:picLocks noChangeAspect="1"/>
+          </p:cNvPicPr>
+          <p:nvPr/>
+        </p:nvPicPr>
+        <p:blipFill>
+          <a:blip r:embed="rId3"/>
+          <a:stretch>
+            <a:fillRect/>
+          </a:stretch>
+        </p:blipFill>
+        <p:spPr>
+          <a:xfrm>
+            <a:off x="91440" y="54864"/>
+            <a:ext cx="1463040" cy="848563"/>
+          </a:xfrm>
+          <a:prstGeom prst="rect">
+            <a:avLst/>
+          </a:prstGeom>
+        </p:spPr>
+      </p:pic>
+      <p:sp>
+        <p:nvSpPr>
+          <p:cNvPr id="6" name="Rectangle 5"/>
+          <p:cNvSpPr/>
+          <p:nvPr/>
+        </p:nvSpPr>
+        <p:spPr>
+          <a:xfrm>
+            <a:off x="502920" y="365760"/>
+            <a:ext cx="1737360" cy="301752"/>
+          </a:xfrm>
+          <a:prstGeom prst="rect">
+            <a:avLst/>
+          </a:prstGeom>
+          <a:solidFill>
+            <a:srgbClr val="2FDFE5"/>
+          </a:solidFill>
+          <a:ln>
+            <a:noFill/>
+          </a:ln>
+        </p:spPr>
+        <p:style>
+          <a:lnRef idx="1">
+            <a:schemeClr val="accent1"/>
+          </a:lnRef>
+          <a:fillRef idx="3">
+            <a:schemeClr val="accent1"/>
+          </a:fillRef>
+          <a:effectRef idx="2">
+            <a:schemeClr val="accent1"/>
+          </a:effectRef>
+          <a:fontRef idx="minor">
+            <a:schemeClr val="lt1"/>
+          </a:fontRef>
+        </p:style>
+        <p:txBody lIns="101600" tIns="25400" rIns="101600" bIns="25400">
+          <a:bodyPr rtlCol="0" anchor="ctr" wrap="none"/>
+          <a:lstStyle/>
+          <a:p>
+            <a:pPr algn="ctr"/>
+            <a:r>
+              <a:rPr sz="1100" b="1">
+                <a:solidFill>
+                  <a:srgbClr val="0A1638"/>
+                </a:solidFill>
+              </a:rPr>
+              <a:t>FASE 4</a:t>
+            </a:r>
+          </a:p>
+        </p:txBody>
+      </p:sp>
+      <p:sp>
+        <p:nvSpPr>
+          <p:cNvPr id="7" name="TextBox 6"/>
+          <p:cNvSpPr txBox="1"/>
+          <p:nvPr/>
+        </p:nvSpPr>
+        <p:spPr>
+          <a:xfrm>
+            <a:off x="502920" y="731520"/>
+            <a:ext cx="8961120" cy="960120"/>
+          </a:xfrm>
+          <a:prstGeom prst="rect">
+            <a:avLst/>
+          </a:prstGeom>
+          <a:noFill/>
+        </p:spPr>
+        <p:txBody lIns="0" tIns="0" rIns="0" bIns="0">
+          <a:bodyPr wrap="square">
+            <a:spAutoFit/>
+          </a:bodyPr>
+          <a:lstStyle/>
+          <a:p>
+            <a:pPr algn="l"/>
+            <a:r>
+              <a:rPr sz="4000" b="1">
+                <a:solidFill>
+                  <a:srgbClr val="FFFFFF"/>
+                </a:solidFill>
+              </a:rPr>
+              <a:t>Cierre y </a:t>
+            </a:r>
+            <a:r>
+              <a:rPr sz="4000" b="1">
+                <a:solidFill>
+                  <a:srgbClr val="2FDFE5"/>
+                </a:solidFill>
+              </a:rPr>
+              <a:t>condiciones</a:t>
+            </a:r>
+          </a:p>
+        </p:txBody>
+      </p:sp>
+      <p:sp>
+        <p:nvSpPr>
+          <p:cNvPr id="8" name="Rectangle 7"/>
+          <p:cNvSpPr/>
+          <p:nvPr/>
+        </p:nvSpPr>
+        <p:spPr>
+          <a:xfrm>
+            <a:off x="502920" y="1737360"/>
+            <a:ext cx="4389120" cy="31750"/>
+          </a:xfrm>
+          <a:prstGeom prst="rect">
+            <a:avLst/>
+          </a:prstGeom>
+          <a:solidFill>
+            <a:srgbClr val="2FDFE5"/>
+          </a:solidFill>
+          <a:ln>
+            <a:noFill/>
+          </a:ln>
+        </p:spPr>
+        <p:style>
+          <a:lnRef idx="1">
+            <a:schemeClr val="accent1"/>
+          </a:lnRef>
+          <a:fillRef idx="3">
+            <a:schemeClr val="accent1"/>
+          </a:fillRef>
+          <a:effectRef idx="2">
+            <a:schemeClr val="accent1"/>
+          </a:effectRef>
+          <a:fontRef idx="minor">
+            <a:schemeClr val="lt1"/>
+          </a:fontRef>
+        </p:style>
+        <p:txBody>
+          <a:bodyPr rtlCol="0" anchor="ctr"/>
+          <a:lstStyle/>
+          <a:p>
+            <a:pPr algn="ctr"/>
+          </a:p>
+        </p:txBody>
+      </p:sp>
+      <p:sp>
+        <p:nvSpPr>
+          <p:cNvPr id="9" name="TextBox 8"/>
+          <p:cNvSpPr txBox="1"/>
+          <p:nvPr/>
+        </p:nvSpPr>
+        <p:spPr>
+          <a:xfrm>
+            <a:off x="502920" y="1810512"/>
+            <a:ext cx="9265615" cy="384048"/>
+          </a:xfrm>
+          <a:prstGeom prst="rect">
+            <a:avLst/>
+          </a:prstGeom>
+          <a:noFill/>
+        </p:spPr>
+        <p:txBody lIns="0" tIns="0" rIns="0" bIns="0">
+          <a:bodyPr wrap="none">
+            <a:spAutoFit/>
+          </a:bodyPr>
+          <a:lstStyle/>
+          <a:p>
+            <a:pPr algn="l"/>
+            <a:r>
+              <a:rPr sz="1300" i="1">
+                <a:solidFill>
+                  <a:srgbClr val="80A8CC"/>
+                </a:solidFill>
+              </a:rPr>
+              <a:t>Solo facturamos cuando recuperamos: nuestros incentivos están alineados con los de nuestro cliente.</a:t>
+            </a:r>
+          </a:p>
+        </p:txBody>
+      </p:sp>
+      <p:sp>
+        <p:nvSpPr>
+          <p:cNvPr id="10" name="Rectangle 9"/>
+          <p:cNvSpPr/>
+          <p:nvPr/>
+        </p:nvSpPr>
+        <p:spPr>
+          <a:xfrm>
+            <a:off x="502920" y="2267712"/>
+            <a:ext cx="5579211" cy="3328416"/>
+          </a:xfrm>
+          <a:prstGeom prst="rect">
+            <a:avLst/>
+          </a:prstGeom>
+          <a:solidFill>
+            <a:srgbClr val="081438"/>
+          </a:solidFill>
+          <a:ln w="12700">
+            <a:solidFill>
+              <a:srgbClr val="2FDFE5"/>
+            </a:solidFill>
+          </a:ln>
+        </p:spPr>
+        <p:style>
+          <a:lnRef idx="1">
+            <a:schemeClr val="accent1"/>
+          </a:lnRef>
+          <a:fillRef idx="3">
+            <a:schemeClr val="accent1"/>
+          </a:fillRef>
+          <a:effectRef idx="2">
+            <a:schemeClr val="accent1"/>
+          </a:effectRef>
+          <a:fontRef idx="minor">
+            <a:schemeClr val="lt1"/>
+          </a:fontRef>
+        </p:style>
+        <p:txBody>
+          <a:bodyPr rtlCol="0" anchor="ctr"/>
+          <a:lstStyle/>
+          <a:p>
+            <a:pPr algn="ctr"/>
+          </a:p>
+        </p:txBody>
+      </p:sp>
+      <p:sp>
+        <p:nvSpPr>
+          <p:cNvPr id="11" name="Rectangle 10"/>
+          <p:cNvSpPr/>
+          <p:nvPr/>
+        </p:nvSpPr>
+        <p:spPr>
+          <a:xfrm>
+            <a:off x="502920" y="2267712"/>
+            <a:ext cx="5579211" cy="63500"/>
+          </a:xfrm>
+          <a:prstGeom prst="rect">
+            <a:avLst/>
+          </a:prstGeom>
+          <a:solidFill>
+            <a:srgbClr val="2FDFE5"/>
+          </a:solidFill>
+          <a:ln>
+            <a:noFill/>
+          </a:ln>
+        </p:spPr>
+        <p:style>
+          <a:lnRef idx="1">
+            <a:schemeClr val="accent1"/>
+          </a:lnRef>
+          <a:fillRef idx="3">
+            <a:schemeClr val="accent1"/>
+          </a:fillRef>
+          <a:effectRef idx="2">
+            <a:schemeClr val="accent1"/>
+          </a:effectRef>
+          <a:fontRef idx="minor">
+            <a:schemeClr val="lt1"/>
+          </a:fontRef>
+        </p:style>
+        <p:txBody>
+          <a:bodyPr rtlCol="0" anchor="ctr"/>
+          <a:lstStyle/>
+          <a:p>
+            <a:pPr algn="ctr"/>
+          </a:p>
+        </p:txBody>
+      </p:sp>
+      <p:sp>
+        <p:nvSpPr>
+          <p:cNvPr id="12" name="TextBox 11"/>
+          <p:cNvSpPr txBox="1"/>
+          <p:nvPr/>
+        </p:nvSpPr>
+        <p:spPr>
+          <a:xfrm>
+            <a:off x="704088" y="2487168"/>
+            <a:ext cx="5176875" cy="640080"/>
+          </a:xfrm>
+          <a:prstGeom prst="rect">
+            <a:avLst/>
+          </a:prstGeom>
+          <a:noFill/>
+        </p:spPr>
+        <p:txBody lIns="38100" tIns="63500" rIns="38100" bIns="25400">
+          <a:bodyPr wrap="square">
+            <a:spAutoFit/>
+          </a:bodyPr>
+          <a:lstStyle/>
+          <a:p>
+            <a:pPr algn="l"/>
+            <a:r>
+              <a:rPr sz="1900" b="1">
+                <a:solidFill>
+                  <a:srgbClr val="2FDFE5"/>
+                </a:solidFill>
+              </a:rPr>
+              <a:t>7  </a:t>
+            </a:r>
+            <a:r>
+              <a:rPr sz="1900" b="1">
+                <a:solidFill>
+                  <a:srgbClr val="FFFFFF"/>
+                </a:solidFill>
+              </a:rPr>
+              <a:t>Cierre del expediente</a:t>
+            </a:r>
+          </a:p>
+        </p:txBody>
+      </p:sp>
+      <p:sp>
+        <p:nvSpPr>
+          <p:cNvPr id="13" name="Rectangle 12"/>
+          <p:cNvSpPr/>
+          <p:nvPr/>
+        </p:nvSpPr>
+        <p:spPr>
+          <a:xfrm>
+            <a:off x="667512" y="3218688"/>
+            <a:ext cx="5250027" cy="19050"/>
+          </a:xfrm>
+          <a:prstGeom prst="rect">
+            <a:avLst/>
+          </a:prstGeom>
+          <a:solidFill>
+            <a:srgbClr val="13B9BF"/>
+          </a:solidFill>
+          <a:ln>
+            <a:noFill/>
+          </a:ln>
+        </p:spPr>
+        <p:style>
+          <a:lnRef idx="1">
+            <a:schemeClr val="accent1"/>
+          </a:lnRef>
+          <a:fillRef idx="3">
+            <a:schemeClr val="accent1"/>
+          </a:fillRef>
+          <a:effectRef idx="2">
+            <a:schemeClr val="accent1"/>
+          </a:effectRef>
+          <a:fontRef idx="minor">
+            <a:schemeClr val="lt1"/>
+          </a:fontRef>
+        </p:style>
+        <p:txBody>
+          <a:bodyPr rtlCol="0" anchor="ctr"/>
+          <a:lstStyle/>
+          <a:p>
+            <a:pPr algn="ctr"/>
+          </a:p>
+        </p:txBody>
+      </p:sp>
+      <p:sp>
+        <p:nvSpPr>
+          <p:cNvPr id="14" name="TextBox 13"/>
+          <p:cNvSpPr txBox="1"/>
+          <p:nvPr/>
+        </p:nvSpPr>
+        <p:spPr>
+          <a:xfrm>
+            <a:off x="667512" y="3345688"/>
+            <a:ext cx="5250027" cy="2249424"/>
+          </a:xfrm>
+          <a:prstGeom prst="rect">
+            <a:avLst/>
+          </a:prstGeom>
+          <a:noFill/>
+        </p:spPr>
+        <p:txBody lIns="50800" tIns="50800" rIns="50800" bIns="50800">
+          <a:bodyPr wrap="square">
+            <a:spAutoFit/>
+          </a:bodyPr>
+          <a:lstStyle/>
+          <a:p>
+            <a:pPr algn="l">
+              <a:spcBef>
+                <a:spcPts val="1800"/>
+              </a:spcBef>
+            </a:pPr>
+            <a:r>
+              <a:rPr sz="1400">
+                <a:solidFill>
+                  <a:srgbClr val="2FDFE5"/>
+                </a:solidFill>
+              </a:rPr>
+              <a:t>▸  </a:t>
+            </a:r>
+            <a:r>
+              <a:rPr sz="1700">
+                <a:solidFill>
+                  <a:srgbClr val="D8EAFF"/>
+                </a:solidFill>
+              </a:rPr>
+              <a:t>Expedientes recuperados o finalizados</a:t>
+            </a:r>
+          </a:p>
+          <a:p>
+            <a:pPr algn="l">
+              <a:spcBef>
+                <a:spcPts val="1800"/>
+              </a:spcBef>
+            </a:pPr>
+            <a:r>
+              <a:rPr sz="1400">
+                <a:solidFill>
+                  <a:srgbClr val="2FDFE5"/>
+                </a:solidFill>
+              </a:rPr>
+              <a:t>▸  </a:t>
+            </a:r>
+            <a:r>
+              <a:rPr sz="1700">
+                <a:solidFill>
+                  <a:srgbClr val="D8EAFF"/>
+                </a:solidFill>
+              </a:rPr>
+              <a:t>Entrega de resultados y documentación</a:t>
+            </a:r>
+          </a:p>
+          <a:p>
+            <a:pPr algn="l">
+              <a:spcBef>
+                <a:spcPts val="1800"/>
+              </a:spcBef>
+            </a:pPr>
+            <a:r>
+              <a:rPr sz="1400">
+                <a:solidFill>
+                  <a:srgbClr val="2FDFE5"/>
+                </a:solidFill>
+              </a:rPr>
+              <a:t>▸  </a:t>
+            </a:r>
+            <a:r>
+              <a:rPr sz="1700">
+                <a:solidFill>
+                  <a:srgbClr val="D8EAFF"/>
+                </a:solidFill>
+              </a:rPr>
+              <a:t>Análisis de rendimiento y propuestas de mejora continua</a:t>
+            </a:r>
+          </a:p>
+        </p:txBody>
+      </p:sp>
+      <p:sp>
+        <p:nvSpPr>
+          <p:cNvPr id="15" name="Rectangle 14"/>
+          <p:cNvSpPr/>
+          <p:nvPr/>
+        </p:nvSpPr>
+        <p:spPr>
+          <a:xfrm>
+            <a:off x="6283299" y="2267712"/>
+            <a:ext cx="5579211" cy="3328416"/>
+          </a:xfrm>
+          <a:prstGeom prst="rect">
+            <a:avLst/>
+          </a:prstGeom>
+          <a:solidFill>
+            <a:srgbClr val="081438"/>
+          </a:solidFill>
+          <a:ln w="12700">
+            <a:solidFill>
+              <a:srgbClr val="2FDFE5"/>
+            </a:solidFill>
+          </a:ln>
+        </p:spPr>
+        <p:style>
+          <a:lnRef idx="1">
+            <a:schemeClr val="accent1"/>
+          </a:lnRef>
+          <a:fillRef idx="3">
+            <a:schemeClr val="accent1"/>
+          </a:fillRef>
+          <a:effectRef idx="2">
+            <a:schemeClr val="accent1"/>
+          </a:effectRef>
+          <a:fontRef idx="minor">
+            <a:schemeClr val="lt1"/>
+          </a:fontRef>
+        </p:style>
+        <p:txBody>
+          <a:bodyPr rtlCol="0" anchor="ctr"/>
+          <a:lstStyle/>
+          <a:p>
+            <a:pPr algn="ctr"/>
+          </a:p>
+        </p:txBody>
+      </p:sp>
+      <p:sp>
+        <p:nvSpPr>
+          <p:cNvPr id="16" name="Rectangle 15"/>
+          <p:cNvSpPr/>
+          <p:nvPr/>
+        </p:nvSpPr>
+        <p:spPr>
+          <a:xfrm>
+            <a:off x="6283299" y="2267712"/>
+            <a:ext cx="5579211" cy="63500"/>
+          </a:xfrm>
+          <a:prstGeom prst="rect">
+            <a:avLst/>
+          </a:prstGeom>
+          <a:solidFill>
+            <a:srgbClr val="2FDFE5"/>
+          </a:solidFill>
+          <a:ln>
+            <a:noFill/>
+          </a:ln>
+        </p:spPr>
+        <p:style>
+          <a:lnRef idx="1">
+            <a:schemeClr val="accent1"/>
+          </a:lnRef>
+          <a:fillRef idx="3">
+            <a:schemeClr val="accent1"/>
+          </a:fillRef>
+          <a:effectRef idx="2">
+            <a:schemeClr val="accent1"/>
+          </a:effectRef>
+          <a:fontRef idx="minor">
+            <a:schemeClr val="lt1"/>
+          </a:fontRef>
+        </p:style>
+        <p:txBody>
+          <a:bodyPr rtlCol="0" anchor="ctr"/>
+          <a:lstStyle/>
+          <a:p>
+            <a:pPr algn="ctr"/>
+          </a:p>
+        </p:txBody>
+      </p:sp>
+      <p:sp>
+        <p:nvSpPr>
+          <p:cNvPr id="17" name="TextBox 16"/>
+          <p:cNvSpPr txBox="1"/>
+          <p:nvPr/>
+        </p:nvSpPr>
+        <p:spPr>
+          <a:xfrm>
+            <a:off x="6484467" y="2487168"/>
+            <a:ext cx="5176875" cy="640080"/>
+          </a:xfrm>
+          <a:prstGeom prst="rect">
+            <a:avLst/>
+          </a:prstGeom>
+          <a:noFill/>
+        </p:spPr>
+        <p:txBody lIns="38100" tIns="63500" rIns="38100" bIns="25400">
+          <a:bodyPr wrap="square">
+            <a:spAutoFit/>
+          </a:bodyPr>
+          <a:lstStyle/>
+          <a:p>
+            <a:pPr algn="l"/>
+            <a:r>
+              <a:rPr sz="1900" b="1">
+                <a:solidFill>
+                  <a:srgbClr val="2FDFE5"/>
+                </a:solidFill>
+              </a:rPr>
+              <a:t>8  </a:t>
+            </a:r>
+            <a:r>
+              <a:rPr sz="1900" b="1">
+                <a:solidFill>
+                  <a:srgbClr val="FFFFFF"/>
+                </a:solidFill>
+              </a:rPr>
+              <a:t>Honorarios y condiciones</a:t>
+            </a:r>
+          </a:p>
+        </p:txBody>
+      </p:sp>
+      <p:sp>
+        <p:nvSpPr>
+          <p:cNvPr id="18" name="Rectangle 17"/>
+          <p:cNvSpPr/>
+          <p:nvPr/>
+        </p:nvSpPr>
+        <p:spPr>
+          <a:xfrm>
+            <a:off x="6447891" y="3218688"/>
+            <a:ext cx="5250027" cy="19050"/>
+          </a:xfrm>
+          <a:prstGeom prst="rect">
+            <a:avLst/>
+          </a:prstGeom>
+          <a:solidFill>
+            <a:srgbClr val="13B9BF"/>
+          </a:solidFill>
+          <a:ln>
+            <a:noFill/>
+          </a:ln>
+        </p:spPr>
+        <p:style>
+          <a:lnRef idx="1">
+            <a:schemeClr val="accent1"/>
+          </a:lnRef>
+          <a:fillRef idx="3">
+            <a:schemeClr val="accent1"/>
+          </a:fillRef>
+          <a:effectRef idx="2">
+            <a:schemeClr val="accent1"/>
+          </a:effectRef>
+          <a:fontRef idx="minor">
+            <a:schemeClr val="lt1"/>
+          </a:fontRef>
+        </p:style>
+        <p:txBody>
+          <a:bodyPr rtlCol="0" anchor="ctr"/>
+          <a:lstStyle/>
+          <a:p>
+            <a:pPr algn="ctr"/>
+          </a:p>
+        </p:txBody>
+      </p:sp>
+      <p:sp>
+        <p:nvSpPr>
+          <p:cNvPr id="19" name="TextBox 18"/>
+          <p:cNvSpPr txBox="1"/>
+          <p:nvPr/>
+        </p:nvSpPr>
+        <p:spPr>
+          <a:xfrm>
+            <a:off x="6447891" y="3345688"/>
+            <a:ext cx="5250027" cy="2249424"/>
+          </a:xfrm>
+          <a:prstGeom prst="rect">
+            <a:avLst/>
+          </a:prstGeom>
+          <a:noFill/>
+        </p:spPr>
+        <p:txBody lIns="50800" tIns="50800" rIns="50800" bIns="50800">
+          <a:bodyPr wrap="square">
+            <a:spAutoFit/>
+          </a:bodyPr>
+          <a:lstStyle/>
+          <a:p>
+            <a:pPr algn="l">
+              <a:spcBef>
+                <a:spcPts val="1800"/>
+              </a:spcBef>
+            </a:pPr>
+            <a:r>
+              <a:rPr sz="1400">
+                <a:solidFill>
+                  <a:srgbClr val="2FDFE5"/>
+                </a:solidFill>
+              </a:rPr>
+              <a:t>▸  </a:t>
+            </a:r>
+            <a:r>
+              <a:rPr sz="1700">
+                <a:solidFill>
+                  <a:srgbClr val="D8EAFF"/>
+                </a:solidFill>
+              </a:rPr>
+              <a:t>Servicio de recobro amistoso a éxito</a:t>
+            </a:r>
+          </a:p>
+          <a:p>
+            <a:pPr algn="l">
+              <a:spcBef>
+                <a:spcPts val="1800"/>
+              </a:spcBef>
+            </a:pPr>
+            <a:r>
+              <a:rPr sz="1400">
+                <a:solidFill>
+                  <a:srgbClr val="2FDFE5"/>
+                </a:solidFill>
+              </a:rPr>
+              <a:t>▸  </a:t>
+            </a:r>
+            <a:r>
+              <a:rPr sz="1700">
+                <a:solidFill>
+                  <a:srgbClr val="D8EAFF"/>
+                </a:solidFill>
+              </a:rPr>
+              <a:t>Retribución escalada según tipología de deuda</a:t>
+            </a:r>
+          </a:p>
+          <a:p>
+            <a:pPr algn="l">
+              <a:spcBef>
+                <a:spcPts val="1800"/>
+              </a:spcBef>
+            </a:pPr>
+            <a:r>
+              <a:rPr sz="1400">
+                <a:solidFill>
+                  <a:srgbClr val="2FDFE5"/>
+                </a:solidFill>
+              </a:rPr>
+              <a:t>▸  </a:t>
+            </a:r>
+            <a:r>
+              <a:rPr sz="1700">
+                <a:solidFill>
+                  <a:srgbClr val="D8EAFF"/>
+                </a:solidFill>
+              </a:rPr>
+              <a:t>Sin costes fijos: solo cobramos si recuperamos</a:t>
+            </a:r>
+          </a:p>
+        </p:txBody>
+      </p:sp>
+    </p:spTree>
+  </p:cSld>
+  <p:clrMapOvr>
+    <a:masterClrMapping/>
+  </p:clrMapOvr>
+  <p:timing>
+    <p:tnLst>
+      <p:par>
+        <p:cTn id="1" dur="indefin" restart="whenNotActive" nodeType="tmRoot">
+          <p:childTnLst>
+            <p:seq concurrent="1" nextAc="seek">
+              <p:cTn id="2" dur="indefin" nodeType="mainSeq">
+                <p:childTnLst>
+                  <p:par>
+                    <p:cTn id="3" fill="hold">
+                      <p:stCondLst>
+                        <p:cond delay="0"/>
+                      </p:stCondLst>
+                      <p:childTnLst>
+                        <p:par>
+                          <p:cTn id="5" fill="hold">
+                            <p:stCondLst>
+                              <p:cond delay="0"/>
+                            </p:stCondLst>
+                            <p:childTnLst>
+                              <p:animEffect transition="in" filter="wipe(up)">
+                                <p:cBhvr>
+                                  <p:cTn id="6" dur="380" fill="hold"/>
+                                  <p:tgtEl>
+                                    <p:spTgt spid="10"/>
+                                  </p:tgtEl>
+                                </p:cBhvr>
+                              </p:animEffect>
+                            </p:childTnLst>
+                          </p:cTn>
+                        </p:par>
+                        <p:par>
+                          <p:cTn id="7" fill="hold">
+                            <p:stCondLst>
+                              <p:cond delay="0"/>
+                            </p:stCondLst>
+                            <p:childTnLst>
+                              <p:animEffect transition="in" filter="wipe(up)">
+                                <p:cBhvr>
+                                  <p:cTn id="8" dur="380" fill="hold"/>
+                                  <p:tgtEl>
+                                    <p:spTgt spid="11"/>
+                                  </p:tgtEl>
+                                </p:cBhvr>
+                              </p:animEffect>
+                            </p:childTnLst>
+                          </p:cTn>
+                        </p:par>
+                        <p:par>
+                          <p:cTn id="9" fill="hold">
+                            <p:stCondLst>
+                              <p:cond delay="0"/>
+                            </p:stCondLst>
+                            <p:childTnLst>
+                              <p:animEffect transition="in" filter="wipe(up)">
+                                <p:cBhvr>
+                                  <p:cTn id="10" dur="380" fill="hold"/>
+                                  <p:tgtEl>
+                                    <p:spTgt spid="12"/>
+                                  </p:tgtEl>
+                                </p:cBhvr>
+                              </p:animEffect>
+                            </p:childTnLst>
+                          </p:cTn>
+                        </p:par>
+                        <p:par>
+                          <p:cTn id="11" fill="hold">
+                            <p:stCondLst>
+                              <p:cond delay="0"/>
+                            </p:stCondLst>
+                            <p:childTnLst>
+                              <p:animEffect transition="in" filter="wipe(up)">
+                                <p:cBhvr>
+                                  <p:cTn id="12" dur="380" fill="hold"/>
+                                  <p:tgtEl>
+                                    <p:spTgt spid="13"/>
+                                  </p:tgtEl>
+                                </p:cBhvr>
+                              </p:animEffect>
+                            </p:childTnLst>
+                          </p:cTn>
+                        </p:par>
+                        <p:par>
+                          <p:cTn id="13" fill="hold">
+                            <p:stCondLst>
+                              <p:cond delay="0"/>
+                            </p:stCondLst>
+                            <p:childTnLst>
+                              <p:animEffect transition="in" filter="wipe(up)">
+                                <p:cBhvr>
+                                  <p:cTn id="14" dur="380" fill="hold"/>
+                                  <p:tgtEl>
+                                    <p:spTgt spid="14"/>
+                                  </p:tgtEl>
+                                </p:cBhvr>
+                              </p:animEffect>
+                            </p:childTnLst>
+                          </p:cTn>
+                        </p:par>
+                        <p:par>
+                          <p:cTn id="15" fill="hold">
+                            <p:stCondLst>
+                              <p:cond delay="160"/>
+                            </p:stCondLst>
+                            <p:childTnLst>
+                              <p:animEffect transition="in" filter="wipe(up)">
+                                <p:cBhvr>
+                                  <p:cTn id="16" dur="380" fill="hold"/>
+                                  <p:tgtEl>
+                                    <p:spTgt spid="15"/>
+                                  </p:tgtEl>
+                                </p:cBhvr>
+                              </p:animEffect>
+                            </p:childTnLst>
+                          </p:cTn>
+                        </p:par>
+                        <p:par>
+                          <p:cTn id="17" fill="hold">
+                            <p:stCondLst>
+                              <p:cond delay="160"/>
+                            </p:stCondLst>
+                            <p:childTnLst>
+                              <p:animEffect transition="in" filter="wipe(up)">
+                                <p:cBhvr>
+                                  <p:cTn id="18" dur="380" fill="hold"/>
+                                  <p:tgtEl>
+                                    <p:spTgt spid="16"/>
+                                  </p:tgtEl>
+                                </p:cBhvr>
+                              </p:animEffect>
+                            </p:childTnLst>
+                          </p:cTn>
+                        </p:par>
+                        <p:par>
+                          <p:cTn id="19" fill="hold">
+                            <p:stCondLst>
+                              <p:cond delay="160"/>
+                            </p:stCondLst>
+                            <p:childTnLst>
+                              <p:animEffect transition="in" filter="wipe(up)">
+                                <p:cBhvr>
+                                  <p:cTn id="20" dur="380" fill="hold"/>
+                                  <p:tgtEl>
+                                    <p:spTgt spid="17"/>
+                                  </p:tgtEl>
+                                </p:cBhvr>
+                              </p:animEffect>
+                            </p:childTnLst>
+                          </p:cTn>
+                        </p:par>
+                        <p:par>
+                          <p:cTn id="21" fill="hold">
+                            <p:stCondLst>
+                              <p:cond delay="160"/>
+                            </p:stCondLst>
+                            <p:childTnLst>
+                              <p:animEffect transition="in" filter="wipe(up)">
+                                <p:cBhvr>
+                                  <p:cTn id="22" dur="380" fill="hold"/>
+                                  <p:tgtEl>
+                                    <p:spTgt spid="18"/>
+                                  </p:tgtEl>
+                                </p:cBhvr>
+                              </p:animEffect>
+                            </p:childTnLst>
+                          </p:cTn>
+                        </p:par>
+                        <p:par>
+                          <p:cTn id="23" fill="hold">
+                            <p:stCondLst>
+                              <p:cond delay="160"/>
+                            </p:stCondLst>
+                            <p:childTnLst>
+                              <p:animEffect transition="in" filter="wipe(up)">
+                                <p:cBhvr>
+                                  <p:cTn id="24" dur="380" fill="hold"/>
+                                  <p:tgtEl>
+                                    <p:spTgt spid="19"/>
+                                  </p:tgtEl>
+                                </p:cBhvr>
+                              </p:animEffect>
+                            </p:childTnLst>
+                          </p:cTn>
+                        </p:par>
+                      </p:childTnLst>
+                    </p:cTn>
+                  </p:par>
+                </p:childTnLst>
+              </p:cTn>
+              <p:prevCondLst>
+                <p:cond evt="onPrevClick" delay="0"/>
+              </p:prevCondLst>
+              <p:nextCondLst>
+                <p:cond evt="onNextClick" delay="0"/>
+              </p:nextCondLst>
+            </p:seq>
+          </p:childTnLst>
+        </p:cTn>
+      </p:par>
+    </p:tnLst>
+  </p:timing>
+  <p:transition dur="550" spd="fast">
+    <p:push dir="u"/>
+  </p:transition>
+</p:sld>
+</file>
+
+<file path=ppt/slides/slide6.xml><?xml version="1.0" encoding="utf-8"?>
+<p:sld xmlns:a="http://schemas.openxmlformats.org/drawingml/2006/main" xmlns:p="http://schemas.openxmlformats.org/presentationml/2006/main" xmlns:r="http://schemas.openxmlformats.org/officeDocument/2006/relationships">
+  <p:cSld>
+    <p:spTree>
+      <p:nvGrpSpPr>
+        <p:cNvPr id="1" name=""/>
+        <p:cNvGrpSpPr/>
+        <p:nvPr/>
+      </p:nvGrpSpPr>
+      <p:grpSpPr/>
+      <p:pic>
+        <p:nvPicPr>
+          <p:cNvPr id="2" name="Picture 1" descr="content_bg_nolog.png"/>
+          <p:cNvPicPr>
+            <a:picLocks noChangeAspect="1"/>
+          </p:cNvPicPr>
+          <p:nvPr/>
+        </p:nvPicPr>
+        <p:blipFill>
+          <a:blip r:embed="rId2"/>
+          <a:stretch>
+            <a:fillRect/>
+          </a:stretch>
+        </p:blipFill>
+        <p:spPr>
+          <a:xfrm>
+            <a:off x="0" y="0"/>
+            <a:ext cx="12191695" cy="6858000"/>
+          </a:xfrm>
+          <a:prstGeom prst="rect">
+            <a:avLst/>
+          </a:prstGeom>
+        </p:spPr>
+      </p:pic>
+      <p:sp>
+        <p:nvSpPr>
+          <p:cNvPr id="3" name="Rectangle 2"/>
+          <p:cNvSpPr/>
+          <p:nvPr/>
+        </p:nvSpPr>
+        <p:spPr>
+          <a:xfrm>
+            <a:off x="0" y="0"/>
+            <a:ext cx="12191695" cy="50800"/>
+          </a:xfrm>
+          <a:prstGeom prst="rect">
+            <a:avLst/>
+          </a:prstGeom>
+          <a:solidFill>
+            <a:srgbClr val="2FDFE5"/>
+          </a:solidFill>
+          <a:ln>
+            <a:noFill/>
+          </a:ln>
+        </p:spPr>
+        <p:style>
+          <a:lnRef idx="1">
+            <a:schemeClr val="accent1"/>
+          </a:lnRef>
+          <a:fillRef idx="3">
+            <a:schemeClr val="accent1"/>
+          </a:fillRef>
+          <a:effectRef idx="2">
+            <a:schemeClr val="accent1"/>
+          </a:effectRef>
+          <a:fontRef idx="minor">
+            <a:schemeClr val="lt1"/>
+          </a:fontRef>
+        </p:style>
+        <p:txBody>
+          <a:bodyPr rtlCol="0" anchor="ctr"/>
+          <a:lstStyle/>
+          <a:p>
+            <a:pPr algn="ctr"/>
+          </a:p>
+        </p:txBody>
+      </p:sp>
+      <p:sp>
+        <p:nvSpPr>
+          <p:cNvPr id="4" name="Rectangle 3"/>
+          <p:cNvSpPr/>
+          <p:nvPr/>
+        </p:nvSpPr>
+        <p:spPr>
+          <a:xfrm>
+            <a:off x="0" y="0"/>
+            <a:ext cx="63500" cy="6858000"/>
+          </a:xfrm>
+          <a:prstGeom prst="rect">
+            <a:avLst/>
+          </a:prstGeom>
+          <a:solidFill>
+            <a:srgbClr val="13B9BF"/>
+          </a:solidFill>
+          <a:ln>
+            <a:noFill/>
+          </a:ln>
+        </p:spPr>
+        <p:style>
+          <a:lnRef idx="1">
+            <a:schemeClr val="accent1"/>
+          </a:lnRef>
+          <a:fillRef idx="3">
+            <a:schemeClr val="accent1"/>
+          </a:fillRef>
+          <a:effectRef idx="2">
+            <a:schemeClr val="accent1"/>
+          </a:effectRef>
+          <a:fontRef idx="minor">
+            <a:schemeClr val="lt1"/>
+          </a:fontRef>
+        </p:style>
+        <p:txBody>
+          <a:bodyPr rtlCol="0" anchor="ctr"/>
+          <a:lstStyle/>
+          <a:p>
+            <a:pPr algn="ctr"/>
+          </a:p>
+        </p:txBody>
+      </p:sp>
+      <p:pic>
+        <p:nvPicPr>
+          <p:cNvPr id="5" name="Picture 4" descr="logo_round_bright.png"/>
+          <p:cNvPicPr>
+            <a:picLocks noChangeAspect="1"/>
+          </p:cNvPicPr>
+          <p:nvPr/>
+        </p:nvPicPr>
+        <p:blipFill>
+          <a:blip r:embed="rId3"/>
+          <a:stretch>
+            <a:fillRect/>
+          </a:stretch>
+        </p:blipFill>
+        <p:spPr>
+          <a:xfrm>
+            <a:off x="91440" y="54864"/>
+            <a:ext cx="1463040" cy="848563"/>
+          </a:xfrm>
+          <a:prstGeom prst="rect">
+            <a:avLst/>
+          </a:prstGeom>
+        </p:spPr>
+      </p:pic>
+      <p:sp>
+        <p:nvSpPr>
+          <p:cNvPr id="6" name="Rectangle 5"/>
+          <p:cNvSpPr/>
+          <p:nvPr/>
+        </p:nvSpPr>
+        <p:spPr>
+          <a:xfrm>
+            <a:off x="502920" y="365760"/>
+            <a:ext cx="1737360" cy="301752"/>
+          </a:xfrm>
+          <a:prstGeom prst="rect">
+            <a:avLst/>
+          </a:prstGeom>
+          <a:solidFill>
+            <a:srgbClr val="2FDFE5"/>
+          </a:solidFill>
+          <a:ln>
+            <a:noFill/>
+          </a:ln>
+        </p:spPr>
+        <p:style>
+          <a:lnRef idx="1">
+            <a:schemeClr val="accent1"/>
+          </a:lnRef>
+          <a:fillRef idx="3">
+            <a:schemeClr val="accent1"/>
+          </a:fillRef>
+          <a:effectRef idx="2">
+            <a:schemeClr val="accent1"/>
+          </a:effectRef>
+          <a:fontRef idx="minor">
+            <a:schemeClr val="lt1"/>
+          </a:fontRef>
+        </p:style>
+        <p:txBody lIns="101600" tIns="25400" rIns="101600" bIns="25400">
+          <a:bodyPr rtlCol="0" anchor="ctr" wrap="none"/>
+          <a:lstStyle/>
+          <a:p>
+            <a:pPr algn="ctr"/>
+            <a:r>
+              <a:rPr sz="1100" b="1">
+                <a:solidFill>
+                  <a:srgbClr val="0A1638"/>
+                </a:solidFill>
+              </a:rPr>
+              <a:t>FASE 5</a:t>
+            </a:r>
+          </a:p>
+        </p:txBody>
+      </p:sp>
+      <p:sp>
+        <p:nvSpPr>
+          <p:cNvPr id="7" name="TextBox 6"/>
+          <p:cNvSpPr txBox="1"/>
+          <p:nvPr/>
+        </p:nvSpPr>
+        <p:spPr>
+          <a:xfrm>
+            <a:off x="502920" y="731520"/>
+            <a:ext cx="8961120" cy="960120"/>
+          </a:xfrm>
+          <a:prstGeom prst="rect">
+            <a:avLst/>
+          </a:prstGeom>
+          <a:noFill/>
+        </p:spPr>
+        <p:txBody lIns="0" tIns="0" rIns="0" bIns="0">
+          <a:bodyPr wrap="square">
+            <a:spAutoFit/>
+          </a:bodyPr>
+          <a:lstStyle/>
+          <a:p>
+            <a:pPr algn="l"/>
+            <a:r>
+              <a:rPr sz="4000" b="1">
+                <a:solidFill>
+                  <a:srgbClr val="FFFFFF"/>
+                </a:solidFill>
+              </a:rPr>
+              <a:t>Servicios </a:t>
+            </a:r>
+            <a:r>
+              <a:rPr sz="4000" b="1">
+                <a:solidFill>
+                  <a:srgbClr val="2FDFE5"/>
+                </a:solidFill>
+              </a:rPr>
+              <a:t>adicionales</a:t>
+            </a:r>
+          </a:p>
+        </p:txBody>
+      </p:sp>
+      <p:sp>
+        <p:nvSpPr>
+          <p:cNvPr id="8" name="Rectangle 7"/>
+          <p:cNvSpPr/>
+          <p:nvPr/>
+        </p:nvSpPr>
+        <p:spPr>
+          <a:xfrm>
+            <a:off x="502920" y="1737360"/>
+            <a:ext cx="4389120" cy="31750"/>
+          </a:xfrm>
+          <a:prstGeom prst="rect">
+            <a:avLst/>
+          </a:prstGeom>
+          <a:solidFill>
+            <a:srgbClr val="2FDFE5"/>
+          </a:solidFill>
+          <a:ln>
+            <a:noFill/>
+          </a:ln>
+        </p:spPr>
+        <p:style>
+          <a:lnRef idx="1">
+            <a:schemeClr val="accent1"/>
+          </a:lnRef>
+          <a:fillRef idx="3">
+            <a:schemeClr val="accent1"/>
+          </a:fillRef>
+          <a:effectRef idx="2">
+            <a:schemeClr val="accent1"/>
+          </a:effectRef>
+          <a:fontRef idx="minor">
+            <a:schemeClr val="lt1"/>
+          </a:fontRef>
+        </p:style>
+        <p:txBody>
+          <a:bodyPr rtlCol="0" anchor="ctr"/>
+          <a:lstStyle/>
+          <a:p>
+            <a:pPr algn="ctr"/>
+          </a:p>
+        </p:txBody>
+      </p:sp>
+      <p:sp>
+        <p:nvSpPr>
+          <p:cNvPr id="9" name="Rectangle 8"/>
+          <p:cNvSpPr/>
+          <p:nvPr/>
+        </p:nvSpPr>
+        <p:spPr>
+          <a:xfrm>
+            <a:off x="502920" y="1920240"/>
+            <a:ext cx="5579211" cy="1993392"/>
+          </a:xfrm>
+          <a:prstGeom prst="rect">
+            <a:avLst/>
+          </a:prstGeom>
+          <a:solidFill>
+            <a:srgbClr val="081438"/>
+          </a:solidFill>
+          <a:ln w="12700">
+            <a:solidFill>
+              <a:srgbClr val="2FDFE5"/>
+            </a:solidFill>
+          </a:ln>
+        </p:spPr>
+        <p:style>
+          <a:lnRef idx="1">
+            <a:schemeClr val="accent1"/>
+          </a:lnRef>
+          <a:fillRef idx="3">
+            <a:schemeClr val="accent1"/>
+          </a:fillRef>
+          <a:effectRef idx="2">
+            <a:schemeClr val="accent1"/>
+          </a:effectRef>
+          <a:fontRef idx="minor">
+            <a:schemeClr val="lt1"/>
+          </a:fontRef>
+        </p:style>
+        <p:txBody>
+          <a:bodyPr rtlCol="0" anchor="ctr"/>
+          <a:lstStyle/>
+          <a:p>
+            <a:pPr algn="ctr"/>
+          </a:p>
+        </p:txBody>
+      </p:sp>
+      <p:sp>
+        <p:nvSpPr>
+          <p:cNvPr id="10" name="Rectangle 9"/>
+          <p:cNvSpPr/>
+          <p:nvPr/>
+        </p:nvSpPr>
+        <p:spPr>
+          <a:xfrm>
+            <a:off x="502920" y="1920240"/>
+            <a:ext cx="5579211" cy="63500"/>
+          </a:xfrm>
+          <a:prstGeom prst="rect">
+            <a:avLst/>
+          </a:prstGeom>
+          <a:solidFill>
+            <a:srgbClr val="2FDFE5"/>
+          </a:solidFill>
+          <a:ln>
+            <a:noFill/>
+          </a:ln>
+        </p:spPr>
+        <p:style>
+          <a:lnRef idx="1">
+            <a:schemeClr val="accent1"/>
+          </a:lnRef>
+          <a:fillRef idx="3">
+            <a:schemeClr val="accent1"/>
+          </a:fillRef>
+          <a:effectRef idx="2">
+            <a:schemeClr val="accent1"/>
+          </a:effectRef>
+          <a:fontRef idx="minor">
+            <a:schemeClr val="lt1"/>
+          </a:fontRef>
+        </p:style>
+        <p:txBody>
+          <a:bodyPr rtlCol="0" anchor="ctr"/>
+          <a:lstStyle/>
+          <a:p>
+            <a:pPr algn="ctr"/>
+          </a:p>
+        </p:txBody>
+      </p:sp>
+      <p:sp>
+        <p:nvSpPr>
+          <p:cNvPr id="11" name="TextBox 10"/>
+          <p:cNvSpPr txBox="1"/>
+          <p:nvPr/>
+        </p:nvSpPr>
+        <p:spPr>
+          <a:xfrm>
+            <a:off x="685800" y="2103120"/>
+            <a:ext cx="5213451" cy="585216"/>
+          </a:xfrm>
+          <a:prstGeom prst="rect">
+            <a:avLst/>
+          </a:prstGeom>
+          <a:noFill/>
+        </p:spPr>
+        <p:txBody lIns="38100" tIns="63500" rIns="38100" bIns="25400">
+          <a:bodyPr wrap="square">
+            <a:spAutoFit/>
+          </a:bodyPr>
+          <a:lstStyle/>
+          <a:p>
+            <a:pPr algn="l"/>
+            <a:r>
+              <a:rPr sz="1700" b="1">
+                <a:solidFill>
+                  <a:srgbClr val="2FDFE5"/>
+                </a:solidFill>
+              </a:rPr>
+              <a:t>1  </a:t>
+            </a:r>
+            <a:r>
+              <a:rPr sz="1700" b="1">
+                <a:solidFill>
+                  <a:srgbClr val="FFFFFF"/>
+                </a:solidFill>
+              </a:rPr>
+              <a:t>Vía monitoria</a:t>
+            </a:r>
+          </a:p>
+        </p:txBody>
+      </p:sp>
+      <p:sp>
+        <p:nvSpPr>
+          <p:cNvPr id="12" name="Rectangle 11"/>
+          <p:cNvSpPr/>
+          <p:nvPr/>
+        </p:nvSpPr>
+        <p:spPr>
+          <a:xfrm>
+            <a:off x="649224" y="2779776"/>
+            <a:ext cx="5286603" cy="19050"/>
+          </a:xfrm>
+          <a:prstGeom prst="rect">
+            <a:avLst/>
+          </a:prstGeom>
+          <a:solidFill>
+            <a:srgbClr val="13B9BF"/>
+          </a:solidFill>
+          <a:ln>
+            <a:noFill/>
+          </a:ln>
+        </p:spPr>
+        <p:style>
+          <a:lnRef idx="1">
+            <a:schemeClr val="accent1"/>
+          </a:lnRef>
+          <a:fillRef idx="3">
+            <a:schemeClr val="accent1"/>
+          </a:fillRef>
+          <a:effectRef idx="2">
+            <a:schemeClr val="accent1"/>
+          </a:effectRef>
+          <a:fontRef idx="minor">
+            <a:schemeClr val="lt1"/>
+          </a:fontRef>
+        </p:style>
+        <p:txBody>
+          <a:bodyPr rtlCol="0" anchor="ctr"/>
+          <a:lstStyle/>
+          <a:p>
+            <a:pPr algn="ctr"/>
+          </a:p>
+        </p:txBody>
+      </p:sp>
+      <p:sp>
+        <p:nvSpPr>
+          <p:cNvPr id="13" name="TextBox 12"/>
+          <p:cNvSpPr txBox="1"/>
+          <p:nvPr/>
+        </p:nvSpPr>
+        <p:spPr>
+          <a:xfrm>
+            <a:off x="649224" y="2881376"/>
+            <a:ext cx="5286603" cy="1005840"/>
+          </a:xfrm>
+          <a:prstGeom prst="rect">
+            <a:avLst/>
+          </a:prstGeom>
+          <a:noFill/>
+        </p:spPr>
+        <p:txBody lIns="50800" tIns="50800" rIns="50800" bIns="50800">
+          <a:bodyPr wrap="square">
+            <a:spAutoFit/>
+          </a:bodyPr>
+          <a:lstStyle/>
+          <a:p>
+            <a:pPr algn="l"/>
+            <a:r>
+              <a:rPr sz="1500">
+                <a:solidFill>
+                  <a:srgbClr val="D8EAFF"/>
+                </a:solidFill>
+              </a:rPr>
+              <a:t>Tramitación de procedimientos monitorios para reclamar la deuda por vía judicial cuando la vía amistosa no es suficiente.</a:t>
+            </a:r>
+          </a:p>
+        </p:txBody>
+      </p:sp>
+      <p:sp>
+        <p:nvSpPr>
+          <p:cNvPr id="14" name="Rectangle 13"/>
+          <p:cNvSpPr/>
+          <p:nvPr/>
+        </p:nvSpPr>
+        <p:spPr>
+          <a:xfrm>
+            <a:off x="6283299" y="1920240"/>
+            <a:ext cx="5579211" cy="1993392"/>
+          </a:xfrm>
+          <a:prstGeom prst="rect">
+            <a:avLst/>
+          </a:prstGeom>
+          <a:solidFill>
+            <a:srgbClr val="081438"/>
+          </a:solidFill>
+          <a:ln w="12700">
+            <a:solidFill>
+              <a:srgbClr val="2FDFE5"/>
+            </a:solidFill>
+          </a:ln>
+        </p:spPr>
+        <p:style>
+          <a:lnRef idx="1">
+            <a:schemeClr val="accent1"/>
+          </a:lnRef>
+          <a:fillRef idx="3">
+            <a:schemeClr val="accent1"/>
+          </a:fillRef>
+          <a:effectRef idx="2">
+            <a:schemeClr val="accent1"/>
+          </a:effectRef>
+          <a:fontRef idx="minor">
+            <a:schemeClr val="lt1"/>
+          </a:fontRef>
+        </p:style>
+        <p:txBody>
+          <a:bodyPr rtlCol="0" anchor="ctr"/>
+          <a:lstStyle/>
+          <a:p>
+            <a:pPr algn="ctr"/>
+          </a:p>
+        </p:txBody>
+      </p:sp>
+      <p:sp>
+        <p:nvSpPr>
+          <p:cNvPr id="15" name="Rectangle 14"/>
+          <p:cNvSpPr/>
+          <p:nvPr/>
+        </p:nvSpPr>
+        <p:spPr>
+          <a:xfrm>
+            <a:off x="6283299" y="1920240"/>
+            <a:ext cx="5579211" cy="63500"/>
+          </a:xfrm>
+          <a:prstGeom prst="rect">
+            <a:avLst/>
+          </a:prstGeom>
+          <a:solidFill>
+            <a:srgbClr val="2FDFE5"/>
+          </a:solidFill>
+          <a:ln>
+            <a:noFill/>
+          </a:ln>
+        </p:spPr>
+        <p:style>
+          <a:lnRef idx="1">
+            <a:schemeClr val="accent1"/>
+          </a:lnRef>
+          <a:fillRef idx="3">
+            <a:schemeClr val="accent1"/>
+          </a:fillRef>
+          <a:effectRef idx="2">
+            <a:schemeClr val="accent1"/>
+          </a:effectRef>
+          <a:fontRef idx="minor">
+            <a:schemeClr val="lt1"/>
+          </a:fontRef>
+        </p:style>
+        <p:txBody>
+          <a:bodyPr rtlCol="0" anchor="ctr"/>
+          <a:lstStyle/>
+          <a:p>
+            <a:pPr algn="ctr"/>
+          </a:p>
+        </p:txBody>
+      </p:sp>
+      <p:sp>
+        <p:nvSpPr>
+          <p:cNvPr id="16" name="TextBox 15"/>
+          <p:cNvSpPr txBox="1"/>
+          <p:nvPr/>
+        </p:nvSpPr>
+        <p:spPr>
+          <a:xfrm>
+            <a:off x="6466179" y="2103120"/>
+            <a:ext cx="5213451" cy="585216"/>
+          </a:xfrm>
+          <a:prstGeom prst="rect">
+            <a:avLst/>
+          </a:prstGeom>
+          <a:noFill/>
+        </p:spPr>
+        <p:txBody lIns="38100" tIns="63500" rIns="38100" bIns="25400">
+          <a:bodyPr wrap="square">
+            <a:spAutoFit/>
+          </a:bodyPr>
+          <a:lstStyle/>
+          <a:p>
+            <a:pPr algn="l"/>
+            <a:r>
+              <a:rPr sz="1700" b="1">
+                <a:solidFill>
+                  <a:srgbClr val="2FDFE5"/>
+                </a:solidFill>
+              </a:rPr>
+              <a:t>2  </a:t>
+            </a:r>
+            <a:r>
+              <a:rPr sz="1700" b="1">
+                <a:solidFill>
+                  <a:srgbClr val="FFFFFF"/>
+                </a:solidFill>
+              </a:rPr>
+              <a:t>Valoración y compra de carteras</a:t>
+            </a:r>
+          </a:p>
+        </p:txBody>
+      </p:sp>
+      <p:sp>
+        <p:nvSpPr>
+          <p:cNvPr id="17" name="Rectangle 16"/>
+          <p:cNvSpPr/>
+          <p:nvPr/>
+        </p:nvSpPr>
+        <p:spPr>
+          <a:xfrm>
+            <a:off x="6429603" y="2779776"/>
+            <a:ext cx="5286603" cy="19050"/>
+          </a:xfrm>
+          <a:prstGeom prst="rect">
+            <a:avLst/>
+          </a:prstGeom>
+          <a:solidFill>
+            <a:srgbClr val="13B9BF"/>
+          </a:solidFill>
+          <a:ln>
+            <a:noFill/>
+          </a:ln>
+        </p:spPr>
+        <p:style>
+          <a:lnRef idx="1">
+            <a:schemeClr val="accent1"/>
+          </a:lnRef>
+          <a:fillRef idx="3">
+            <a:schemeClr val="accent1"/>
+          </a:fillRef>
+          <a:effectRef idx="2">
+            <a:schemeClr val="accent1"/>
+          </a:effectRef>
+          <a:fontRef idx="minor">
+            <a:schemeClr val="lt1"/>
+          </a:fontRef>
+        </p:style>
+        <p:txBody>
+          <a:bodyPr rtlCol="0" anchor="ctr"/>
+          <a:lstStyle/>
+          <a:p>
+            <a:pPr algn="ctr"/>
+          </a:p>
+        </p:txBody>
+      </p:sp>
+      <p:sp>
+        <p:nvSpPr>
+          <p:cNvPr id="18" name="TextBox 17"/>
+          <p:cNvSpPr txBox="1"/>
+          <p:nvPr/>
+        </p:nvSpPr>
+        <p:spPr>
+          <a:xfrm>
+            <a:off x="6429603" y="2881376"/>
+            <a:ext cx="5286603" cy="1005840"/>
+          </a:xfrm>
+          <a:prstGeom prst="rect">
+            <a:avLst/>
+          </a:prstGeom>
+          <a:noFill/>
+        </p:spPr>
+        <p:txBody lIns="50800" tIns="50800" rIns="50800" bIns="50800">
+          <a:bodyPr wrap="square">
+            <a:spAutoFit/>
+          </a:bodyPr>
+          <a:lstStyle/>
+          <a:p>
+            <a:pPr algn="l"/>
+            <a:r>
+              <a:rPr sz="1500">
+                <a:solidFill>
+                  <a:srgbClr val="D8EAFF"/>
+                </a:solidFill>
+              </a:rPr>
+              <a:t>Análisis, valoración y adquisición de carteras de deuda fallida para maximizar la recuperación de activos.</a:t>
+            </a:r>
+          </a:p>
+        </p:txBody>
+      </p:sp>
+      <p:sp>
+        <p:nvSpPr>
+          <p:cNvPr id="19" name="Rectangle 18"/>
+          <p:cNvSpPr/>
+          <p:nvPr/>
+        </p:nvSpPr>
+        <p:spPr>
+          <a:xfrm>
+            <a:off x="502920" y="4059936"/>
+            <a:ext cx="5579211" cy="1993392"/>
+          </a:xfrm>
+          <a:prstGeom prst="rect">
+            <a:avLst/>
+          </a:prstGeom>
+          <a:solidFill>
+            <a:srgbClr val="081438"/>
+          </a:solidFill>
+          <a:ln w="12700">
+            <a:solidFill>
+              <a:srgbClr val="2FDFE5"/>
+            </a:solidFill>
+          </a:ln>
+        </p:spPr>
+        <p:style>
+          <a:lnRef idx="1">
+            <a:schemeClr val="accent1"/>
+          </a:lnRef>
+          <a:fillRef idx="3">
+            <a:schemeClr val="accent1"/>
+          </a:fillRef>
+          <a:effectRef idx="2">
+            <a:schemeClr val="accent1"/>
+          </a:effectRef>
+          <a:fontRef idx="minor">
+            <a:schemeClr val="lt1"/>
+          </a:fontRef>
+        </p:style>
+        <p:txBody>
+          <a:bodyPr rtlCol="0" anchor="ctr"/>
+          <a:lstStyle/>
+          <a:p>
+            <a:pPr algn="ctr"/>
+          </a:p>
+        </p:txBody>
+      </p:sp>
+      <p:sp>
+        <p:nvSpPr>
+          <p:cNvPr id="20" name="Rectangle 19"/>
+          <p:cNvSpPr/>
+          <p:nvPr/>
+        </p:nvSpPr>
+        <p:spPr>
+          <a:xfrm>
+            <a:off x="502920" y="4059936"/>
+            <a:ext cx="5579211" cy="63500"/>
+          </a:xfrm>
+          <a:prstGeom prst="rect">
+            <a:avLst/>
+          </a:prstGeom>
+          <a:solidFill>
+            <a:srgbClr val="2FDFE5"/>
+          </a:solidFill>
+          <a:ln>
+            <a:noFill/>
+          </a:ln>
+        </p:spPr>
+        <p:style>
+          <a:lnRef idx="1">
+            <a:schemeClr val="accent1"/>
+          </a:lnRef>
+          <a:fillRef idx="3">
+            <a:schemeClr val="accent1"/>
+          </a:fillRef>
+          <a:effectRef idx="2">
+            <a:schemeClr val="accent1"/>
+          </a:effectRef>
+          <a:fontRef idx="minor">
+            <a:schemeClr val="lt1"/>
+          </a:fontRef>
+        </p:style>
+        <p:txBody>
+          <a:bodyPr rtlCol="0" anchor="ctr"/>
+          <a:lstStyle/>
+          <a:p>
+            <a:pPr algn="ctr"/>
+          </a:p>
+        </p:txBody>
+      </p:sp>
+      <p:sp>
+        <p:nvSpPr>
+          <p:cNvPr id="21" name="TextBox 20"/>
+          <p:cNvSpPr txBox="1"/>
+          <p:nvPr/>
+        </p:nvSpPr>
+        <p:spPr>
+          <a:xfrm>
+            <a:off x="685800" y="4242816"/>
+            <a:ext cx="5213451" cy="585216"/>
+          </a:xfrm>
+          <a:prstGeom prst="rect">
+            <a:avLst/>
+          </a:prstGeom>
+          <a:noFill/>
+        </p:spPr>
+        <p:txBody lIns="38100" tIns="63500" rIns="38100" bIns="25400">
+          <a:bodyPr wrap="square">
+            <a:spAutoFit/>
+          </a:bodyPr>
+          <a:lstStyle/>
+          <a:p>
+            <a:pPr algn="l"/>
+            <a:r>
+              <a:rPr sz="1700" b="1">
+                <a:solidFill>
+                  <a:srgbClr val="2FDFE5"/>
+                </a:solidFill>
+              </a:rPr>
+              <a:t>3  </a:t>
+            </a:r>
+            <a:r>
+              <a:rPr sz="1700" b="1">
+                <a:solidFill>
+                  <a:srgbClr val="FFFFFF"/>
+                </a:solidFill>
+              </a:rPr>
+              <a:t>Análisis de solvencia</a:t>
+            </a:r>
+          </a:p>
+        </p:txBody>
+      </p:sp>
+      <p:sp>
+        <p:nvSpPr>
+          <p:cNvPr id="22" name="Rectangle 21"/>
+          <p:cNvSpPr/>
+          <p:nvPr/>
+        </p:nvSpPr>
+        <p:spPr>
+          <a:xfrm>
+            <a:off x="649224" y="4919472"/>
+            <a:ext cx="5286603" cy="19050"/>
+          </a:xfrm>
+          <a:prstGeom prst="rect">
+            <a:avLst/>
+          </a:prstGeom>
+          <a:solidFill>
+            <a:srgbClr val="13B9BF"/>
+          </a:solidFill>
+          <a:ln>
+            <a:noFill/>
+          </a:ln>
+        </p:spPr>
+        <p:style>
+          <a:lnRef idx="1">
+            <a:schemeClr val="accent1"/>
+          </a:lnRef>
+          <a:fillRef idx="3">
+            <a:schemeClr val="accent1"/>
+          </a:fillRef>
+          <a:effectRef idx="2">
+            <a:schemeClr val="accent1"/>
+          </a:effectRef>
+          <a:fontRef idx="minor">
+            <a:schemeClr val="lt1"/>
+          </a:fontRef>
+        </p:style>
+        <p:txBody>
+          <a:bodyPr rtlCol="0" anchor="ctr"/>
+          <a:lstStyle/>
+          <a:p>
+            <a:pPr algn="ctr"/>
+          </a:p>
+        </p:txBody>
+      </p:sp>
+      <p:sp>
+        <p:nvSpPr>
+          <p:cNvPr id="23" name="TextBox 22"/>
+          <p:cNvSpPr txBox="1"/>
+          <p:nvPr/>
+        </p:nvSpPr>
+        <p:spPr>
+          <a:xfrm>
+            <a:off x="649224" y="5021072"/>
+            <a:ext cx="5286603" cy="1005840"/>
+          </a:xfrm>
+          <a:prstGeom prst="rect">
+            <a:avLst/>
+          </a:prstGeom>
+          <a:noFill/>
+        </p:spPr>
+        <p:txBody lIns="50800" tIns="50800" rIns="50800" bIns="50800">
+          <a:bodyPr wrap="square">
+            <a:spAutoFit/>
+          </a:bodyPr>
+          <a:lstStyle/>
+          <a:p>
+            <a:pPr algn="l"/>
+            <a:r>
+              <a:rPr sz="1500">
+                <a:solidFill>
+                  <a:srgbClr val="D8EAFF"/>
+                </a:solidFill>
+              </a:rPr>
+              <a:t>Estudio de la capacidad económica real del deudor para orientar mejor la estrategia de recobro.</a:t>
+            </a:r>
+          </a:p>
+        </p:txBody>
+      </p:sp>
+      <p:sp>
+        <p:nvSpPr>
+          <p:cNvPr id="24" name="Rectangle 23"/>
+          <p:cNvSpPr/>
+          <p:nvPr/>
+        </p:nvSpPr>
+        <p:spPr>
+          <a:xfrm>
+            <a:off x="6283299" y="4059936"/>
+            <a:ext cx="5579211" cy="1993392"/>
+          </a:xfrm>
+          <a:prstGeom prst="rect">
+            <a:avLst/>
+          </a:prstGeom>
+          <a:solidFill>
+            <a:srgbClr val="081438"/>
+          </a:solidFill>
+          <a:ln w="12700">
+            <a:solidFill>
+              <a:srgbClr val="2FDFE5"/>
+            </a:solidFill>
+          </a:ln>
+        </p:spPr>
+        <p:style>
+          <a:lnRef idx="1">
+            <a:schemeClr val="accent1"/>
+          </a:lnRef>
+          <a:fillRef idx="3">
+            <a:schemeClr val="accent1"/>
+          </a:fillRef>
+          <a:effectRef idx="2">
+            <a:schemeClr val="accent1"/>
+          </a:effectRef>
+          <a:fontRef idx="minor">
+            <a:schemeClr val="lt1"/>
+          </a:fontRef>
+        </p:style>
+        <p:txBody>
+          <a:bodyPr rtlCol="0" anchor="ctr"/>
+          <a:lstStyle/>
+          <a:p>
+            <a:pPr algn="ctr"/>
+          </a:p>
+        </p:txBody>
+      </p:sp>
+      <p:sp>
+        <p:nvSpPr>
+          <p:cNvPr id="25" name="Rectangle 24"/>
+          <p:cNvSpPr/>
+          <p:nvPr/>
+        </p:nvSpPr>
+        <p:spPr>
+          <a:xfrm>
+            <a:off x="6283299" y="4059936"/>
+            <a:ext cx="5579211" cy="63500"/>
+          </a:xfrm>
+          <a:prstGeom prst="rect">
+            <a:avLst/>
+          </a:prstGeom>
+          <a:solidFill>
+            <a:srgbClr val="2FDFE5"/>
+          </a:solidFill>
+          <a:ln>
+            <a:noFill/>
+          </a:ln>
+        </p:spPr>
+        <p:style>
+          <a:lnRef idx="1">
+            <a:schemeClr val="accent1"/>
+          </a:lnRef>
+          <a:fillRef idx="3">
+            <a:schemeClr val="accent1"/>
+          </a:fillRef>
+          <a:effectRef idx="2">
+            <a:schemeClr val="accent1"/>
+          </a:effectRef>
+          <a:fontRef idx="minor">
+            <a:schemeClr val="lt1"/>
+          </a:fontRef>
+        </p:style>
+        <p:txBody>
+          <a:bodyPr rtlCol="0" anchor="ctr"/>
+          <a:lstStyle/>
+          <a:p>
+            <a:pPr algn="ctr"/>
+          </a:p>
+        </p:txBody>
+      </p:sp>
+      <p:sp>
+        <p:nvSpPr>
+          <p:cNvPr id="26" name="TextBox 25"/>
+          <p:cNvSpPr txBox="1"/>
+          <p:nvPr/>
+        </p:nvSpPr>
+        <p:spPr>
+          <a:xfrm>
+            <a:off x="6466179" y="4242816"/>
+            <a:ext cx="5213451" cy="585216"/>
+          </a:xfrm>
+          <a:prstGeom prst="rect">
+            <a:avLst/>
+          </a:prstGeom>
+          <a:noFill/>
+        </p:spPr>
+        <p:txBody lIns="38100" tIns="63500" rIns="38100" bIns="25400">
+          <a:bodyPr wrap="square">
+            <a:spAutoFit/>
+          </a:bodyPr>
+          <a:lstStyle/>
+          <a:p>
+            <a:pPr algn="l"/>
+            <a:r>
+              <a:rPr sz="1700" b="1">
+                <a:solidFill>
+                  <a:srgbClr val="2FDFE5"/>
+                </a:solidFill>
+              </a:rPr>
+              <a:t>4  </a:t>
+            </a:r>
+            <a:r>
+              <a:rPr sz="1700" b="1">
+                <a:solidFill>
+                  <a:srgbClr val="FFFFFF"/>
+                </a:solidFill>
+              </a:rPr>
+              <a:t>Sello preventivo Sendacredit</a:t>
+            </a:r>
+          </a:p>
+        </p:txBody>
+      </p:sp>
+      <p:sp>
+        <p:nvSpPr>
+          <p:cNvPr id="27" name="Rectangle 26"/>
+          <p:cNvSpPr/>
+          <p:nvPr/>
+        </p:nvSpPr>
+        <p:spPr>
+          <a:xfrm>
+            <a:off x="6429603" y="4919472"/>
+            <a:ext cx="5286603" cy="19050"/>
+          </a:xfrm>
+          <a:prstGeom prst="rect">
+            <a:avLst/>
+          </a:prstGeom>
+          <a:solidFill>
+            <a:srgbClr val="13B9BF"/>
+          </a:solidFill>
+          <a:ln>
+            <a:noFill/>
+          </a:ln>
+        </p:spPr>
+        <p:style>
+          <a:lnRef idx="1">
+            <a:schemeClr val="accent1"/>
+          </a:lnRef>
+          <a:fillRef idx="3">
+            <a:schemeClr val="accent1"/>
+          </a:fillRef>
+          <a:effectRef idx="2">
+            <a:schemeClr val="accent1"/>
+          </a:effectRef>
+          <a:fontRef idx="minor">
+            <a:schemeClr val="lt1"/>
+          </a:fontRef>
+        </p:style>
+        <p:txBody>
+          <a:bodyPr rtlCol="0" anchor="ctr"/>
+          <a:lstStyle/>
+          <a:p>
+            <a:pPr algn="ctr"/>
+          </a:p>
+        </p:txBody>
+      </p:sp>
+      <p:sp>
+        <p:nvSpPr>
+          <p:cNvPr id="28" name="TextBox 27"/>
+          <p:cNvSpPr txBox="1"/>
+          <p:nvPr/>
+        </p:nvSpPr>
+        <p:spPr>
+          <a:xfrm>
+            <a:off x="6429603" y="5021072"/>
+            <a:ext cx="4079595" cy="1005840"/>
+          </a:xfrm>
+          <a:prstGeom prst="rect">
+            <a:avLst/>
+          </a:prstGeom>
+          <a:noFill/>
+        </p:spPr>
+        <p:txBody lIns="50800" tIns="50800" rIns="50800" bIns="50800">
+          <a:bodyPr wrap="square">
+            <a:spAutoFit/>
+          </a:bodyPr>
+          <a:lstStyle/>
+          <a:p>
+            <a:pPr algn="l"/>
+            <a:r>
+              <a:rPr sz="1500">
+                <a:solidFill>
+                  <a:srgbClr val="D8EAFF"/>
+                </a:solidFill>
+              </a:rPr>
+              <a:t>Siéntase protegido frente a sus impagados.</a:t>
+            </a:r>
+          </a:p>
+        </p:txBody>
+      </p:sp>
+      <p:pic>
+        <p:nvPicPr>
+          <p:cNvPr id="29" name="Picture 28" descr="seal.png"/>
+          <p:cNvPicPr>
+            <a:picLocks noChangeAspect="1"/>
+          </p:cNvPicPr>
+          <p:nvPr/>
+        </p:nvPicPr>
+        <p:blipFill>
+          <a:blip r:embed="rId4"/>
+          <a:stretch>
+            <a:fillRect/>
+          </a:stretch>
+        </p:blipFill>
+        <p:spPr>
+          <a:xfrm>
+            <a:off x="10582351" y="4966208"/>
+            <a:ext cx="1115568" cy="1115568"/>
+          </a:xfrm>
+          <a:prstGeom prst="rect">
+            <a:avLst/>
+          </a:prstGeom>
+        </p:spPr>
+      </p:pic>
     </p:spTree>
   </p:cSld>
   <p:clrMapOvr>
@@ -4393,7 +8929,7 @@
                         <p:par>
                           <p:cTn id="15" fill="hold">
                             <p:stCondLst>
-                              <p:cond delay="160"/>
+                              <p:cond delay="140"/>
                             </p:stCondLst>
                             <p:childTnLst>
                               <p:animEffect transition="in" filter="wipe(up)">
@@ -4410,7 +8946,7 @@
                         <p:par>
                           <p:cTn id="17" fill="hold">
                             <p:stCondLst>
-                              <p:cond delay="160"/>
+                              <p:cond delay="140"/>
                             </p:stCondLst>
                             <p:childTnLst>
                               <p:animEffect transition="in" filter="wipe(up)">
@@ -4427,7 +8963,7 @@
                         <p:par>
                           <p:cTn id="19" fill="hold">
                             <p:stCondLst>
-                              <p:cond delay="160"/>
+                              <p:cond delay="140"/>
                             </p:stCondLst>
                             <p:childTnLst>
                               <p:animEffect transition="in" filter="wipe(up)">
@@ -4444,7 +8980,7 @@
                         <p:par>
                           <p:cTn id="21" fill="hold">
                             <p:stCondLst>
-                              <p:cond delay="160"/>
+                              <p:cond delay="140"/>
                             </p:stCondLst>
                             <p:childTnLst>
                               <p:animEffect transition="in" filter="wipe(up)">
@@ -4461,7 +8997,7 @@
                         <p:par>
                           <p:cTn id="23" fill="hold">
                             <p:stCondLst>
-                              <p:cond delay="160"/>
+                              <p:cond delay="140"/>
                             </p:stCondLst>
                             <p:childTnLst>
                               <p:animEffect transition="in" filter="wipe(up)">
@@ -4469,4422 +9005,6 @@
                                   <p:cTn id="24" dur="380" fill="hold"/>
                                   <p:tgtEl>
                                     <p:spTgt spid="18"/>
-                                  </p:tgtEl>
-                                </p:cBhvr>
-                              </p:animEffect>
-                            </p:childTnLst>
-                          </p:cTn>
-                        </p:par>
-                      </p:childTnLst>
-                    </p:cTn>
-                  </p:par>
-                </p:childTnLst>
-              </p:cTn>
-              <p:prevCondLst>
-                <p:cond evt="onPrevClick" delay="0"/>
-              </p:prevCondLst>
-              <p:nextCondLst>
-                <p:cond evt="onNextClick" delay="0"/>
-              </p:nextCondLst>
-            </p:seq>
-          </p:childTnLst>
-        </p:cTn>
-      </p:par>
-    </p:tnLst>
-  </p:timing>
-  <p:transition dur="550" spd="fast">
-    <p:push dir="u"/>
-  </p:transition>
-</p:sld>
-</file>
-
-<file path=ppt/slides/slide3.xml><?xml version="1.0" encoding="utf-8"?>
-<p:sld xmlns:a="http://schemas.openxmlformats.org/drawingml/2006/main" xmlns:p="http://schemas.openxmlformats.org/presentationml/2006/main" xmlns:r="http://schemas.openxmlformats.org/officeDocument/2006/relationships">
-  <p:cSld>
-    <p:spTree>
-      <p:nvGrpSpPr>
-        <p:cNvPr id="1" name=""/>
-        <p:cNvGrpSpPr/>
-        <p:nvPr/>
-      </p:nvGrpSpPr>
-      <p:grpSpPr/>
-      <p:pic>
-        <p:nvPicPr>
-          <p:cNvPr id="2" name="Picture 1" descr="content_bg.png"/>
-          <p:cNvPicPr>
-            <a:picLocks noChangeAspect="1"/>
-          </p:cNvPicPr>
-          <p:nvPr/>
-        </p:nvPicPr>
-        <p:blipFill>
-          <a:blip r:embed="rId2"/>
-          <a:stretch>
-            <a:fillRect/>
-          </a:stretch>
-        </p:blipFill>
-        <p:spPr>
-          <a:xfrm>
-            <a:off x="0" y="0"/>
-            <a:ext cx="12191695" cy="6858000"/>
-          </a:xfrm>
-          <a:prstGeom prst="rect">
-            <a:avLst/>
-          </a:prstGeom>
-        </p:spPr>
-      </p:pic>
-      <p:sp>
-        <p:nvSpPr>
-          <p:cNvPr id="3" name="Rectangle 2"/>
-          <p:cNvSpPr/>
-          <p:nvPr/>
-        </p:nvSpPr>
-        <p:spPr>
-          <a:xfrm>
-            <a:off x="0" y="0"/>
-            <a:ext cx="12191695" cy="50800"/>
-          </a:xfrm>
-          <a:prstGeom prst="rect">
-            <a:avLst/>
-          </a:prstGeom>
-          <a:solidFill>
-            <a:srgbClr val="2FDFE5"/>
-          </a:solidFill>
-          <a:ln>
-            <a:noFill/>
-          </a:ln>
-        </p:spPr>
-        <p:style>
-          <a:lnRef idx="1">
-            <a:schemeClr val="accent1"/>
-          </a:lnRef>
-          <a:fillRef idx="3">
-            <a:schemeClr val="accent1"/>
-          </a:fillRef>
-          <a:effectRef idx="2">
-            <a:schemeClr val="accent1"/>
-          </a:effectRef>
-          <a:fontRef idx="minor">
-            <a:schemeClr val="lt1"/>
-          </a:fontRef>
-        </p:style>
-        <p:txBody>
-          <a:bodyPr rtlCol="0" anchor="ctr"/>
-          <a:lstStyle/>
-          <a:p>
-            <a:pPr algn="ctr"/>
-          </a:p>
-        </p:txBody>
-      </p:sp>
-      <p:sp>
-        <p:nvSpPr>
-          <p:cNvPr id="4" name="Rectangle 3"/>
-          <p:cNvSpPr/>
-          <p:nvPr/>
-        </p:nvSpPr>
-        <p:spPr>
-          <a:xfrm>
-            <a:off x="0" y="0"/>
-            <a:ext cx="63500" cy="6858000"/>
-          </a:xfrm>
-          <a:prstGeom prst="rect">
-            <a:avLst/>
-          </a:prstGeom>
-          <a:solidFill>
-            <a:srgbClr val="13B9BF"/>
-          </a:solidFill>
-          <a:ln>
-            <a:noFill/>
-          </a:ln>
-        </p:spPr>
-        <p:style>
-          <a:lnRef idx="1">
-            <a:schemeClr val="accent1"/>
-          </a:lnRef>
-          <a:fillRef idx="3">
-            <a:schemeClr val="accent1"/>
-          </a:fillRef>
-          <a:effectRef idx="2">
-            <a:schemeClr val="accent1"/>
-          </a:effectRef>
-          <a:fontRef idx="minor">
-            <a:schemeClr val="lt1"/>
-          </a:fontRef>
-        </p:style>
-        <p:txBody>
-          <a:bodyPr rtlCol="0" anchor="ctr"/>
-          <a:lstStyle/>
-          <a:p>
-            <a:pPr algn="ctr"/>
-          </a:p>
-        </p:txBody>
-      </p:sp>
-      <p:sp>
-        <p:nvSpPr>
-          <p:cNvPr id="5" name="Rectangle 4"/>
-          <p:cNvSpPr/>
-          <p:nvPr/>
-        </p:nvSpPr>
-        <p:spPr>
-          <a:xfrm>
-            <a:off x="502920" y="365760"/>
-            <a:ext cx="1737360" cy="301752"/>
-          </a:xfrm>
-          <a:prstGeom prst="rect">
-            <a:avLst/>
-          </a:prstGeom>
-          <a:solidFill>
-            <a:srgbClr val="2FDFE5"/>
-          </a:solidFill>
-          <a:ln>
-            <a:noFill/>
-          </a:ln>
-        </p:spPr>
-        <p:style>
-          <a:lnRef idx="1">
-            <a:schemeClr val="accent1"/>
-          </a:lnRef>
-          <a:fillRef idx="3">
-            <a:schemeClr val="accent1"/>
-          </a:fillRef>
-          <a:effectRef idx="2">
-            <a:schemeClr val="accent1"/>
-          </a:effectRef>
-          <a:fontRef idx="minor">
-            <a:schemeClr val="lt1"/>
-          </a:fontRef>
-        </p:style>
-        <p:txBody lIns="101600" tIns="25400" rIns="101600" bIns="25400">
-          <a:bodyPr rtlCol="0" anchor="ctr" wrap="none"/>
-          <a:lstStyle/>
-          <a:p>
-            <a:pPr algn="ctr"/>
-            <a:r>
-              <a:rPr sz="1100" b="1">
-                <a:solidFill>
-                  <a:srgbClr val="0A1638"/>
-                </a:solidFill>
-              </a:rPr>
-              <a:t>FASE 2</a:t>
-            </a:r>
-          </a:p>
-        </p:txBody>
-      </p:sp>
-      <p:sp>
-        <p:nvSpPr>
-          <p:cNvPr id="6" name="TextBox 5"/>
-          <p:cNvSpPr txBox="1"/>
-          <p:nvPr/>
-        </p:nvSpPr>
-        <p:spPr>
-          <a:xfrm>
-            <a:off x="502920" y="731520"/>
-            <a:ext cx="8961120" cy="960120"/>
-          </a:xfrm>
-          <a:prstGeom prst="rect">
-            <a:avLst/>
-          </a:prstGeom>
-          <a:noFill/>
-        </p:spPr>
-        <p:txBody lIns="0" tIns="0" rIns="0" bIns="0">
-          <a:bodyPr wrap="square">
-            <a:spAutoFit/>
-          </a:bodyPr>
-          <a:lstStyle/>
-          <a:p>
-            <a:pPr algn="l"/>
-            <a:r>
-              <a:rPr sz="4000" b="1">
-                <a:solidFill>
-                  <a:srgbClr val="FFFFFF"/>
-                </a:solidFill>
-              </a:rPr>
-              <a:t>Activación y </a:t>
-            </a:r>
-            <a:r>
-              <a:rPr sz="4000" b="1">
-                <a:solidFill>
-                  <a:srgbClr val="2FDFE5"/>
-                </a:solidFill>
-              </a:rPr>
-              <a:t>contacto</a:t>
-            </a:r>
-          </a:p>
-        </p:txBody>
-      </p:sp>
-      <p:sp>
-        <p:nvSpPr>
-          <p:cNvPr id="7" name="Rectangle 6"/>
-          <p:cNvSpPr/>
-          <p:nvPr/>
-        </p:nvSpPr>
-        <p:spPr>
-          <a:xfrm>
-            <a:off x="502920" y="1737360"/>
-            <a:ext cx="4389120" cy="31750"/>
-          </a:xfrm>
-          <a:prstGeom prst="rect">
-            <a:avLst/>
-          </a:prstGeom>
-          <a:solidFill>
-            <a:srgbClr val="2FDFE5"/>
-          </a:solidFill>
-          <a:ln>
-            <a:noFill/>
-          </a:ln>
-        </p:spPr>
-        <p:style>
-          <a:lnRef idx="1">
-            <a:schemeClr val="accent1"/>
-          </a:lnRef>
-          <a:fillRef idx="3">
-            <a:schemeClr val="accent1"/>
-          </a:fillRef>
-          <a:effectRef idx="2">
-            <a:schemeClr val="accent1"/>
-          </a:effectRef>
-          <a:fontRef idx="minor">
-            <a:schemeClr val="lt1"/>
-          </a:fontRef>
-        </p:style>
-        <p:txBody>
-          <a:bodyPr rtlCol="0" anchor="ctr"/>
-          <a:lstStyle/>
-          <a:p>
-            <a:pPr algn="ctr"/>
-          </a:p>
-        </p:txBody>
-      </p:sp>
-      <p:sp>
-        <p:nvSpPr>
-          <p:cNvPr id="8" name="TextBox 7"/>
-          <p:cNvSpPr txBox="1"/>
-          <p:nvPr/>
-        </p:nvSpPr>
-        <p:spPr>
-          <a:xfrm>
-            <a:off x="502920" y="1810512"/>
-            <a:ext cx="9265615" cy="384048"/>
-          </a:xfrm>
-          <a:prstGeom prst="rect">
-            <a:avLst/>
-          </a:prstGeom>
-          <a:noFill/>
-        </p:spPr>
-        <p:txBody lIns="0" tIns="0" rIns="0" bIns="0">
-          <a:bodyPr wrap="none">
-            <a:spAutoFit/>
-          </a:bodyPr>
-          <a:lstStyle/>
-          <a:p>
-            <a:pPr algn="l"/>
-            <a:r>
-              <a:rPr sz="1300" i="1">
-                <a:solidFill>
-                  <a:srgbClr val="80A8CC"/>
-                </a:solidFill>
-              </a:rPr>
-              <a:t>Multiplicamos los canales de contacto y buscamos siempre la vía amistosa para llegar a un acuerdo.</a:t>
-            </a:r>
-          </a:p>
-        </p:txBody>
-      </p:sp>
-      <p:sp>
-        <p:nvSpPr>
-          <p:cNvPr id="9" name="Rectangle 8"/>
-          <p:cNvSpPr/>
-          <p:nvPr/>
-        </p:nvSpPr>
-        <p:spPr>
-          <a:xfrm>
-            <a:off x="502920" y="2267712"/>
-            <a:ext cx="5579211" cy="3328416"/>
-          </a:xfrm>
-          <a:prstGeom prst="rect">
-            <a:avLst/>
-          </a:prstGeom>
-          <a:solidFill>
-            <a:srgbClr val="081438"/>
-          </a:solidFill>
-          <a:ln w="12700">
-            <a:solidFill>
-              <a:srgbClr val="2FDFE5"/>
-            </a:solidFill>
-          </a:ln>
-        </p:spPr>
-        <p:style>
-          <a:lnRef idx="1">
-            <a:schemeClr val="accent1"/>
-          </a:lnRef>
-          <a:fillRef idx="3">
-            <a:schemeClr val="accent1"/>
-          </a:fillRef>
-          <a:effectRef idx="2">
-            <a:schemeClr val="accent1"/>
-          </a:effectRef>
-          <a:fontRef idx="minor">
-            <a:schemeClr val="lt1"/>
-          </a:fontRef>
-        </p:style>
-        <p:txBody>
-          <a:bodyPr rtlCol="0" anchor="ctr"/>
-          <a:lstStyle/>
-          <a:p>
-            <a:pPr algn="ctr"/>
-          </a:p>
-        </p:txBody>
-      </p:sp>
-      <p:sp>
-        <p:nvSpPr>
-          <p:cNvPr id="10" name="Rectangle 9"/>
-          <p:cNvSpPr/>
-          <p:nvPr/>
-        </p:nvSpPr>
-        <p:spPr>
-          <a:xfrm>
-            <a:off x="502920" y="2267712"/>
-            <a:ext cx="5579211" cy="63500"/>
-          </a:xfrm>
-          <a:prstGeom prst="rect">
-            <a:avLst/>
-          </a:prstGeom>
-          <a:solidFill>
-            <a:srgbClr val="2FDFE5"/>
-          </a:solidFill>
-          <a:ln>
-            <a:noFill/>
-          </a:ln>
-        </p:spPr>
-        <p:style>
-          <a:lnRef idx="1">
-            <a:schemeClr val="accent1"/>
-          </a:lnRef>
-          <a:fillRef idx="3">
-            <a:schemeClr val="accent1"/>
-          </a:fillRef>
-          <a:effectRef idx="2">
-            <a:schemeClr val="accent1"/>
-          </a:effectRef>
-          <a:fontRef idx="minor">
-            <a:schemeClr val="lt1"/>
-          </a:fontRef>
-        </p:style>
-        <p:txBody>
-          <a:bodyPr rtlCol="0" anchor="ctr"/>
-          <a:lstStyle/>
-          <a:p>
-            <a:pPr algn="ctr"/>
-          </a:p>
-        </p:txBody>
-      </p:sp>
-      <p:sp>
-        <p:nvSpPr>
-          <p:cNvPr id="11" name="TextBox 10"/>
-          <p:cNvSpPr txBox="1"/>
-          <p:nvPr/>
-        </p:nvSpPr>
-        <p:spPr>
-          <a:xfrm>
-            <a:off x="704088" y="2487168"/>
-            <a:ext cx="5176875" cy="640080"/>
-          </a:xfrm>
-          <a:prstGeom prst="rect">
-            <a:avLst/>
-          </a:prstGeom>
-          <a:noFill/>
-        </p:spPr>
-        <p:txBody lIns="38100" tIns="63500" rIns="38100" bIns="25400">
-          <a:bodyPr wrap="square">
-            <a:spAutoFit/>
-          </a:bodyPr>
-          <a:lstStyle/>
-          <a:p>
-            <a:pPr algn="l"/>
-            <a:r>
-              <a:rPr sz="1900" b="1">
-                <a:solidFill>
-                  <a:srgbClr val="2FDFE5"/>
-                </a:solidFill>
-              </a:rPr>
-              <a:t>3  </a:t>
-            </a:r>
-            <a:r>
-              <a:rPr sz="1900" b="1">
-                <a:solidFill>
-                  <a:srgbClr val="FFFFFF"/>
-                </a:solidFill>
-              </a:rPr>
-              <a:t>Contactación multicanal</a:t>
-            </a:r>
-          </a:p>
-        </p:txBody>
-      </p:sp>
-      <p:sp>
-        <p:nvSpPr>
-          <p:cNvPr id="12" name="Rectangle 11"/>
-          <p:cNvSpPr/>
-          <p:nvPr/>
-        </p:nvSpPr>
-        <p:spPr>
-          <a:xfrm>
-            <a:off x="667512" y="3218688"/>
-            <a:ext cx="5250027" cy="19050"/>
-          </a:xfrm>
-          <a:prstGeom prst="rect">
-            <a:avLst/>
-          </a:prstGeom>
-          <a:solidFill>
-            <a:srgbClr val="13B9BF"/>
-          </a:solidFill>
-          <a:ln>
-            <a:noFill/>
-          </a:ln>
-        </p:spPr>
-        <p:style>
-          <a:lnRef idx="1">
-            <a:schemeClr val="accent1"/>
-          </a:lnRef>
-          <a:fillRef idx="3">
-            <a:schemeClr val="accent1"/>
-          </a:fillRef>
-          <a:effectRef idx="2">
-            <a:schemeClr val="accent1"/>
-          </a:effectRef>
-          <a:fontRef idx="minor">
-            <a:schemeClr val="lt1"/>
-          </a:fontRef>
-        </p:style>
-        <p:txBody>
-          <a:bodyPr rtlCol="0" anchor="ctr"/>
-          <a:lstStyle/>
-          <a:p>
-            <a:pPr algn="ctr"/>
-          </a:p>
-        </p:txBody>
-      </p:sp>
-      <p:sp>
-        <p:nvSpPr>
-          <p:cNvPr id="13" name="TextBox 12"/>
-          <p:cNvSpPr txBox="1"/>
-          <p:nvPr/>
-        </p:nvSpPr>
-        <p:spPr>
-          <a:xfrm>
-            <a:off x="667512" y="3345688"/>
-            <a:ext cx="5250027" cy="2249424"/>
-          </a:xfrm>
-          <a:prstGeom prst="rect">
-            <a:avLst/>
-          </a:prstGeom>
-          <a:noFill/>
-        </p:spPr>
-        <p:txBody lIns="50800" tIns="50800" rIns="50800" bIns="50800">
-          <a:bodyPr wrap="square">
-            <a:spAutoFit/>
-          </a:bodyPr>
-          <a:lstStyle/>
-          <a:p>
-            <a:pPr algn="l">
-              <a:spcBef>
-                <a:spcPts val="1800"/>
-              </a:spcBef>
-            </a:pPr>
-            <a:r>
-              <a:rPr sz="1400">
-                <a:solidFill>
-                  <a:srgbClr val="2FDFE5"/>
-                </a:solidFill>
-              </a:rPr>
-              <a:t>▸  </a:t>
-            </a:r>
-            <a:r>
-              <a:rPr sz="1700">
-                <a:solidFill>
-                  <a:srgbClr val="D8EAFF"/>
-                </a:solidFill>
-              </a:rPr>
-              <a:t>Primeras comunicaciones: teléfono, SMS, email y mensajería</a:t>
-            </a:r>
-          </a:p>
-          <a:p>
-            <a:pPr algn="l">
-              <a:spcBef>
-                <a:spcPts val="1800"/>
-              </a:spcBef>
-            </a:pPr>
-            <a:r>
-              <a:rPr sz="1400">
-                <a:solidFill>
-                  <a:srgbClr val="2FDFE5"/>
-                </a:solidFill>
-              </a:rPr>
-              <a:t>▸  </a:t>
-            </a:r>
-            <a:r>
-              <a:rPr sz="1700">
-                <a:solidFill>
-                  <a:srgbClr val="D8EAFF"/>
-                </a:solidFill>
-              </a:rPr>
-              <a:t>Verificación de datos de contacto y situación del cliente</a:t>
-            </a:r>
-          </a:p>
-          <a:p>
-            <a:pPr algn="l">
-              <a:spcBef>
-                <a:spcPts val="1800"/>
-              </a:spcBef>
-            </a:pPr>
-            <a:r>
-              <a:rPr sz="1400">
-                <a:solidFill>
-                  <a:srgbClr val="2FDFE5"/>
-                </a:solidFill>
-              </a:rPr>
-              <a:t>▸  </a:t>
-            </a:r>
-            <a:r>
-              <a:rPr sz="1700">
-                <a:solidFill>
-                  <a:srgbClr val="D8EAFF"/>
-                </a:solidFill>
-              </a:rPr>
-              <a:t>Búsqueda activa de datos en no contactados o sin localización</a:t>
-            </a:r>
-          </a:p>
-        </p:txBody>
-      </p:sp>
-      <p:sp>
-        <p:nvSpPr>
-          <p:cNvPr id="14" name="Rectangle 13"/>
-          <p:cNvSpPr/>
-          <p:nvPr/>
-        </p:nvSpPr>
-        <p:spPr>
-          <a:xfrm>
-            <a:off x="6283299" y="2267712"/>
-            <a:ext cx="5579211" cy="3328416"/>
-          </a:xfrm>
-          <a:prstGeom prst="rect">
-            <a:avLst/>
-          </a:prstGeom>
-          <a:solidFill>
-            <a:srgbClr val="081438"/>
-          </a:solidFill>
-          <a:ln w="12700">
-            <a:solidFill>
-              <a:srgbClr val="2FDFE5"/>
-            </a:solidFill>
-          </a:ln>
-        </p:spPr>
-        <p:style>
-          <a:lnRef idx="1">
-            <a:schemeClr val="accent1"/>
-          </a:lnRef>
-          <a:fillRef idx="3">
-            <a:schemeClr val="accent1"/>
-          </a:fillRef>
-          <a:effectRef idx="2">
-            <a:schemeClr val="accent1"/>
-          </a:effectRef>
-          <a:fontRef idx="minor">
-            <a:schemeClr val="lt1"/>
-          </a:fontRef>
-        </p:style>
-        <p:txBody>
-          <a:bodyPr rtlCol="0" anchor="ctr"/>
-          <a:lstStyle/>
-          <a:p>
-            <a:pPr algn="ctr"/>
-          </a:p>
-        </p:txBody>
-      </p:sp>
-      <p:sp>
-        <p:nvSpPr>
-          <p:cNvPr id="15" name="Rectangle 14"/>
-          <p:cNvSpPr/>
-          <p:nvPr/>
-        </p:nvSpPr>
-        <p:spPr>
-          <a:xfrm>
-            <a:off x="6283299" y="2267712"/>
-            <a:ext cx="5579211" cy="63500"/>
-          </a:xfrm>
-          <a:prstGeom prst="rect">
-            <a:avLst/>
-          </a:prstGeom>
-          <a:solidFill>
-            <a:srgbClr val="2FDFE5"/>
-          </a:solidFill>
-          <a:ln>
-            <a:noFill/>
-          </a:ln>
-        </p:spPr>
-        <p:style>
-          <a:lnRef idx="1">
-            <a:schemeClr val="accent1"/>
-          </a:lnRef>
-          <a:fillRef idx="3">
-            <a:schemeClr val="accent1"/>
-          </a:fillRef>
-          <a:effectRef idx="2">
-            <a:schemeClr val="accent1"/>
-          </a:effectRef>
-          <a:fontRef idx="minor">
-            <a:schemeClr val="lt1"/>
-          </a:fontRef>
-        </p:style>
-        <p:txBody>
-          <a:bodyPr rtlCol="0" anchor="ctr"/>
-          <a:lstStyle/>
-          <a:p>
-            <a:pPr algn="ctr"/>
-          </a:p>
-        </p:txBody>
-      </p:sp>
-      <p:sp>
-        <p:nvSpPr>
-          <p:cNvPr id="16" name="TextBox 15"/>
-          <p:cNvSpPr txBox="1"/>
-          <p:nvPr/>
-        </p:nvSpPr>
-        <p:spPr>
-          <a:xfrm>
-            <a:off x="6484467" y="2487168"/>
-            <a:ext cx="5176875" cy="640080"/>
-          </a:xfrm>
-          <a:prstGeom prst="rect">
-            <a:avLst/>
-          </a:prstGeom>
-          <a:noFill/>
-        </p:spPr>
-        <p:txBody lIns="38100" tIns="63500" rIns="38100" bIns="25400">
-          <a:bodyPr wrap="square">
-            <a:spAutoFit/>
-          </a:bodyPr>
-          <a:lstStyle/>
-          <a:p>
-            <a:pPr algn="l"/>
-            <a:r>
-              <a:rPr sz="1900" b="1">
-                <a:solidFill>
-                  <a:srgbClr val="2FDFE5"/>
-                </a:solidFill>
-              </a:rPr>
-              <a:t>4  </a:t>
-            </a:r>
-            <a:r>
-              <a:rPr sz="1900" b="1">
-                <a:solidFill>
-                  <a:srgbClr val="FFFFFF"/>
-                </a:solidFill>
-              </a:rPr>
-              <a:t>Acuerdos personalizados</a:t>
-            </a:r>
-          </a:p>
-        </p:txBody>
-      </p:sp>
-      <p:sp>
-        <p:nvSpPr>
-          <p:cNvPr id="17" name="Rectangle 16"/>
-          <p:cNvSpPr/>
-          <p:nvPr/>
-        </p:nvSpPr>
-        <p:spPr>
-          <a:xfrm>
-            <a:off x="6447891" y="3218688"/>
-            <a:ext cx="5250027" cy="19050"/>
-          </a:xfrm>
-          <a:prstGeom prst="rect">
-            <a:avLst/>
-          </a:prstGeom>
-          <a:solidFill>
-            <a:srgbClr val="13B9BF"/>
-          </a:solidFill>
-          <a:ln>
-            <a:noFill/>
-          </a:ln>
-        </p:spPr>
-        <p:style>
-          <a:lnRef idx="1">
-            <a:schemeClr val="accent1"/>
-          </a:lnRef>
-          <a:fillRef idx="3">
-            <a:schemeClr val="accent1"/>
-          </a:fillRef>
-          <a:effectRef idx="2">
-            <a:schemeClr val="accent1"/>
-          </a:effectRef>
-          <a:fontRef idx="minor">
-            <a:schemeClr val="lt1"/>
-          </a:fontRef>
-        </p:style>
-        <p:txBody>
-          <a:bodyPr rtlCol="0" anchor="ctr"/>
-          <a:lstStyle/>
-          <a:p>
-            <a:pPr algn="ctr"/>
-          </a:p>
-        </p:txBody>
-      </p:sp>
-      <p:sp>
-        <p:nvSpPr>
-          <p:cNvPr id="18" name="TextBox 17"/>
-          <p:cNvSpPr txBox="1"/>
-          <p:nvPr/>
-        </p:nvSpPr>
-        <p:spPr>
-          <a:xfrm>
-            <a:off x="6447891" y="3345688"/>
-            <a:ext cx="5250027" cy="2249424"/>
-          </a:xfrm>
-          <a:prstGeom prst="rect">
-            <a:avLst/>
-          </a:prstGeom>
-          <a:noFill/>
-        </p:spPr>
-        <p:txBody lIns="50800" tIns="50800" rIns="50800" bIns="50800">
-          <a:bodyPr wrap="square">
-            <a:spAutoFit/>
-          </a:bodyPr>
-          <a:lstStyle/>
-          <a:p>
-            <a:pPr algn="l">
-              <a:spcBef>
-                <a:spcPts val="1800"/>
-              </a:spcBef>
-            </a:pPr>
-            <a:r>
-              <a:rPr sz="1400">
-                <a:solidFill>
-                  <a:srgbClr val="2FDFE5"/>
-                </a:solidFill>
-              </a:rPr>
-              <a:t>▸  </a:t>
-            </a:r>
-            <a:r>
-              <a:rPr sz="1700">
-                <a:solidFill>
-                  <a:srgbClr val="D8EAFF"/>
-                </a:solidFill>
-              </a:rPr>
-              <a:t>Análisis de la capacidad de pago del deudor</a:t>
-            </a:r>
-          </a:p>
-          <a:p>
-            <a:pPr algn="l">
-              <a:spcBef>
-                <a:spcPts val="1800"/>
-              </a:spcBef>
-            </a:pPr>
-            <a:r>
-              <a:rPr sz="1400">
-                <a:solidFill>
-                  <a:srgbClr val="2FDFE5"/>
-                </a:solidFill>
-              </a:rPr>
-              <a:t>▸  </a:t>
-            </a:r>
-            <a:r>
-              <a:rPr sz="1700">
-                <a:solidFill>
-                  <a:srgbClr val="D8EAFF"/>
-                </a:solidFill>
-              </a:rPr>
-              <a:t>Propuesta de acuerdos personalizados</a:t>
-            </a:r>
-          </a:p>
-          <a:p>
-            <a:pPr algn="l">
-              <a:spcBef>
-                <a:spcPts val="1800"/>
-              </a:spcBef>
-            </a:pPr>
-            <a:r>
-              <a:rPr sz="1400">
-                <a:solidFill>
-                  <a:srgbClr val="2FDFE5"/>
-                </a:solidFill>
-              </a:rPr>
-              <a:t>▸  </a:t>
-            </a:r>
-            <a:r>
-              <a:rPr sz="1700">
-                <a:solidFill>
-                  <a:srgbClr val="D8EAFF"/>
-                </a:solidFill>
-              </a:rPr>
-              <a:t>Formalización y seguimiento de planes de pago</a:t>
-            </a:r>
-          </a:p>
-        </p:txBody>
-      </p:sp>
-    </p:spTree>
-  </p:cSld>
-  <p:clrMapOvr>
-    <a:masterClrMapping/>
-  </p:clrMapOvr>
-  <p:timing>
-    <p:tnLst>
-      <p:par>
-        <p:cTn id="1" dur="indefin" restart="whenNotActive" nodeType="tmRoot">
-          <p:childTnLst>
-            <p:seq concurrent="1" nextAc="seek">
-              <p:cTn id="2" dur="indefin" nodeType="mainSeq">
-                <p:childTnLst>
-                  <p:par>
-                    <p:cTn id="3" fill="hold">
-                      <p:stCondLst>
-                        <p:cond delay="0"/>
-                      </p:stCondLst>
-                      <p:childTnLst>
-                        <p:par>
-                          <p:cTn id="5" fill="hold">
-                            <p:stCondLst>
-                              <p:cond delay="0"/>
-                            </p:stCondLst>
-                            <p:childTnLst>
-                              <p:animEffect transition="in" filter="wipe(up)">
-                                <p:cBhvr>
-                                  <p:cTn id="6" dur="380" fill="hold"/>
-                                  <p:tgtEl>
-                                    <p:spTgt spid="9"/>
-                                  </p:tgtEl>
-                                </p:cBhvr>
-                              </p:animEffect>
-                            </p:childTnLst>
-                          </p:cTn>
-                        </p:par>
-                        <p:par>
-                          <p:cTn id="7" fill="hold">
-                            <p:stCondLst>
-                              <p:cond delay="0"/>
-                            </p:stCondLst>
-                            <p:childTnLst>
-                              <p:animEffect transition="in" filter="wipe(up)">
-                                <p:cBhvr>
-                                  <p:cTn id="8" dur="380" fill="hold"/>
-                                  <p:tgtEl>
-                                    <p:spTgt spid="10"/>
-                                  </p:tgtEl>
-                                </p:cBhvr>
-                              </p:animEffect>
-                            </p:childTnLst>
-                          </p:cTn>
-                        </p:par>
-                        <p:par>
-                          <p:cTn id="9" fill="hold">
-                            <p:stCondLst>
-                              <p:cond delay="0"/>
-                            </p:stCondLst>
-                            <p:childTnLst>
-                              <p:animEffect transition="in" filter="wipe(up)">
-                                <p:cBhvr>
-                                  <p:cTn id="10" dur="380" fill="hold"/>
-                                  <p:tgtEl>
-                                    <p:spTgt spid="11"/>
-                                  </p:tgtEl>
-                                </p:cBhvr>
-                              </p:animEffect>
-                            </p:childTnLst>
-                          </p:cTn>
-                        </p:par>
-                        <p:par>
-                          <p:cTn id="11" fill="hold">
-                            <p:stCondLst>
-                              <p:cond delay="0"/>
-                            </p:stCondLst>
-                            <p:childTnLst>
-                              <p:animEffect transition="in" filter="wipe(up)">
-                                <p:cBhvr>
-                                  <p:cTn id="12" dur="380" fill="hold"/>
-                                  <p:tgtEl>
-                                    <p:spTgt spid="12"/>
-                                  </p:tgtEl>
-                                </p:cBhvr>
-                              </p:animEffect>
-                            </p:childTnLst>
-                          </p:cTn>
-                        </p:par>
-                        <p:par>
-                          <p:cTn id="13" fill="hold">
-                            <p:stCondLst>
-                              <p:cond delay="0"/>
-                            </p:stCondLst>
-                            <p:childTnLst>
-                              <p:animEffect transition="in" filter="wipe(up)">
-                                <p:cBhvr>
-                                  <p:cTn id="14" dur="380" fill="hold"/>
-                                  <p:tgtEl>
-                                    <p:spTgt spid="13"/>
-                                  </p:tgtEl>
-                                </p:cBhvr>
-                              </p:animEffect>
-                            </p:childTnLst>
-                          </p:cTn>
-                        </p:par>
-                        <p:par>
-                          <p:cTn id="15" fill="hold">
-                            <p:stCondLst>
-                              <p:cond delay="160"/>
-                            </p:stCondLst>
-                            <p:childTnLst>
-                              <p:animEffect transition="in" filter="wipe(up)">
-                                <p:cBhvr>
-                                  <p:cTn id="16" dur="380" fill="hold"/>
-                                  <p:tgtEl>
-                                    <p:spTgt spid="14"/>
-                                  </p:tgtEl>
-                                </p:cBhvr>
-                              </p:animEffect>
-                            </p:childTnLst>
-                          </p:cTn>
-                        </p:par>
-                        <p:par>
-                          <p:cTn id="17" fill="hold">
-                            <p:stCondLst>
-                              <p:cond delay="160"/>
-                            </p:stCondLst>
-                            <p:childTnLst>
-                              <p:animEffect transition="in" filter="wipe(up)">
-                                <p:cBhvr>
-                                  <p:cTn id="18" dur="380" fill="hold"/>
-                                  <p:tgtEl>
-                                    <p:spTgt spid="15"/>
-                                  </p:tgtEl>
-                                </p:cBhvr>
-                              </p:animEffect>
-                            </p:childTnLst>
-                          </p:cTn>
-                        </p:par>
-                        <p:par>
-                          <p:cTn id="19" fill="hold">
-                            <p:stCondLst>
-                              <p:cond delay="160"/>
-                            </p:stCondLst>
-                            <p:childTnLst>
-                              <p:animEffect transition="in" filter="wipe(up)">
-                                <p:cBhvr>
-                                  <p:cTn id="20" dur="380" fill="hold"/>
-                                  <p:tgtEl>
-                                    <p:spTgt spid="16"/>
-                                  </p:tgtEl>
-                                </p:cBhvr>
-                              </p:animEffect>
-                            </p:childTnLst>
-                          </p:cTn>
-                        </p:par>
-                        <p:par>
-                          <p:cTn id="21" fill="hold">
-                            <p:stCondLst>
-                              <p:cond delay="160"/>
-                            </p:stCondLst>
-                            <p:childTnLst>
-                              <p:animEffect transition="in" filter="wipe(up)">
-                                <p:cBhvr>
-                                  <p:cTn id="22" dur="380" fill="hold"/>
-                                  <p:tgtEl>
-                                    <p:spTgt spid="17"/>
-                                  </p:tgtEl>
-                                </p:cBhvr>
-                              </p:animEffect>
-                            </p:childTnLst>
-                          </p:cTn>
-                        </p:par>
-                        <p:par>
-                          <p:cTn id="23" fill="hold">
-                            <p:stCondLst>
-                              <p:cond delay="160"/>
-                            </p:stCondLst>
-                            <p:childTnLst>
-                              <p:animEffect transition="in" filter="wipe(up)">
-                                <p:cBhvr>
-                                  <p:cTn id="24" dur="380" fill="hold"/>
-                                  <p:tgtEl>
-                                    <p:spTgt spid="18"/>
-                                  </p:tgtEl>
-                                </p:cBhvr>
-                              </p:animEffect>
-                            </p:childTnLst>
-                          </p:cTn>
-                        </p:par>
-                      </p:childTnLst>
-                    </p:cTn>
-                  </p:par>
-                </p:childTnLst>
-              </p:cTn>
-              <p:prevCondLst>
-                <p:cond evt="onPrevClick" delay="0"/>
-              </p:prevCondLst>
-              <p:nextCondLst>
-                <p:cond evt="onNextClick" delay="0"/>
-              </p:nextCondLst>
-            </p:seq>
-          </p:childTnLst>
-        </p:cTn>
-      </p:par>
-    </p:tnLst>
-  </p:timing>
-  <p:transition dur="550" spd="fast">
-    <p:push dir="u"/>
-  </p:transition>
-</p:sld>
-</file>
-
-<file path=ppt/slides/slide4.xml><?xml version="1.0" encoding="utf-8"?>
-<p:sld xmlns:a="http://schemas.openxmlformats.org/drawingml/2006/main" xmlns:p="http://schemas.openxmlformats.org/presentationml/2006/main" xmlns:r="http://schemas.openxmlformats.org/officeDocument/2006/relationships">
-  <p:cSld>
-    <p:spTree>
-      <p:nvGrpSpPr>
-        <p:cNvPr id="1" name=""/>
-        <p:cNvGrpSpPr/>
-        <p:nvPr/>
-      </p:nvGrpSpPr>
-      <p:grpSpPr/>
-      <p:pic>
-        <p:nvPicPr>
-          <p:cNvPr id="2" name="Picture 1" descr="content_bg.png"/>
-          <p:cNvPicPr>
-            <a:picLocks noChangeAspect="1"/>
-          </p:cNvPicPr>
-          <p:nvPr/>
-        </p:nvPicPr>
-        <p:blipFill>
-          <a:blip r:embed="rId2"/>
-          <a:stretch>
-            <a:fillRect/>
-          </a:stretch>
-        </p:blipFill>
-        <p:spPr>
-          <a:xfrm>
-            <a:off x="0" y="0"/>
-            <a:ext cx="12191695" cy="6858000"/>
-          </a:xfrm>
-          <a:prstGeom prst="rect">
-            <a:avLst/>
-          </a:prstGeom>
-        </p:spPr>
-      </p:pic>
-      <p:sp>
-        <p:nvSpPr>
-          <p:cNvPr id="3" name="Rectangle 2"/>
-          <p:cNvSpPr/>
-          <p:nvPr/>
-        </p:nvSpPr>
-        <p:spPr>
-          <a:xfrm>
-            <a:off x="0" y="0"/>
-            <a:ext cx="12191695" cy="50800"/>
-          </a:xfrm>
-          <a:prstGeom prst="rect">
-            <a:avLst/>
-          </a:prstGeom>
-          <a:solidFill>
-            <a:srgbClr val="2FDFE5"/>
-          </a:solidFill>
-          <a:ln>
-            <a:noFill/>
-          </a:ln>
-        </p:spPr>
-        <p:style>
-          <a:lnRef idx="1">
-            <a:schemeClr val="accent1"/>
-          </a:lnRef>
-          <a:fillRef idx="3">
-            <a:schemeClr val="accent1"/>
-          </a:fillRef>
-          <a:effectRef idx="2">
-            <a:schemeClr val="accent1"/>
-          </a:effectRef>
-          <a:fontRef idx="minor">
-            <a:schemeClr val="lt1"/>
-          </a:fontRef>
-        </p:style>
-        <p:txBody>
-          <a:bodyPr rtlCol="0" anchor="ctr"/>
-          <a:lstStyle/>
-          <a:p>
-            <a:pPr algn="ctr"/>
-          </a:p>
-        </p:txBody>
-      </p:sp>
-      <p:sp>
-        <p:nvSpPr>
-          <p:cNvPr id="4" name="Rectangle 3"/>
-          <p:cNvSpPr/>
-          <p:nvPr/>
-        </p:nvSpPr>
-        <p:spPr>
-          <a:xfrm>
-            <a:off x="0" y="0"/>
-            <a:ext cx="63500" cy="6858000"/>
-          </a:xfrm>
-          <a:prstGeom prst="rect">
-            <a:avLst/>
-          </a:prstGeom>
-          <a:solidFill>
-            <a:srgbClr val="13B9BF"/>
-          </a:solidFill>
-          <a:ln>
-            <a:noFill/>
-          </a:ln>
-        </p:spPr>
-        <p:style>
-          <a:lnRef idx="1">
-            <a:schemeClr val="accent1"/>
-          </a:lnRef>
-          <a:fillRef idx="3">
-            <a:schemeClr val="accent1"/>
-          </a:fillRef>
-          <a:effectRef idx="2">
-            <a:schemeClr val="accent1"/>
-          </a:effectRef>
-          <a:fontRef idx="minor">
-            <a:schemeClr val="lt1"/>
-          </a:fontRef>
-        </p:style>
-        <p:txBody>
-          <a:bodyPr rtlCol="0" anchor="ctr"/>
-          <a:lstStyle/>
-          <a:p>
-            <a:pPr algn="ctr"/>
-          </a:p>
-        </p:txBody>
-      </p:sp>
-      <p:sp>
-        <p:nvSpPr>
-          <p:cNvPr id="5" name="Rectangle 4"/>
-          <p:cNvSpPr/>
-          <p:nvPr/>
-        </p:nvSpPr>
-        <p:spPr>
-          <a:xfrm>
-            <a:off x="502920" y="365760"/>
-            <a:ext cx="1737360" cy="301752"/>
-          </a:xfrm>
-          <a:prstGeom prst="rect">
-            <a:avLst/>
-          </a:prstGeom>
-          <a:solidFill>
-            <a:srgbClr val="2FDFE5"/>
-          </a:solidFill>
-          <a:ln>
-            <a:noFill/>
-          </a:ln>
-        </p:spPr>
-        <p:style>
-          <a:lnRef idx="1">
-            <a:schemeClr val="accent1"/>
-          </a:lnRef>
-          <a:fillRef idx="3">
-            <a:schemeClr val="accent1"/>
-          </a:fillRef>
-          <a:effectRef idx="2">
-            <a:schemeClr val="accent1"/>
-          </a:effectRef>
-          <a:fontRef idx="minor">
-            <a:schemeClr val="lt1"/>
-          </a:fontRef>
-        </p:style>
-        <p:txBody lIns="101600" tIns="25400" rIns="101600" bIns="25400">
-          <a:bodyPr rtlCol="0" anchor="ctr" wrap="none"/>
-          <a:lstStyle/>
-          <a:p>
-            <a:pPr algn="ctr"/>
-            <a:r>
-              <a:rPr sz="1100" b="1">
-                <a:solidFill>
-                  <a:srgbClr val="0A1638"/>
-                </a:solidFill>
-              </a:rPr>
-              <a:t>FASE 3</a:t>
-            </a:r>
-          </a:p>
-        </p:txBody>
-      </p:sp>
-      <p:sp>
-        <p:nvSpPr>
-          <p:cNvPr id="6" name="TextBox 5"/>
-          <p:cNvSpPr txBox="1"/>
-          <p:nvPr/>
-        </p:nvSpPr>
-        <p:spPr>
-          <a:xfrm>
-            <a:off x="502920" y="731520"/>
-            <a:ext cx="8961120" cy="960120"/>
-          </a:xfrm>
-          <a:prstGeom prst="rect">
-            <a:avLst/>
-          </a:prstGeom>
-          <a:noFill/>
-        </p:spPr>
-        <p:txBody lIns="0" tIns="0" rIns="0" bIns="0">
-          <a:bodyPr wrap="square">
-            <a:spAutoFit/>
-          </a:bodyPr>
-          <a:lstStyle/>
-          <a:p>
-            <a:pPr algn="l"/>
-            <a:r>
-              <a:rPr sz="4000" b="1">
-                <a:solidFill>
-                  <a:srgbClr val="FFFFFF"/>
-                </a:solidFill>
-              </a:rPr>
-              <a:t>Gestión </a:t>
-            </a:r>
-            <a:r>
-              <a:rPr sz="4000" b="1">
-                <a:solidFill>
-                  <a:srgbClr val="2FDFE5"/>
-                </a:solidFill>
-              </a:rPr>
-              <a:t>continuada</a:t>
-            </a:r>
-          </a:p>
-        </p:txBody>
-      </p:sp>
-      <p:sp>
-        <p:nvSpPr>
-          <p:cNvPr id="7" name="Rectangle 6"/>
-          <p:cNvSpPr/>
-          <p:nvPr/>
-        </p:nvSpPr>
-        <p:spPr>
-          <a:xfrm>
-            <a:off x="502920" y="1737360"/>
-            <a:ext cx="4389120" cy="31750"/>
-          </a:xfrm>
-          <a:prstGeom prst="rect">
-            <a:avLst/>
-          </a:prstGeom>
-          <a:solidFill>
-            <a:srgbClr val="2FDFE5"/>
-          </a:solidFill>
-          <a:ln>
-            <a:noFill/>
-          </a:ln>
-        </p:spPr>
-        <p:style>
-          <a:lnRef idx="1">
-            <a:schemeClr val="accent1"/>
-          </a:lnRef>
-          <a:fillRef idx="3">
-            <a:schemeClr val="accent1"/>
-          </a:fillRef>
-          <a:effectRef idx="2">
-            <a:schemeClr val="accent1"/>
-          </a:effectRef>
-          <a:fontRef idx="minor">
-            <a:schemeClr val="lt1"/>
-          </a:fontRef>
-        </p:style>
-        <p:txBody>
-          <a:bodyPr rtlCol="0" anchor="ctr"/>
-          <a:lstStyle/>
-          <a:p>
-            <a:pPr algn="ctr"/>
-          </a:p>
-        </p:txBody>
-      </p:sp>
-      <p:sp>
-        <p:nvSpPr>
-          <p:cNvPr id="8" name="TextBox 7"/>
-          <p:cNvSpPr txBox="1"/>
-          <p:nvPr/>
-        </p:nvSpPr>
-        <p:spPr>
-          <a:xfrm>
-            <a:off x="502920" y="1810512"/>
-            <a:ext cx="9265615" cy="384048"/>
-          </a:xfrm>
-          <a:prstGeom prst="rect">
-            <a:avLst/>
-          </a:prstGeom>
-          <a:noFill/>
-        </p:spPr>
-        <p:txBody lIns="0" tIns="0" rIns="0" bIns="0">
-          <a:bodyPr wrap="none">
-            <a:spAutoFit/>
-          </a:bodyPr>
-          <a:lstStyle/>
-          <a:p>
-            <a:pPr algn="l"/>
-            <a:r>
-              <a:rPr sz="1300" i="1">
-                <a:solidFill>
-                  <a:srgbClr val="80A8CC"/>
-                </a:solidFill>
-              </a:rPr>
-              <a:t>El seguimiento constante y la transparencia en el reporting mantienen cada expediente bajo control.</a:t>
-            </a:r>
-          </a:p>
-        </p:txBody>
-      </p:sp>
-      <p:sp>
-        <p:nvSpPr>
-          <p:cNvPr id="9" name="Rectangle 8"/>
-          <p:cNvSpPr/>
-          <p:nvPr/>
-        </p:nvSpPr>
-        <p:spPr>
-          <a:xfrm>
-            <a:off x="502920" y="2267712"/>
-            <a:ext cx="5579211" cy="3328416"/>
-          </a:xfrm>
-          <a:prstGeom prst="rect">
-            <a:avLst/>
-          </a:prstGeom>
-          <a:solidFill>
-            <a:srgbClr val="081438"/>
-          </a:solidFill>
-          <a:ln w="12700">
-            <a:solidFill>
-              <a:srgbClr val="2FDFE5"/>
-            </a:solidFill>
-          </a:ln>
-        </p:spPr>
-        <p:style>
-          <a:lnRef idx="1">
-            <a:schemeClr val="accent1"/>
-          </a:lnRef>
-          <a:fillRef idx="3">
-            <a:schemeClr val="accent1"/>
-          </a:fillRef>
-          <a:effectRef idx="2">
-            <a:schemeClr val="accent1"/>
-          </a:effectRef>
-          <a:fontRef idx="minor">
-            <a:schemeClr val="lt1"/>
-          </a:fontRef>
-        </p:style>
-        <p:txBody>
-          <a:bodyPr rtlCol="0" anchor="ctr"/>
-          <a:lstStyle/>
-          <a:p>
-            <a:pPr algn="ctr"/>
-          </a:p>
-        </p:txBody>
-      </p:sp>
-      <p:sp>
-        <p:nvSpPr>
-          <p:cNvPr id="10" name="Rectangle 9"/>
-          <p:cNvSpPr/>
-          <p:nvPr/>
-        </p:nvSpPr>
-        <p:spPr>
-          <a:xfrm>
-            <a:off x="502920" y="2267712"/>
-            <a:ext cx="5579211" cy="63500"/>
-          </a:xfrm>
-          <a:prstGeom prst="rect">
-            <a:avLst/>
-          </a:prstGeom>
-          <a:solidFill>
-            <a:srgbClr val="2FDFE5"/>
-          </a:solidFill>
-          <a:ln>
-            <a:noFill/>
-          </a:ln>
-        </p:spPr>
-        <p:style>
-          <a:lnRef idx="1">
-            <a:schemeClr val="accent1"/>
-          </a:lnRef>
-          <a:fillRef idx="3">
-            <a:schemeClr val="accent1"/>
-          </a:fillRef>
-          <a:effectRef idx="2">
-            <a:schemeClr val="accent1"/>
-          </a:effectRef>
-          <a:fontRef idx="minor">
-            <a:schemeClr val="lt1"/>
-          </a:fontRef>
-        </p:style>
-        <p:txBody>
-          <a:bodyPr rtlCol="0" anchor="ctr"/>
-          <a:lstStyle/>
-          <a:p>
-            <a:pPr algn="ctr"/>
-          </a:p>
-        </p:txBody>
-      </p:sp>
-      <p:sp>
-        <p:nvSpPr>
-          <p:cNvPr id="11" name="TextBox 10"/>
-          <p:cNvSpPr txBox="1"/>
-          <p:nvPr/>
-        </p:nvSpPr>
-        <p:spPr>
-          <a:xfrm>
-            <a:off x="704088" y="2487168"/>
-            <a:ext cx="5176875" cy="640080"/>
-          </a:xfrm>
-          <a:prstGeom prst="rect">
-            <a:avLst/>
-          </a:prstGeom>
-          <a:noFill/>
-        </p:spPr>
-        <p:txBody lIns="38100" tIns="63500" rIns="38100" bIns="25400">
-          <a:bodyPr wrap="square">
-            <a:spAutoFit/>
-          </a:bodyPr>
-          <a:lstStyle/>
-          <a:p>
-            <a:pPr algn="l"/>
-            <a:r>
-              <a:rPr sz="1900" b="1">
-                <a:solidFill>
-                  <a:srgbClr val="2FDFE5"/>
-                </a:solidFill>
-              </a:rPr>
-              <a:t>5  </a:t>
-            </a:r>
-            <a:r>
-              <a:rPr sz="1900" b="1">
-                <a:solidFill>
-                  <a:srgbClr val="FFFFFF"/>
-                </a:solidFill>
-              </a:rPr>
-              <a:t>Monitorización activa</a:t>
-            </a:r>
-          </a:p>
-        </p:txBody>
-      </p:sp>
-      <p:sp>
-        <p:nvSpPr>
-          <p:cNvPr id="12" name="Rectangle 11"/>
-          <p:cNvSpPr/>
-          <p:nvPr/>
-        </p:nvSpPr>
-        <p:spPr>
-          <a:xfrm>
-            <a:off x="667512" y="3218688"/>
-            <a:ext cx="5250027" cy="19050"/>
-          </a:xfrm>
-          <a:prstGeom prst="rect">
-            <a:avLst/>
-          </a:prstGeom>
-          <a:solidFill>
-            <a:srgbClr val="13B9BF"/>
-          </a:solidFill>
-          <a:ln>
-            <a:noFill/>
-          </a:ln>
-        </p:spPr>
-        <p:style>
-          <a:lnRef idx="1">
-            <a:schemeClr val="accent1"/>
-          </a:lnRef>
-          <a:fillRef idx="3">
-            <a:schemeClr val="accent1"/>
-          </a:fillRef>
-          <a:effectRef idx="2">
-            <a:schemeClr val="accent1"/>
-          </a:effectRef>
-          <a:fontRef idx="minor">
-            <a:schemeClr val="lt1"/>
-          </a:fontRef>
-        </p:style>
-        <p:txBody>
-          <a:bodyPr rtlCol="0" anchor="ctr"/>
-          <a:lstStyle/>
-          <a:p>
-            <a:pPr algn="ctr"/>
-          </a:p>
-        </p:txBody>
-      </p:sp>
-      <p:sp>
-        <p:nvSpPr>
-          <p:cNvPr id="13" name="TextBox 12"/>
-          <p:cNvSpPr txBox="1"/>
-          <p:nvPr/>
-        </p:nvSpPr>
-        <p:spPr>
-          <a:xfrm>
-            <a:off x="667512" y="3345688"/>
-            <a:ext cx="5250027" cy="2249424"/>
-          </a:xfrm>
-          <a:prstGeom prst="rect">
-            <a:avLst/>
-          </a:prstGeom>
-          <a:noFill/>
-        </p:spPr>
-        <p:txBody lIns="50800" tIns="50800" rIns="50800" bIns="50800">
-          <a:bodyPr wrap="square">
-            <a:spAutoFit/>
-          </a:bodyPr>
-          <a:lstStyle/>
-          <a:p>
-            <a:pPr algn="l">
-              <a:spcBef>
-                <a:spcPts val="1800"/>
-              </a:spcBef>
-            </a:pPr>
-            <a:r>
-              <a:rPr sz="1400">
-                <a:solidFill>
-                  <a:srgbClr val="2FDFE5"/>
-                </a:solidFill>
-              </a:rPr>
-              <a:t>▸  </a:t>
-            </a:r>
-            <a:r>
-              <a:rPr sz="1700">
-                <a:solidFill>
-                  <a:srgbClr val="D8EAFF"/>
-                </a:solidFill>
-              </a:rPr>
-              <a:t>Monitorización activa de los acuerdos alcanzados</a:t>
-            </a:r>
-          </a:p>
-          <a:p>
-            <a:pPr algn="l">
-              <a:spcBef>
-                <a:spcPts val="1800"/>
-              </a:spcBef>
-            </a:pPr>
-            <a:r>
-              <a:rPr sz="1400">
-                <a:solidFill>
-                  <a:srgbClr val="2FDFE5"/>
-                </a:solidFill>
-              </a:rPr>
-              <a:t>▸  </a:t>
-            </a:r>
-            <a:r>
-              <a:rPr sz="1700">
-                <a:solidFill>
-                  <a:srgbClr val="D8EAFF"/>
-                </a:solidFill>
-              </a:rPr>
-              <a:t>Recordatorios preventivos de vencimiento</a:t>
-            </a:r>
-          </a:p>
-          <a:p>
-            <a:pPr algn="l">
-              <a:spcBef>
-                <a:spcPts val="1800"/>
-              </a:spcBef>
-            </a:pPr>
-            <a:r>
-              <a:rPr sz="1400">
-                <a:solidFill>
-                  <a:srgbClr val="2FDFE5"/>
-                </a:solidFill>
-              </a:rPr>
-              <a:t>▸  </a:t>
-            </a:r>
-            <a:r>
-              <a:rPr sz="1700">
-                <a:solidFill>
-                  <a:srgbClr val="D8EAFF"/>
-                </a:solidFill>
-              </a:rPr>
-              <a:t>Reactivación inmediata ante incidencias o incumplimientos</a:t>
-            </a:r>
-          </a:p>
-        </p:txBody>
-      </p:sp>
-      <p:sp>
-        <p:nvSpPr>
-          <p:cNvPr id="14" name="Rectangle 13"/>
-          <p:cNvSpPr/>
-          <p:nvPr/>
-        </p:nvSpPr>
-        <p:spPr>
-          <a:xfrm>
-            <a:off x="6283299" y="2267712"/>
-            <a:ext cx="5579211" cy="3328416"/>
-          </a:xfrm>
-          <a:prstGeom prst="rect">
-            <a:avLst/>
-          </a:prstGeom>
-          <a:solidFill>
-            <a:srgbClr val="081438"/>
-          </a:solidFill>
-          <a:ln w="12700">
-            <a:solidFill>
-              <a:srgbClr val="2FDFE5"/>
-            </a:solidFill>
-          </a:ln>
-        </p:spPr>
-        <p:style>
-          <a:lnRef idx="1">
-            <a:schemeClr val="accent1"/>
-          </a:lnRef>
-          <a:fillRef idx="3">
-            <a:schemeClr val="accent1"/>
-          </a:fillRef>
-          <a:effectRef idx="2">
-            <a:schemeClr val="accent1"/>
-          </a:effectRef>
-          <a:fontRef idx="minor">
-            <a:schemeClr val="lt1"/>
-          </a:fontRef>
-        </p:style>
-        <p:txBody>
-          <a:bodyPr rtlCol="0" anchor="ctr"/>
-          <a:lstStyle/>
-          <a:p>
-            <a:pPr algn="ctr"/>
-          </a:p>
-        </p:txBody>
-      </p:sp>
-      <p:sp>
-        <p:nvSpPr>
-          <p:cNvPr id="15" name="Rectangle 14"/>
-          <p:cNvSpPr/>
-          <p:nvPr/>
-        </p:nvSpPr>
-        <p:spPr>
-          <a:xfrm>
-            <a:off x="6283299" y="2267712"/>
-            <a:ext cx="5579211" cy="63500"/>
-          </a:xfrm>
-          <a:prstGeom prst="rect">
-            <a:avLst/>
-          </a:prstGeom>
-          <a:solidFill>
-            <a:srgbClr val="2FDFE5"/>
-          </a:solidFill>
-          <a:ln>
-            <a:noFill/>
-          </a:ln>
-        </p:spPr>
-        <p:style>
-          <a:lnRef idx="1">
-            <a:schemeClr val="accent1"/>
-          </a:lnRef>
-          <a:fillRef idx="3">
-            <a:schemeClr val="accent1"/>
-          </a:fillRef>
-          <a:effectRef idx="2">
-            <a:schemeClr val="accent1"/>
-          </a:effectRef>
-          <a:fontRef idx="minor">
-            <a:schemeClr val="lt1"/>
-          </a:fontRef>
-        </p:style>
-        <p:txBody>
-          <a:bodyPr rtlCol="0" anchor="ctr"/>
-          <a:lstStyle/>
-          <a:p>
-            <a:pPr algn="ctr"/>
-          </a:p>
-        </p:txBody>
-      </p:sp>
-      <p:sp>
-        <p:nvSpPr>
-          <p:cNvPr id="16" name="TextBox 15"/>
-          <p:cNvSpPr txBox="1"/>
-          <p:nvPr/>
-        </p:nvSpPr>
-        <p:spPr>
-          <a:xfrm>
-            <a:off x="6484467" y="2487168"/>
-            <a:ext cx="5176875" cy="640080"/>
-          </a:xfrm>
-          <a:prstGeom prst="rect">
-            <a:avLst/>
-          </a:prstGeom>
-          <a:noFill/>
-        </p:spPr>
-        <p:txBody lIns="38100" tIns="63500" rIns="38100" bIns="25400">
-          <a:bodyPr wrap="square">
-            <a:spAutoFit/>
-          </a:bodyPr>
-          <a:lstStyle/>
-          <a:p>
-            <a:pPr algn="l"/>
-            <a:r>
-              <a:rPr sz="1900" b="1">
-                <a:solidFill>
-                  <a:srgbClr val="2FDFE5"/>
-                </a:solidFill>
-              </a:rPr>
-              <a:t>6  </a:t>
-            </a:r>
-            <a:r>
-              <a:rPr sz="1900" b="1">
-                <a:solidFill>
-                  <a:srgbClr val="FFFFFF"/>
-                </a:solidFill>
-              </a:rPr>
-              <a:t>Reporting y resultados</a:t>
-            </a:r>
-          </a:p>
-        </p:txBody>
-      </p:sp>
-      <p:sp>
-        <p:nvSpPr>
-          <p:cNvPr id="17" name="Rectangle 16"/>
-          <p:cNvSpPr/>
-          <p:nvPr/>
-        </p:nvSpPr>
-        <p:spPr>
-          <a:xfrm>
-            <a:off x="6447891" y="3218688"/>
-            <a:ext cx="5250027" cy="19050"/>
-          </a:xfrm>
-          <a:prstGeom prst="rect">
-            <a:avLst/>
-          </a:prstGeom>
-          <a:solidFill>
-            <a:srgbClr val="13B9BF"/>
-          </a:solidFill>
-          <a:ln>
-            <a:noFill/>
-          </a:ln>
-        </p:spPr>
-        <p:style>
-          <a:lnRef idx="1">
-            <a:schemeClr val="accent1"/>
-          </a:lnRef>
-          <a:fillRef idx="3">
-            <a:schemeClr val="accent1"/>
-          </a:fillRef>
-          <a:effectRef idx="2">
-            <a:schemeClr val="accent1"/>
-          </a:effectRef>
-          <a:fontRef idx="minor">
-            <a:schemeClr val="lt1"/>
-          </a:fontRef>
-        </p:style>
-        <p:txBody>
-          <a:bodyPr rtlCol="0" anchor="ctr"/>
-          <a:lstStyle/>
-          <a:p>
-            <a:pPr algn="ctr"/>
-          </a:p>
-        </p:txBody>
-      </p:sp>
-      <p:sp>
-        <p:nvSpPr>
-          <p:cNvPr id="18" name="TextBox 17"/>
-          <p:cNvSpPr txBox="1"/>
-          <p:nvPr/>
-        </p:nvSpPr>
-        <p:spPr>
-          <a:xfrm>
-            <a:off x="6447891" y="3345688"/>
-            <a:ext cx="5250027" cy="2249424"/>
-          </a:xfrm>
-          <a:prstGeom prst="rect">
-            <a:avLst/>
-          </a:prstGeom>
-          <a:noFill/>
-        </p:spPr>
-        <p:txBody lIns="50800" tIns="50800" rIns="50800" bIns="50800">
-          <a:bodyPr wrap="square">
-            <a:spAutoFit/>
-          </a:bodyPr>
-          <a:lstStyle/>
-          <a:p>
-            <a:pPr algn="l">
-              <a:spcBef>
-                <a:spcPts val="1800"/>
-              </a:spcBef>
-            </a:pPr>
-            <a:r>
-              <a:rPr sz="1400">
-                <a:solidFill>
-                  <a:srgbClr val="2FDFE5"/>
-                </a:solidFill>
-              </a:rPr>
-              <a:t>▸  </a:t>
-            </a:r>
-            <a:r>
-              <a:rPr sz="1700">
-                <a:solidFill>
-                  <a:srgbClr val="D8EAFF"/>
-                </a:solidFill>
-              </a:rPr>
-              <a:t>Actualización permanente del estado de cada expediente</a:t>
-            </a:r>
-          </a:p>
-          <a:p>
-            <a:pPr algn="l">
-              <a:spcBef>
-                <a:spcPts val="1800"/>
-              </a:spcBef>
-            </a:pPr>
-            <a:r>
-              <a:rPr sz="1400">
-                <a:solidFill>
-                  <a:srgbClr val="2FDFE5"/>
-                </a:solidFill>
-              </a:rPr>
-              <a:t>▸  </a:t>
-            </a:r>
-            <a:r>
-              <a:rPr sz="1700">
-                <a:solidFill>
-                  <a:srgbClr val="D8EAFF"/>
-                </a:solidFill>
-              </a:rPr>
-              <a:t>Informes periódicos de actividad y resultados</a:t>
-            </a:r>
-          </a:p>
-          <a:p>
-            <a:pPr algn="l">
-              <a:spcBef>
-                <a:spcPts val="1800"/>
-              </a:spcBef>
-            </a:pPr>
-            <a:r>
-              <a:rPr sz="1400">
-                <a:solidFill>
-                  <a:srgbClr val="2FDFE5"/>
-                </a:solidFill>
-              </a:rPr>
-              <a:t>▸  </a:t>
-            </a:r>
-            <a:r>
-              <a:rPr sz="1700">
-                <a:solidFill>
-                  <a:srgbClr val="D8EAFF"/>
-                </a:solidFill>
-              </a:rPr>
-              <a:t>KPIs de recuperación y productividad</a:t>
-            </a:r>
-          </a:p>
-        </p:txBody>
-      </p:sp>
-    </p:spTree>
-  </p:cSld>
-  <p:clrMapOvr>
-    <a:masterClrMapping/>
-  </p:clrMapOvr>
-  <p:timing>
-    <p:tnLst>
-      <p:par>
-        <p:cTn id="1" dur="indefin" restart="whenNotActive" nodeType="tmRoot">
-          <p:childTnLst>
-            <p:seq concurrent="1" nextAc="seek">
-              <p:cTn id="2" dur="indefin" nodeType="mainSeq">
-                <p:childTnLst>
-                  <p:par>
-                    <p:cTn id="3" fill="hold">
-                      <p:stCondLst>
-                        <p:cond delay="0"/>
-                      </p:stCondLst>
-                      <p:childTnLst>
-                        <p:par>
-                          <p:cTn id="5" fill="hold">
-                            <p:stCondLst>
-                              <p:cond delay="0"/>
-                            </p:stCondLst>
-                            <p:childTnLst>
-                              <p:animEffect transition="in" filter="wipe(up)">
-                                <p:cBhvr>
-                                  <p:cTn id="6" dur="380" fill="hold"/>
-                                  <p:tgtEl>
-                                    <p:spTgt spid="9"/>
-                                  </p:tgtEl>
-                                </p:cBhvr>
-                              </p:animEffect>
-                            </p:childTnLst>
-                          </p:cTn>
-                        </p:par>
-                        <p:par>
-                          <p:cTn id="7" fill="hold">
-                            <p:stCondLst>
-                              <p:cond delay="0"/>
-                            </p:stCondLst>
-                            <p:childTnLst>
-                              <p:animEffect transition="in" filter="wipe(up)">
-                                <p:cBhvr>
-                                  <p:cTn id="8" dur="380" fill="hold"/>
-                                  <p:tgtEl>
-                                    <p:spTgt spid="10"/>
-                                  </p:tgtEl>
-                                </p:cBhvr>
-                              </p:animEffect>
-                            </p:childTnLst>
-                          </p:cTn>
-                        </p:par>
-                        <p:par>
-                          <p:cTn id="9" fill="hold">
-                            <p:stCondLst>
-                              <p:cond delay="0"/>
-                            </p:stCondLst>
-                            <p:childTnLst>
-                              <p:animEffect transition="in" filter="wipe(up)">
-                                <p:cBhvr>
-                                  <p:cTn id="10" dur="380" fill="hold"/>
-                                  <p:tgtEl>
-                                    <p:spTgt spid="11"/>
-                                  </p:tgtEl>
-                                </p:cBhvr>
-                              </p:animEffect>
-                            </p:childTnLst>
-                          </p:cTn>
-                        </p:par>
-                        <p:par>
-                          <p:cTn id="11" fill="hold">
-                            <p:stCondLst>
-                              <p:cond delay="0"/>
-                            </p:stCondLst>
-                            <p:childTnLst>
-                              <p:animEffect transition="in" filter="wipe(up)">
-                                <p:cBhvr>
-                                  <p:cTn id="12" dur="380" fill="hold"/>
-                                  <p:tgtEl>
-                                    <p:spTgt spid="12"/>
-                                  </p:tgtEl>
-                                </p:cBhvr>
-                              </p:animEffect>
-                            </p:childTnLst>
-                          </p:cTn>
-                        </p:par>
-                        <p:par>
-                          <p:cTn id="13" fill="hold">
-                            <p:stCondLst>
-                              <p:cond delay="0"/>
-                            </p:stCondLst>
-                            <p:childTnLst>
-                              <p:animEffect transition="in" filter="wipe(up)">
-                                <p:cBhvr>
-                                  <p:cTn id="14" dur="380" fill="hold"/>
-                                  <p:tgtEl>
-                                    <p:spTgt spid="13"/>
-                                  </p:tgtEl>
-                                </p:cBhvr>
-                              </p:animEffect>
-                            </p:childTnLst>
-                          </p:cTn>
-                        </p:par>
-                        <p:par>
-                          <p:cTn id="15" fill="hold">
-                            <p:stCondLst>
-                              <p:cond delay="160"/>
-                            </p:stCondLst>
-                            <p:childTnLst>
-                              <p:animEffect transition="in" filter="wipe(up)">
-                                <p:cBhvr>
-                                  <p:cTn id="16" dur="380" fill="hold"/>
-                                  <p:tgtEl>
-                                    <p:spTgt spid="14"/>
-                                  </p:tgtEl>
-                                </p:cBhvr>
-                              </p:animEffect>
-                            </p:childTnLst>
-                          </p:cTn>
-                        </p:par>
-                        <p:par>
-                          <p:cTn id="17" fill="hold">
-                            <p:stCondLst>
-                              <p:cond delay="160"/>
-                            </p:stCondLst>
-                            <p:childTnLst>
-                              <p:animEffect transition="in" filter="wipe(up)">
-                                <p:cBhvr>
-                                  <p:cTn id="18" dur="380" fill="hold"/>
-                                  <p:tgtEl>
-                                    <p:spTgt spid="15"/>
-                                  </p:tgtEl>
-                                </p:cBhvr>
-                              </p:animEffect>
-                            </p:childTnLst>
-                          </p:cTn>
-                        </p:par>
-                        <p:par>
-                          <p:cTn id="19" fill="hold">
-                            <p:stCondLst>
-                              <p:cond delay="160"/>
-                            </p:stCondLst>
-                            <p:childTnLst>
-                              <p:animEffect transition="in" filter="wipe(up)">
-                                <p:cBhvr>
-                                  <p:cTn id="20" dur="380" fill="hold"/>
-                                  <p:tgtEl>
-                                    <p:spTgt spid="16"/>
-                                  </p:tgtEl>
-                                </p:cBhvr>
-                              </p:animEffect>
-                            </p:childTnLst>
-                          </p:cTn>
-                        </p:par>
-                        <p:par>
-                          <p:cTn id="21" fill="hold">
-                            <p:stCondLst>
-                              <p:cond delay="160"/>
-                            </p:stCondLst>
-                            <p:childTnLst>
-                              <p:animEffect transition="in" filter="wipe(up)">
-                                <p:cBhvr>
-                                  <p:cTn id="22" dur="380" fill="hold"/>
-                                  <p:tgtEl>
-                                    <p:spTgt spid="17"/>
-                                  </p:tgtEl>
-                                </p:cBhvr>
-                              </p:animEffect>
-                            </p:childTnLst>
-                          </p:cTn>
-                        </p:par>
-                        <p:par>
-                          <p:cTn id="23" fill="hold">
-                            <p:stCondLst>
-                              <p:cond delay="160"/>
-                            </p:stCondLst>
-                            <p:childTnLst>
-                              <p:animEffect transition="in" filter="wipe(up)">
-                                <p:cBhvr>
-                                  <p:cTn id="24" dur="380" fill="hold"/>
-                                  <p:tgtEl>
-                                    <p:spTgt spid="18"/>
-                                  </p:tgtEl>
-                                </p:cBhvr>
-                              </p:animEffect>
-                            </p:childTnLst>
-                          </p:cTn>
-                        </p:par>
-                      </p:childTnLst>
-                    </p:cTn>
-                  </p:par>
-                </p:childTnLst>
-              </p:cTn>
-              <p:prevCondLst>
-                <p:cond evt="onPrevClick" delay="0"/>
-              </p:prevCondLst>
-              <p:nextCondLst>
-                <p:cond evt="onNextClick" delay="0"/>
-              </p:nextCondLst>
-            </p:seq>
-          </p:childTnLst>
-        </p:cTn>
-      </p:par>
-    </p:tnLst>
-  </p:timing>
-  <p:transition dur="550" spd="fast">
-    <p:push dir="u"/>
-  </p:transition>
-</p:sld>
-</file>
-
-<file path=ppt/slides/slide5.xml><?xml version="1.0" encoding="utf-8"?>
-<p:sld xmlns:a="http://schemas.openxmlformats.org/drawingml/2006/main" xmlns:p="http://schemas.openxmlformats.org/presentationml/2006/main" xmlns:r="http://schemas.openxmlformats.org/officeDocument/2006/relationships">
-  <p:cSld>
-    <p:spTree>
-      <p:nvGrpSpPr>
-        <p:cNvPr id="1" name=""/>
-        <p:cNvGrpSpPr/>
-        <p:nvPr/>
-      </p:nvGrpSpPr>
-      <p:grpSpPr/>
-      <p:pic>
-        <p:nvPicPr>
-          <p:cNvPr id="2" name="Picture 1" descr="content_bg.png"/>
-          <p:cNvPicPr>
-            <a:picLocks noChangeAspect="1"/>
-          </p:cNvPicPr>
-          <p:nvPr/>
-        </p:nvPicPr>
-        <p:blipFill>
-          <a:blip r:embed="rId2"/>
-          <a:stretch>
-            <a:fillRect/>
-          </a:stretch>
-        </p:blipFill>
-        <p:spPr>
-          <a:xfrm>
-            <a:off x="0" y="0"/>
-            <a:ext cx="12191695" cy="6858000"/>
-          </a:xfrm>
-          <a:prstGeom prst="rect">
-            <a:avLst/>
-          </a:prstGeom>
-        </p:spPr>
-      </p:pic>
-      <p:sp>
-        <p:nvSpPr>
-          <p:cNvPr id="3" name="Rectangle 2"/>
-          <p:cNvSpPr/>
-          <p:nvPr/>
-        </p:nvSpPr>
-        <p:spPr>
-          <a:xfrm>
-            <a:off x="0" y="0"/>
-            <a:ext cx="12191695" cy="50800"/>
-          </a:xfrm>
-          <a:prstGeom prst="rect">
-            <a:avLst/>
-          </a:prstGeom>
-          <a:solidFill>
-            <a:srgbClr val="2FDFE5"/>
-          </a:solidFill>
-          <a:ln>
-            <a:noFill/>
-          </a:ln>
-        </p:spPr>
-        <p:style>
-          <a:lnRef idx="1">
-            <a:schemeClr val="accent1"/>
-          </a:lnRef>
-          <a:fillRef idx="3">
-            <a:schemeClr val="accent1"/>
-          </a:fillRef>
-          <a:effectRef idx="2">
-            <a:schemeClr val="accent1"/>
-          </a:effectRef>
-          <a:fontRef idx="minor">
-            <a:schemeClr val="lt1"/>
-          </a:fontRef>
-        </p:style>
-        <p:txBody>
-          <a:bodyPr rtlCol="0" anchor="ctr"/>
-          <a:lstStyle/>
-          <a:p>
-            <a:pPr algn="ctr"/>
-          </a:p>
-        </p:txBody>
-      </p:sp>
-      <p:sp>
-        <p:nvSpPr>
-          <p:cNvPr id="4" name="Rectangle 3"/>
-          <p:cNvSpPr/>
-          <p:nvPr/>
-        </p:nvSpPr>
-        <p:spPr>
-          <a:xfrm>
-            <a:off x="0" y="0"/>
-            <a:ext cx="63500" cy="6858000"/>
-          </a:xfrm>
-          <a:prstGeom prst="rect">
-            <a:avLst/>
-          </a:prstGeom>
-          <a:solidFill>
-            <a:srgbClr val="13B9BF"/>
-          </a:solidFill>
-          <a:ln>
-            <a:noFill/>
-          </a:ln>
-        </p:spPr>
-        <p:style>
-          <a:lnRef idx="1">
-            <a:schemeClr val="accent1"/>
-          </a:lnRef>
-          <a:fillRef idx="3">
-            <a:schemeClr val="accent1"/>
-          </a:fillRef>
-          <a:effectRef idx="2">
-            <a:schemeClr val="accent1"/>
-          </a:effectRef>
-          <a:fontRef idx="minor">
-            <a:schemeClr val="lt1"/>
-          </a:fontRef>
-        </p:style>
-        <p:txBody>
-          <a:bodyPr rtlCol="0" anchor="ctr"/>
-          <a:lstStyle/>
-          <a:p>
-            <a:pPr algn="ctr"/>
-          </a:p>
-        </p:txBody>
-      </p:sp>
-      <p:sp>
-        <p:nvSpPr>
-          <p:cNvPr id="5" name="Rectangle 4"/>
-          <p:cNvSpPr/>
-          <p:nvPr/>
-        </p:nvSpPr>
-        <p:spPr>
-          <a:xfrm>
-            <a:off x="502920" y="365760"/>
-            <a:ext cx="1737360" cy="301752"/>
-          </a:xfrm>
-          <a:prstGeom prst="rect">
-            <a:avLst/>
-          </a:prstGeom>
-          <a:solidFill>
-            <a:srgbClr val="2FDFE5"/>
-          </a:solidFill>
-          <a:ln>
-            <a:noFill/>
-          </a:ln>
-        </p:spPr>
-        <p:style>
-          <a:lnRef idx="1">
-            <a:schemeClr val="accent1"/>
-          </a:lnRef>
-          <a:fillRef idx="3">
-            <a:schemeClr val="accent1"/>
-          </a:fillRef>
-          <a:effectRef idx="2">
-            <a:schemeClr val="accent1"/>
-          </a:effectRef>
-          <a:fontRef idx="minor">
-            <a:schemeClr val="lt1"/>
-          </a:fontRef>
-        </p:style>
-        <p:txBody lIns="101600" tIns="25400" rIns="101600" bIns="25400">
-          <a:bodyPr rtlCol="0" anchor="ctr" wrap="none"/>
-          <a:lstStyle/>
-          <a:p>
-            <a:pPr algn="ctr"/>
-            <a:r>
-              <a:rPr sz="1100" b="1">
-                <a:solidFill>
-                  <a:srgbClr val="0A1638"/>
-                </a:solidFill>
-              </a:rPr>
-              <a:t>FASE 4</a:t>
-            </a:r>
-          </a:p>
-        </p:txBody>
-      </p:sp>
-      <p:sp>
-        <p:nvSpPr>
-          <p:cNvPr id="6" name="TextBox 5"/>
-          <p:cNvSpPr txBox="1"/>
-          <p:nvPr/>
-        </p:nvSpPr>
-        <p:spPr>
-          <a:xfrm>
-            <a:off x="502920" y="731520"/>
-            <a:ext cx="8961120" cy="960120"/>
-          </a:xfrm>
-          <a:prstGeom prst="rect">
-            <a:avLst/>
-          </a:prstGeom>
-          <a:noFill/>
-        </p:spPr>
-        <p:txBody lIns="0" tIns="0" rIns="0" bIns="0">
-          <a:bodyPr wrap="square">
-            <a:spAutoFit/>
-          </a:bodyPr>
-          <a:lstStyle/>
-          <a:p>
-            <a:pPr algn="l"/>
-            <a:r>
-              <a:rPr sz="4000" b="1">
-                <a:solidFill>
-                  <a:srgbClr val="FFFFFF"/>
-                </a:solidFill>
-              </a:rPr>
-              <a:t>Cierre y </a:t>
-            </a:r>
-            <a:r>
-              <a:rPr sz="4000" b="1">
-                <a:solidFill>
-                  <a:srgbClr val="2FDFE5"/>
-                </a:solidFill>
-              </a:rPr>
-              <a:t>condiciones</a:t>
-            </a:r>
-          </a:p>
-        </p:txBody>
-      </p:sp>
-      <p:sp>
-        <p:nvSpPr>
-          <p:cNvPr id="7" name="Rectangle 6"/>
-          <p:cNvSpPr/>
-          <p:nvPr/>
-        </p:nvSpPr>
-        <p:spPr>
-          <a:xfrm>
-            <a:off x="502920" y="1737360"/>
-            <a:ext cx="4389120" cy="31750"/>
-          </a:xfrm>
-          <a:prstGeom prst="rect">
-            <a:avLst/>
-          </a:prstGeom>
-          <a:solidFill>
-            <a:srgbClr val="2FDFE5"/>
-          </a:solidFill>
-          <a:ln>
-            <a:noFill/>
-          </a:ln>
-        </p:spPr>
-        <p:style>
-          <a:lnRef idx="1">
-            <a:schemeClr val="accent1"/>
-          </a:lnRef>
-          <a:fillRef idx="3">
-            <a:schemeClr val="accent1"/>
-          </a:fillRef>
-          <a:effectRef idx="2">
-            <a:schemeClr val="accent1"/>
-          </a:effectRef>
-          <a:fontRef idx="minor">
-            <a:schemeClr val="lt1"/>
-          </a:fontRef>
-        </p:style>
-        <p:txBody>
-          <a:bodyPr rtlCol="0" anchor="ctr"/>
-          <a:lstStyle/>
-          <a:p>
-            <a:pPr algn="ctr"/>
-          </a:p>
-        </p:txBody>
-      </p:sp>
-      <p:sp>
-        <p:nvSpPr>
-          <p:cNvPr id="8" name="TextBox 7"/>
-          <p:cNvSpPr txBox="1"/>
-          <p:nvPr/>
-        </p:nvSpPr>
-        <p:spPr>
-          <a:xfrm>
-            <a:off x="502920" y="1810512"/>
-            <a:ext cx="9265615" cy="384048"/>
-          </a:xfrm>
-          <a:prstGeom prst="rect">
-            <a:avLst/>
-          </a:prstGeom>
-          <a:noFill/>
-        </p:spPr>
-        <p:txBody lIns="0" tIns="0" rIns="0" bIns="0">
-          <a:bodyPr wrap="none">
-            <a:spAutoFit/>
-          </a:bodyPr>
-          <a:lstStyle/>
-          <a:p>
-            <a:pPr algn="l"/>
-            <a:r>
-              <a:rPr sz="1300" i="1">
-                <a:solidFill>
-                  <a:srgbClr val="80A8CC"/>
-                </a:solidFill>
-              </a:rPr>
-              <a:t>Solo facturamos cuando recuperamos: nuestros incentivos están alineados con los de nuestro cliente.</a:t>
-            </a:r>
-          </a:p>
-        </p:txBody>
-      </p:sp>
-      <p:sp>
-        <p:nvSpPr>
-          <p:cNvPr id="9" name="Rectangle 8"/>
-          <p:cNvSpPr/>
-          <p:nvPr/>
-        </p:nvSpPr>
-        <p:spPr>
-          <a:xfrm>
-            <a:off x="502920" y="2267712"/>
-            <a:ext cx="5579211" cy="3328416"/>
-          </a:xfrm>
-          <a:prstGeom prst="rect">
-            <a:avLst/>
-          </a:prstGeom>
-          <a:solidFill>
-            <a:srgbClr val="081438"/>
-          </a:solidFill>
-          <a:ln w="12700">
-            <a:solidFill>
-              <a:srgbClr val="2FDFE5"/>
-            </a:solidFill>
-          </a:ln>
-        </p:spPr>
-        <p:style>
-          <a:lnRef idx="1">
-            <a:schemeClr val="accent1"/>
-          </a:lnRef>
-          <a:fillRef idx="3">
-            <a:schemeClr val="accent1"/>
-          </a:fillRef>
-          <a:effectRef idx="2">
-            <a:schemeClr val="accent1"/>
-          </a:effectRef>
-          <a:fontRef idx="minor">
-            <a:schemeClr val="lt1"/>
-          </a:fontRef>
-        </p:style>
-        <p:txBody>
-          <a:bodyPr rtlCol="0" anchor="ctr"/>
-          <a:lstStyle/>
-          <a:p>
-            <a:pPr algn="ctr"/>
-          </a:p>
-        </p:txBody>
-      </p:sp>
-      <p:sp>
-        <p:nvSpPr>
-          <p:cNvPr id="10" name="Rectangle 9"/>
-          <p:cNvSpPr/>
-          <p:nvPr/>
-        </p:nvSpPr>
-        <p:spPr>
-          <a:xfrm>
-            <a:off x="502920" y="2267712"/>
-            <a:ext cx="5579211" cy="63500"/>
-          </a:xfrm>
-          <a:prstGeom prst="rect">
-            <a:avLst/>
-          </a:prstGeom>
-          <a:solidFill>
-            <a:srgbClr val="2FDFE5"/>
-          </a:solidFill>
-          <a:ln>
-            <a:noFill/>
-          </a:ln>
-        </p:spPr>
-        <p:style>
-          <a:lnRef idx="1">
-            <a:schemeClr val="accent1"/>
-          </a:lnRef>
-          <a:fillRef idx="3">
-            <a:schemeClr val="accent1"/>
-          </a:fillRef>
-          <a:effectRef idx="2">
-            <a:schemeClr val="accent1"/>
-          </a:effectRef>
-          <a:fontRef idx="minor">
-            <a:schemeClr val="lt1"/>
-          </a:fontRef>
-        </p:style>
-        <p:txBody>
-          <a:bodyPr rtlCol="0" anchor="ctr"/>
-          <a:lstStyle/>
-          <a:p>
-            <a:pPr algn="ctr"/>
-          </a:p>
-        </p:txBody>
-      </p:sp>
-      <p:sp>
-        <p:nvSpPr>
-          <p:cNvPr id="11" name="TextBox 10"/>
-          <p:cNvSpPr txBox="1"/>
-          <p:nvPr/>
-        </p:nvSpPr>
-        <p:spPr>
-          <a:xfrm>
-            <a:off x="704088" y="2487168"/>
-            <a:ext cx="5176875" cy="640080"/>
-          </a:xfrm>
-          <a:prstGeom prst="rect">
-            <a:avLst/>
-          </a:prstGeom>
-          <a:noFill/>
-        </p:spPr>
-        <p:txBody lIns="38100" tIns="63500" rIns="38100" bIns="25400">
-          <a:bodyPr wrap="square">
-            <a:spAutoFit/>
-          </a:bodyPr>
-          <a:lstStyle/>
-          <a:p>
-            <a:pPr algn="l"/>
-            <a:r>
-              <a:rPr sz="1900" b="1">
-                <a:solidFill>
-                  <a:srgbClr val="2FDFE5"/>
-                </a:solidFill>
-              </a:rPr>
-              <a:t>7  </a:t>
-            </a:r>
-            <a:r>
-              <a:rPr sz="1900" b="1">
-                <a:solidFill>
-                  <a:srgbClr val="FFFFFF"/>
-                </a:solidFill>
-              </a:rPr>
-              <a:t>Cierre del expediente</a:t>
-            </a:r>
-          </a:p>
-        </p:txBody>
-      </p:sp>
-      <p:sp>
-        <p:nvSpPr>
-          <p:cNvPr id="12" name="Rectangle 11"/>
-          <p:cNvSpPr/>
-          <p:nvPr/>
-        </p:nvSpPr>
-        <p:spPr>
-          <a:xfrm>
-            <a:off x="667512" y="3218688"/>
-            <a:ext cx="5250027" cy="19050"/>
-          </a:xfrm>
-          <a:prstGeom prst="rect">
-            <a:avLst/>
-          </a:prstGeom>
-          <a:solidFill>
-            <a:srgbClr val="13B9BF"/>
-          </a:solidFill>
-          <a:ln>
-            <a:noFill/>
-          </a:ln>
-        </p:spPr>
-        <p:style>
-          <a:lnRef idx="1">
-            <a:schemeClr val="accent1"/>
-          </a:lnRef>
-          <a:fillRef idx="3">
-            <a:schemeClr val="accent1"/>
-          </a:fillRef>
-          <a:effectRef idx="2">
-            <a:schemeClr val="accent1"/>
-          </a:effectRef>
-          <a:fontRef idx="minor">
-            <a:schemeClr val="lt1"/>
-          </a:fontRef>
-        </p:style>
-        <p:txBody>
-          <a:bodyPr rtlCol="0" anchor="ctr"/>
-          <a:lstStyle/>
-          <a:p>
-            <a:pPr algn="ctr"/>
-          </a:p>
-        </p:txBody>
-      </p:sp>
-      <p:sp>
-        <p:nvSpPr>
-          <p:cNvPr id="13" name="TextBox 12"/>
-          <p:cNvSpPr txBox="1"/>
-          <p:nvPr/>
-        </p:nvSpPr>
-        <p:spPr>
-          <a:xfrm>
-            <a:off x="667512" y="3345688"/>
-            <a:ext cx="5250027" cy="2249424"/>
-          </a:xfrm>
-          <a:prstGeom prst="rect">
-            <a:avLst/>
-          </a:prstGeom>
-          <a:noFill/>
-        </p:spPr>
-        <p:txBody lIns="50800" tIns="50800" rIns="50800" bIns="50800">
-          <a:bodyPr wrap="square">
-            <a:spAutoFit/>
-          </a:bodyPr>
-          <a:lstStyle/>
-          <a:p>
-            <a:pPr algn="l">
-              <a:spcBef>
-                <a:spcPts val="1800"/>
-              </a:spcBef>
-            </a:pPr>
-            <a:r>
-              <a:rPr sz="1400">
-                <a:solidFill>
-                  <a:srgbClr val="2FDFE5"/>
-                </a:solidFill>
-              </a:rPr>
-              <a:t>▸  </a:t>
-            </a:r>
-            <a:r>
-              <a:rPr sz="1700">
-                <a:solidFill>
-                  <a:srgbClr val="D8EAFF"/>
-                </a:solidFill>
-              </a:rPr>
-              <a:t>Expedientes recuperados o finalizados</a:t>
-            </a:r>
-          </a:p>
-          <a:p>
-            <a:pPr algn="l">
-              <a:spcBef>
-                <a:spcPts val="1800"/>
-              </a:spcBef>
-            </a:pPr>
-            <a:r>
-              <a:rPr sz="1400">
-                <a:solidFill>
-                  <a:srgbClr val="2FDFE5"/>
-                </a:solidFill>
-              </a:rPr>
-              <a:t>▸  </a:t>
-            </a:r>
-            <a:r>
-              <a:rPr sz="1700">
-                <a:solidFill>
-                  <a:srgbClr val="D8EAFF"/>
-                </a:solidFill>
-              </a:rPr>
-              <a:t>Entrega de resultados y documentación</a:t>
-            </a:r>
-          </a:p>
-          <a:p>
-            <a:pPr algn="l">
-              <a:spcBef>
-                <a:spcPts val="1800"/>
-              </a:spcBef>
-            </a:pPr>
-            <a:r>
-              <a:rPr sz="1400">
-                <a:solidFill>
-                  <a:srgbClr val="2FDFE5"/>
-                </a:solidFill>
-              </a:rPr>
-              <a:t>▸  </a:t>
-            </a:r>
-            <a:r>
-              <a:rPr sz="1700">
-                <a:solidFill>
-                  <a:srgbClr val="D8EAFF"/>
-                </a:solidFill>
-              </a:rPr>
-              <a:t>Análisis de rendimiento y propuestas de mejora continua</a:t>
-            </a:r>
-          </a:p>
-        </p:txBody>
-      </p:sp>
-      <p:sp>
-        <p:nvSpPr>
-          <p:cNvPr id="14" name="Rectangle 13"/>
-          <p:cNvSpPr/>
-          <p:nvPr/>
-        </p:nvSpPr>
-        <p:spPr>
-          <a:xfrm>
-            <a:off x="6283299" y="2267712"/>
-            <a:ext cx="5579211" cy="3328416"/>
-          </a:xfrm>
-          <a:prstGeom prst="rect">
-            <a:avLst/>
-          </a:prstGeom>
-          <a:solidFill>
-            <a:srgbClr val="081438"/>
-          </a:solidFill>
-          <a:ln w="12700">
-            <a:solidFill>
-              <a:srgbClr val="2FDFE5"/>
-            </a:solidFill>
-          </a:ln>
-        </p:spPr>
-        <p:style>
-          <a:lnRef idx="1">
-            <a:schemeClr val="accent1"/>
-          </a:lnRef>
-          <a:fillRef idx="3">
-            <a:schemeClr val="accent1"/>
-          </a:fillRef>
-          <a:effectRef idx="2">
-            <a:schemeClr val="accent1"/>
-          </a:effectRef>
-          <a:fontRef idx="minor">
-            <a:schemeClr val="lt1"/>
-          </a:fontRef>
-        </p:style>
-        <p:txBody>
-          <a:bodyPr rtlCol="0" anchor="ctr"/>
-          <a:lstStyle/>
-          <a:p>
-            <a:pPr algn="ctr"/>
-          </a:p>
-        </p:txBody>
-      </p:sp>
-      <p:sp>
-        <p:nvSpPr>
-          <p:cNvPr id="15" name="Rectangle 14"/>
-          <p:cNvSpPr/>
-          <p:nvPr/>
-        </p:nvSpPr>
-        <p:spPr>
-          <a:xfrm>
-            <a:off x="6283299" y="2267712"/>
-            <a:ext cx="5579211" cy="63500"/>
-          </a:xfrm>
-          <a:prstGeom prst="rect">
-            <a:avLst/>
-          </a:prstGeom>
-          <a:solidFill>
-            <a:srgbClr val="2FDFE5"/>
-          </a:solidFill>
-          <a:ln>
-            <a:noFill/>
-          </a:ln>
-        </p:spPr>
-        <p:style>
-          <a:lnRef idx="1">
-            <a:schemeClr val="accent1"/>
-          </a:lnRef>
-          <a:fillRef idx="3">
-            <a:schemeClr val="accent1"/>
-          </a:fillRef>
-          <a:effectRef idx="2">
-            <a:schemeClr val="accent1"/>
-          </a:effectRef>
-          <a:fontRef idx="minor">
-            <a:schemeClr val="lt1"/>
-          </a:fontRef>
-        </p:style>
-        <p:txBody>
-          <a:bodyPr rtlCol="0" anchor="ctr"/>
-          <a:lstStyle/>
-          <a:p>
-            <a:pPr algn="ctr"/>
-          </a:p>
-        </p:txBody>
-      </p:sp>
-      <p:sp>
-        <p:nvSpPr>
-          <p:cNvPr id="16" name="TextBox 15"/>
-          <p:cNvSpPr txBox="1"/>
-          <p:nvPr/>
-        </p:nvSpPr>
-        <p:spPr>
-          <a:xfrm>
-            <a:off x="6484467" y="2487168"/>
-            <a:ext cx="5176875" cy="640080"/>
-          </a:xfrm>
-          <a:prstGeom prst="rect">
-            <a:avLst/>
-          </a:prstGeom>
-          <a:noFill/>
-        </p:spPr>
-        <p:txBody lIns="38100" tIns="63500" rIns="38100" bIns="25400">
-          <a:bodyPr wrap="square">
-            <a:spAutoFit/>
-          </a:bodyPr>
-          <a:lstStyle/>
-          <a:p>
-            <a:pPr algn="l"/>
-            <a:r>
-              <a:rPr sz="1900" b="1">
-                <a:solidFill>
-                  <a:srgbClr val="2FDFE5"/>
-                </a:solidFill>
-              </a:rPr>
-              <a:t>8  </a:t>
-            </a:r>
-            <a:r>
-              <a:rPr sz="1900" b="1">
-                <a:solidFill>
-                  <a:srgbClr val="FFFFFF"/>
-                </a:solidFill>
-              </a:rPr>
-              <a:t>Honorarios y condiciones</a:t>
-            </a:r>
-          </a:p>
-        </p:txBody>
-      </p:sp>
-      <p:sp>
-        <p:nvSpPr>
-          <p:cNvPr id="17" name="Rectangle 16"/>
-          <p:cNvSpPr/>
-          <p:nvPr/>
-        </p:nvSpPr>
-        <p:spPr>
-          <a:xfrm>
-            <a:off x="6447891" y="3218688"/>
-            <a:ext cx="5250027" cy="19050"/>
-          </a:xfrm>
-          <a:prstGeom prst="rect">
-            <a:avLst/>
-          </a:prstGeom>
-          <a:solidFill>
-            <a:srgbClr val="13B9BF"/>
-          </a:solidFill>
-          <a:ln>
-            <a:noFill/>
-          </a:ln>
-        </p:spPr>
-        <p:style>
-          <a:lnRef idx="1">
-            <a:schemeClr val="accent1"/>
-          </a:lnRef>
-          <a:fillRef idx="3">
-            <a:schemeClr val="accent1"/>
-          </a:fillRef>
-          <a:effectRef idx="2">
-            <a:schemeClr val="accent1"/>
-          </a:effectRef>
-          <a:fontRef idx="minor">
-            <a:schemeClr val="lt1"/>
-          </a:fontRef>
-        </p:style>
-        <p:txBody>
-          <a:bodyPr rtlCol="0" anchor="ctr"/>
-          <a:lstStyle/>
-          <a:p>
-            <a:pPr algn="ctr"/>
-          </a:p>
-        </p:txBody>
-      </p:sp>
-      <p:sp>
-        <p:nvSpPr>
-          <p:cNvPr id="18" name="TextBox 17"/>
-          <p:cNvSpPr txBox="1"/>
-          <p:nvPr/>
-        </p:nvSpPr>
-        <p:spPr>
-          <a:xfrm>
-            <a:off x="6447891" y="3345688"/>
-            <a:ext cx="5250027" cy="2249424"/>
-          </a:xfrm>
-          <a:prstGeom prst="rect">
-            <a:avLst/>
-          </a:prstGeom>
-          <a:noFill/>
-        </p:spPr>
-        <p:txBody lIns="50800" tIns="50800" rIns="50800" bIns="50800">
-          <a:bodyPr wrap="square">
-            <a:spAutoFit/>
-          </a:bodyPr>
-          <a:lstStyle/>
-          <a:p>
-            <a:pPr algn="l">
-              <a:spcBef>
-                <a:spcPts val="1800"/>
-              </a:spcBef>
-            </a:pPr>
-            <a:r>
-              <a:rPr sz="1400">
-                <a:solidFill>
-                  <a:srgbClr val="2FDFE5"/>
-                </a:solidFill>
-              </a:rPr>
-              <a:t>▸  </a:t>
-            </a:r>
-            <a:r>
-              <a:rPr sz="1700">
-                <a:solidFill>
-                  <a:srgbClr val="D8EAFF"/>
-                </a:solidFill>
-              </a:rPr>
-              <a:t>Servicio de recobro amistoso a éxito</a:t>
-            </a:r>
-          </a:p>
-          <a:p>
-            <a:pPr algn="l">
-              <a:spcBef>
-                <a:spcPts val="1800"/>
-              </a:spcBef>
-            </a:pPr>
-            <a:r>
-              <a:rPr sz="1400">
-                <a:solidFill>
-                  <a:srgbClr val="2FDFE5"/>
-                </a:solidFill>
-              </a:rPr>
-              <a:t>▸  </a:t>
-            </a:r>
-            <a:r>
-              <a:rPr sz="1700">
-                <a:solidFill>
-                  <a:srgbClr val="D8EAFF"/>
-                </a:solidFill>
-              </a:rPr>
-              <a:t>Retribución escalada según tipología de deuda</a:t>
-            </a:r>
-          </a:p>
-          <a:p>
-            <a:pPr algn="l">
-              <a:spcBef>
-                <a:spcPts val="1800"/>
-              </a:spcBef>
-            </a:pPr>
-            <a:r>
-              <a:rPr sz="1400">
-                <a:solidFill>
-                  <a:srgbClr val="2FDFE5"/>
-                </a:solidFill>
-              </a:rPr>
-              <a:t>▸  </a:t>
-            </a:r>
-            <a:r>
-              <a:rPr sz="1700">
-                <a:solidFill>
-                  <a:srgbClr val="D8EAFF"/>
-                </a:solidFill>
-              </a:rPr>
-              <a:t>Sin costes fijos: solo cobramos si recuperamos</a:t>
-            </a:r>
-          </a:p>
-        </p:txBody>
-      </p:sp>
-    </p:spTree>
-  </p:cSld>
-  <p:clrMapOvr>
-    <a:masterClrMapping/>
-  </p:clrMapOvr>
-  <p:timing>
-    <p:tnLst>
-      <p:par>
-        <p:cTn id="1" dur="indefin" restart="whenNotActive" nodeType="tmRoot">
-          <p:childTnLst>
-            <p:seq concurrent="1" nextAc="seek">
-              <p:cTn id="2" dur="indefin" nodeType="mainSeq">
-                <p:childTnLst>
-                  <p:par>
-                    <p:cTn id="3" fill="hold">
-                      <p:stCondLst>
-                        <p:cond delay="0"/>
-                      </p:stCondLst>
-                      <p:childTnLst>
-                        <p:par>
-                          <p:cTn id="5" fill="hold">
-                            <p:stCondLst>
-                              <p:cond delay="0"/>
-                            </p:stCondLst>
-                            <p:childTnLst>
-                              <p:animEffect transition="in" filter="wipe(up)">
-                                <p:cBhvr>
-                                  <p:cTn id="6" dur="380" fill="hold"/>
-                                  <p:tgtEl>
-                                    <p:spTgt spid="9"/>
-                                  </p:tgtEl>
-                                </p:cBhvr>
-                              </p:animEffect>
-                            </p:childTnLst>
-                          </p:cTn>
-                        </p:par>
-                        <p:par>
-                          <p:cTn id="7" fill="hold">
-                            <p:stCondLst>
-                              <p:cond delay="0"/>
-                            </p:stCondLst>
-                            <p:childTnLst>
-                              <p:animEffect transition="in" filter="wipe(up)">
-                                <p:cBhvr>
-                                  <p:cTn id="8" dur="380" fill="hold"/>
-                                  <p:tgtEl>
-                                    <p:spTgt spid="10"/>
-                                  </p:tgtEl>
-                                </p:cBhvr>
-                              </p:animEffect>
-                            </p:childTnLst>
-                          </p:cTn>
-                        </p:par>
-                        <p:par>
-                          <p:cTn id="9" fill="hold">
-                            <p:stCondLst>
-                              <p:cond delay="0"/>
-                            </p:stCondLst>
-                            <p:childTnLst>
-                              <p:animEffect transition="in" filter="wipe(up)">
-                                <p:cBhvr>
-                                  <p:cTn id="10" dur="380" fill="hold"/>
-                                  <p:tgtEl>
-                                    <p:spTgt spid="11"/>
-                                  </p:tgtEl>
-                                </p:cBhvr>
-                              </p:animEffect>
-                            </p:childTnLst>
-                          </p:cTn>
-                        </p:par>
-                        <p:par>
-                          <p:cTn id="11" fill="hold">
-                            <p:stCondLst>
-                              <p:cond delay="0"/>
-                            </p:stCondLst>
-                            <p:childTnLst>
-                              <p:animEffect transition="in" filter="wipe(up)">
-                                <p:cBhvr>
-                                  <p:cTn id="12" dur="380" fill="hold"/>
-                                  <p:tgtEl>
-                                    <p:spTgt spid="12"/>
-                                  </p:tgtEl>
-                                </p:cBhvr>
-                              </p:animEffect>
-                            </p:childTnLst>
-                          </p:cTn>
-                        </p:par>
-                        <p:par>
-                          <p:cTn id="13" fill="hold">
-                            <p:stCondLst>
-                              <p:cond delay="0"/>
-                            </p:stCondLst>
-                            <p:childTnLst>
-                              <p:animEffect transition="in" filter="wipe(up)">
-                                <p:cBhvr>
-                                  <p:cTn id="14" dur="380" fill="hold"/>
-                                  <p:tgtEl>
-                                    <p:spTgt spid="13"/>
-                                  </p:tgtEl>
-                                </p:cBhvr>
-                              </p:animEffect>
-                            </p:childTnLst>
-                          </p:cTn>
-                        </p:par>
-                        <p:par>
-                          <p:cTn id="15" fill="hold">
-                            <p:stCondLst>
-                              <p:cond delay="160"/>
-                            </p:stCondLst>
-                            <p:childTnLst>
-                              <p:animEffect transition="in" filter="wipe(up)">
-                                <p:cBhvr>
-                                  <p:cTn id="16" dur="380" fill="hold"/>
-                                  <p:tgtEl>
-                                    <p:spTgt spid="14"/>
-                                  </p:tgtEl>
-                                </p:cBhvr>
-                              </p:animEffect>
-                            </p:childTnLst>
-                          </p:cTn>
-                        </p:par>
-                        <p:par>
-                          <p:cTn id="17" fill="hold">
-                            <p:stCondLst>
-                              <p:cond delay="160"/>
-                            </p:stCondLst>
-                            <p:childTnLst>
-                              <p:animEffect transition="in" filter="wipe(up)">
-                                <p:cBhvr>
-                                  <p:cTn id="18" dur="380" fill="hold"/>
-                                  <p:tgtEl>
-                                    <p:spTgt spid="15"/>
-                                  </p:tgtEl>
-                                </p:cBhvr>
-                              </p:animEffect>
-                            </p:childTnLst>
-                          </p:cTn>
-                        </p:par>
-                        <p:par>
-                          <p:cTn id="19" fill="hold">
-                            <p:stCondLst>
-                              <p:cond delay="160"/>
-                            </p:stCondLst>
-                            <p:childTnLst>
-                              <p:animEffect transition="in" filter="wipe(up)">
-                                <p:cBhvr>
-                                  <p:cTn id="20" dur="380" fill="hold"/>
-                                  <p:tgtEl>
-                                    <p:spTgt spid="16"/>
-                                  </p:tgtEl>
-                                </p:cBhvr>
-                              </p:animEffect>
-                            </p:childTnLst>
-                          </p:cTn>
-                        </p:par>
-                        <p:par>
-                          <p:cTn id="21" fill="hold">
-                            <p:stCondLst>
-                              <p:cond delay="160"/>
-                            </p:stCondLst>
-                            <p:childTnLst>
-                              <p:animEffect transition="in" filter="wipe(up)">
-                                <p:cBhvr>
-                                  <p:cTn id="22" dur="380" fill="hold"/>
-                                  <p:tgtEl>
-                                    <p:spTgt spid="17"/>
-                                  </p:tgtEl>
-                                </p:cBhvr>
-                              </p:animEffect>
-                            </p:childTnLst>
-                          </p:cTn>
-                        </p:par>
-                        <p:par>
-                          <p:cTn id="23" fill="hold">
-                            <p:stCondLst>
-                              <p:cond delay="160"/>
-                            </p:stCondLst>
-                            <p:childTnLst>
-                              <p:animEffect transition="in" filter="wipe(up)">
-                                <p:cBhvr>
-                                  <p:cTn id="24" dur="380" fill="hold"/>
-                                  <p:tgtEl>
-                                    <p:spTgt spid="18"/>
-                                  </p:tgtEl>
-                                </p:cBhvr>
-                              </p:animEffect>
-                            </p:childTnLst>
-                          </p:cTn>
-                        </p:par>
-                      </p:childTnLst>
-                    </p:cTn>
-                  </p:par>
-                </p:childTnLst>
-              </p:cTn>
-              <p:prevCondLst>
-                <p:cond evt="onPrevClick" delay="0"/>
-              </p:prevCondLst>
-              <p:nextCondLst>
-                <p:cond evt="onNextClick" delay="0"/>
-              </p:nextCondLst>
-            </p:seq>
-          </p:childTnLst>
-        </p:cTn>
-      </p:par>
-    </p:tnLst>
-  </p:timing>
-  <p:transition dur="550" spd="fast">
-    <p:push dir="u"/>
-  </p:transition>
-</p:sld>
-</file>
-
-<file path=ppt/slides/slide6.xml><?xml version="1.0" encoding="utf-8"?>
-<p:sld xmlns:a="http://schemas.openxmlformats.org/drawingml/2006/main" xmlns:p="http://schemas.openxmlformats.org/presentationml/2006/main" xmlns:r="http://schemas.openxmlformats.org/officeDocument/2006/relationships">
-  <p:cSld>
-    <p:spTree>
-      <p:nvGrpSpPr>
-        <p:cNvPr id="1" name=""/>
-        <p:cNvGrpSpPr/>
-        <p:nvPr/>
-      </p:nvGrpSpPr>
-      <p:grpSpPr/>
-      <p:pic>
-        <p:nvPicPr>
-          <p:cNvPr id="2" name="Picture 1" descr="content_bg_nolog.png"/>
-          <p:cNvPicPr>
-            <a:picLocks noChangeAspect="1"/>
-          </p:cNvPicPr>
-          <p:nvPr/>
-        </p:nvPicPr>
-        <p:blipFill>
-          <a:blip r:embed="rId2"/>
-          <a:stretch>
-            <a:fillRect/>
-          </a:stretch>
-        </p:blipFill>
-        <p:spPr>
-          <a:xfrm>
-            <a:off x="0" y="0"/>
-            <a:ext cx="12191695" cy="6858000"/>
-          </a:xfrm>
-          <a:prstGeom prst="rect">
-            <a:avLst/>
-          </a:prstGeom>
-        </p:spPr>
-      </p:pic>
-      <p:sp>
-        <p:nvSpPr>
-          <p:cNvPr id="3" name="Rectangle 2"/>
-          <p:cNvSpPr/>
-          <p:nvPr/>
-        </p:nvSpPr>
-        <p:spPr>
-          <a:xfrm>
-            <a:off x="0" y="0"/>
-            <a:ext cx="12191695" cy="50800"/>
-          </a:xfrm>
-          <a:prstGeom prst="rect">
-            <a:avLst/>
-          </a:prstGeom>
-          <a:solidFill>
-            <a:srgbClr val="2FDFE5"/>
-          </a:solidFill>
-          <a:ln>
-            <a:noFill/>
-          </a:ln>
-        </p:spPr>
-        <p:style>
-          <a:lnRef idx="1">
-            <a:schemeClr val="accent1"/>
-          </a:lnRef>
-          <a:fillRef idx="3">
-            <a:schemeClr val="accent1"/>
-          </a:fillRef>
-          <a:effectRef idx="2">
-            <a:schemeClr val="accent1"/>
-          </a:effectRef>
-          <a:fontRef idx="minor">
-            <a:schemeClr val="lt1"/>
-          </a:fontRef>
-        </p:style>
-        <p:txBody>
-          <a:bodyPr rtlCol="0" anchor="ctr"/>
-          <a:lstStyle/>
-          <a:p>
-            <a:pPr algn="ctr"/>
-          </a:p>
-        </p:txBody>
-      </p:sp>
-      <p:sp>
-        <p:nvSpPr>
-          <p:cNvPr id="4" name="Rectangle 3"/>
-          <p:cNvSpPr/>
-          <p:nvPr/>
-        </p:nvSpPr>
-        <p:spPr>
-          <a:xfrm>
-            <a:off x="0" y="0"/>
-            <a:ext cx="63500" cy="6858000"/>
-          </a:xfrm>
-          <a:prstGeom prst="rect">
-            <a:avLst/>
-          </a:prstGeom>
-          <a:solidFill>
-            <a:srgbClr val="13B9BF"/>
-          </a:solidFill>
-          <a:ln>
-            <a:noFill/>
-          </a:ln>
-        </p:spPr>
-        <p:style>
-          <a:lnRef idx="1">
-            <a:schemeClr val="accent1"/>
-          </a:lnRef>
-          <a:fillRef idx="3">
-            <a:schemeClr val="accent1"/>
-          </a:fillRef>
-          <a:effectRef idx="2">
-            <a:schemeClr val="accent1"/>
-          </a:effectRef>
-          <a:fontRef idx="minor">
-            <a:schemeClr val="lt1"/>
-          </a:fontRef>
-        </p:style>
-        <p:txBody>
-          <a:bodyPr rtlCol="0" anchor="ctr"/>
-          <a:lstStyle/>
-          <a:p>
-            <a:pPr algn="ctr"/>
-          </a:p>
-        </p:txBody>
-      </p:sp>
-      <p:sp>
-        <p:nvSpPr>
-          <p:cNvPr id="5" name="Rectangle 4"/>
-          <p:cNvSpPr/>
-          <p:nvPr/>
-        </p:nvSpPr>
-        <p:spPr>
-          <a:xfrm>
-            <a:off x="502920" y="365760"/>
-            <a:ext cx="1737360" cy="301752"/>
-          </a:xfrm>
-          <a:prstGeom prst="rect">
-            <a:avLst/>
-          </a:prstGeom>
-          <a:solidFill>
-            <a:srgbClr val="2FDFE5"/>
-          </a:solidFill>
-          <a:ln>
-            <a:noFill/>
-          </a:ln>
-        </p:spPr>
-        <p:style>
-          <a:lnRef idx="1">
-            <a:schemeClr val="accent1"/>
-          </a:lnRef>
-          <a:fillRef idx="3">
-            <a:schemeClr val="accent1"/>
-          </a:fillRef>
-          <a:effectRef idx="2">
-            <a:schemeClr val="accent1"/>
-          </a:effectRef>
-          <a:fontRef idx="minor">
-            <a:schemeClr val="lt1"/>
-          </a:fontRef>
-        </p:style>
-        <p:txBody lIns="101600" tIns="25400" rIns="101600" bIns="25400">
-          <a:bodyPr rtlCol="0" anchor="ctr" wrap="none"/>
-          <a:lstStyle/>
-          <a:p>
-            <a:pPr algn="ctr"/>
-            <a:r>
-              <a:rPr sz="1100" b="1">
-                <a:solidFill>
-                  <a:srgbClr val="0A1638"/>
-                </a:solidFill>
-              </a:rPr>
-              <a:t>FASE 5</a:t>
-            </a:r>
-          </a:p>
-        </p:txBody>
-      </p:sp>
-      <p:sp>
-        <p:nvSpPr>
-          <p:cNvPr id="6" name="TextBox 5"/>
-          <p:cNvSpPr txBox="1"/>
-          <p:nvPr/>
-        </p:nvSpPr>
-        <p:spPr>
-          <a:xfrm>
-            <a:off x="502920" y="731520"/>
-            <a:ext cx="8961120" cy="960120"/>
-          </a:xfrm>
-          <a:prstGeom prst="rect">
-            <a:avLst/>
-          </a:prstGeom>
-          <a:noFill/>
-        </p:spPr>
-        <p:txBody lIns="0" tIns="0" rIns="0" bIns="0">
-          <a:bodyPr wrap="square">
-            <a:spAutoFit/>
-          </a:bodyPr>
-          <a:lstStyle/>
-          <a:p>
-            <a:pPr algn="l"/>
-            <a:r>
-              <a:rPr sz="4000" b="1">
-                <a:solidFill>
-                  <a:srgbClr val="FFFFFF"/>
-                </a:solidFill>
-              </a:rPr>
-              <a:t>Servicios </a:t>
-            </a:r>
-            <a:r>
-              <a:rPr sz="4000" b="1">
-                <a:solidFill>
-                  <a:srgbClr val="2FDFE5"/>
-                </a:solidFill>
-              </a:rPr>
-              <a:t>adicionales</a:t>
-            </a:r>
-          </a:p>
-        </p:txBody>
-      </p:sp>
-      <p:sp>
-        <p:nvSpPr>
-          <p:cNvPr id="7" name="Rectangle 6"/>
-          <p:cNvSpPr/>
-          <p:nvPr/>
-        </p:nvSpPr>
-        <p:spPr>
-          <a:xfrm>
-            <a:off x="502920" y="1737360"/>
-            <a:ext cx="4389120" cy="31750"/>
-          </a:xfrm>
-          <a:prstGeom prst="rect">
-            <a:avLst/>
-          </a:prstGeom>
-          <a:solidFill>
-            <a:srgbClr val="2FDFE5"/>
-          </a:solidFill>
-          <a:ln>
-            <a:noFill/>
-          </a:ln>
-        </p:spPr>
-        <p:style>
-          <a:lnRef idx="1">
-            <a:schemeClr val="accent1"/>
-          </a:lnRef>
-          <a:fillRef idx="3">
-            <a:schemeClr val="accent1"/>
-          </a:fillRef>
-          <a:effectRef idx="2">
-            <a:schemeClr val="accent1"/>
-          </a:effectRef>
-          <a:fontRef idx="minor">
-            <a:schemeClr val="lt1"/>
-          </a:fontRef>
-        </p:style>
-        <p:txBody>
-          <a:bodyPr rtlCol="0" anchor="ctr"/>
-          <a:lstStyle/>
-          <a:p>
-            <a:pPr algn="ctr"/>
-          </a:p>
-        </p:txBody>
-      </p:sp>
-      <p:sp>
-        <p:nvSpPr>
-          <p:cNvPr id="8" name="Rectangle 7"/>
-          <p:cNvSpPr/>
-          <p:nvPr/>
-        </p:nvSpPr>
-        <p:spPr>
-          <a:xfrm>
-            <a:off x="502920" y="1920240"/>
-            <a:ext cx="5579211" cy="1993392"/>
-          </a:xfrm>
-          <a:prstGeom prst="rect">
-            <a:avLst/>
-          </a:prstGeom>
-          <a:solidFill>
-            <a:srgbClr val="081438"/>
-          </a:solidFill>
-          <a:ln w="12700">
-            <a:solidFill>
-              <a:srgbClr val="2FDFE5"/>
-            </a:solidFill>
-          </a:ln>
-        </p:spPr>
-        <p:style>
-          <a:lnRef idx="1">
-            <a:schemeClr val="accent1"/>
-          </a:lnRef>
-          <a:fillRef idx="3">
-            <a:schemeClr val="accent1"/>
-          </a:fillRef>
-          <a:effectRef idx="2">
-            <a:schemeClr val="accent1"/>
-          </a:effectRef>
-          <a:fontRef idx="minor">
-            <a:schemeClr val="lt1"/>
-          </a:fontRef>
-        </p:style>
-        <p:txBody>
-          <a:bodyPr rtlCol="0" anchor="ctr"/>
-          <a:lstStyle/>
-          <a:p>
-            <a:pPr algn="ctr"/>
-          </a:p>
-        </p:txBody>
-      </p:sp>
-      <p:sp>
-        <p:nvSpPr>
-          <p:cNvPr id="9" name="Rectangle 8"/>
-          <p:cNvSpPr/>
-          <p:nvPr/>
-        </p:nvSpPr>
-        <p:spPr>
-          <a:xfrm>
-            <a:off x="502920" y="1920240"/>
-            <a:ext cx="5579211" cy="63500"/>
-          </a:xfrm>
-          <a:prstGeom prst="rect">
-            <a:avLst/>
-          </a:prstGeom>
-          <a:solidFill>
-            <a:srgbClr val="2FDFE5"/>
-          </a:solidFill>
-          <a:ln>
-            <a:noFill/>
-          </a:ln>
-        </p:spPr>
-        <p:style>
-          <a:lnRef idx="1">
-            <a:schemeClr val="accent1"/>
-          </a:lnRef>
-          <a:fillRef idx="3">
-            <a:schemeClr val="accent1"/>
-          </a:fillRef>
-          <a:effectRef idx="2">
-            <a:schemeClr val="accent1"/>
-          </a:effectRef>
-          <a:fontRef idx="minor">
-            <a:schemeClr val="lt1"/>
-          </a:fontRef>
-        </p:style>
-        <p:txBody>
-          <a:bodyPr rtlCol="0" anchor="ctr"/>
-          <a:lstStyle/>
-          <a:p>
-            <a:pPr algn="ctr"/>
-          </a:p>
-        </p:txBody>
-      </p:sp>
-      <p:sp>
-        <p:nvSpPr>
-          <p:cNvPr id="10" name="TextBox 9"/>
-          <p:cNvSpPr txBox="1"/>
-          <p:nvPr/>
-        </p:nvSpPr>
-        <p:spPr>
-          <a:xfrm>
-            <a:off x="685800" y="2103120"/>
-            <a:ext cx="5213451" cy="585216"/>
-          </a:xfrm>
-          <a:prstGeom prst="rect">
-            <a:avLst/>
-          </a:prstGeom>
-          <a:noFill/>
-        </p:spPr>
-        <p:txBody lIns="38100" tIns="63500" rIns="38100" bIns="25400">
-          <a:bodyPr wrap="square">
-            <a:spAutoFit/>
-          </a:bodyPr>
-          <a:lstStyle/>
-          <a:p>
-            <a:pPr algn="l"/>
-            <a:r>
-              <a:rPr sz="1700" b="1">
-                <a:solidFill>
-                  <a:srgbClr val="2FDFE5"/>
-                </a:solidFill>
-              </a:rPr>
-              <a:t>1  </a:t>
-            </a:r>
-            <a:r>
-              <a:rPr sz="1700" b="1">
-                <a:solidFill>
-                  <a:srgbClr val="FFFFFF"/>
-                </a:solidFill>
-              </a:rPr>
-              <a:t>Vía monitoria</a:t>
-            </a:r>
-          </a:p>
-        </p:txBody>
-      </p:sp>
-      <p:sp>
-        <p:nvSpPr>
-          <p:cNvPr id="11" name="Rectangle 10"/>
-          <p:cNvSpPr/>
-          <p:nvPr/>
-        </p:nvSpPr>
-        <p:spPr>
-          <a:xfrm>
-            <a:off x="649224" y="2779776"/>
-            <a:ext cx="5286603" cy="19050"/>
-          </a:xfrm>
-          <a:prstGeom prst="rect">
-            <a:avLst/>
-          </a:prstGeom>
-          <a:solidFill>
-            <a:srgbClr val="13B9BF"/>
-          </a:solidFill>
-          <a:ln>
-            <a:noFill/>
-          </a:ln>
-        </p:spPr>
-        <p:style>
-          <a:lnRef idx="1">
-            <a:schemeClr val="accent1"/>
-          </a:lnRef>
-          <a:fillRef idx="3">
-            <a:schemeClr val="accent1"/>
-          </a:fillRef>
-          <a:effectRef idx="2">
-            <a:schemeClr val="accent1"/>
-          </a:effectRef>
-          <a:fontRef idx="minor">
-            <a:schemeClr val="lt1"/>
-          </a:fontRef>
-        </p:style>
-        <p:txBody>
-          <a:bodyPr rtlCol="0" anchor="ctr"/>
-          <a:lstStyle/>
-          <a:p>
-            <a:pPr algn="ctr"/>
-          </a:p>
-        </p:txBody>
-      </p:sp>
-      <p:sp>
-        <p:nvSpPr>
-          <p:cNvPr id="12" name="TextBox 11"/>
-          <p:cNvSpPr txBox="1"/>
-          <p:nvPr/>
-        </p:nvSpPr>
-        <p:spPr>
-          <a:xfrm>
-            <a:off x="649224" y="2881376"/>
-            <a:ext cx="5286603" cy="1005840"/>
-          </a:xfrm>
-          <a:prstGeom prst="rect">
-            <a:avLst/>
-          </a:prstGeom>
-          <a:noFill/>
-        </p:spPr>
-        <p:txBody lIns="50800" tIns="50800" rIns="50800" bIns="50800">
-          <a:bodyPr wrap="square">
-            <a:spAutoFit/>
-          </a:bodyPr>
-          <a:lstStyle/>
-          <a:p>
-            <a:pPr algn="l"/>
-            <a:r>
-              <a:rPr sz="1500">
-                <a:solidFill>
-                  <a:srgbClr val="D8EAFF"/>
-                </a:solidFill>
-              </a:rPr>
-              <a:t>Tramitación de procedimientos monitorios para reclamar la deuda por vía judicial cuando la vía amistosa no es suficiente.</a:t>
-            </a:r>
-          </a:p>
-        </p:txBody>
-      </p:sp>
-      <p:sp>
-        <p:nvSpPr>
-          <p:cNvPr id="13" name="Rectangle 12"/>
-          <p:cNvSpPr/>
-          <p:nvPr/>
-        </p:nvSpPr>
-        <p:spPr>
-          <a:xfrm>
-            <a:off x="6283299" y="1920240"/>
-            <a:ext cx="5579211" cy="1993392"/>
-          </a:xfrm>
-          <a:prstGeom prst="rect">
-            <a:avLst/>
-          </a:prstGeom>
-          <a:solidFill>
-            <a:srgbClr val="081438"/>
-          </a:solidFill>
-          <a:ln w="12700">
-            <a:solidFill>
-              <a:srgbClr val="2FDFE5"/>
-            </a:solidFill>
-          </a:ln>
-        </p:spPr>
-        <p:style>
-          <a:lnRef idx="1">
-            <a:schemeClr val="accent1"/>
-          </a:lnRef>
-          <a:fillRef idx="3">
-            <a:schemeClr val="accent1"/>
-          </a:fillRef>
-          <a:effectRef idx="2">
-            <a:schemeClr val="accent1"/>
-          </a:effectRef>
-          <a:fontRef idx="minor">
-            <a:schemeClr val="lt1"/>
-          </a:fontRef>
-        </p:style>
-        <p:txBody>
-          <a:bodyPr rtlCol="0" anchor="ctr"/>
-          <a:lstStyle/>
-          <a:p>
-            <a:pPr algn="ctr"/>
-          </a:p>
-        </p:txBody>
-      </p:sp>
-      <p:sp>
-        <p:nvSpPr>
-          <p:cNvPr id="14" name="Rectangle 13"/>
-          <p:cNvSpPr/>
-          <p:nvPr/>
-        </p:nvSpPr>
-        <p:spPr>
-          <a:xfrm>
-            <a:off x="6283299" y="1920240"/>
-            <a:ext cx="5579211" cy="63500"/>
-          </a:xfrm>
-          <a:prstGeom prst="rect">
-            <a:avLst/>
-          </a:prstGeom>
-          <a:solidFill>
-            <a:srgbClr val="2FDFE5"/>
-          </a:solidFill>
-          <a:ln>
-            <a:noFill/>
-          </a:ln>
-        </p:spPr>
-        <p:style>
-          <a:lnRef idx="1">
-            <a:schemeClr val="accent1"/>
-          </a:lnRef>
-          <a:fillRef idx="3">
-            <a:schemeClr val="accent1"/>
-          </a:fillRef>
-          <a:effectRef idx="2">
-            <a:schemeClr val="accent1"/>
-          </a:effectRef>
-          <a:fontRef idx="minor">
-            <a:schemeClr val="lt1"/>
-          </a:fontRef>
-        </p:style>
-        <p:txBody>
-          <a:bodyPr rtlCol="0" anchor="ctr"/>
-          <a:lstStyle/>
-          <a:p>
-            <a:pPr algn="ctr"/>
-          </a:p>
-        </p:txBody>
-      </p:sp>
-      <p:sp>
-        <p:nvSpPr>
-          <p:cNvPr id="15" name="TextBox 14"/>
-          <p:cNvSpPr txBox="1"/>
-          <p:nvPr/>
-        </p:nvSpPr>
-        <p:spPr>
-          <a:xfrm>
-            <a:off x="6466179" y="2103120"/>
-            <a:ext cx="5213451" cy="585216"/>
-          </a:xfrm>
-          <a:prstGeom prst="rect">
-            <a:avLst/>
-          </a:prstGeom>
-          <a:noFill/>
-        </p:spPr>
-        <p:txBody lIns="38100" tIns="63500" rIns="38100" bIns="25400">
-          <a:bodyPr wrap="square">
-            <a:spAutoFit/>
-          </a:bodyPr>
-          <a:lstStyle/>
-          <a:p>
-            <a:pPr algn="l"/>
-            <a:r>
-              <a:rPr sz="1700" b="1">
-                <a:solidFill>
-                  <a:srgbClr val="2FDFE5"/>
-                </a:solidFill>
-              </a:rPr>
-              <a:t>2  </a:t>
-            </a:r>
-            <a:r>
-              <a:rPr sz="1700" b="1">
-                <a:solidFill>
-                  <a:srgbClr val="FFFFFF"/>
-                </a:solidFill>
-              </a:rPr>
-              <a:t>Valoración y compra de carteras</a:t>
-            </a:r>
-          </a:p>
-        </p:txBody>
-      </p:sp>
-      <p:sp>
-        <p:nvSpPr>
-          <p:cNvPr id="16" name="Rectangle 15"/>
-          <p:cNvSpPr/>
-          <p:nvPr/>
-        </p:nvSpPr>
-        <p:spPr>
-          <a:xfrm>
-            <a:off x="6429603" y="2779776"/>
-            <a:ext cx="5286603" cy="19050"/>
-          </a:xfrm>
-          <a:prstGeom prst="rect">
-            <a:avLst/>
-          </a:prstGeom>
-          <a:solidFill>
-            <a:srgbClr val="13B9BF"/>
-          </a:solidFill>
-          <a:ln>
-            <a:noFill/>
-          </a:ln>
-        </p:spPr>
-        <p:style>
-          <a:lnRef idx="1">
-            <a:schemeClr val="accent1"/>
-          </a:lnRef>
-          <a:fillRef idx="3">
-            <a:schemeClr val="accent1"/>
-          </a:fillRef>
-          <a:effectRef idx="2">
-            <a:schemeClr val="accent1"/>
-          </a:effectRef>
-          <a:fontRef idx="minor">
-            <a:schemeClr val="lt1"/>
-          </a:fontRef>
-        </p:style>
-        <p:txBody>
-          <a:bodyPr rtlCol="0" anchor="ctr"/>
-          <a:lstStyle/>
-          <a:p>
-            <a:pPr algn="ctr"/>
-          </a:p>
-        </p:txBody>
-      </p:sp>
-      <p:sp>
-        <p:nvSpPr>
-          <p:cNvPr id="17" name="TextBox 16"/>
-          <p:cNvSpPr txBox="1"/>
-          <p:nvPr/>
-        </p:nvSpPr>
-        <p:spPr>
-          <a:xfrm>
-            <a:off x="6429603" y="2881376"/>
-            <a:ext cx="5286603" cy="1005840"/>
-          </a:xfrm>
-          <a:prstGeom prst="rect">
-            <a:avLst/>
-          </a:prstGeom>
-          <a:noFill/>
-        </p:spPr>
-        <p:txBody lIns="50800" tIns="50800" rIns="50800" bIns="50800">
-          <a:bodyPr wrap="square">
-            <a:spAutoFit/>
-          </a:bodyPr>
-          <a:lstStyle/>
-          <a:p>
-            <a:pPr algn="l"/>
-            <a:r>
-              <a:rPr sz="1500">
-                <a:solidFill>
-                  <a:srgbClr val="D8EAFF"/>
-                </a:solidFill>
-              </a:rPr>
-              <a:t>Análisis, valoración y adquisición de carteras de deuda fallida para maximizar la recuperación de activos.</a:t>
-            </a:r>
-          </a:p>
-        </p:txBody>
-      </p:sp>
-      <p:sp>
-        <p:nvSpPr>
-          <p:cNvPr id="18" name="Rectangle 17"/>
-          <p:cNvSpPr/>
-          <p:nvPr/>
-        </p:nvSpPr>
-        <p:spPr>
-          <a:xfrm>
-            <a:off x="502920" y="4059936"/>
-            <a:ext cx="5579211" cy="1993392"/>
-          </a:xfrm>
-          <a:prstGeom prst="rect">
-            <a:avLst/>
-          </a:prstGeom>
-          <a:solidFill>
-            <a:srgbClr val="081438"/>
-          </a:solidFill>
-          <a:ln w="12700">
-            <a:solidFill>
-              <a:srgbClr val="2FDFE5"/>
-            </a:solidFill>
-          </a:ln>
-        </p:spPr>
-        <p:style>
-          <a:lnRef idx="1">
-            <a:schemeClr val="accent1"/>
-          </a:lnRef>
-          <a:fillRef idx="3">
-            <a:schemeClr val="accent1"/>
-          </a:fillRef>
-          <a:effectRef idx="2">
-            <a:schemeClr val="accent1"/>
-          </a:effectRef>
-          <a:fontRef idx="minor">
-            <a:schemeClr val="lt1"/>
-          </a:fontRef>
-        </p:style>
-        <p:txBody>
-          <a:bodyPr rtlCol="0" anchor="ctr"/>
-          <a:lstStyle/>
-          <a:p>
-            <a:pPr algn="ctr"/>
-          </a:p>
-        </p:txBody>
-      </p:sp>
-      <p:sp>
-        <p:nvSpPr>
-          <p:cNvPr id="19" name="Rectangle 18"/>
-          <p:cNvSpPr/>
-          <p:nvPr/>
-        </p:nvSpPr>
-        <p:spPr>
-          <a:xfrm>
-            <a:off x="502920" y="4059936"/>
-            <a:ext cx="5579211" cy="63500"/>
-          </a:xfrm>
-          <a:prstGeom prst="rect">
-            <a:avLst/>
-          </a:prstGeom>
-          <a:solidFill>
-            <a:srgbClr val="2FDFE5"/>
-          </a:solidFill>
-          <a:ln>
-            <a:noFill/>
-          </a:ln>
-        </p:spPr>
-        <p:style>
-          <a:lnRef idx="1">
-            <a:schemeClr val="accent1"/>
-          </a:lnRef>
-          <a:fillRef idx="3">
-            <a:schemeClr val="accent1"/>
-          </a:fillRef>
-          <a:effectRef idx="2">
-            <a:schemeClr val="accent1"/>
-          </a:effectRef>
-          <a:fontRef idx="minor">
-            <a:schemeClr val="lt1"/>
-          </a:fontRef>
-        </p:style>
-        <p:txBody>
-          <a:bodyPr rtlCol="0" anchor="ctr"/>
-          <a:lstStyle/>
-          <a:p>
-            <a:pPr algn="ctr"/>
-          </a:p>
-        </p:txBody>
-      </p:sp>
-      <p:sp>
-        <p:nvSpPr>
-          <p:cNvPr id="20" name="TextBox 19"/>
-          <p:cNvSpPr txBox="1"/>
-          <p:nvPr/>
-        </p:nvSpPr>
-        <p:spPr>
-          <a:xfrm>
-            <a:off x="685800" y="4242816"/>
-            <a:ext cx="5213451" cy="585216"/>
-          </a:xfrm>
-          <a:prstGeom prst="rect">
-            <a:avLst/>
-          </a:prstGeom>
-          <a:noFill/>
-        </p:spPr>
-        <p:txBody lIns="38100" tIns="63500" rIns="38100" bIns="25400">
-          <a:bodyPr wrap="square">
-            <a:spAutoFit/>
-          </a:bodyPr>
-          <a:lstStyle/>
-          <a:p>
-            <a:pPr algn="l"/>
-            <a:r>
-              <a:rPr sz="1700" b="1">
-                <a:solidFill>
-                  <a:srgbClr val="2FDFE5"/>
-                </a:solidFill>
-              </a:rPr>
-              <a:t>3  </a:t>
-            </a:r>
-            <a:r>
-              <a:rPr sz="1700" b="1">
-                <a:solidFill>
-                  <a:srgbClr val="FFFFFF"/>
-                </a:solidFill>
-              </a:rPr>
-              <a:t>Análisis de solvencia</a:t>
-            </a:r>
-          </a:p>
-        </p:txBody>
-      </p:sp>
-      <p:sp>
-        <p:nvSpPr>
-          <p:cNvPr id="21" name="Rectangle 20"/>
-          <p:cNvSpPr/>
-          <p:nvPr/>
-        </p:nvSpPr>
-        <p:spPr>
-          <a:xfrm>
-            <a:off x="649224" y="4919472"/>
-            <a:ext cx="5286603" cy="19050"/>
-          </a:xfrm>
-          <a:prstGeom prst="rect">
-            <a:avLst/>
-          </a:prstGeom>
-          <a:solidFill>
-            <a:srgbClr val="13B9BF"/>
-          </a:solidFill>
-          <a:ln>
-            <a:noFill/>
-          </a:ln>
-        </p:spPr>
-        <p:style>
-          <a:lnRef idx="1">
-            <a:schemeClr val="accent1"/>
-          </a:lnRef>
-          <a:fillRef idx="3">
-            <a:schemeClr val="accent1"/>
-          </a:fillRef>
-          <a:effectRef idx="2">
-            <a:schemeClr val="accent1"/>
-          </a:effectRef>
-          <a:fontRef idx="minor">
-            <a:schemeClr val="lt1"/>
-          </a:fontRef>
-        </p:style>
-        <p:txBody>
-          <a:bodyPr rtlCol="0" anchor="ctr"/>
-          <a:lstStyle/>
-          <a:p>
-            <a:pPr algn="ctr"/>
-          </a:p>
-        </p:txBody>
-      </p:sp>
-      <p:sp>
-        <p:nvSpPr>
-          <p:cNvPr id="22" name="TextBox 21"/>
-          <p:cNvSpPr txBox="1"/>
-          <p:nvPr/>
-        </p:nvSpPr>
-        <p:spPr>
-          <a:xfrm>
-            <a:off x="649224" y="5021072"/>
-            <a:ext cx="5286603" cy="1005840"/>
-          </a:xfrm>
-          <a:prstGeom prst="rect">
-            <a:avLst/>
-          </a:prstGeom>
-          <a:noFill/>
-        </p:spPr>
-        <p:txBody lIns="50800" tIns="50800" rIns="50800" bIns="50800">
-          <a:bodyPr wrap="square">
-            <a:spAutoFit/>
-          </a:bodyPr>
-          <a:lstStyle/>
-          <a:p>
-            <a:pPr algn="l"/>
-            <a:r>
-              <a:rPr sz="1500">
-                <a:solidFill>
-                  <a:srgbClr val="D8EAFF"/>
-                </a:solidFill>
-              </a:rPr>
-              <a:t>Estudio de la capacidad económica real del deudor para orientar mejor la estrategia de recobro.</a:t>
-            </a:r>
-          </a:p>
-        </p:txBody>
-      </p:sp>
-      <p:sp>
-        <p:nvSpPr>
-          <p:cNvPr id="23" name="Rectangle 22"/>
-          <p:cNvSpPr/>
-          <p:nvPr/>
-        </p:nvSpPr>
-        <p:spPr>
-          <a:xfrm>
-            <a:off x="6283299" y="4059936"/>
-            <a:ext cx="5579211" cy="1993392"/>
-          </a:xfrm>
-          <a:prstGeom prst="rect">
-            <a:avLst/>
-          </a:prstGeom>
-          <a:solidFill>
-            <a:srgbClr val="081438"/>
-          </a:solidFill>
-          <a:ln w="12700">
-            <a:solidFill>
-              <a:srgbClr val="2FDFE5"/>
-            </a:solidFill>
-          </a:ln>
-        </p:spPr>
-        <p:style>
-          <a:lnRef idx="1">
-            <a:schemeClr val="accent1"/>
-          </a:lnRef>
-          <a:fillRef idx="3">
-            <a:schemeClr val="accent1"/>
-          </a:fillRef>
-          <a:effectRef idx="2">
-            <a:schemeClr val="accent1"/>
-          </a:effectRef>
-          <a:fontRef idx="minor">
-            <a:schemeClr val="lt1"/>
-          </a:fontRef>
-        </p:style>
-        <p:txBody>
-          <a:bodyPr rtlCol="0" anchor="ctr"/>
-          <a:lstStyle/>
-          <a:p>
-            <a:pPr algn="ctr"/>
-          </a:p>
-        </p:txBody>
-      </p:sp>
-      <p:sp>
-        <p:nvSpPr>
-          <p:cNvPr id="24" name="Rectangle 23"/>
-          <p:cNvSpPr/>
-          <p:nvPr/>
-        </p:nvSpPr>
-        <p:spPr>
-          <a:xfrm>
-            <a:off x="6283299" y="4059936"/>
-            <a:ext cx="5579211" cy="63500"/>
-          </a:xfrm>
-          <a:prstGeom prst="rect">
-            <a:avLst/>
-          </a:prstGeom>
-          <a:solidFill>
-            <a:srgbClr val="2FDFE5"/>
-          </a:solidFill>
-          <a:ln>
-            <a:noFill/>
-          </a:ln>
-        </p:spPr>
-        <p:style>
-          <a:lnRef idx="1">
-            <a:schemeClr val="accent1"/>
-          </a:lnRef>
-          <a:fillRef idx="3">
-            <a:schemeClr val="accent1"/>
-          </a:fillRef>
-          <a:effectRef idx="2">
-            <a:schemeClr val="accent1"/>
-          </a:effectRef>
-          <a:fontRef idx="minor">
-            <a:schemeClr val="lt1"/>
-          </a:fontRef>
-        </p:style>
-        <p:txBody>
-          <a:bodyPr rtlCol="0" anchor="ctr"/>
-          <a:lstStyle/>
-          <a:p>
-            <a:pPr algn="ctr"/>
-          </a:p>
-        </p:txBody>
-      </p:sp>
-      <p:sp>
-        <p:nvSpPr>
-          <p:cNvPr id="25" name="TextBox 24"/>
-          <p:cNvSpPr txBox="1"/>
-          <p:nvPr/>
-        </p:nvSpPr>
-        <p:spPr>
-          <a:xfrm>
-            <a:off x="6466179" y="4242816"/>
-            <a:ext cx="5213451" cy="585216"/>
-          </a:xfrm>
-          <a:prstGeom prst="rect">
-            <a:avLst/>
-          </a:prstGeom>
-          <a:noFill/>
-        </p:spPr>
-        <p:txBody lIns="38100" tIns="63500" rIns="38100" bIns="25400">
-          <a:bodyPr wrap="square">
-            <a:spAutoFit/>
-          </a:bodyPr>
-          <a:lstStyle/>
-          <a:p>
-            <a:pPr algn="l"/>
-            <a:r>
-              <a:rPr sz="1700" b="1">
-                <a:solidFill>
-                  <a:srgbClr val="2FDFE5"/>
-                </a:solidFill>
-              </a:rPr>
-              <a:t>4  </a:t>
-            </a:r>
-            <a:r>
-              <a:rPr sz="1700" b="1">
-                <a:solidFill>
-                  <a:srgbClr val="FFFFFF"/>
-                </a:solidFill>
-              </a:rPr>
-              <a:t>Sello preventivo Sendacredit</a:t>
-            </a:r>
-          </a:p>
-        </p:txBody>
-      </p:sp>
-      <p:sp>
-        <p:nvSpPr>
-          <p:cNvPr id="26" name="Rectangle 25"/>
-          <p:cNvSpPr/>
-          <p:nvPr/>
-        </p:nvSpPr>
-        <p:spPr>
-          <a:xfrm>
-            <a:off x="6429603" y="4919472"/>
-            <a:ext cx="5286603" cy="19050"/>
-          </a:xfrm>
-          <a:prstGeom prst="rect">
-            <a:avLst/>
-          </a:prstGeom>
-          <a:solidFill>
-            <a:srgbClr val="13B9BF"/>
-          </a:solidFill>
-          <a:ln>
-            <a:noFill/>
-          </a:ln>
-        </p:spPr>
-        <p:style>
-          <a:lnRef idx="1">
-            <a:schemeClr val="accent1"/>
-          </a:lnRef>
-          <a:fillRef idx="3">
-            <a:schemeClr val="accent1"/>
-          </a:fillRef>
-          <a:effectRef idx="2">
-            <a:schemeClr val="accent1"/>
-          </a:effectRef>
-          <a:fontRef idx="minor">
-            <a:schemeClr val="lt1"/>
-          </a:fontRef>
-        </p:style>
-        <p:txBody>
-          <a:bodyPr rtlCol="0" anchor="ctr"/>
-          <a:lstStyle/>
-          <a:p>
-            <a:pPr algn="ctr"/>
-          </a:p>
-        </p:txBody>
-      </p:sp>
-      <p:sp>
-        <p:nvSpPr>
-          <p:cNvPr id="27" name="TextBox 26"/>
-          <p:cNvSpPr txBox="1"/>
-          <p:nvPr/>
-        </p:nvSpPr>
-        <p:spPr>
-          <a:xfrm>
-            <a:off x="6429603" y="5021072"/>
-            <a:ext cx="4079595" cy="1005840"/>
-          </a:xfrm>
-          <a:prstGeom prst="rect">
-            <a:avLst/>
-          </a:prstGeom>
-          <a:noFill/>
-        </p:spPr>
-        <p:txBody lIns="50800" tIns="50800" rIns="50800" bIns="50800">
-          <a:bodyPr wrap="square">
-            <a:spAutoFit/>
-          </a:bodyPr>
-          <a:lstStyle/>
-          <a:p>
-            <a:pPr algn="l"/>
-            <a:r>
-              <a:rPr sz="1500">
-                <a:solidFill>
-                  <a:srgbClr val="D8EAFF"/>
-                </a:solidFill>
-              </a:rPr>
-              <a:t>Siéntase protegido frente a sus impagados.</a:t>
-            </a:r>
-          </a:p>
-        </p:txBody>
-      </p:sp>
-      <p:pic>
-        <p:nvPicPr>
-          <p:cNvPr id="28" name="Picture 27" descr="seal.png"/>
-          <p:cNvPicPr>
-            <a:picLocks noChangeAspect="1"/>
-          </p:cNvPicPr>
-          <p:nvPr/>
-        </p:nvPicPr>
-        <p:blipFill>
-          <a:blip r:embed="rId3"/>
-          <a:stretch>
-            <a:fillRect/>
-          </a:stretch>
-        </p:blipFill>
-        <p:spPr>
-          <a:xfrm>
-            <a:off x="10582351" y="4966208"/>
-            <a:ext cx="1115568" cy="1115568"/>
-          </a:xfrm>
-          <a:prstGeom prst="rect">
-            <a:avLst/>
-          </a:prstGeom>
-        </p:spPr>
-      </p:pic>
-    </p:spTree>
-  </p:cSld>
-  <p:clrMapOvr>
-    <a:masterClrMapping/>
-  </p:clrMapOvr>
-  <p:timing>
-    <p:tnLst>
-      <p:par>
-        <p:cTn id="1" dur="indefin" restart="whenNotActive" nodeType="tmRoot">
-          <p:childTnLst>
-            <p:seq concurrent="1" nextAc="seek">
-              <p:cTn id="2" dur="indefin" nodeType="mainSeq">
-                <p:childTnLst>
-                  <p:par>
-                    <p:cTn id="3" fill="hold">
-                      <p:stCondLst>
-                        <p:cond delay="0"/>
-                      </p:stCondLst>
-                      <p:childTnLst>
-                        <p:par>
-                          <p:cTn id="5" fill="hold">
-                            <p:stCondLst>
-                              <p:cond delay="0"/>
-                            </p:stCondLst>
-                            <p:childTnLst>
-                              <p:animEffect transition="in" filter="wipe(up)">
-                                <p:cBhvr>
-                                  <p:cTn id="6" dur="380" fill="hold"/>
-                                  <p:tgtEl>
-                                    <p:spTgt spid="8"/>
-                                  </p:tgtEl>
-                                </p:cBhvr>
-                              </p:animEffect>
-                            </p:childTnLst>
-                          </p:cTn>
-                        </p:par>
-                        <p:par>
-                          <p:cTn id="7" fill="hold">
-                            <p:stCondLst>
-                              <p:cond delay="0"/>
-                            </p:stCondLst>
-                            <p:childTnLst>
-                              <p:animEffect transition="in" filter="wipe(up)">
-                                <p:cBhvr>
-                                  <p:cTn id="8" dur="380" fill="hold"/>
-                                  <p:tgtEl>
-                                    <p:spTgt spid="9"/>
-                                  </p:tgtEl>
-                                </p:cBhvr>
-                              </p:animEffect>
-                            </p:childTnLst>
-                          </p:cTn>
-                        </p:par>
-                        <p:par>
-                          <p:cTn id="9" fill="hold">
-                            <p:stCondLst>
-                              <p:cond delay="0"/>
-                            </p:stCondLst>
-                            <p:childTnLst>
-                              <p:animEffect transition="in" filter="wipe(up)">
-                                <p:cBhvr>
-                                  <p:cTn id="10" dur="380" fill="hold"/>
-                                  <p:tgtEl>
-                                    <p:spTgt spid="10"/>
-                                  </p:tgtEl>
-                                </p:cBhvr>
-                              </p:animEffect>
-                            </p:childTnLst>
-                          </p:cTn>
-                        </p:par>
-                        <p:par>
-                          <p:cTn id="11" fill="hold">
-                            <p:stCondLst>
-                              <p:cond delay="0"/>
-                            </p:stCondLst>
-                            <p:childTnLst>
-                              <p:animEffect transition="in" filter="wipe(up)">
-                                <p:cBhvr>
-                                  <p:cTn id="12" dur="380" fill="hold"/>
-                                  <p:tgtEl>
-                                    <p:spTgt spid="11"/>
-                                  </p:tgtEl>
-                                </p:cBhvr>
-                              </p:animEffect>
-                            </p:childTnLst>
-                          </p:cTn>
-                        </p:par>
-                        <p:par>
-                          <p:cTn id="13" fill="hold">
-                            <p:stCondLst>
-                              <p:cond delay="0"/>
-                            </p:stCondLst>
-                            <p:childTnLst>
-                              <p:animEffect transition="in" filter="wipe(up)">
-                                <p:cBhvr>
-                                  <p:cTn id="14" dur="380" fill="hold"/>
-                                  <p:tgtEl>
-                                    <p:spTgt spid="12"/>
-                                  </p:tgtEl>
-                                </p:cBhvr>
-                              </p:animEffect>
-                            </p:childTnLst>
-                          </p:cTn>
-                        </p:par>
-                        <p:par>
-                          <p:cTn id="15" fill="hold">
-                            <p:stCondLst>
-                              <p:cond delay="140"/>
-                            </p:stCondLst>
-                            <p:childTnLst>
-                              <p:animEffect transition="in" filter="wipe(up)">
-                                <p:cBhvr>
-                                  <p:cTn id="16" dur="380" fill="hold"/>
-                                  <p:tgtEl>
-                                    <p:spTgt spid="13"/>
-                                  </p:tgtEl>
-                                </p:cBhvr>
-                              </p:animEffect>
-                            </p:childTnLst>
-                          </p:cTn>
-                        </p:par>
-                        <p:par>
-                          <p:cTn id="17" fill="hold">
-                            <p:stCondLst>
-                              <p:cond delay="140"/>
-                            </p:stCondLst>
-                            <p:childTnLst>
-                              <p:animEffect transition="in" filter="wipe(up)">
-                                <p:cBhvr>
-                                  <p:cTn id="18" dur="380" fill="hold"/>
-                                  <p:tgtEl>
-                                    <p:spTgt spid="14"/>
-                                  </p:tgtEl>
-                                </p:cBhvr>
-                              </p:animEffect>
-                            </p:childTnLst>
-                          </p:cTn>
-                        </p:par>
-                        <p:par>
-                          <p:cTn id="19" fill="hold">
-                            <p:stCondLst>
-                              <p:cond delay="140"/>
-                            </p:stCondLst>
-                            <p:childTnLst>
-                              <p:animEffect transition="in" filter="wipe(up)">
-                                <p:cBhvr>
-                                  <p:cTn id="20" dur="380" fill="hold"/>
-                                  <p:tgtEl>
-                                    <p:spTgt spid="15"/>
-                                  </p:tgtEl>
-                                </p:cBhvr>
-                              </p:animEffect>
-                            </p:childTnLst>
-                          </p:cTn>
-                        </p:par>
-                        <p:par>
-                          <p:cTn id="21" fill="hold">
-                            <p:stCondLst>
-                              <p:cond delay="140"/>
-                            </p:stCondLst>
-                            <p:childTnLst>
-                              <p:animEffect transition="in" filter="wipe(up)">
-                                <p:cBhvr>
-                                  <p:cTn id="22" dur="380" fill="hold"/>
-                                  <p:tgtEl>
-                                    <p:spTgt spid="16"/>
-                                  </p:tgtEl>
-                                </p:cBhvr>
-                              </p:animEffect>
-                            </p:childTnLst>
-                          </p:cTn>
-                        </p:par>
-                        <p:par>
-                          <p:cTn id="23" fill="hold">
-                            <p:stCondLst>
-                              <p:cond delay="140"/>
-                            </p:stCondLst>
-                            <p:childTnLst>
-                              <p:animEffect transition="in" filter="wipe(up)">
-                                <p:cBhvr>
-                                  <p:cTn id="24" dur="380" fill="hold"/>
-                                  <p:tgtEl>
-                                    <p:spTgt spid="17"/>
                                   </p:tgtEl>
                                 </p:cBhvr>
                               </p:animEffect>
@@ -8901,7 +9021,7 @@
                                 <p:cBhvr>
                                   <p:cTn id="26" dur="380" fill="hold"/>
                                   <p:tgtEl>
-                                    <p:spTgt spid="18"/>
+                                    <p:spTgt spid="19"/>
                                   </p:tgtEl>
                                 </p:cBhvr>
                               </p:animEffect>
@@ -8918,7 +9038,7 @@
                                 <p:cBhvr>
                                   <p:cTn id="28" dur="380" fill="hold"/>
                                   <p:tgtEl>
-                                    <p:spTgt spid="19"/>
+                                    <p:spTgt spid="20"/>
                                   </p:tgtEl>
                                 </p:cBhvr>
                               </p:animEffect>
@@ -8935,7 +9055,7 @@
                                 <p:cBhvr>
                                   <p:cTn id="30" dur="380" fill="hold"/>
                                   <p:tgtEl>
-                                    <p:spTgt spid="20"/>
+                                    <p:spTgt spid="21"/>
                                   </p:tgtEl>
                                 </p:cBhvr>
                               </p:animEffect>
@@ -8952,7 +9072,7 @@
                                 <p:cBhvr>
                                   <p:cTn id="32" dur="380" fill="hold"/>
                                   <p:tgtEl>
-                                    <p:spTgt spid="21"/>
+                                    <p:spTgt spid="22"/>
                                   </p:tgtEl>
                                 </p:cBhvr>
                               </p:animEffect>
@@ -8969,7 +9089,7 @@
                                 <p:cBhvr>
                                   <p:cTn id="34" dur="380" fill="hold"/>
                                   <p:tgtEl>
-                                    <p:spTgt spid="22"/>
+                                    <p:spTgt spid="23"/>
                                   </p:tgtEl>
                                 </p:cBhvr>
                               </p:animEffect>
@@ -8986,7 +9106,7 @@
                                 <p:cBhvr>
                                   <p:cTn id="36" dur="380" fill="hold"/>
                                   <p:tgtEl>
-                                    <p:spTgt spid="23"/>
+                                    <p:spTgt spid="24"/>
                                   </p:tgtEl>
                                 </p:cBhvr>
                               </p:animEffect>
@@ -9003,7 +9123,7 @@
                                 <p:cBhvr>
                                   <p:cTn id="38" dur="380" fill="hold"/>
                                   <p:tgtEl>
-                                    <p:spTgt spid="24"/>
+                                    <p:spTgt spid="25"/>
                                   </p:tgtEl>
                                 </p:cBhvr>
                               </p:animEffect>
@@ -9020,7 +9140,7 @@
                                 <p:cBhvr>
                                   <p:cTn id="40" dur="380" fill="hold"/>
                                   <p:tgtEl>
-                                    <p:spTgt spid="25"/>
+                                    <p:spTgt spid="26"/>
                                   </p:tgtEl>
                                 </p:cBhvr>
                               </p:animEffect>
@@ -9037,7 +9157,7 @@
                                 <p:cBhvr>
                                   <p:cTn id="42" dur="380" fill="hold"/>
                                   <p:tgtEl>
-                                    <p:spTgt spid="26"/>
+                                    <p:spTgt spid="27"/>
                                   </p:tgtEl>
                                 </p:cBhvr>
                               </p:animEffect>
@@ -9054,7 +9174,7 @@
                                 <p:cBhvr>
                                   <p:cTn id="44" dur="380" fill="hold"/>
                                   <p:tgtEl>
-                                    <p:spTgt spid="27"/>
+                                    <p:spTgt spid="28"/>
                                   </p:tgtEl>
                                 </p:cBhvr>
                               </p:animEffect>
@@ -9206,7 +9326,7 @@
       </p:sp>
       <p:pic>
         <p:nvPicPr>
-          <p:cNvPr id="5" name="Picture 4" descr="logo_round.png"/>
+          <p:cNvPr id="5" name="Picture 4" descr="logo_round_bright.png"/>
           <p:cNvPicPr>
             <a:picLocks noChangeAspect="1"/>
           </p:cNvPicPr>

--- a/sendacredit_propuesta.pptx
+++ b/sendacredit_propuesta.pptx
@@ -3478,7 +3478,7 @@
       <p:grpSpPr/>
       <p:pic>
         <p:nvPicPr>
-          <p:cNvPr id="2" name="Picture 1" descr="content_bg_nolog.png"/>
+          <p:cNvPr id="2" name="Picture 1" descr="content_bg.png"/>
           <p:cNvPicPr>
             <a:picLocks noChangeAspect="1"/>
           </p:cNvPicPr>
@@ -3586,33 +3586,9 @@
           </a:p>
         </p:txBody>
       </p:sp>
-      <p:pic>
-        <p:nvPicPr>
-          <p:cNvPr id="5" name="Picture 4" descr="logo_round_bright.png"/>
-          <p:cNvPicPr>
-            <a:picLocks noChangeAspect="1"/>
-          </p:cNvPicPr>
-          <p:nvPr/>
-        </p:nvPicPr>
-        <p:blipFill>
-          <a:blip r:embed="rId3"/>
-          <a:stretch>
-            <a:fillRect/>
-          </a:stretch>
-        </p:blipFill>
-        <p:spPr>
-          <a:xfrm>
-            <a:off x="91440" y="54864"/>
-            <a:ext cx="1463040" cy="848563"/>
-          </a:xfrm>
-          <a:prstGeom prst="rect">
-            <a:avLst/>
-          </a:prstGeom>
-        </p:spPr>
-      </p:pic>
-      <p:sp>
-        <p:nvSpPr>
-          <p:cNvPr id="6" name="Rectangle 5"/>
+      <p:sp>
+        <p:nvSpPr>
+          <p:cNvPr id="5" name="Rectangle 4"/>
           <p:cNvSpPr/>
           <p:nvPr/>
         </p:nvSpPr>
@@ -3663,7 +3639,7 @@
       </p:sp>
       <p:sp>
         <p:nvSpPr>
-          <p:cNvPr id="7" name="TextBox 6"/>
+          <p:cNvPr id="6" name="TextBox 5"/>
           <p:cNvSpPr txBox="1"/>
           <p:nvPr/>
         </p:nvSpPr>
@@ -3705,7 +3681,7 @@
       </p:sp>
       <p:sp>
         <p:nvSpPr>
-          <p:cNvPr id="8" name="Rectangle 7"/>
+          <p:cNvPr id="7" name="Rectangle 6"/>
           <p:cNvSpPr/>
           <p:nvPr/>
         </p:nvSpPr>
@@ -3748,7 +3724,7 @@
       </p:sp>
       <p:sp>
         <p:nvSpPr>
-          <p:cNvPr id="9" name="TextBox 8"/>
+          <p:cNvPr id="8" name="TextBox 7"/>
           <p:cNvSpPr txBox="1"/>
           <p:nvPr/>
         </p:nvSpPr>
@@ -3782,7 +3758,7 @@
       </p:sp>
       <p:sp>
         <p:nvSpPr>
-          <p:cNvPr id="10" name="Rectangle 9"/>
+          <p:cNvPr id="9" name="Rectangle 8"/>
           <p:cNvSpPr/>
           <p:nvPr/>
         </p:nvSpPr>
@@ -3827,7 +3803,7 @@
       </p:sp>
       <p:sp>
         <p:nvSpPr>
-          <p:cNvPr id="11" name="Rectangle 10"/>
+          <p:cNvPr id="10" name="Rectangle 9"/>
           <p:cNvSpPr/>
           <p:nvPr/>
         </p:nvSpPr>
@@ -3870,7 +3846,7 @@
       </p:sp>
       <p:sp>
         <p:nvSpPr>
-          <p:cNvPr id="12" name="TextBox 11"/>
+          <p:cNvPr id="11" name="TextBox 10"/>
           <p:cNvSpPr txBox="1"/>
           <p:nvPr/>
         </p:nvSpPr>
@@ -3912,7 +3888,7 @@
       </p:sp>
       <p:sp>
         <p:nvSpPr>
-          <p:cNvPr id="13" name="Rectangle 12"/>
+          <p:cNvPr id="12" name="Rectangle 11"/>
           <p:cNvSpPr/>
           <p:nvPr/>
         </p:nvSpPr>
@@ -3955,7 +3931,7 @@
       </p:sp>
       <p:sp>
         <p:nvSpPr>
-          <p:cNvPr id="14" name="TextBox 13"/>
+          <p:cNvPr id="13" name="TextBox 12"/>
           <p:cNvSpPr txBox="1"/>
           <p:nvPr/>
         </p:nvSpPr>
@@ -4047,7 +4023,7 @@
       </p:sp>
       <p:sp>
         <p:nvSpPr>
-          <p:cNvPr id="15" name="Rectangle 14"/>
+          <p:cNvPr id="14" name="Rectangle 13"/>
           <p:cNvSpPr/>
           <p:nvPr/>
         </p:nvSpPr>
@@ -4092,7 +4068,7 @@
       </p:sp>
       <p:sp>
         <p:nvSpPr>
-          <p:cNvPr id="16" name="Rectangle 15"/>
+          <p:cNvPr id="15" name="Rectangle 14"/>
           <p:cNvSpPr/>
           <p:nvPr/>
         </p:nvSpPr>
@@ -4135,7 +4111,7 @@
       </p:sp>
       <p:sp>
         <p:nvSpPr>
-          <p:cNvPr id="17" name="TextBox 16"/>
+          <p:cNvPr id="16" name="TextBox 15"/>
           <p:cNvSpPr txBox="1"/>
           <p:nvPr/>
         </p:nvSpPr>
@@ -4177,7 +4153,7 @@
       </p:sp>
       <p:sp>
         <p:nvSpPr>
-          <p:cNvPr id="18" name="Rectangle 17"/>
+          <p:cNvPr id="17" name="Rectangle 16"/>
           <p:cNvSpPr/>
           <p:nvPr/>
         </p:nvSpPr>
@@ -4220,7 +4196,7 @@
       </p:sp>
       <p:sp>
         <p:nvSpPr>
-          <p:cNvPr id="19" name="TextBox 18"/>
+          <p:cNvPr id="18" name="TextBox 17"/>
           <p:cNvSpPr txBox="1"/>
           <p:nvPr/>
         </p:nvSpPr>
@@ -4310,4518 +4286,6 @@
           </a:p>
         </p:txBody>
       </p:sp>
-    </p:spTree>
-  </p:cSld>
-  <p:clrMapOvr>
-    <a:masterClrMapping/>
-  </p:clrMapOvr>
-  <p:timing>
-    <p:tnLst>
-      <p:par>
-        <p:cTn id="1" dur="indefin" restart="whenNotActive" nodeType="tmRoot">
-          <p:childTnLst>
-            <p:seq concurrent="1" nextAc="seek">
-              <p:cTn id="2" dur="indefin" nodeType="mainSeq">
-                <p:childTnLst>
-                  <p:par>
-                    <p:cTn id="3" fill="hold">
-                      <p:stCondLst>
-                        <p:cond delay="0"/>
-                      </p:stCondLst>
-                      <p:childTnLst>
-                        <p:par>
-                          <p:cTn id="5" fill="hold">
-                            <p:stCondLst>
-                              <p:cond delay="0"/>
-                            </p:stCondLst>
-                            <p:childTnLst>
-                              <p:animEffect transition="in" filter="wipe(up)">
-                                <p:cBhvr>
-                                  <p:cTn id="6" dur="380" fill="hold"/>
-                                  <p:tgtEl>
-                                    <p:spTgt spid="10"/>
-                                  </p:tgtEl>
-                                </p:cBhvr>
-                              </p:animEffect>
-                            </p:childTnLst>
-                          </p:cTn>
-                        </p:par>
-                        <p:par>
-                          <p:cTn id="7" fill="hold">
-                            <p:stCondLst>
-                              <p:cond delay="0"/>
-                            </p:stCondLst>
-                            <p:childTnLst>
-                              <p:animEffect transition="in" filter="wipe(up)">
-                                <p:cBhvr>
-                                  <p:cTn id="8" dur="380" fill="hold"/>
-                                  <p:tgtEl>
-                                    <p:spTgt spid="11"/>
-                                  </p:tgtEl>
-                                </p:cBhvr>
-                              </p:animEffect>
-                            </p:childTnLst>
-                          </p:cTn>
-                        </p:par>
-                        <p:par>
-                          <p:cTn id="9" fill="hold">
-                            <p:stCondLst>
-                              <p:cond delay="0"/>
-                            </p:stCondLst>
-                            <p:childTnLst>
-                              <p:animEffect transition="in" filter="wipe(up)">
-                                <p:cBhvr>
-                                  <p:cTn id="10" dur="380" fill="hold"/>
-                                  <p:tgtEl>
-                                    <p:spTgt spid="12"/>
-                                  </p:tgtEl>
-                                </p:cBhvr>
-                              </p:animEffect>
-                            </p:childTnLst>
-                          </p:cTn>
-                        </p:par>
-                        <p:par>
-                          <p:cTn id="11" fill="hold">
-                            <p:stCondLst>
-                              <p:cond delay="0"/>
-                            </p:stCondLst>
-                            <p:childTnLst>
-                              <p:animEffect transition="in" filter="wipe(up)">
-                                <p:cBhvr>
-                                  <p:cTn id="12" dur="380" fill="hold"/>
-                                  <p:tgtEl>
-                                    <p:spTgt spid="13"/>
-                                  </p:tgtEl>
-                                </p:cBhvr>
-                              </p:animEffect>
-                            </p:childTnLst>
-                          </p:cTn>
-                        </p:par>
-                        <p:par>
-                          <p:cTn id="13" fill="hold">
-                            <p:stCondLst>
-                              <p:cond delay="0"/>
-                            </p:stCondLst>
-                            <p:childTnLst>
-                              <p:animEffect transition="in" filter="wipe(up)">
-                                <p:cBhvr>
-                                  <p:cTn id="14" dur="380" fill="hold"/>
-                                  <p:tgtEl>
-                                    <p:spTgt spid="14"/>
-                                  </p:tgtEl>
-                                </p:cBhvr>
-                              </p:animEffect>
-                            </p:childTnLst>
-                          </p:cTn>
-                        </p:par>
-                        <p:par>
-                          <p:cTn id="15" fill="hold">
-                            <p:stCondLst>
-                              <p:cond delay="160"/>
-                            </p:stCondLst>
-                            <p:childTnLst>
-                              <p:animEffect transition="in" filter="wipe(up)">
-                                <p:cBhvr>
-                                  <p:cTn id="16" dur="380" fill="hold"/>
-                                  <p:tgtEl>
-                                    <p:spTgt spid="15"/>
-                                  </p:tgtEl>
-                                </p:cBhvr>
-                              </p:animEffect>
-                            </p:childTnLst>
-                          </p:cTn>
-                        </p:par>
-                        <p:par>
-                          <p:cTn id="17" fill="hold">
-                            <p:stCondLst>
-                              <p:cond delay="160"/>
-                            </p:stCondLst>
-                            <p:childTnLst>
-                              <p:animEffect transition="in" filter="wipe(up)">
-                                <p:cBhvr>
-                                  <p:cTn id="18" dur="380" fill="hold"/>
-                                  <p:tgtEl>
-                                    <p:spTgt spid="16"/>
-                                  </p:tgtEl>
-                                </p:cBhvr>
-                              </p:animEffect>
-                            </p:childTnLst>
-                          </p:cTn>
-                        </p:par>
-                        <p:par>
-                          <p:cTn id="19" fill="hold">
-                            <p:stCondLst>
-                              <p:cond delay="160"/>
-                            </p:stCondLst>
-                            <p:childTnLst>
-                              <p:animEffect transition="in" filter="wipe(up)">
-                                <p:cBhvr>
-                                  <p:cTn id="20" dur="380" fill="hold"/>
-                                  <p:tgtEl>
-                                    <p:spTgt spid="17"/>
-                                  </p:tgtEl>
-                                </p:cBhvr>
-                              </p:animEffect>
-                            </p:childTnLst>
-                          </p:cTn>
-                        </p:par>
-                        <p:par>
-                          <p:cTn id="21" fill="hold">
-                            <p:stCondLst>
-                              <p:cond delay="160"/>
-                            </p:stCondLst>
-                            <p:childTnLst>
-                              <p:animEffect transition="in" filter="wipe(up)">
-                                <p:cBhvr>
-                                  <p:cTn id="22" dur="380" fill="hold"/>
-                                  <p:tgtEl>
-                                    <p:spTgt spid="18"/>
-                                  </p:tgtEl>
-                                </p:cBhvr>
-                              </p:animEffect>
-                            </p:childTnLst>
-                          </p:cTn>
-                        </p:par>
-                        <p:par>
-                          <p:cTn id="23" fill="hold">
-                            <p:stCondLst>
-                              <p:cond delay="160"/>
-                            </p:stCondLst>
-                            <p:childTnLst>
-                              <p:animEffect transition="in" filter="wipe(up)">
-                                <p:cBhvr>
-                                  <p:cTn id="24" dur="380" fill="hold"/>
-                                  <p:tgtEl>
-                                    <p:spTgt spid="19"/>
-                                  </p:tgtEl>
-                                </p:cBhvr>
-                              </p:animEffect>
-                            </p:childTnLst>
-                          </p:cTn>
-                        </p:par>
-                      </p:childTnLst>
-                    </p:cTn>
-                  </p:par>
-                </p:childTnLst>
-              </p:cTn>
-              <p:prevCondLst>
-                <p:cond evt="onPrevClick" delay="0"/>
-              </p:prevCondLst>
-              <p:nextCondLst>
-                <p:cond evt="onNextClick" delay="0"/>
-              </p:nextCondLst>
-            </p:seq>
-          </p:childTnLst>
-        </p:cTn>
-      </p:par>
-    </p:tnLst>
-  </p:timing>
-  <p:transition dur="550" spd="fast">
-    <p:push dir="u"/>
-  </p:transition>
-</p:sld>
-</file>
-
-<file path=ppt/slides/slide3.xml><?xml version="1.0" encoding="utf-8"?>
-<p:sld xmlns:a="http://schemas.openxmlformats.org/drawingml/2006/main" xmlns:p="http://schemas.openxmlformats.org/presentationml/2006/main" xmlns:r="http://schemas.openxmlformats.org/officeDocument/2006/relationships">
-  <p:cSld>
-    <p:spTree>
-      <p:nvGrpSpPr>
-        <p:cNvPr id="1" name=""/>
-        <p:cNvGrpSpPr/>
-        <p:nvPr/>
-      </p:nvGrpSpPr>
-      <p:grpSpPr/>
-      <p:pic>
-        <p:nvPicPr>
-          <p:cNvPr id="2" name="Picture 1" descr="content_bg_nolog.png"/>
-          <p:cNvPicPr>
-            <a:picLocks noChangeAspect="1"/>
-          </p:cNvPicPr>
-          <p:nvPr/>
-        </p:nvPicPr>
-        <p:blipFill>
-          <a:blip r:embed="rId2"/>
-          <a:stretch>
-            <a:fillRect/>
-          </a:stretch>
-        </p:blipFill>
-        <p:spPr>
-          <a:xfrm>
-            <a:off x="0" y="0"/>
-            <a:ext cx="12191695" cy="6858000"/>
-          </a:xfrm>
-          <a:prstGeom prst="rect">
-            <a:avLst/>
-          </a:prstGeom>
-        </p:spPr>
-      </p:pic>
-      <p:sp>
-        <p:nvSpPr>
-          <p:cNvPr id="3" name="Rectangle 2"/>
-          <p:cNvSpPr/>
-          <p:nvPr/>
-        </p:nvSpPr>
-        <p:spPr>
-          <a:xfrm>
-            <a:off x="0" y="0"/>
-            <a:ext cx="12191695" cy="50800"/>
-          </a:xfrm>
-          <a:prstGeom prst="rect">
-            <a:avLst/>
-          </a:prstGeom>
-          <a:solidFill>
-            <a:srgbClr val="2FDFE5"/>
-          </a:solidFill>
-          <a:ln>
-            <a:noFill/>
-          </a:ln>
-        </p:spPr>
-        <p:style>
-          <a:lnRef idx="1">
-            <a:schemeClr val="accent1"/>
-          </a:lnRef>
-          <a:fillRef idx="3">
-            <a:schemeClr val="accent1"/>
-          </a:fillRef>
-          <a:effectRef idx="2">
-            <a:schemeClr val="accent1"/>
-          </a:effectRef>
-          <a:fontRef idx="minor">
-            <a:schemeClr val="lt1"/>
-          </a:fontRef>
-        </p:style>
-        <p:txBody>
-          <a:bodyPr rtlCol="0" anchor="ctr"/>
-          <a:lstStyle/>
-          <a:p>
-            <a:pPr algn="ctr"/>
-          </a:p>
-        </p:txBody>
-      </p:sp>
-      <p:sp>
-        <p:nvSpPr>
-          <p:cNvPr id="4" name="Rectangle 3"/>
-          <p:cNvSpPr/>
-          <p:nvPr/>
-        </p:nvSpPr>
-        <p:spPr>
-          <a:xfrm>
-            <a:off x="0" y="0"/>
-            <a:ext cx="63500" cy="6858000"/>
-          </a:xfrm>
-          <a:prstGeom prst="rect">
-            <a:avLst/>
-          </a:prstGeom>
-          <a:solidFill>
-            <a:srgbClr val="13B9BF"/>
-          </a:solidFill>
-          <a:ln>
-            <a:noFill/>
-          </a:ln>
-        </p:spPr>
-        <p:style>
-          <a:lnRef idx="1">
-            <a:schemeClr val="accent1"/>
-          </a:lnRef>
-          <a:fillRef idx="3">
-            <a:schemeClr val="accent1"/>
-          </a:fillRef>
-          <a:effectRef idx="2">
-            <a:schemeClr val="accent1"/>
-          </a:effectRef>
-          <a:fontRef idx="minor">
-            <a:schemeClr val="lt1"/>
-          </a:fontRef>
-        </p:style>
-        <p:txBody>
-          <a:bodyPr rtlCol="0" anchor="ctr"/>
-          <a:lstStyle/>
-          <a:p>
-            <a:pPr algn="ctr"/>
-          </a:p>
-        </p:txBody>
-      </p:sp>
-      <p:pic>
-        <p:nvPicPr>
-          <p:cNvPr id="5" name="Picture 4" descr="logo_round_bright.png"/>
-          <p:cNvPicPr>
-            <a:picLocks noChangeAspect="1"/>
-          </p:cNvPicPr>
-          <p:nvPr/>
-        </p:nvPicPr>
-        <p:blipFill>
-          <a:blip r:embed="rId3"/>
-          <a:stretch>
-            <a:fillRect/>
-          </a:stretch>
-        </p:blipFill>
-        <p:spPr>
-          <a:xfrm>
-            <a:off x="91440" y="54864"/>
-            <a:ext cx="1463040" cy="848563"/>
-          </a:xfrm>
-          <a:prstGeom prst="rect">
-            <a:avLst/>
-          </a:prstGeom>
-        </p:spPr>
-      </p:pic>
-      <p:sp>
-        <p:nvSpPr>
-          <p:cNvPr id="6" name="Rectangle 5"/>
-          <p:cNvSpPr/>
-          <p:nvPr/>
-        </p:nvSpPr>
-        <p:spPr>
-          <a:xfrm>
-            <a:off x="502920" y="365760"/>
-            <a:ext cx="1737360" cy="301752"/>
-          </a:xfrm>
-          <a:prstGeom prst="rect">
-            <a:avLst/>
-          </a:prstGeom>
-          <a:solidFill>
-            <a:srgbClr val="2FDFE5"/>
-          </a:solidFill>
-          <a:ln>
-            <a:noFill/>
-          </a:ln>
-        </p:spPr>
-        <p:style>
-          <a:lnRef idx="1">
-            <a:schemeClr val="accent1"/>
-          </a:lnRef>
-          <a:fillRef idx="3">
-            <a:schemeClr val="accent1"/>
-          </a:fillRef>
-          <a:effectRef idx="2">
-            <a:schemeClr val="accent1"/>
-          </a:effectRef>
-          <a:fontRef idx="minor">
-            <a:schemeClr val="lt1"/>
-          </a:fontRef>
-        </p:style>
-        <p:txBody lIns="101600" tIns="25400" rIns="101600" bIns="25400">
-          <a:bodyPr rtlCol="0" anchor="ctr" wrap="none"/>
-          <a:lstStyle/>
-          <a:p>
-            <a:pPr algn="ctr"/>
-            <a:r>
-              <a:rPr sz="1100" b="1">
-                <a:solidFill>
-                  <a:srgbClr val="0A1638"/>
-                </a:solidFill>
-              </a:rPr>
-              <a:t>FASE 2</a:t>
-            </a:r>
-          </a:p>
-        </p:txBody>
-      </p:sp>
-      <p:sp>
-        <p:nvSpPr>
-          <p:cNvPr id="7" name="TextBox 6"/>
-          <p:cNvSpPr txBox="1"/>
-          <p:nvPr/>
-        </p:nvSpPr>
-        <p:spPr>
-          <a:xfrm>
-            <a:off x="502920" y="731520"/>
-            <a:ext cx="8961120" cy="960120"/>
-          </a:xfrm>
-          <a:prstGeom prst="rect">
-            <a:avLst/>
-          </a:prstGeom>
-          <a:noFill/>
-        </p:spPr>
-        <p:txBody lIns="0" tIns="0" rIns="0" bIns="0">
-          <a:bodyPr wrap="square">
-            <a:spAutoFit/>
-          </a:bodyPr>
-          <a:lstStyle/>
-          <a:p>
-            <a:pPr algn="l"/>
-            <a:r>
-              <a:rPr sz="4000" b="1">
-                <a:solidFill>
-                  <a:srgbClr val="FFFFFF"/>
-                </a:solidFill>
-              </a:rPr>
-              <a:t>Activación y </a:t>
-            </a:r>
-            <a:r>
-              <a:rPr sz="4000" b="1">
-                <a:solidFill>
-                  <a:srgbClr val="2FDFE5"/>
-                </a:solidFill>
-              </a:rPr>
-              <a:t>contacto</a:t>
-            </a:r>
-          </a:p>
-        </p:txBody>
-      </p:sp>
-      <p:sp>
-        <p:nvSpPr>
-          <p:cNvPr id="8" name="Rectangle 7"/>
-          <p:cNvSpPr/>
-          <p:nvPr/>
-        </p:nvSpPr>
-        <p:spPr>
-          <a:xfrm>
-            <a:off x="502920" y="1737360"/>
-            <a:ext cx="4389120" cy="31750"/>
-          </a:xfrm>
-          <a:prstGeom prst="rect">
-            <a:avLst/>
-          </a:prstGeom>
-          <a:solidFill>
-            <a:srgbClr val="2FDFE5"/>
-          </a:solidFill>
-          <a:ln>
-            <a:noFill/>
-          </a:ln>
-        </p:spPr>
-        <p:style>
-          <a:lnRef idx="1">
-            <a:schemeClr val="accent1"/>
-          </a:lnRef>
-          <a:fillRef idx="3">
-            <a:schemeClr val="accent1"/>
-          </a:fillRef>
-          <a:effectRef idx="2">
-            <a:schemeClr val="accent1"/>
-          </a:effectRef>
-          <a:fontRef idx="minor">
-            <a:schemeClr val="lt1"/>
-          </a:fontRef>
-        </p:style>
-        <p:txBody>
-          <a:bodyPr rtlCol="0" anchor="ctr"/>
-          <a:lstStyle/>
-          <a:p>
-            <a:pPr algn="ctr"/>
-          </a:p>
-        </p:txBody>
-      </p:sp>
-      <p:sp>
-        <p:nvSpPr>
-          <p:cNvPr id="9" name="TextBox 8"/>
-          <p:cNvSpPr txBox="1"/>
-          <p:nvPr/>
-        </p:nvSpPr>
-        <p:spPr>
-          <a:xfrm>
-            <a:off x="502920" y="1810512"/>
-            <a:ext cx="9265615" cy="384048"/>
-          </a:xfrm>
-          <a:prstGeom prst="rect">
-            <a:avLst/>
-          </a:prstGeom>
-          <a:noFill/>
-        </p:spPr>
-        <p:txBody lIns="0" tIns="0" rIns="0" bIns="0">
-          <a:bodyPr wrap="none">
-            <a:spAutoFit/>
-          </a:bodyPr>
-          <a:lstStyle/>
-          <a:p>
-            <a:pPr algn="l"/>
-            <a:r>
-              <a:rPr sz="1300" i="1">
-                <a:solidFill>
-                  <a:srgbClr val="80A8CC"/>
-                </a:solidFill>
-              </a:rPr>
-              <a:t>Multiplicamos los canales de contacto y buscamos siempre la vía amistosa para llegar a un acuerdo.</a:t>
-            </a:r>
-          </a:p>
-        </p:txBody>
-      </p:sp>
-      <p:sp>
-        <p:nvSpPr>
-          <p:cNvPr id="10" name="Rectangle 9"/>
-          <p:cNvSpPr/>
-          <p:nvPr/>
-        </p:nvSpPr>
-        <p:spPr>
-          <a:xfrm>
-            <a:off x="502920" y="2267712"/>
-            <a:ext cx="5579211" cy="3328416"/>
-          </a:xfrm>
-          <a:prstGeom prst="rect">
-            <a:avLst/>
-          </a:prstGeom>
-          <a:solidFill>
-            <a:srgbClr val="081438"/>
-          </a:solidFill>
-          <a:ln w="12700">
-            <a:solidFill>
-              <a:srgbClr val="2FDFE5"/>
-            </a:solidFill>
-          </a:ln>
-        </p:spPr>
-        <p:style>
-          <a:lnRef idx="1">
-            <a:schemeClr val="accent1"/>
-          </a:lnRef>
-          <a:fillRef idx="3">
-            <a:schemeClr val="accent1"/>
-          </a:fillRef>
-          <a:effectRef idx="2">
-            <a:schemeClr val="accent1"/>
-          </a:effectRef>
-          <a:fontRef idx="minor">
-            <a:schemeClr val="lt1"/>
-          </a:fontRef>
-        </p:style>
-        <p:txBody>
-          <a:bodyPr rtlCol="0" anchor="ctr"/>
-          <a:lstStyle/>
-          <a:p>
-            <a:pPr algn="ctr"/>
-          </a:p>
-        </p:txBody>
-      </p:sp>
-      <p:sp>
-        <p:nvSpPr>
-          <p:cNvPr id="11" name="Rectangle 10"/>
-          <p:cNvSpPr/>
-          <p:nvPr/>
-        </p:nvSpPr>
-        <p:spPr>
-          <a:xfrm>
-            <a:off x="502920" y="2267712"/>
-            <a:ext cx="5579211" cy="63500"/>
-          </a:xfrm>
-          <a:prstGeom prst="rect">
-            <a:avLst/>
-          </a:prstGeom>
-          <a:solidFill>
-            <a:srgbClr val="2FDFE5"/>
-          </a:solidFill>
-          <a:ln>
-            <a:noFill/>
-          </a:ln>
-        </p:spPr>
-        <p:style>
-          <a:lnRef idx="1">
-            <a:schemeClr val="accent1"/>
-          </a:lnRef>
-          <a:fillRef idx="3">
-            <a:schemeClr val="accent1"/>
-          </a:fillRef>
-          <a:effectRef idx="2">
-            <a:schemeClr val="accent1"/>
-          </a:effectRef>
-          <a:fontRef idx="minor">
-            <a:schemeClr val="lt1"/>
-          </a:fontRef>
-        </p:style>
-        <p:txBody>
-          <a:bodyPr rtlCol="0" anchor="ctr"/>
-          <a:lstStyle/>
-          <a:p>
-            <a:pPr algn="ctr"/>
-          </a:p>
-        </p:txBody>
-      </p:sp>
-      <p:sp>
-        <p:nvSpPr>
-          <p:cNvPr id="12" name="TextBox 11"/>
-          <p:cNvSpPr txBox="1"/>
-          <p:nvPr/>
-        </p:nvSpPr>
-        <p:spPr>
-          <a:xfrm>
-            <a:off x="704088" y="2487168"/>
-            <a:ext cx="5176875" cy="640080"/>
-          </a:xfrm>
-          <a:prstGeom prst="rect">
-            <a:avLst/>
-          </a:prstGeom>
-          <a:noFill/>
-        </p:spPr>
-        <p:txBody lIns="38100" tIns="63500" rIns="38100" bIns="25400">
-          <a:bodyPr wrap="square">
-            <a:spAutoFit/>
-          </a:bodyPr>
-          <a:lstStyle/>
-          <a:p>
-            <a:pPr algn="l"/>
-            <a:r>
-              <a:rPr sz="1900" b="1">
-                <a:solidFill>
-                  <a:srgbClr val="2FDFE5"/>
-                </a:solidFill>
-              </a:rPr>
-              <a:t>3  </a:t>
-            </a:r>
-            <a:r>
-              <a:rPr sz="1900" b="1">
-                <a:solidFill>
-                  <a:srgbClr val="FFFFFF"/>
-                </a:solidFill>
-              </a:rPr>
-              <a:t>Contactación multicanal</a:t>
-            </a:r>
-          </a:p>
-        </p:txBody>
-      </p:sp>
-      <p:sp>
-        <p:nvSpPr>
-          <p:cNvPr id="13" name="Rectangle 12"/>
-          <p:cNvSpPr/>
-          <p:nvPr/>
-        </p:nvSpPr>
-        <p:spPr>
-          <a:xfrm>
-            <a:off x="667512" y="3218688"/>
-            <a:ext cx="5250027" cy="19050"/>
-          </a:xfrm>
-          <a:prstGeom prst="rect">
-            <a:avLst/>
-          </a:prstGeom>
-          <a:solidFill>
-            <a:srgbClr val="13B9BF"/>
-          </a:solidFill>
-          <a:ln>
-            <a:noFill/>
-          </a:ln>
-        </p:spPr>
-        <p:style>
-          <a:lnRef idx="1">
-            <a:schemeClr val="accent1"/>
-          </a:lnRef>
-          <a:fillRef idx="3">
-            <a:schemeClr val="accent1"/>
-          </a:fillRef>
-          <a:effectRef idx="2">
-            <a:schemeClr val="accent1"/>
-          </a:effectRef>
-          <a:fontRef idx="minor">
-            <a:schemeClr val="lt1"/>
-          </a:fontRef>
-        </p:style>
-        <p:txBody>
-          <a:bodyPr rtlCol="0" anchor="ctr"/>
-          <a:lstStyle/>
-          <a:p>
-            <a:pPr algn="ctr"/>
-          </a:p>
-        </p:txBody>
-      </p:sp>
-      <p:sp>
-        <p:nvSpPr>
-          <p:cNvPr id="14" name="TextBox 13"/>
-          <p:cNvSpPr txBox="1"/>
-          <p:nvPr/>
-        </p:nvSpPr>
-        <p:spPr>
-          <a:xfrm>
-            <a:off x="667512" y="3345688"/>
-            <a:ext cx="5250027" cy="2249424"/>
-          </a:xfrm>
-          <a:prstGeom prst="rect">
-            <a:avLst/>
-          </a:prstGeom>
-          <a:noFill/>
-        </p:spPr>
-        <p:txBody lIns="50800" tIns="50800" rIns="50800" bIns="50800">
-          <a:bodyPr wrap="square">
-            <a:spAutoFit/>
-          </a:bodyPr>
-          <a:lstStyle/>
-          <a:p>
-            <a:pPr algn="l">
-              <a:spcBef>
-                <a:spcPts val="1800"/>
-              </a:spcBef>
-            </a:pPr>
-            <a:r>
-              <a:rPr sz="1400">
-                <a:solidFill>
-                  <a:srgbClr val="2FDFE5"/>
-                </a:solidFill>
-              </a:rPr>
-              <a:t>▸  </a:t>
-            </a:r>
-            <a:r>
-              <a:rPr sz="1700">
-                <a:solidFill>
-                  <a:srgbClr val="D8EAFF"/>
-                </a:solidFill>
-              </a:rPr>
-              <a:t>Primeras comunicaciones: teléfono, SMS, email y mensajería</a:t>
-            </a:r>
-          </a:p>
-          <a:p>
-            <a:pPr algn="l">
-              <a:spcBef>
-                <a:spcPts val="1800"/>
-              </a:spcBef>
-            </a:pPr>
-            <a:r>
-              <a:rPr sz="1400">
-                <a:solidFill>
-                  <a:srgbClr val="2FDFE5"/>
-                </a:solidFill>
-              </a:rPr>
-              <a:t>▸  </a:t>
-            </a:r>
-            <a:r>
-              <a:rPr sz="1700">
-                <a:solidFill>
-                  <a:srgbClr val="D8EAFF"/>
-                </a:solidFill>
-              </a:rPr>
-              <a:t>Verificación de datos de contacto y situación del cliente</a:t>
-            </a:r>
-          </a:p>
-          <a:p>
-            <a:pPr algn="l">
-              <a:spcBef>
-                <a:spcPts val="1800"/>
-              </a:spcBef>
-            </a:pPr>
-            <a:r>
-              <a:rPr sz="1400">
-                <a:solidFill>
-                  <a:srgbClr val="2FDFE5"/>
-                </a:solidFill>
-              </a:rPr>
-              <a:t>▸  </a:t>
-            </a:r>
-            <a:r>
-              <a:rPr sz="1700">
-                <a:solidFill>
-                  <a:srgbClr val="D8EAFF"/>
-                </a:solidFill>
-              </a:rPr>
-              <a:t>Búsqueda activa de datos en no contactados o sin localización</a:t>
-            </a:r>
-          </a:p>
-        </p:txBody>
-      </p:sp>
-      <p:sp>
-        <p:nvSpPr>
-          <p:cNvPr id="15" name="Rectangle 14"/>
-          <p:cNvSpPr/>
-          <p:nvPr/>
-        </p:nvSpPr>
-        <p:spPr>
-          <a:xfrm>
-            <a:off x="6283299" y="2267712"/>
-            <a:ext cx="5579211" cy="3328416"/>
-          </a:xfrm>
-          <a:prstGeom prst="rect">
-            <a:avLst/>
-          </a:prstGeom>
-          <a:solidFill>
-            <a:srgbClr val="081438"/>
-          </a:solidFill>
-          <a:ln w="12700">
-            <a:solidFill>
-              <a:srgbClr val="2FDFE5"/>
-            </a:solidFill>
-          </a:ln>
-        </p:spPr>
-        <p:style>
-          <a:lnRef idx="1">
-            <a:schemeClr val="accent1"/>
-          </a:lnRef>
-          <a:fillRef idx="3">
-            <a:schemeClr val="accent1"/>
-          </a:fillRef>
-          <a:effectRef idx="2">
-            <a:schemeClr val="accent1"/>
-          </a:effectRef>
-          <a:fontRef idx="minor">
-            <a:schemeClr val="lt1"/>
-          </a:fontRef>
-        </p:style>
-        <p:txBody>
-          <a:bodyPr rtlCol="0" anchor="ctr"/>
-          <a:lstStyle/>
-          <a:p>
-            <a:pPr algn="ctr"/>
-          </a:p>
-        </p:txBody>
-      </p:sp>
-      <p:sp>
-        <p:nvSpPr>
-          <p:cNvPr id="16" name="Rectangle 15"/>
-          <p:cNvSpPr/>
-          <p:nvPr/>
-        </p:nvSpPr>
-        <p:spPr>
-          <a:xfrm>
-            <a:off x="6283299" y="2267712"/>
-            <a:ext cx="5579211" cy="63500"/>
-          </a:xfrm>
-          <a:prstGeom prst="rect">
-            <a:avLst/>
-          </a:prstGeom>
-          <a:solidFill>
-            <a:srgbClr val="2FDFE5"/>
-          </a:solidFill>
-          <a:ln>
-            <a:noFill/>
-          </a:ln>
-        </p:spPr>
-        <p:style>
-          <a:lnRef idx="1">
-            <a:schemeClr val="accent1"/>
-          </a:lnRef>
-          <a:fillRef idx="3">
-            <a:schemeClr val="accent1"/>
-          </a:fillRef>
-          <a:effectRef idx="2">
-            <a:schemeClr val="accent1"/>
-          </a:effectRef>
-          <a:fontRef idx="minor">
-            <a:schemeClr val="lt1"/>
-          </a:fontRef>
-        </p:style>
-        <p:txBody>
-          <a:bodyPr rtlCol="0" anchor="ctr"/>
-          <a:lstStyle/>
-          <a:p>
-            <a:pPr algn="ctr"/>
-          </a:p>
-        </p:txBody>
-      </p:sp>
-      <p:sp>
-        <p:nvSpPr>
-          <p:cNvPr id="17" name="TextBox 16"/>
-          <p:cNvSpPr txBox="1"/>
-          <p:nvPr/>
-        </p:nvSpPr>
-        <p:spPr>
-          <a:xfrm>
-            <a:off x="6484467" y="2487168"/>
-            <a:ext cx="5176875" cy="640080"/>
-          </a:xfrm>
-          <a:prstGeom prst="rect">
-            <a:avLst/>
-          </a:prstGeom>
-          <a:noFill/>
-        </p:spPr>
-        <p:txBody lIns="38100" tIns="63500" rIns="38100" bIns="25400">
-          <a:bodyPr wrap="square">
-            <a:spAutoFit/>
-          </a:bodyPr>
-          <a:lstStyle/>
-          <a:p>
-            <a:pPr algn="l"/>
-            <a:r>
-              <a:rPr sz="1900" b="1">
-                <a:solidFill>
-                  <a:srgbClr val="2FDFE5"/>
-                </a:solidFill>
-              </a:rPr>
-              <a:t>4  </a:t>
-            </a:r>
-            <a:r>
-              <a:rPr sz="1900" b="1">
-                <a:solidFill>
-                  <a:srgbClr val="FFFFFF"/>
-                </a:solidFill>
-              </a:rPr>
-              <a:t>Acuerdos personalizados</a:t>
-            </a:r>
-          </a:p>
-        </p:txBody>
-      </p:sp>
-      <p:sp>
-        <p:nvSpPr>
-          <p:cNvPr id="18" name="Rectangle 17"/>
-          <p:cNvSpPr/>
-          <p:nvPr/>
-        </p:nvSpPr>
-        <p:spPr>
-          <a:xfrm>
-            <a:off x="6447891" y="3218688"/>
-            <a:ext cx="5250027" cy="19050"/>
-          </a:xfrm>
-          <a:prstGeom prst="rect">
-            <a:avLst/>
-          </a:prstGeom>
-          <a:solidFill>
-            <a:srgbClr val="13B9BF"/>
-          </a:solidFill>
-          <a:ln>
-            <a:noFill/>
-          </a:ln>
-        </p:spPr>
-        <p:style>
-          <a:lnRef idx="1">
-            <a:schemeClr val="accent1"/>
-          </a:lnRef>
-          <a:fillRef idx="3">
-            <a:schemeClr val="accent1"/>
-          </a:fillRef>
-          <a:effectRef idx="2">
-            <a:schemeClr val="accent1"/>
-          </a:effectRef>
-          <a:fontRef idx="minor">
-            <a:schemeClr val="lt1"/>
-          </a:fontRef>
-        </p:style>
-        <p:txBody>
-          <a:bodyPr rtlCol="0" anchor="ctr"/>
-          <a:lstStyle/>
-          <a:p>
-            <a:pPr algn="ctr"/>
-          </a:p>
-        </p:txBody>
-      </p:sp>
-      <p:sp>
-        <p:nvSpPr>
-          <p:cNvPr id="19" name="TextBox 18"/>
-          <p:cNvSpPr txBox="1"/>
-          <p:nvPr/>
-        </p:nvSpPr>
-        <p:spPr>
-          <a:xfrm>
-            <a:off x="6447891" y="3345688"/>
-            <a:ext cx="5250027" cy="2249424"/>
-          </a:xfrm>
-          <a:prstGeom prst="rect">
-            <a:avLst/>
-          </a:prstGeom>
-          <a:noFill/>
-        </p:spPr>
-        <p:txBody lIns="50800" tIns="50800" rIns="50800" bIns="50800">
-          <a:bodyPr wrap="square">
-            <a:spAutoFit/>
-          </a:bodyPr>
-          <a:lstStyle/>
-          <a:p>
-            <a:pPr algn="l">
-              <a:spcBef>
-                <a:spcPts val="1800"/>
-              </a:spcBef>
-            </a:pPr>
-            <a:r>
-              <a:rPr sz="1400">
-                <a:solidFill>
-                  <a:srgbClr val="2FDFE5"/>
-                </a:solidFill>
-              </a:rPr>
-              <a:t>▸  </a:t>
-            </a:r>
-            <a:r>
-              <a:rPr sz="1700">
-                <a:solidFill>
-                  <a:srgbClr val="D8EAFF"/>
-                </a:solidFill>
-              </a:rPr>
-              <a:t>Análisis de la capacidad de pago del deudor</a:t>
-            </a:r>
-          </a:p>
-          <a:p>
-            <a:pPr algn="l">
-              <a:spcBef>
-                <a:spcPts val="1800"/>
-              </a:spcBef>
-            </a:pPr>
-            <a:r>
-              <a:rPr sz="1400">
-                <a:solidFill>
-                  <a:srgbClr val="2FDFE5"/>
-                </a:solidFill>
-              </a:rPr>
-              <a:t>▸  </a:t>
-            </a:r>
-            <a:r>
-              <a:rPr sz="1700">
-                <a:solidFill>
-                  <a:srgbClr val="D8EAFF"/>
-                </a:solidFill>
-              </a:rPr>
-              <a:t>Propuesta de acuerdos personalizados</a:t>
-            </a:r>
-          </a:p>
-          <a:p>
-            <a:pPr algn="l">
-              <a:spcBef>
-                <a:spcPts val="1800"/>
-              </a:spcBef>
-            </a:pPr>
-            <a:r>
-              <a:rPr sz="1400">
-                <a:solidFill>
-                  <a:srgbClr val="2FDFE5"/>
-                </a:solidFill>
-              </a:rPr>
-              <a:t>▸  </a:t>
-            </a:r>
-            <a:r>
-              <a:rPr sz="1700">
-                <a:solidFill>
-                  <a:srgbClr val="D8EAFF"/>
-                </a:solidFill>
-              </a:rPr>
-              <a:t>Formalización y seguimiento de planes de pago</a:t>
-            </a:r>
-          </a:p>
-        </p:txBody>
-      </p:sp>
-    </p:spTree>
-  </p:cSld>
-  <p:clrMapOvr>
-    <a:masterClrMapping/>
-  </p:clrMapOvr>
-  <p:timing>
-    <p:tnLst>
-      <p:par>
-        <p:cTn id="1" dur="indefin" restart="whenNotActive" nodeType="tmRoot">
-          <p:childTnLst>
-            <p:seq concurrent="1" nextAc="seek">
-              <p:cTn id="2" dur="indefin" nodeType="mainSeq">
-                <p:childTnLst>
-                  <p:par>
-                    <p:cTn id="3" fill="hold">
-                      <p:stCondLst>
-                        <p:cond delay="0"/>
-                      </p:stCondLst>
-                      <p:childTnLst>
-                        <p:par>
-                          <p:cTn id="5" fill="hold">
-                            <p:stCondLst>
-                              <p:cond delay="0"/>
-                            </p:stCondLst>
-                            <p:childTnLst>
-                              <p:animEffect transition="in" filter="wipe(up)">
-                                <p:cBhvr>
-                                  <p:cTn id="6" dur="380" fill="hold"/>
-                                  <p:tgtEl>
-                                    <p:spTgt spid="10"/>
-                                  </p:tgtEl>
-                                </p:cBhvr>
-                              </p:animEffect>
-                            </p:childTnLst>
-                          </p:cTn>
-                        </p:par>
-                        <p:par>
-                          <p:cTn id="7" fill="hold">
-                            <p:stCondLst>
-                              <p:cond delay="0"/>
-                            </p:stCondLst>
-                            <p:childTnLst>
-                              <p:animEffect transition="in" filter="wipe(up)">
-                                <p:cBhvr>
-                                  <p:cTn id="8" dur="380" fill="hold"/>
-                                  <p:tgtEl>
-                                    <p:spTgt spid="11"/>
-                                  </p:tgtEl>
-                                </p:cBhvr>
-                              </p:animEffect>
-                            </p:childTnLst>
-                          </p:cTn>
-                        </p:par>
-                        <p:par>
-                          <p:cTn id="9" fill="hold">
-                            <p:stCondLst>
-                              <p:cond delay="0"/>
-                            </p:stCondLst>
-                            <p:childTnLst>
-                              <p:animEffect transition="in" filter="wipe(up)">
-                                <p:cBhvr>
-                                  <p:cTn id="10" dur="380" fill="hold"/>
-                                  <p:tgtEl>
-                                    <p:spTgt spid="12"/>
-                                  </p:tgtEl>
-                                </p:cBhvr>
-                              </p:animEffect>
-                            </p:childTnLst>
-                          </p:cTn>
-                        </p:par>
-                        <p:par>
-                          <p:cTn id="11" fill="hold">
-                            <p:stCondLst>
-                              <p:cond delay="0"/>
-                            </p:stCondLst>
-                            <p:childTnLst>
-                              <p:animEffect transition="in" filter="wipe(up)">
-                                <p:cBhvr>
-                                  <p:cTn id="12" dur="380" fill="hold"/>
-                                  <p:tgtEl>
-                                    <p:spTgt spid="13"/>
-                                  </p:tgtEl>
-                                </p:cBhvr>
-                              </p:animEffect>
-                            </p:childTnLst>
-                          </p:cTn>
-                        </p:par>
-                        <p:par>
-                          <p:cTn id="13" fill="hold">
-                            <p:stCondLst>
-                              <p:cond delay="0"/>
-                            </p:stCondLst>
-                            <p:childTnLst>
-                              <p:animEffect transition="in" filter="wipe(up)">
-                                <p:cBhvr>
-                                  <p:cTn id="14" dur="380" fill="hold"/>
-                                  <p:tgtEl>
-                                    <p:spTgt spid="14"/>
-                                  </p:tgtEl>
-                                </p:cBhvr>
-                              </p:animEffect>
-                            </p:childTnLst>
-                          </p:cTn>
-                        </p:par>
-                        <p:par>
-                          <p:cTn id="15" fill="hold">
-                            <p:stCondLst>
-                              <p:cond delay="160"/>
-                            </p:stCondLst>
-                            <p:childTnLst>
-                              <p:animEffect transition="in" filter="wipe(up)">
-                                <p:cBhvr>
-                                  <p:cTn id="16" dur="380" fill="hold"/>
-                                  <p:tgtEl>
-                                    <p:spTgt spid="15"/>
-                                  </p:tgtEl>
-                                </p:cBhvr>
-                              </p:animEffect>
-                            </p:childTnLst>
-                          </p:cTn>
-                        </p:par>
-                        <p:par>
-                          <p:cTn id="17" fill="hold">
-                            <p:stCondLst>
-                              <p:cond delay="160"/>
-                            </p:stCondLst>
-                            <p:childTnLst>
-                              <p:animEffect transition="in" filter="wipe(up)">
-                                <p:cBhvr>
-                                  <p:cTn id="18" dur="380" fill="hold"/>
-                                  <p:tgtEl>
-                                    <p:spTgt spid="16"/>
-                                  </p:tgtEl>
-                                </p:cBhvr>
-                              </p:animEffect>
-                            </p:childTnLst>
-                          </p:cTn>
-                        </p:par>
-                        <p:par>
-                          <p:cTn id="19" fill="hold">
-                            <p:stCondLst>
-                              <p:cond delay="160"/>
-                            </p:stCondLst>
-                            <p:childTnLst>
-                              <p:animEffect transition="in" filter="wipe(up)">
-                                <p:cBhvr>
-                                  <p:cTn id="20" dur="380" fill="hold"/>
-                                  <p:tgtEl>
-                                    <p:spTgt spid="17"/>
-                                  </p:tgtEl>
-                                </p:cBhvr>
-                              </p:animEffect>
-                            </p:childTnLst>
-                          </p:cTn>
-                        </p:par>
-                        <p:par>
-                          <p:cTn id="21" fill="hold">
-                            <p:stCondLst>
-                              <p:cond delay="160"/>
-                            </p:stCondLst>
-                            <p:childTnLst>
-                              <p:animEffect transition="in" filter="wipe(up)">
-                                <p:cBhvr>
-                                  <p:cTn id="22" dur="380" fill="hold"/>
-                                  <p:tgtEl>
-                                    <p:spTgt spid="18"/>
-                                  </p:tgtEl>
-                                </p:cBhvr>
-                              </p:animEffect>
-                            </p:childTnLst>
-                          </p:cTn>
-                        </p:par>
-                        <p:par>
-                          <p:cTn id="23" fill="hold">
-                            <p:stCondLst>
-                              <p:cond delay="160"/>
-                            </p:stCondLst>
-                            <p:childTnLst>
-                              <p:animEffect transition="in" filter="wipe(up)">
-                                <p:cBhvr>
-                                  <p:cTn id="24" dur="380" fill="hold"/>
-                                  <p:tgtEl>
-                                    <p:spTgt spid="19"/>
-                                  </p:tgtEl>
-                                </p:cBhvr>
-                              </p:animEffect>
-                            </p:childTnLst>
-                          </p:cTn>
-                        </p:par>
-                      </p:childTnLst>
-                    </p:cTn>
-                  </p:par>
-                </p:childTnLst>
-              </p:cTn>
-              <p:prevCondLst>
-                <p:cond evt="onPrevClick" delay="0"/>
-              </p:prevCondLst>
-              <p:nextCondLst>
-                <p:cond evt="onNextClick" delay="0"/>
-              </p:nextCondLst>
-            </p:seq>
-          </p:childTnLst>
-        </p:cTn>
-      </p:par>
-    </p:tnLst>
-  </p:timing>
-  <p:transition dur="550" spd="fast">
-    <p:push dir="u"/>
-  </p:transition>
-</p:sld>
-</file>
-
-<file path=ppt/slides/slide4.xml><?xml version="1.0" encoding="utf-8"?>
-<p:sld xmlns:a="http://schemas.openxmlformats.org/drawingml/2006/main" xmlns:p="http://schemas.openxmlformats.org/presentationml/2006/main" xmlns:r="http://schemas.openxmlformats.org/officeDocument/2006/relationships">
-  <p:cSld>
-    <p:spTree>
-      <p:nvGrpSpPr>
-        <p:cNvPr id="1" name=""/>
-        <p:cNvGrpSpPr/>
-        <p:nvPr/>
-      </p:nvGrpSpPr>
-      <p:grpSpPr/>
-      <p:pic>
-        <p:nvPicPr>
-          <p:cNvPr id="2" name="Picture 1" descr="content_bg_nolog.png"/>
-          <p:cNvPicPr>
-            <a:picLocks noChangeAspect="1"/>
-          </p:cNvPicPr>
-          <p:nvPr/>
-        </p:nvPicPr>
-        <p:blipFill>
-          <a:blip r:embed="rId2"/>
-          <a:stretch>
-            <a:fillRect/>
-          </a:stretch>
-        </p:blipFill>
-        <p:spPr>
-          <a:xfrm>
-            <a:off x="0" y="0"/>
-            <a:ext cx="12191695" cy="6858000"/>
-          </a:xfrm>
-          <a:prstGeom prst="rect">
-            <a:avLst/>
-          </a:prstGeom>
-        </p:spPr>
-      </p:pic>
-      <p:sp>
-        <p:nvSpPr>
-          <p:cNvPr id="3" name="Rectangle 2"/>
-          <p:cNvSpPr/>
-          <p:nvPr/>
-        </p:nvSpPr>
-        <p:spPr>
-          <a:xfrm>
-            <a:off x="0" y="0"/>
-            <a:ext cx="12191695" cy="50800"/>
-          </a:xfrm>
-          <a:prstGeom prst="rect">
-            <a:avLst/>
-          </a:prstGeom>
-          <a:solidFill>
-            <a:srgbClr val="2FDFE5"/>
-          </a:solidFill>
-          <a:ln>
-            <a:noFill/>
-          </a:ln>
-        </p:spPr>
-        <p:style>
-          <a:lnRef idx="1">
-            <a:schemeClr val="accent1"/>
-          </a:lnRef>
-          <a:fillRef idx="3">
-            <a:schemeClr val="accent1"/>
-          </a:fillRef>
-          <a:effectRef idx="2">
-            <a:schemeClr val="accent1"/>
-          </a:effectRef>
-          <a:fontRef idx="minor">
-            <a:schemeClr val="lt1"/>
-          </a:fontRef>
-        </p:style>
-        <p:txBody>
-          <a:bodyPr rtlCol="0" anchor="ctr"/>
-          <a:lstStyle/>
-          <a:p>
-            <a:pPr algn="ctr"/>
-          </a:p>
-        </p:txBody>
-      </p:sp>
-      <p:sp>
-        <p:nvSpPr>
-          <p:cNvPr id="4" name="Rectangle 3"/>
-          <p:cNvSpPr/>
-          <p:nvPr/>
-        </p:nvSpPr>
-        <p:spPr>
-          <a:xfrm>
-            <a:off x="0" y="0"/>
-            <a:ext cx="63500" cy="6858000"/>
-          </a:xfrm>
-          <a:prstGeom prst="rect">
-            <a:avLst/>
-          </a:prstGeom>
-          <a:solidFill>
-            <a:srgbClr val="13B9BF"/>
-          </a:solidFill>
-          <a:ln>
-            <a:noFill/>
-          </a:ln>
-        </p:spPr>
-        <p:style>
-          <a:lnRef idx="1">
-            <a:schemeClr val="accent1"/>
-          </a:lnRef>
-          <a:fillRef idx="3">
-            <a:schemeClr val="accent1"/>
-          </a:fillRef>
-          <a:effectRef idx="2">
-            <a:schemeClr val="accent1"/>
-          </a:effectRef>
-          <a:fontRef idx="minor">
-            <a:schemeClr val="lt1"/>
-          </a:fontRef>
-        </p:style>
-        <p:txBody>
-          <a:bodyPr rtlCol="0" anchor="ctr"/>
-          <a:lstStyle/>
-          <a:p>
-            <a:pPr algn="ctr"/>
-          </a:p>
-        </p:txBody>
-      </p:sp>
-      <p:pic>
-        <p:nvPicPr>
-          <p:cNvPr id="5" name="Picture 4" descr="logo_round_bright.png"/>
-          <p:cNvPicPr>
-            <a:picLocks noChangeAspect="1"/>
-          </p:cNvPicPr>
-          <p:nvPr/>
-        </p:nvPicPr>
-        <p:blipFill>
-          <a:blip r:embed="rId3"/>
-          <a:stretch>
-            <a:fillRect/>
-          </a:stretch>
-        </p:blipFill>
-        <p:spPr>
-          <a:xfrm>
-            <a:off x="91440" y="54864"/>
-            <a:ext cx="1463040" cy="848563"/>
-          </a:xfrm>
-          <a:prstGeom prst="rect">
-            <a:avLst/>
-          </a:prstGeom>
-        </p:spPr>
-      </p:pic>
-      <p:sp>
-        <p:nvSpPr>
-          <p:cNvPr id="6" name="Rectangle 5"/>
-          <p:cNvSpPr/>
-          <p:nvPr/>
-        </p:nvSpPr>
-        <p:spPr>
-          <a:xfrm>
-            <a:off x="502920" y="365760"/>
-            <a:ext cx="1737360" cy="301752"/>
-          </a:xfrm>
-          <a:prstGeom prst="rect">
-            <a:avLst/>
-          </a:prstGeom>
-          <a:solidFill>
-            <a:srgbClr val="2FDFE5"/>
-          </a:solidFill>
-          <a:ln>
-            <a:noFill/>
-          </a:ln>
-        </p:spPr>
-        <p:style>
-          <a:lnRef idx="1">
-            <a:schemeClr val="accent1"/>
-          </a:lnRef>
-          <a:fillRef idx="3">
-            <a:schemeClr val="accent1"/>
-          </a:fillRef>
-          <a:effectRef idx="2">
-            <a:schemeClr val="accent1"/>
-          </a:effectRef>
-          <a:fontRef idx="minor">
-            <a:schemeClr val="lt1"/>
-          </a:fontRef>
-        </p:style>
-        <p:txBody lIns="101600" tIns="25400" rIns="101600" bIns="25400">
-          <a:bodyPr rtlCol="0" anchor="ctr" wrap="none"/>
-          <a:lstStyle/>
-          <a:p>
-            <a:pPr algn="ctr"/>
-            <a:r>
-              <a:rPr sz="1100" b="1">
-                <a:solidFill>
-                  <a:srgbClr val="0A1638"/>
-                </a:solidFill>
-              </a:rPr>
-              <a:t>FASE 3</a:t>
-            </a:r>
-          </a:p>
-        </p:txBody>
-      </p:sp>
-      <p:sp>
-        <p:nvSpPr>
-          <p:cNvPr id="7" name="TextBox 6"/>
-          <p:cNvSpPr txBox="1"/>
-          <p:nvPr/>
-        </p:nvSpPr>
-        <p:spPr>
-          <a:xfrm>
-            <a:off x="502920" y="731520"/>
-            <a:ext cx="8961120" cy="960120"/>
-          </a:xfrm>
-          <a:prstGeom prst="rect">
-            <a:avLst/>
-          </a:prstGeom>
-          <a:noFill/>
-        </p:spPr>
-        <p:txBody lIns="0" tIns="0" rIns="0" bIns="0">
-          <a:bodyPr wrap="square">
-            <a:spAutoFit/>
-          </a:bodyPr>
-          <a:lstStyle/>
-          <a:p>
-            <a:pPr algn="l"/>
-            <a:r>
-              <a:rPr sz="4000" b="1">
-                <a:solidFill>
-                  <a:srgbClr val="FFFFFF"/>
-                </a:solidFill>
-              </a:rPr>
-              <a:t>Gestión </a:t>
-            </a:r>
-            <a:r>
-              <a:rPr sz="4000" b="1">
-                <a:solidFill>
-                  <a:srgbClr val="2FDFE5"/>
-                </a:solidFill>
-              </a:rPr>
-              <a:t>continuada</a:t>
-            </a:r>
-          </a:p>
-        </p:txBody>
-      </p:sp>
-      <p:sp>
-        <p:nvSpPr>
-          <p:cNvPr id="8" name="Rectangle 7"/>
-          <p:cNvSpPr/>
-          <p:nvPr/>
-        </p:nvSpPr>
-        <p:spPr>
-          <a:xfrm>
-            <a:off x="502920" y="1737360"/>
-            <a:ext cx="4389120" cy="31750"/>
-          </a:xfrm>
-          <a:prstGeom prst="rect">
-            <a:avLst/>
-          </a:prstGeom>
-          <a:solidFill>
-            <a:srgbClr val="2FDFE5"/>
-          </a:solidFill>
-          <a:ln>
-            <a:noFill/>
-          </a:ln>
-        </p:spPr>
-        <p:style>
-          <a:lnRef idx="1">
-            <a:schemeClr val="accent1"/>
-          </a:lnRef>
-          <a:fillRef idx="3">
-            <a:schemeClr val="accent1"/>
-          </a:fillRef>
-          <a:effectRef idx="2">
-            <a:schemeClr val="accent1"/>
-          </a:effectRef>
-          <a:fontRef idx="minor">
-            <a:schemeClr val="lt1"/>
-          </a:fontRef>
-        </p:style>
-        <p:txBody>
-          <a:bodyPr rtlCol="0" anchor="ctr"/>
-          <a:lstStyle/>
-          <a:p>
-            <a:pPr algn="ctr"/>
-          </a:p>
-        </p:txBody>
-      </p:sp>
-      <p:sp>
-        <p:nvSpPr>
-          <p:cNvPr id="9" name="TextBox 8"/>
-          <p:cNvSpPr txBox="1"/>
-          <p:nvPr/>
-        </p:nvSpPr>
-        <p:spPr>
-          <a:xfrm>
-            <a:off x="502920" y="1810512"/>
-            <a:ext cx="9265615" cy="384048"/>
-          </a:xfrm>
-          <a:prstGeom prst="rect">
-            <a:avLst/>
-          </a:prstGeom>
-          <a:noFill/>
-        </p:spPr>
-        <p:txBody lIns="0" tIns="0" rIns="0" bIns="0">
-          <a:bodyPr wrap="none">
-            <a:spAutoFit/>
-          </a:bodyPr>
-          <a:lstStyle/>
-          <a:p>
-            <a:pPr algn="l"/>
-            <a:r>
-              <a:rPr sz="1300" i="1">
-                <a:solidFill>
-                  <a:srgbClr val="80A8CC"/>
-                </a:solidFill>
-              </a:rPr>
-              <a:t>El seguimiento constante y la transparencia en el reporting mantienen cada expediente bajo control.</a:t>
-            </a:r>
-          </a:p>
-        </p:txBody>
-      </p:sp>
-      <p:sp>
-        <p:nvSpPr>
-          <p:cNvPr id="10" name="Rectangle 9"/>
-          <p:cNvSpPr/>
-          <p:nvPr/>
-        </p:nvSpPr>
-        <p:spPr>
-          <a:xfrm>
-            <a:off x="502920" y="2267712"/>
-            <a:ext cx="5579211" cy="3328416"/>
-          </a:xfrm>
-          <a:prstGeom prst="rect">
-            <a:avLst/>
-          </a:prstGeom>
-          <a:solidFill>
-            <a:srgbClr val="081438"/>
-          </a:solidFill>
-          <a:ln w="12700">
-            <a:solidFill>
-              <a:srgbClr val="2FDFE5"/>
-            </a:solidFill>
-          </a:ln>
-        </p:spPr>
-        <p:style>
-          <a:lnRef idx="1">
-            <a:schemeClr val="accent1"/>
-          </a:lnRef>
-          <a:fillRef idx="3">
-            <a:schemeClr val="accent1"/>
-          </a:fillRef>
-          <a:effectRef idx="2">
-            <a:schemeClr val="accent1"/>
-          </a:effectRef>
-          <a:fontRef idx="minor">
-            <a:schemeClr val="lt1"/>
-          </a:fontRef>
-        </p:style>
-        <p:txBody>
-          <a:bodyPr rtlCol="0" anchor="ctr"/>
-          <a:lstStyle/>
-          <a:p>
-            <a:pPr algn="ctr"/>
-          </a:p>
-        </p:txBody>
-      </p:sp>
-      <p:sp>
-        <p:nvSpPr>
-          <p:cNvPr id="11" name="Rectangle 10"/>
-          <p:cNvSpPr/>
-          <p:nvPr/>
-        </p:nvSpPr>
-        <p:spPr>
-          <a:xfrm>
-            <a:off x="502920" y="2267712"/>
-            <a:ext cx="5579211" cy="63500"/>
-          </a:xfrm>
-          <a:prstGeom prst="rect">
-            <a:avLst/>
-          </a:prstGeom>
-          <a:solidFill>
-            <a:srgbClr val="2FDFE5"/>
-          </a:solidFill>
-          <a:ln>
-            <a:noFill/>
-          </a:ln>
-        </p:spPr>
-        <p:style>
-          <a:lnRef idx="1">
-            <a:schemeClr val="accent1"/>
-          </a:lnRef>
-          <a:fillRef idx="3">
-            <a:schemeClr val="accent1"/>
-          </a:fillRef>
-          <a:effectRef idx="2">
-            <a:schemeClr val="accent1"/>
-          </a:effectRef>
-          <a:fontRef idx="minor">
-            <a:schemeClr val="lt1"/>
-          </a:fontRef>
-        </p:style>
-        <p:txBody>
-          <a:bodyPr rtlCol="0" anchor="ctr"/>
-          <a:lstStyle/>
-          <a:p>
-            <a:pPr algn="ctr"/>
-          </a:p>
-        </p:txBody>
-      </p:sp>
-      <p:sp>
-        <p:nvSpPr>
-          <p:cNvPr id="12" name="TextBox 11"/>
-          <p:cNvSpPr txBox="1"/>
-          <p:nvPr/>
-        </p:nvSpPr>
-        <p:spPr>
-          <a:xfrm>
-            <a:off x="704088" y="2487168"/>
-            <a:ext cx="5176875" cy="640080"/>
-          </a:xfrm>
-          <a:prstGeom prst="rect">
-            <a:avLst/>
-          </a:prstGeom>
-          <a:noFill/>
-        </p:spPr>
-        <p:txBody lIns="38100" tIns="63500" rIns="38100" bIns="25400">
-          <a:bodyPr wrap="square">
-            <a:spAutoFit/>
-          </a:bodyPr>
-          <a:lstStyle/>
-          <a:p>
-            <a:pPr algn="l"/>
-            <a:r>
-              <a:rPr sz="1900" b="1">
-                <a:solidFill>
-                  <a:srgbClr val="2FDFE5"/>
-                </a:solidFill>
-              </a:rPr>
-              <a:t>5  </a:t>
-            </a:r>
-            <a:r>
-              <a:rPr sz="1900" b="1">
-                <a:solidFill>
-                  <a:srgbClr val="FFFFFF"/>
-                </a:solidFill>
-              </a:rPr>
-              <a:t>Monitorización activa</a:t>
-            </a:r>
-          </a:p>
-        </p:txBody>
-      </p:sp>
-      <p:sp>
-        <p:nvSpPr>
-          <p:cNvPr id="13" name="Rectangle 12"/>
-          <p:cNvSpPr/>
-          <p:nvPr/>
-        </p:nvSpPr>
-        <p:spPr>
-          <a:xfrm>
-            <a:off x="667512" y="3218688"/>
-            <a:ext cx="5250027" cy="19050"/>
-          </a:xfrm>
-          <a:prstGeom prst="rect">
-            <a:avLst/>
-          </a:prstGeom>
-          <a:solidFill>
-            <a:srgbClr val="13B9BF"/>
-          </a:solidFill>
-          <a:ln>
-            <a:noFill/>
-          </a:ln>
-        </p:spPr>
-        <p:style>
-          <a:lnRef idx="1">
-            <a:schemeClr val="accent1"/>
-          </a:lnRef>
-          <a:fillRef idx="3">
-            <a:schemeClr val="accent1"/>
-          </a:fillRef>
-          <a:effectRef idx="2">
-            <a:schemeClr val="accent1"/>
-          </a:effectRef>
-          <a:fontRef idx="minor">
-            <a:schemeClr val="lt1"/>
-          </a:fontRef>
-        </p:style>
-        <p:txBody>
-          <a:bodyPr rtlCol="0" anchor="ctr"/>
-          <a:lstStyle/>
-          <a:p>
-            <a:pPr algn="ctr"/>
-          </a:p>
-        </p:txBody>
-      </p:sp>
-      <p:sp>
-        <p:nvSpPr>
-          <p:cNvPr id="14" name="TextBox 13"/>
-          <p:cNvSpPr txBox="1"/>
-          <p:nvPr/>
-        </p:nvSpPr>
-        <p:spPr>
-          <a:xfrm>
-            <a:off x="667512" y="3345688"/>
-            <a:ext cx="5250027" cy="2249424"/>
-          </a:xfrm>
-          <a:prstGeom prst="rect">
-            <a:avLst/>
-          </a:prstGeom>
-          <a:noFill/>
-        </p:spPr>
-        <p:txBody lIns="50800" tIns="50800" rIns="50800" bIns="50800">
-          <a:bodyPr wrap="square">
-            <a:spAutoFit/>
-          </a:bodyPr>
-          <a:lstStyle/>
-          <a:p>
-            <a:pPr algn="l">
-              <a:spcBef>
-                <a:spcPts val="1800"/>
-              </a:spcBef>
-            </a:pPr>
-            <a:r>
-              <a:rPr sz="1400">
-                <a:solidFill>
-                  <a:srgbClr val="2FDFE5"/>
-                </a:solidFill>
-              </a:rPr>
-              <a:t>▸  </a:t>
-            </a:r>
-            <a:r>
-              <a:rPr sz="1700">
-                <a:solidFill>
-                  <a:srgbClr val="D8EAFF"/>
-                </a:solidFill>
-              </a:rPr>
-              <a:t>Monitorización activa de los acuerdos alcanzados</a:t>
-            </a:r>
-          </a:p>
-          <a:p>
-            <a:pPr algn="l">
-              <a:spcBef>
-                <a:spcPts val="1800"/>
-              </a:spcBef>
-            </a:pPr>
-            <a:r>
-              <a:rPr sz="1400">
-                <a:solidFill>
-                  <a:srgbClr val="2FDFE5"/>
-                </a:solidFill>
-              </a:rPr>
-              <a:t>▸  </a:t>
-            </a:r>
-            <a:r>
-              <a:rPr sz="1700">
-                <a:solidFill>
-                  <a:srgbClr val="D8EAFF"/>
-                </a:solidFill>
-              </a:rPr>
-              <a:t>Recordatorios preventivos de vencimiento</a:t>
-            </a:r>
-          </a:p>
-          <a:p>
-            <a:pPr algn="l">
-              <a:spcBef>
-                <a:spcPts val="1800"/>
-              </a:spcBef>
-            </a:pPr>
-            <a:r>
-              <a:rPr sz="1400">
-                <a:solidFill>
-                  <a:srgbClr val="2FDFE5"/>
-                </a:solidFill>
-              </a:rPr>
-              <a:t>▸  </a:t>
-            </a:r>
-            <a:r>
-              <a:rPr sz="1700">
-                <a:solidFill>
-                  <a:srgbClr val="D8EAFF"/>
-                </a:solidFill>
-              </a:rPr>
-              <a:t>Reactivación inmediata ante incidencias o incumplimientos</a:t>
-            </a:r>
-          </a:p>
-        </p:txBody>
-      </p:sp>
-      <p:sp>
-        <p:nvSpPr>
-          <p:cNvPr id="15" name="Rectangle 14"/>
-          <p:cNvSpPr/>
-          <p:nvPr/>
-        </p:nvSpPr>
-        <p:spPr>
-          <a:xfrm>
-            <a:off x="6283299" y="2267712"/>
-            <a:ext cx="5579211" cy="3328416"/>
-          </a:xfrm>
-          <a:prstGeom prst="rect">
-            <a:avLst/>
-          </a:prstGeom>
-          <a:solidFill>
-            <a:srgbClr val="081438"/>
-          </a:solidFill>
-          <a:ln w="12700">
-            <a:solidFill>
-              <a:srgbClr val="2FDFE5"/>
-            </a:solidFill>
-          </a:ln>
-        </p:spPr>
-        <p:style>
-          <a:lnRef idx="1">
-            <a:schemeClr val="accent1"/>
-          </a:lnRef>
-          <a:fillRef idx="3">
-            <a:schemeClr val="accent1"/>
-          </a:fillRef>
-          <a:effectRef idx="2">
-            <a:schemeClr val="accent1"/>
-          </a:effectRef>
-          <a:fontRef idx="minor">
-            <a:schemeClr val="lt1"/>
-          </a:fontRef>
-        </p:style>
-        <p:txBody>
-          <a:bodyPr rtlCol="0" anchor="ctr"/>
-          <a:lstStyle/>
-          <a:p>
-            <a:pPr algn="ctr"/>
-          </a:p>
-        </p:txBody>
-      </p:sp>
-      <p:sp>
-        <p:nvSpPr>
-          <p:cNvPr id="16" name="Rectangle 15"/>
-          <p:cNvSpPr/>
-          <p:nvPr/>
-        </p:nvSpPr>
-        <p:spPr>
-          <a:xfrm>
-            <a:off x="6283299" y="2267712"/>
-            <a:ext cx="5579211" cy="63500"/>
-          </a:xfrm>
-          <a:prstGeom prst="rect">
-            <a:avLst/>
-          </a:prstGeom>
-          <a:solidFill>
-            <a:srgbClr val="2FDFE5"/>
-          </a:solidFill>
-          <a:ln>
-            <a:noFill/>
-          </a:ln>
-        </p:spPr>
-        <p:style>
-          <a:lnRef idx="1">
-            <a:schemeClr val="accent1"/>
-          </a:lnRef>
-          <a:fillRef idx="3">
-            <a:schemeClr val="accent1"/>
-          </a:fillRef>
-          <a:effectRef idx="2">
-            <a:schemeClr val="accent1"/>
-          </a:effectRef>
-          <a:fontRef idx="minor">
-            <a:schemeClr val="lt1"/>
-          </a:fontRef>
-        </p:style>
-        <p:txBody>
-          <a:bodyPr rtlCol="0" anchor="ctr"/>
-          <a:lstStyle/>
-          <a:p>
-            <a:pPr algn="ctr"/>
-          </a:p>
-        </p:txBody>
-      </p:sp>
-      <p:sp>
-        <p:nvSpPr>
-          <p:cNvPr id="17" name="TextBox 16"/>
-          <p:cNvSpPr txBox="1"/>
-          <p:nvPr/>
-        </p:nvSpPr>
-        <p:spPr>
-          <a:xfrm>
-            <a:off x="6484467" y="2487168"/>
-            <a:ext cx="5176875" cy="640080"/>
-          </a:xfrm>
-          <a:prstGeom prst="rect">
-            <a:avLst/>
-          </a:prstGeom>
-          <a:noFill/>
-        </p:spPr>
-        <p:txBody lIns="38100" tIns="63500" rIns="38100" bIns="25400">
-          <a:bodyPr wrap="square">
-            <a:spAutoFit/>
-          </a:bodyPr>
-          <a:lstStyle/>
-          <a:p>
-            <a:pPr algn="l"/>
-            <a:r>
-              <a:rPr sz="1900" b="1">
-                <a:solidFill>
-                  <a:srgbClr val="2FDFE5"/>
-                </a:solidFill>
-              </a:rPr>
-              <a:t>6  </a:t>
-            </a:r>
-            <a:r>
-              <a:rPr sz="1900" b="1">
-                <a:solidFill>
-                  <a:srgbClr val="FFFFFF"/>
-                </a:solidFill>
-              </a:rPr>
-              <a:t>Reporting y resultados</a:t>
-            </a:r>
-          </a:p>
-        </p:txBody>
-      </p:sp>
-      <p:sp>
-        <p:nvSpPr>
-          <p:cNvPr id="18" name="Rectangle 17"/>
-          <p:cNvSpPr/>
-          <p:nvPr/>
-        </p:nvSpPr>
-        <p:spPr>
-          <a:xfrm>
-            <a:off x="6447891" y="3218688"/>
-            <a:ext cx="5250027" cy="19050"/>
-          </a:xfrm>
-          <a:prstGeom prst="rect">
-            <a:avLst/>
-          </a:prstGeom>
-          <a:solidFill>
-            <a:srgbClr val="13B9BF"/>
-          </a:solidFill>
-          <a:ln>
-            <a:noFill/>
-          </a:ln>
-        </p:spPr>
-        <p:style>
-          <a:lnRef idx="1">
-            <a:schemeClr val="accent1"/>
-          </a:lnRef>
-          <a:fillRef idx="3">
-            <a:schemeClr val="accent1"/>
-          </a:fillRef>
-          <a:effectRef idx="2">
-            <a:schemeClr val="accent1"/>
-          </a:effectRef>
-          <a:fontRef idx="minor">
-            <a:schemeClr val="lt1"/>
-          </a:fontRef>
-        </p:style>
-        <p:txBody>
-          <a:bodyPr rtlCol="0" anchor="ctr"/>
-          <a:lstStyle/>
-          <a:p>
-            <a:pPr algn="ctr"/>
-          </a:p>
-        </p:txBody>
-      </p:sp>
-      <p:sp>
-        <p:nvSpPr>
-          <p:cNvPr id="19" name="TextBox 18"/>
-          <p:cNvSpPr txBox="1"/>
-          <p:nvPr/>
-        </p:nvSpPr>
-        <p:spPr>
-          <a:xfrm>
-            <a:off x="6447891" y="3345688"/>
-            <a:ext cx="5250027" cy="2249424"/>
-          </a:xfrm>
-          <a:prstGeom prst="rect">
-            <a:avLst/>
-          </a:prstGeom>
-          <a:noFill/>
-        </p:spPr>
-        <p:txBody lIns="50800" tIns="50800" rIns="50800" bIns="50800">
-          <a:bodyPr wrap="square">
-            <a:spAutoFit/>
-          </a:bodyPr>
-          <a:lstStyle/>
-          <a:p>
-            <a:pPr algn="l">
-              <a:spcBef>
-                <a:spcPts val="1800"/>
-              </a:spcBef>
-            </a:pPr>
-            <a:r>
-              <a:rPr sz="1400">
-                <a:solidFill>
-                  <a:srgbClr val="2FDFE5"/>
-                </a:solidFill>
-              </a:rPr>
-              <a:t>▸  </a:t>
-            </a:r>
-            <a:r>
-              <a:rPr sz="1700">
-                <a:solidFill>
-                  <a:srgbClr val="D8EAFF"/>
-                </a:solidFill>
-              </a:rPr>
-              <a:t>Actualización permanente del estado de cada expediente</a:t>
-            </a:r>
-          </a:p>
-          <a:p>
-            <a:pPr algn="l">
-              <a:spcBef>
-                <a:spcPts val="1800"/>
-              </a:spcBef>
-            </a:pPr>
-            <a:r>
-              <a:rPr sz="1400">
-                <a:solidFill>
-                  <a:srgbClr val="2FDFE5"/>
-                </a:solidFill>
-              </a:rPr>
-              <a:t>▸  </a:t>
-            </a:r>
-            <a:r>
-              <a:rPr sz="1700">
-                <a:solidFill>
-                  <a:srgbClr val="D8EAFF"/>
-                </a:solidFill>
-              </a:rPr>
-              <a:t>Informes periódicos de actividad y resultados</a:t>
-            </a:r>
-          </a:p>
-          <a:p>
-            <a:pPr algn="l">
-              <a:spcBef>
-                <a:spcPts val="1800"/>
-              </a:spcBef>
-            </a:pPr>
-            <a:r>
-              <a:rPr sz="1400">
-                <a:solidFill>
-                  <a:srgbClr val="2FDFE5"/>
-                </a:solidFill>
-              </a:rPr>
-              <a:t>▸  </a:t>
-            </a:r>
-            <a:r>
-              <a:rPr sz="1700">
-                <a:solidFill>
-                  <a:srgbClr val="D8EAFF"/>
-                </a:solidFill>
-              </a:rPr>
-              <a:t>KPIs de recuperación y productividad</a:t>
-            </a:r>
-          </a:p>
-        </p:txBody>
-      </p:sp>
-    </p:spTree>
-  </p:cSld>
-  <p:clrMapOvr>
-    <a:masterClrMapping/>
-  </p:clrMapOvr>
-  <p:timing>
-    <p:tnLst>
-      <p:par>
-        <p:cTn id="1" dur="indefin" restart="whenNotActive" nodeType="tmRoot">
-          <p:childTnLst>
-            <p:seq concurrent="1" nextAc="seek">
-              <p:cTn id="2" dur="indefin" nodeType="mainSeq">
-                <p:childTnLst>
-                  <p:par>
-                    <p:cTn id="3" fill="hold">
-                      <p:stCondLst>
-                        <p:cond delay="0"/>
-                      </p:stCondLst>
-                      <p:childTnLst>
-                        <p:par>
-                          <p:cTn id="5" fill="hold">
-                            <p:stCondLst>
-                              <p:cond delay="0"/>
-                            </p:stCondLst>
-                            <p:childTnLst>
-                              <p:animEffect transition="in" filter="wipe(up)">
-                                <p:cBhvr>
-                                  <p:cTn id="6" dur="380" fill="hold"/>
-                                  <p:tgtEl>
-                                    <p:spTgt spid="10"/>
-                                  </p:tgtEl>
-                                </p:cBhvr>
-                              </p:animEffect>
-                            </p:childTnLst>
-                          </p:cTn>
-                        </p:par>
-                        <p:par>
-                          <p:cTn id="7" fill="hold">
-                            <p:stCondLst>
-                              <p:cond delay="0"/>
-                            </p:stCondLst>
-                            <p:childTnLst>
-                              <p:animEffect transition="in" filter="wipe(up)">
-                                <p:cBhvr>
-                                  <p:cTn id="8" dur="380" fill="hold"/>
-                                  <p:tgtEl>
-                                    <p:spTgt spid="11"/>
-                                  </p:tgtEl>
-                                </p:cBhvr>
-                              </p:animEffect>
-                            </p:childTnLst>
-                          </p:cTn>
-                        </p:par>
-                        <p:par>
-                          <p:cTn id="9" fill="hold">
-                            <p:stCondLst>
-                              <p:cond delay="0"/>
-                            </p:stCondLst>
-                            <p:childTnLst>
-                              <p:animEffect transition="in" filter="wipe(up)">
-                                <p:cBhvr>
-                                  <p:cTn id="10" dur="380" fill="hold"/>
-                                  <p:tgtEl>
-                                    <p:spTgt spid="12"/>
-                                  </p:tgtEl>
-                                </p:cBhvr>
-                              </p:animEffect>
-                            </p:childTnLst>
-                          </p:cTn>
-                        </p:par>
-                        <p:par>
-                          <p:cTn id="11" fill="hold">
-                            <p:stCondLst>
-                              <p:cond delay="0"/>
-                            </p:stCondLst>
-                            <p:childTnLst>
-                              <p:animEffect transition="in" filter="wipe(up)">
-                                <p:cBhvr>
-                                  <p:cTn id="12" dur="380" fill="hold"/>
-                                  <p:tgtEl>
-                                    <p:spTgt spid="13"/>
-                                  </p:tgtEl>
-                                </p:cBhvr>
-                              </p:animEffect>
-                            </p:childTnLst>
-                          </p:cTn>
-                        </p:par>
-                        <p:par>
-                          <p:cTn id="13" fill="hold">
-                            <p:stCondLst>
-                              <p:cond delay="0"/>
-                            </p:stCondLst>
-                            <p:childTnLst>
-                              <p:animEffect transition="in" filter="wipe(up)">
-                                <p:cBhvr>
-                                  <p:cTn id="14" dur="380" fill="hold"/>
-                                  <p:tgtEl>
-                                    <p:spTgt spid="14"/>
-                                  </p:tgtEl>
-                                </p:cBhvr>
-                              </p:animEffect>
-                            </p:childTnLst>
-                          </p:cTn>
-                        </p:par>
-                        <p:par>
-                          <p:cTn id="15" fill="hold">
-                            <p:stCondLst>
-                              <p:cond delay="160"/>
-                            </p:stCondLst>
-                            <p:childTnLst>
-                              <p:animEffect transition="in" filter="wipe(up)">
-                                <p:cBhvr>
-                                  <p:cTn id="16" dur="380" fill="hold"/>
-                                  <p:tgtEl>
-                                    <p:spTgt spid="15"/>
-                                  </p:tgtEl>
-                                </p:cBhvr>
-                              </p:animEffect>
-                            </p:childTnLst>
-                          </p:cTn>
-                        </p:par>
-                        <p:par>
-                          <p:cTn id="17" fill="hold">
-                            <p:stCondLst>
-                              <p:cond delay="160"/>
-                            </p:stCondLst>
-                            <p:childTnLst>
-                              <p:animEffect transition="in" filter="wipe(up)">
-                                <p:cBhvr>
-                                  <p:cTn id="18" dur="380" fill="hold"/>
-                                  <p:tgtEl>
-                                    <p:spTgt spid="16"/>
-                                  </p:tgtEl>
-                                </p:cBhvr>
-                              </p:animEffect>
-                            </p:childTnLst>
-                          </p:cTn>
-                        </p:par>
-                        <p:par>
-                          <p:cTn id="19" fill="hold">
-                            <p:stCondLst>
-                              <p:cond delay="160"/>
-                            </p:stCondLst>
-                            <p:childTnLst>
-                              <p:animEffect transition="in" filter="wipe(up)">
-                                <p:cBhvr>
-                                  <p:cTn id="20" dur="380" fill="hold"/>
-                                  <p:tgtEl>
-                                    <p:spTgt spid="17"/>
-                                  </p:tgtEl>
-                                </p:cBhvr>
-                              </p:animEffect>
-                            </p:childTnLst>
-                          </p:cTn>
-                        </p:par>
-                        <p:par>
-                          <p:cTn id="21" fill="hold">
-                            <p:stCondLst>
-                              <p:cond delay="160"/>
-                            </p:stCondLst>
-                            <p:childTnLst>
-                              <p:animEffect transition="in" filter="wipe(up)">
-                                <p:cBhvr>
-                                  <p:cTn id="22" dur="380" fill="hold"/>
-                                  <p:tgtEl>
-                                    <p:spTgt spid="18"/>
-                                  </p:tgtEl>
-                                </p:cBhvr>
-                              </p:animEffect>
-                            </p:childTnLst>
-                          </p:cTn>
-                        </p:par>
-                        <p:par>
-                          <p:cTn id="23" fill="hold">
-                            <p:stCondLst>
-                              <p:cond delay="160"/>
-                            </p:stCondLst>
-                            <p:childTnLst>
-                              <p:animEffect transition="in" filter="wipe(up)">
-                                <p:cBhvr>
-                                  <p:cTn id="24" dur="380" fill="hold"/>
-                                  <p:tgtEl>
-                                    <p:spTgt spid="19"/>
-                                  </p:tgtEl>
-                                </p:cBhvr>
-                              </p:animEffect>
-                            </p:childTnLst>
-                          </p:cTn>
-                        </p:par>
-                      </p:childTnLst>
-                    </p:cTn>
-                  </p:par>
-                </p:childTnLst>
-              </p:cTn>
-              <p:prevCondLst>
-                <p:cond evt="onPrevClick" delay="0"/>
-              </p:prevCondLst>
-              <p:nextCondLst>
-                <p:cond evt="onNextClick" delay="0"/>
-              </p:nextCondLst>
-            </p:seq>
-          </p:childTnLst>
-        </p:cTn>
-      </p:par>
-    </p:tnLst>
-  </p:timing>
-  <p:transition dur="550" spd="fast">
-    <p:push dir="u"/>
-  </p:transition>
-</p:sld>
-</file>
-
-<file path=ppt/slides/slide5.xml><?xml version="1.0" encoding="utf-8"?>
-<p:sld xmlns:a="http://schemas.openxmlformats.org/drawingml/2006/main" xmlns:p="http://schemas.openxmlformats.org/presentationml/2006/main" xmlns:r="http://schemas.openxmlformats.org/officeDocument/2006/relationships">
-  <p:cSld>
-    <p:spTree>
-      <p:nvGrpSpPr>
-        <p:cNvPr id="1" name=""/>
-        <p:cNvGrpSpPr/>
-        <p:nvPr/>
-      </p:nvGrpSpPr>
-      <p:grpSpPr/>
-      <p:pic>
-        <p:nvPicPr>
-          <p:cNvPr id="2" name="Picture 1" descr="content_bg_nolog.png"/>
-          <p:cNvPicPr>
-            <a:picLocks noChangeAspect="1"/>
-          </p:cNvPicPr>
-          <p:nvPr/>
-        </p:nvPicPr>
-        <p:blipFill>
-          <a:blip r:embed="rId2"/>
-          <a:stretch>
-            <a:fillRect/>
-          </a:stretch>
-        </p:blipFill>
-        <p:spPr>
-          <a:xfrm>
-            <a:off x="0" y="0"/>
-            <a:ext cx="12191695" cy="6858000"/>
-          </a:xfrm>
-          <a:prstGeom prst="rect">
-            <a:avLst/>
-          </a:prstGeom>
-        </p:spPr>
-      </p:pic>
-      <p:sp>
-        <p:nvSpPr>
-          <p:cNvPr id="3" name="Rectangle 2"/>
-          <p:cNvSpPr/>
-          <p:nvPr/>
-        </p:nvSpPr>
-        <p:spPr>
-          <a:xfrm>
-            <a:off x="0" y="0"/>
-            <a:ext cx="12191695" cy="50800"/>
-          </a:xfrm>
-          <a:prstGeom prst="rect">
-            <a:avLst/>
-          </a:prstGeom>
-          <a:solidFill>
-            <a:srgbClr val="2FDFE5"/>
-          </a:solidFill>
-          <a:ln>
-            <a:noFill/>
-          </a:ln>
-        </p:spPr>
-        <p:style>
-          <a:lnRef idx="1">
-            <a:schemeClr val="accent1"/>
-          </a:lnRef>
-          <a:fillRef idx="3">
-            <a:schemeClr val="accent1"/>
-          </a:fillRef>
-          <a:effectRef idx="2">
-            <a:schemeClr val="accent1"/>
-          </a:effectRef>
-          <a:fontRef idx="minor">
-            <a:schemeClr val="lt1"/>
-          </a:fontRef>
-        </p:style>
-        <p:txBody>
-          <a:bodyPr rtlCol="0" anchor="ctr"/>
-          <a:lstStyle/>
-          <a:p>
-            <a:pPr algn="ctr"/>
-          </a:p>
-        </p:txBody>
-      </p:sp>
-      <p:sp>
-        <p:nvSpPr>
-          <p:cNvPr id="4" name="Rectangle 3"/>
-          <p:cNvSpPr/>
-          <p:nvPr/>
-        </p:nvSpPr>
-        <p:spPr>
-          <a:xfrm>
-            <a:off x="0" y="0"/>
-            <a:ext cx="63500" cy="6858000"/>
-          </a:xfrm>
-          <a:prstGeom prst="rect">
-            <a:avLst/>
-          </a:prstGeom>
-          <a:solidFill>
-            <a:srgbClr val="13B9BF"/>
-          </a:solidFill>
-          <a:ln>
-            <a:noFill/>
-          </a:ln>
-        </p:spPr>
-        <p:style>
-          <a:lnRef idx="1">
-            <a:schemeClr val="accent1"/>
-          </a:lnRef>
-          <a:fillRef idx="3">
-            <a:schemeClr val="accent1"/>
-          </a:fillRef>
-          <a:effectRef idx="2">
-            <a:schemeClr val="accent1"/>
-          </a:effectRef>
-          <a:fontRef idx="minor">
-            <a:schemeClr val="lt1"/>
-          </a:fontRef>
-        </p:style>
-        <p:txBody>
-          <a:bodyPr rtlCol="0" anchor="ctr"/>
-          <a:lstStyle/>
-          <a:p>
-            <a:pPr algn="ctr"/>
-          </a:p>
-        </p:txBody>
-      </p:sp>
-      <p:pic>
-        <p:nvPicPr>
-          <p:cNvPr id="5" name="Picture 4" descr="logo_round_bright.png"/>
-          <p:cNvPicPr>
-            <a:picLocks noChangeAspect="1"/>
-          </p:cNvPicPr>
-          <p:nvPr/>
-        </p:nvPicPr>
-        <p:blipFill>
-          <a:blip r:embed="rId3"/>
-          <a:stretch>
-            <a:fillRect/>
-          </a:stretch>
-        </p:blipFill>
-        <p:spPr>
-          <a:xfrm>
-            <a:off x="91440" y="54864"/>
-            <a:ext cx="1463040" cy="848563"/>
-          </a:xfrm>
-          <a:prstGeom prst="rect">
-            <a:avLst/>
-          </a:prstGeom>
-        </p:spPr>
-      </p:pic>
-      <p:sp>
-        <p:nvSpPr>
-          <p:cNvPr id="6" name="Rectangle 5"/>
-          <p:cNvSpPr/>
-          <p:nvPr/>
-        </p:nvSpPr>
-        <p:spPr>
-          <a:xfrm>
-            <a:off x="502920" y="365760"/>
-            <a:ext cx="1737360" cy="301752"/>
-          </a:xfrm>
-          <a:prstGeom prst="rect">
-            <a:avLst/>
-          </a:prstGeom>
-          <a:solidFill>
-            <a:srgbClr val="2FDFE5"/>
-          </a:solidFill>
-          <a:ln>
-            <a:noFill/>
-          </a:ln>
-        </p:spPr>
-        <p:style>
-          <a:lnRef idx="1">
-            <a:schemeClr val="accent1"/>
-          </a:lnRef>
-          <a:fillRef idx="3">
-            <a:schemeClr val="accent1"/>
-          </a:fillRef>
-          <a:effectRef idx="2">
-            <a:schemeClr val="accent1"/>
-          </a:effectRef>
-          <a:fontRef idx="minor">
-            <a:schemeClr val="lt1"/>
-          </a:fontRef>
-        </p:style>
-        <p:txBody lIns="101600" tIns="25400" rIns="101600" bIns="25400">
-          <a:bodyPr rtlCol="0" anchor="ctr" wrap="none"/>
-          <a:lstStyle/>
-          <a:p>
-            <a:pPr algn="ctr"/>
-            <a:r>
-              <a:rPr sz="1100" b="1">
-                <a:solidFill>
-                  <a:srgbClr val="0A1638"/>
-                </a:solidFill>
-              </a:rPr>
-              <a:t>FASE 4</a:t>
-            </a:r>
-          </a:p>
-        </p:txBody>
-      </p:sp>
-      <p:sp>
-        <p:nvSpPr>
-          <p:cNvPr id="7" name="TextBox 6"/>
-          <p:cNvSpPr txBox="1"/>
-          <p:nvPr/>
-        </p:nvSpPr>
-        <p:spPr>
-          <a:xfrm>
-            <a:off x="502920" y="731520"/>
-            <a:ext cx="8961120" cy="960120"/>
-          </a:xfrm>
-          <a:prstGeom prst="rect">
-            <a:avLst/>
-          </a:prstGeom>
-          <a:noFill/>
-        </p:spPr>
-        <p:txBody lIns="0" tIns="0" rIns="0" bIns="0">
-          <a:bodyPr wrap="square">
-            <a:spAutoFit/>
-          </a:bodyPr>
-          <a:lstStyle/>
-          <a:p>
-            <a:pPr algn="l"/>
-            <a:r>
-              <a:rPr sz="4000" b="1">
-                <a:solidFill>
-                  <a:srgbClr val="FFFFFF"/>
-                </a:solidFill>
-              </a:rPr>
-              <a:t>Cierre y </a:t>
-            </a:r>
-            <a:r>
-              <a:rPr sz="4000" b="1">
-                <a:solidFill>
-                  <a:srgbClr val="2FDFE5"/>
-                </a:solidFill>
-              </a:rPr>
-              <a:t>condiciones</a:t>
-            </a:r>
-          </a:p>
-        </p:txBody>
-      </p:sp>
-      <p:sp>
-        <p:nvSpPr>
-          <p:cNvPr id="8" name="Rectangle 7"/>
-          <p:cNvSpPr/>
-          <p:nvPr/>
-        </p:nvSpPr>
-        <p:spPr>
-          <a:xfrm>
-            <a:off x="502920" y="1737360"/>
-            <a:ext cx="4389120" cy="31750"/>
-          </a:xfrm>
-          <a:prstGeom prst="rect">
-            <a:avLst/>
-          </a:prstGeom>
-          <a:solidFill>
-            <a:srgbClr val="2FDFE5"/>
-          </a:solidFill>
-          <a:ln>
-            <a:noFill/>
-          </a:ln>
-        </p:spPr>
-        <p:style>
-          <a:lnRef idx="1">
-            <a:schemeClr val="accent1"/>
-          </a:lnRef>
-          <a:fillRef idx="3">
-            <a:schemeClr val="accent1"/>
-          </a:fillRef>
-          <a:effectRef idx="2">
-            <a:schemeClr val="accent1"/>
-          </a:effectRef>
-          <a:fontRef idx="minor">
-            <a:schemeClr val="lt1"/>
-          </a:fontRef>
-        </p:style>
-        <p:txBody>
-          <a:bodyPr rtlCol="0" anchor="ctr"/>
-          <a:lstStyle/>
-          <a:p>
-            <a:pPr algn="ctr"/>
-          </a:p>
-        </p:txBody>
-      </p:sp>
-      <p:sp>
-        <p:nvSpPr>
-          <p:cNvPr id="9" name="TextBox 8"/>
-          <p:cNvSpPr txBox="1"/>
-          <p:nvPr/>
-        </p:nvSpPr>
-        <p:spPr>
-          <a:xfrm>
-            <a:off x="502920" y="1810512"/>
-            <a:ext cx="9265615" cy="384048"/>
-          </a:xfrm>
-          <a:prstGeom prst="rect">
-            <a:avLst/>
-          </a:prstGeom>
-          <a:noFill/>
-        </p:spPr>
-        <p:txBody lIns="0" tIns="0" rIns="0" bIns="0">
-          <a:bodyPr wrap="none">
-            <a:spAutoFit/>
-          </a:bodyPr>
-          <a:lstStyle/>
-          <a:p>
-            <a:pPr algn="l"/>
-            <a:r>
-              <a:rPr sz="1300" i="1">
-                <a:solidFill>
-                  <a:srgbClr val="80A8CC"/>
-                </a:solidFill>
-              </a:rPr>
-              <a:t>Solo facturamos cuando recuperamos: nuestros incentivos están alineados con los de nuestro cliente.</a:t>
-            </a:r>
-          </a:p>
-        </p:txBody>
-      </p:sp>
-      <p:sp>
-        <p:nvSpPr>
-          <p:cNvPr id="10" name="Rectangle 9"/>
-          <p:cNvSpPr/>
-          <p:nvPr/>
-        </p:nvSpPr>
-        <p:spPr>
-          <a:xfrm>
-            <a:off x="502920" y="2267712"/>
-            <a:ext cx="5579211" cy="3328416"/>
-          </a:xfrm>
-          <a:prstGeom prst="rect">
-            <a:avLst/>
-          </a:prstGeom>
-          <a:solidFill>
-            <a:srgbClr val="081438"/>
-          </a:solidFill>
-          <a:ln w="12700">
-            <a:solidFill>
-              <a:srgbClr val="2FDFE5"/>
-            </a:solidFill>
-          </a:ln>
-        </p:spPr>
-        <p:style>
-          <a:lnRef idx="1">
-            <a:schemeClr val="accent1"/>
-          </a:lnRef>
-          <a:fillRef idx="3">
-            <a:schemeClr val="accent1"/>
-          </a:fillRef>
-          <a:effectRef idx="2">
-            <a:schemeClr val="accent1"/>
-          </a:effectRef>
-          <a:fontRef idx="minor">
-            <a:schemeClr val="lt1"/>
-          </a:fontRef>
-        </p:style>
-        <p:txBody>
-          <a:bodyPr rtlCol="0" anchor="ctr"/>
-          <a:lstStyle/>
-          <a:p>
-            <a:pPr algn="ctr"/>
-          </a:p>
-        </p:txBody>
-      </p:sp>
-      <p:sp>
-        <p:nvSpPr>
-          <p:cNvPr id="11" name="Rectangle 10"/>
-          <p:cNvSpPr/>
-          <p:nvPr/>
-        </p:nvSpPr>
-        <p:spPr>
-          <a:xfrm>
-            <a:off x="502920" y="2267712"/>
-            <a:ext cx="5579211" cy="63500"/>
-          </a:xfrm>
-          <a:prstGeom prst="rect">
-            <a:avLst/>
-          </a:prstGeom>
-          <a:solidFill>
-            <a:srgbClr val="2FDFE5"/>
-          </a:solidFill>
-          <a:ln>
-            <a:noFill/>
-          </a:ln>
-        </p:spPr>
-        <p:style>
-          <a:lnRef idx="1">
-            <a:schemeClr val="accent1"/>
-          </a:lnRef>
-          <a:fillRef idx="3">
-            <a:schemeClr val="accent1"/>
-          </a:fillRef>
-          <a:effectRef idx="2">
-            <a:schemeClr val="accent1"/>
-          </a:effectRef>
-          <a:fontRef idx="minor">
-            <a:schemeClr val="lt1"/>
-          </a:fontRef>
-        </p:style>
-        <p:txBody>
-          <a:bodyPr rtlCol="0" anchor="ctr"/>
-          <a:lstStyle/>
-          <a:p>
-            <a:pPr algn="ctr"/>
-          </a:p>
-        </p:txBody>
-      </p:sp>
-      <p:sp>
-        <p:nvSpPr>
-          <p:cNvPr id="12" name="TextBox 11"/>
-          <p:cNvSpPr txBox="1"/>
-          <p:nvPr/>
-        </p:nvSpPr>
-        <p:spPr>
-          <a:xfrm>
-            <a:off x="704088" y="2487168"/>
-            <a:ext cx="5176875" cy="640080"/>
-          </a:xfrm>
-          <a:prstGeom prst="rect">
-            <a:avLst/>
-          </a:prstGeom>
-          <a:noFill/>
-        </p:spPr>
-        <p:txBody lIns="38100" tIns="63500" rIns="38100" bIns="25400">
-          <a:bodyPr wrap="square">
-            <a:spAutoFit/>
-          </a:bodyPr>
-          <a:lstStyle/>
-          <a:p>
-            <a:pPr algn="l"/>
-            <a:r>
-              <a:rPr sz="1900" b="1">
-                <a:solidFill>
-                  <a:srgbClr val="2FDFE5"/>
-                </a:solidFill>
-              </a:rPr>
-              <a:t>7  </a:t>
-            </a:r>
-            <a:r>
-              <a:rPr sz="1900" b="1">
-                <a:solidFill>
-                  <a:srgbClr val="FFFFFF"/>
-                </a:solidFill>
-              </a:rPr>
-              <a:t>Cierre del expediente</a:t>
-            </a:r>
-          </a:p>
-        </p:txBody>
-      </p:sp>
-      <p:sp>
-        <p:nvSpPr>
-          <p:cNvPr id="13" name="Rectangle 12"/>
-          <p:cNvSpPr/>
-          <p:nvPr/>
-        </p:nvSpPr>
-        <p:spPr>
-          <a:xfrm>
-            <a:off x="667512" y="3218688"/>
-            <a:ext cx="5250027" cy="19050"/>
-          </a:xfrm>
-          <a:prstGeom prst="rect">
-            <a:avLst/>
-          </a:prstGeom>
-          <a:solidFill>
-            <a:srgbClr val="13B9BF"/>
-          </a:solidFill>
-          <a:ln>
-            <a:noFill/>
-          </a:ln>
-        </p:spPr>
-        <p:style>
-          <a:lnRef idx="1">
-            <a:schemeClr val="accent1"/>
-          </a:lnRef>
-          <a:fillRef idx="3">
-            <a:schemeClr val="accent1"/>
-          </a:fillRef>
-          <a:effectRef idx="2">
-            <a:schemeClr val="accent1"/>
-          </a:effectRef>
-          <a:fontRef idx="minor">
-            <a:schemeClr val="lt1"/>
-          </a:fontRef>
-        </p:style>
-        <p:txBody>
-          <a:bodyPr rtlCol="0" anchor="ctr"/>
-          <a:lstStyle/>
-          <a:p>
-            <a:pPr algn="ctr"/>
-          </a:p>
-        </p:txBody>
-      </p:sp>
-      <p:sp>
-        <p:nvSpPr>
-          <p:cNvPr id="14" name="TextBox 13"/>
-          <p:cNvSpPr txBox="1"/>
-          <p:nvPr/>
-        </p:nvSpPr>
-        <p:spPr>
-          <a:xfrm>
-            <a:off x="667512" y="3345688"/>
-            <a:ext cx="5250027" cy="2249424"/>
-          </a:xfrm>
-          <a:prstGeom prst="rect">
-            <a:avLst/>
-          </a:prstGeom>
-          <a:noFill/>
-        </p:spPr>
-        <p:txBody lIns="50800" tIns="50800" rIns="50800" bIns="50800">
-          <a:bodyPr wrap="square">
-            <a:spAutoFit/>
-          </a:bodyPr>
-          <a:lstStyle/>
-          <a:p>
-            <a:pPr algn="l">
-              <a:spcBef>
-                <a:spcPts val="1800"/>
-              </a:spcBef>
-            </a:pPr>
-            <a:r>
-              <a:rPr sz="1400">
-                <a:solidFill>
-                  <a:srgbClr val="2FDFE5"/>
-                </a:solidFill>
-              </a:rPr>
-              <a:t>▸  </a:t>
-            </a:r>
-            <a:r>
-              <a:rPr sz="1700">
-                <a:solidFill>
-                  <a:srgbClr val="D8EAFF"/>
-                </a:solidFill>
-              </a:rPr>
-              <a:t>Expedientes recuperados o finalizados</a:t>
-            </a:r>
-          </a:p>
-          <a:p>
-            <a:pPr algn="l">
-              <a:spcBef>
-                <a:spcPts val="1800"/>
-              </a:spcBef>
-            </a:pPr>
-            <a:r>
-              <a:rPr sz="1400">
-                <a:solidFill>
-                  <a:srgbClr val="2FDFE5"/>
-                </a:solidFill>
-              </a:rPr>
-              <a:t>▸  </a:t>
-            </a:r>
-            <a:r>
-              <a:rPr sz="1700">
-                <a:solidFill>
-                  <a:srgbClr val="D8EAFF"/>
-                </a:solidFill>
-              </a:rPr>
-              <a:t>Entrega de resultados y documentación</a:t>
-            </a:r>
-          </a:p>
-          <a:p>
-            <a:pPr algn="l">
-              <a:spcBef>
-                <a:spcPts val="1800"/>
-              </a:spcBef>
-            </a:pPr>
-            <a:r>
-              <a:rPr sz="1400">
-                <a:solidFill>
-                  <a:srgbClr val="2FDFE5"/>
-                </a:solidFill>
-              </a:rPr>
-              <a:t>▸  </a:t>
-            </a:r>
-            <a:r>
-              <a:rPr sz="1700">
-                <a:solidFill>
-                  <a:srgbClr val="D8EAFF"/>
-                </a:solidFill>
-              </a:rPr>
-              <a:t>Análisis de rendimiento y propuestas de mejora continua</a:t>
-            </a:r>
-          </a:p>
-        </p:txBody>
-      </p:sp>
-      <p:sp>
-        <p:nvSpPr>
-          <p:cNvPr id="15" name="Rectangle 14"/>
-          <p:cNvSpPr/>
-          <p:nvPr/>
-        </p:nvSpPr>
-        <p:spPr>
-          <a:xfrm>
-            <a:off x="6283299" y="2267712"/>
-            <a:ext cx="5579211" cy="3328416"/>
-          </a:xfrm>
-          <a:prstGeom prst="rect">
-            <a:avLst/>
-          </a:prstGeom>
-          <a:solidFill>
-            <a:srgbClr val="081438"/>
-          </a:solidFill>
-          <a:ln w="12700">
-            <a:solidFill>
-              <a:srgbClr val="2FDFE5"/>
-            </a:solidFill>
-          </a:ln>
-        </p:spPr>
-        <p:style>
-          <a:lnRef idx="1">
-            <a:schemeClr val="accent1"/>
-          </a:lnRef>
-          <a:fillRef idx="3">
-            <a:schemeClr val="accent1"/>
-          </a:fillRef>
-          <a:effectRef idx="2">
-            <a:schemeClr val="accent1"/>
-          </a:effectRef>
-          <a:fontRef idx="minor">
-            <a:schemeClr val="lt1"/>
-          </a:fontRef>
-        </p:style>
-        <p:txBody>
-          <a:bodyPr rtlCol="0" anchor="ctr"/>
-          <a:lstStyle/>
-          <a:p>
-            <a:pPr algn="ctr"/>
-          </a:p>
-        </p:txBody>
-      </p:sp>
-      <p:sp>
-        <p:nvSpPr>
-          <p:cNvPr id="16" name="Rectangle 15"/>
-          <p:cNvSpPr/>
-          <p:nvPr/>
-        </p:nvSpPr>
-        <p:spPr>
-          <a:xfrm>
-            <a:off x="6283299" y="2267712"/>
-            <a:ext cx="5579211" cy="63500"/>
-          </a:xfrm>
-          <a:prstGeom prst="rect">
-            <a:avLst/>
-          </a:prstGeom>
-          <a:solidFill>
-            <a:srgbClr val="2FDFE5"/>
-          </a:solidFill>
-          <a:ln>
-            <a:noFill/>
-          </a:ln>
-        </p:spPr>
-        <p:style>
-          <a:lnRef idx="1">
-            <a:schemeClr val="accent1"/>
-          </a:lnRef>
-          <a:fillRef idx="3">
-            <a:schemeClr val="accent1"/>
-          </a:fillRef>
-          <a:effectRef idx="2">
-            <a:schemeClr val="accent1"/>
-          </a:effectRef>
-          <a:fontRef idx="minor">
-            <a:schemeClr val="lt1"/>
-          </a:fontRef>
-        </p:style>
-        <p:txBody>
-          <a:bodyPr rtlCol="0" anchor="ctr"/>
-          <a:lstStyle/>
-          <a:p>
-            <a:pPr algn="ctr"/>
-          </a:p>
-        </p:txBody>
-      </p:sp>
-      <p:sp>
-        <p:nvSpPr>
-          <p:cNvPr id="17" name="TextBox 16"/>
-          <p:cNvSpPr txBox="1"/>
-          <p:nvPr/>
-        </p:nvSpPr>
-        <p:spPr>
-          <a:xfrm>
-            <a:off x="6484467" y="2487168"/>
-            <a:ext cx="5176875" cy="640080"/>
-          </a:xfrm>
-          <a:prstGeom prst="rect">
-            <a:avLst/>
-          </a:prstGeom>
-          <a:noFill/>
-        </p:spPr>
-        <p:txBody lIns="38100" tIns="63500" rIns="38100" bIns="25400">
-          <a:bodyPr wrap="square">
-            <a:spAutoFit/>
-          </a:bodyPr>
-          <a:lstStyle/>
-          <a:p>
-            <a:pPr algn="l"/>
-            <a:r>
-              <a:rPr sz="1900" b="1">
-                <a:solidFill>
-                  <a:srgbClr val="2FDFE5"/>
-                </a:solidFill>
-              </a:rPr>
-              <a:t>8  </a:t>
-            </a:r>
-            <a:r>
-              <a:rPr sz="1900" b="1">
-                <a:solidFill>
-                  <a:srgbClr val="FFFFFF"/>
-                </a:solidFill>
-              </a:rPr>
-              <a:t>Honorarios y condiciones</a:t>
-            </a:r>
-          </a:p>
-        </p:txBody>
-      </p:sp>
-      <p:sp>
-        <p:nvSpPr>
-          <p:cNvPr id="18" name="Rectangle 17"/>
-          <p:cNvSpPr/>
-          <p:nvPr/>
-        </p:nvSpPr>
-        <p:spPr>
-          <a:xfrm>
-            <a:off x="6447891" y="3218688"/>
-            <a:ext cx="5250027" cy="19050"/>
-          </a:xfrm>
-          <a:prstGeom prst="rect">
-            <a:avLst/>
-          </a:prstGeom>
-          <a:solidFill>
-            <a:srgbClr val="13B9BF"/>
-          </a:solidFill>
-          <a:ln>
-            <a:noFill/>
-          </a:ln>
-        </p:spPr>
-        <p:style>
-          <a:lnRef idx="1">
-            <a:schemeClr val="accent1"/>
-          </a:lnRef>
-          <a:fillRef idx="3">
-            <a:schemeClr val="accent1"/>
-          </a:fillRef>
-          <a:effectRef idx="2">
-            <a:schemeClr val="accent1"/>
-          </a:effectRef>
-          <a:fontRef idx="minor">
-            <a:schemeClr val="lt1"/>
-          </a:fontRef>
-        </p:style>
-        <p:txBody>
-          <a:bodyPr rtlCol="0" anchor="ctr"/>
-          <a:lstStyle/>
-          <a:p>
-            <a:pPr algn="ctr"/>
-          </a:p>
-        </p:txBody>
-      </p:sp>
-      <p:sp>
-        <p:nvSpPr>
-          <p:cNvPr id="19" name="TextBox 18"/>
-          <p:cNvSpPr txBox="1"/>
-          <p:nvPr/>
-        </p:nvSpPr>
-        <p:spPr>
-          <a:xfrm>
-            <a:off x="6447891" y="3345688"/>
-            <a:ext cx="5250027" cy="2249424"/>
-          </a:xfrm>
-          <a:prstGeom prst="rect">
-            <a:avLst/>
-          </a:prstGeom>
-          <a:noFill/>
-        </p:spPr>
-        <p:txBody lIns="50800" tIns="50800" rIns="50800" bIns="50800">
-          <a:bodyPr wrap="square">
-            <a:spAutoFit/>
-          </a:bodyPr>
-          <a:lstStyle/>
-          <a:p>
-            <a:pPr algn="l">
-              <a:spcBef>
-                <a:spcPts val="1800"/>
-              </a:spcBef>
-            </a:pPr>
-            <a:r>
-              <a:rPr sz="1400">
-                <a:solidFill>
-                  <a:srgbClr val="2FDFE5"/>
-                </a:solidFill>
-              </a:rPr>
-              <a:t>▸  </a:t>
-            </a:r>
-            <a:r>
-              <a:rPr sz="1700">
-                <a:solidFill>
-                  <a:srgbClr val="D8EAFF"/>
-                </a:solidFill>
-              </a:rPr>
-              <a:t>Servicio de recobro amistoso a éxito</a:t>
-            </a:r>
-          </a:p>
-          <a:p>
-            <a:pPr algn="l">
-              <a:spcBef>
-                <a:spcPts val="1800"/>
-              </a:spcBef>
-            </a:pPr>
-            <a:r>
-              <a:rPr sz="1400">
-                <a:solidFill>
-                  <a:srgbClr val="2FDFE5"/>
-                </a:solidFill>
-              </a:rPr>
-              <a:t>▸  </a:t>
-            </a:r>
-            <a:r>
-              <a:rPr sz="1700">
-                <a:solidFill>
-                  <a:srgbClr val="D8EAFF"/>
-                </a:solidFill>
-              </a:rPr>
-              <a:t>Retribución escalada según tipología de deuda</a:t>
-            </a:r>
-          </a:p>
-          <a:p>
-            <a:pPr algn="l">
-              <a:spcBef>
-                <a:spcPts val="1800"/>
-              </a:spcBef>
-            </a:pPr>
-            <a:r>
-              <a:rPr sz="1400">
-                <a:solidFill>
-                  <a:srgbClr val="2FDFE5"/>
-                </a:solidFill>
-              </a:rPr>
-              <a:t>▸  </a:t>
-            </a:r>
-            <a:r>
-              <a:rPr sz="1700">
-                <a:solidFill>
-                  <a:srgbClr val="D8EAFF"/>
-                </a:solidFill>
-              </a:rPr>
-              <a:t>Sin costes fijos: solo cobramos si recuperamos</a:t>
-            </a:r>
-          </a:p>
-        </p:txBody>
-      </p:sp>
-    </p:spTree>
-  </p:cSld>
-  <p:clrMapOvr>
-    <a:masterClrMapping/>
-  </p:clrMapOvr>
-  <p:timing>
-    <p:tnLst>
-      <p:par>
-        <p:cTn id="1" dur="indefin" restart="whenNotActive" nodeType="tmRoot">
-          <p:childTnLst>
-            <p:seq concurrent="1" nextAc="seek">
-              <p:cTn id="2" dur="indefin" nodeType="mainSeq">
-                <p:childTnLst>
-                  <p:par>
-                    <p:cTn id="3" fill="hold">
-                      <p:stCondLst>
-                        <p:cond delay="0"/>
-                      </p:stCondLst>
-                      <p:childTnLst>
-                        <p:par>
-                          <p:cTn id="5" fill="hold">
-                            <p:stCondLst>
-                              <p:cond delay="0"/>
-                            </p:stCondLst>
-                            <p:childTnLst>
-                              <p:animEffect transition="in" filter="wipe(up)">
-                                <p:cBhvr>
-                                  <p:cTn id="6" dur="380" fill="hold"/>
-                                  <p:tgtEl>
-                                    <p:spTgt spid="10"/>
-                                  </p:tgtEl>
-                                </p:cBhvr>
-                              </p:animEffect>
-                            </p:childTnLst>
-                          </p:cTn>
-                        </p:par>
-                        <p:par>
-                          <p:cTn id="7" fill="hold">
-                            <p:stCondLst>
-                              <p:cond delay="0"/>
-                            </p:stCondLst>
-                            <p:childTnLst>
-                              <p:animEffect transition="in" filter="wipe(up)">
-                                <p:cBhvr>
-                                  <p:cTn id="8" dur="380" fill="hold"/>
-                                  <p:tgtEl>
-                                    <p:spTgt spid="11"/>
-                                  </p:tgtEl>
-                                </p:cBhvr>
-                              </p:animEffect>
-                            </p:childTnLst>
-                          </p:cTn>
-                        </p:par>
-                        <p:par>
-                          <p:cTn id="9" fill="hold">
-                            <p:stCondLst>
-                              <p:cond delay="0"/>
-                            </p:stCondLst>
-                            <p:childTnLst>
-                              <p:animEffect transition="in" filter="wipe(up)">
-                                <p:cBhvr>
-                                  <p:cTn id="10" dur="380" fill="hold"/>
-                                  <p:tgtEl>
-                                    <p:spTgt spid="12"/>
-                                  </p:tgtEl>
-                                </p:cBhvr>
-                              </p:animEffect>
-                            </p:childTnLst>
-                          </p:cTn>
-                        </p:par>
-                        <p:par>
-                          <p:cTn id="11" fill="hold">
-                            <p:stCondLst>
-                              <p:cond delay="0"/>
-                            </p:stCondLst>
-                            <p:childTnLst>
-                              <p:animEffect transition="in" filter="wipe(up)">
-                                <p:cBhvr>
-                                  <p:cTn id="12" dur="380" fill="hold"/>
-                                  <p:tgtEl>
-                                    <p:spTgt spid="13"/>
-                                  </p:tgtEl>
-                                </p:cBhvr>
-                              </p:animEffect>
-                            </p:childTnLst>
-                          </p:cTn>
-                        </p:par>
-                        <p:par>
-                          <p:cTn id="13" fill="hold">
-                            <p:stCondLst>
-                              <p:cond delay="0"/>
-                            </p:stCondLst>
-                            <p:childTnLst>
-                              <p:animEffect transition="in" filter="wipe(up)">
-                                <p:cBhvr>
-                                  <p:cTn id="14" dur="380" fill="hold"/>
-                                  <p:tgtEl>
-                                    <p:spTgt spid="14"/>
-                                  </p:tgtEl>
-                                </p:cBhvr>
-                              </p:animEffect>
-                            </p:childTnLst>
-                          </p:cTn>
-                        </p:par>
-                        <p:par>
-                          <p:cTn id="15" fill="hold">
-                            <p:stCondLst>
-                              <p:cond delay="160"/>
-                            </p:stCondLst>
-                            <p:childTnLst>
-                              <p:animEffect transition="in" filter="wipe(up)">
-                                <p:cBhvr>
-                                  <p:cTn id="16" dur="380" fill="hold"/>
-                                  <p:tgtEl>
-                                    <p:spTgt spid="15"/>
-                                  </p:tgtEl>
-                                </p:cBhvr>
-                              </p:animEffect>
-                            </p:childTnLst>
-                          </p:cTn>
-                        </p:par>
-                        <p:par>
-                          <p:cTn id="17" fill="hold">
-                            <p:stCondLst>
-                              <p:cond delay="160"/>
-                            </p:stCondLst>
-                            <p:childTnLst>
-                              <p:animEffect transition="in" filter="wipe(up)">
-                                <p:cBhvr>
-                                  <p:cTn id="18" dur="380" fill="hold"/>
-                                  <p:tgtEl>
-                                    <p:spTgt spid="16"/>
-                                  </p:tgtEl>
-                                </p:cBhvr>
-                              </p:animEffect>
-                            </p:childTnLst>
-                          </p:cTn>
-                        </p:par>
-                        <p:par>
-                          <p:cTn id="19" fill="hold">
-                            <p:stCondLst>
-                              <p:cond delay="160"/>
-                            </p:stCondLst>
-                            <p:childTnLst>
-                              <p:animEffect transition="in" filter="wipe(up)">
-                                <p:cBhvr>
-                                  <p:cTn id="20" dur="380" fill="hold"/>
-                                  <p:tgtEl>
-                                    <p:spTgt spid="17"/>
-                                  </p:tgtEl>
-                                </p:cBhvr>
-                              </p:animEffect>
-                            </p:childTnLst>
-                          </p:cTn>
-                        </p:par>
-                        <p:par>
-                          <p:cTn id="21" fill="hold">
-                            <p:stCondLst>
-                              <p:cond delay="160"/>
-                            </p:stCondLst>
-                            <p:childTnLst>
-                              <p:animEffect transition="in" filter="wipe(up)">
-                                <p:cBhvr>
-                                  <p:cTn id="22" dur="380" fill="hold"/>
-                                  <p:tgtEl>
-                                    <p:spTgt spid="18"/>
-                                  </p:tgtEl>
-                                </p:cBhvr>
-                              </p:animEffect>
-                            </p:childTnLst>
-                          </p:cTn>
-                        </p:par>
-                        <p:par>
-                          <p:cTn id="23" fill="hold">
-                            <p:stCondLst>
-                              <p:cond delay="160"/>
-                            </p:stCondLst>
-                            <p:childTnLst>
-                              <p:animEffect transition="in" filter="wipe(up)">
-                                <p:cBhvr>
-                                  <p:cTn id="24" dur="380" fill="hold"/>
-                                  <p:tgtEl>
-                                    <p:spTgt spid="19"/>
-                                  </p:tgtEl>
-                                </p:cBhvr>
-                              </p:animEffect>
-                            </p:childTnLst>
-                          </p:cTn>
-                        </p:par>
-                      </p:childTnLst>
-                    </p:cTn>
-                  </p:par>
-                </p:childTnLst>
-              </p:cTn>
-              <p:prevCondLst>
-                <p:cond evt="onPrevClick" delay="0"/>
-              </p:prevCondLst>
-              <p:nextCondLst>
-                <p:cond evt="onNextClick" delay="0"/>
-              </p:nextCondLst>
-            </p:seq>
-          </p:childTnLst>
-        </p:cTn>
-      </p:par>
-    </p:tnLst>
-  </p:timing>
-  <p:transition dur="550" spd="fast">
-    <p:push dir="u"/>
-  </p:transition>
-</p:sld>
-</file>
-
-<file path=ppt/slides/slide6.xml><?xml version="1.0" encoding="utf-8"?>
-<p:sld xmlns:a="http://schemas.openxmlformats.org/drawingml/2006/main" xmlns:p="http://schemas.openxmlformats.org/presentationml/2006/main" xmlns:r="http://schemas.openxmlformats.org/officeDocument/2006/relationships">
-  <p:cSld>
-    <p:spTree>
-      <p:nvGrpSpPr>
-        <p:cNvPr id="1" name=""/>
-        <p:cNvGrpSpPr/>
-        <p:nvPr/>
-      </p:nvGrpSpPr>
-      <p:grpSpPr/>
-      <p:pic>
-        <p:nvPicPr>
-          <p:cNvPr id="2" name="Picture 1" descr="content_bg_nolog.png"/>
-          <p:cNvPicPr>
-            <a:picLocks noChangeAspect="1"/>
-          </p:cNvPicPr>
-          <p:nvPr/>
-        </p:nvPicPr>
-        <p:blipFill>
-          <a:blip r:embed="rId2"/>
-          <a:stretch>
-            <a:fillRect/>
-          </a:stretch>
-        </p:blipFill>
-        <p:spPr>
-          <a:xfrm>
-            <a:off x="0" y="0"/>
-            <a:ext cx="12191695" cy="6858000"/>
-          </a:xfrm>
-          <a:prstGeom prst="rect">
-            <a:avLst/>
-          </a:prstGeom>
-        </p:spPr>
-      </p:pic>
-      <p:sp>
-        <p:nvSpPr>
-          <p:cNvPr id="3" name="Rectangle 2"/>
-          <p:cNvSpPr/>
-          <p:nvPr/>
-        </p:nvSpPr>
-        <p:spPr>
-          <a:xfrm>
-            <a:off x="0" y="0"/>
-            <a:ext cx="12191695" cy="50800"/>
-          </a:xfrm>
-          <a:prstGeom prst="rect">
-            <a:avLst/>
-          </a:prstGeom>
-          <a:solidFill>
-            <a:srgbClr val="2FDFE5"/>
-          </a:solidFill>
-          <a:ln>
-            <a:noFill/>
-          </a:ln>
-        </p:spPr>
-        <p:style>
-          <a:lnRef idx="1">
-            <a:schemeClr val="accent1"/>
-          </a:lnRef>
-          <a:fillRef idx="3">
-            <a:schemeClr val="accent1"/>
-          </a:fillRef>
-          <a:effectRef idx="2">
-            <a:schemeClr val="accent1"/>
-          </a:effectRef>
-          <a:fontRef idx="minor">
-            <a:schemeClr val="lt1"/>
-          </a:fontRef>
-        </p:style>
-        <p:txBody>
-          <a:bodyPr rtlCol="0" anchor="ctr"/>
-          <a:lstStyle/>
-          <a:p>
-            <a:pPr algn="ctr"/>
-          </a:p>
-        </p:txBody>
-      </p:sp>
-      <p:sp>
-        <p:nvSpPr>
-          <p:cNvPr id="4" name="Rectangle 3"/>
-          <p:cNvSpPr/>
-          <p:nvPr/>
-        </p:nvSpPr>
-        <p:spPr>
-          <a:xfrm>
-            <a:off x="0" y="0"/>
-            <a:ext cx="63500" cy="6858000"/>
-          </a:xfrm>
-          <a:prstGeom prst="rect">
-            <a:avLst/>
-          </a:prstGeom>
-          <a:solidFill>
-            <a:srgbClr val="13B9BF"/>
-          </a:solidFill>
-          <a:ln>
-            <a:noFill/>
-          </a:ln>
-        </p:spPr>
-        <p:style>
-          <a:lnRef idx="1">
-            <a:schemeClr val="accent1"/>
-          </a:lnRef>
-          <a:fillRef idx="3">
-            <a:schemeClr val="accent1"/>
-          </a:fillRef>
-          <a:effectRef idx="2">
-            <a:schemeClr val="accent1"/>
-          </a:effectRef>
-          <a:fontRef idx="minor">
-            <a:schemeClr val="lt1"/>
-          </a:fontRef>
-        </p:style>
-        <p:txBody>
-          <a:bodyPr rtlCol="0" anchor="ctr"/>
-          <a:lstStyle/>
-          <a:p>
-            <a:pPr algn="ctr"/>
-          </a:p>
-        </p:txBody>
-      </p:sp>
-      <p:pic>
-        <p:nvPicPr>
-          <p:cNvPr id="5" name="Picture 4" descr="logo_round_bright.png"/>
-          <p:cNvPicPr>
-            <a:picLocks noChangeAspect="1"/>
-          </p:cNvPicPr>
-          <p:nvPr/>
-        </p:nvPicPr>
-        <p:blipFill>
-          <a:blip r:embed="rId3"/>
-          <a:stretch>
-            <a:fillRect/>
-          </a:stretch>
-        </p:blipFill>
-        <p:spPr>
-          <a:xfrm>
-            <a:off x="91440" y="54864"/>
-            <a:ext cx="1463040" cy="848563"/>
-          </a:xfrm>
-          <a:prstGeom prst="rect">
-            <a:avLst/>
-          </a:prstGeom>
-        </p:spPr>
-      </p:pic>
-      <p:sp>
-        <p:nvSpPr>
-          <p:cNvPr id="6" name="Rectangle 5"/>
-          <p:cNvSpPr/>
-          <p:nvPr/>
-        </p:nvSpPr>
-        <p:spPr>
-          <a:xfrm>
-            <a:off x="502920" y="365760"/>
-            <a:ext cx="1737360" cy="301752"/>
-          </a:xfrm>
-          <a:prstGeom prst="rect">
-            <a:avLst/>
-          </a:prstGeom>
-          <a:solidFill>
-            <a:srgbClr val="2FDFE5"/>
-          </a:solidFill>
-          <a:ln>
-            <a:noFill/>
-          </a:ln>
-        </p:spPr>
-        <p:style>
-          <a:lnRef idx="1">
-            <a:schemeClr val="accent1"/>
-          </a:lnRef>
-          <a:fillRef idx="3">
-            <a:schemeClr val="accent1"/>
-          </a:fillRef>
-          <a:effectRef idx="2">
-            <a:schemeClr val="accent1"/>
-          </a:effectRef>
-          <a:fontRef idx="minor">
-            <a:schemeClr val="lt1"/>
-          </a:fontRef>
-        </p:style>
-        <p:txBody lIns="101600" tIns="25400" rIns="101600" bIns="25400">
-          <a:bodyPr rtlCol="0" anchor="ctr" wrap="none"/>
-          <a:lstStyle/>
-          <a:p>
-            <a:pPr algn="ctr"/>
-            <a:r>
-              <a:rPr sz="1100" b="1">
-                <a:solidFill>
-                  <a:srgbClr val="0A1638"/>
-                </a:solidFill>
-              </a:rPr>
-              <a:t>FASE 5</a:t>
-            </a:r>
-          </a:p>
-        </p:txBody>
-      </p:sp>
-      <p:sp>
-        <p:nvSpPr>
-          <p:cNvPr id="7" name="TextBox 6"/>
-          <p:cNvSpPr txBox="1"/>
-          <p:nvPr/>
-        </p:nvSpPr>
-        <p:spPr>
-          <a:xfrm>
-            <a:off x="502920" y="731520"/>
-            <a:ext cx="8961120" cy="960120"/>
-          </a:xfrm>
-          <a:prstGeom prst="rect">
-            <a:avLst/>
-          </a:prstGeom>
-          <a:noFill/>
-        </p:spPr>
-        <p:txBody lIns="0" tIns="0" rIns="0" bIns="0">
-          <a:bodyPr wrap="square">
-            <a:spAutoFit/>
-          </a:bodyPr>
-          <a:lstStyle/>
-          <a:p>
-            <a:pPr algn="l"/>
-            <a:r>
-              <a:rPr sz="4000" b="1">
-                <a:solidFill>
-                  <a:srgbClr val="FFFFFF"/>
-                </a:solidFill>
-              </a:rPr>
-              <a:t>Servicios </a:t>
-            </a:r>
-            <a:r>
-              <a:rPr sz="4000" b="1">
-                <a:solidFill>
-                  <a:srgbClr val="2FDFE5"/>
-                </a:solidFill>
-              </a:rPr>
-              <a:t>adicionales</a:t>
-            </a:r>
-          </a:p>
-        </p:txBody>
-      </p:sp>
-      <p:sp>
-        <p:nvSpPr>
-          <p:cNvPr id="8" name="Rectangle 7"/>
-          <p:cNvSpPr/>
-          <p:nvPr/>
-        </p:nvSpPr>
-        <p:spPr>
-          <a:xfrm>
-            <a:off x="502920" y="1737360"/>
-            <a:ext cx="4389120" cy="31750"/>
-          </a:xfrm>
-          <a:prstGeom prst="rect">
-            <a:avLst/>
-          </a:prstGeom>
-          <a:solidFill>
-            <a:srgbClr val="2FDFE5"/>
-          </a:solidFill>
-          <a:ln>
-            <a:noFill/>
-          </a:ln>
-        </p:spPr>
-        <p:style>
-          <a:lnRef idx="1">
-            <a:schemeClr val="accent1"/>
-          </a:lnRef>
-          <a:fillRef idx="3">
-            <a:schemeClr val="accent1"/>
-          </a:fillRef>
-          <a:effectRef idx="2">
-            <a:schemeClr val="accent1"/>
-          </a:effectRef>
-          <a:fontRef idx="minor">
-            <a:schemeClr val="lt1"/>
-          </a:fontRef>
-        </p:style>
-        <p:txBody>
-          <a:bodyPr rtlCol="0" anchor="ctr"/>
-          <a:lstStyle/>
-          <a:p>
-            <a:pPr algn="ctr"/>
-          </a:p>
-        </p:txBody>
-      </p:sp>
-      <p:sp>
-        <p:nvSpPr>
-          <p:cNvPr id="9" name="Rectangle 8"/>
-          <p:cNvSpPr/>
-          <p:nvPr/>
-        </p:nvSpPr>
-        <p:spPr>
-          <a:xfrm>
-            <a:off x="502920" y="1920240"/>
-            <a:ext cx="5579211" cy="1993392"/>
-          </a:xfrm>
-          <a:prstGeom prst="rect">
-            <a:avLst/>
-          </a:prstGeom>
-          <a:solidFill>
-            <a:srgbClr val="081438"/>
-          </a:solidFill>
-          <a:ln w="12700">
-            <a:solidFill>
-              <a:srgbClr val="2FDFE5"/>
-            </a:solidFill>
-          </a:ln>
-        </p:spPr>
-        <p:style>
-          <a:lnRef idx="1">
-            <a:schemeClr val="accent1"/>
-          </a:lnRef>
-          <a:fillRef idx="3">
-            <a:schemeClr val="accent1"/>
-          </a:fillRef>
-          <a:effectRef idx="2">
-            <a:schemeClr val="accent1"/>
-          </a:effectRef>
-          <a:fontRef idx="minor">
-            <a:schemeClr val="lt1"/>
-          </a:fontRef>
-        </p:style>
-        <p:txBody>
-          <a:bodyPr rtlCol="0" anchor="ctr"/>
-          <a:lstStyle/>
-          <a:p>
-            <a:pPr algn="ctr"/>
-          </a:p>
-        </p:txBody>
-      </p:sp>
-      <p:sp>
-        <p:nvSpPr>
-          <p:cNvPr id="10" name="Rectangle 9"/>
-          <p:cNvSpPr/>
-          <p:nvPr/>
-        </p:nvSpPr>
-        <p:spPr>
-          <a:xfrm>
-            <a:off x="502920" y="1920240"/>
-            <a:ext cx="5579211" cy="63500"/>
-          </a:xfrm>
-          <a:prstGeom prst="rect">
-            <a:avLst/>
-          </a:prstGeom>
-          <a:solidFill>
-            <a:srgbClr val="2FDFE5"/>
-          </a:solidFill>
-          <a:ln>
-            <a:noFill/>
-          </a:ln>
-        </p:spPr>
-        <p:style>
-          <a:lnRef idx="1">
-            <a:schemeClr val="accent1"/>
-          </a:lnRef>
-          <a:fillRef idx="3">
-            <a:schemeClr val="accent1"/>
-          </a:fillRef>
-          <a:effectRef idx="2">
-            <a:schemeClr val="accent1"/>
-          </a:effectRef>
-          <a:fontRef idx="minor">
-            <a:schemeClr val="lt1"/>
-          </a:fontRef>
-        </p:style>
-        <p:txBody>
-          <a:bodyPr rtlCol="0" anchor="ctr"/>
-          <a:lstStyle/>
-          <a:p>
-            <a:pPr algn="ctr"/>
-          </a:p>
-        </p:txBody>
-      </p:sp>
-      <p:sp>
-        <p:nvSpPr>
-          <p:cNvPr id="11" name="TextBox 10"/>
-          <p:cNvSpPr txBox="1"/>
-          <p:nvPr/>
-        </p:nvSpPr>
-        <p:spPr>
-          <a:xfrm>
-            <a:off x="685800" y="2103120"/>
-            <a:ext cx="5213451" cy="585216"/>
-          </a:xfrm>
-          <a:prstGeom prst="rect">
-            <a:avLst/>
-          </a:prstGeom>
-          <a:noFill/>
-        </p:spPr>
-        <p:txBody lIns="38100" tIns="63500" rIns="38100" bIns="25400">
-          <a:bodyPr wrap="square">
-            <a:spAutoFit/>
-          </a:bodyPr>
-          <a:lstStyle/>
-          <a:p>
-            <a:pPr algn="l"/>
-            <a:r>
-              <a:rPr sz="1700" b="1">
-                <a:solidFill>
-                  <a:srgbClr val="2FDFE5"/>
-                </a:solidFill>
-              </a:rPr>
-              <a:t>1  </a:t>
-            </a:r>
-            <a:r>
-              <a:rPr sz="1700" b="1">
-                <a:solidFill>
-                  <a:srgbClr val="FFFFFF"/>
-                </a:solidFill>
-              </a:rPr>
-              <a:t>Vía monitoria</a:t>
-            </a:r>
-          </a:p>
-        </p:txBody>
-      </p:sp>
-      <p:sp>
-        <p:nvSpPr>
-          <p:cNvPr id="12" name="Rectangle 11"/>
-          <p:cNvSpPr/>
-          <p:nvPr/>
-        </p:nvSpPr>
-        <p:spPr>
-          <a:xfrm>
-            <a:off x="649224" y="2779776"/>
-            <a:ext cx="5286603" cy="19050"/>
-          </a:xfrm>
-          <a:prstGeom prst="rect">
-            <a:avLst/>
-          </a:prstGeom>
-          <a:solidFill>
-            <a:srgbClr val="13B9BF"/>
-          </a:solidFill>
-          <a:ln>
-            <a:noFill/>
-          </a:ln>
-        </p:spPr>
-        <p:style>
-          <a:lnRef idx="1">
-            <a:schemeClr val="accent1"/>
-          </a:lnRef>
-          <a:fillRef idx="3">
-            <a:schemeClr val="accent1"/>
-          </a:fillRef>
-          <a:effectRef idx="2">
-            <a:schemeClr val="accent1"/>
-          </a:effectRef>
-          <a:fontRef idx="minor">
-            <a:schemeClr val="lt1"/>
-          </a:fontRef>
-        </p:style>
-        <p:txBody>
-          <a:bodyPr rtlCol="0" anchor="ctr"/>
-          <a:lstStyle/>
-          <a:p>
-            <a:pPr algn="ctr"/>
-          </a:p>
-        </p:txBody>
-      </p:sp>
-      <p:sp>
-        <p:nvSpPr>
-          <p:cNvPr id="13" name="TextBox 12"/>
-          <p:cNvSpPr txBox="1"/>
-          <p:nvPr/>
-        </p:nvSpPr>
-        <p:spPr>
-          <a:xfrm>
-            <a:off x="649224" y="2881376"/>
-            <a:ext cx="5286603" cy="1005840"/>
-          </a:xfrm>
-          <a:prstGeom prst="rect">
-            <a:avLst/>
-          </a:prstGeom>
-          <a:noFill/>
-        </p:spPr>
-        <p:txBody lIns="50800" tIns="50800" rIns="50800" bIns="50800">
-          <a:bodyPr wrap="square">
-            <a:spAutoFit/>
-          </a:bodyPr>
-          <a:lstStyle/>
-          <a:p>
-            <a:pPr algn="l"/>
-            <a:r>
-              <a:rPr sz="1500">
-                <a:solidFill>
-                  <a:srgbClr val="D8EAFF"/>
-                </a:solidFill>
-              </a:rPr>
-              <a:t>Tramitación de procedimientos monitorios para reclamar la deuda por vía judicial cuando la vía amistosa no es suficiente.</a:t>
-            </a:r>
-          </a:p>
-        </p:txBody>
-      </p:sp>
-      <p:sp>
-        <p:nvSpPr>
-          <p:cNvPr id="14" name="Rectangle 13"/>
-          <p:cNvSpPr/>
-          <p:nvPr/>
-        </p:nvSpPr>
-        <p:spPr>
-          <a:xfrm>
-            <a:off x="6283299" y="1920240"/>
-            <a:ext cx="5579211" cy="1993392"/>
-          </a:xfrm>
-          <a:prstGeom prst="rect">
-            <a:avLst/>
-          </a:prstGeom>
-          <a:solidFill>
-            <a:srgbClr val="081438"/>
-          </a:solidFill>
-          <a:ln w="12700">
-            <a:solidFill>
-              <a:srgbClr val="2FDFE5"/>
-            </a:solidFill>
-          </a:ln>
-        </p:spPr>
-        <p:style>
-          <a:lnRef idx="1">
-            <a:schemeClr val="accent1"/>
-          </a:lnRef>
-          <a:fillRef idx="3">
-            <a:schemeClr val="accent1"/>
-          </a:fillRef>
-          <a:effectRef idx="2">
-            <a:schemeClr val="accent1"/>
-          </a:effectRef>
-          <a:fontRef idx="minor">
-            <a:schemeClr val="lt1"/>
-          </a:fontRef>
-        </p:style>
-        <p:txBody>
-          <a:bodyPr rtlCol="0" anchor="ctr"/>
-          <a:lstStyle/>
-          <a:p>
-            <a:pPr algn="ctr"/>
-          </a:p>
-        </p:txBody>
-      </p:sp>
-      <p:sp>
-        <p:nvSpPr>
-          <p:cNvPr id="15" name="Rectangle 14"/>
-          <p:cNvSpPr/>
-          <p:nvPr/>
-        </p:nvSpPr>
-        <p:spPr>
-          <a:xfrm>
-            <a:off x="6283299" y="1920240"/>
-            <a:ext cx="5579211" cy="63500"/>
-          </a:xfrm>
-          <a:prstGeom prst="rect">
-            <a:avLst/>
-          </a:prstGeom>
-          <a:solidFill>
-            <a:srgbClr val="2FDFE5"/>
-          </a:solidFill>
-          <a:ln>
-            <a:noFill/>
-          </a:ln>
-        </p:spPr>
-        <p:style>
-          <a:lnRef idx="1">
-            <a:schemeClr val="accent1"/>
-          </a:lnRef>
-          <a:fillRef idx="3">
-            <a:schemeClr val="accent1"/>
-          </a:fillRef>
-          <a:effectRef idx="2">
-            <a:schemeClr val="accent1"/>
-          </a:effectRef>
-          <a:fontRef idx="minor">
-            <a:schemeClr val="lt1"/>
-          </a:fontRef>
-        </p:style>
-        <p:txBody>
-          <a:bodyPr rtlCol="0" anchor="ctr"/>
-          <a:lstStyle/>
-          <a:p>
-            <a:pPr algn="ctr"/>
-          </a:p>
-        </p:txBody>
-      </p:sp>
-      <p:sp>
-        <p:nvSpPr>
-          <p:cNvPr id="16" name="TextBox 15"/>
-          <p:cNvSpPr txBox="1"/>
-          <p:nvPr/>
-        </p:nvSpPr>
-        <p:spPr>
-          <a:xfrm>
-            <a:off x="6466179" y="2103120"/>
-            <a:ext cx="5213451" cy="585216"/>
-          </a:xfrm>
-          <a:prstGeom prst="rect">
-            <a:avLst/>
-          </a:prstGeom>
-          <a:noFill/>
-        </p:spPr>
-        <p:txBody lIns="38100" tIns="63500" rIns="38100" bIns="25400">
-          <a:bodyPr wrap="square">
-            <a:spAutoFit/>
-          </a:bodyPr>
-          <a:lstStyle/>
-          <a:p>
-            <a:pPr algn="l"/>
-            <a:r>
-              <a:rPr sz="1700" b="1">
-                <a:solidFill>
-                  <a:srgbClr val="2FDFE5"/>
-                </a:solidFill>
-              </a:rPr>
-              <a:t>2  </a:t>
-            </a:r>
-            <a:r>
-              <a:rPr sz="1700" b="1">
-                <a:solidFill>
-                  <a:srgbClr val="FFFFFF"/>
-                </a:solidFill>
-              </a:rPr>
-              <a:t>Valoración y compra de carteras</a:t>
-            </a:r>
-          </a:p>
-        </p:txBody>
-      </p:sp>
-      <p:sp>
-        <p:nvSpPr>
-          <p:cNvPr id="17" name="Rectangle 16"/>
-          <p:cNvSpPr/>
-          <p:nvPr/>
-        </p:nvSpPr>
-        <p:spPr>
-          <a:xfrm>
-            <a:off x="6429603" y="2779776"/>
-            <a:ext cx="5286603" cy="19050"/>
-          </a:xfrm>
-          <a:prstGeom prst="rect">
-            <a:avLst/>
-          </a:prstGeom>
-          <a:solidFill>
-            <a:srgbClr val="13B9BF"/>
-          </a:solidFill>
-          <a:ln>
-            <a:noFill/>
-          </a:ln>
-        </p:spPr>
-        <p:style>
-          <a:lnRef idx="1">
-            <a:schemeClr val="accent1"/>
-          </a:lnRef>
-          <a:fillRef idx="3">
-            <a:schemeClr val="accent1"/>
-          </a:fillRef>
-          <a:effectRef idx="2">
-            <a:schemeClr val="accent1"/>
-          </a:effectRef>
-          <a:fontRef idx="minor">
-            <a:schemeClr val="lt1"/>
-          </a:fontRef>
-        </p:style>
-        <p:txBody>
-          <a:bodyPr rtlCol="0" anchor="ctr"/>
-          <a:lstStyle/>
-          <a:p>
-            <a:pPr algn="ctr"/>
-          </a:p>
-        </p:txBody>
-      </p:sp>
-      <p:sp>
-        <p:nvSpPr>
-          <p:cNvPr id="18" name="TextBox 17"/>
-          <p:cNvSpPr txBox="1"/>
-          <p:nvPr/>
-        </p:nvSpPr>
-        <p:spPr>
-          <a:xfrm>
-            <a:off x="6429603" y="2881376"/>
-            <a:ext cx="5286603" cy="1005840"/>
-          </a:xfrm>
-          <a:prstGeom prst="rect">
-            <a:avLst/>
-          </a:prstGeom>
-          <a:noFill/>
-        </p:spPr>
-        <p:txBody lIns="50800" tIns="50800" rIns="50800" bIns="50800">
-          <a:bodyPr wrap="square">
-            <a:spAutoFit/>
-          </a:bodyPr>
-          <a:lstStyle/>
-          <a:p>
-            <a:pPr algn="l"/>
-            <a:r>
-              <a:rPr sz="1500">
-                <a:solidFill>
-                  <a:srgbClr val="D8EAFF"/>
-                </a:solidFill>
-              </a:rPr>
-              <a:t>Análisis, valoración y adquisición de carteras de deuda fallida para maximizar la recuperación de activos.</a:t>
-            </a:r>
-          </a:p>
-        </p:txBody>
-      </p:sp>
-      <p:sp>
-        <p:nvSpPr>
-          <p:cNvPr id="19" name="Rectangle 18"/>
-          <p:cNvSpPr/>
-          <p:nvPr/>
-        </p:nvSpPr>
-        <p:spPr>
-          <a:xfrm>
-            <a:off x="502920" y="4059936"/>
-            <a:ext cx="5579211" cy="1993392"/>
-          </a:xfrm>
-          <a:prstGeom prst="rect">
-            <a:avLst/>
-          </a:prstGeom>
-          <a:solidFill>
-            <a:srgbClr val="081438"/>
-          </a:solidFill>
-          <a:ln w="12700">
-            <a:solidFill>
-              <a:srgbClr val="2FDFE5"/>
-            </a:solidFill>
-          </a:ln>
-        </p:spPr>
-        <p:style>
-          <a:lnRef idx="1">
-            <a:schemeClr val="accent1"/>
-          </a:lnRef>
-          <a:fillRef idx="3">
-            <a:schemeClr val="accent1"/>
-          </a:fillRef>
-          <a:effectRef idx="2">
-            <a:schemeClr val="accent1"/>
-          </a:effectRef>
-          <a:fontRef idx="minor">
-            <a:schemeClr val="lt1"/>
-          </a:fontRef>
-        </p:style>
-        <p:txBody>
-          <a:bodyPr rtlCol="0" anchor="ctr"/>
-          <a:lstStyle/>
-          <a:p>
-            <a:pPr algn="ctr"/>
-          </a:p>
-        </p:txBody>
-      </p:sp>
-      <p:sp>
-        <p:nvSpPr>
-          <p:cNvPr id="20" name="Rectangle 19"/>
-          <p:cNvSpPr/>
-          <p:nvPr/>
-        </p:nvSpPr>
-        <p:spPr>
-          <a:xfrm>
-            <a:off x="502920" y="4059936"/>
-            <a:ext cx="5579211" cy="63500"/>
-          </a:xfrm>
-          <a:prstGeom prst="rect">
-            <a:avLst/>
-          </a:prstGeom>
-          <a:solidFill>
-            <a:srgbClr val="2FDFE5"/>
-          </a:solidFill>
-          <a:ln>
-            <a:noFill/>
-          </a:ln>
-        </p:spPr>
-        <p:style>
-          <a:lnRef idx="1">
-            <a:schemeClr val="accent1"/>
-          </a:lnRef>
-          <a:fillRef idx="3">
-            <a:schemeClr val="accent1"/>
-          </a:fillRef>
-          <a:effectRef idx="2">
-            <a:schemeClr val="accent1"/>
-          </a:effectRef>
-          <a:fontRef idx="minor">
-            <a:schemeClr val="lt1"/>
-          </a:fontRef>
-        </p:style>
-        <p:txBody>
-          <a:bodyPr rtlCol="0" anchor="ctr"/>
-          <a:lstStyle/>
-          <a:p>
-            <a:pPr algn="ctr"/>
-          </a:p>
-        </p:txBody>
-      </p:sp>
-      <p:sp>
-        <p:nvSpPr>
-          <p:cNvPr id="21" name="TextBox 20"/>
-          <p:cNvSpPr txBox="1"/>
-          <p:nvPr/>
-        </p:nvSpPr>
-        <p:spPr>
-          <a:xfrm>
-            <a:off x="685800" y="4242816"/>
-            <a:ext cx="5213451" cy="585216"/>
-          </a:xfrm>
-          <a:prstGeom prst="rect">
-            <a:avLst/>
-          </a:prstGeom>
-          <a:noFill/>
-        </p:spPr>
-        <p:txBody lIns="38100" tIns="63500" rIns="38100" bIns="25400">
-          <a:bodyPr wrap="square">
-            <a:spAutoFit/>
-          </a:bodyPr>
-          <a:lstStyle/>
-          <a:p>
-            <a:pPr algn="l"/>
-            <a:r>
-              <a:rPr sz="1700" b="1">
-                <a:solidFill>
-                  <a:srgbClr val="2FDFE5"/>
-                </a:solidFill>
-              </a:rPr>
-              <a:t>3  </a:t>
-            </a:r>
-            <a:r>
-              <a:rPr sz="1700" b="1">
-                <a:solidFill>
-                  <a:srgbClr val="FFFFFF"/>
-                </a:solidFill>
-              </a:rPr>
-              <a:t>Análisis de solvencia</a:t>
-            </a:r>
-          </a:p>
-        </p:txBody>
-      </p:sp>
-      <p:sp>
-        <p:nvSpPr>
-          <p:cNvPr id="22" name="Rectangle 21"/>
-          <p:cNvSpPr/>
-          <p:nvPr/>
-        </p:nvSpPr>
-        <p:spPr>
-          <a:xfrm>
-            <a:off x="649224" y="4919472"/>
-            <a:ext cx="5286603" cy="19050"/>
-          </a:xfrm>
-          <a:prstGeom prst="rect">
-            <a:avLst/>
-          </a:prstGeom>
-          <a:solidFill>
-            <a:srgbClr val="13B9BF"/>
-          </a:solidFill>
-          <a:ln>
-            <a:noFill/>
-          </a:ln>
-        </p:spPr>
-        <p:style>
-          <a:lnRef idx="1">
-            <a:schemeClr val="accent1"/>
-          </a:lnRef>
-          <a:fillRef idx="3">
-            <a:schemeClr val="accent1"/>
-          </a:fillRef>
-          <a:effectRef idx="2">
-            <a:schemeClr val="accent1"/>
-          </a:effectRef>
-          <a:fontRef idx="minor">
-            <a:schemeClr val="lt1"/>
-          </a:fontRef>
-        </p:style>
-        <p:txBody>
-          <a:bodyPr rtlCol="0" anchor="ctr"/>
-          <a:lstStyle/>
-          <a:p>
-            <a:pPr algn="ctr"/>
-          </a:p>
-        </p:txBody>
-      </p:sp>
-      <p:sp>
-        <p:nvSpPr>
-          <p:cNvPr id="23" name="TextBox 22"/>
-          <p:cNvSpPr txBox="1"/>
-          <p:nvPr/>
-        </p:nvSpPr>
-        <p:spPr>
-          <a:xfrm>
-            <a:off x="649224" y="5021072"/>
-            <a:ext cx="5286603" cy="1005840"/>
-          </a:xfrm>
-          <a:prstGeom prst="rect">
-            <a:avLst/>
-          </a:prstGeom>
-          <a:noFill/>
-        </p:spPr>
-        <p:txBody lIns="50800" tIns="50800" rIns="50800" bIns="50800">
-          <a:bodyPr wrap="square">
-            <a:spAutoFit/>
-          </a:bodyPr>
-          <a:lstStyle/>
-          <a:p>
-            <a:pPr algn="l"/>
-            <a:r>
-              <a:rPr sz="1500">
-                <a:solidFill>
-                  <a:srgbClr val="D8EAFF"/>
-                </a:solidFill>
-              </a:rPr>
-              <a:t>Estudio de la capacidad económica real del deudor para orientar mejor la estrategia de recobro.</a:t>
-            </a:r>
-          </a:p>
-        </p:txBody>
-      </p:sp>
-      <p:sp>
-        <p:nvSpPr>
-          <p:cNvPr id="24" name="Rectangle 23"/>
-          <p:cNvSpPr/>
-          <p:nvPr/>
-        </p:nvSpPr>
-        <p:spPr>
-          <a:xfrm>
-            <a:off x="6283299" y="4059936"/>
-            <a:ext cx="5579211" cy="1993392"/>
-          </a:xfrm>
-          <a:prstGeom prst="rect">
-            <a:avLst/>
-          </a:prstGeom>
-          <a:solidFill>
-            <a:srgbClr val="081438"/>
-          </a:solidFill>
-          <a:ln w="12700">
-            <a:solidFill>
-              <a:srgbClr val="2FDFE5"/>
-            </a:solidFill>
-          </a:ln>
-        </p:spPr>
-        <p:style>
-          <a:lnRef idx="1">
-            <a:schemeClr val="accent1"/>
-          </a:lnRef>
-          <a:fillRef idx="3">
-            <a:schemeClr val="accent1"/>
-          </a:fillRef>
-          <a:effectRef idx="2">
-            <a:schemeClr val="accent1"/>
-          </a:effectRef>
-          <a:fontRef idx="minor">
-            <a:schemeClr val="lt1"/>
-          </a:fontRef>
-        </p:style>
-        <p:txBody>
-          <a:bodyPr rtlCol="0" anchor="ctr"/>
-          <a:lstStyle/>
-          <a:p>
-            <a:pPr algn="ctr"/>
-          </a:p>
-        </p:txBody>
-      </p:sp>
-      <p:sp>
-        <p:nvSpPr>
-          <p:cNvPr id="25" name="Rectangle 24"/>
-          <p:cNvSpPr/>
-          <p:nvPr/>
-        </p:nvSpPr>
-        <p:spPr>
-          <a:xfrm>
-            <a:off x="6283299" y="4059936"/>
-            <a:ext cx="5579211" cy="63500"/>
-          </a:xfrm>
-          <a:prstGeom prst="rect">
-            <a:avLst/>
-          </a:prstGeom>
-          <a:solidFill>
-            <a:srgbClr val="2FDFE5"/>
-          </a:solidFill>
-          <a:ln>
-            <a:noFill/>
-          </a:ln>
-        </p:spPr>
-        <p:style>
-          <a:lnRef idx="1">
-            <a:schemeClr val="accent1"/>
-          </a:lnRef>
-          <a:fillRef idx="3">
-            <a:schemeClr val="accent1"/>
-          </a:fillRef>
-          <a:effectRef idx="2">
-            <a:schemeClr val="accent1"/>
-          </a:effectRef>
-          <a:fontRef idx="minor">
-            <a:schemeClr val="lt1"/>
-          </a:fontRef>
-        </p:style>
-        <p:txBody>
-          <a:bodyPr rtlCol="0" anchor="ctr"/>
-          <a:lstStyle/>
-          <a:p>
-            <a:pPr algn="ctr"/>
-          </a:p>
-        </p:txBody>
-      </p:sp>
-      <p:sp>
-        <p:nvSpPr>
-          <p:cNvPr id="26" name="TextBox 25"/>
-          <p:cNvSpPr txBox="1"/>
-          <p:nvPr/>
-        </p:nvSpPr>
-        <p:spPr>
-          <a:xfrm>
-            <a:off x="6466179" y="4242816"/>
-            <a:ext cx="5213451" cy="585216"/>
-          </a:xfrm>
-          <a:prstGeom prst="rect">
-            <a:avLst/>
-          </a:prstGeom>
-          <a:noFill/>
-        </p:spPr>
-        <p:txBody lIns="38100" tIns="63500" rIns="38100" bIns="25400">
-          <a:bodyPr wrap="square">
-            <a:spAutoFit/>
-          </a:bodyPr>
-          <a:lstStyle/>
-          <a:p>
-            <a:pPr algn="l"/>
-            <a:r>
-              <a:rPr sz="1700" b="1">
-                <a:solidFill>
-                  <a:srgbClr val="2FDFE5"/>
-                </a:solidFill>
-              </a:rPr>
-              <a:t>4  </a:t>
-            </a:r>
-            <a:r>
-              <a:rPr sz="1700" b="1">
-                <a:solidFill>
-                  <a:srgbClr val="FFFFFF"/>
-                </a:solidFill>
-              </a:rPr>
-              <a:t>Sello preventivo Sendacredit</a:t>
-            </a:r>
-          </a:p>
-        </p:txBody>
-      </p:sp>
-      <p:sp>
-        <p:nvSpPr>
-          <p:cNvPr id="27" name="Rectangle 26"/>
-          <p:cNvSpPr/>
-          <p:nvPr/>
-        </p:nvSpPr>
-        <p:spPr>
-          <a:xfrm>
-            <a:off x="6429603" y="4919472"/>
-            <a:ext cx="5286603" cy="19050"/>
-          </a:xfrm>
-          <a:prstGeom prst="rect">
-            <a:avLst/>
-          </a:prstGeom>
-          <a:solidFill>
-            <a:srgbClr val="13B9BF"/>
-          </a:solidFill>
-          <a:ln>
-            <a:noFill/>
-          </a:ln>
-        </p:spPr>
-        <p:style>
-          <a:lnRef idx="1">
-            <a:schemeClr val="accent1"/>
-          </a:lnRef>
-          <a:fillRef idx="3">
-            <a:schemeClr val="accent1"/>
-          </a:fillRef>
-          <a:effectRef idx="2">
-            <a:schemeClr val="accent1"/>
-          </a:effectRef>
-          <a:fontRef idx="minor">
-            <a:schemeClr val="lt1"/>
-          </a:fontRef>
-        </p:style>
-        <p:txBody>
-          <a:bodyPr rtlCol="0" anchor="ctr"/>
-          <a:lstStyle/>
-          <a:p>
-            <a:pPr algn="ctr"/>
-          </a:p>
-        </p:txBody>
-      </p:sp>
-      <p:sp>
-        <p:nvSpPr>
-          <p:cNvPr id="28" name="TextBox 27"/>
-          <p:cNvSpPr txBox="1"/>
-          <p:nvPr/>
-        </p:nvSpPr>
-        <p:spPr>
-          <a:xfrm>
-            <a:off x="6429603" y="5021072"/>
-            <a:ext cx="4079595" cy="1005840"/>
-          </a:xfrm>
-          <a:prstGeom prst="rect">
-            <a:avLst/>
-          </a:prstGeom>
-          <a:noFill/>
-        </p:spPr>
-        <p:txBody lIns="50800" tIns="50800" rIns="50800" bIns="50800">
-          <a:bodyPr wrap="square">
-            <a:spAutoFit/>
-          </a:bodyPr>
-          <a:lstStyle/>
-          <a:p>
-            <a:pPr algn="l"/>
-            <a:r>
-              <a:rPr sz="1500">
-                <a:solidFill>
-                  <a:srgbClr val="D8EAFF"/>
-                </a:solidFill>
-              </a:rPr>
-              <a:t>Siéntase protegido frente a sus impagados.</a:t>
-            </a:r>
-          </a:p>
-        </p:txBody>
-      </p:sp>
-      <p:pic>
-        <p:nvPicPr>
-          <p:cNvPr id="29" name="Picture 28" descr="seal.png"/>
-          <p:cNvPicPr>
-            <a:picLocks noChangeAspect="1"/>
-          </p:cNvPicPr>
-          <p:nvPr/>
-        </p:nvPicPr>
-        <p:blipFill>
-          <a:blip r:embed="rId4"/>
-          <a:stretch>
-            <a:fillRect/>
-          </a:stretch>
-        </p:blipFill>
-        <p:spPr>
-          <a:xfrm>
-            <a:off x="10582351" y="4966208"/>
-            <a:ext cx="1115568" cy="1115568"/>
-          </a:xfrm>
-          <a:prstGeom prst="rect">
-            <a:avLst/>
-          </a:prstGeom>
-        </p:spPr>
-      </p:pic>
     </p:spTree>
   </p:cSld>
   <p:clrMapOvr>
@@ -8929,7 +4393,7 @@
                         <p:par>
                           <p:cTn id="15" fill="hold">
                             <p:stCondLst>
-                              <p:cond delay="140"/>
+                              <p:cond delay="160"/>
                             </p:stCondLst>
                             <p:childTnLst>
                               <p:animEffect transition="in" filter="wipe(up)">
@@ -8946,7 +4410,7 @@
                         <p:par>
                           <p:cTn id="17" fill="hold">
                             <p:stCondLst>
-                              <p:cond delay="140"/>
+                              <p:cond delay="160"/>
                             </p:stCondLst>
                             <p:childTnLst>
                               <p:animEffect transition="in" filter="wipe(up)">
@@ -8963,7 +4427,7 @@
                         <p:par>
                           <p:cTn id="19" fill="hold">
                             <p:stCondLst>
-                              <p:cond delay="140"/>
+                              <p:cond delay="160"/>
                             </p:stCondLst>
                             <p:childTnLst>
                               <p:animEffect transition="in" filter="wipe(up)">
@@ -8980,7 +4444,7 @@
                         <p:par>
                           <p:cTn id="21" fill="hold">
                             <p:stCondLst>
-                              <p:cond delay="140"/>
+                              <p:cond delay="160"/>
                             </p:stCondLst>
                             <p:childTnLst>
                               <p:animEffect transition="in" filter="wipe(up)">
@@ -8997,6 +4461,4422 @@
                         <p:par>
                           <p:cTn id="23" fill="hold">
                             <p:stCondLst>
+                              <p:cond delay="160"/>
+                            </p:stCondLst>
+                            <p:childTnLst>
+                              <p:animEffect transition="in" filter="wipe(up)">
+                                <p:cBhvr>
+                                  <p:cTn id="24" dur="380" fill="hold"/>
+                                  <p:tgtEl>
+                                    <p:spTgt spid="18"/>
+                                  </p:tgtEl>
+                                </p:cBhvr>
+                              </p:animEffect>
+                            </p:childTnLst>
+                          </p:cTn>
+                        </p:par>
+                      </p:childTnLst>
+                    </p:cTn>
+                  </p:par>
+                </p:childTnLst>
+              </p:cTn>
+              <p:prevCondLst>
+                <p:cond evt="onPrevClick" delay="0"/>
+              </p:prevCondLst>
+              <p:nextCondLst>
+                <p:cond evt="onNextClick" delay="0"/>
+              </p:nextCondLst>
+            </p:seq>
+          </p:childTnLst>
+        </p:cTn>
+      </p:par>
+    </p:tnLst>
+  </p:timing>
+  <p:transition dur="550" spd="fast">
+    <p:push dir="u"/>
+  </p:transition>
+</p:sld>
+</file>
+
+<file path=ppt/slides/slide3.xml><?xml version="1.0" encoding="utf-8"?>
+<p:sld xmlns:a="http://schemas.openxmlformats.org/drawingml/2006/main" xmlns:p="http://schemas.openxmlformats.org/presentationml/2006/main" xmlns:r="http://schemas.openxmlformats.org/officeDocument/2006/relationships">
+  <p:cSld>
+    <p:spTree>
+      <p:nvGrpSpPr>
+        <p:cNvPr id="1" name=""/>
+        <p:cNvGrpSpPr/>
+        <p:nvPr/>
+      </p:nvGrpSpPr>
+      <p:grpSpPr/>
+      <p:pic>
+        <p:nvPicPr>
+          <p:cNvPr id="2" name="Picture 1" descr="content_bg.png"/>
+          <p:cNvPicPr>
+            <a:picLocks noChangeAspect="1"/>
+          </p:cNvPicPr>
+          <p:nvPr/>
+        </p:nvPicPr>
+        <p:blipFill>
+          <a:blip r:embed="rId2"/>
+          <a:stretch>
+            <a:fillRect/>
+          </a:stretch>
+        </p:blipFill>
+        <p:spPr>
+          <a:xfrm>
+            <a:off x="0" y="0"/>
+            <a:ext cx="12191695" cy="6858000"/>
+          </a:xfrm>
+          <a:prstGeom prst="rect">
+            <a:avLst/>
+          </a:prstGeom>
+        </p:spPr>
+      </p:pic>
+      <p:sp>
+        <p:nvSpPr>
+          <p:cNvPr id="3" name="Rectangle 2"/>
+          <p:cNvSpPr/>
+          <p:nvPr/>
+        </p:nvSpPr>
+        <p:spPr>
+          <a:xfrm>
+            <a:off x="0" y="0"/>
+            <a:ext cx="12191695" cy="50800"/>
+          </a:xfrm>
+          <a:prstGeom prst="rect">
+            <a:avLst/>
+          </a:prstGeom>
+          <a:solidFill>
+            <a:srgbClr val="2FDFE5"/>
+          </a:solidFill>
+          <a:ln>
+            <a:noFill/>
+          </a:ln>
+        </p:spPr>
+        <p:style>
+          <a:lnRef idx="1">
+            <a:schemeClr val="accent1"/>
+          </a:lnRef>
+          <a:fillRef idx="3">
+            <a:schemeClr val="accent1"/>
+          </a:fillRef>
+          <a:effectRef idx="2">
+            <a:schemeClr val="accent1"/>
+          </a:effectRef>
+          <a:fontRef idx="minor">
+            <a:schemeClr val="lt1"/>
+          </a:fontRef>
+        </p:style>
+        <p:txBody>
+          <a:bodyPr rtlCol="0" anchor="ctr"/>
+          <a:lstStyle/>
+          <a:p>
+            <a:pPr algn="ctr"/>
+          </a:p>
+        </p:txBody>
+      </p:sp>
+      <p:sp>
+        <p:nvSpPr>
+          <p:cNvPr id="4" name="Rectangle 3"/>
+          <p:cNvSpPr/>
+          <p:nvPr/>
+        </p:nvSpPr>
+        <p:spPr>
+          <a:xfrm>
+            <a:off x="0" y="0"/>
+            <a:ext cx="63500" cy="6858000"/>
+          </a:xfrm>
+          <a:prstGeom prst="rect">
+            <a:avLst/>
+          </a:prstGeom>
+          <a:solidFill>
+            <a:srgbClr val="13B9BF"/>
+          </a:solidFill>
+          <a:ln>
+            <a:noFill/>
+          </a:ln>
+        </p:spPr>
+        <p:style>
+          <a:lnRef idx="1">
+            <a:schemeClr val="accent1"/>
+          </a:lnRef>
+          <a:fillRef idx="3">
+            <a:schemeClr val="accent1"/>
+          </a:fillRef>
+          <a:effectRef idx="2">
+            <a:schemeClr val="accent1"/>
+          </a:effectRef>
+          <a:fontRef idx="minor">
+            <a:schemeClr val="lt1"/>
+          </a:fontRef>
+        </p:style>
+        <p:txBody>
+          <a:bodyPr rtlCol="0" anchor="ctr"/>
+          <a:lstStyle/>
+          <a:p>
+            <a:pPr algn="ctr"/>
+          </a:p>
+        </p:txBody>
+      </p:sp>
+      <p:sp>
+        <p:nvSpPr>
+          <p:cNvPr id="5" name="Rectangle 4"/>
+          <p:cNvSpPr/>
+          <p:nvPr/>
+        </p:nvSpPr>
+        <p:spPr>
+          <a:xfrm>
+            <a:off x="502920" y="365760"/>
+            <a:ext cx="1737360" cy="301752"/>
+          </a:xfrm>
+          <a:prstGeom prst="rect">
+            <a:avLst/>
+          </a:prstGeom>
+          <a:solidFill>
+            <a:srgbClr val="2FDFE5"/>
+          </a:solidFill>
+          <a:ln>
+            <a:noFill/>
+          </a:ln>
+        </p:spPr>
+        <p:style>
+          <a:lnRef idx="1">
+            <a:schemeClr val="accent1"/>
+          </a:lnRef>
+          <a:fillRef idx="3">
+            <a:schemeClr val="accent1"/>
+          </a:fillRef>
+          <a:effectRef idx="2">
+            <a:schemeClr val="accent1"/>
+          </a:effectRef>
+          <a:fontRef idx="minor">
+            <a:schemeClr val="lt1"/>
+          </a:fontRef>
+        </p:style>
+        <p:txBody lIns="101600" tIns="25400" rIns="101600" bIns="25400">
+          <a:bodyPr rtlCol="0" anchor="ctr" wrap="none"/>
+          <a:lstStyle/>
+          <a:p>
+            <a:pPr algn="ctr"/>
+            <a:r>
+              <a:rPr sz="1100" b="1">
+                <a:solidFill>
+                  <a:srgbClr val="0A1638"/>
+                </a:solidFill>
+              </a:rPr>
+              <a:t>FASE 2</a:t>
+            </a:r>
+          </a:p>
+        </p:txBody>
+      </p:sp>
+      <p:sp>
+        <p:nvSpPr>
+          <p:cNvPr id="6" name="TextBox 5"/>
+          <p:cNvSpPr txBox="1"/>
+          <p:nvPr/>
+        </p:nvSpPr>
+        <p:spPr>
+          <a:xfrm>
+            <a:off x="502920" y="731520"/>
+            <a:ext cx="8961120" cy="960120"/>
+          </a:xfrm>
+          <a:prstGeom prst="rect">
+            <a:avLst/>
+          </a:prstGeom>
+          <a:noFill/>
+        </p:spPr>
+        <p:txBody lIns="0" tIns="0" rIns="0" bIns="0">
+          <a:bodyPr wrap="square">
+            <a:spAutoFit/>
+          </a:bodyPr>
+          <a:lstStyle/>
+          <a:p>
+            <a:pPr algn="l"/>
+            <a:r>
+              <a:rPr sz="4000" b="1">
+                <a:solidFill>
+                  <a:srgbClr val="FFFFFF"/>
+                </a:solidFill>
+              </a:rPr>
+              <a:t>Activación y </a:t>
+            </a:r>
+            <a:r>
+              <a:rPr sz="4000" b="1">
+                <a:solidFill>
+                  <a:srgbClr val="2FDFE5"/>
+                </a:solidFill>
+              </a:rPr>
+              <a:t>contacto</a:t>
+            </a:r>
+          </a:p>
+        </p:txBody>
+      </p:sp>
+      <p:sp>
+        <p:nvSpPr>
+          <p:cNvPr id="7" name="Rectangle 6"/>
+          <p:cNvSpPr/>
+          <p:nvPr/>
+        </p:nvSpPr>
+        <p:spPr>
+          <a:xfrm>
+            <a:off x="502920" y="1737360"/>
+            <a:ext cx="4389120" cy="31750"/>
+          </a:xfrm>
+          <a:prstGeom prst="rect">
+            <a:avLst/>
+          </a:prstGeom>
+          <a:solidFill>
+            <a:srgbClr val="2FDFE5"/>
+          </a:solidFill>
+          <a:ln>
+            <a:noFill/>
+          </a:ln>
+        </p:spPr>
+        <p:style>
+          <a:lnRef idx="1">
+            <a:schemeClr val="accent1"/>
+          </a:lnRef>
+          <a:fillRef idx="3">
+            <a:schemeClr val="accent1"/>
+          </a:fillRef>
+          <a:effectRef idx="2">
+            <a:schemeClr val="accent1"/>
+          </a:effectRef>
+          <a:fontRef idx="minor">
+            <a:schemeClr val="lt1"/>
+          </a:fontRef>
+        </p:style>
+        <p:txBody>
+          <a:bodyPr rtlCol="0" anchor="ctr"/>
+          <a:lstStyle/>
+          <a:p>
+            <a:pPr algn="ctr"/>
+          </a:p>
+        </p:txBody>
+      </p:sp>
+      <p:sp>
+        <p:nvSpPr>
+          <p:cNvPr id="8" name="TextBox 7"/>
+          <p:cNvSpPr txBox="1"/>
+          <p:nvPr/>
+        </p:nvSpPr>
+        <p:spPr>
+          <a:xfrm>
+            <a:off x="502920" y="1810512"/>
+            <a:ext cx="9265615" cy="384048"/>
+          </a:xfrm>
+          <a:prstGeom prst="rect">
+            <a:avLst/>
+          </a:prstGeom>
+          <a:noFill/>
+        </p:spPr>
+        <p:txBody lIns="0" tIns="0" rIns="0" bIns="0">
+          <a:bodyPr wrap="none">
+            <a:spAutoFit/>
+          </a:bodyPr>
+          <a:lstStyle/>
+          <a:p>
+            <a:pPr algn="l"/>
+            <a:r>
+              <a:rPr sz="1300" i="1">
+                <a:solidFill>
+                  <a:srgbClr val="80A8CC"/>
+                </a:solidFill>
+              </a:rPr>
+              <a:t>Multiplicamos los canales de contacto y buscamos siempre la vía amistosa para llegar a un acuerdo.</a:t>
+            </a:r>
+          </a:p>
+        </p:txBody>
+      </p:sp>
+      <p:sp>
+        <p:nvSpPr>
+          <p:cNvPr id="9" name="Rectangle 8"/>
+          <p:cNvSpPr/>
+          <p:nvPr/>
+        </p:nvSpPr>
+        <p:spPr>
+          <a:xfrm>
+            <a:off x="502920" y="2267712"/>
+            <a:ext cx="5579211" cy="3328416"/>
+          </a:xfrm>
+          <a:prstGeom prst="rect">
+            <a:avLst/>
+          </a:prstGeom>
+          <a:solidFill>
+            <a:srgbClr val="081438"/>
+          </a:solidFill>
+          <a:ln w="12700">
+            <a:solidFill>
+              <a:srgbClr val="2FDFE5"/>
+            </a:solidFill>
+          </a:ln>
+        </p:spPr>
+        <p:style>
+          <a:lnRef idx="1">
+            <a:schemeClr val="accent1"/>
+          </a:lnRef>
+          <a:fillRef idx="3">
+            <a:schemeClr val="accent1"/>
+          </a:fillRef>
+          <a:effectRef idx="2">
+            <a:schemeClr val="accent1"/>
+          </a:effectRef>
+          <a:fontRef idx="minor">
+            <a:schemeClr val="lt1"/>
+          </a:fontRef>
+        </p:style>
+        <p:txBody>
+          <a:bodyPr rtlCol="0" anchor="ctr"/>
+          <a:lstStyle/>
+          <a:p>
+            <a:pPr algn="ctr"/>
+          </a:p>
+        </p:txBody>
+      </p:sp>
+      <p:sp>
+        <p:nvSpPr>
+          <p:cNvPr id="10" name="Rectangle 9"/>
+          <p:cNvSpPr/>
+          <p:nvPr/>
+        </p:nvSpPr>
+        <p:spPr>
+          <a:xfrm>
+            <a:off x="502920" y="2267712"/>
+            <a:ext cx="5579211" cy="63500"/>
+          </a:xfrm>
+          <a:prstGeom prst="rect">
+            <a:avLst/>
+          </a:prstGeom>
+          <a:solidFill>
+            <a:srgbClr val="2FDFE5"/>
+          </a:solidFill>
+          <a:ln>
+            <a:noFill/>
+          </a:ln>
+        </p:spPr>
+        <p:style>
+          <a:lnRef idx="1">
+            <a:schemeClr val="accent1"/>
+          </a:lnRef>
+          <a:fillRef idx="3">
+            <a:schemeClr val="accent1"/>
+          </a:fillRef>
+          <a:effectRef idx="2">
+            <a:schemeClr val="accent1"/>
+          </a:effectRef>
+          <a:fontRef idx="minor">
+            <a:schemeClr val="lt1"/>
+          </a:fontRef>
+        </p:style>
+        <p:txBody>
+          <a:bodyPr rtlCol="0" anchor="ctr"/>
+          <a:lstStyle/>
+          <a:p>
+            <a:pPr algn="ctr"/>
+          </a:p>
+        </p:txBody>
+      </p:sp>
+      <p:sp>
+        <p:nvSpPr>
+          <p:cNvPr id="11" name="TextBox 10"/>
+          <p:cNvSpPr txBox="1"/>
+          <p:nvPr/>
+        </p:nvSpPr>
+        <p:spPr>
+          <a:xfrm>
+            <a:off x="704088" y="2487168"/>
+            <a:ext cx="5176875" cy="640080"/>
+          </a:xfrm>
+          <a:prstGeom prst="rect">
+            <a:avLst/>
+          </a:prstGeom>
+          <a:noFill/>
+        </p:spPr>
+        <p:txBody lIns="38100" tIns="63500" rIns="38100" bIns="25400">
+          <a:bodyPr wrap="square">
+            <a:spAutoFit/>
+          </a:bodyPr>
+          <a:lstStyle/>
+          <a:p>
+            <a:pPr algn="l"/>
+            <a:r>
+              <a:rPr sz="1900" b="1">
+                <a:solidFill>
+                  <a:srgbClr val="2FDFE5"/>
+                </a:solidFill>
+              </a:rPr>
+              <a:t>3  </a:t>
+            </a:r>
+            <a:r>
+              <a:rPr sz="1900" b="1">
+                <a:solidFill>
+                  <a:srgbClr val="FFFFFF"/>
+                </a:solidFill>
+              </a:rPr>
+              <a:t>Contactación multicanal</a:t>
+            </a:r>
+          </a:p>
+        </p:txBody>
+      </p:sp>
+      <p:sp>
+        <p:nvSpPr>
+          <p:cNvPr id="12" name="Rectangle 11"/>
+          <p:cNvSpPr/>
+          <p:nvPr/>
+        </p:nvSpPr>
+        <p:spPr>
+          <a:xfrm>
+            <a:off x="667512" y="3218688"/>
+            <a:ext cx="5250027" cy="19050"/>
+          </a:xfrm>
+          <a:prstGeom prst="rect">
+            <a:avLst/>
+          </a:prstGeom>
+          <a:solidFill>
+            <a:srgbClr val="13B9BF"/>
+          </a:solidFill>
+          <a:ln>
+            <a:noFill/>
+          </a:ln>
+        </p:spPr>
+        <p:style>
+          <a:lnRef idx="1">
+            <a:schemeClr val="accent1"/>
+          </a:lnRef>
+          <a:fillRef idx="3">
+            <a:schemeClr val="accent1"/>
+          </a:fillRef>
+          <a:effectRef idx="2">
+            <a:schemeClr val="accent1"/>
+          </a:effectRef>
+          <a:fontRef idx="minor">
+            <a:schemeClr val="lt1"/>
+          </a:fontRef>
+        </p:style>
+        <p:txBody>
+          <a:bodyPr rtlCol="0" anchor="ctr"/>
+          <a:lstStyle/>
+          <a:p>
+            <a:pPr algn="ctr"/>
+          </a:p>
+        </p:txBody>
+      </p:sp>
+      <p:sp>
+        <p:nvSpPr>
+          <p:cNvPr id="13" name="TextBox 12"/>
+          <p:cNvSpPr txBox="1"/>
+          <p:nvPr/>
+        </p:nvSpPr>
+        <p:spPr>
+          <a:xfrm>
+            <a:off x="667512" y="3345688"/>
+            <a:ext cx="5250027" cy="2249424"/>
+          </a:xfrm>
+          <a:prstGeom prst="rect">
+            <a:avLst/>
+          </a:prstGeom>
+          <a:noFill/>
+        </p:spPr>
+        <p:txBody lIns="50800" tIns="50800" rIns="50800" bIns="50800">
+          <a:bodyPr wrap="square">
+            <a:spAutoFit/>
+          </a:bodyPr>
+          <a:lstStyle/>
+          <a:p>
+            <a:pPr algn="l">
+              <a:spcBef>
+                <a:spcPts val="1800"/>
+              </a:spcBef>
+            </a:pPr>
+            <a:r>
+              <a:rPr sz="1400">
+                <a:solidFill>
+                  <a:srgbClr val="2FDFE5"/>
+                </a:solidFill>
+              </a:rPr>
+              <a:t>▸  </a:t>
+            </a:r>
+            <a:r>
+              <a:rPr sz="1700">
+                <a:solidFill>
+                  <a:srgbClr val="D8EAFF"/>
+                </a:solidFill>
+              </a:rPr>
+              <a:t>Primeras comunicaciones: teléfono, SMS, email y mensajería</a:t>
+            </a:r>
+          </a:p>
+          <a:p>
+            <a:pPr algn="l">
+              <a:spcBef>
+                <a:spcPts val="1800"/>
+              </a:spcBef>
+            </a:pPr>
+            <a:r>
+              <a:rPr sz="1400">
+                <a:solidFill>
+                  <a:srgbClr val="2FDFE5"/>
+                </a:solidFill>
+              </a:rPr>
+              <a:t>▸  </a:t>
+            </a:r>
+            <a:r>
+              <a:rPr sz="1700">
+                <a:solidFill>
+                  <a:srgbClr val="D8EAFF"/>
+                </a:solidFill>
+              </a:rPr>
+              <a:t>Verificación de datos de contacto y situación del cliente</a:t>
+            </a:r>
+          </a:p>
+          <a:p>
+            <a:pPr algn="l">
+              <a:spcBef>
+                <a:spcPts val="1800"/>
+              </a:spcBef>
+            </a:pPr>
+            <a:r>
+              <a:rPr sz="1400">
+                <a:solidFill>
+                  <a:srgbClr val="2FDFE5"/>
+                </a:solidFill>
+              </a:rPr>
+              <a:t>▸  </a:t>
+            </a:r>
+            <a:r>
+              <a:rPr sz="1700">
+                <a:solidFill>
+                  <a:srgbClr val="D8EAFF"/>
+                </a:solidFill>
+              </a:rPr>
+              <a:t>Búsqueda activa de datos en no contactados o sin localización</a:t>
+            </a:r>
+          </a:p>
+        </p:txBody>
+      </p:sp>
+      <p:sp>
+        <p:nvSpPr>
+          <p:cNvPr id="14" name="Rectangle 13"/>
+          <p:cNvSpPr/>
+          <p:nvPr/>
+        </p:nvSpPr>
+        <p:spPr>
+          <a:xfrm>
+            <a:off x="6283299" y="2267712"/>
+            <a:ext cx="5579211" cy="3328416"/>
+          </a:xfrm>
+          <a:prstGeom prst="rect">
+            <a:avLst/>
+          </a:prstGeom>
+          <a:solidFill>
+            <a:srgbClr val="081438"/>
+          </a:solidFill>
+          <a:ln w="12700">
+            <a:solidFill>
+              <a:srgbClr val="2FDFE5"/>
+            </a:solidFill>
+          </a:ln>
+        </p:spPr>
+        <p:style>
+          <a:lnRef idx="1">
+            <a:schemeClr val="accent1"/>
+          </a:lnRef>
+          <a:fillRef idx="3">
+            <a:schemeClr val="accent1"/>
+          </a:fillRef>
+          <a:effectRef idx="2">
+            <a:schemeClr val="accent1"/>
+          </a:effectRef>
+          <a:fontRef idx="minor">
+            <a:schemeClr val="lt1"/>
+          </a:fontRef>
+        </p:style>
+        <p:txBody>
+          <a:bodyPr rtlCol="0" anchor="ctr"/>
+          <a:lstStyle/>
+          <a:p>
+            <a:pPr algn="ctr"/>
+          </a:p>
+        </p:txBody>
+      </p:sp>
+      <p:sp>
+        <p:nvSpPr>
+          <p:cNvPr id="15" name="Rectangle 14"/>
+          <p:cNvSpPr/>
+          <p:nvPr/>
+        </p:nvSpPr>
+        <p:spPr>
+          <a:xfrm>
+            <a:off x="6283299" y="2267712"/>
+            <a:ext cx="5579211" cy="63500"/>
+          </a:xfrm>
+          <a:prstGeom prst="rect">
+            <a:avLst/>
+          </a:prstGeom>
+          <a:solidFill>
+            <a:srgbClr val="2FDFE5"/>
+          </a:solidFill>
+          <a:ln>
+            <a:noFill/>
+          </a:ln>
+        </p:spPr>
+        <p:style>
+          <a:lnRef idx="1">
+            <a:schemeClr val="accent1"/>
+          </a:lnRef>
+          <a:fillRef idx="3">
+            <a:schemeClr val="accent1"/>
+          </a:fillRef>
+          <a:effectRef idx="2">
+            <a:schemeClr val="accent1"/>
+          </a:effectRef>
+          <a:fontRef idx="minor">
+            <a:schemeClr val="lt1"/>
+          </a:fontRef>
+        </p:style>
+        <p:txBody>
+          <a:bodyPr rtlCol="0" anchor="ctr"/>
+          <a:lstStyle/>
+          <a:p>
+            <a:pPr algn="ctr"/>
+          </a:p>
+        </p:txBody>
+      </p:sp>
+      <p:sp>
+        <p:nvSpPr>
+          <p:cNvPr id="16" name="TextBox 15"/>
+          <p:cNvSpPr txBox="1"/>
+          <p:nvPr/>
+        </p:nvSpPr>
+        <p:spPr>
+          <a:xfrm>
+            <a:off x="6484467" y="2487168"/>
+            <a:ext cx="5176875" cy="640080"/>
+          </a:xfrm>
+          <a:prstGeom prst="rect">
+            <a:avLst/>
+          </a:prstGeom>
+          <a:noFill/>
+        </p:spPr>
+        <p:txBody lIns="38100" tIns="63500" rIns="38100" bIns="25400">
+          <a:bodyPr wrap="square">
+            <a:spAutoFit/>
+          </a:bodyPr>
+          <a:lstStyle/>
+          <a:p>
+            <a:pPr algn="l"/>
+            <a:r>
+              <a:rPr sz="1900" b="1">
+                <a:solidFill>
+                  <a:srgbClr val="2FDFE5"/>
+                </a:solidFill>
+              </a:rPr>
+              <a:t>4  </a:t>
+            </a:r>
+            <a:r>
+              <a:rPr sz="1900" b="1">
+                <a:solidFill>
+                  <a:srgbClr val="FFFFFF"/>
+                </a:solidFill>
+              </a:rPr>
+              <a:t>Acuerdos personalizados</a:t>
+            </a:r>
+          </a:p>
+        </p:txBody>
+      </p:sp>
+      <p:sp>
+        <p:nvSpPr>
+          <p:cNvPr id="17" name="Rectangle 16"/>
+          <p:cNvSpPr/>
+          <p:nvPr/>
+        </p:nvSpPr>
+        <p:spPr>
+          <a:xfrm>
+            <a:off x="6447891" y="3218688"/>
+            <a:ext cx="5250027" cy="19050"/>
+          </a:xfrm>
+          <a:prstGeom prst="rect">
+            <a:avLst/>
+          </a:prstGeom>
+          <a:solidFill>
+            <a:srgbClr val="13B9BF"/>
+          </a:solidFill>
+          <a:ln>
+            <a:noFill/>
+          </a:ln>
+        </p:spPr>
+        <p:style>
+          <a:lnRef idx="1">
+            <a:schemeClr val="accent1"/>
+          </a:lnRef>
+          <a:fillRef idx="3">
+            <a:schemeClr val="accent1"/>
+          </a:fillRef>
+          <a:effectRef idx="2">
+            <a:schemeClr val="accent1"/>
+          </a:effectRef>
+          <a:fontRef idx="minor">
+            <a:schemeClr val="lt1"/>
+          </a:fontRef>
+        </p:style>
+        <p:txBody>
+          <a:bodyPr rtlCol="0" anchor="ctr"/>
+          <a:lstStyle/>
+          <a:p>
+            <a:pPr algn="ctr"/>
+          </a:p>
+        </p:txBody>
+      </p:sp>
+      <p:sp>
+        <p:nvSpPr>
+          <p:cNvPr id="18" name="TextBox 17"/>
+          <p:cNvSpPr txBox="1"/>
+          <p:nvPr/>
+        </p:nvSpPr>
+        <p:spPr>
+          <a:xfrm>
+            <a:off x="6447891" y="3345688"/>
+            <a:ext cx="5250027" cy="2249424"/>
+          </a:xfrm>
+          <a:prstGeom prst="rect">
+            <a:avLst/>
+          </a:prstGeom>
+          <a:noFill/>
+        </p:spPr>
+        <p:txBody lIns="50800" tIns="50800" rIns="50800" bIns="50800">
+          <a:bodyPr wrap="square">
+            <a:spAutoFit/>
+          </a:bodyPr>
+          <a:lstStyle/>
+          <a:p>
+            <a:pPr algn="l">
+              <a:spcBef>
+                <a:spcPts val="1800"/>
+              </a:spcBef>
+            </a:pPr>
+            <a:r>
+              <a:rPr sz="1400">
+                <a:solidFill>
+                  <a:srgbClr val="2FDFE5"/>
+                </a:solidFill>
+              </a:rPr>
+              <a:t>▸  </a:t>
+            </a:r>
+            <a:r>
+              <a:rPr sz="1700">
+                <a:solidFill>
+                  <a:srgbClr val="D8EAFF"/>
+                </a:solidFill>
+              </a:rPr>
+              <a:t>Análisis de la capacidad de pago del deudor</a:t>
+            </a:r>
+          </a:p>
+          <a:p>
+            <a:pPr algn="l">
+              <a:spcBef>
+                <a:spcPts val="1800"/>
+              </a:spcBef>
+            </a:pPr>
+            <a:r>
+              <a:rPr sz="1400">
+                <a:solidFill>
+                  <a:srgbClr val="2FDFE5"/>
+                </a:solidFill>
+              </a:rPr>
+              <a:t>▸  </a:t>
+            </a:r>
+            <a:r>
+              <a:rPr sz="1700">
+                <a:solidFill>
+                  <a:srgbClr val="D8EAFF"/>
+                </a:solidFill>
+              </a:rPr>
+              <a:t>Propuesta de acuerdos personalizados</a:t>
+            </a:r>
+          </a:p>
+          <a:p>
+            <a:pPr algn="l">
+              <a:spcBef>
+                <a:spcPts val="1800"/>
+              </a:spcBef>
+            </a:pPr>
+            <a:r>
+              <a:rPr sz="1400">
+                <a:solidFill>
+                  <a:srgbClr val="2FDFE5"/>
+                </a:solidFill>
+              </a:rPr>
+              <a:t>▸  </a:t>
+            </a:r>
+            <a:r>
+              <a:rPr sz="1700">
+                <a:solidFill>
+                  <a:srgbClr val="D8EAFF"/>
+                </a:solidFill>
+              </a:rPr>
+              <a:t>Formalización y seguimiento de planes de pago</a:t>
+            </a:r>
+          </a:p>
+        </p:txBody>
+      </p:sp>
+    </p:spTree>
+  </p:cSld>
+  <p:clrMapOvr>
+    <a:masterClrMapping/>
+  </p:clrMapOvr>
+  <p:timing>
+    <p:tnLst>
+      <p:par>
+        <p:cTn id="1" dur="indefin" restart="whenNotActive" nodeType="tmRoot">
+          <p:childTnLst>
+            <p:seq concurrent="1" nextAc="seek">
+              <p:cTn id="2" dur="indefin" nodeType="mainSeq">
+                <p:childTnLst>
+                  <p:par>
+                    <p:cTn id="3" fill="hold">
+                      <p:stCondLst>
+                        <p:cond delay="0"/>
+                      </p:stCondLst>
+                      <p:childTnLst>
+                        <p:par>
+                          <p:cTn id="5" fill="hold">
+                            <p:stCondLst>
+                              <p:cond delay="0"/>
+                            </p:stCondLst>
+                            <p:childTnLst>
+                              <p:animEffect transition="in" filter="wipe(up)">
+                                <p:cBhvr>
+                                  <p:cTn id="6" dur="380" fill="hold"/>
+                                  <p:tgtEl>
+                                    <p:spTgt spid="9"/>
+                                  </p:tgtEl>
+                                </p:cBhvr>
+                              </p:animEffect>
+                            </p:childTnLst>
+                          </p:cTn>
+                        </p:par>
+                        <p:par>
+                          <p:cTn id="7" fill="hold">
+                            <p:stCondLst>
+                              <p:cond delay="0"/>
+                            </p:stCondLst>
+                            <p:childTnLst>
+                              <p:animEffect transition="in" filter="wipe(up)">
+                                <p:cBhvr>
+                                  <p:cTn id="8" dur="380" fill="hold"/>
+                                  <p:tgtEl>
+                                    <p:spTgt spid="10"/>
+                                  </p:tgtEl>
+                                </p:cBhvr>
+                              </p:animEffect>
+                            </p:childTnLst>
+                          </p:cTn>
+                        </p:par>
+                        <p:par>
+                          <p:cTn id="9" fill="hold">
+                            <p:stCondLst>
+                              <p:cond delay="0"/>
+                            </p:stCondLst>
+                            <p:childTnLst>
+                              <p:animEffect transition="in" filter="wipe(up)">
+                                <p:cBhvr>
+                                  <p:cTn id="10" dur="380" fill="hold"/>
+                                  <p:tgtEl>
+                                    <p:spTgt spid="11"/>
+                                  </p:tgtEl>
+                                </p:cBhvr>
+                              </p:animEffect>
+                            </p:childTnLst>
+                          </p:cTn>
+                        </p:par>
+                        <p:par>
+                          <p:cTn id="11" fill="hold">
+                            <p:stCondLst>
+                              <p:cond delay="0"/>
+                            </p:stCondLst>
+                            <p:childTnLst>
+                              <p:animEffect transition="in" filter="wipe(up)">
+                                <p:cBhvr>
+                                  <p:cTn id="12" dur="380" fill="hold"/>
+                                  <p:tgtEl>
+                                    <p:spTgt spid="12"/>
+                                  </p:tgtEl>
+                                </p:cBhvr>
+                              </p:animEffect>
+                            </p:childTnLst>
+                          </p:cTn>
+                        </p:par>
+                        <p:par>
+                          <p:cTn id="13" fill="hold">
+                            <p:stCondLst>
+                              <p:cond delay="0"/>
+                            </p:stCondLst>
+                            <p:childTnLst>
+                              <p:animEffect transition="in" filter="wipe(up)">
+                                <p:cBhvr>
+                                  <p:cTn id="14" dur="380" fill="hold"/>
+                                  <p:tgtEl>
+                                    <p:spTgt spid="13"/>
+                                  </p:tgtEl>
+                                </p:cBhvr>
+                              </p:animEffect>
+                            </p:childTnLst>
+                          </p:cTn>
+                        </p:par>
+                        <p:par>
+                          <p:cTn id="15" fill="hold">
+                            <p:stCondLst>
+                              <p:cond delay="160"/>
+                            </p:stCondLst>
+                            <p:childTnLst>
+                              <p:animEffect transition="in" filter="wipe(up)">
+                                <p:cBhvr>
+                                  <p:cTn id="16" dur="380" fill="hold"/>
+                                  <p:tgtEl>
+                                    <p:spTgt spid="14"/>
+                                  </p:tgtEl>
+                                </p:cBhvr>
+                              </p:animEffect>
+                            </p:childTnLst>
+                          </p:cTn>
+                        </p:par>
+                        <p:par>
+                          <p:cTn id="17" fill="hold">
+                            <p:stCondLst>
+                              <p:cond delay="160"/>
+                            </p:stCondLst>
+                            <p:childTnLst>
+                              <p:animEffect transition="in" filter="wipe(up)">
+                                <p:cBhvr>
+                                  <p:cTn id="18" dur="380" fill="hold"/>
+                                  <p:tgtEl>
+                                    <p:spTgt spid="15"/>
+                                  </p:tgtEl>
+                                </p:cBhvr>
+                              </p:animEffect>
+                            </p:childTnLst>
+                          </p:cTn>
+                        </p:par>
+                        <p:par>
+                          <p:cTn id="19" fill="hold">
+                            <p:stCondLst>
+                              <p:cond delay="160"/>
+                            </p:stCondLst>
+                            <p:childTnLst>
+                              <p:animEffect transition="in" filter="wipe(up)">
+                                <p:cBhvr>
+                                  <p:cTn id="20" dur="380" fill="hold"/>
+                                  <p:tgtEl>
+                                    <p:spTgt spid="16"/>
+                                  </p:tgtEl>
+                                </p:cBhvr>
+                              </p:animEffect>
+                            </p:childTnLst>
+                          </p:cTn>
+                        </p:par>
+                        <p:par>
+                          <p:cTn id="21" fill="hold">
+                            <p:stCondLst>
+                              <p:cond delay="160"/>
+                            </p:stCondLst>
+                            <p:childTnLst>
+                              <p:animEffect transition="in" filter="wipe(up)">
+                                <p:cBhvr>
+                                  <p:cTn id="22" dur="380" fill="hold"/>
+                                  <p:tgtEl>
+                                    <p:spTgt spid="17"/>
+                                  </p:tgtEl>
+                                </p:cBhvr>
+                              </p:animEffect>
+                            </p:childTnLst>
+                          </p:cTn>
+                        </p:par>
+                        <p:par>
+                          <p:cTn id="23" fill="hold">
+                            <p:stCondLst>
+                              <p:cond delay="160"/>
+                            </p:stCondLst>
+                            <p:childTnLst>
+                              <p:animEffect transition="in" filter="wipe(up)">
+                                <p:cBhvr>
+                                  <p:cTn id="24" dur="380" fill="hold"/>
+                                  <p:tgtEl>
+                                    <p:spTgt spid="18"/>
+                                  </p:tgtEl>
+                                </p:cBhvr>
+                              </p:animEffect>
+                            </p:childTnLst>
+                          </p:cTn>
+                        </p:par>
+                      </p:childTnLst>
+                    </p:cTn>
+                  </p:par>
+                </p:childTnLst>
+              </p:cTn>
+              <p:prevCondLst>
+                <p:cond evt="onPrevClick" delay="0"/>
+              </p:prevCondLst>
+              <p:nextCondLst>
+                <p:cond evt="onNextClick" delay="0"/>
+              </p:nextCondLst>
+            </p:seq>
+          </p:childTnLst>
+        </p:cTn>
+      </p:par>
+    </p:tnLst>
+  </p:timing>
+  <p:transition dur="550" spd="fast">
+    <p:push dir="u"/>
+  </p:transition>
+</p:sld>
+</file>
+
+<file path=ppt/slides/slide4.xml><?xml version="1.0" encoding="utf-8"?>
+<p:sld xmlns:a="http://schemas.openxmlformats.org/drawingml/2006/main" xmlns:p="http://schemas.openxmlformats.org/presentationml/2006/main" xmlns:r="http://schemas.openxmlformats.org/officeDocument/2006/relationships">
+  <p:cSld>
+    <p:spTree>
+      <p:nvGrpSpPr>
+        <p:cNvPr id="1" name=""/>
+        <p:cNvGrpSpPr/>
+        <p:nvPr/>
+      </p:nvGrpSpPr>
+      <p:grpSpPr/>
+      <p:pic>
+        <p:nvPicPr>
+          <p:cNvPr id="2" name="Picture 1" descr="content_bg.png"/>
+          <p:cNvPicPr>
+            <a:picLocks noChangeAspect="1"/>
+          </p:cNvPicPr>
+          <p:nvPr/>
+        </p:nvPicPr>
+        <p:blipFill>
+          <a:blip r:embed="rId2"/>
+          <a:stretch>
+            <a:fillRect/>
+          </a:stretch>
+        </p:blipFill>
+        <p:spPr>
+          <a:xfrm>
+            <a:off x="0" y="0"/>
+            <a:ext cx="12191695" cy="6858000"/>
+          </a:xfrm>
+          <a:prstGeom prst="rect">
+            <a:avLst/>
+          </a:prstGeom>
+        </p:spPr>
+      </p:pic>
+      <p:sp>
+        <p:nvSpPr>
+          <p:cNvPr id="3" name="Rectangle 2"/>
+          <p:cNvSpPr/>
+          <p:nvPr/>
+        </p:nvSpPr>
+        <p:spPr>
+          <a:xfrm>
+            <a:off x="0" y="0"/>
+            <a:ext cx="12191695" cy="50800"/>
+          </a:xfrm>
+          <a:prstGeom prst="rect">
+            <a:avLst/>
+          </a:prstGeom>
+          <a:solidFill>
+            <a:srgbClr val="2FDFE5"/>
+          </a:solidFill>
+          <a:ln>
+            <a:noFill/>
+          </a:ln>
+        </p:spPr>
+        <p:style>
+          <a:lnRef idx="1">
+            <a:schemeClr val="accent1"/>
+          </a:lnRef>
+          <a:fillRef idx="3">
+            <a:schemeClr val="accent1"/>
+          </a:fillRef>
+          <a:effectRef idx="2">
+            <a:schemeClr val="accent1"/>
+          </a:effectRef>
+          <a:fontRef idx="minor">
+            <a:schemeClr val="lt1"/>
+          </a:fontRef>
+        </p:style>
+        <p:txBody>
+          <a:bodyPr rtlCol="0" anchor="ctr"/>
+          <a:lstStyle/>
+          <a:p>
+            <a:pPr algn="ctr"/>
+          </a:p>
+        </p:txBody>
+      </p:sp>
+      <p:sp>
+        <p:nvSpPr>
+          <p:cNvPr id="4" name="Rectangle 3"/>
+          <p:cNvSpPr/>
+          <p:nvPr/>
+        </p:nvSpPr>
+        <p:spPr>
+          <a:xfrm>
+            <a:off x="0" y="0"/>
+            <a:ext cx="63500" cy="6858000"/>
+          </a:xfrm>
+          <a:prstGeom prst="rect">
+            <a:avLst/>
+          </a:prstGeom>
+          <a:solidFill>
+            <a:srgbClr val="13B9BF"/>
+          </a:solidFill>
+          <a:ln>
+            <a:noFill/>
+          </a:ln>
+        </p:spPr>
+        <p:style>
+          <a:lnRef idx="1">
+            <a:schemeClr val="accent1"/>
+          </a:lnRef>
+          <a:fillRef idx="3">
+            <a:schemeClr val="accent1"/>
+          </a:fillRef>
+          <a:effectRef idx="2">
+            <a:schemeClr val="accent1"/>
+          </a:effectRef>
+          <a:fontRef idx="minor">
+            <a:schemeClr val="lt1"/>
+          </a:fontRef>
+        </p:style>
+        <p:txBody>
+          <a:bodyPr rtlCol="0" anchor="ctr"/>
+          <a:lstStyle/>
+          <a:p>
+            <a:pPr algn="ctr"/>
+          </a:p>
+        </p:txBody>
+      </p:sp>
+      <p:sp>
+        <p:nvSpPr>
+          <p:cNvPr id="5" name="Rectangle 4"/>
+          <p:cNvSpPr/>
+          <p:nvPr/>
+        </p:nvSpPr>
+        <p:spPr>
+          <a:xfrm>
+            <a:off x="502920" y="365760"/>
+            <a:ext cx="1737360" cy="301752"/>
+          </a:xfrm>
+          <a:prstGeom prst="rect">
+            <a:avLst/>
+          </a:prstGeom>
+          <a:solidFill>
+            <a:srgbClr val="2FDFE5"/>
+          </a:solidFill>
+          <a:ln>
+            <a:noFill/>
+          </a:ln>
+        </p:spPr>
+        <p:style>
+          <a:lnRef idx="1">
+            <a:schemeClr val="accent1"/>
+          </a:lnRef>
+          <a:fillRef idx="3">
+            <a:schemeClr val="accent1"/>
+          </a:fillRef>
+          <a:effectRef idx="2">
+            <a:schemeClr val="accent1"/>
+          </a:effectRef>
+          <a:fontRef idx="minor">
+            <a:schemeClr val="lt1"/>
+          </a:fontRef>
+        </p:style>
+        <p:txBody lIns="101600" tIns="25400" rIns="101600" bIns="25400">
+          <a:bodyPr rtlCol="0" anchor="ctr" wrap="none"/>
+          <a:lstStyle/>
+          <a:p>
+            <a:pPr algn="ctr"/>
+            <a:r>
+              <a:rPr sz="1100" b="1">
+                <a:solidFill>
+                  <a:srgbClr val="0A1638"/>
+                </a:solidFill>
+              </a:rPr>
+              <a:t>FASE 3</a:t>
+            </a:r>
+          </a:p>
+        </p:txBody>
+      </p:sp>
+      <p:sp>
+        <p:nvSpPr>
+          <p:cNvPr id="6" name="TextBox 5"/>
+          <p:cNvSpPr txBox="1"/>
+          <p:nvPr/>
+        </p:nvSpPr>
+        <p:spPr>
+          <a:xfrm>
+            <a:off x="502920" y="731520"/>
+            <a:ext cx="8961120" cy="960120"/>
+          </a:xfrm>
+          <a:prstGeom prst="rect">
+            <a:avLst/>
+          </a:prstGeom>
+          <a:noFill/>
+        </p:spPr>
+        <p:txBody lIns="0" tIns="0" rIns="0" bIns="0">
+          <a:bodyPr wrap="square">
+            <a:spAutoFit/>
+          </a:bodyPr>
+          <a:lstStyle/>
+          <a:p>
+            <a:pPr algn="l"/>
+            <a:r>
+              <a:rPr sz="4000" b="1">
+                <a:solidFill>
+                  <a:srgbClr val="FFFFFF"/>
+                </a:solidFill>
+              </a:rPr>
+              <a:t>Gestión </a:t>
+            </a:r>
+            <a:r>
+              <a:rPr sz="4000" b="1">
+                <a:solidFill>
+                  <a:srgbClr val="2FDFE5"/>
+                </a:solidFill>
+              </a:rPr>
+              <a:t>continuada</a:t>
+            </a:r>
+          </a:p>
+        </p:txBody>
+      </p:sp>
+      <p:sp>
+        <p:nvSpPr>
+          <p:cNvPr id="7" name="Rectangle 6"/>
+          <p:cNvSpPr/>
+          <p:nvPr/>
+        </p:nvSpPr>
+        <p:spPr>
+          <a:xfrm>
+            <a:off x="502920" y="1737360"/>
+            <a:ext cx="4389120" cy="31750"/>
+          </a:xfrm>
+          <a:prstGeom prst="rect">
+            <a:avLst/>
+          </a:prstGeom>
+          <a:solidFill>
+            <a:srgbClr val="2FDFE5"/>
+          </a:solidFill>
+          <a:ln>
+            <a:noFill/>
+          </a:ln>
+        </p:spPr>
+        <p:style>
+          <a:lnRef idx="1">
+            <a:schemeClr val="accent1"/>
+          </a:lnRef>
+          <a:fillRef idx="3">
+            <a:schemeClr val="accent1"/>
+          </a:fillRef>
+          <a:effectRef idx="2">
+            <a:schemeClr val="accent1"/>
+          </a:effectRef>
+          <a:fontRef idx="minor">
+            <a:schemeClr val="lt1"/>
+          </a:fontRef>
+        </p:style>
+        <p:txBody>
+          <a:bodyPr rtlCol="0" anchor="ctr"/>
+          <a:lstStyle/>
+          <a:p>
+            <a:pPr algn="ctr"/>
+          </a:p>
+        </p:txBody>
+      </p:sp>
+      <p:sp>
+        <p:nvSpPr>
+          <p:cNvPr id="8" name="TextBox 7"/>
+          <p:cNvSpPr txBox="1"/>
+          <p:nvPr/>
+        </p:nvSpPr>
+        <p:spPr>
+          <a:xfrm>
+            <a:off x="502920" y="1810512"/>
+            <a:ext cx="9265615" cy="384048"/>
+          </a:xfrm>
+          <a:prstGeom prst="rect">
+            <a:avLst/>
+          </a:prstGeom>
+          <a:noFill/>
+        </p:spPr>
+        <p:txBody lIns="0" tIns="0" rIns="0" bIns="0">
+          <a:bodyPr wrap="none">
+            <a:spAutoFit/>
+          </a:bodyPr>
+          <a:lstStyle/>
+          <a:p>
+            <a:pPr algn="l"/>
+            <a:r>
+              <a:rPr sz="1300" i="1">
+                <a:solidFill>
+                  <a:srgbClr val="80A8CC"/>
+                </a:solidFill>
+              </a:rPr>
+              <a:t>El seguimiento constante y la transparencia en el reporting mantienen cada expediente bajo control.</a:t>
+            </a:r>
+          </a:p>
+        </p:txBody>
+      </p:sp>
+      <p:sp>
+        <p:nvSpPr>
+          <p:cNvPr id="9" name="Rectangle 8"/>
+          <p:cNvSpPr/>
+          <p:nvPr/>
+        </p:nvSpPr>
+        <p:spPr>
+          <a:xfrm>
+            <a:off x="502920" y="2267712"/>
+            <a:ext cx="5579211" cy="3328416"/>
+          </a:xfrm>
+          <a:prstGeom prst="rect">
+            <a:avLst/>
+          </a:prstGeom>
+          <a:solidFill>
+            <a:srgbClr val="081438"/>
+          </a:solidFill>
+          <a:ln w="12700">
+            <a:solidFill>
+              <a:srgbClr val="2FDFE5"/>
+            </a:solidFill>
+          </a:ln>
+        </p:spPr>
+        <p:style>
+          <a:lnRef idx="1">
+            <a:schemeClr val="accent1"/>
+          </a:lnRef>
+          <a:fillRef idx="3">
+            <a:schemeClr val="accent1"/>
+          </a:fillRef>
+          <a:effectRef idx="2">
+            <a:schemeClr val="accent1"/>
+          </a:effectRef>
+          <a:fontRef idx="minor">
+            <a:schemeClr val="lt1"/>
+          </a:fontRef>
+        </p:style>
+        <p:txBody>
+          <a:bodyPr rtlCol="0" anchor="ctr"/>
+          <a:lstStyle/>
+          <a:p>
+            <a:pPr algn="ctr"/>
+          </a:p>
+        </p:txBody>
+      </p:sp>
+      <p:sp>
+        <p:nvSpPr>
+          <p:cNvPr id="10" name="Rectangle 9"/>
+          <p:cNvSpPr/>
+          <p:nvPr/>
+        </p:nvSpPr>
+        <p:spPr>
+          <a:xfrm>
+            <a:off x="502920" y="2267712"/>
+            <a:ext cx="5579211" cy="63500"/>
+          </a:xfrm>
+          <a:prstGeom prst="rect">
+            <a:avLst/>
+          </a:prstGeom>
+          <a:solidFill>
+            <a:srgbClr val="2FDFE5"/>
+          </a:solidFill>
+          <a:ln>
+            <a:noFill/>
+          </a:ln>
+        </p:spPr>
+        <p:style>
+          <a:lnRef idx="1">
+            <a:schemeClr val="accent1"/>
+          </a:lnRef>
+          <a:fillRef idx="3">
+            <a:schemeClr val="accent1"/>
+          </a:fillRef>
+          <a:effectRef idx="2">
+            <a:schemeClr val="accent1"/>
+          </a:effectRef>
+          <a:fontRef idx="minor">
+            <a:schemeClr val="lt1"/>
+          </a:fontRef>
+        </p:style>
+        <p:txBody>
+          <a:bodyPr rtlCol="0" anchor="ctr"/>
+          <a:lstStyle/>
+          <a:p>
+            <a:pPr algn="ctr"/>
+          </a:p>
+        </p:txBody>
+      </p:sp>
+      <p:sp>
+        <p:nvSpPr>
+          <p:cNvPr id="11" name="TextBox 10"/>
+          <p:cNvSpPr txBox="1"/>
+          <p:nvPr/>
+        </p:nvSpPr>
+        <p:spPr>
+          <a:xfrm>
+            <a:off x="704088" y="2487168"/>
+            <a:ext cx="5176875" cy="640080"/>
+          </a:xfrm>
+          <a:prstGeom prst="rect">
+            <a:avLst/>
+          </a:prstGeom>
+          <a:noFill/>
+        </p:spPr>
+        <p:txBody lIns="38100" tIns="63500" rIns="38100" bIns="25400">
+          <a:bodyPr wrap="square">
+            <a:spAutoFit/>
+          </a:bodyPr>
+          <a:lstStyle/>
+          <a:p>
+            <a:pPr algn="l"/>
+            <a:r>
+              <a:rPr sz="1900" b="1">
+                <a:solidFill>
+                  <a:srgbClr val="2FDFE5"/>
+                </a:solidFill>
+              </a:rPr>
+              <a:t>5  </a:t>
+            </a:r>
+            <a:r>
+              <a:rPr sz="1900" b="1">
+                <a:solidFill>
+                  <a:srgbClr val="FFFFFF"/>
+                </a:solidFill>
+              </a:rPr>
+              <a:t>Monitorización activa</a:t>
+            </a:r>
+          </a:p>
+        </p:txBody>
+      </p:sp>
+      <p:sp>
+        <p:nvSpPr>
+          <p:cNvPr id="12" name="Rectangle 11"/>
+          <p:cNvSpPr/>
+          <p:nvPr/>
+        </p:nvSpPr>
+        <p:spPr>
+          <a:xfrm>
+            <a:off x="667512" y="3218688"/>
+            <a:ext cx="5250027" cy="19050"/>
+          </a:xfrm>
+          <a:prstGeom prst="rect">
+            <a:avLst/>
+          </a:prstGeom>
+          <a:solidFill>
+            <a:srgbClr val="13B9BF"/>
+          </a:solidFill>
+          <a:ln>
+            <a:noFill/>
+          </a:ln>
+        </p:spPr>
+        <p:style>
+          <a:lnRef idx="1">
+            <a:schemeClr val="accent1"/>
+          </a:lnRef>
+          <a:fillRef idx="3">
+            <a:schemeClr val="accent1"/>
+          </a:fillRef>
+          <a:effectRef idx="2">
+            <a:schemeClr val="accent1"/>
+          </a:effectRef>
+          <a:fontRef idx="minor">
+            <a:schemeClr val="lt1"/>
+          </a:fontRef>
+        </p:style>
+        <p:txBody>
+          <a:bodyPr rtlCol="0" anchor="ctr"/>
+          <a:lstStyle/>
+          <a:p>
+            <a:pPr algn="ctr"/>
+          </a:p>
+        </p:txBody>
+      </p:sp>
+      <p:sp>
+        <p:nvSpPr>
+          <p:cNvPr id="13" name="TextBox 12"/>
+          <p:cNvSpPr txBox="1"/>
+          <p:nvPr/>
+        </p:nvSpPr>
+        <p:spPr>
+          <a:xfrm>
+            <a:off x="667512" y="3345688"/>
+            <a:ext cx="5250027" cy="2249424"/>
+          </a:xfrm>
+          <a:prstGeom prst="rect">
+            <a:avLst/>
+          </a:prstGeom>
+          <a:noFill/>
+        </p:spPr>
+        <p:txBody lIns="50800" tIns="50800" rIns="50800" bIns="50800">
+          <a:bodyPr wrap="square">
+            <a:spAutoFit/>
+          </a:bodyPr>
+          <a:lstStyle/>
+          <a:p>
+            <a:pPr algn="l">
+              <a:spcBef>
+                <a:spcPts val="1800"/>
+              </a:spcBef>
+            </a:pPr>
+            <a:r>
+              <a:rPr sz="1400">
+                <a:solidFill>
+                  <a:srgbClr val="2FDFE5"/>
+                </a:solidFill>
+              </a:rPr>
+              <a:t>▸  </a:t>
+            </a:r>
+            <a:r>
+              <a:rPr sz="1700">
+                <a:solidFill>
+                  <a:srgbClr val="D8EAFF"/>
+                </a:solidFill>
+              </a:rPr>
+              <a:t>Monitorización activa de los acuerdos alcanzados</a:t>
+            </a:r>
+          </a:p>
+          <a:p>
+            <a:pPr algn="l">
+              <a:spcBef>
+                <a:spcPts val="1800"/>
+              </a:spcBef>
+            </a:pPr>
+            <a:r>
+              <a:rPr sz="1400">
+                <a:solidFill>
+                  <a:srgbClr val="2FDFE5"/>
+                </a:solidFill>
+              </a:rPr>
+              <a:t>▸  </a:t>
+            </a:r>
+            <a:r>
+              <a:rPr sz="1700">
+                <a:solidFill>
+                  <a:srgbClr val="D8EAFF"/>
+                </a:solidFill>
+              </a:rPr>
+              <a:t>Recordatorios preventivos de vencimiento</a:t>
+            </a:r>
+          </a:p>
+          <a:p>
+            <a:pPr algn="l">
+              <a:spcBef>
+                <a:spcPts val="1800"/>
+              </a:spcBef>
+            </a:pPr>
+            <a:r>
+              <a:rPr sz="1400">
+                <a:solidFill>
+                  <a:srgbClr val="2FDFE5"/>
+                </a:solidFill>
+              </a:rPr>
+              <a:t>▸  </a:t>
+            </a:r>
+            <a:r>
+              <a:rPr sz="1700">
+                <a:solidFill>
+                  <a:srgbClr val="D8EAFF"/>
+                </a:solidFill>
+              </a:rPr>
+              <a:t>Reactivación inmediata ante incidencias o incumplimientos</a:t>
+            </a:r>
+          </a:p>
+        </p:txBody>
+      </p:sp>
+      <p:sp>
+        <p:nvSpPr>
+          <p:cNvPr id="14" name="Rectangle 13"/>
+          <p:cNvSpPr/>
+          <p:nvPr/>
+        </p:nvSpPr>
+        <p:spPr>
+          <a:xfrm>
+            <a:off x="6283299" y="2267712"/>
+            <a:ext cx="5579211" cy="3328416"/>
+          </a:xfrm>
+          <a:prstGeom prst="rect">
+            <a:avLst/>
+          </a:prstGeom>
+          <a:solidFill>
+            <a:srgbClr val="081438"/>
+          </a:solidFill>
+          <a:ln w="12700">
+            <a:solidFill>
+              <a:srgbClr val="2FDFE5"/>
+            </a:solidFill>
+          </a:ln>
+        </p:spPr>
+        <p:style>
+          <a:lnRef idx="1">
+            <a:schemeClr val="accent1"/>
+          </a:lnRef>
+          <a:fillRef idx="3">
+            <a:schemeClr val="accent1"/>
+          </a:fillRef>
+          <a:effectRef idx="2">
+            <a:schemeClr val="accent1"/>
+          </a:effectRef>
+          <a:fontRef idx="minor">
+            <a:schemeClr val="lt1"/>
+          </a:fontRef>
+        </p:style>
+        <p:txBody>
+          <a:bodyPr rtlCol="0" anchor="ctr"/>
+          <a:lstStyle/>
+          <a:p>
+            <a:pPr algn="ctr"/>
+          </a:p>
+        </p:txBody>
+      </p:sp>
+      <p:sp>
+        <p:nvSpPr>
+          <p:cNvPr id="15" name="Rectangle 14"/>
+          <p:cNvSpPr/>
+          <p:nvPr/>
+        </p:nvSpPr>
+        <p:spPr>
+          <a:xfrm>
+            <a:off x="6283299" y="2267712"/>
+            <a:ext cx="5579211" cy="63500"/>
+          </a:xfrm>
+          <a:prstGeom prst="rect">
+            <a:avLst/>
+          </a:prstGeom>
+          <a:solidFill>
+            <a:srgbClr val="2FDFE5"/>
+          </a:solidFill>
+          <a:ln>
+            <a:noFill/>
+          </a:ln>
+        </p:spPr>
+        <p:style>
+          <a:lnRef idx="1">
+            <a:schemeClr val="accent1"/>
+          </a:lnRef>
+          <a:fillRef idx="3">
+            <a:schemeClr val="accent1"/>
+          </a:fillRef>
+          <a:effectRef idx="2">
+            <a:schemeClr val="accent1"/>
+          </a:effectRef>
+          <a:fontRef idx="minor">
+            <a:schemeClr val="lt1"/>
+          </a:fontRef>
+        </p:style>
+        <p:txBody>
+          <a:bodyPr rtlCol="0" anchor="ctr"/>
+          <a:lstStyle/>
+          <a:p>
+            <a:pPr algn="ctr"/>
+          </a:p>
+        </p:txBody>
+      </p:sp>
+      <p:sp>
+        <p:nvSpPr>
+          <p:cNvPr id="16" name="TextBox 15"/>
+          <p:cNvSpPr txBox="1"/>
+          <p:nvPr/>
+        </p:nvSpPr>
+        <p:spPr>
+          <a:xfrm>
+            <a:off x="6484467" y="2487168"/>
+            <a:ext cx="5176875" cy="640080"/>
+          </a:xfrm>
+          <a:prstGeom prst="rect">
+            <a:avLst/>
+          </a:prstGeom>
+          <a:noFill/>
+        </p:spPr>
+        <p:txBody lIns="38100" tIns="63500" rIns="38100" bIns="25400">
+          <a:bodyPr wrap="square">
+            <a:spAutoFit/>
+          </a:bodyPr>
+          <a:lstStyle/>
+          <a:p>
+            <a:pPr algn="l"/>
+            <a:r>
+              <a:rPr sz="1900" b="1">
+                <a:solidFill>
+                  <a:srgbClr val="2FDFE5"/>
+                </a:solidFill>
+              </a:rPr>
+              <a:t>6  </a:t>
+            </a:r>
+            <a:r>
+              <a:rPr sz="1900" b="1">
+                <a:solidFill>
+                  <a:srgbClr val="FFFFFF"/>
+                </a:solidFill>
+              </a:rPr>
+              <a:t>Reporting y resultados</a:t>
+            </a:r>
+          </a:p>
+        </p:txBody>
+      </p:sp>
+      <p:sp>
+        <p:nvSpPr>
+          <p:cNvPr id="17" name="Rectangle 16"/>
+          <p:cNvSpPr/>
+          <p:nvPr/>
+        </p:nvSpPr>
+        <p:spPr>
+          <a:xfrm>
+            <a:off x="6447891" y="3218688"/>
+            <a:ext cx="5250027" cy="19050"/>
+          </a:xfrm>
+          <a:prstGeom prst="rect">
+            <a:avLst/>
+          </a:prstGeom>
+          <a:solidFill>
+            <a:srgbClr val="13B9BF"/>
+          </a:solidFill>
+          <a:ln>
+            <a:noFill/>
+          </a:ln>
+        </p:spPr>
+        <p:style>
+          <a:lnRef idx="1">
+            <a:schemeClr val="accent1"/>
+          </a:lnRef>
+          <a:fillRef idx="3">
+            <a:schemeClr val="accent1"/>
+          </a:fillRef>
+          <a:effectRef idx="2">
+            <a:schemeClr val="accent1"/>
+          </a:effectRef>
+          <a:fontRef idx="minor">
+            <a:schemeClr val="lt1"/>
+          </a:fontRef>
+        </p:style>
+        <p:txBody>
+          <a:bodyPr rtlCol="0" anchor="ctr"/>
+          <a:lstStyle/>
+          <a:p>
+            <a:pPr algn="ctr"/>
+          </a:p>
+        </p:txBody>
+      </p:sp>
+      <p:sp>
+        <p:nvSpPr>
+          <p:cNvPr id="18" name="TextBox 17"/>
+          <p:cNvSpPr txBox="1"/>
+          <p:nvPr/>
+        </p:nvSpPr>
+        <p:spPr>
+          <a:xfrm>
+            <a:off x="6447891" y="3345688"/>
+            <a:ext cx="5250027" cy="2249424"/>
+          </a:xfrm>
+          <a:prstGeom prst="rect">
+            <a:avLst/>
+          </a:prstGeom>
+          <a:noFill/>
+        </p:spPr>
+        <p:txBody lIns="50800" tIns="50800" rIns="50800" bIns="50800">
+          <a:bodyPr wrap="square">
+            <a:spAutoFit/>
+          </a:bodyPr>
+          <a:lstStyle/>
+          <a:p>
+            <a:pPr algn="l">
+              <a:spcBef>
+                <a:spcPts val="1800"/>
+              </a:spcBef>
+            </a:pPr>
+            <a:r>
+              <a:rPr sz="1400">
+                <a:solidFill>
+                  <a:srgbClr val="2FDFE5"/>
+                </a:solidFill>
+              </a:rPr>
+              <a:t>▸  </a:t>
+            </a:r>
+            <a:r>
+              <a:rPr sz="1700">
+                <a:solidFill>
+                  <a:srgbClr val="D8EAFF"/>
+                </a:solidFill>
+              </a:rPr>
+              <a:t>Actualización permanente del estado de cada expediente</a:t>
+            </a:r>
+          </a:p>
+          <a:p>
+            <a:pPr algn="l">
+              <a:spcBef>
+                <a:spcPts val="1800"/>
+              </a:spcBef>
+            </a:pPr>
+            <a:r>
+              <a:rPr sz="1400">
+                <a:solidFill>
+                  <a:srgbClr val="2FDFE5"/>
+                </a:solidFill>
+              </a:rPr>
+              <a:t>▸  </a:t>
+            </a:r>
+            <a:r>
+              <a:rPr sz="1700">
+                <a:solidFill>
+                  <a:srgbClr val="D8EAFF"/>
+                </a:solidFill>
+              </a:rPr>
+              <a:t>Informes periódicos de actividad y resultados</a:t>
+            </a:r>
+          </a:p>
+          <a:p>
+            <a:pPr algn="l">
+              <a:spcBef>
+                <a:spcPts val="1800"/>
+              </a:spcBef>
+            </a:pPr>
+            <a:r>
+              <a:rPr sz="1400">
+                <a:solidFill>
+                  <a:srgbClr val="2FDFE5"/>
+                </a:solidFill>
+              </a:rPr>
+              <a:t>▸  </a:t>
+            </a:r>
+            <a:r>
+              <a:rPr sz="1700">
+                <a:solidFill>
+                  <a:srgbClr val="D8EAFF"/>
+                </a:solidFill>
+              </a:rPr>
+              <a:t>KPIs de recuperación y productividad</a:t>
+            </a:r>
+          </a:p>
+        </p:txBody>
+      </p:sp>
+    </p:spTree>
+  </p:cSld>
+  <p:clrMapOvr>
+    <a:masterClrMapping/>
+  </p:clrMapOvr>
+  <p:timing>
+    <p:tnLst>
+      <p:par>
+        <p:cTn id="1" dur="indefin" restart="whenNotActive" nodeType="tmRoot">
+          <p:childTnLst>
+            <p:seq concurrent="1" nextAc="seek">
+              <p:cTn id="2" dur="indefin" nodeType="mainSeq">
+                <p:childTnLst>
+                  <p:par>
+                    <p:cTn id="3" fill="hold">
+                      <p:stCondLst>
+                        <p:cond delay="0"/>
+                      </p:stCondLst>
+                      <p:childTnLst>
+                        <p:par>
+                          <p:cTn id="5" fill="hold">
+                            <p:stCondLst>
+                              <p:cond delay="0"/>
+                            </p:stCondLst>
+                            <p:childTnLst>
+                              <p:animEffect transition="in" filter="wipe(up)">
+                                <p:cBhvr>
+                                  <p:cTn id="6" dur="380" fill="hold"/>
+                                  <p:tgtEl>
+                                    <p:spTgt spid="9"/>
+                                  </p:tgtEl>
+                                </p:cBhvr>
+                              </p:animEffect>
+                            </p:childTnLst>
+                          </p:cTn>
+                        </p:par>
+                        <p:par>
+                          <p:cTn id="7" fill="hold">
+                            <p:stCondLst>
+                              <p:cond delay="0"/>
+                            </p:stCondLst>
+                            <p:childTnLst>
+                              <p:animEffect transition="in" filter="wipe(up)">
+                                <p:cBhvr>
+                                  <p:cTn id="8" dur="380" fill="hold"/>
+                                  <p:tgtEl>
+                                    <p:spTgt spid="10"/>
+                                  </p:tgtEl>
+                                </p:cBhvr>
+                              </p:animEffect>
+                            </p:childTnLst>
+                          </p:cTn>
+                        </p:par>
+                        <p:par>
+                          <p:cTn id="9" fill="hold">
+                            <p:stCondLst>
+                              <p:cond delay="0"/>
+                            </p:stCondLst>
+                            <p:childTnLst>
+                              <p:animEffect transition="in" filter="wipe(up)">
+                                <p:cBhvr>
+                                  <p:cTn id="10" dur="380" fill="hold"/>
+                                  <p:tgtEl>
+                                    <p:spTgt spid="11"/>
+                                  </p:tgtEl>
+                                </p:cBhvr>
+                              </p:animEffect>
+                            </p:childTnLst>
+                          </p:cTn>
+                        </p:par>
+                        <p:par>
+                          <p:cTn id="11" fill="hold">
+                            <p:stCondLst>
+                              <p:cond delay="0"/>
+                            </p:stCondLst>
+                            <p:childTnLst>
+                              <p:animEffect transition="in" filter="wipe(up)">
+                                <p:cBhvr>
+                                  <p:cTn id="12" dur="380" fill="hold"/>
+                                  <p:tgtEl>
+                                    <p:spTgt spid="12"/>
+                                  </p:tgtEl>
+                                </p:cBhvr>
+                              </p:animEffect>
+                            </p:childTnLst>
+                          </p:cTn>
+                        </p:par>
+                        <p:par>
+                          <p:cTn id="13" fill="hold">
+                            <p:stCondLst>
+                              <p:cond delay="0"/>
+                            </p:stCondLst>
+                            <p:childTnLst>
+                              <p:animEffect transition="in" filter="wipe(up)">
+                                <p:cBhvr>
+                                  <p:cTn id="14" dur="380" fill="hold"/>
+                                  <p:tgtEl>
+                                    <p:spTgt spid="13"/>
+                                  </p:tgtEl>
+                                </p:cBhvr>
+                              </p:animEffect>
+                            </p:childTnLst>
+                          </p:cTn>
+                        </p:par>
+                        <p:par>
+                          <p:cTn id="15" fill="hold">
+                            <p:stCondLst>
+                              <p:cond delay="160"/>
+                            </p:stCondLst>
+                            <p:childTnLst>
+                              <p:animEffect transition="in" filter="wipe(up)">
+                                <p:cBhvr>
+                                  <p:cTn id="16" dur="380" fill="hold"/>
+                                  <p:tgtEl>
+                                    <p:spTgt spid="14"/>
+                                  </p:tgtEl>
+                                </p:cBhvr>
+                              </p:animEffect>
+                            </p:childTnLst>
+                          </p:cTn>
+                        </p:par>
+                        <p:par>
+                          <p:cTn id="17" fill="hold">
+                            <p:stCondLst>
+                              <p:cond delay="160"/>
+                            </p:stCondLst>
+                            <p:childTnLst>
+                              <p:animEffect transition="in" filter="wipe(up)">
+                                <p:cBhvr>
+                                  <p:cTn id="18" dur="380" fill="hold"/>
+                                  <p:tgtEl>
+                                    <p:spTgt spid="15"/>
+                                  </p:tgtEl>
+                                </p:cBhvr>
+                              </p:animEffect>
+                            </p:childTnLst>
+                          </p:cTn>
+                        </p:par>
+                        <p:par>
+                          <p:cTn id="19" fill="hold">
+                            <p:stCondLst>
+                              <p:cond delay="160"/>
+                            </p:stCondLst>
+                            <p:childTnLst>
+                              <p:animEffect transition="in" filter="wipe(up)">
+                                <p:cBhvr>
+                                  <p:cTn id="20" dur="380" fill="hold"/>
+                                  <p:tgtEl>
+                                    <p:spTgt spid="16"/>
+                                  </p:tgtEl>
+                                </p:cBhvr>
+                              </p:animEffect>
+                            </p:childTnLst>
+                          </p:cTn>
+                        </p:par>
+                        <p:par>
+                          <p:cTn id="21" fill="hold">
+                            <p:stCondLst>
+                              <p:cond delay="160"/>
+                            </p:stCondLst>
+                            <p:childTnLst>
+                              <p:animEffect transition="in" filter="wipe(up)">
+                                <p:cBhvr>
+                                  <p:cTn id="22" dur="380" fill="hold"/>
+                                  <p:tgtEl>
+                                    <p:spTgt spid="17"/>
+                                  </p:tgtEl>
+                                </p:cBhvr>
+                              </p:animEffect>
+                            </p:childTnLst>
+                          </p:cTn>
+                        </p:par>
+                        <p:par>
+                          <p:cTn id="23" fill="hold">
+                            <p:stCondLst>
+                              <p:cond delay="160"/>
+                            </p:stCondLst>
+                            <p:childTnLst>
+                              <p:animEffect transition="in" filter="wipe(up)">
+                                <p:cBhvr>
+                                  <p:cTn id="24" dur="380" fill="hold"/>
+                                  <p:tgtEl>
+                                    <p:spTgt spid="18"/>
+                                  </p:tgtEl>
+                                </p:cBhvr>
+                              </p:animEffect>
+                            </p:childTnLst>
+                          </p:cTn>
+                        </p:par>
+                      </p:childTnLst>
+                    </p:cTn>
+                  </p:par>
+                </p:childTnLst>
+              </p:cTn>
+              <p:prevCondLst>
+                <p:cond evt="onPrevClick" delay="0"/>
+              </p:prevCondLst>
+              <p:nextCondLst>
+                <p:cond evt="onNextClick" delay="0"/>
+              </p:nextCondLst>
+            </p:seq>
+          </p:childTnLst>
+        </p:cTn>
+      </p:par>
+    </p:tnLst>
+  </p:timing>
+  <p:transition dur="550" spd="fast">
+    <p:push dir="u"/>
+  </p:transition>
+</p:sld>
+</file>
+
+<file path=ppt/slides/slide5.xml><?xml version="1.0" encoding="utf-8"?>
+<p:sld xmlns:a="http://schemas.openxmlformats.org/drawingml/2006/main" xmlns:p="http://schemas.openxmlformats.org/presentationml/2006/main" xmlns:r="http://schemas.openxmlformats.org/officeDocument/2006/relationships">
+  <p:cSld>
+    <p:spTree>
+      <p:nvGrpSpPr>
+        <p:cNvPr id="1" name=""/>
+        <p:cNvGrpSpPr/>
+        <p:nvPr/>
+      </p:nvGrpSpPr>
+      <p:grpSpPr/>
+      <p:pic>
+        <p:nvPicPr>
+          <p:cNvPr id="2" name="Picture 1" descr="content_bg.png"/>
+          <p:cNvPicPr>
+            <a:picLocks noChangeAspect="1"/>
+          </p:cNvPicPr>
+          <p:nvPr/>
+        </p:nvPicPr>
+        <p:blipFill>
+          <a:blip r:embed="rId2"/>
+          <a:stretch>
+            <a:fillRect/>
+          </a:stretch>
+        </p:blipFill>
+        <p:spPr>
+          <a:xfrm>
+            <a:off x="0" y="0"/>
+            <a:ext cx="12191695" cy="6858000"/>
+          </a:xfrm>
+          <a:prstGeom prst="rect">
+            <a:avLst/>
+          </a:prstGeom>
+        </p:spPr>
+      </p:pic>
+      <p:sp>
+        <p:nvSpPr>
+          <p:cNvPr id="3" name="Rectangle 2"/>
+          <p:cNvSpPr/>
+          <p:nvPr/>
+        </p:nvSpPr>
+        <p:spPr>
+          <a:xfrm>
+            <a:off x="0" y="0"/>
+            <a:ext cx="12191695" cy="50800"/>
+          </a:xfrm>
+          <a:prstGeom prst="rect">
+            <a:avLst/>
+          </a:prstGeom>
+          <a:solidFill>
+            <a:srgbClr val="2FDFE5"/>
+          </a:solidFill>
+          <a:ln>
+            <a:noFill/>
+          </a:ln>
+        </p:spPr>
+        <p:style>
+          <a:lnRef idx="1">
+            <a:schemeClr val="accent1"/>
+          </a:lnRef>
+          <a:fillRef idx="3">
+            <a:schemeClr val="accent1"/>
+          </a:fillRef>
+          <a:effectRef idx="2">
+            <a:schemeClr val="accent1"/>
+          </a:effectRef>
+          <a:fontRef idx="minor">
+            <a:schemeClr val="lt1"/>
+          </a:fontRef>
+        </p:style>
+        <p:txBody>
+          <a:bodyPr rtlCol="0" anchor="ctr"/>
+          <a:lstStyle/>
+          <a:p>
+            <a:pPr algn="ctr"/>
+          </a:p>
+        </p:txBody>
+      </p:sp>
+      <p:sp>
+        <p:nvSpPr>
+          <p:cNvPr id="4" name="Rectangle 3"/>
+          <p:cNvSpPr/>
+          <p:nvPr/>
+        </p:nvSpPr>
+        <p:spPr>
+          <a:xfrm>
+            <a:off x="0" y="0"/>
+            <a:ext cx="63500" cy="6858000"/>
+          </a:xfrm>
+          <a:prstGeom prst="rect">
+            <a:avLst/>
+          </a:prstGeom>
+          <a:solidFill>
+            <a:srgbClr val="13B9BF"/>
+          </a:solidFill>
+          <a:ln>
+            <a:noFill/>
+          </a:ln>
+        </p:spPr>
+        <p:style>
+          <a:lnRef idx="1">
+            <a:schemeClr val="accent1"/>
+          </a:lnRef>
+          <a:fillRef idx="3">
+            <a:schemeClr val="accent1"/>
+          </a:fillRef>
+          <a:effectRef idx="2">
+            <a:schemeClr val="accent1"/>
+          </a:effectRef>
+          <a:fontRef idx="minor">
+            <a:schemeClr val="lt1"/>
+          </a:fontRef>
+        </p:style>
+        <p:txBody>
+          <a:bodyPr rtlCol="0" anchor="ctr"/>
+          <a:lstStyle/>
+          <a:p>
+            <a:pPr algn="ctr"/>
+          </a:p>
+        </p:txBody>
+      </p:sp>
+      <p:sp>
+        <p:nvSpPr>
+          <p:cNvPr id="5" name="Rectangle 4"/>
+          <p:cNvSpPr/>
+          <p:nvPr/>
+        </p:nvSpPr>
+        <p:spPr>
+          <a:xfrm>
+            <a:off x="502920" y="365760"/>
+            <a:ext cx="1737360" cy="301752"/>
+          </a:xfrm>
+          <a:prstGeom prst="rect">
+            <a:avLst/>
+          </a:prstGeom>
+          <a:solidFill>
+            <a:srgbClr val="2FDFE5"/>
+          </a:solidFill>
+          <a:ln>
+            <a:noFill/>
+          </a:ln>
+        </p:spPr>
+        <p:style>
+          <a:lnRef idx="1">
+            <a:schemeClr val="accent1"/>
+          </a:lnRef>
+          <a:fillRef idx="3">
+            <a:schemeClr val="accent1"/>
+          </a:fillRef>
+          <a:effectRef idx="2">
+            <a:schemeClr val="accent1"/>
+          </a:effectRef>
+          <a:fontRef idx="minor">
+            <a:schemeClr val="lt1"/>
+          </a:fontRef>
+        </p:style>
+        <p:txBody lIns="101600" tIns="25400" rIns="101600" bIns="25400">
+          <a:bodyPr rtlCol="0" anchor="ctr" wrap="none"/>
+          <a:lstStyle/>
+          <a:p>
+            <a:pPr algn="ctr"/>
+            <a:r>
+              <a:rPr sz="1100" b="1">
+                <a:solidFill>
+                  <a:srgbClr val="0A1638"/>
+                </a:solidFill>
+              </a:rPr>
+              <a:t>FASE 4</a:t>
+            </a:r>
+          </a:p>
+        </p:txBody>
+      </p:sp>
+      <p:sp>
+        <p:nvSpPr>
+          <p:cNvPr id="6" name="TextBox 5"/>
+          <p:cNvSpPr txBox="1"/>
+          <p:nvPr/>
+        </p:nvSpPr>
+        <p:spPr>
+          <a:xfrm>
+            <a:off x="502920" y="731520"/>
+            <a:ext cx="8961120" cy="960120"/>
+          </a:xfrm>
+          <a:prstGeom prst="rect">
+            <a:avLst/>
+          </a:prstGeom>
+          <a:noFill/>
+        </p:spPr>
+        <p:txBody lIns="0" tIns="0" rIns="0" bIns="0">
+          <a:bodyPr wrap="square">
+            <a:spAutoFit/>
+          </a:bodyPr>
+          <a:lstStyle/>
+          <a:p>
+            <a:pPr algn="l"/>
+            <a:r>
+              <a:rPr sz="4000" b="1">
+                <a:solidFill>
+                  <a:srgbClr val="FFFFFF"/>
+                </a:solidFill>
+              </a:rPr>
+              <a:t>Cierre y </a:t>
+            </a:r>
+            <a:r>
+              <a:rPr sz="4000" b="1">
+                <a:solidFill>
+                  <a:srgbClr val="2FDFE5"/>
+                </a:solidFill>
+              </a:rPr>
+              <a:t>condiciones</a:t>
+            </a:r>
+          </a:p>
+        </p:txBody>
+      </p:sp>
+      <p:sp>
+        <p:nvSpPr>
+          <p:cNvPr id="7" name="Rectangle 6"/>
+          <p:cNvSpPr/>
+          <p:nvPr/>
+        </p:nvSpPr>
+        <p:spPr>
+          <a:xfrm>
+            <a:off x="502920" y="1737360"/>
+            <a:ext cx="4389120" cy="31750"/>
+          </a:xfrm>
+          <a:prstGeom prst="rect">
+            <a:avLst/>
+          </a:prstGeom>
+          <a:solidFill>
+            <a:srgbClr val="2FDFE5"/>
+          </a:solidFill>
+          <a:ln>
+            <a:noFill/>
+          </a:ln>
+        </p:spPr>
+        <p:style>
+          <a:lnRef idx="1">
+            <a:schemeClr val="accent1"/>
+          </a:lnRef>
+          <a:fillRef idx="3">
+            <a:schemeClr val="accent1"/>
+          </a:fillRef>
+          <a:effectRef idx="2">
+            <a:schemeClr val="accent1"/>
+          </a:effectRef>
+          <a:fontRef idx="minor">
+            <a:schemeClr val="lt1"/>
+          </a:fontRef>
+        </p:style>
+        <p:txBody>
+          <a:bodyPr rtlCol="0" anchor="ctr"/>
+          <a:lstStyle/>
+          <a:p>
+            <a:pPr algn="ctr"/>
+          </a:p>
+        </p:txBody>
+      </p:sp>
+      <p:sp>
+        <p:nvSpPr>
+          <p:cNvPr id="8" name="TextBox 7"/>
+          <p:cNvSpPr txBox="1"/>
+          <p:nvPr/>
+        </p:nvSpPr>
+        <p:spPr>
+          <a:xfrm>
+            <a:off x="502920" y="1810512"/>
+            <a:ext cx="9265615" cy="384048"/>
+          </a:xfrm>
+          <a:prstGeom prst="rect">
+            <a:avLst/>
+          </a:prstGeom>
+          <a:noFill/>
+        </p:spPr>
+        <p:txBody lIns="0" tIns="0" rIns="0" bIns="0">
+          <a:bodyPr wrap="none">
+            <a:spAutoFit/>
+          </a:bodyPr>
+          <a:lstStyle/>
+          <a:p>
+            <a:pPr algn="l"/>
+            <a:r>
+              <a:rPr sz="1300" i="1">
+                <a:solidFill>
+                  <a:srgbClr val="80A8CC"/>
+                </a:solidFill>
+              </a:rPr>
+              <a:t>Solo facturamos cuando recuperamos: nuestros incentivos están alineados con los de nuestro cliente.</a:t>
+            </a:r>
+          </a:p>
+        </p:txBody>
+      </p:sp>
+      <p:sp>
+        <p:nvSpPr>
+          <p:cNvPr id="9" name="Rectangle 8"/>
+          <p:cNvSpPr/>
+          <p:nvPr/>
+        </p:nvSpPr>
+        <p:spPr>
+          <a:xfrm>
+            <a:off x="502920" y="2267712"/>
+            <a:ext cx="5579211" cy="3328416"/>
+          </a:xfrm>
+          <a:prstGeom prst="rect">
+            <a:avLst/>
+          </a:prstGeom>
+          <a:solidFill>
+            <a:srgbClr val="081438"/>
+          </a:solidFill>
+          <a:ln w="12700">
+            <a:solidFill>
+              <a:srgbClr val="2FDFE5"/>
+            </a:solidFill>
+          </a:ln>
+        </p:spPr>
+        <p:style>
+          <a:lnRef idx="1">
+            <a:schemeClr val="accent1"/>
+          </a:lnRef>
+          <a:fillRef idx="3">
+            <a:schemeClr val="accent1"/>
+          </a:fillRef>
+          <a:effectRef idx="2">
+            <a:schemeClr val="accent1"/>
+          </a:effectRef>
+          <a:fontRef idx="minor">
+            <a:schemeClr val="lt1"/>
+          </a:fontRef>
+        </p:style>
+        <p:txBody>
+          <a:bodyPr rtlCol="0" anchor="ctr"/>
+          <a:lstStyle/>
+          <a:p>
+            <a:pPr algn="ctr"/>
+          </a:p>
+        </p:txBody>
+      </p:sp>
+      <p:sp>
+        <p:nvSpPr>
+          <p:cNvPr id="10" name="Rectangle 9"/>
+          <p:cNvSpPr/>
+          <p:nvPr/>
+        </p:nvSpPr>
+        <p:spPr>
+          <a:xfrm>
+            <a:off x="502920" y="2267712"/>
+            <a:ext cx="5579211" cy="63500"/>
+          </a:xfrm>
+          <a:prstGeom prst="rect">
+            <a:avLst/>
+          </a:prstGeom>
+          <a:solidFill>
+            <a:srgbClr val="2FDFE5"/>
+          </a:solidFill>
+          <a:ln>
+            <a:noFill/>
+          </a:ln>
+        </p:spPr>
+        <p:style>
+          <a:lnRef idx="1">
+            <a:schemeClr val="accent1"/>
+          </a:lnRef>
+          <a:fillRef idx="3">
+            <a:schemeClr val="accent1"/>
+          </a:fillRef>
+          <a:effectRef idx="2">
+            <a:schemeClr val="accent1"/>
+          </a:effectRef>
+          <a:fontRef idx="minor">
+            <a:schemeClr val="lt1"/>
+          </a:fontRef>
+        </p:style>
+        <p:txBody>
+          <a:bodyPr rtlCol="0" anchor="ctr"/>
+          <a:lstStyle/>
+          <a:p>
+            <a:pPr algn="ctr"/>
+          </a:p>
+        </p:txBody>
+      </p:sp>
+      <p:sp>
+        <p:nvSpPr>
+          <p:cNvPr id="11" name="TextBox 10"/>
+          <p:cNvSpPr txBox="1"/>
+          <p:nvPr/>
+        </p:nvSpPr>
+        <p:spPr>
+          <a:xfrm>
+            <a:off x="704088" y="2487168"/>
+            <a:ext cx="5176875" cy="640080"/>
+          </a:xfrm>
+          <a:prstGeom prst="rect">
+            <a:avLst/>
+          </a:prstGeom>
+          <a:noFill/>
+        </p:spPr>
+        <p:txBody lIns="38100" tIns="63500" rIns="38100" bIns="25400">
+          <a:bodyPr wrap="square">
+            <a:spAutoFit/>
+          </a:bodyPr>
+          <a:lstStyle/>
+          <a:p>
+            <a:pPr algn="l"/>
+            <a:r>
+              <a:rPr sz="1900" b="1">
+                <a:solidFill>
+                  <a:srgbClr val="2FDFE5"/>
+                </a:solidFill>
+              </a:rPr>
+              <a:t>7  </a:t>
+            </a:r>
+            <a:r>
+              <a:rPr sz="1900" b="1">
+                <a:solidFill>
+                  <a:srgbClr val="FFFFFF"/>
+                </a:solidFill>
+              </a:rPr>
+              <a:t>Cierre del expediente</a:t>
+            </a:r>
+          </a:p>
+        </p:txBody>
+      </p:sp>
+      <p:sp>
+        <p:nvSpPr>
+          <p:cNvPr id="12" name="Rectangle 11"/>
+          <p:cNvSpPr/>
+          <p:nvPr/>
+        </p:nvSpPr>
+        <p:spPr>
+          <a:xfrm>
+            <a:off x="667512" y="3218688"/>
+            <a:ext cx="5250027" cy="19050"/>
+          </a:xfrm>
+          <a:prstGeom prst="rect">
+            <a:avLst/>
+          </a:prstGeom>
+          <a:solidFill>
+            <a:srgbClr val="13B9BF"/>
+          </a:solidFill>
+          <a:ln>
+            <a:noFill/>
+          </a:ln>
+        </p:spPr>
+        <p:style>
+          <a:lnRef idx="1">
+            <a:schemeClr val="accent1"/>
+          </a:lnRef>
+          <a:fillRef idx="3">
+            <a:schemeClr val="accent1"/>
+          </a:fillRef>
+          <a:effectRef idx="2">
+            <a:schemeClr val="accent1"/>
+          </a:effectRef>
+          <a:fontRef idx="minor">
+            <a:schemeClr val="lt1"/>
+          </a:fontRef>
+        </p:style>
+        <p:txBody>
+          <a:bodyPr rtlCol="0" anchor="ctr"/>
+          <a:lstStyle/>
+          <a:p>
+            <a:pPr algn="ctr"/>
+          </a:p>
+        </p:txBody>
+      </p:sp>
+      <p:sp>
+        <p:nvSpPr>
+          <p:cNvPr id="13" name="TextBox 12"/>
+          <p:cNvSpPr txBox="1"/>
+          <p:nvPr/>
+        </p:nvSpPr>
+        <p:spPr>
+          <a:xfrm>
+            <a:off x="667512" y="3345688"/>
+            <a:ext cx="5250027" cy="2249424"/>
+          </a:xfrm>
+          <a:prstGeom prst="rect">
+            <a:avLst/>
+          </a:prstGeom>
+          <a:noFill/>
+        </p:spPr>
+        <p:txBody lIns="50800" tIns="50800" rIns="50800" bIns="50800">
+          <a:bodyPr wrap="square">
+            <a:spAutoFit/>
+          </a:bodyPr>
+          <a:lstStyle/>
+          <a:p>
+            <a:pPr algn="l">
+              <a:spcBef>
+                <a:spcPts val="1800"/>
+              </a:spcBef>
+            </a:pPr>
+            <a:r>
+              <a:rPr sz="1400">
+                <a:solidFill>
+                  <a:srgbClr val="2FDFE5"/>
+                </a:solidFill>
+              </a:rPr>
+              <a:t>▸  </a:t>
+            </a:r>
+            <a:r>
+              <a:rPr sz="1700">
+                <a:solidFill>
+                  <a:srgbClr val="D8EAFF"/>
+                </a:solidFill>
+              </a:rPr>
+              <a:t>Expedientes recuperados o finalizados</a:t>
+            </a:r>
+          </a:p>
+          <a:p>
+            <a:pPr algn="l">
+              <a:spcBef>
+                <a:spcPts val="1800"/>
+              </a:spcBef>
+            </a:pPr>
+            <a:r>
+              <a:rPr sz="1400">
+                <a:solidFill>
+                  <a:srgbClr val="2FDFE5"/>
+                </a:solidFill>
+              </a:rPr>
+              <a:t>▸  </a:t>
+            </a:r>
+            <a:r>
+              <a:rPr sz="1700">
+                <a:solidFill>
+                  <a:srgbClr val="D8EAFF"/>
+                </a:solidFill>
+              </a:rPr>
+              <a:t>Entrega de resultados y documentación</a:t>
+            </a:r>
+          </a:p>
+          <a:p>
+            <a:pPr algn="l">
+              <a:spcBef>
+                <a:spcPts val="1800"/>
+              </a:spcBef>
+            </a:pPr>
+            <a:r>
+              <a:rPr sz="1400">
+                <a:solidFill>
+                  <a:srgbClr val="2FDFE5"/>
+                </a:solidFill>
+              </a:rPr>
+              <a:t>▸  </a:t>
+            </a:r>
+            <a:r>
+              <a:rPr sz="1700">
+                <a:solidFill>
+                  <a:srgbClr val="D8EAFF"/>
+                </a:solidFill>
+              </a:rPr>
+              <a:t>Análisis de rendimiento y propuestas de mejora continua</a:t>
+            </a:r>
+          </a:p>
+        </p:txBody>
+      </p:sp>
+      <p:sp>
+        <p:nvSpPr>
+          <p:cNvPr id="14" name="Rectangle 13"/>
+          <p:cNvSpPr/>
+          <p:nvPr/>
+        </p:nvSpPr>
+        <p:spPr>
+          <a:xfrm>
+            <a:off x="6283299" y="2267712"/>
+            <a:ext cx="5579211" cy="3328416"/>
+          </a:xfrm>
+          <a:prstGeom prst="rect">
+            <a:avLst/>
+          </a:prstGeom>
+          <a:solidFill>
+            <a:srgbClr val="081438"/>
+          </a:solidFill>
+          <a:ln w="12700">
+            <a:solidFill>
+              <a:srgbClr val="2FDFE5"/>
+            </a:solidFill>
+          </a:ln>
+        </p:spPr>
+        <p:style>
+          <a:lnRef idx="1">
+            <a:schemeClr val="accent1"/>
+          </a:lnRef>
+          <a:fillRef idx="3">
+            <a:schemeClr val="accent1"/>
+          </a:fillRef>
+          <a:effectRef idx="2">
+            <a:schemeClr val="accent1"/>
+          </a:effectRef>
+          <a:fontRef idx="minor">
+            <a:schemeClr val="lt1"/>
+          </a:fontRef>
+        </p:style>
+        <p:txBody>
+          <a:bodyPr rtlCol="0" anchor="ctr"/>
+          <a:lstStyle/>
+          <a:p>
+            <a:pPr algn="ctr"/>
+          </a:p>
+        </p:txBody>
+      </p:sp>
+      <p:sp>
+        <p:nvSpPr>
+          <p:cNvPr id="15" name="Rectangle 14"/>
+          <p:cNvSpPr/>
+          <p:nvPr/>
+        </p:nvSpPr>
+        <p:spPr>
+          <a:xfrm>
+            <a:off x="6283299" y="2267712"/>
+            <a:ext cx="5579211" cy="63500"/>
+          </a:xfrm>
+          <a:prstGeom prst="rect">
+            <a:avLst/>
+          </a:prstGeom>
+          <a:solidFill>
+            <a:srgbClr val="2FDFE5"/>
+          </a:solidFill>
+          <a:ln>
+            <a:noFill/>
+          </a:ln>
+        </p:spPr>
+        <p:style>
+          <a:lnRef idx="1">
+            <a:schemeClr val="accent1"/>
+          </a:lnRef>
+          <a:fillRef idx="3">
+            <a:schemeClr val="accent1"/>
+          </a:fillRef>
+          <a:effectRef idx="2">
+            <a:schemeClr val="accent1"/>
+          </a:effectRef>
+          <a:fontRef idx="minor">
+            <a:schemeClr val="lt1"/>
+          </a:fontRef>
+        </p:style>
+        <p:txBody>
+          <a:bodyPr rtlCol="0" anchor="ctr"/>
+          <a:lstStyle/>
+          <a:p>
+            <a:pPr algn="ctr"/>
+          </a:p>
+        </p:txBody>
+      </p:sp>
+      <p:sp>
+        <p:nvSpPr>
+          <p:cNvPr id="16" name="TextBox 15"/>
+          <p:cNvSpPr txBox="1"/>
+          <p:nvPr/>
+        </p:nvSpPr>
+        <p:spPr>
+          <a:xfrm>
+            <a:off x="6484467" y="2487168"/>
+            <a:ext cx="5176875" cy="640080"/>
+          </a:xfrm>
+          <a:prstGeom prst="rect">
+            <a:avLst/>
+          </a:prstGeom>
+          <a:noFill/>
+        </p:spPr>
+        <p:txBody lIns="38100" tIns="63500" rIns="38100" bIns="25400">
+          <a:bodyPr wrap="square">
+            <a:spAutoFit/>
+          </a:bodyPr>
+          <a:lstStyle/>
+          <a:p>
+            <a:pPr algn="l"/>
+            <a:r>
+              <a:rPr sz="1900" b="1">
+                <a:solidFill>
+                  <a:srgbClr val="2FDFE5"/>
+                </a:solidFill>
+              </a:rPr>
+              <a:t>8  </a:t>
+            </a:r>
+            <a:r>
+              <a:rPr sz="1900" b="1">
+                <a:solidFill>
+                  <a:srgbClr val="FFFFFF"/>
+                </a:solidFill>
+              </a:rPr>
+              <a:t>Honorarios y condiciones</a:t>
+            </a:r>
+          </a:p>
+        </p:txBody>
+      </p:sp>
+      <p:sp>
+        <p:nvSpPr>
+          <p:cNvPr id="17" name="Rectangle 16"/>
+          <p:cNvSpPr/>
+          <p:nvPr/>
+        </p:nvSpPr>
+        <p:spPr>
+          <a:xfrm>
+            <a:off x="6447891" y="3218688"/>
+            <a:ext cx="5250027" cy="19050"/>
+          </a:xfrm>
+          <a:prstGeom prst="rect">
+            <a:avLst/>
+          </a:prstGeom>
+          <a:solidFill>
+            <a:srgbClr val="13B9BF"/>
+          </a:solidFill>
+          <a:ln>
+            <a:noFill/>
+          </a:ln>
+        </p:spPr>
+        <p:style>
+          <a:lnRef idx="1">
+            <a:schemeClr val="accent1"/>
+          </a:lnRef>
+          <a:fillRef idx="3">
+            <a:schemeClr val="accent1"/>
+          </a:fillRef>
+          <a:effectRef idx="2">
+            <a:schemeClr val="accent1"/>
+          </a:effectRef>
+          <a:fontRef idx="minor">
+            <a:schemeClr val="lt1"/>
+          </a:fontRef>
+        </p:style>
+        <p:txBody>
+          <a:bodyPr rtlCol="0" anchor="ctr"/>
+          <a:lstStyle/>
+          <a:p>
+            <a:pPr algn="ctr"/>
+          </a:p>
+        </p:txBody>
+      </p:sp>
+      <p:sp>
+        <p:nvSpPr>
+          <p:cNvPr id="18" name="TextBox 17"/>
+          <p:cNvSpPr txBox="1"/>
+          <p:nvPr/>
+        </p:nvSpPr>
+        <p:spPr>
+          <a:xfrm>
+            <a:off x="6447891" y="3345688"/>
+            <a:ext cx="5250027" cy="2249424"/>
+          </a:xfrm>
+          <a:prstGeom prst="rect">
+            <a:avLst/>
+          </a:prstGeom>
+          <a:noFill/>
+        </p:spPr>
+        <p:txBody lIns="50800" tIns="50800" rIns="50800" bIns="50800">
+          <a:bodyPr wrap="square">
+            <a:spAutoFit/>
+          </a:bodyPr>
+          <a:lstStyle/>
+          <a:p>
+            <a:pPr algn="l">
+              <a:spcBef>
+                <a:spcPts val="1800"/>
+              </a:spcBef>
+            </a:pPr>
+            <a:r>
+              <a:rPr sz="1400">
+                <a:solidFill>
+                  <a:srgbClr val="2FDFE5"/>
+                </a:solidFill>
+              </a:rPr>
+              <a:t>▸  </a:t>
+            </a:r>
+            <a:r>
+              <a:rPr sz="1700">
+                <a:solidFill>
+                  <a:srgbClr val="D8EAFF"/>
+                </a:solidFill>
+              </a:rPr>
+              <a:t>Servicio de recobro amistoso a éxito</a:t>
+            </a:r>
+          </a:p>
+          <a:p>
+            <a:pPr algn="l">
+              <a:spcBef>
+                <a:spcPts val="1800"/>
+              </a:spcBef>
+            </a:pPr>
+            <a:r>
+              <a:rPr sz="1400">
+                <a:solidFill>
+                  <a:srgbClr val="2FDFE5"/>
+                </a:solidFill>
+              </a:rPr>
+              <a:t>▸  </a:t>
+            </a:r>
+            <a:r>
+              <a:rPr sz="1700">
+                <a:solidFill>
+                  <a:srgbClr val="D8EAFF"/>
+                </a:solidFill>
+              </a:rPr>
+              <a:t>Retribución escalada según tipología de deuda</a:t>
+            </a:r>
+          </a:p>
+          <a:p>
+            <a:pPr algn="l">
+              <a:spcBef>
+                <a:spcPts val="1800"/>
+              </a:spcBef>
+            </a:pPr>
+            <a:r>
+              <a:rPr sz="1400">
+                <a:solidFill>
+                  <a:srgbClr val="2FDFE5"/>
+                </a:solidFill>
+              </a:rPr>
+              <a:t>▸  </a:t>
+            </a:r>
+            <a:r>
+              <a:rPr sz="1700">
+                <a:solidFill>
+                  <a:srgbClr val="D8EAFF"/>
+                </a:solidFill>
+              </a:rPr>
+              <a:t>Sin costes fijos: solo cobramos si recuperamos</a:t>
+            </a:r>
+          </a:p>
+        </p:txBody>
+      </p:sp>
+    </p:spTree>
+  </p:cSld>
+  <p:clrMapOvr>
+    <a:masterClrMapping/>
+  </p:clrMapOvr>
+  <p:timing>
+    <p:tnLst>
+      <p:par>
+        <p:cTn id="1" dur="indefin" restart="whenNotActive" nodeType="tmRoot">
+          <p:childTnLst>
+            <p:seq concurrent="1" nextAc="seek">
+              <p:cTn id="2" dur="indefin" nodeType="mainSeq">
+                <p:childTnLst>
+                  <p:par>
+                    <p:cTn id="3" fill="hold">
+                      <p:stCondLst>
+                        <p:cond delay="0"/>
+                      </p:stCondLst>
+                      <p:childTnLst>
+                        <p:par>
+                          <p:cTn id="5" fill="hold">
+                            <p:stCondLst>
+                              <p:cond delay="0"/>
+                            </p:stCondLst>
+                            <p:childTnLst>
+                              <p:animEffect transition="in" filter="wipe(up)">
+                                <p:cBhvr>
+                                  <p:cTn id="6" dur="380" fill="hold"/>
+                                  <p:tgtEl>
+                                    <p:spTgt spid="9"/>
+                                  </p:tgtEl>
+                                </p:cBhvr>
+                              </p:animEffect>
+                            </p:childTnLst>
+                          </p:cTn>
+                        </p:par>
+                        <p:par>
+                          <p:cTn id="7" fill="hold">
+                            <p:stCondLst>
+                              <p:cond delay="0"/>
+                            </p:stCondLst>
+                            <p:childTnLst>
+                              <p:animEffect transition="in" filter="wipe(up)">
+                                <p:cBhvr>
+                                  <p:cTn id="8" dur="380" fill="hold"/>
+                                  <p:tgtEl>
+                                    <p:spTgt spid="10"/>
+                                  </p:tgtEl>
+                                </p:cBhvr>
+                              </p:animEffect>
+                            </p:childTnLst>
+                          </p:cTn>
+                        </p:par>
+                        <p:par>
+                          <p:cTn id="9" fill="hold">
+                            <p:stCondLst>
+                              <p:cond delay="0"/>
+                            </p:stCondLst>
+                            <p:childTnLst>
+                              <p:animEffect transition="in" filter="wipe(up)">
+                                <p:cBhvr>
+                                  <p:cTn id="10" dur="380" fill="hold"/>
+                                  <p:tgtEl>
+                                    <p:spTgt spid="11"/>
+                                  </p:tgtEl>
+                                </p:cBhvr>
+                              </p:animEffect>
+                            </p:childTnLst>
+                          </p:cTn>
+                        </p:par>
+                        <p:par>
+                          <p:cTn id="11" fill="hold">
+                            <p:stCondLst>
+                              <p:cond delay="0"/>
+                            </p:stCondLst>
+                            <p:childTnLst>
+                              <p:animEffect transition="in" filter="wipe(up)">
+                                <p:cBhvr>
+                                  <p:cTn id="12" dur="380" fill="hold"/>
+                                  <p:tgtEl>
+                                    <p:spTgt spid="12"/>
+                                  </p:tgtEl>
+                                </p:cBhvr>
+                              </p:animEffect>
+                            </p:childTnLst>
+                          </p:cTn>
+                        </p:par>
+                        <p:par>
+                          <p:cTn id="13" fill="hold">
+                            <p:stCondLst>
+                              <p:cond delay="0"/>
+                            </p:stCondLst>
+                            <p:childTnLst>
+                              <p:animEffect transition="in" filter="wipe(up)">
+                                <p:cBhvr>
+                                  <p:cTn id="14" dur="380" fill="hold"/>
+                                  <p:tgtEl>
+                                    <p:spTgt spid="13"/>
+                                  </p:tgtEl>
+                                </p:cBhvr>
+                              </p:animEffect>
+                            </p:childTnLst>
+                          </p:cTn>
+                        </p:par>
+                        <p:par>
+                          <p:cTn id="15" fill="hold">
+                            <p:stCondLst>
+                              <p:cond delay="160"/>
+                            </p:stCondLst>
+                            <p:childTnLst>
+                              <p:animEffect transition="in" filter="wipe(up)">
+                                <p:cBhvr>
+                                  <p:cTn id="16" dur="380" fill="hold"/>
+                                  <p:tgtEl>
+                                    <p:spTgt spid="14"/>
+                                  </p:tgtEl>
+                                </p:cBhvr>
+                              </p:animEffect>
+                            </p:childTnLst>
+                          </p:cTn>
+                        </p:par>
+                        <p:par>
+                          <p:cTn id="17" fill="hold">
+                            <p:stCondLst>
+                              <p:cond delay="160"/>
+                            </p:stCondLst>
+                            <p:childTnLst>
+                              <p:animEffect transition="in" filter="wipe(up)">
+                                <p:cBhvr>
+                                  <p:cTn id="18" dur="380" fill="hold"/>
+                                  <p:tgtEl>
+                                    <p:spTgt spid="15"/>
+                                  </p:tgtEl>
+                                </p:cBhvr>
+                              </p:animEffect>
+                            </p:childTnLst>
+                          </p:cTn>
+                        </p:par>
+                        <p:par>
+                          <p:cTn id="19" fill="hold">
+                            <p:stCondLst>
+                              <p:cond delay="160"/>
+                            </p:stCondLst>
+                            <p:childTnLst>
+                              <p:animEffect transition="in" filter="wipe(up)">
+                                <p:cBhvr>
+                                  <p:cTn id="20" dur="380" fill="hold"/>
+                                  <p:tgtEl>
+                                    <p:spTgt spid="16"/>
+                                  </p:tgtEl>
+                                </p:cBhvr>
+                              </p:animEffect>
+                            </p:childTnLst>
+                          </p:cTn>
+                        </p:par>
+                        <p:par>
+                          <p:cTn id="21" fill="hold">
+                            <p:stCondLst>
+                              <p:cond delay="160"/>
+                            </p:stCondLst>
+                            <p:childTnLst>
+                              <p:animEffect transition="in" filter="wipe(up)">
+                                <p:cBhvr>
+                                  <p:cTn id="22" dur="380" fill="hold"/>
+                                  <p:tgtEl>
+                                    <p:spTgt spid="17"/>
+                                  </p:tgtEl>
+                                </p:cBhvr>
+                              </p:animEffect>
+                            </p:childTnLst>
+                          </p:cTn>
+                        </p:par>
+                        <p:par>
+                          <p:cTn id="23" fill="hold">
+                            <p:stCondLst>
+                              <p:cond delay="160"/>
+                            </p:stCondLst>
+                            <p:childTnLst>
+                              <p:animEffect transition="in" filter="wipe(up)">
+                                <p:cBhvr>
+                                  <p:cTn id="24" dur="380" fill="hold"/>
+                                  <p:tgtEl>
+                                    <p:spTgt spid="18"/>
+                                  </p:tgtEl>
+                                </p:cBhvr>
+                              </p:animEffect>
+                            </p:childTnLst>
+                          </p:cTn>
+                        </p:par>
+                      </p:childTnLst>
+                    </p:cTn>
+                  </p:par>
+                </p:childTnLst>
+              </p:cTn>
+              <p:prevCondLst>
+                <p:cond evt="onPrevClick" delay="0"/>
+              </p:prevCondLst>
+              <p:nextCondLst>
+                <p:cond evt="onNextClick" delay="0"/>
+              </p:nextCondLst>
+            </p:seq>
+          </p:childTnLst>
+        </p:cTn>
+      </p:par>
+    </p:tnLst>
+  </p:timing>
+  <p:transition dur="550" spd="fast">
+    <p:push dir="u"/>
+  </p:transition>
+</p:sld>
+</file>
+
+<file path=ppt/slides/slide6.xml><?xml version="1.0" encoding="utf-8"?>
+<p:sld xmlns:a="http://schemas.openxmlformats.org/drawingml/2006/main" xmlns:p="http://schemas.openxmlformats.org/presentationml/2006/main" xmlns:r="http://schemas.openxmlformats.org/officeDocument/2006/relationships">
+  <p:cSld>
+    <p:spTree>
+      <p:nvGrpSpPr>
+        <p:cNvPr id="1" name=""/>
+        <p:cNvGrpSpPr/>
+        <p:nvPr/>
+      </p:nvGrpSpPr>
+      <p:grpSpPr/>
+      <p:pic>
+        <p:nvPicPr>
+          <p:cNvPr id="2" name="Picture 1" descr="content_bg_nolog.png"/>
+          <p:cNvPicPr>
+            <a:picLocks noChangeAspect="1"/>
+          </p:cNvPicPr>
+          <p:nvPr/>
+        </p:nvPicPr>
+        <p:blipFill>
+          <a:blip r:embed="rId2"/>
+          <a:stretch>
+            <a:fillRect/>
+          </a:stretch>
+        </p:blipFill>
+        <p:spPr>
+          <a:xfrm>
+            <a:off x="0" y="0"/>
+            <a:ext cx="12191695" cy="6858000"/>
+          </a:xfrm>
+          <a:prstGeom prst="rect">
+            <a:avLst/>
+          </a:prstGeom>
+        </p:spPr>
+      </p:pic>
+      <p:sp>
+        <p:nvSpPr>
+          <p:cNvPr id="3" name="Rectangle 2"/>
+          <p:cNvSpPr/>
+          <p:nvPr/>
+        </p:nvSpPr>
+        <p:spPr>
+          <a:xfrm>
+            <a:off x="0" y="0"/>
+            <a:ext cx="12191695" cy="50800"/>
+          </a:xfrm>
+          <a:prstGeom prst="rect">
+            <a:avLst/>
+          </a:prstGeom>
+          <a:solidFill>
+            <a:srgbClr val="2FDFE5"/>
+          </a:solidFill>
+          <a:ln>
+            <a:noFill/>
+          </a:ln>
+        </p:spPr>
+        <p:style>
+          <a:lnRef idx="1">
+            <a:schemeClr val="accent1"/>
+          </a:lnRef>
+          <a:fillRef idx="3">
+            <a:schemeClr val="accent1"/>
+          </a:fillRef>
+          <a:effectRef idx="2">
+            <a:schemeClr val="accent1"/>
+          </a:effectRef>
+          <a:fontRef idx="minor">
+            <a:schemeClr val="lt1"/>
+          </a:fontRef>
+        </p:style>
+        <p:txBody>
+          <a:bodyPr rtlCol="0" anchor="ctr"/>
+          <a:lstStyle/>
+          <a:p>
+            <a:pPr algn="ctr"/>
+          </a:p>
+        </p:txBody>
+      </p:sp>
+      <p:sp>
+        <p:nvSpPr>
+          <p:cNvPr id="4" name="Rectangle 3"/>
+          <p:cNvSpPr/>
+          <p:nvPr/>
+        </p:nvSpPr>
+        <p:spPr>
+          <a:xfrm>
+            <a:off x="0" y="0"/>
+            <a:ext cx="63500" cy="6858000"/>
+          </a:xfrm>
+          <a:prstGeom prst="rect">
+            <a:avLst/>
+          </a:prstGeom>
+          <a:solidFill>
+            <a:srgbClr val="13B9BF"/>
+          </a:solidFill>
+          <a:ln>
+            <a:noFill/>
+          </a:ln>
+        </p:spPr>
+        <p:style>
+          <a:lnRef idx="1">
+            <a:schemeClr val="accent1"/>
+          </a:lnRef>
+          <a:fillRef idx="3">
+            <a:schemeClr val="accent1"/>
+          </a:fillRef>
+          <a:effectRef idx="2">
+            <a:schemeClr val="accent1"/>
+          </a:effectRef>
+          <a:fontRef idx="minor">
+            <a:schemeClr val="lt1"/>
+          </a:fontRef>
+        </p:style>
+        <p:txBody>
+          <a:bodyPr rtlCol="0" anchor="ctr"/>
+          <a:lstStyle/>
+          <a:p>
+            <a:pPr algn="ctr"/>
+          </a:p>
+        </p:txBody>
+      </p:sp>
+      <p:sp>
+        <p:nvSpPr>
+          <p:cNvPr id="5" name="Rectangle 4"/>
+          <p:cNvSpPr/>
+          <p:nvPr/>
+        </p:nvSpPr>
+        <p:spPr>
+          <a:xfrm>
+            <a:off x="502920" y="365760"/>
+            <a:ext cx="1737360" cy="301752"/>
+          </a:xfrm>
+          <a:prstGeom prst="rect">
+            <a:avLst/>
+          </a:prstGeom>
+          <a:solidFill>
+            <a:srgbClr val="2FDFE5"/>
+          </a:solidFill>
+          <a:ln>
+            <a:noFill/>
+          </a:ln>
+        </p:spPr>
+        <p:style>
+          <a:lnRef idx="1">
+            <a:schemeClr val="accent1"/>
+          </a:lnRef>
+          <a:fillRef idx="3">
+            <a:schemeClr val="accent1"/>
+          </a:fillRef>
+          <a:effectRef idx="2">
+            <a:schemeClr val="accent1"/>
+          </a:effectRef>
+          <a:fontRef idx="minor">
+            <a:schemeClr val="lt1"/>
+          </a:fontRef>
+        </p:style>
+        <p:txBody lIns="101600" tIns="25400" rIns="101600" bIns="25400">
+          <a:bodyPr rtlCol="0" anchor="ctr" wrap="none"/>
+          <a:lstStyle/>
+          <a:p>
+            <a:pPr algn="ctr"/>
+            <a:r>
+              <a:rPr sz="1100" b="1">
+                <a:solidFill>
+                  <a:srgbClr val="0A1638"/>
+                </a:solidFill>
+              </a:rPr>
+              <a:t>FASE 5</a:t>
+            </a:r>
+          </a:p>
+        </p:txBody>
+      </p:sp>
+      <p:sp>
+        <p:nvSpPr>
+          <p:cNvPr id="6" name="TextBox 5"/>
+          <p:cNvSpPr txBox="1"/>
+          <p:nvPr/>
+        </p:nvSpPr>
+        <p:spPr>
+          <a:xfrm>
+            <a:off x="502920" y="731520"/>
+            <a:ext cx="8961120" cy="960120"/>
+          </a:xfrm>
+          <a:prstGeom prst="rect">
+            <a:avLst/>
+          </a:prstGeom>
+          <a:noFill/>
+        </p:spPr>
+        <p:txBody lIns="0" tIns="0" rIns="0" bIns="0">
+          <a:bodyPr wrap="square">
+            <a:spAutoFit/>
+          </a:bodyPr>
+          <a:lstStyle/>
+          <a:p>
+            <a:pPr algn="l"/>
+            <a:r>
+              <a:rPr sz="4000" b="1">
+                <a:solidFill>
+                  <a:srgbClr val="FFFFFF"/>
+                </a:solidFill>
+              </a:rPr>
+              <a:t>Servicios </a:t>
+            </a:r>
+            <a:r>
+              <a:rPr sz="4000" b="1">
+                <a:solidFill>
+                  <a:srgbClr val="2FDFE5"/>
+                </a:solidFill>
+              </a:rPr>
+              <a:t>adicionales</a:t>
+            </a:r>
+          </a:p>
+        </p:txBody>
+      </p:sp>
+      <p:sp>
+        <p:nvSpPr>
+          <p:cNvPr id="7" name="Rectangle 6"/>
+          <p:cNvSpPr/>
+          <p:nvPr/>
+        </p:nvSpPr>
+        <p:spPr>
+          <a:xfrm>
+            <a:off x="502920" y="1737360"/>
+            <a:ext cx="4389120" cy="31750"/>
+          </a:xfrm>
+          <a:prstGeom prst="rect">
+            <a:avLst/>
+          </a:prstGeom>
+          <a:solidFill>
+            <a:srgbClr val="2FDFE5"/>
+          </a:solidFill>
+          <a:ln>
+            <a:noFill/>
+          </a:ln>
+        </p:spPr>
+        <p:style>
+          <a:lnRef idx="1">
+            <a:schemeClr val="accent1"/>
+          </a:lnRef>
+          <a:fillRef idx="3">
+            <a:schemeClr val="accent1"/>
+          </a:fillRef>
+          <a:effectRef idx="2">
+            <a:schemeClr val="accent1"/>
+          </a:effectRef>
+          <a:fontRef idx="minor">
+            <a:schemeClr val="lt1"/>
+          </a:fontRef>
+        </p:style>
+        <p:txBody>
+          <a:bodyPr rtlCol="0" anchor="ctr"/>
+          <a:lstStyle/>
+          <a:p>
+            <a:pPr algn="ctr"/>
+          </a:p>
+        </p:txBody>
+      </p:sp>
+      <p:sp>
+        <p:nvSpPr>
+          <p:cNvPr id="8" name="Rectangle 7"/>
+          <p:cNvSpPr/>
+          <p:nvPr/>
+        </p:nvSpPr>
+        <p:spPr>
+          <a:xfrm>
+            <a:off x="502920" y="1920240"/>
+            <a:ext cx="5579211" cy="1993392"/>
+          </a:xfrm>
+          <a:prstGeom prst="rect">
+            <a:avLst/>
+          </a:prstGeom>
+          <a:solidFill>
+            <a:srgbClr val="081438"/>
+          </a:solidFill>
+          <a:ln w="12700">
+            <a:solidFill>
+              <a:srgbClr val="2FDFE5"/>
+            </a:solidFill>
+          </a:ln>
+        </p:spPr>
+        <p:style>
+          <a:lnRef idx="1">
+            <a:schemeClr val="accent1"/>
+          </a:lnRef>
+          <a:fillRef idx="3">
+            <a:schemeClr val="accent1"/>
+          </a:fillRef>
+          <a:effectRef idx="2">
+            <a:schemeClr val="accent1"/>
+          </a:effectRef>
+          <a:fontRef idx="minor">
+            <a:schemeClr val="lt1"/>
+          </a:fontRef>
+        </p:style>
+        <p:txBody>
+          <a:bodyPr rtlCol="0" anchor="ctr"/>
+          <a:lstStyle/>
+          <a:p>
+            <a:pPr algn="ctr"/>
+          </a:p>
+        </p:txBody>
+      </p:sp>
+      <p:sp>
+        <p:nvSpPr>
+          <p:cNvPr id="9" name="Rectangle 8"/>
+          <p:cNvSpPr/>
+          <p:nvPr/>
+        </p:nvSpPr>
+        <p:spPr>
+          <a:xfrm>
+            <a:off x="502920" y="1920240"/>
+            <a:ext cx="5579211" cy="63500"/>
+          </a:xfrm>
+          <a:prstGeom prst="rect">
+            <a:avLst/>
+          </a:prstGeom>
+          <a:solidFill>
+            <a:srgbClr val="2FDFE5"/>
+          </a:solidFill>
+          <a:ln>
+            <a:noFill/>
+          </a:ln>
+        </p:spPr>
+        <p:style>
+          <a:lnRef idx="1">
+            <a:schemeClr val="accent1"/>
+          </a:lnRef>
+          <a:fillRef idx="3">
+            <a:schemeClr val="accent1"/>
+          </a:fillRef>
+          <a:effectRef idx="2">
+            <a:schemeClr val="accent1"/>
+          </a:effectRef>
+          <a:fontRef idx="minor">
+            <a:schemeClr val="lt1"/>
+          </a:fontRef>
+        </p:style>
+        <p:txBody>
+          <a:bodyPr rtlCol="0" anchor="ctr"/>
+          <a:lstStyle/>
+          <a:p>
+            <a:pPr algn="ctr"/>
+          </a:p>
+        </p:txBody>
+      </p:sp>
+      <p:sp>
+        <p:nvSpPr>
+          <p:cNvPr id="10" name="TextBox 9"/>
+          <p:cNvSpPr txBox="1"/>
+          <p:nvPr/>
+        </p:nvSpPr>
+        <p:spPr>
+          <a:xfrm>
+            <a:off x="685800" y="2103120"/>
+            <a:ext cx="5213451" cy="585216"/>
+          </a:xfrm>
+          <a:prstGeom prst="rect">
+            <a:avLst/>
+          </a:prstGeom>
+          <a:noFill/>
+        </p:spPr>
+        <p:txBody lIns="38100" tIns="63500" rIns="38100" bIns="25400">
+          <a:bodyPr wrap="square">
+            <a:spAutoFit/>
+          </a:bodyPr>
+          <a:lstStyle/>
+          <a:p>
+            <a:pPr algn="l"/>
+            <a:r>
+              <a:rPr sz="1700" b="1">
+                <a:solidFill>
+                  <a:srgbClr val="2FDFE5"/>
+                </a:solidFill>
+              </a:rPr>
+              <a:t>1  </a:t>
+            </a:r>
+            <a:r>
+              <a:rPr sz="1700" b="1">
+                <a:solidFill>
+                  <a:srgbClr val="FFFFFF"/>
+                </a:solidFill>
+              </a:rPr>
+              <a:t>Vía monitoria</a:t>
+            </a:r>
+          </a:p>
+        </p:txBody>
+      </p:sp>
+      <p:sp>
+        <p:nvSpPr>
+          <p:cNvPr id="11" name="Rectangle 10"/>
+          <p:cNvSpPr/>
+          <p:nvPr/>
+        </p:nvSpPr>
+        <p:spPr>
+          <a:xfrm>
+            <a:off x="649224" y="2779776"/>
+            <a:ext cx="5286603" cy="19050"/>
+          </a:xfrm>
+          <a:prstGeom prst="rect">
+            <a:avLst/>
+          </a:prstGeom>
+          <a:solidFill>
+            <a:srgbClr val="13B9BF"/>
+          </a:solidFill>
+          <a:ln>
+            <a:noFill/>
+          </a:ln>
+        </p:spPr>
+        <p:style>
+          <a:lnRef idx="1">
+            <a:schemeClr val="accent1"/>
+          </a:lnRef>
+          <a:fillRef idx="3">
+            <a:schemeClr val="accent1"/>
+          </a:fillRef>
+          <a:effectRef idx="2">
+            <a:schemeClr val="accent1"/>
+          </a:effectRef>
+          <a:fontRef idx="minor">
+            <a:schemeClr val="lt1"/>
+          </a:fontRef>
+        </p:style>
+        <p:txBody>
+          <a:bodyPr rtlCol="0" anchor="ctr"/>
+          <a:lstStyle/>
+          <a:p>
+            <a:pPr algn="ctr"/>
+          </a:p>
+        </p:txBody>
+      </p:sp>
+      <p:sp>
+        <p:nvSpPr>
+          <p:cNvPr id="12" name="TextBox 11"/>
+          <p:cNvSpPr txBox="1"/>
+          <p:nvPr/>
+        </p:nvSpPr>
+        <p:spPr>
+          <a:xfrm>
+            <a:off x="649224" y="2881376"/>
+            <a:ext cx="5286603" cy="1005840"/>
+          </a:xfrm>
+          <a:prstGeom prst="rect">
+            <a:avLst/>
+          </a:prstGeom>
+          <a:noFill/>
+        </p:spPr>
+        <p:txBody lIns="50800" tIns="50800" rIns="50800" bIns="50800">
+          <a:bodyPr wrap="square">
+            <a:spAutoFit/>
+          </a:bodyPr>
+          <a:lstStyle/>
+          <a:p>
+            <a:pPr algn="l"/>
+            <a:r>
+              <a:rPr sz="1500">
+                <a:solidFill>
+                  <a:srgbClr val="D8EAFF"/>
+                </a:solidFill>
+              </a:rPr>
+              <a:t>Tramitación de procedimientos monitorios para reclamar la deuda por vía judicial cuando la vía amistosa no es suficiente.</a:t>
+            </a:r>
+          </a:p>
+        </p:txBody>
+      </p:sp>
+      <p:sp>
+        <p:nvSpPr>
+          <p:cNvPr id="13" name="Rectangle 12"/>
+          <p:cNvSpPr/>
+          <p:nvPr/>
+        </p:nvSpPr>
+        <p:spPr>
+          <a:xfrm>
+            <a:off x="6283299" y="1920240"/>
+            <a:ext cx="5579211" cy="1993392"/>
+          </a:xfrm>
+          <a:prstGeom prst="rect">
+            <a:avLst/>
+          </a:prstGeom>
+          <a:solidFill>
+            <a:srgbClr val="081438"/>
+          </a:solidFill>
+          <a:ln w="12700">
+            <a:solidFill>
+              <a:srgbClr val="2FDFE5"/>
+            </a:solidFill>
+          </a:ln>
+        </p:spPr>
+        <p:style>
+          <a:lnRef idx="1">
+            <a:schemeClr val="accent1"/>
+          </a:lnRef>
+          <a:fillRef idx="3">
+            <a:schemeClr val="accent1"/>
+          </a:fillRef>
+          <a:effectRef idx="2">
+            <a:schemeClr val="accent1"/>
+          </a:effectRef>
+          <a:fontRef idx="minor">
+            <a:schemeClr val="lt1"/>
+          </a:fontRef>
+        </p:style>
+        <p:txBody>
+          <a:bodyPr rtlCol="0" anchor="ctr"/>
+          <a:lstStyle/>
+          <a:p>
+            <a:pPr algn="ctr"/>
+          </a:p>
+        </p:txBody>
+      </p:sp>
+      <p:sp>
+        <p:nvSpPr>
+          <p:cNvPr id="14" name="Rectangle 13"/>
+          <p:cNvSpPr/>
+          <p:nvPr/>
+        </p:nvSpPr>
+        <p:spPr>
+          <a:xfrm>
+            <a:off x="6283299" y="1920240"/>
+            <a:ext cx="5579211" cy="63500"/>
+          </a:xfrm>
+          <a:prstGeom prst="rect">
+            <a:avLst/>
+          </a:prstGeom>
+          <a:solidFill>
+            <a:srgbClr val="2FDFE5"/>
+          </a:solidFill>
+          <a:ln>
+            <a:noFill/>
+          </a:ln>
+        </p:spPr>
+        <p:style>
+          <a:lnRef idx="1">
+            <a:schemeClr val="accent1"/>
+          </a:lnRef>
+          <a:fillRef idx="3">
+            <a:schemeClr val="accent1"/>
+          </a:fillRef>
+          <a:effectRef idx="2">
+            <a:schemeClr val="accent1"/>
+          </a:effectRef>
+          <a:fontRef idx="minor">
+            <a:schemeClr val="lt1"/>
+          </a:fontRef>
+        </p:style>
+        <p:txBody>
+          <a:bodyPr rtlCol="0" anchor="ctr"/>
+          <a:lstStyle/>
+          <a:p>
+            <a:pPr algn="ctr"/>
+          </a:p>
+        </p:txBody>
+      </p:sp>
+      <p:sp>
+        <p:nvSpPr>
+          <p:cNvPr id="15" name="TextBox 14"/>
+          <p:cNvSpPr txBox="1"/>
+          <p:nvPr/>
+        </p:nvSpPr>
+        <p:spPr>
+          <a:xfrm>
+            <a:off x="6466179" y="2103120"/>
+            <a:ext cx="5213451" cy="585216"/>
+          </a:xfrm>
+          <a:prstGeom prst="rect">
+            <a:avLst/>
+          </a:prstGeom>
+          <a:noFill/>
+        </p:spPr>
+        <p:txBody lIns="38100" tIns="63500" rIns="38100" bIns="25400">
+          <a:bodyPr wrap="square">
+            <a:spAutoFit/>
+          </a:bodyPr>
+          <a:lstStyle/>
+          <a:p>
+            <a:pPr algn="l"/>
+            <a:r>
+              <a:rPr sz="1700" b="1">
+                <a:solidFill>
+                  <a:srgbClr val="2FDFE5"/>
+                </a:solidFill>
+              </a:rPr>
+              <a:t>2  </a:t>
+            </a:r>
+            <a:r>
+              <a:rPr sz="1700" b="1">
+                <a:solidFill>
+                  <a:srgbClr val="FFFFFF"/>
+                </a:solidFill>
+              </a:rPr>
+              <a:t>Valoración y compra de carteras</a:t>
+            </a:r>
+          </a:p>
+        </p:txBody>
+      </p:sp>
+      <p:sp>
+        <p:nvSpPr>
+          <p:cNvPr id="16" name="Rectangle 15"/>
+          <p:cNvSpPr/>
+          <p:nvPr/>
+        </p:nvSpPr>
+        <p:spPr>
+          <a:xfrm>
+            <a:off x="6429603" y="2779776"/>
+            <a:ext cx="5286603" cy="19050"/>
+          </a:xfrm>
+          <a:prstGeom prst="rect">
+            <a:avLst/>
+          </a:prstGeom>
+          <a:solidFill>
+            <a:srgbClr val="13B9BF"/>
+          </a:solidFill>
+          <a:ln>
+            <a:noFill/>
+          </a:ln>
+        </p:spPr>
+        <p:style>
+          <a:lnRef idx="1">
+            <a:schemeClr val="accent1"/>
+          </a:lnRef>
+          <a:fillRef idx="3">
+            <a:schemeClr val="accent1"/>
+          </a:fillRef>
+          <a:effectRef idx="2">
+            <a:schemeClr val="accent1"/>
+          </a:effectRef>
+          <a:fontRef idx="minor">
+            <a:schemeClr val="lt1"/>
+          </a:fontRef>
+        </p:style>
+        <p:txBody>
+          <a:bodyPr rtlCol="0" anchor="ctr"/>
+          <a:lstStyle/>
+          <a:p>
+            <a:pPr algn="ctr"/>
+          </a:p>
+        </p:txBody>
+      </p:sp>
+      <p:sp>
+        <p:nvSpPr>
+          <p:cNvPr id="17" name="TextBox 16"/>
+          <p:cNvSpPr txBox="1"/>
+          <p:nvPr/>
+        </p:nvSpPr>
+        <p:spPr>
+          <a:xfrm>
+            <a:off x="6429603" y="2881376"/>
+            <a:ext cx="5286603" cy="1005840"/>
+          </a:xfrm>
+          <a:prstGeom prst="rect">
+            <a:avLst/>
+          </a:prstGeom>
+          <a:noFill/>
+        </p:spPr>
+        <p:txBody lIns="50800" tIns="50800" rIns="50800" bIns="50800">
+          <a:bodyPr wrap="square">
+            <a:spAutoFit/>
+          </a:bodyPr>
+          <a:lstStyle/>
+          <a:p>
+            <a:pPr algn="l"/>
+            <a:r>
+              <a:rPr sz="1500">
+                <a:solidFill>
+                  <a:srgbClr val="D8EAFF"/>
+                </a:solidFill>
+              </a:rPr>
+              <a:t>Análisis, valoración y adquisición de carteras de deuda fallida para maximizar la recuperación de activos.</a:t>
+            </a:r>
+          </a:p>
+        </p:txBody>
+      </p:sp>
+      <p:sp>
+        <p:nvSpPr>
+          <p:cNvPr id="18" name="Rectangle 17"/>
+          <p:cNvSpPr/>
+          <p:nvPr/>
+        </p:nvSpPr>
+        <p:spPr>
+          <a:xfrm>
+            <a:off x="502920" y="4059936"/>
+            <a:ext cx="5579211" cy="1993392"/>
+          </a:xfrm>
+          <a:prstGeom prst="rect">
+            <a:avLst/>
+          </a:prstGeom>
+          <a:solidFill>
+            <a:srgbClr val="081438"/>
+          </a:solidFill>
+          <a:ln w="12700">
+            <a:solidFill>
+              <a:srgbClr val="2FDFE5"/>
+            </a:solidFill>
+          </a:ln>
+        </p:spPr>
+        <p:style>
+          <a:lnRef idx="1">
+            <a:schemeClr val="accent1"/>
+          </a:lnRef>
+          <a:fillRef idx="3">
+            <a:schemeClr val="accent1"/>
+          </a:fillRef>
+          <a:effectRef idx="2">
+            <a:schemeClr val="accent1"/>
+          </a:effectRef>
+          <a:fontRef idx="minor">
+            <a:schemeClr val="lt1"/>
+          </a:fontRef>
+        </p:style>
+        <p:txBody>
+          <a:bodyPr rtlCol="0" anchor="ctr"/>
+          <a:lstStyle/>
+          <a:p>
+            <a:pPr algn="ctr"/>
+          </a:p>
+        </p:txBody>
+      </p:sp>
+      <p:sp>
+        <p:nvSpPr>
+          <p:cNvPr id="19" name="Rectangle 18"/>
+          <p:cNvSpPr/>
+          <p:nvPr/>
+        </p:nvSpPr>
+        <p:spPr>
+          <a:xfrm>
+            <a:off x="502920" y="4059936"/>
+            <a:ext cx="5579211" cy="63500"/>
+          </a:xfrm>
+          <a:prstGeom prst="rect">
+            <a:avLst/>
+          </a:prstGeom>
+          <a:solidFill>
+            <a:srgbClr val="2FDFE5"/>
+          </a:solidFill>
+          <a:ln>
+            <a:noFill/>
+          </a:ln>
+        </p:spPr>
+        <p:style>
+          <a:lnRef idx="1">
+            <a:schemeClr val="accent1"/>
+          </a:lnRef>
+          <a:fillRef idx="3">
+            <a:schemeClr val="accent1"/>
+          </a:fillRef>
+          <a:effectRef idx="2">
+            <a:schemeClr val="accent1"/>
+          </a:effectRef>
+          <a:fontRef idx="minor">
+            <a:schemeClr val="lt1"/>
+          </a:fontRef>
+        </p:style>
+        <p:txBody>
+          <a:bodyPr rtlCol="0" anchor="ctr"/>
+          <a:lstStyle/>
+          <a:p>
+            <a:pPr algn="ctr"/>
+          </a:p>
+        </p:txBody>
+      </p:sp>
+      <p:sp>
+        <p:nvSpPr>
+          <p:cNvPr id="20" name="TextBox 19"/>
+          <p:cNvSpPr txBox="1"/>
+          <p:nvPr/>
+        </p:nvSpPr>
+        <p:spPr>
+          <a:xfrm>
+            <a:off x="685800" y="4242816"/>
+            <a:ext cx="5213451" cy="585216"/>
+          </a:xfrm>
+          <a:prstGeom prst="rect">
+            <a:avLst/>
+          </a:prstGeom>
+          <a:noFill/>
+        </p:spPr>
+        <p:txBody lIns="38100" tIns="63500" rIns="38100" bIns="25400">
+          <a:bodyPr wrap="square">
+            <a:spAutoFit/>
+          </a:bodyPr>
+          <a:lstStyle/>
+          <a:p>
+            <a:pPr algn="l"/>
+            <a:r>
+              <a:rPr sz="1700" b="1">
+                <a:solidFill>
+                  <a:srgbClr val="2FDFE5"/>
+                </a:solidFill>
+              </a:rPr>
+              <a:t>3  </a:t>
+            </a:r>
+            <a:r>
+              <a:rPr sz="1700" b="1">
+                <a:solidFill>
+                  <a:srgbClr val="FFFFFF"/>
+                </a:solidFill>
+              </a:rPr>
+              <a:t>Análisis de solvencia</a:t>
+            </a:r>
+          </a:p>
+        </p:txBody>
+      </p:sp>
+      <p:sp>
+        <p:nvSpPr>
+          <p:cNvPr id="21" name="Rectangle 20"/>
+          <p:cNvSpPr/>
+          <p:nvPr/>
+        </p:nvSpPr>
+        <p:spPr>
+          <a:xfrm>
+            <a:off x="649224" y="4919472"/>
+            <a:ext cx="5286603" cy="19050"/>
+          </a:xfrm>
+          <a:prstGeom prst="rect">
+            <a:avLst/>
+          </a:prstGeom>
+          <a:solidFill>
+            <a:srgbClr val="13B9BF"/>
+          </a:solidFill>
+          <a:ln>
+            <a:noFill/>
+          </a:ln>
+        </p:spPr>
+        <p:style>
+          <a:lnRef idx="1">
+            <a:schemeClr val="accent1"/>
+          </a:lnRef>
+          <a:fillRef idx="3">
+            <a:schemeClr val="accent1"/>
+          </a:fillRef>
+          <a:effectRef idx="2">
+            <a:schemeClr val="accent1"/>
+          </a:effectRef>
+          <a:fontRef idx="minor">
+            <a:schemeClr val="lt1"/>
+          </a:fontRef>
+        </p:style>
+        <p:txBody>
+          <a:bodyPr rtlCol="0" anchor="ctr"/>
+          <a:lstStyle/>
+          <a:p>
+            <a:pPr algn="ctr"/>
+          </a:p>
+        </p:txBody>
+      </p:sp>
+      <p:sp>
+        <p:nvSpPr>
+          <p:cNvPr id="22" name="TextBox 21"/>
+          <p:cNvSpPr txBox="1"/>
+          <p:nvPr/>
+        </p:nvSpPr>
+        <p:spPr>
+          <a:xfrm>
+            <a:off x="649224" y="5021072"/>
+            <a:ext cx="5286603" cy="1005840"/>
+          </a:xfrm>
+          <a:prstGeom prst="rect">
+            <a:avLst/>
+          </a:prstGeom>
+          <a:noFill/>
+        </p:spPr>
+        <p:txBody lIns="50800" tIns="50800" rIns="50800" bIns="50800">
+          <a:bodyPr wrap="square">
+            <a:spAutoFit/>
+          </a:bodyPr>
+          <a:lstStyle/>
+          <a:p>
+            <a:pPr algn="l"/>
+            <a:r>
+              <a:rPr sz="1500">
+                <a:solidFill>
+                  <a:srgbClr val="D8EAFF"/>
+                </a:solidFill>
+              </a:rPr>
+              <a:t>Estudio de la capacidad económica real del deudor para orientar mejor la estrategia de recobro.</a:t>
+            </a:r>
+          </a:p>
+        </p:txBody>
+      </p:sp>
+      <p:sp>
+        <p:nvSpPr>
+          <p:cNvPr id="23" name="Rectangle 22"/>
+          <p:cNvSpPr/>
+          <p:nvPr/>
+        </p:nvSpPr>
+        <p:spPr>
+          <a:xfrm>
+            <a:off x="6283299" y="4059936"/>
+            <a:ext cx="5579211" cy="1993392"/>
+          </a:xfrm>
+          <a:prstGeom prst="rect">
+            <a:avLst/>
+          </a:prstGeom>
+          <a:solidFill>
+            <a:srgbClr val="081438"/>
+          </a:solidFill>
+          <a:ln w="12700">
+            <a:solidFill>
+              <a:srgbClr val="2FDFE5"/>
+            </a:solidFill>
+          </a:ln>
+        </p:spPr>
+        <p:style>
+          <a:lnRef idx="1">
+            <a:schemeClr val="accent1"/>
+          </a:lnRef>
+          <a:fillRef idx="3">
+            <a:schemeClr val="accent1"/>
+          </a:fillRef>
+          <a:effectRef idx="2">
+            <a:schemeClr val="accent1"/>
+          </a:effectRef>
+          <a:fontRef idx="minor">
+            <a:schemeClr val="lt1"/>
+          </a:fontRef>
+        </p:style>
+        <p:txBody>
+          <a:bodyPr rtlCol="0" anchor="ctr"/>
+          <a:lstStyle/>
+          <a:p>
+            <a:pPr algn="ctr"/>
+          </a:p>
+        </p:txBody>
+      </p:sp>
+      <p:sp>
+        <p:nvSpPr>
+          <p:cNvPr id="24" name="Rectangle 23"/>
+          <p:cNvSpPr/>
+          <p:nvPr/>
+        </p:nvSpPr>
+        <p:spPr>
+          <a:xfrm>
+            <a:off x="6283299" y="4059936"/>
+            <a:ext cx="5579211" cy="63500"/>
+          </a:xfrm>
+          <a:prstGeom prst="rect">
+            <a:avLst/>
+          </a:prstGeom>
+          <a:solidFill>
+            <a:srgbClr val="2FDFE5"/>
+          </a:solidFill>
+          <a:ln>
+            <a:noFill/>
+          </a:ln>
+        </p:spPr>
+        <p:style>
+          <a:lnRef idx="1">
+            <a:schemeClr val="accent1"/>
+          </a:lnRef>
+          <a:fillRef idx="3">
+            <a:schemeClr val="accent1"/>
+          </a:fillRef>
+          <a:effectRef idx="2">
+            <a:schemeClr val="accent1"/>
+          </a:effectRef>
+          <a:fontRef idx="minor">
+            <a:schemeClr val="lt1"/>
+          </a:fontRef>
+        </p:style>
+        <p:txBody>
+          <a:bodyPr rtlCol="0" anchor="ctr"/>
+          <a:lstStyle/>
+          <a:p>
+            <a:pPr algn="ctr"/>
+          </a:p>
+        </p:txBody>
+      </p:sp>
+      <p:sp>
+        <p:nvSpPr>
+          <p:cNvPr id="25" name="TextBox 24"/>
+          <p:cNvSpPr txBox="1"/>
+          <p:nvPr/>
+        </p:nvSpPr>
+        <p:spPr>
+          <a:xfrm>
+            <a:off x="6466179" y="4242816"/>
+            <a:ext cx="5213451" cy="585216"/>
+          </a:xfrm>
+          <a:prstGeom prst="rect">
+            <a:avLst/>
+          </a:prstGeom>
+          <a:noFill/>
+        </p:spPr>
+        <p:txBody lIns="38100" tIns="63500" rIns="38100" bIns="25400">
+          <a:bodyPr wrap="square">
+            <a:spAutoFit/>
+          </a:bodyPr>
+          <a:lstStyle/>
+          <a:p>
+            <a:pPr algn="l"/>
+            <a:r>
+              <a:rPr sz="1700" b="1">
+                <a:solidFill>
+                  <a:srgbClr val="2FDFE5"/>
+                </a:solidFill>
+              </a:rPr>
+              <a:t>4  </a:t>
+            </a:r>
+            <a:r>
+              <a:rPr sz="1700" b="1">
+                <a:solidFill>
+                  <a:srgbClr val="FFFFFF"/>
+                </a:solidFill>
+              </a:rPr>
+              <a:t>Sello preventivo Sendacredit</a:t>
+            </a:r>
+          </a:p>
+        </p:txBody>
+      </p:sp>
+      <p:sp>
+        <p:nvSpPr>
+          <p:cNvPr id="26" name="Rectangle 25"/>
+          <p:cNvSpPr/>
+          <p:nvPr/>
+        </p:nvSpPr>
+        <p:spPr>
+          <a:xfrm>
+            <a:off x="6429603" y="4919472"/>
+            <a:ext cx="5286603" cy="19050"/>
+          </a:xfrm>
+          <a:prstGeom prst="rect">
+            <a:avLst/>
+          </a:prstGeom>
+          <a:solidFill>
+            <a:srgbClr val="13B9BF"/>
+          </a:solidFill>
+          <a:ln>
+            <a:noFill/>
+          </a:ln>
+        </p:spPr>
+        <p:style>
+          <a:lnRef idx="1">
+            <a:schemeClr val="accent1"/>
+          </a:lnRef>
+          <a:fillRef idx="3">
+            <a:schemeClr val="accent1"/>
+          </a:fillRef>
+          <a:effectRef idx="2">
+            <a:schemeClr val="accent1"/>
+          </a:effectRef>
+          <a:fontRef idx="minor">
+            <a:schemeClr val="lt1"/>
+          </a:fontRef>
+        </p:style>
+        <p:txBody>
+          <a:bodyPr rtlCol="0" anchor="ctr"/>
+          <a:lstStyle/>
+          <a:p>
+            <a:pPr algn="ctr"/>
+          </a:p>
+        </p:txBody>
+      </p:sp>
+      <p:sp>
+        <p:nvSpPr>
+          <p:cNvPr id="27" name="TextBox 26"/>
+          <p:cNvSpPr txBox="1"/>
+          <p:nvPr/>
+        </p:nvSpPr>
+        <p:spPr>
+          <a:xfrm>
+            <a:off x="6429603" y="5021072"/>
+            <a:ext cx="4079595" cy="1005840"/>
+          </a:xfrm>
+          <a:prstGeom prst="rect">
+            <a:avLst/>
+          </a:prstGeom>
+          <a:noFill/>
+        </p:spPr>
+        <p:txBody lIns="50800" tIns="50800" rIns="50800" bIns="50800">
+          <a:bodyPr wrap="square">
+            <a:spAutoFit/>
+          </a:bodyPr>
+          <a:lstStyle/>
+          <a:p>
+            <a:pPr algn="l"/>
+            <a:r>
+              <a:rPr sz="1500">
+                <a:solidFill>
+                  <a:srgbClr val="D8EAFF"/>
+                </a:solidFill>
+              </a:rPr>
+              <a:t>Siéntase protegido frente a sus impagados.</a:t>
+            </a:r>
+          </a:p>
+        </p:txBody>
+      </p:sp>
+      <p:pic>
+        <p:nvPicPr>
+          <p:cNvPr id="28" name="Picture 27" descr="seal.png"/>
+          <p:cNvPicPr>
+            <a:picLocks noChangeAspect="1"/>
+          </p:cNvPicPr>
+          <p:nvPr/>
+        </p:nvPicPr>
+        <p:blipFill>
+          <a:blip r:embed="rId3"/>
+          <a:stretch>
+            <a:fillRect/>
+          </a:stretch>
+        </p:blipFill>
+        <p:spPr>
+          <a:xfrm>
+            <a:off x="10582351" y="4966208"/>
+            <a:ext cx="1115568" cy="1115568"/>
+          </a:xfrm>
+          <a:prstGeom prst="rect">
+            <a:avLst/>
+          </a:prstGeom>
+        </p:spPr>
+      </p:pic>
+    </p:spTree>
+  </p:cSld>
+  <p:clrMapOvr>
+    <a:masterClrMapping/>
+  </p:clrMapOvr>
+  <p:timing>
+    <p:tnLst>
+      <p:par>
+        <p:cTn id="1" dur="indefin" restart="whenNotActive" nodeType="tmRoot">
+          <p:childTnLst>
+            <p:seq concurrent="1" nextAc="seek">
+              <p:cTn id="2" dur="indefin" nodeType="mainSeq">
+                <p:childTnLst>
+                  <p:par>
+                    <p:cTn id="3" fill="hold">
+                      <p:stCondLst>
+                        <p:cond delay="0"/>
+                      </p:stCondLst>
+                      <p:childTnLst>
+                        <p:par>
+                          <p:cTn id="5" fill="hold">
+                            <p:stCondLst>
+                              <p:cond delay="0"/>
+                            </p:stCondLst>
+                            <p:childTnLst>
+                              <p:animEffect transition="in" filter="wipe(up)">
+                                <p:cBhvr>
+                                  <p:cTn id="6" dur="380" fill="hold"/>
+                                  <p:tgtEl>
+                                    <p:spTgt spid="8"/>
+                                  </p:tgtEl>
+                                </p:cBhvr>
+                              </p:animEffect>
+                            </p:childTnLst>
+                          </p:cTn>
+                        </p:par>
+                        <p:par>
+                          <p:cTn id="7" fill="hold">
+                            <p:stCondLst>
+                              <p:cond delay="0"/>
+                            </p:stCondLst>
+                            <p:childTnLst>
+                              <p:animEffect transition="in" filter="wipe(up)">
+                                <p:cBhvr>
+                                  <p:cTn id="8" dur="380" fill="hold"/>
+                                  <p:tgtEl>
+                                    <p:spTgt spid="9"/>
+                                  </p:tgtEl>
+                                </p:cBhvr>
+                              </p:animEffect>
+                            </p:childTnLst>
+                          </p:cTn>
+                        </p:par>
+                        <p:par>
+                          <p:cTn id="9" fill="hold">
+                            <p:stCondLst>
+                              <p:cond delay="0"/>
+                            </p:stCondLst>
+                            <p:childTnLst>
+                              <p:animEffect transition="in" filter="wipe(up)">
+                                <p:cBhvr>
+                                  <p:cTn id="10" dur="380" fill="hold"/>
+                                  <p:tgtEl>
+                                    <p:spTgt spid="10"/>
+                                  </p:tgtEl>
+                                </p:cBhvr>
+                              </p:animEffect>
+                            </p:childTnLst>
+                          </p:cTn>
+                        </p:par>
+                        <p:par>
+                          <p:cTn id="11" fill="hold">
+                            <p:stCondLst>
+                              <p:cond delay="0"/>
+                            </p:stCondLst>
+                            <p:childTnLst>
+                              <p:animEffect transition="in" filter="wipe(up)">
+                                <p:cBhvr>
+                                  <p:cTn id="12" dur="380" fill="hold"/>
+                                  <p:tgtEl>
+                                    <p:spTgt spid="11"/>
+                                  </p:tgtEl>
+                                </p:cBhvr>
+                              </p:animEffect>
+                            </p:childTnLst>
+                          </p:cTn>
+                        </p:par>
+                        <p:par>
+                          <p:cTn id="13" fill="hold">
+                            <p:stCondLst>
+                              <p:cond delay="0"/>
+                            </p:stCondLst>
+                            <p:childTnLst>
+                              <p:animEffect transition="in" filter="wipe(up)">
+                                <p:cBhvr>
+                                  <p:cTn id="14" dur="380" fill="hold"/>
+                                  <p:tgtEl>
+                                    <p:spTgt spid="12"/>
+                                  </p:tgtEl>
+                                </p:cBhvr>
+                              </p:animEffect>
+                            </p:childTnLst>
+                          </p:cTn>
+                        </p:par>
+                        <p:par>
+                          <p:cTn id="15" fill="hold">
+                            <p:stCondLst>
+                              <p:cond delay="140"/>
+                            </p:stCondLst>
+                            <p:childTnLst>
+                              <p:animEffect transition="in" filter="wipe(up)">
+                                <p:cBhvr>
+                                  <p:cTn id="16" dur="380" fill="hold"/>
+                                  <p:tgtEl>
+                                    <p:spTgt spid="13"/>
+                                  </p:tgtEl>
+                                </p:cBhvr>
+                              </p:animEffect>
+                            </p:childTnLst>
+                          </p:cTn>
+                        </p:par>
+                        <p:par>
+                          <p:cTn id="17" fill="hold">
+                            <p:stCondLst>
+                              <p:cond delay="140"/>
+                            </p:stCondLst>
+                            <p:childTnLst>
+                              <p:animEffect transition="in" filter="wipe(up)">
+                                <p:cBhvr>
+                                  <p:cTn id="18" dur="380" fill="hold"/>
+                                  <p:tgtEl>
+                                    <p:spTgt spid="14"/>
+                                  </p:tgtEl>
+                                </p:cBhvr>
+                              </p:animEffect>
+                            </p:childTnLst>
+                          </p:cTn>
+                        </p:par>
+                        <p:par>
+                          <p:cTn id="19" fill="hold">
+                            <p:stCondLst>
+                              <p:cond delay="140"/>
+                            </p:stCondLst>
+                            <p:childTnLst>
+                              <p:animEffect transition="in" filter="wipe(up)">
+                                <p:cBhvr>
+                                  <p:cTn id="20" dur="380" fill="hold"/>
+                                  <p:tgtEl>
+                                    <p:spTgt spid="15"/>
+                                  </p:tgtEl>
+                                </p:cBhvr>
+                              </p:animEffect>
+                            </p:childTnLst>
+                          </p:cTn>
+                        </p:par>
+                        <p:par>
+                          <p:cTn id="21" fill="hold">
+                            <p:stCondLst>
+                              <p:cond delay="140"/>
+                            </p:stCondLst>
+                            <p:childTnLst>
+                              <p:animEffect transition="in" filter="wipe(up)">
+                                <p:cBhvr>
+                                  <p:cTn id="22" dur="380" fill="hold"/>
+                                  <p:tgtEl>
+                                    <p:spTgt spid="16"/>
+                                  </p:tgtEl>
+                                </p:cBhvr>
+                              </p:animEffect>
+                            </p:childTnLst>
+                          </p:cTn>
+                        </p:par>
+                        <p:par>
+                          <p:cTn id="23" fill="hold">
+                            <p:stCondLst>
                               <p:cond delay="140"/>
                             </p:stCondLst>
                             <p:childTnLst>
@@ -9004,7 +8884,7 @@
                                 <p:cBhvr>
                                   <p:cTn id="24" dur="380" fill="hold"/>
                                   <p:tgtEl>
-                                    <p:spTgt spid="18"/>
+                                    <p:spTgt spid="17"/>
                                   </p:tgtEl>
                                 </p:cBhvr>
                               </p:animEffect>
@@ -9021,7 +8901,7 @@
                                 <p:cBhvr>
                                   <p:cTn id="26" dur="380" fill="hold"/>
                                   <p:tgtEl>
-                                    <p:spTgt spid="19"/>
+                                    <p:spTgt spid="18"/>
                                   </p:tgtEl>
                                 </p:cBhvr>
                               </p:animEffect>
@@ -9038,7 +8918,7 @@
                                 <p:cBhvr>
                                   <p:cTn id="28" dur="380" fill="hold"/>
                                   <p:tgtEl>
-                                    <p:spTgt spid="20"/>
+                                    <p:spTgt spid="19"/>
                                   </p:tgtEl>
                                 </p:cBhvr>
                               </p:animEffect>
@@ -9055,7 +8935,7 @@
                                 <p:cBhvr>
                                   <p:cTn id="30" dur="380" fill="hold"/>
                                   <p:tgtEl>
-                                    <p:spTgt spid="21"/>
+                                    <p:spTgt spid="20"/>
                                   </p:tgtEl>
                                 </p:cBhvr>
                               </p:animEffect>
@@ -9072,7 +8952,7 @@
                                 <p:cBhvr>
                                   <p:cTn id="32" dur="380" fill="hold"/>
                                   <p:tgtEl>
-                                    <p:spTgt spid="22"/>
+                                    <p:spTgt spid="21"/>
                                   </p:tgtEl>
                                 </p:cBhvr>
                               </p:animEffect>
@@ -9089,7 +8969,7 @@
                                 <p:cBhvr>
                                   <p:cTn id="34" dur="380" fill="hold"/>
                                   <p:tgtEl>
-                                    <p:spTgt spid="23"/>
+                                    <p:spTgt spid="22"/>
                                   </p:tgtEl>
                                 </p:cBhvr>
                               </p:animEffect>
@@ -9106,7 +8986,7 @@
                                 <p:cBhvr>
                                   <p:cTn id="36" dur="380" fill="hold"/>
                                   <p:tgtEl>
-                                    <p:spTgt spid="24"/>
+                                    <p:spTgt spid="23"/>
                                   </p:tgtEl>
                                 </p:cBhvr>
                               </p:animEffect>
@@ -9123,7 +9003,7 @@
                                 <p:cBhvr>
                                   <p:cTn id="38" dur="380" fill="hold"/>
                                   <p:tgtEl>
-                                    <p:spTgt spid="25"/>
+                                    <p:spTgt spid="24"/>
                                   </p:tgtEl>
                                 </p:cBhvr>
                               </p:animEffect>
@@ -9140,7 +9020,7 @@
                                 <p:cBhvr>
                                   <p:cTn id="40" dur="380" fill="hold"/>
                                   <p:tgtEl>
-                                    <p:spTgt spid="26"/>
+                                    <p:spTgt spid="25"/>
                                   </p:tgtEl>
                                 </p:cBhvr>
                               </p:animEffect>
@@ -9157,7 +9037,7 @@
                                 <p:cBhvr>
                                   <p:cTn id="42" dur="380" fill="hold"/>
                                   <p:tgtEl>
-                                    <p:spTgt spid="27"/>
+                                    <p:spTgt spid="26"/>
                                   </p:tgtEl>
                                 </p:cBhvr>
                               </p:animEffect>
@@ -9174,7 +9054,7 @@
                                 <p:cBhvr>
                                   <p:cTn id="44" dur="380" fill="hold"/>
                                   <p:tgtEl>
-                                    <p:spTgt spid="28"/>
+                                    <p:spTgt spid="27"/>
                                   </p:tgtEl>
                                 </p:cBhvr>
                               </p:animEffect>

--- a/sendacredit_propuesta.pptx
+++ b/sendacredit_propuesta.pptx
@@ -3278,7 +3278,7 @@
           <a:p>
             <a:pPr algn="l"/>
             <a:r>
-              <a:rPr sz="1000" b="1">
+              <a:rPr sz="1400" b="1">
                 <a:solidFill>
                   <a:srgbClr val="2FDFE5"/>
                 </a:solidFill>
@@ -3411,7 +3411,7 @@
           <a:p>
             <a:pPr algn="l"/>
             <a:r>
-              <a:rPr sz="1150" i="1">
+              <a:rPr sz="1400" i="1">
                 <a:solidFill>
                   <a:srgbClr val="C0E8FF"/>
                 </a:solidFill>
@@ -3746,7 +3746,7 @@
           <a:p>
             <a:pPr algn="l"/>
             <a:r>
-              <a:rPr sz="1300" i="1">
+              <a:rPr sz="1500" i="1">
                 <a:solidFill>
                   <a:srgbClr val="80A8CC"/>
                 </a:solidFill>
@@ -4778,7 +4778,7 @@
           <a:p>
             <a:pPr algn="l"/>
             <a:r>
-              <a:rPr sz="1300" i="1">
+              <a:rPr sz="1500" i="1">
                 <a:solidFill>
                   <a:srgbClr val="80A8CC"/>
                 </a:solidFill>
@@ -5810,7 +5810,7 @@
           <a:p>
             <a:pPr algn="l"/>
             <a:r>
-              <a:rPr sz="1300" i="1">
+              <a:rPr sz="1500" i="1">
                 <a:solidFill>
                   <a:srgbClr val="80A8CC"/>
                 </a:solidFill>
@@ -6842,7 +6842,7 @@
           <a:p>
             <a:pPr algn="l"/>
             <a:r>
-              <a:rPr sz="1300" i="1">
+              <a:rPr sz="1500" i="1">
                 <a:solidFill>
                   <a:srgbClr val="80A8CC"/>
                 </a:solidFill>
@@ -9518,7 +9518,7 @@
                   <a:srgbClr val="2FDFE5"/>
                 </a:solidFill>
               </a:rPr>
-              <a:t>MADRID</a:t>
+              <a:t>BARCELONA</a:t>
             </a:r>
           </a:p>
         </p:txBody>
@@ -9599,7 +9599,7 @@
                   <a:srgbClr val="D8EAFF"/>
                 </a:solidFill>
               </a:rPr>
-              <a:t>Gran Vía 28, 4ª planta</a:t>
+              <a:t>C/Tarragona, 161, 08014 (Barcelona)</a:t>
             </a:r>
           </a:p>
           <a:p>
@@ -9614,7 +9614,7 @@
                   <a:srgbClr val="2FDFE5"/>
                 </a:solidFill>
               </a:rPr>
-              <a:t>91 038 00 81</a:t>
+              <a:t>93 860 36 60</a:t>
             </a:r>
           </a:p>
           <a:p>
@@ -9751,7 +9751,7 @@
                   <a:srgbClr val="2FDFE5"/>
                 </a:solidFill>
               </a:rPr>
-              <a:t>BARCELONA</a:t>
+              <a:t>MADRID</a:t>
             </a:r>
           </a:p>
         </p:txBody>
@@ -9832,7 +9832,7 @@
                   <a:srgbClr val="D8EAFF"/>
                 </a:solidFill>
               </a:rPr>
-              <a:t>Diagonal 211, 3ª planta</a:t>
+              <a:t>C/Paseo de la Castellana, 130, 28046 (Madrid)</a:t>
             </a:r>
           </a:p>
           <a:p>
@@ -9847,7 +9847,7 @@
                   <a:srgbClr val="2FDFE5"/>
                 </a:solidFill>
               </a:rPr>
-              <a:t>93 860 36 60</a:t>
+              <a:t>91 038 00 81</a:t>
             </a:r>
           </a:p>
           <a:p>
@@ -10065,7 +10065,7 @@
                   <a:srgbClr val="D8EAFF"/>
                 </a:solidFill>
               </a:rPr>
-              <a:t>Larios 12, 2ª planta</a:t>
+              <a:t>C/Marqués de Larios, 4, 29005 (Málaga)</a:t>
             </a:r>
           </a:p>
           <a:p>

--- a/sendacredit_propuesta.pptx
+++ b/sendacredit_propuesta.pptx
@@ -3278,7 +3278,7 @@
           <a:p>
             <a:pPr algn="l"/>
             <a:r>
-              <a:rPr sz="1400" b="1">
+              <a:rPr sz="1800" b="1">
                 <a:solidFill>
                   <a:srgbClr val="2FDFE5"/>
                 </a:solidFill>
@@ -3411,7 +3411,7 @@
           <a:p>
             <a:pPr algn="l"/>
             <a:r>
-              <a:rPr sz="1400" i="1">
+              <a:rPr sz="1800" i="1">
                 <a:solidFill>
                   <a:srgbClr val="C0E8FF"/>
                 </a:solidFill>
@@ -3746,7 +3746,7 @@
           <a:p>
             <a:pPr algn="l"/>
             <a:r>
-              <a:rPr sz="1500" i="1">
+              <a:rPr sz="1800" i="1">
                 <a:solidFill>
                   <a:srgbClr val="80A8CC"/>
                 </a:solidFill>
@@ -4778,7 +4778,7 @@
           <a:p>
             <a:pPr algn="l"/>
             <a:r>
-              <a:rPr sz="1500" i="1">
+              <a:rPr sz="1800" i="1">
                 <a:solidFill>
                   <a:srgbClr val="80A8CC"/>
                 </a:solidFill>
@@ -5810,7 +5810,7 @@
           <a:p>
             <a:pPr algn="l"/>
             <a:r>
-              <a:rPr sz="1500" i="1">
+              <a:rPr sz="1800" i="1">
                 <a:solidFill>
                   <a:srgbClr val="80A8CC"/>
                 </a:solidFill>
@@ -6842,7 +6842,7 @@
           <a:p>
             <a:pPr algn="l"/>
             <a:r>
-              <a:rPr sz="1500" i="1">
+              <a:rPr sz="1800" i="1">
                 <a:solidFill>
                   <a:srgbClr val="80A8CC"/>
                 </a:solidFill>

--- a/sendacredit_propuesta.pptx
+++ b/sendacredit_propuesta.pptx
@@ -3395,8 +3395,8 @@
         </p:nvSpPr>
         <p:spPr>
           <a:xfrm>
-            <a:off x="658368" y="4846320"/>
-            <a:ext cx="5303520" cy="475488"/>
+            <a:off x="658368" y="5102352"/>
+            <a:ext cx="4663440" cy="640080"/>
           </a:xfrm>
           <a:prstGeom prst="rect">
             <a:avLst/>

--- a/sendacredit_propuesta.pptx
+++ b/sendacredit_propuesta.pptx
@@ -3970,7 +3970,7 @@
                   <a:srgbClr val="D8EAFF"/>
                 </a:solidFill>
               </a:rPr>
-              <a:t>Recepción de operaciones asignadas por nuestro cliente</a:t>
+              <a:t>Recepción de operaciones asignadas por nuestro cliente (B2B - B2C)</a:t>
             </a:r>
           </a:p>
           <a:p>

--- a/sendacredit_propuesta.pptx
+++ b/sendacredit_propuesta.pptx
@@ -9391,7 +9391,7 @@
           <a:p>
             <a:pPr algn="l"/>
             <a:r>
-              <a:rPr sz="1300" i="1">
+              <a:rPr sz="1800" i="1">
                 <a:solidFill>
                   <a:srgbClr val="C0E8FF"/>
                 </a:solidFill>
@@ -9599,7 +9599,7 @@
                   <a:srgbClr val="D8EAFF"/>
                 </a:solidFill>
               </a:rPr>
-              <a:t>C/Tarragona, 161, 08014 (Barcelona)</a:t>
+              <a:t>C/Tarragona, 161, 08014 Barcelona</a:t>
             </a:r>
           </a:p>
           <a:p>
@@ -9832,7 +9832,7 @@
                   <a:srgbClr val="D8EAFF"/>
                 </a:solidFill>
               </a:rPr>
-              <a:t>C/Paseo de la Castellana, 130, 28046 (Madrid)</a:t>
+              <a:t>C/Paseo de la Castellana, 130, 28046 Madrid</a:t>
             </a:r>
           </a:p>
           <a:p>
@@ -10065,7 +10065,7 @@
                   <a:srgbClr val="D8EAFF"/>
                 </a:solidFill>
               </a:rPr>
-              <a:t>C/Marqués de Larios, 4, 29005 (Málaga)</a:t>
+              <a:t>C/Marqués de Larios, 4, 29005 Málaga</a:t>
             </a:r>
           </a:p>
           <a:p>
@@ -10108,8 +10108,8 @@
         </p:nvSpPr>
         <p:spPr>
           <a:xfrm>
-            <a:off x="502920" y="6437376"/>
-            <a:ext cx="5486400" cy="274320"/>
+            <a:off x="0" y="6382512"/>
+            <a:ext cx="12191695" cy="365760"/>
           </a:xfrm>
           <a:prstGeom prst="rect">
             <a:avLst/>
@@ -10122,9 +10122,9 @@
           </a:bodyPr>
           <a:lstStyle/>
           <a:p>
-            <a:pPr algn="l"/>
-            <a:r>
-              <a:rPr sz="1000">
+            <a:pPr algn="ctr"/>
+            <a:r>
+              <a:rPr sz="1500">
                 <a:solidFill>
                   <a:srgbClr val="2FDFE5"/>
                 </a:solidFill>

--- a/sendacredit_propuesta.pptx
+++ b/sendacredit_propuesta.pptx
@@ -9614,7 +9614,7 @@
                   <a:srgbClr val="2FDFE5"/>
                 </a:solidFill>
               </a:rPr>
-              <a:t>93 860 36 60</a:t>
+              <a:t>93 860 36 60 - 637 39 66 68</a:t>
             </a:r>
           </a:p>
           <a:p>
@@ -9847,7 +9847,7 @@
                   <a:srgbClr val="2FDFE5"/>
                 </a:solidFill>
               </a:rPr>
-              <a:t>91 038 00 81</a:t>
+              <a:t>91 038 00 81 - 604 90 88 51</a:t>
             </a:r>
           </a:p>
           <a:p>
@@ -10080,7 +10080,7 @@
                   <a:srgbClr val="2FDFE5"/>
                 </a:solidFill>
               </a:rPr>
-              <a:t>95 174 57 01</a:t>
+              <a:t>95 174 57 01 - 678 86 02 76</a:t>
             </a:r>
           </a:p>
           <a:p>
